--- a/slides/02 Flappy Bird.pptx
+++ b/slides/02 Flappy Bird.pptx
@@ -48,6 +48,7 @@
     <p:sldId id="293" r:id="rId43"/>
     <p:sldId id="294" r:id="rId44"/>
     <p:sldId id="295" r:id="rId54"/>
+    <p:sldId id="298" r:id="rId57"/>
     <p:sldId id="296" r:id="rId55"/>
     <p:sldId id="297" r:id="rId56"/>
   </p:sldIdLst>
@@ -1020,19 +1021,99 @@
           </a:bodyPr>
           <a:lstStyle/>
           <a:p>
-            <a:pPr indent="0" lvl="0" marL="0" rtl="0" algn="l">
-              <a:spcBef>
-                <a:spcPts val="0"/>
-              </a:spcBef>
-              <a:spcAft>
-                <a:spcPts val="0"/>
-              </a:spcAft>
-              <a:buNone/>
-            </a:pPr>
-            <a:r>
-              <a:t/>
-            </a:r>
-            <a:endParaRPr/>
+            <a:r>
+              <a:t>Full instructions (also on the course site):</a:t>
+            </a:r>
+          </a:p>
+          <a:p>
+            <a:r>
+              <a:t>- Create a MonoGame Game Library project “GMDCore”</a:t>
+            </a:r>
+          </a:p>
+          <a:p>
+            <a:r>
+              <a:t>  - This will be a common core of functionality that we can add to as we create more games</a:t>
+            </a:r>
+          </a:p>
+          <a:p>
+            <a:r>
+              <a:t>  - It is simply a class library with MonoGame installed as a dependency</a:t>
+            </a:r>
+          </a:p>
+          <a:p>
+            <a:r>
+              <a:t>- Create a Core class which derives from the Game class</a:t>
+            </a:r>
+          </a:p>
+          <a:p>
+            <a:r>
+              <a:t>- Add the UpdateScreenScaleMatrix() method from last week to the Core class</a:t>
+            </a:r>
+          </a:p>
+          <a:p>
+            <a:r>
+              <a:t>  - You will need to declare a Matrix field (consider the visibility), as well as fields to store the virtual width and virtual height (they are no longer constants)</a:t>
+            </a:r>
+          </a:p>
+          <a:p>
+            <a:r>
+              <a:t>  - Subscribe the method to the Window.ClientSizeChanged event (like last week)</a:t>
+            </a:r>
+          </a:p>
+          <a:p>
+            <a:r>
+              <a:t>  - Call UpdateScreenScaleMatrix as the game is initialized (like last week)</a:t>
+            </a:r>
+          </a:p>
+          <a:p>
+            <a:r>
+              <a:t>- Add a constructor to the Core class</a:t>
+            </a:r>
+          </a:p>
+          <a:p>
+            <a:r>
+              <a:t>  - It must take these arguments</a:t>
+            </a:r>
+          </a:p>
+          <a:p>
+            <a:r>
+              <a:t>    - string title, int windowWidth, int windowHeight, int virtualWidth, int virtualHeight</a:t>
+            </a:r>
+          </a:p>
+          <a:p>
+            <a:r>
+              <a:t>  - In the constructor, use the provided arguments</a:t>
+            </a:r>
+          </a:p>
+          <a:p>
+            <a:r>
+              <a:t>    - Assign values to virtual width and virtual height fields</a:t>
+            </a:r>
+          </a:p>
+          <a:p>
+            <a:r>
+              <a:t>    - Set the Window.Title property and PreferredBackBufferWidth/Height of the GraphicsDeviceManager</a:t>
+            </a:r>
+          </a:p>
+          <a:p>
+            <a:r>
+              <a:t>- Make the GraphicsDeviceManager and SpriteBatch visible in derived classes</a:t>
+            </a:r>
+          </a:p>
+          <a:p>
+            <a:r>
+              <a:t>  - Consider naming conventions when changing visibility of a field</a:t>
+            </a:r>
+          </a:p>
+          <a:p>
+            <a:r>
+              <a:t>- Move the SpriteBatch initialization to the start of the Initialize() method</a:t>
+            </a:r>
+          </a:p>
+          <a:p>
+            <a:r>
+              <a:t>- Remove the call to GraphicsDevice.Clear() in the Draw method</a:t>
+            </a:r>
           </a:p>
         </p:txBody>
       </p:sp>
@@ -1119,19 +1200,59 @@
           </a:bodyPr>
           <a:lstStyle/>
           <a:p>
-            <a:pPr indent="0" lvl="0" marL="0" rtl="0" algn="l">
-              <a:spcBef>
-                <a:spcPts val="0"/>
-              </a:spcBef>
-              <a:spcAft>
-                <a:spcPts val="0"/>
-              </a:spcAft>
-              <a:buNone/>
-            </a:pPr>
-            <a:r>
-              <a:t/>
-            </a:r>
-            <a:endParaRPr/>
+            <a:r>
+              <a:t>Full instructions (also on the course site):</a:t>
+            </a:r>
+          </a:p>
+          <a:p>
+            <a:r>
+              <a:t>- Create a new MonoGame project “Flappy”</a:t>
+            </a:r>
+          </a:p>
+          <a:p>
+            <a:r>
+              <a:t>  - Start from the gar-starter template on GitHub</a:t>
+            </a:r>
+          </a:p>
+          <a:p>
+            <a:r>
+              <a:t>- Add a reference to the GMDCore class library</a:t>
+            </a:r>
+          </a:p>
+          <a:p>
+            <a:r>
+              <a:t>  - Derive your Game1 class from the Core class in the class library</a:t>
+            </a:r>
+          </a:p>
+          <a:p>
+            <a:r>
+              <a:t>  - Take advantage of the Core class constructor to create a window with…</a:t>
+            </a:r>
+          </a:p>
+          <a:p>
+            <a:r>
+              <a:t>    - 512x288 virtual resolution</a:t>
+            </a:r>
+          </a:p>
+          <a:p>
+            <a:r>
+              <a:t>    - 1280x720 window resolution</a:t>
+            </a:r>
+          </a:p>
+          <a:p>
+            <a:r>
+              <a:t>  - The implementation of your Game1 constructor should be empty for now</a:t>
+            </a:r>
+          </a:p>
+          <a:p>
+            <a:r>
+              <a:t>- Remove the GraphicsDevice &amp; SpriteBatch fields from the Game1 class</a:t>
+            </a:r>
+          </a:p>
+          <a:p>
+            <a:r>
+              <a:t>  - We are now using the base Core class counterparts</a:t>
+            </a:r>
           </a:p>
         </p:txBody>
       </p:sp>
@@ -1317,19 +1438,24 @@
           </a:bodyPr>
           <a:lstStyle/>
           <a:p>
-            <a:pPr indent="0" lvl="0" marL="0" rtl="0" algn="l">
-              <a:spcBef>
-                <a:spcPts val="0"/>
-              </a:spcBef>
-              <a:spcAft>
-                <a:spcPts val="0"/>
-              </a:spcAft>
-              <a:buNone/>
-            </a:pPr>
-            <a:r>
-              <a:t/>
-            </a:r>
-            <a:endParaRPr/>
+            <a:r>
+              <a:t>Full instructions (also on the course site):</a:t>
+            </a:r>
+          </a:p>
+          <a:p>
+            <a:r>
+              <a:t>- Add a background image and a ground image to the empty screen</a:t>
+            </a:r>
+          </a:p>
+          <a:p>
+            <a:r>
+              <a:t>  - Store the two images in an “images” folder inside your Assets folder</a:t>
+            </a:r>
+          </a:p>
+          <a:p>
+            <a:r>
+              <a:t>  - Remember to call ContentManager.Load inside LoadContent()</a:t>
+            </a:r>
           </a:p>
         </p:txBody>
       </p:sp>
@@ -1515,19 +1641,44 @@
           </a:bodyPr>
           <a:lstStyle/>
           <a:p>
-            <a:pPr indent="0" lvl="0" marL="0" rtl="0" algn="l">
-              <a:spcBef>
-                <a:spcPts val="0"/>
-              </a:spcBef>
-              <a:spcAft>
-                <a:spcPts val="0"/>
-              </a:spcAft>
-              <a:buNone/>
-            </a:pPr>
-            <a:r>
-              <a:t/>
-            </a:r>
-            <a:endParaRPr/>
+            <a:r>
+              <a:t>Full instructions (also on the course site):</a:t>
+            </a:r>
+          </a:p>
+          <a:p>
+            <a:r>
+              <a:t>- Implement an infinitely scrolling background using the two provided images</a:t>
+            </a:r>
+          </a:p>
+          <a:p>
+            <a:r>
+              <a:t>  - The background must move slower than the ground in order to create the desired parallax effect</a:t>
+            </a:r>
+          </a:p>
+          <a:p>
+            <a:r>
+              <a:t>  - You will need two new constants to control the scroll speed as well as two new fields to keep track of the position of each element</a:t>
+            </a:r>
+          </a:p>
+          <a:p>
+            <a:r>
+              <a:t>  - For the graphics provided to you, the “looping points” are</a:t>
+            </a:r>
+          </a:p>
+          <a:p>
+            <a:r>
+              <a:t>    - Background: 413</a:t>
+            </a:r>
+          </a:p>
+          <a:p>
+            <a:r>
+              <a:t>    - Ground: 512 (virtual width)</a:t>
+            </a:r>
+          </a:p>
+          <a:p>
+            <a:r>
+              <a:t>  - The % operator might come in handy here</a:t>
+            </a:r>
           </a:p>
         </p:txBody>
       </p:sp>
@@ -1713,19 +1864,79 @@
           </a:bodyPr>
           <a:lstStyle/>
           <a:p>
-            <a:pPr indent="0" lvl="0" marL="0" rtl="0" algn="l">
-              <a:spcBef>
-                <a:spcPts val="0"/>
-              </a:spcBef>
-              <a:spcAft>
-                <a:spcPts val="0"/>
-              </a:spcAft>
-              <a:buNone/>
-            </a:pPr>
-            <a:r>
-              <a:t/>
-            </a:r>
-            <a:endParaRPr/>
+            <a:r>
+              <a:t>Full instructions (also on the course site):</a:t>
+            </a:r>
+          </a:p>
+          <a:p>
+            <a:r>
+              <a:t>- Add a bird to the screen</a:t>
+            </a:r>
+          </a:p>
+          <a:p>
+            <a:r>
+              <a:t>  - Create a Bird class to encapsulate the relevant data (for now Position)</a:t>
+            </a:r>
+          </a:p>
+          <a:p>
+            <a:r>
+              <a:t>  - Remember to add relevant methods (Update and Draw)</a:t>
+            </a:r>
+          </a:p>
+          <a:p>
+            <a:r>
+              <a:t>- How do we get a reference to the Bird image in the bird class? Multiple approaches…</a:t>
+            </a:r>
+          </a:p>
+          <a:p>
+            <a:r>
+              <a:t>  - Make the texture available as a public static field in the Game1 class (like last week)</a:t>
+            </a:r>
+          </a:p>
+          <a:p>
+            <a:r>
+              <a:t>    - This breaks encapsulation and bloats the Game1 class…</a:t>
+            </a:r>
+          </a:p>
+          <a:p>
+            <a:r>
+              <a:t>  - Inject the Texture2D or ContentManager into the bird upon initialization</a:t>
+            </a:r>
+          </a:p>
+          <a:p>
+            <a:r>
+              <a:t>    - This is a bit tedious to have to do for every instantiation of an entity</a:t>
+            </a:r>
+          </a:p>
+          <a:p>
+            <a:r>
+              <a:t>  - Make the ContentManager available across our game files</a:t>
+            </a:r>
+          </a:p>
+          <a:p>
+            <a:r>
+              <a:t>    - marking it as a static field in the Core library</a:t>
+            </a:r>
+          </a:p>
+          <a:p>
+            <a:r>
+              <a:t>  - Create a separate, static Art class that holds references to all assets</a:t>
+            </a:r>
+          </a:p>
+          <a:p>
+            <a:r>
+              <a:t>    - This class would then be passed the ContentManager in its constructor</a:t>
+            </a:r>
+          </a:p>
+          <a:p>
+            <a:r>
+              <a:t>- Refactor your existing asset references (background and ground) to use the Art class</a:t>
+            </a:r>
+          </a:p>
+          <a:p>
+            <a:r>
+              <a:t>- Initialize the Bird in the Game1 Initialize method with a default position of 100,100</a:t>
+            </a:r>
           </a:p>
         </p:txBody>
       </p:sp>
@@ -1812,19 +2023,29 @@
           </a:bodyPr>
           <a:lstStyle/>
           <a:p>
-            <a:pPr indent="0" lvl="0" marL="0" rtl="0" algn="l">
-              <a:spcBef>
-                <a:spcPts val="0"/>
-              </a:spcBef>
-              <a:spcAft>
-                <a:spcPts val="0"/>
-              </a:spcAft>
-              <a:buNone/>
-            </a:pPr>
-            <a:r>
-              <a:t/>
-            </a:r>
-            <a:endParaRPr/>
+            <a:r>
+              <a:t>Full instructions (also on the course site):</a:t>
+            </a:r>
+          </a:p>
+          <a:p>
+            <a:r>
+              <a:t>- Add gravity to make the bird fall</a:t>
+            </a:r>
+          </a:p>
+          <a:p>
+            <a:r>
+              <a:t>  - You will need to introduce two new fields</a:t>
+            </a:r>
+          </a:p>
+          <a:p>
+            <a:r>
+              <a:t>    - One constant for gravity (pick a fitting value) and another to keep track of the velocity of the bird</a:t>
+            </a:r>
+          </a:p>
+          <a:p>
+            <a:r>
+              <a:t>    - Remember to normalize both the update in position and velocity by using deltatime</a:t>
+            </a:r>
           </a:p>
         </p:txBody>
       </p:sp>
@@ -2010,19 +2231,84 @@
           </a:bodyPr>
           <a:lstStyle/>
           <a:p>
-            <a:pPr indent="0" lvl="0" marL="0" rtl="0" algn="l">
-              <a:spcBef>
-                <a:spcPts val="0"/>
-              </a:spcBef>
-              <a:spcAft>
-                <a:spcPts val="0"/>
-              </a:spcAft>
-              <a:buNone/>
-            </a:pPr>
-            <a:r>
-              <a:t/>
-            </a:r>
-            <a:endParaRPr/>
+            <a:r>
+              <a:t>Full instructions (also on the course site):</a:t>
+            </a:r>
+          </a:p>
+          <a:p>
+            <a:r>
+              <a:t>- Recall from last week how to emulate a key being pressed down this frame? Add that functionality to the GMDCore library!</a:t>
+            </a:r>
+          </a:p>
+          <a:p>
+            <a:r>
+              <a:t>  - Create a new folder “Input” in GMDCore</a:t>
+            </a:r>
+          </a:p>
+          <a:p>
+            <a:r>
+              <a:t>    - Add a class “KeyboardInfo” to the folder containing</a:t>
+            </a:r>
+          </a:p>
+          <a:p>
+            <a:r>
+              <a:t>      - A way to keep track of previous and current keyboardstate</a:t>
+            </a:r>
+          </a:p>
+          <a:p>
+            <a:r>
+              <a:t>        - Create a custom Update method to update them each frame</a:t>
+            </a:r>
+          </a:p>
+          <a:p>
+            <a:r>
+              <a:t>      - Methods for checking IsKeyUp, IsKeyDown, WasKeyJustPressed, WasKeyJustReleased</a:t>
+            </a:r>
+          </a:p>
+          <a:p>
+            <a:r>
+              <a:t>    - Add a “MouseInfo” class the same way: IsLeftButtonDown, WasLeftButtonJustPressed, Position</a:t>
+            </a:r>
+          </a:p>
+          <a:p>
+            <a:r>
+              <a:t>    - Add another class “InputManager” in the same folder containing</a:t>
+            </a:r>
+          </a:p>
+          <a:p>
+            <a:r>
+              <a:t>      - A KeyboardInfo and a MouseInfo instance</a:t>
+            </a:r>
+          </a:p>
+          <a:p>
+            <a:r>
+              <a:t>      - An Update method that updates both</a:t>
+            </a:r>
+          </a:p>
+          <a:p>
+            <a:r>
+              <a:t>    - Add the InputManager as static property to the Core class</a:t>
+            </a:r>
+          </a:p>
+          <a:p>
+            <a:r>
+              <a:t>    - Remember to call Update on the InputManager in the Update method of Core</a:t>
+            </a:r>
+          </a:p>
+          <a:p>
+            <a:r>
+              <a:t>- Make the bird flap on Space or a left click to counteract the gravity</a:t>
+            </a:r>
+          </a:p>
+          <a:p>
+            <a:r>
+              <a:t>  - Remember, the 2D coordinate system has its origin in the top left…</a:t>
+            </a:r>
+          </a:p>
+          <a:p>
+            <a:r>
+              <a:t>  - Overwriting the vertical velocity with a “jumpforce” value is a good way to instantly give the bird a jolt of upwards momentum</a:t>
+            </a:r>
           </a:p>
         </p:txBody>
       </p:sp>
@@ -2208,19 +2494,74 @@
           </a:bodyPr>
           <a:lstStyle/>
           <a:p>
-            <a:pPr indent="0" lvl="0" marL="0" rtl="0" algn="l">
-              <a:spcBef>
-                <a:spcPts val="0"/>
-              </a:spcBef>
-              <a:spcAft>
-                <a:spcPts val="0"/>
-              </a:spcAft>
-              <a:buNone/>
-            </a:pPr>
-            <a:r>
-              <a:t/>
-            </a:r>
-            <a:endParaRPr/>
+            <a:r>
+              <a:t>Full instructions (also on the course site):</a:t>
+            </a:r>
+          </a:p>
+          <a:p>
+            <a:r>
+              <a:t>- Add the pipe to our game</a:t>
+            </a:r>
+          </a:p>
+          <a:p>
+            <a:r>
+              <a:t>  - Unsurprisingly, we will model the Pipe as a class</a:t>
+            </a:r>
+          </a:p>
+          <a:p>
+            <a:r>
+              <a:t>  - Inside the class, you must create a constructor that spawns a pipe at a random vertical position at the rightmost edge and within the lower quarter of the screen</a:t>
+            </a:r>
+          </a:p>
+          <a:p>
+            <a:r>
+              <a:t>    - The Random class will be useful here</a:t>
+            </a:r>
+          </a:p>
+          <a:p>
+            <a:r>
+              <a:t>    - You will need to add the Pipe as a Texture2D to the Art class</a:t>
+            </a:r>
+          </a:p>
+          <a:p>
+            <a:r>
+              <a:t>  - You must also create an update method that “scrolls” the Pipe to the left of the screen based on a pipe speed value</a:t>
+            </a:r>
+          </a:p>
+          <a:p>
+            <a:r>
+              <a:t>    - Picking the same speed as the ground scroll “grounds” the pipes to the ground</a:t>
+            </a:r>
+          </a:p>
+          <a:p>
+            <a:r>
+              <a:t>  - Include functionality for rendering the Pipe to the screen</a:t>
+            </a:r>
+          </a:p>
+          <a:p>
+            <a:r>
+              <a:t>- Render the pipe an “infinite” amount of times!</a:t>
+            </a:r>
+          </a:p>
+          <a:p>
+            <a:r>
+              <a:t>  - In the Game1 class, add functionality to spawn pipes at a set interval</a:t>
+            </a:r>
+          </a:p>
+          <a:p>
+            <a:r>
+              <a:t>  - You will need two new fields, a spawn timer, and a constant spawn interval</a:t>
+            </a:r>
+          </a:p>
+          <a:p>
+            <a:r>
+              <a:t>  - You will also need a list to keep track of all pipes</a:t>
+            </a:r>
+          </a:p>
+          <a:p>
+            <a:r>
+              <a:t>    - You will be iterating through the list of pipes both in Update and Draw of Game1</a:t>
+            </a:r>
           </a:p>
         </p:txBody>
       </p:sp>
@@ -2406,19 +2747,104 @@
           </a:bodyPr>
           <a:lstStyle/>
           <a:p>
-            <a:pPr indent="0" lvl="0" marL="0" rtl="0" algn="l">
-              <a:spcBef>
-                <a:spcPts val="0"/>
-              </a:spcBef>
-              <a:spcAft>
-                <a:spcPts val="0"/>
-              </a:spcAft>
-              <a:buNone/>
-            </a:pPr>
-            <a:r>
-              <a:t/>
-            </a:r>
-            <a:endParaRPr/>
+            <a:r>
+              <a:t>Full instructions (also on the course site):</a:t>
+            </a:r>
+          </a:p>
+          <a:p>
+            <a:r>
+              <a:t>- The pipes must now be spawned in “pairs”, with one pipe facing up and the other facing down.</a:t>
+            </a:r>
+          </a:p>
+          <a:p>
+            <a:r>
+              <a:t>  - We will model this as a new class, PipePair, wrapping the Pipe class</a:t>
+            </a:r>
+          </a:p>
+          <a:p>
+            <a:r>
+              <a:t>  - The PipePair class will contain</a:t>
+            </a:r>
+          </a:p>
+          <a:p>
+            <a:r>
+              <a:t>    - A top pipe and a bottom pipe</a:t>
+            </a:r>
+          </a:p>
+          <a:p>
+            <a:r>
+              <a:t>    - A pipe gap (vertical distance between two pipes)</a:t>
+            </a:r>
+          </a:p>
+          <a:p>
+            <a:r>
+              <a:t>    - A pipe speed value (move this from the Pipe class to the PipePair class)</a:t>
+            </a:r>
+          </a:p>
+          <a:p>
+            <a:r>
+              <a:t>    - A float to keep track of the horizontal position of the two pipes</a:t>
+            </a:r>
+          </a:p>
+          <a:p>
+            <a:r>
+              <a:t>    - A constructor that takes a float y value to define the vertical position of the pipe gap</a:t>
+            </a:r>
+          </a:p>
+          <a:p>
+            <a:r>
+              <a:t>    - Logic that flags PipePairs for deletion once they go beyond the left side of the screen</a:t>
+            </a:r>
+          </a:p>
+          <a:p>
+            <a:r>
+              <a:t>    - Since the PipePair will be controlling the pipes, the update and initialization logic of of the Pipe class will be moved to the PipePair class</a:t>
+            </a:r>
+          </a:p>
+          <a:p>
+            <a:r>
+              <a:t>  - The Pipe constructor must now take a position and a bool indicating whether it is flipped</a:t>
+            </a:r>
+          </a:p>
+          <a:p>
+            <a:r>
+              <a:t>    - The position is purely used to draw the Pipe, as all movement is done in PipePair</a:t>
+            </a:r>
+          </a:p>
+          <a:p>
+            <a:r>
+              <a:t>    - For flipping the pipe art, you must use a specific overload of SpriteBatch.Draw() with a SpriteEffects argument</a:t>
+            </a:r>
+          </a:p>
+          <a:p>
+            <a:r>
+              <a:t>- Update the Game1 class to work with PipePairs instead of Pipes</a:t>
+            </a:r>
+          </a:p>
+          <a:p>
+            <a:r>
+              <a:t>  - The pipe pairs will be spawned given a vertical position for the gap</a:t>
+            </a:r>
+          </a:p>
+          <a:p>
+            <a:r>
+              <a:t>    - Make this position vary slightly for each pipe pair</a:t>
+            </a:r>
+          </a:p>
+          <a:p>
+            <a:r>
+              <a:t>      - Keep track of the previous spawn position and add a random value (e.g. -50-50) to it</a:t>
+            </a:r>
+          </a:p>
+          <a:p>
+            <a:r>
+              <a:t>      - This position must be clamped so that you don’t risk spawning the pipe gap above/below the screen</a:t>
+            </a:r>
+          </a:p>
+          <a:p>
+            <a:r>
+              <a:t>  - Add functionality to delete PipePairs flagged for deletion</a:t>
+            </a:r>
           </a:p>
         </p:txBody>
       </p:sp>
@@ -2604,19 +3030,49 @@
           </a:bodyPr>
           <a:lstStyle/>
           <a:p>
-            <a:pPr indent="0" lvl="0" marL="0" rtl="0" algn="l">
-              <a:spcBef>
-                <a:spcPts val="0"/>
-              </a:spcBef>
-              <a:spcAft>
-                <a:spcPts val="0"/>
-              </a:spcAft>
-              <a:buNone/>
-            </a:pPr>
-            <a:r>
-              <a:t/>
-            </a:r>
-            <a:endParaRPr/>
+            <a:r>
+              <a:t>Full instructions (also on the course site):</a:t>
+            </a:r>
+          </a:p>
+          <a:p>
+            <a:r>
+              <a:t>- Include collision detection between bird and pipes</a:t>
+            </a:r>
+          </a:p>
+          <a:p>
+            <a:r>
+              <a:t>  - When a bird collides with a pipe, the game should pause</a:t>
+            </a:r>
+          </a:p>
+          <a:p>
+            <a:r>
+              <a:t>    - Pause can be implemented as a simple boolean flag that is checked in Update</a:t>
+            </a:r>
+          </a:p>
+          <a:p>
+            <a:r>
+              <a:t>  - The Game1 class should react to collisions, but the the actual AABB collision detection should be delegated to the Bird class (similar to last week!)</a:t>
+            </a:r>
+          </a:p>
+          <a:p>
+            <a:r>
+              <a:t>  - Can you figure out a way to make collision detection more forgiving?</a:t>
+            </a:r>
+          </a:p>
+          <a:p>
+            <a:r>
+              <a:t>- Add a similar collision check between the bird and ground &amp; ceiling of the game</a:t>
+            </a:r>
+          </a:p>
+          <a:p>
+            <a:r>
+              <a:t>  - This check can simply be done in Game1 Update</a:t>
+            </a:r>
+          </a:p>
+          <a:p>
+            <a:r>
+              <a:t>  - It simply compares the bird y position to other values, no AABB collision detection involved...</a:t>
+            </a:r>
           </a:p>
         </p:txBody>
       </p:sp>
@@ -3297,19 +3753,104 @@
           </a:bodyPr>
           <a:lstStyle/>
           <a:p>
-            <a:pPr indent="0" lvl="0" marL="0" rtl="0" algn="l">
-              <a:spcBef>
-                <a:spcPts val="0"/>
-              </a:spcBef>
-              <a:spcAft>
-                <a:spcPts val="0"/>
-              </a:spcAft>
-              <a:buNone/>
-            </a:pPr>
-            <a:r>
-              <a:t/>
-            </a:r>
-            <a:endParaRPr/>
+            <a:r>
+              <a:t>Full instructions (also on the course site):</a:t>
+            </a:r>
+          </a:p>
+          <a:p>
+            <a:r>
+              <a:t>- Create a new IState interface</a:t>
+            </a:r>
+          </a:p>
+          <a:p>
+            <a:r>
+              <a:t>  - The interface must have four methods</a:t>
+            </a:r>
+          </a:p>
+          <a:p>
+            <a:r>
+              <a:t>    - Enter()</a:t>
+            </a:r>
+          </a:p>
+          <a:p>
+            <a:r>
+              <a:t>    - Exit()</a:t>
+            </a:r>
+          </a:p>
+          <a:p>
+            <a:r>
+              <a:t>    - Update(GameTime gameTime)</a:t>
+            </a:r>
+          </a:p>
+          <a:p>
+            <a:r>
+              <a:t>    - Draw(SpriteBatch spriteBatch)</a:t>
+            </a:r>
+          </a:p>
+          <a:p>
+            <a:r>
+              <a:t>- Create two new states implementing the interface</a:t>
+            </a:r>
+          </a:p>
+          <a:p>
+            <a:r>
+              <a:t>  - Title state</a:t>
+            </a:r>
+          </a:p>
+          <a:p>
+            <a:r>
+              <a:t>    - The user sees a title and presses enter to start playing (i.e. transition to play state)</a:t>
+            </a:r>
+          </a:p>
+          <a:p>
+            <a:r>
+              <a:t>    - The background should not be scrolling in this state! (repurpose the pause functionality to achieve this)</a:t>
+            </a:r>
+          </a:p>
+          <a:p>
+            <a:r>
+              <a:t>  - Play state</a:t>
+            </a:r>
+          </a:p>
+          <a:p>
+            <a:r>
+              <a:t>    - The main state where the game is played (notice how most of your Game1 gameplay code will be moved here)</a:t>
+            </a:r>
+          </a:p>
+          <a:p>
+            <a:r>
+              <a:t>    - If the bird collides with anything, return to title state</a:t>
+            </a:r>
+          </a:p>
+          <a:p>
+            <a:r>
+              <a:t>    - This state will need to reset important gameplay values in the Enter method (to ensure a clean state for every retry)</a:t>
+            </a:r>
+          </a:p>
+          <a:p>
+            <a:r>
+              <a:t>- Create a state machine that controls the global state of the game</a:t>
+            </a:r>
+          </a:p>
+          <a:p>
+            <a:r>
+              <a:t>  - You need to supply a reference of the Game1 instance to the StateMachine constructor, which in turn makes it available to each state through their constructors.</a:t>
+            </a:r>
+          </a:p>
+          <a:p>
+            <a:r>
+              <a:t>  - Remember to initialize the state machine and call its Update and Draw methods from the Game1 class</a:t>
+            </a:r>
+          </a:p>
+          <a:p>
+            <a:r>
+              <a:t>- Add the retro font to the game</a:t>
+            </a:r>
+          </a:p>
+          <a:p>
+            <a:r>
+              <a:t>  - There is an overload method of DrawString() that lets you tweak the scale of the drawn text</a:t>
+            </a:r>
           </a:p>
         </p:txBody>
       </p:sp>
@@ -3396,19 +3937,59 @@
           </a:bodyPr>
           <a:lstStyle/>
           <a:p>
-            <a:pPr indent="0" lvl="0" marL="0" rtl="0" algn="l">
-              <a:spcBef>
-                <a:spcPts val="0"/>
-              </a:spcBef>
-              <a:spcAft>
-                <a:spcPts val="0"/>
-              </a:spcAft>
-              <a:buNone/>
-            </a:pPr>
-            <a:r>
-              <a:t/>
-            </a:r>
-            <a:endParaRPr/>
+            <a:r>
+              <a:t>Full instructions (also on the course site):</a:t>
+            </a:r>
+          </a:p>
+          <a:p>
+            <a:r>
+              <a:t>- Introduce scoring to the game</a:t>
+            </a:r>
+          </a:p>
+          <a:p>
+            <a:r>
+              <a:t>  - When the bird passes a pipe pair, the score should be incremented by one</a:t>
+            </a:r>
+          </a:p>
+          <a:p>
+            <a:r>
+              <a:t>    - The score should be tracked in the play state</a:t>
+            </a:r>
+          </a:p>
+          <a:p>
+            <a:r>
+              <a:t>    - Introduce a property on PipePair to keep track of if that pair has already been scored</a:t>
+            </a:r>
+          </a:p>
+          <a:p>
+            <a:r>
+              <a:t>  - Display the score in the top left corner of the screen while in play state</a:t>
+            </a:r>
+          </a:p>
+          <a:p>
+            <a:r>
+              <a:t>- Add a score state that displays the final score</a:t>
+            </a:r>
+          </a:p>
+          <a:p>
+            <a:r>
+              <a:t>  - Display the score in big text in the center of the screen</a:t>
+            </a:r>
+          </a:p>
+          <a:p>
+            <a:r>
+              <a:t>    - Consider - how do you get access to the score data from this state?</a:t>
+            </a:r>
+          </a:p>
+          <a:p>
+            <a:r>
+              <a:t>  - Transition from play state to score state when the bird has collided with an obstacle</a:t>
+            </a:r>
+          </a:p>
+          <a:p>
+            <a:r>
+              <a:t>  - Transition from score state to play state when space is pressed</a:t>
+            </a:r>
           </a:p>
         </p:txBody>
       </p:sp>
@@ -3495,19 +4076,44 @@
           </a:bodyPr>
           <a:lstStyle/>
           <a:p>
-            <a:pPr indent="0" lvl="0" marL="0" rtl="0" algn="l">
-              <a:spcBef>
-                <a:spcPts val="0"/>
-              </a:spcBef>
-              <a:spcAft>
-                <a:spcPts val="0"/>
-              </a:spcAft>
-              <a:buNone/>
-            </a:pPr>
-            <a:r>
-              <a:t/>
-            </a:r>
-            <a:endParaRPr/>
+            <a:r>
+              <a:t>Full instructions (also on the course site):</a:t>
+            </a:r>
+          </a:p>
+          <a:p>
+            <a:r>
+              <a:t>- Add a countdown state</a:t>
+            </a:r>
+          </a:p>
+          <a:p>
+            <a:r>
+              <a:t>  - This state sits between title state and play state</a:t>
+            </a:r>
+          </a:p>
+          <a:p>
+            <a:r>
+              <a:t>    - Title state should now transition to countdown state instead of play state</a:t>
+            </a:r>
+          </a:p>
+          <a:p>
+            <a:r>
+              <a:t>    - Score state should now transition to countdown state instead of directly to play state</a:t>
+            </a:r>
+          </a:p>
+          <a:p>
+            <a:r>
+              <a:t>  - Countdown state counts down from 3 to 0. When 0 is reached, it transitions to play state</a:t>
+            </a:r>
+          </a:p>
+          <a:p>
+            <a:r>
+              <a:t>    - Display the countdown in the center of the screen</a:t>
+            </a:r>
+          </a:p>
+          <a:p>
+            <a:r>
+              <a:t>    - You can reuse some of the timer logic from spawning pipes</a:t>
+            </a:r>
           </a:p>
         </p:txBody>
       </p:sp>
@@ -3594,19 +4200,54 @@
           </a:bodyPr>
           <a:lstStyle/>
           <a:p>
-            <a:pPr indent="0" lvl="0" marL="0" rtl="0" algn="l">
-              <a:spcBef>
-                <a:spcPts val="0"/>
-              </a:spcBef>
-              <a:spcAft>
-                <a:spcPts val="0"/>
-              </a:spcAft>
-              <a:buNone/>
-            </a:pPr>
-            <a:r>
-              <a:t/>
-            </a:r>
-            <a:endParaRPr/>
+            <a:r>
+              <a:t>Full instructions (also on the course site):</a:t>
+            </a:r>
+          </a:p>
+          <a:p>
+            <a:r>
+              <a:t>- Add background music (i.e. a “Song”) to the game</a:t>
+            </a:r>
+          </a:p>
+          <a:p>
+            <a:r>
+              <a:t>  - You can use this track</a:t>
+            </a:r>
+          </a:p>
+          <a:p>
+            <a:r>
+              <a:t>  - You will need to use the static MediaPlayer.Play(Song song) method to play the song</a:t>
+            </a:r>
+          </a:p>
+          <a:p>
+            <a:r>
+              <a:t>- Add sound effects to the game</a:t>
+            </a:r>
+          </a:p>
+          <a:p>
+            <a:r>
+              <a:t>  - You must have three distinct sound effects:</a:t>
+            </a:r>
+          </a:p>
+          <a:p>
+            <a:r>
+              <a:t>    - Flap</a:t>
+            </a:r>
+          </a:p>
+          <a:p>
+            <a:r>
+              <a:t>    - Hurt (you can play this together with an Explosion sound for extra impact)</a:t>
+            </a:r>
+          </a:p>
+          <a:p>
+            <a:r>
+              <a:t>    - Score</a:t>
+            </a:r>
+          </a:p>
+          <a:p>
+            <a:r>
+              <a:t>- Organize the sounds in an Audio class, made a Singleton: Audio.Instance.PlayFlap()</a:t>
+            </a:r>
           </a:p>
         </p:txBody>
       </p:sp>
@@ -4103,6 +4744,64 @@
               <a:t/>
             </a:r>
             <a:endParaRPr/>
+          </a:p>
+        </p:txBody>
+      </p:sp>
+    </p:spTree>
+  </p:cSld>
+  <p:clrMapOvr>
+    <a:masterClrMapping/>
+  </p:clrMapOvr>
+</p:notes>
+</file>
+
+<file path=ppt/notesSlides/notesSlide40.xml><?xml version="1.0" encoding="utf-8"?>
+<p:notes xmlns:a="http://schemas.openxmlformats.org/drawingml/2006/main" xmlns:p="http://schemas.openxmlformats.org/presentationml/2006/main" xmlns:r="http://schemas.openxmlformats.org/officeDocument/2006/relationships">
+  <p:cSld>
+    <p:spTree>
+      <p:nvGrpSpPr>
+        <p:cNvPr id="1" name=""/>
+        <p:cNvGrpSpPr/>
+        <p:nvPr/>
+      </p:nvGrpSpPr>
+      <p:grpSpPr>
+        <a:xfrm>
+          <a:off x="0" y="0"/>
+          <a:ext cx="0" cy="0"/>
+          <a:chOff x="0" y="0"/>
+          <a:chExt cx="0" cy="0"/>
+        </a:xfrm>
+      </p:grpSpPr>
+      <p:sp>
+        <p:nvSpPr>
+          <p:cNvPr id="2" name="Slide Image Placeholder 1"/>
+          <p:cNvSpPr>
+            <a:spLocks noGrp="1"/>
+          </p:cNvSpPr>
+          <p:nvPr>
+            <p:ph type="sldImg" idx="2"/>
+          </p:nvPr>
+        </p:nvSpPr>
+        <p:spPr/>
+      </p:sp>
+      <p:sp>
+        <p:nvSpPr>
+          <p:cNvPr id="3" name="Notes Placeholder 2"/>
+          <p:cNvSpPr>
+            <a:spLocks noGrp="1"/>
+          </p:cNvSpPr>
+          <p:nvPr>
+            <p:ph type="body" idx="1"/>
+          </p:nvPr>
+        </p:nvSpPr>
+        <p:spPr/>
+        <p:txBody>
+          <a:bodyPr/>
+          <a:lstStyle/>
+          <a:p>
+            <a:r>
+              <a:t>Ask, let them answer in pairs for a minute, then take a few answers. These are the site’s Check yourself questions.</a:t>
+            </a:r>
           </a:p>
         </p:txBody>
       </p:sp>
@@ -8439,7 +9138,7 @@
         <p:spPr>
           <a:xfrm>
             <a:off x="311700" y="885950"/>
-            <a:ext cx="8520600" cy="4023300"/>
+            <a:ext cx="8520600" cy="905256"/>
           </a:xfrm>
           <a:prstGeom prst="rect">
             <a:avLst/>
@@ -8447,325 +9146,326 @@
         </p:spPr>
         <p:txBody>
           <a:bodyPr anchorCtr="0" anchor="t" bIns="91425" lIns="91425" spcFirstLastPara="1" rIns="91425" wrap="square" tIns="91425">
-            <a:normAutofit fontScale="92500" lnSpcReduction="20000"/>
+            <a:normAutofit/>
           </a:bodyPr>
           <a:lstStyle/>
           <a:p>
-            <a:pPr indent="-322580" lvl="0" marL="457200" rtl="0" algn="l">
-              <a:spcBef>
-                <a:spcPts val="0"/>
-              </a:spcBef>
-              <a:spcAft>
-                <a:spcPts val="0"/>
-              </a:spcAft>
-              <a:buSzPct val="100000"/>
+            <a:pPr indent="-330200" lvl="0" marL="457200" rtl="0" algn="l">
+              <a:spcBef>
+                <a:spcPts val="0"/>
+              </a:spcBef>
+              <a:spcAft>
+                <a:spcPts val="0"/>
+              </a:spcAft>
+              <a:buSzPts val="1600"/>
               <a:buChar char="●"/>
             </a:pPr>
             <a:r>
               <a:rPr lang="en"/>
-              <a:t>Create a MonoGame Game Library project “GMDCore”</a:t>
+              <a:t>Goal: move what every game needs into a class library, GMDCore.</a:t>
             </a:r>
             <a:endParaRPr/>
           </a:p>
           <a:p>
-            <a:pPr indent="-310832" lvl="1" marL="914400" rtl="0" algn="l">
-              <a:spcBef>
-                <a:spcPts val="0"/>
-              </a:spcBef>
-              <a:spcAft>
-                <a:spcPts val="0"/>
-              </a:spcAft>
-              <a:buSzPct val="100000"/>
-              <a:buChar char="○"/>
-            </a:pPr>
-            <a:r>
-              <a:rPr lang="en"/>
-              <a:t>This will be a common core of functionality that we can add to as we create more games</a:t>
-            </a:r>
-            <a:endParaRPr/>
-          </a:p>
-          <a:p>
-            <a:pPr indent="-310832" lvl="1" marL="914400" rtl="0" algn="l">
-              <a:spcBef>
-                <a:spcPts val="0"/>
-              </a:spcBef>
-              <a:spcAft>
-                <a:spcPts val="0"/>
-              </a:spcAft>
-              <a:buSzPct val="100000"/>
-              <a:buChar char="○"/>
-            </a:pPr>
-            <a:r>
-              <a:rPr lang="en"/>
-              <a:t>It is simply a class library with MonoGame installed as a dependency</a:t>
-            </a:r>
-            <a:endParaRPr/>
-          </a:p>
-          <a:p>
-            <a:pPr indent="-322580" lvl="0" marL="457200" rtl="0" algn="l">
-              <a:spcBef>
-                <a:spcPts val="0"/>
-              </a:spcBef>
-              <a:spcAft>
-                <a:spcPts val="0"/>
-              </a:spcAft>
-              <a:buSzPct val="100000"/>
+            <a:pPr indent="-330200" lvl="0" marL="457200" rtl="0" algn="l">
+              <a:spcBef>
+                <a:spcPts val="0"/>
+              </a:spcBef>
+              <a:spcAft>
+                <a:spcPts val="0"/>
+              </a:spcAft>
+              <a:buSzPts val="1600"/>
               <a:buChar char="●"/>
             </a:pPr>
             <a:r>
               <a:rPr lang="en"/>
-              <a:t>Create a Core class which derives from the Game class</a:t>
-            </a:r>
-            <a:endParaRPr/>
-          </a:p>
-          <a:p>
-            <a:pPr indent="-322580" lvl="0" marL="457200" rtl="0" algn="l">
-              <a:spcBef>
-                <a:spcPts val="0"/>
-              </a:spcBef>
-              <a:spcAft>
-                <a:spcPts val="0"/>
-              </a:spcAft>
-              <a:buSzPct val="100000"/>
-              <a:buChar char="●"/>
-            </a:pPr>
-            <a:r>
-              <a:rPr lang="en"/>
-              <a:t>Add the UpdateScreenScaleMatrix() method from last week to the Core class</a:t>
-            </a:r>
-            <a:endParaRPr/>
-          </a:p>
-          <a:p>
-            <a:pPr indent="-310832" lvl="1" marL="914400" rtl="0" algn="l">
-              <a:spcBef>
-                <a:spcPts val="0"/>
-              </a:spcBef>
-              <a:spcAft>
-                <a:spcPts val="0"/>
-              </a:spcAft>
-              <a:buSzPct val="100000"/>
-              <a:buChar char="○"/>
-            </a:pPr>
-            <a:r>
-              <a:rPr lang="en"/>
-              <a:t>You will need to declare a Matrix field (consider the visibility), as well as fields to store the virtual width and virtual height (they are no longer constants)</a:t>
-            </a:r>
-            <a:endParaRPr/>
-          </a:p>
-          <a:p>
-            <a:pPr indent="-310832" lvl="1" marL="914400" rtl="0" algn="l">
-              <a:spcBef>
-                <a:spcPts val="0"/>
-              </a:spcBef>
-              <a:spcAft>
-                <a:spcPts val="0"/>
-              </a:spcAft>
-              <a:buSzPct val="100000"/>
-              <a:buChar char="○"/>
-            </a:pPr>
-            <a:r>
-              <a:rPr lang="en"/>
-              <a:t>Subscribe the method to the Window.ClientSizeChanged event (like last week)</a:t>
-            </a:r>
-            <a:endParaRPr/>
-          </a:p>
-          <a:p>
-            <a:pPr indent="-310832" lvl="1" marL="914400" rtl="0" algn="l">
-              <a:spcBef>
-                <a:spcPts val="0"/>
-              </a:spcBef>
-              <a:spcAft>
-                <a:spcPts val="0"/>
-              </a:spcAft>
-              <a:buSzPct val="100000"/>
-              <a:buChar char="○"/>
-            </a:pPr>
-            <a:r>
-              <a:rPr lang="en"/>
-              <a:t>Call UpdateScreenScaleMatrix as the game is initialized (like last week)</a:t>
-            </a:r>
-            <a:endParaRPr/>
-          </a:p>
-          <a:p>
-            <a:pPr indent="-322580" lvl="0" marL="457200" rtl="0" algn="l">
-              <a:spcBef>
-                <a:spcPts val="0"/>
-              </a:spcBef>
-              <a:spcAft>
-                <a:spcPts val="0"/>
-              </a:spcAft>
-              <a:buSzPct val="100000"/>
-              <a:buChar char="●"/>
-            </a:pPr>
-            <a:r>
-              <a:rPr lang="en"/>
-              <a:t>Add a constructor to the Core class</a:t>
-            </a:r>
-            <a:endParaRPr/>
-          </a:p>
-          <a:p>
-            <a:pPr indent="-310832" lvl="1" marL="914400" rtl="0" algn="l">
-              <a:spcBef>
-                <a:spcPts val="0"/>
-              </a:spcBef>
-              <a:spcAft>
-                <a:spcPts val="0"/>
-              </a:spcAft>
-              <a:buSzPct val="100000"/>
-              <a:buChar char="○"/>
-            </a:pPr>
-            <a:r>
-              <a:rPr lang="en"/>
-              <a:t>It must take these arguments</a:t>
-            </a:r>
-            <a:endParaRPr/>
-          </a:p>
-          <a:p>
-            <a:pPr indent="-299085" lvl="2" marL="1371600" rtl="0" algn="l">
-              <a:spcBef>
-                <a:spcPts val="0"/>
-              </a:spcBef>
-              <a:spcAft>
-                <a:spcPts val="0"/>
-              </a:spcAft>
-              <a:buSzPct val="100000"/>
-              <a:buChar char="■"/>
-            </a:pPr>
-            <a:r>
-              <a:rPr lang="en"/>
-              <a:t>string title, </a:t>
-            </a:r>
-            <a:r>
-              <a:rPr lang="en"/>
-              <a:t>int windowWidth, int windowHeight, </a:t>
-            </a:r>
-            <a:r>
-              <a:rPr lang="en"/>
-              <a:t>int virtualWidth, int virtualHeight</a:t>
-            </a:r>
-            <a:endParaRPr/>
-          </a:p>
-          <a:p>
-            <a:pPr indent="-310832" lvl="1" marL="914400" rtl="0" algn="l">
-              <a:spcBef>
-                <a:spcPts val="0"/>
-              </a:spcBef>
-              <a:spcAft>
-                <a:spcPts val="0"/>
-              </a:spcAft>
-              <a:buSzPct val="100000"/>
-              <a:buChar char="○"/>
-            </a:pPr>
-            <a:r>
-              <a:rPr lang="en"/>
-              <a:t>In the constructor, use the provided arguments</a:t>
-            </a:r>
-            <a:endParaRPr/>
-          </a:p>
-          <a:p>
-            <a:pPr indent="-299085" lvl="2" marL="1371600" rtl="0" algn="l">
-              <a:spcBef>
-                <a:spcPts val="0"/>
-              </a:spcBef>
-              <a:spcAft>
-                <a:spcPts val="0"/>
-              </a:spcAft>
-              <a:buSzPct val="100000"/>
-              <a:buChar char="■"/>
-            </a:pPr>
-            <a:r>
-              <a:rPr lang="en"/>
-              <a:t>Assign values to virtual width and virtual height fields</a:t>
-            </a:r>
-            <a:endParaRPr/>
-          </a:p>
-          <a:p>
-            <a:pPr indent="-299085" lvl="2" marL="1371600" rtl="0" algn="l">
-              <a:spcBef>
-                <a:spcPts val="0"/>
-              </a:spcBef>
-              <a:spcAft>
-                <a:spcPts val="0"/>
-              </a:spcAft>
-              <a:buSzPct val="100000"/>
-              <a:buChar char="■"/>
-            </a:pPr>
-            <a:r>
-              <a:rPr lang="en"/>
-              <a:t>Set the Window.Title property and PreferredBackBufferWidth/Height of the GraphicsDeviceManager</a:t>
-            </a:r>
-            <a:endParaRPr/>
-          </a:p>
-          <a:p>
-            <a:pPr indent="-322580" lvl="0" marL="457200" rtl="0" algn="l">
-              <a:spcBef>
-                <a:spcPts val="0"/>
-              </a:spcBef>
-              <a:spcAft>
-                <a:spcPts val="0"/>
-              </a:spcAft>
-              <a:buSzPct val="100000"/>
-              <a:buChar char="●"/>
-            </a:pPr>
-            <a:r>
-              <a:rPr lang="en"/>
-              <a:t>Make the GraphicsDeviceManager and SpriteBatch visible in derived classes</a:t>
-            </a:r>
-            <a:endParaRPr/>
-          </a:p>
-          <a:p>
-            <a:pPr indent="-310832" lvl="1" marL="914400" rtl="0" algn="l">
-              <a:spcBef>
-                <a:spcPts val="0"/>
-              </a:spcBef>
-              <a:spcAft>
-                <a:spcPts val="0"/>
-              </a:spcAft>
-              <a:buSzPct val="100000"/>
-              <a:buChar char="○"/>
-            </a:pPr>
-            <a:r>
-              <a:rPr lang="en"/>
-              <a:t>Consider naming conventions when changing visibility of a field</a:t>
-            </a:r>
-            <a:endParaRPr/>
-          </a:p>
-          <a:p>
-            <a:pPr indent="-322580" lvl="0" marL="457200" rtl="0" algn="l">
-              <a:spcBef>
-                <a:spcPts val="0"/>
-              </a:spcBef>
-              <a:spcAft>
-                <a:spcPts val="0"/>
-              </a:spcAft>
-              <a:buSzPct val="100000"/>
-              <a:buChar char="●"/>
-            </a:pPr>
-            <a:r>
-              <a:rPr lang="en"/>
-              <a:t>Move the SpriteBatch initialization to the start of the Initialize() method</a:t>
-            </a:r>
-            <a:endParaRPr/>
-          </a:p>
-          <a:p>
-            <a:pPr indent="-322580" lvl="0" marL="457200" rtl="0" algn="l">
-              <a:spcBef>
-                <a:spcPts val="0"/>
-              </a:spcBef>
-              <a:spcAft>
-                <a:spcPts val="0"/>
-              </a:spcAft>
-              <a:buSzPct val="100000"/>
-              <a:buChar char="●"/>
-            </a:pPr>
-            <a:r>
-              <a:rPr lang="en"/>
-              <a:t>Remove the call to GraphicsDevice.Clear() in the Draw method</a:t>
+              <a:t>A Core class, derived from Game: the window, and the screen scaling from Pong.</a:t>
             </a:r>
             <a:endParaRPr/>
           </a:p>
         </p:txBody>
       </p:sp>
+      <p:sp>
+        <p:nvSpPr>
+          <p:cNvPr id="100" name="Rounded Rectangle 99"/>
+          <p:cNvSpPr/>
+          <p:nvPr/>
+        </p:nvSpPr>
+        <p:spPr>
+          <a:xfrm>
+            <a:off x="914400" y="2103120"/>
+            <a:ext cx="2926080" cy="914400"/>
+          </a:xfrm>
+          <a:prstGeom prst="roundRect">
+            <a:avLst>
+              <a:gd name="adj" fmla="val 12000"/>
+            </a:avLst>
+          </a:prstGeom>
+          <a:solidFill>
+            <a:srgbClr val="2E3338"/>
+          </a:solidFill>
+          <a:ln w="25400">
+            <a:solidFill>
+              <a:srgbClr val="D45D35"/>
+            </a:solidFill>
+          </a:ln>
+          <a:effectLst/>
+        </p:spPr>
+        <p:style>
+          <a:lnRef idx="1">
+            <a:schemeClr val="accent1"/>
+          </a:lnRef>
+          <a:fillRef idx="3">
+            <a:schemeClr val="accent1"/>
+          </a:fillRef>
+          <a:effectRef idx="2">
+            <a:schemeClr val="accent1"/>
+          </a:effectRef>
+          <a:fontRef idx="minor">
+            <a:schemeClr val="lt1"/>
+          </a:fontRef>
+        </p:style>
+        <p:txBody>
+          <a:bodyPr rtlCol="0" anchor="ctr" wrap="square" lIns="73152" rIns="73152"/>
+          <a:lstStyle/>
+          <a:p>
+            <a:pPr algn="ctr"/>
+            <a:r>
+              <a:rPr sz="1600" b="1">
+                <a:solidFill>
+                  <a:srgbClr val="DEE2E6"/>
+                </a:solidFill>
+              </a:rPr>
+              <a:t>GMDCore</a:t>
+            </a:r>
+          </a:p>
+          <a:p>
+            <a:pPr algn="ctr"/>
+            <a:r>
+              <a:rPr sz="1400" b="0">
+                <a:solidFill>
+                  <a:srgbClr val="9AA3AB"/>
+                </a:solidFill>
+              </a:rPr>
+              <a:t>Core : Game · window · scaling</a:t>
+            </a:r>
+          </a:p>
+        </p:txBody>
+      </p:sp>
+      <p:sp>
+        <p:nvSpPr>
+          <p:cNvPr id="101" name="Rounded Rectangle 100"/>
+          <p:cNvSpPr/>
+          <p:nvPr/>
+        </p:nvSpPr>
+        <p:spPr>
+          <a:xfrm>
+            <a:off x="5303520" y="1737360"/>
+            <a:ext cx="2926080" cy="640080"/>
+          </a:xfrm>
+          <a:prstGeom prst="roundRect">
+            <a:avLst>
+              <a:gd name="adj" fmla="val 12000"/>
+            </a:avLst>
+          </a:prstGeom>
+          <a:solidFill>
+            <a:srgbClr val="2E3338"/>
+          </a:solidFill>
+          <a:ln>
+            <a:noFill/>
+          </a:ln>
+          <a:effectLst/>
+        </p:spPr>
+        <p:style>
+          <a:lnRef idx="1">
+            <a:schemeClr val="accent1"/>
+          </a:lnRef>
+          <a:fillRef idx="3">
+            <a:schemeClr val="accent1"/>
+          </a:fillRef>
+          <a:effectRef idx="2">
+            <a:schemeClr val="accent1"/>
+          </a:effectRef>
+          <a:fontRef idx="minor">
+            <a:schemeClr val="lt1"/>
+          </a:fontRef>
+        </p:style>
+        <p:txBody>
+          <a:bodyPr rtlCol="0" anchor="ctr" wrap="square" lIns="73152" rIns="73152"/>
+          <a:lstStyle/>
+          <a:p>
+            <a:pPr algn="ctr"/>
+            <a:r>
+              <a:rPr sz="1500" b="1">
+                <a:solidFill>
+                  <a:srgbClr val="DEE2E6"/>
+                </a:solidFill>
+              </a:rPr>
+              <a:t>Flappy</a:t>
+            </a:r>
+          </a:p>
+        </p:txBody>
+      </p:sp>
+      <p:sp>
+        <p:nvSpPr>
+          <p:cNvPr id="102" name="Rounded Rectangle 101"/>
+          <p:cNvSpPr/>
+          <p:nvPr/>
+        </p:nvSpPr>
+        <p:spPr>
+          <a:xfrm>
+            <a:off x="5303520" y="2560320"/>
+            <a:ext cx="2926080" cy="640080"/>
+          </a:xfrm>
+          <a:prstGeom prst="roundRect">
+            <a:avLst>
+              <a:gd name="adj" fmla="val 12000"/>
+            </a:avLst>
+          </a:prstGeom>
+          <a:solidFill>
+            <a:srgbClr val="2E3338"/>
+          </a:solidFill>
+          <a:ln>
+            <a:noFill/>
+          </a:ln>
+          <a:effectLst/>
+        </p:spPr>
+        <p:style>
+          <a:lnRef idx="1">
+            <a:schemeClr val="accent1"/>
+          </a:lnRef>
+          <a:fillRef idx="3">
+            <a:schemeClr val="accent1"/>
+          </a:fillRef>
+          <a:effectRef idx="2">
+            <a:schemeClr val="accent1"/>
+          </a:effectRef>
+          <a:fontRef idx="minor">
+            <a:schemeClr val="lt1"/>
+          </a:fontRef>
+        </p:style>
+        <p:txBody>
+          <a:bodyPr rtlCol="0" anchor="ctr" wrap="square" lIns="73152" rIns="73152"/>
+          <a:lstStyle/>
+          <a:p>
+            <a:pPr algn="ctr"/>
+            <a:r>
+              <a:rPr sz="1500" b="1">
+                <a:solidFill>
+                  <a:srgbClr val="DEE2E6"/>
+                </a:solidFill>
+              </a:rPr>
+              <a:t>Snake, Sokoban, ...</a:t>
+            </a:r>
+          </a:p>
+        </p:txBody>
+      </p:sp>
+      <p:cxnSp>
+        <p:nvCxnSpPr>
+          <p:cNvPr id="103" name="Connector 102"/>
+          <p:cNvCxnSpPr/>
+          <p:nvPr/>
+        </p:nvCxnSpPr>
+        <p:spPr>
+          <a:xfrm flipH="1">
+            <a:off x="3886200" y="2057400"/>
+            <a:ext cx="1371600" cy="365760"/>
+          </a:xfrm>
+          <a:prstGeom prst="line">
+            <a:avLst/>
+          </a:prstGeom>
+          <a:ln w="25400">
+            <a:solidFill>
+              <a:srgbClr val="9AA3AB"/>
+            </a:solidFill>
+            <a:tailEnd type="triangle"/>
+          </a:ln>
+        </p:spPr>
+        <p:style>
+          <a:lnRef idx="2">
+            <a:schemeClr val="accent1"/>
+          </a:lnRef>
+          <a:fillRef idx="0">
+            <a:schemeClr val="accent1"/>
+          </a:fillRef>
+          <a:effectRef idx="1">
+            <a:schemeClr val="accent1"/>
+          </a:effectRef>
+          <a:fontRef idx="minor">
+            <a:schemeClr val="tx1"/>
+          </a:fontRef>
+        </p:style>
+      </p:cxnSp>
+      <p:sp>
+        <p:nvSpPr>
+          <p:cNvPr id="104" name="TextBox 103"/>
+          <p:cNvSpPr txBox="1"/>
+          <p:nvPr/>
+        </p:nvSpPr>
+        <p:spPr>
+          <a:xfrm>
+            <a:off x="3703320" y="1764792"/>
+            <a:ext cx="1737360" cy="274320"/>
+          </a:xfrm>
+          <a:prstGeom prst="rect">
+            <a:avLst/>
+          </a:prstGeom>
+          <a:noFill/>
+        </p:spPr>
+        <p:txBody>
+          <a:bodyPr wrap="square">
+            <a:spAutoFit/>
+          </a:bodyPr>
+          <a:lstStyle/>
+          <a:p>
+            <a:pPr algn="ctr"/>
+            <a:r>
+              <a:rPr sz="1100" b="0" i="0">
+                <a:solidFill>
+                  <a:srgbClr val="9AA3AB"/>
+                </a:solidFill>
+              </a:rPr>
+              <a:t>uses</a:t>
+            </a:r>
+          </a:p>
+        </p:txBody>
+      </p:sp>
+      <p:cxnSp>
+        <p:nvCxnSpPr>
+          <p:cNvPr id="105" name="Connector 104"/>
+          <p:cNvCxnSpPr/>
+          <p:nvPr/>
+        </p:nvCxnSpPr>
+        <p:spPr>
+          <a:xfrm flipH="1" flipV="1">
+            <a:off x="3886200" y="2697480"/>
+            <a:ext cx="1371600" cy="182880"/>
+          </a:xfrm>
+          <a:prstGeom prst="line">
+            <a:avLst/>
+          </a:prstGeom>
+          <a:ln w="25400">
+            <a:solidFill>
+              <a:srgbClr val="9AA3AB"/>
+            </a:solidFill>
+            <a:tailEnd type="triangle"/>
+          </a:ln>
+        </p:spPr>
+        <p:style>
+          <a:lnRef idx="2">
+            <a:schemeClr val="accent1"/>
+          </a:lnRef>
+          <a:fillRef idx="0">
+            <a:schemeClr val="accent1"/>
+          </a:fillRef>
+          <a:effectRef idx="1">
+            <a:schemeClr val="accent1"/>
+          </a:effectRef>
+          <a:fontRef idx="minor">
+            <a:schemeClr val="tx1"/>
+          </a:fontRef>
+        </p:style>
+      </p:cxnSp>
     </p:spTree>
   </p:cSld>
   <p:clrMapOvr>
@@ -9762,7 +10462,7 @@
         <p:spPr>
           <a:xfrm>
             <a:off x="311700" y="885950"/>
-            <a:ext cx="8520600" cy="4023300"/>
+            <a:ext cx="8520600" cy="905256"/>
           </a:xfrm>
           <a:prstGeom prst="rect">
             <a:avLst/>
@@ -9786,24 +10486,7 @@
             </a:pPr>
             <a:r>
               <a:rPr lang="en"/>
-              <a:t>Create a new MonoGame project “Flappy”</a:t>
-            </a:r>
-            <a:endParaRPr/>
-          </a:p>
-          <a:p>
-            <a:pPr indent="-317500" lvl="1" marL="914400" rtl="0" algn="l">
-              <a:spcBef>
-                <a:spcPts val="0"/>
-              </a:spcBef>
-              <a:spcAft>
-                <a:spcPts val="0"/>
-              </a:spcAft>
-              <a:buSzPts val="1400"/>
-              <a:buChar char="○"/>
-            </a:pPr>
-            <a:r>
-              <a:rPr lang="en"/>
-              <a:t>Start from the gar-starter template on GitHub</a:t>
+              <a:t>Goal: a new game, Flappy, whose Game1 derives from Core.</a:t>
             </a:r>
             <a:endParaRPr/>
           </a:p>
@@ -9820,131 +10503,36 @@
             </a:pPr>
             <a:r>
               <a:rPr lang="en"/>
-              <a:t>Add a reference to the GMDCore class library</a:t>
-            </a:r>
-            <a:endParaRPr/>
-          </a:p>
-          <a:p>
-            <a:pPr indent="-317500" lvl="1" marL="914400" rtl="0" algn="l">
-              <a:spcBef>
-                <a:spcPts val="0"/>
-              </a:spcBef>
-              <a:spcAft>
-                <a:spcPts val="0"/>
-              </a:spcAft>
-              <a:buSzPts val="1400"/>
-              <a:buChar char="○"/>
-            </a:pPr>
-            <a:r>
-              <a:rPr lang="en"/>
-              <a:t>Derive your Game1 class from the Core class in the class library</a:t>
-            </a:r>
-            <a:endParaRPr/>
-          </a:p>
-          <a:p>
-            <a:pPr indent="-317500" lvl="1" marL="914400" rtl="0" algn="l">
-              <a:spcBef>
-                <a:spcPts val="0"/>
-              </a:spcBef>
-              <a:spcAft>
-                <a:spcPts val="0"/>
-              </a:spcAft>
-              <a:buSzPts val="1400"/>
-              <a:buChar char="○"/>
-            </a:pPr>
-            <a:r>
-              <a:rPr lang="en"/>
-              <a:t>Take advantage of the Core class constructor to create a window with…</a:t>
-            </a:r>
-            <a:endParaRPr/>
-          </a:p>
-          <a:p>
-            <a:pPr indent="-304800" lvl="2" marL="1371600" rtl="0" algn="l">
-              <a:spcBef>
-                <a:spcPts val="0"/>
-              </a:spcBef>
-              <a:spcAft>
-                <a:spcPts val="0"/>
-              </a:spcAft>
-              <a:buSzPts val="1200"/>
-              <a:buChar char="■"/>
-            </a:pPr>
-            <a:r>
-              <a:rPr lang="en"/>
-              <a:t>512x288 virtual resolution</a:t>
-            </a:r>
-            <a:endParaRPr/>
-          </a:p>
-          <a:p>
-            <a:pPr indent="-304800" lvl="2" marL="1371600" rtl="0" algn="l">
-              <a:spcBef>
-                <a:spcPts val="0"/>
-              </a:spcBef>
-              <a:spcAft>
-                <a:spcPts val="0"/>
-              </a:spcAft>
-              <a:buSzPts val="1200"/>
-              <a:buChar char="■"/>
-            </a:pPr>
-            <a:r>
-              <a:rPr lang="en"/>
-              <a:t>1280x720 window resolution</a:t>
-            </a:r>
-            <a:endParaRPr/>
-          </a:p>
-          <a:p>
-            <a:pPr indent="-317500" lvl="1" marL="914400" rtl="0" algn="l">
-              <a:spcBef>
-                <a:spcPts val="0"/>
-              </a:spcBef>
-              <a:spcAft>
-                <a:spcPts val="0"/>
-              </a:spcAft>
-              <a:buSzPts val="1400"/>
-              <a:buChar char="○"/>
-            </a:pPr>
-            <a:r>
-              <a:rPr lang="en"/>
-              <a:t>The implementation of your Game1 constructor should be empty for now</a:t>
-            </a:r>
-            <a:endParaRPr/>
-          </a:p>
-          <a:p>
-            <a:pPr indent="-330200" lvl="0" marL="457200" rtl="0" algn="l">
-              <a:spcBef>
-                <a:spcPts val="0"/>
-              </a:spcBef>
-              <a:spcAft>
-                <a:spcPts val="0"/>
-              </a:spcAft>
-              <a:buSzPts val="1600"/>
-              <a:buChar char="●"/>
-            </a:pPr>
-            <a:r>
-              <a:rPr lang="en"/>
-              <a:t>Remove the GraphicsDevice &amp; SpriteBatch fields from the Game1 class</a:t>
-            </a:r>
-            <a:endParaRPr/>
-          </a:p>
-          <a:p>
-            <a:pPr indent="-317500" lvl="1" marL="914400" rtl="0" algn="l">
-              <a:spcBef>
-                <a:spcPts val="0"/>
-              </a:spcBef>
-              <a:spcAft>
-                <a:spcPts val="0"/>
-              </a:spcAft>
-              <a:buSzPts val="1400"/>
-              <a:buChar char="○"/>
-            </a:pPr>
-            <a:r>
-              <a:rPr lang="en"/>
-              <a:t>We are now using the base Core class counterparts</a:t>
+              <a:t>512 × 288 virtual resolution in a 1280 × 720 window.</a:t>
             </a:r>
             <a:endParaRPr/>
           </a:p>
         </p:txBody>
       </p:sp>
+      <p:pic>
+        <p:nvPicPr>
+          <p:cNvPr id="106" name="Picture 105" descr="f0.png"/>
+          <p:cNvPicPr>
+            <a:picLocks noChangeAspect="1"/>
+          </p:cNvPicPr>
+          <p:nvPr/>
+        </p:nvPicPr>
+        <p:blipFill>
+          <a:blip r:embed="rId3"/>
+          <a:stretch>
+            <a:fillRect/>
+          </a:stretch>
+        </p:blipFill>
+        <p:spPr>
+          <a:xfrm>
+            <a:off x="2377440" y="2148840"/>
+            <a:ext cx="4389120" cy="2468880"/>
+          </a:xfrm>
+          <a:prstGeom prst="rect">
+            <a:avLst/>
+          </a:prstGeom>
+        </p:spPr>
+      </p:pic>
     </p:spTree>
   </p:cSld>
   <p:clrMapOvr>
@@ -10800,7 +11388,7 @@
         <p:spPr>
           <a:xfrm>
             <a:off x="311700" y="885950"/>
-            <a:ext cx="8520600" cy="4023300"/>
+            <a:ext cx="8520600" cy="521208"/>
           </a:xfrm>
           <a:prstGeom prst="rect">
             <a:avLst/>
@@ -10824,67 +11412,7 @@
             </a:pPr>
             <a:r>
               <a:rPr lang="en"/>
-              <a:t>Add a </a:t>
-            </a:r>
-            <a:r>
-              <a:rPr lang="en" u="sng">
-                <a:solidFill>
-                  <a:schemeClr val="hlink"/>
-                </a:solidFill>
-                <a:hlinkClick r:id="rId3"/>
-              </a:rPr>
-              <a:t>background image</a:t>
-            </a:r>
-            <a:r>
-              <a:rPr lang="en"/>
-              <a:t> and a </a:t>
-            </a:r>
-            <a:r>
-              <a:rPr lang="en" u="sng">
-                <a:solidFill>
-                  <a:schemeClr val="hlink"/>
-                </a:solidFill>
-                <a:hlinkClick r:id="rId4"/>
-              </a:rPr>
-              <a:t>ground image</a:t>
-            </a:r>
-            <a:r>
-              <a:rPr lang="en"/>
-              <a:t> to the empty screen</a:t>
-            </a:r>
-            <a:endParaRPr/>
-          </a:p>
-          <a:p>
-            <a:pPr indent="-317500" lvl="1" marL="914400" rtl="0" algn="l">
-              <a:spcBef>
-                <a:spcPts val="0"/>
-              </a:spcBef>
-              <a:spcAft>
-                <a:spcPts val="0"/>
-              </a:spcAft>
-              <a:buSzPts val="1400"/>
-              <a:buChar char="○"/>
-            </a:pPr>
-            <a:r>
-              <a:rPr lang="en"/>
-              <a:t>Store the two images in an “images” folder inside your Assets folder</a:t>
-            </a:r>
-            <a:endParaRPr/>
-          </a:p>
-          <a:p>
-            <a:pPr indent="-317500" lvl="1" marL="914400" rtl="0" algn="l">
-              <a:spcBef>
-                <a:spcPts val="0"/>
-              </a:spcBef>
-              <a:spcAft>
-                <a:spcPts val="0"/>
-              </a:spcAft>
-              <a:buSzPts val="1400"/>
-              <a:buChar char="○"/>
-            </a:pPr>
-            <a:r>
-              <a:rPr lang="en"/>
-              <a:t>Remember to call ContentManager.Load inside LoadContent()</a:t>
+              <a:t>Goal: draw the background and the ground.</a:t>
             </a:r>
             <a:endParaRPr/>
           </a:p>
@@ -10892,22 +11420,22 @@
       </p:sp>
       <p:pic>
         <p:nvPicPr>
-          <p:cNvPr id="118" name="Picture 118" descr="flappy1.png"/>
+          <p:cNvPr id="118" name="Picture 117" descr="f2.png"/>
           <p:cNvPicPr>
             <a:picLocks noChangeAspect="1"/>
           </p:cNvPicPr>
           <p:nvPr/>
         </p:nvPicPr>
         <p:blipFill>
-          <a:blip r:embed="rId6"/>
+          <a:blip r:embed="rId5"/>
           <a:stretch>
             <a:fillRect/>
           </a:stretch>
         </p:blipFill>
         <p:spPr>
           <a:xfrm>
-            <a:off x="2193389" y="1992955"/>
-            <a:ext cx="4757226" cy="2675939"/>
+            <a:off x="2377440" y="2148840"/>
+            <a:ext cx="4389120" cy="2468880"/>
           </a:xfrm>
           <a:prstGeom prst="rect">
             <a:avLst/>
@@ -11312,7 +11840,7 @@
         <p:spPr>
           <a:xfrm>
             <a:off x="311700" y="885950"/>
-            <a:ext cx="8520600" cy="4023300"/>
+            <a:ext cx="8520600" cy="905256"/>
           </a:xfrm>
           <a:prstGeom prst="rect">
             <a:avLst/>
@@ -11336,126 +11864,53 @@
             </a:pPr>
             <a:r>
               <a:rPr lang="en"/>
-              <a:t>Implement an infinitely scrolling background using the two provided images</a:t>
+              <a:t>Goal: scroll them forever, the background slower than the ground.</a:t>
             </a:r>
             <a:endParaRPr/>
           </a:p>
           <a:p>
-            <a:pPr indent="-317500" lvl="1" marL="914400" rtl="0" algn="l">
-              <a:spcBef>
-                <a:spcPts val="0"/>
-              </a:spcBef>
-              <a:spcAft>
-                <a:spcPts val="0"/>
-              </a:spcAft>
-              <a:buSzPts val="1400"/>
-              <a:buChar char="○"/>
+            <a:pPr indent="-330200" lvl="0" marL="457200" rtl="0" algn="l">
+              <a:spcBef>
+                <a:spcPts val="0"/>
+              </a:spcBef>
+              <a:spcAft>
+                <a:spcPts val="0"/>
+              </a:spcAft>
+              <a:buSzPts val="1600"/>
+              <a:buChar char="●"/>
             </a:pPr>
             <a:r>
               <a:rPr lang="en"/>
-              <a:t>The background must move slower than the ground in order to create the desired parallax effect</a:t>
-            </a:r>
-            <a:endParaRPr/>
-          </a:p>
-          <a:p>
-            <a:pPr indent="-317500" lvl="1" marL="914400" rtl="0" algn="l">
-              <a:spcBef>
-                <a:spcPts val="0"/>
-              </a:spcBef>
-              <a:spcAft>
-                <a:spcPts val="0"/>
-              </a:spcAft>
-              <a:buSzPts val="1400"/>
-              <a:buChar char="○"/>
-            </a:pPr>
-            <a:r>
-              <a:rPr lang="en"/>
-              <a:t>You will need t</a:t>
-            </a:r>
-            <a:r>
-              <a:rPr lang="en"/>
-              <a:t>w</a:t>
-            </a:r>
-            <a:r>
-              <a:rPr lang="en"/>
-              <a:t>o new </a:t>
-            </a:r>
-            <a:r>
-              <a:rPr lang="en"/>
-              <a:t>constants to control the scroll speed as well as two new fields to keep track of the position of each element</a:t>
-            </a:r>
-            <a:endParaRPr/>
-          </a:p>
-          <a:p>
-            <a:pPr indent="-317500" lvl="1" marL="914400" rtl="0" algn="l">
-              <a:spcBef>
-                <a:spcPts val="0"/>
-              </a:spcBef>
-              <a:spcAft>
-                <a:spcPts val="0"/>
-              </a:spcAft>
-              <a:buSzPts val="1400"/>
-              <a:buChar char="○"/>
-            </a:pPr>
-            <a:r>
-              <a:rPr lang="en"/>
-              <a:t>For the graphics provided to you, the “looping points” are</a:t>
-            </a:r>
-            <a:endParaRPr/>
-          </a:p>
-          <a:p>
-            <a:pPr indent="-304800" lvl="2" marL="1371600" rtl="0" algn="l">
-              <a:spcBef>
-                <a:spcPts val="0"/>
-              </a:spcBef>
-              <a:spcAft>
-                <a:spcPts val="0"/>
-              </a:spcAft>
-              <a:buSzPts val="1200"/>
-              <a:buChar char="■"/>
-            </a:pPr>
-            <a:r>
-              <a:rPr lang="en"/>
-              <a:t>Background: 413</a:t>
-            </a:r>
-            <a:endParaRPr/>
-          </a:p>
-          <a:p>
-            <a:pPr indent="-304800" lvl="2" marL="1371600" rtl="0" algn="l">
-              <a:spcBef>
-                <a:spcPts val="0"/>
-              </a:spcBef>
-              <a:spcAft>
-                <a:spcPts val="0"/>
-              </a:spcAft>
-              <a:buSzPts val="1200"/>
-              <a:buChar char="■"/>
-            </a:pPr>
-            <a:r>
-              <a:rPr lang="en"/>
-              <a:t>Ground: 512 (virtual width)</a:t>
-            </a:r>
-            <a:endParaRPr/>
-          </a:p>
-          <a:p>
-            <a:pPr indent="-317500" lvl="1" marL="914400" rtl="0" algn="l">
-              <a:spcBef>
-                <a:spcPts val="0"/>
-              </a:spcBef>
-              <a:spcAft>
-                <a:spcPts val="0"/>
-              </a:spcAft>
-              <a:buSzPts val="1400"/>
-              <a:buChar char="○"/>
-            </a:pPr>
-            <a:r>
-              <a:rPr lang="en"/>
-              <a:t>The % operator might come in handy here</a:t>
+              <a:t>Looping points: background 413, ground 512. Try the % operator.</a:t>
             </a:r>
             <a:endParaRPr/>
           </a:p>
         </p:txBody>
       </p:sp>
+      <p:pic>
+        <p:nvPicPr>
+          <p:cNvPr id="132" name="Picture 131" descr="f2.png"/>
+          <p:cNvPicPr>
+            <a:picLocks noChangeAspect="1"/>
+          </p:cNvPicPr>
+          <p:nvPr/>
+        </p:nvPicPr>
+        <p:blipFill>
+          <a:blip r:embed="rId3"/>
+          <a:stretch>
+            <a:fillRect/>
+          </a:stretch>
+        </p:blipFill>
+        <p:spPr>
+          <a:xfrm>
+            <a:off x="2377440" y="2148840"/>
+            <a:ext cx="4389120" cy="2468880"/>
+          </a:xfrm>
+          <a:prstGeom prst="rect">
+            <a:avLst/>
+          </a:prstGeom>
+        </p:spPr>
+      </p:pic>
     </p:spTree>
   </p:cSld>
   <p:clrMapOvr>
@@ -12091,7 +12546,7 @@
         <p:spPr>
           <a:xfrm>
             <a:off x="311700" y="885950"/>
-            <a:ext cx="8520600" cy="4023300"/>
+            <a:ext cx="8520600" cy="521208"/>
           </a:xfrm>
           <a:prstGeom prst="rect">
             <a:avLst/>
@@ -12115,265 +12570,349 @@
             </a:pPr>
             <a:r>
               <a:rPr lang="en"/>
-              <a:t>Add a </a:t>
-            </a:r>
-            <a:r>
-              <a:rPr lang="en" u="sng">
-                <a:solidFill>
-                  <a:schemeClr val="hlink"/>
-                </a:solidFill>
-                <a:hlinkClick r:id="rId3"/>
-              </a:rPr>
-              <a:t>bird</a:t>
-            </a:r>
-            <a:r>
-              <a:rPr lang="en"/>
-              <a:t> to the screen</a:t>
+              <a:t>Goal: a Bird class with Update and Draw. But how does it get its texture?</a:t>
             </a:r>
             <a:endParaRPr/>
           </a:p>
-          <a:p>
-            <a:pPr indent="-317500" lvl="1" marL="914400" rtl="0" algn="l">
-              <a:spcBef>
-                <a:spcPts val="0"/>
-              </a:spcBef>
-              <a:spcAft>
-                <a:spcPts val="0"/>
-              </a:spcAft>
-              <a:buSzPts val="1400"/>
-              <a:buChar char="○"/>
-            </a:pPr>
-            <a:r>
-              <a:rPr lang="en"/>
-              <a:t>Create a Bird class to encapsulate the relevant data (for now Position)</a:t>
-            </a:r>
-            <a:endParaRPr/>
-          </a:p>
-          <a:p>
-            <a:pPr indent="-317500" lvl="1" marL="914400" rtl="0" algn="l">
-              <a:spcBef>
-                <a:spcPts val="0"/>
-              </a:spcBef>
-              <a:spcAft>
-                <a:spcPts val="0"/>
-              </a:spcAft>
-              <a:buSzPts val="1400"/>
-              <a:buChar char="○"/>
-            </a:pPr>
-            <a:r>
-              <a:rPr lang="en"/>
-              <a:t>Remember to add relevant methods (Update and Draw)</a:t>
-            </a:r>
-            <a:endParaRPr/>
-          </a:p>
-          <a:p>
-            <a:pPr indent="-330200" lvl="0" marL="457200" rtl="0" algn="l">
-              <a:spcBef>
-                <a:spcPts val="0"/>
-              </a:spcBef>
-              <a:spcAft>
-                <a:spcPts val="0"/>
-              </a:spcAft>
-              <a:buSzPts val="1600"/>
-              <a:buChar char="●"/>
-            </a:pPr>
-            <a:r>
-              <a:rPr lang="en"/>
-              <a:t>How do we get a reference to the Bird image in the bird class? Multiple approaches…</a:t>
-            </a:r>
-            <a:endParaRPr/>
-          </a:p>
-          <a:p>
-            <a:pPr indent="-317500" lvl="1" marL="914400" rtl="0" algn="l">
-              <a:spcBef>
-                <a:spcPts val="0"/>
-              </a:spcBef>
-              <a:spcAft>
-                <a:spcPts val="0"/>
-              </a:spcAft>
-              <a:buSzPts val="1400"/>
-              <a:buChar char="○"/>
-            </a:pPr>
-            <a:r>
-              <a:rPr lang="en"/>
-              <a:t>Make the texture available as a public static field in the Game1 class (like last week)</a:t>
-            </a:r>
-            <a:endParaRPr/>
-          </a:p>
-          <a:p>
-            <a:pPr indent="-304800" lvl="2" marL="1371600" rtl="0" algn="l">
-              <a:spcBef>
-                <a:spcPts val="0"/>
-              </a:spcBef>
-              <a:spcAft>
-                <a:spcPts val="0"/>
-              </a:spcAft>
-              <a:buSzPts val="1200"/>
-              <a:buChar char="■"/>
-            </a:pPr>
-            <a:r>
-              <a:rPr lang="en"/>
-              <a:t>This breaks encapsulation and bloats the Game1 class…</a:t>
-            </a:r>
-            <a:endParaRPr/>
-          </a:p>
-          <a:p>
-            <a:pPr indent="-317500" lvl="1" marL="914400" rtl="0" algn="l">
-              <a:spcBef>
-                <a:spcPts val="0"/>
-              </a:spcBef>
-              <a:spcAft>
-                <a:spcPts val="0"/>
-              </a:spcAft>
-              <a:buSzPts val="1400"/>
-              <a:buChar char="○"/>
-            </a:pPr>
-            <a:r>
-              <a:rPr lang="en"/>
-              <a:t>I</a:t>
-            </a:r>
-            <a:r>
-              <a:rPr lang="en"/>
-              <a:t>nject the Texture2D or ContentManager into the bird upon initialization</a:t>
-            </a:r>
-            <a:endParaRPr/>
-          </a:p>
-          <a:p>
-            <a:pPr indent="-304800" lvl="2" marL="1371600" rtl="0" algn="l">
-              <a:spcBef>
-                <a:spcPts val="0"/>
-              </a:spcBef>
-              <a:spcAft>
-                <a:spcPts val="0"/>
-              </a:spcAft>
-              <a:buSzPts val="1200"/>
-              <a:buChar char="■"/>
-            </a:pPr>
-            <a:r>
-              <a:rPr lang="en"/>
-              <a:t>This is a bit tedious to have to do for every instantiation of an entity</a:t>
-            </a:r>
-            <a:endParaRPr/>
-          </a:p>
-          <a:p>
-            <a:pPr indent="-317500" lvl="1" marL="914400" rtl="0" algn="l">
-              <a:spcBef>
-                <a:spcPts val="0"/>
-              </a:spcBef>
-              <a:spcAft>
-                <a:spcPts val="0"/>
-              </a:spcAft>
-              <a:buSzPts val="1400"/>
-              <a:buChar char="○"/>
-            </a:pPr>
-            <a:r>
-              <a:rPr lang="en"/>
-              <a:t>Make the ContentManager available across our game files</a:t>
-            </a:r>
-            <a:endParaRPr/>
-          </a:p>
-          <a:p>
-            <a:pPr indent="-304800" lvl="2" marL="1371600" rtl="0" algn="l">
-              <a:spcBef>
-                <a:spcPts val="0"/>
-              </a:spcBef>
-              <a:spcAft>
-                <a:spcPts val="0"/>
-              </a:spcAft>
-              <a:buSzPts val="1200"/>
-              <a:buChar char="■"/>
-            </a:pPr>
-            <a:r>
-              <a:rPr lang="en"/>
-              <a:t>marking it as a static field in the Core library</a:t>
-            </a:r>
-            <a:endParaRPr/>
-          </a:p>
-          <a:p>
-            <a:pPr indent="-317500" lvl="1" marL="914400" rtl="0" algn="l">
-              <a:spcBef>
-                <a:spcPts val="0"/>
-              </a:spcBef>
-              <a:spcAft>
-                <a:spcPts val="0"/>
-              </a:spcAft>
-              <a:buClr>
-                <a:schemeClr val="accent1"/>
-              </a:buClr>
-              <a:buSzPts val="1400"/>
-              <a:buChar char="○"/>
-            </a:pPr>
-            <a:r>
-              <a:rPr lang="en">
-                <a:solidFill>
-                  <a:schemeClr val="accent1"/>
-                </a:solidFill>
-              </a:rPr>
-              <a:t>Create a separate, static Art class that holds references to all assets</a:t>
-            </a:r>
-            <a:endParaRPr>
-              <a:solidFill>
-                <a:schemeClr val="accent1"/>
-              </a:solidFill>
-            </a:endParaRPr>
-          </a:p>
-          <a:p>
-            <a:pPr indent="-304800" lvl="2" marL="1371600" rtl="0" algn="l">
-              <a:spcBef>
-                <a:spcPts val="0"/>
-              </a:spcBef>
-              <a:spcAft>
-                <a:spcPts val="0"/>
-              </a:spcAft>
-              <a:buClr>
-                <a:schemeClr val="accent1"/>
-              </a:buClr>
-              <a:buSzPts val="1200"/>
-              <a:buChar char="■"/>
-            </a:pPr>
-            <a:r>
-              <a:rPr lang="en">
-                <a:solidFill>
-                  <a:schemeClr val="accent1"/>
-                </a:solidFill>
-              </a:rPr>
-              <a:t>This class would then be passed the ContentManager in its constructor</a:t>
-            </a:r>
-            <a:endParaRPr/>
-          </a:p>
-          <a:p>
-            <a:pPr indent="-330200" lvl="0" marL="457200" rtl="0" algn="l">
-              <a:spcBef>
-                <a:spcPts val="0"/>
-              </a:spcBef>
-              <a:spcAft>
-                <a:spcPts val="0"/>
-              </a:spcAft>
-              <a:buSzPts val="1600"/>
-              <a:buChar char="●"/>
-            </a:pPr>
-            <a:r>
-              <a:rPr lang="en"/>
-              <a:t>Refactor your existing asset references (background and ground) to use the Art class</a:t>
-            </a:r>
-            <a:endParaRPr/>
-          </a:p>
-          <a:p>
-            <a:pPr indent="-330200" lvl="0" marL="457200" rtl="0" algn="l">
-              <a:spcBef>
-                <a:spcPts val="0"/>
-              </a:spcBef>
-              <a:spcAft>
-                <a:spcPts val="0"/>
-              </a:spcAft>
-              <a:buSzPts val="1600"/>
-              <a:buChar char="●"/>
-            </a:pPr>
-            <a:r>
-              <a:rPr lang="en"/>
-              <a:t>Initialize the Bird in the Game1 Initialize method with a default position of 100,100</a:t>
-            </a:r>
-            <a:endParaRPr/>
+        </p:txBody>
+      </p:sp>
+      <p:sp>
+        <p:nvSpPr>
+          <p:cNvPr id="144" name="Rounded Rectangle 143"/>
+          <p:cNvSpPr/>
+          <p:nvPr/>
+        </p:nvSpPr>
+        <p:spPr>
+          <a:xfrm>
+            <a:off x="411480" y="1463040"/>
+            <a:ext cx="1965960" cy="1143000"/>
+          </a:xfrm>
+          <a:prstGeom prst="roundRect">
+            <a:avLst>
+              <a:gd name="adj" fmla="val 12000"/>
+            </a:avLst>
+          </a:prstGeom>
+          <a:solidFill>
+            <a:srgbClr val="2E3338"/>
+          </a:solidFill>
+          <a:ln>
+            <a:noFill/>
+          </a:ln>
+          <a:effectLst/>
+        </p:spPr>
+        <p:style>
+          <a:lnRef idx="1">
+            <a:schemeClr val="accent1"/>
+          </a:lnRef>
+          <a:fillRef idx="3">
+            <a:schemeClr val="accent1"/>
+          </a:fillRef>
+          <a:effectRef idx="2">
+            <a:schemeClr val="accent1"/>
+          </a:effectRef>
+          <a:fontRef idx="minor">
+            <a:schemeClr val="lt1"/>
+          </a:fontRef>
+        </p:style>
+        <p:txBody>
+          <a:bodyPr rtlCol="0" anchor="ctr" wrap="square" lIns="73152" rIns="73152"/>
+          <a:lstStyle/>
+          <a:p>
+            <a:pPr algn="ctr"/>
+            <a:r>
+              <a:rPr sz="1400" b="1">
+                <a:solidFill>
+                  <a:srgbClr val="DEE2E6"/>
+                </a:solidFill>
+              </a:rPr>
+              <a:t>A static field in Game1</a:t>
+            </a:r>
+          </a:p>
+          <a:p>
+            <a:pPr algn="ctr"/>
+            <a:r>
+              <a:rPr sz="1200" b="0">
+                <a:solidFill>
+                  <a:srgbClr val="9AA3AB"/>
+                </a:solidFill>
+              </a:rPr>
+              <a:t>breaks encapsulation,</a:t>
+            </a:r>
+          </a:p>
+          <a:p>
+            <a:pPr algn="ctr"/>
+            <a:r>
+              <a:rPr sz="1200" b="0">
+                <a:solidFill>
+                  <a:srgbClr val="9AA3AB"/>
+                </a:solidFill>
+              </a:rPr>
+              <a:t>Game1 grows</a:t>
+            </a:r>
+          </a:p>
+        </p:txBody>
+      </p:sp>
+      <p:sp>
+        <p:nvSpPr>
+          <p:cNvPr id="145" name="Rounded Rectangle 144"/>
+          <p:cNvSpPr/>
+          <p:nvPr/>
+        </p:nvSpPr>
+        <p:spPr>
+          <a:xfrm>
+            <a:off x="2514600" y="1463040"/>
+            <a:ext cx="1965960" cy="1143000"/>
+          </a:xfrm>
+          <a:prstGeom prst="roundRect">
+            <a:avLst>
+              <a:gd name="adj" fmla="val 12000"/>
+            </a:avLst>
+          </a:prstGeom>
+          <a:solidFill>
+            <a:srgbClr val="2E3338"/>
+          </a:solidFill>
+          <a:ln>
+            <a:noFill/>
+          </a:ln>
+          <a:effectLst/>
+        </p:spPr>
+        <p:style>
+          <a:lnRef idx="1">
+            <a:schemeClr val="accent1"/>
+          </a:lnRef>
+          <a:fillRef idx="3">
+            <a:schemeClr val="accent1"/>
+          </a:fillRef>
+          <a:effectRef idx="2">
+            <a:schemeClr val="accent1"/>
+          </a:effectRef>
+          <a:fontRef idx="minor">
+            <a:schemeClr val="lt1"/>
+          </a:fontRef>
+        </p:style>
+        <p:txBody>
+          <a:bodyPr rtlCol="0" anchor="ctr" wrap="square" lIns="73152" rIns="73152"/>
+          <a:lstStyle/>
+          <a:p>
+            <a:pPr algn="ctr"/>
+            <a:r>
+              <a:rPr sz="1400" b="1">
+                <a:solidFill>
+                  <a:srgbClr val="DEE2E6"/>
+                </a:solidFill>
+              </a:rPr>
+              <a:t>Pass it in</a:t>
+            </a:r>
+          </a:p>
+          <a:p>
+            <a:pPr algn="ctr"/>
+            <a:r>
+              <a:rPr sz="1200" b="0">
+                <a:solidFill>
+                  <a:srgbClr val="9AA3AB"/>
+                </a:solidFill>
+              </a:rPr>
+              <a:t>tedious for</a:t>
+            </a:r>
+          </a:p>
+          <a:p>
+            <a:pPr algn="ctr"/>
+            <a:r>
+              <a:rPr sz="1200" b="0">
+                <a:solidFill>
+                  <a:srgbClr val="9AA3AB"/>
+                </a:solidFill>
+              </a:rPr>
+              <a:t>every new entity</a:t>
+            </a:r>
+          </a:p>
+        </p:txBody>
+      </p:sp>
+      <p:sp>
+        <p:nvSpPr>
+          <p:cNvPr id="146" name="Rounded Rectangle 145"/>
+          <p:cNvSpPr/>
+          <p:nvPr/>
+        </p:nvSpPr>
+        <p:spPr>
+          <a:xfrm>
+            <a:off x="4617720" y="1463040"/>
+            <a:ext cx="1965960" cy="1143000"/>
+          </a:xfrm>
+          <a:prstGeom prst="roundRect">
+            <a:avLst>
+              <a:gd name="adj" fmla="val 12000"/>
+            </a:avLst>
+          </a:prstGeom>
+          <a:solidFill>
+            <a:srgbClr val="2E3338"/>
+          </a:solidFill>
+          <a:ln>
+            <a:noFill/>
+          </a:ln>
+          <a:effectLst/>
+        </p:spPr>
+        <p:style>
+          <a:lnRef idx="1">
+            <a:schemeClr val="accent1"/>
+          </a:lnRef>
+          <a:fillRef idx="3">
+            <a:schemeClr val="accent1"/>
+          </a:fillRef>
+          <a:effectRef idx="2">
+            <a:schemeClr val="accent1"/>
+          </a:effectRef>
+          <a:fontRef idx="minor">
+            <a:schemeClr val="lt1"/>
+          </a:fontRef>
+        </p:style>
+        <p:txBody>
+          <a:bodyPr rtlCol="0" anchor="ctr" wrap="square" lIns="73152" rIns="73152"/>
+          <a:lstStyle/>
+          <a:p>
+            <a:pPr algn="ctr"/>
+            <a:r>
+              <a:rPr sz="1400" b="1">
+                <a:solidFill>
+                  <a:srgbClr val="DEE2E6"/>
+                </a:solidFill>
+              </a:rPr>
+              <a:t>A static ContentManager</a:t>
+            </a:r>
+          </a:p>
+          <a:p>
+            <a:pPr algn="ctr"/>
+            <a:r>
+              <a:rPr sz="1200" b="0">
+                <a:solidFill>
+                  <a:srgbClr val="9AA3AB"/>
+                </a:solidFill>
+              </a:rPr>
+              <a:t>everything can</a:t>
+            </a:r>
+          </a:p>
+          <a:p>
+            <a:pPr algn="ctr"/>
+            <a:r>
+              <a:rPr sz="1200" b="0">
+                <a:solidFill>
+                  <a:srgbClr val="9AA3AB"/>
+                </a:solidFill>
+              </a:rPr>
+              <a:t>load anything</a:t>
+            </a:r>
+          </a:p>
+        </p:txBody>
+      </p:sp>
+      <p:sp>
+        <p:nvSpPr>
+          <p:cNvPr id="147" name="Rounded Rectangle 146"/>
+          <p:cNvSpPr/>
+          <p:nvPr/>
+        </p:nvSpPr>
+        <p:spPr>
+          <a:xfrm>
+            <a:off x="6720840" y="1463040"/>
+            <a:ext cx="1965960" cy="1143000"/>
+          </a:xfrm>
+          <a:prstGeom prst="roundRect">
+            <a:avLst>
+              <a:gd name="adj" fmla="val 12000"/>
+            </a:avLst>
+          </a:prstGeom>
+          <a:solidFill>
+            <a:srgbClr val="2E3338"/>
+          </a:solidFill>
+          <a:ln w="25400">
+            <a:solidFill>
+              <a:srgbClr val="D45D35"/>
+            </a:solidFill>
+          </a:ln>
+          <a:effectLst/>
+        </p:spPr>
+        <p:style>
+          <a:lnRef idx="1">
+            <a:schemeClr val="accent1"/>
+          </a:lnRef>
+          <a:fillRef idx="3">
+            <a:schemeClr val="accent1"/>
+          </a:fillRef>
+          <a:effectRef idx="2">
+            <a:schemeClr val="accent1"/>
+          </a:effectRef>
+          <a:fontRef idx="minor">
+            <a:schemeClr val="lt1"/>
+          </a:fontRef>
+        </p:style>
+        <p:txBody>
+          <a:bodyPr rtlCol="0" anchor="ctr" wrap="square" lIns="73152" rIns="73152"/>
+          <a:lstStyle/>
+          <a:p>
+            <a:pPr algn="ctr"/>
+            <a:r>
+              <a:rPr sz="1400" b="1">
+                <a:solidFill>
+                  <a:srgbClr val="DEE2E6"/>
+                </a:solidFill>
+              </a:rPr>
+              <a:t>A static Art class</a:t>
+            </a:r>
+          </a:p>
+          <a:p>
+            <a:pPr algn="ctr"/>
+            <a:r>
+              <a:rPr sz="1200" b="0">
+                <a:solidFill>
+                  <a:srgbClr val="9AA3AB"/>
+                </a:solidFill>
+              </a:rPr>
+              <a:t>one place</a:t>
+            </a:r>
+          </a:p>
+          <a:p>
+            <a:pPr algn="ctr"/>
+            <a:r>
+              <a:rPr sz="1200" b="0">
+                <a:solidFill>
+                  <a:srgbClr val="9AA3AB"/>
+                </a:solidFill>
+              </a:rPr>
+              <a:t>for every asset</a:t>
+            </a:r>
+          </a:p>
+        </p:txBody>
+      </p:sp>
+      <p:sp>
+        <p:nvSpPr>
+          <p:cNvPr id="148" name="TextBox 147"/>
+          <p:cNvSpPr txBox="1"/>
+          <p:nvPr/>
+        </p:nvSpPr>
+        <p:spPr>
+          <a:xfrm>
+            <a:off x="457200" y="2926080"/>
+            <a:ext cx="8229600" cy="731520"/>
+          </a:xfrm>
+          <a:prstGeom prst="rect">
+            <a:avLst/>
+          </a:prstGeom>
+          <a:noFill/>
+        </p:spPr>
+        <p:txBody>
+          <a:bodyPr wrap="square">
+            <a:spAutoFit/>
+          </a:bodyPr>
+          <a:lstStyle/>
+          <a:p>
+            <a:pPr algn="ctr"/>
+            <a:r>
+              <a:rPr sz="1500" b="1" i="0">
+                <a:solidFill>
+                  <a:srgbClr val="DEE2E6"/>
+                </a:solidFill>
+              </a:rPr>
+              <a:t>Which would you pick? We go with Art, and move the background and ground into it too.</a:t>
+            </a:r>
           </a:p>
         </p:txBody>
       </p:sp>
@@ -13177,7 +13716,7 @@
         <p:spPr>
           <a:xfrm>
             <a:off x="311700" y="885950"/>
-            <a:ext cx="8520600" cy="4023300"/>
+            <a:ext cx="8520600" cy="521208"/>
           </a:xfrm>
           <a:prstGeom prst="rect">
             <a:avLst/>
@@ -13201,63 +13740,36 @@
             </a:pPr>
             <a:r>
               <a:rPr lang="en"/>
-              <a:t>Add gravity to make the bird fall</a:t>
-            </a:r>
-            <a:endParaRPr/>
-          </a:p>
-          <a:p>
-            <a:pPr indent="-317500" lvl="1" marL="914400" rtl="0" algn="l">
-              <a:spcBef>
-                <a:spcPts val="0"/>
-              </a:spcBef>
-              <a:spcAft>
-                <a:spcPts val="0"/>
-              </a:spcAft>
-              <a:buSzPts val="1400"/>
-              <a:buChar char="○"/>
-            </a:pPr>
-            <a:r>
-              <a:rPr lang="en"/>
-              <a:t>You will need to introduce two new fields</a:t>
-            </a:r>
-            <a:endParaRPr/>
-          </a:p>
-          <a:p>
-            <a:pPr indent="-304800" lvl="2" marL="1371600" rtl="0" algn="l">
-              <a:spcBef>
-                <a:spcPts val="0"/>
-              </a:spcBef>
-              <a:spcAft>
-                <a:spcPts val="0"/>
-              </a:spcAft>
-              <a:buSzPts val="1200"/>
-              <a:buChar char="■"/>
-            </a:pPr>
-            <a:r>
-              <a:rPr lang="en"/>
-              <a:t>One constant for gravity (pick a fitting value) and another to keep track of the velocity of the bird</a:t>
-            </a:r>
-            <a:endParaRPr/>
-          </a:p>
-          <a:p>
-            <a:pPr indent="-304800" lvl="2" marL="1371600" rtl="0" algn="l">
-              <a:spcBef>
-                <a:spcPts val="0"/>
-              </a:spcBef>
-              <a:spcAft>
-                <a:spcPts val="0"/>
-              </a:spcAft>
-              <a:buSzPts val="1200"/>
-              <a:buChar char="■"/>
-            </a:pPr>
-            <a:r>
-              <a:rPr lang="en"/>
-              <a:t>Remember to normalize both the update in position and velocity by using deltatime</a:t>
+              <a:t>Goal: gravity. A velocity that grows every frame, scaled by delta time.</a:t>
             </a:r>
             <a:endParaRPr/>
           </a:p>
         </p:txBody>
       </p:sp>
+      <p:pic>
+        <p:nvPicPr>
+          <p:cNvPr id="150" name="Picture 149" descr="f3.png"/>
+          <p:cNvPicPr>
+            <a:picLocks noChangeAspect="1"/>
+          </p:cNvPicPr>
+          <p:nvPr/>
+        </p:nvPicPr>
+        <p:blipFill>
+          <a:blip r:embed="rId3"/>
+          <a:stretch>
+            <a:fillRect/>
+          </a:stretch>
+        </p:blipFill>
+        <p:spPr>
+          <a:xfrm>
+            <a:off x="2377440" y="2148840"/>
+            <a:ext cx="4389120" cy="2468880"/>
+          </a:xfrm>
+          <a:prstGeom prst="rect">
+            <a:avLst/>
+          </a:prstGeom>
+        </p:spPr>
+      </p:pic>
     </p:spTree>
   </p:cSld>
   <p:clrMapOvr>
@@ -13657,7 +14169,7 @@
         <p:spPr>
           <a:xfrm>
             <a:off x="311700" y="885950"/>
-            <a:ext cx="8520600" cy="4023300"/>
+            <a:ext cx="8520600" cy="521208"/>
           </a:xfrm>
           <a:prstGeom prst="rect">
             <a:avLst/>
@@ -13681,247 +14193,312 @@
             </a:pPr>
             <a:r>
               <a:rPr lang="en"/>
-              <a:t>Recall from last week how to emulate a key being pressed down this frame? Add that functionality to the GMDCore library!</a:t>
+              <a:t>Goal: flap on Space or a click, with input classes in GMDCore.</a:t>
             </a:r>
             <a:endParaRPr/>
           </a:p>
-          <a:p>
-            <a:pPr indent="-317500" lvl="1" marL="914400" rtl="0" algn="l">
-              <a:spcBef>
-                <a:spcPts val="0"/>
-              </a:spcBef>
-              <a:spcAft>
-                <a:spcPts val="0"/>
-              </a:spcAft>
-              <a:buSzPts val="1400"/>
-              <a:buChar char="○"/>
-            </a:pPr>
-            <a:r>
-              <a:rPr lang="en"/>
-              <a:t>Create a new folder “Input” in GMDCore</a:t>
-            </a:r>
-            <a:endParaRPr/>
-          </a:p>
-          <a:p>
-            <a:pPr indent="-304800" lvl="2" marL="1371600" rtl="0" algn="l">
-              <a:spcBef>
-                <a:spcPts val="0"/>
-              </a:spcBef>
-              <a:spcAft>
-                <a:spcPts val="0"/>
-              </a:spcAft>
-              <a:buSzPts val="1200"/>
-              <a:buChar char="■"/>
-            </a:pPr>
-            <a:r>
-              <a:rPr lang="en"/>
-              <a:t>Add a class “KeyboardInfo” to the folder containing</a:t>
-            </a:r>
-            <a:endParaRPr/>
-          </a:p>
-          <a:p>
-            <a:pPr indent="-304800" lvl="3" marL="1828800" rtl="0" algn="l">
-              <a:spcBef>
-                <a:spcPts val="0"/>
-              </a:spcBef>
-              <a:spcAft>
-                <a:spcPts val="0"/>
-              </a:spcAft>
-              <a:buSzPts val="1200"/>
-              <a:buChar char="●"/>
-            </a:pPr>
-            <a:r>
-              <a:rPr lang="en"/>
-              <a:t>A way to keep track of previous and current keyboardstate</a:t>
-            </a:r>
-            <a:endParaRPr/>
-          </a:p>
-          <a:p>
-            <a:pPr indent="-304800" lvl="4" marL="2286000" rtl="0" algn="l">
-              <a:spcBef>
-                <a:spcPts val="0"/>
-              </a:spcBef>
-              <a:spcAft>
-                <a:spcPts val="0"/>
-              </a:spcAft>
-              <a:buSzPts val="1200"/>
-              <a:buChar char="○"/>
-            </a:pPr>
-            <a:r>
-              <a:rPr lang="en"/>
-              <a:t>Create a custom Update method to update them each frame</a:t>
-            </a:r>
-            <a:endParaRPr/>
-          </a:p>
-          <a:p>
-            <a:pPr indent="-304800" lvl="3" marL="1828800" rtl="0" algn="l">
-              <a:spcBef>
-                <a:spcPts val="0"/>
-              </a:spcBef>
-              <a:spcAft>
-                <a:spcPts val="0"/>
-              </a:spcAft>
-              <a:buSzPts val="1200"/>
-              <a:buChar char="●"/>
-            </a:pPr>
-            <a:r>
-              <a:rPr lang="en"/>
-              <a:t>Methods for checking IsKeyUp, IsKeyDown, WasKeyJustPressed, WasKeyJustReleased</a:t>
-            </a:r>
-            <a:endParaRPr/>
-          </a:p>
-          <a:p>
-            <a:pPr indent="-304800" lvl="2" marL="1371600" rtl="0" algn="l">
-              <a:spcBef>
-                <a:spcPts val="0"/>
-              </a:spcBef>
-              <a:spcAft>
-                <a:spcPts val="0"/>
-              </a:spcAft>
-              <a:buSzPts val="1200"/>
-              <a:buChar char="■"/>
-            </a:pPr>
-            <a:r>
-              <a:rPr lang="en"/>
-              <a:t>Add a “MouseInfo” class the same way: IsLeftButtonDown, WasLeftButtonJustPressed, Position</a:t>
-            </a:r>
-            <a:endParaRPr/>
-          </a:p>
-          <a:p>
-            <a:pPr indent="-304800" lvl="2" marL="1371600" rtl="0" algn="l">
-              <a:spcBef>
-                <a:spcPts val="0"/>
-              </a:spcBef>
-              <a:spcAft>
-                <a:spcPts val="0"/>
-              </a:spcAft>
-              <a:buSzPts val="1200"/>
-              <a:buChar char="■"/>
-            </a:pPr>
-            <a:r>
-              <a:rPr lang="en"/>
-              <a:t>Add another class “InputManager” in the same folder containing</a:t>
-            </a:r>
-            <a:endParaRPr/>
-          </a:p>
-          <a:p>
-            <a:pPr indent="-304800" lvl="3" marL="1828800" rtl="0" algn="l">
-              <a:spcBef>
-                <a:spcPts val="0"/>
-              </a:spcBef>
-              <a:spcAft>
-                <a:spcPts val="0"/>
-              </a:spcAft>
-              <a:buSzPts val="1200"/>
-              <a:buChar char="●"/>
-            </a:pPr>
-            <a:r>
-              <a:rPr lang="en"/>
-              <a:t>A KeyboardInfo and a MouseInfo instance</a:t>
-            </a:r>
-            <a:endParaRPr/>
-          </a:p>
-          <a:p>
-            <a:pPr indent="-304800" lvl="3" marL="1828800" rtl="0" algn="l">
-              <a:spcBef>
-                <a:spcPts val="0"/>
-              </a:spcBef>
-              <a:spcAft>
-                <a:spcPts val="0"/>
-              </a:spcAft>
-              <a:buSzPts val="1200"/>
-              <a:buChar char="●"/>
-            </a:pPr>
-            <a:r>
-              <a:rPr lang="en"/>
-              <a:t>An Update method that updates both</a:t>
-            </a:r>
-            <a:endParaRPr/>
-          </a:p>
-          <a:p>
-            <a:pPr indent="-304800" lvl="2" marL="1371600" rtl="0" algn="l">
-              <a:spcBef>
-                <a:spcPts val="0"/>
-              </a:spcBef>
-              <a:spcAft>
-                <a:spcPts val="0"/>
-              </a:spcAft>
-              <a:buSzPts val="1200"/>
-              <a:buChar char="■"/>
-            </a:pPr>
-            <a:r>
-              <a:rPr lang="en"/>
-              <a:t>Add the InputManager as static property to the Core class</a:t>
-            </a:r>
-            <a:endParaRPr/>
-          </a:p>
-          <a:p>
-            <a:pPr indent="-304800" lvl="2" marL="1371600" rtl="0" algn="l">
-              <a:spcBef>
-                <a:spcPts val="0"/>
-              </a:spcBef>
-              <a:spcAft>
-                <a:spcPts val="0"/>
-              </a:spcAft>
-              <a:buSzPts val="1200"/>
-              <a:buChar char="■"/>
-            </a:pPr>
-            <a:r>
-              <a:rPr lang="en"/>
-              <a:t>Remember to call Update on the InputManager in the Update method of Core</a:t>
-            </a:r>
-            <a:endParaRPr/>
-          </a:p>
-          <a:p>
-            <a:pPr indent="-330200" lvl="0" marL="457200" rtl="0" algn="l">
-              <a:spcBef>
-                <a:spcPts val="0"/>
-              </a:spcBef>
-              <a:spcAft>
-                <a:spcPts val="0"/>
-              </a:spcAft>
-              <a:buSzPts val="1600"/>
-              <a:buChar char="●"/>
-            </a:pPr>
-            <a:r>
-              <a:rPr lang="en"/>
-              <a:t>Make the bird flap on Space or a left click to counteract the gravity</a:t>
-            </a:r>
-            <a:endParaRPr/>
-          </a:p>
-          <a:p>
-            <a:pPr indent="-317500" lvl="1" marL="914400" rtl="0" algn="l">
-              <a:spcBef>
-                <a:spcPts val="0"/>
-              </a:spcBef>
-              <a:spcAft>
-                <a:spcPts val="0"/>
-              </a:spcAft>
-              <a:buSzPts val="1400"/>
-              <a:buChar char="○"/>
-            </a:pPr>
-            <a:r>
-              <a:rPr lang="en"/>
-              <a:t>Remember, the 2D coordinate system has its origin in the top left…</a:t>
-            </a:r>
-            <a:endParaRPr/>
-          </a:p>
-          <a:p>
-            <a:pPr indent="-317500" lvl="1" marL="914400" rtl="0" algn="l">
-              <a:spcBef>
-                <a:spcPts val="0"/>
-              </a:spcBef>
-              <a:spcAft>
-                <a:spcPts val="0"/>
-              </a:spcAft>
-              <a:buSzPts val="1400"/>
-              <a:buChar char="○"/>
-            </a:pPr>
-            <a:r>
-              <a:rPr lang="en"/>
-              <a:t>Overwriting the vertical velocity with a “jumpforce” value is a good way to instantly give the bird a jolt of upwards momentum</a:t>
-            </a:r>
-            <a:endParaRPr/>
+        </p:txBody>
+      </p:sp>
+      <p:sp>
+        <p:nvSpPr>
+          <p:cNvPr id="156" name="Rounded Rectangle 155"/>
+          <p:cNvSpPr/>
+          <p:nvPr/>
+        </p:nvSpPr>
+        <p:spPr>
+          <a:xfrm>
+            <a:off x="3108960" y="1417320"/>
+            <a:ext cx="2926080" cy="640080"/>
+          </a:xfrm>
+          <a:prstGeom prst="roundRect">
+            <a:avLst>
+              <a:gd name="adj" fmla="val 12000"/>
+            </a:avLst>
+          </a:prstGeom>
+          <a:solidFill>
+            <a:srgbClr val="2E3338"/>
+          </a:solidFill>
+          <a:ln w="25400">
+            <a:solidFill>
+              <a:srgbClr val="D45D35"/>
+            </a:solidFill>
+          </a:ln>
+          <a:effectLst/>
+        </p:spPr>
+        <p:style>
+          <a:lnRef idx="1">
+            <a:schemeClr val="accent1"/>
+          </a:lnRef>
+          <a:fillRef idx="3">
+            <a:schemeClr val="accent1"/>
+          </a:fillRef>
+          <a:effectRef idx="2">
+            <a:schemeClr val="accent1"/>
+          </a:effectRef>
+          <a:fontRef idx="minor">
+            <a:schemeClr val="lt1"/>
+          </a:fontRef>
+        </p:style>
+        <p:txBody>
+          <a:bodyPr rtlCol="0" anchor="ctr" wrap="square" lIns="73152" rIns="73152"/>
+          <a:lstStyle/>
+          <a:p>
+            <a:pPr algn="ctr"/>
+            <a:r>
+              <a:rPr sz="1500" b="1">
+                <a:solidFill>
+                  <a:srgbClr val="DEE2E6"/>
+                </a:solidFill>
+              </a:rPr>
+              <a:t>InputManager</a:t>
+            </a:r>
+          </a:p>
+          <a:p>
+            <a:pPr algn="ctr"/>
+            <a:r>
+              <a:rPr sz="1300" b="0">
+                <a:solidFill>
+                  <a:srgbClr val="9AA3AB"/>
+                </a:solidFill>
+              </a:rPr>
+              <a:t>updated by Core, every frame</a:t>
+            </a:r>
+          </a:p>
+        </p:txBody>
+      </p:sp>
+      <p:sp>
+        <p:nvSpPr>
+          <p:cNvPr id="157" name="Rounded Rectangle 156"/>
+          <p:cNvSpPr/>
+          <p:nvPr/>
+        </p:nvSpPr>
+        <p:spPr>
+          <a:xfrm>
+            <a:off x="914400" y="2560320"/>
+            <a:ext cx="3291840" cy="822960"/>
+          </a:xfrm>
+          <a:prstGeom prst="roundRect">
+            <a:avLst>
+              <a:gd name="adj" fmla="val 12000"/>
+            </a:avLst>
+          </a:prstGeom>
+          <a:solidFill>
+            <a:srgbClr val="2E3338"/>
+          </a:solidFill>
+          <a:ln>
+            <a:noFill/>
+          </a:ln>
+          <a:effectLst/>
+        </p:spPr>
+        <p:style>
+          <a:lnRef idx="1">
+            <a:schemeClr val="accent1"/>
+          </a:lnRef>
+          <a:fillRef idx="3">
+            <a:schemeClr val="accent1"/>
+          </a:fillRef>
+          <a:effectRef idx="2">
+            <a:schemeClr val="accent1"/>
+          </a:effectRef>
+          <a:fontRef idx="minor">
+            <a:schemeClr val="lt1"/>
+          </a:fontRef>
+        </p:style>
+        <p:txBody>
+          <a:bodyPr rtlCol="0" anchor="ctr" wrap="square" lIns="73152" rIns="73152"/>
+          <a:lstStyle/>
+          <a:p>
+            <a:pPr algn="ctr"/>
+            <a:r>
+              <a:rPr sz="1500" b="1">
+                <a:solidFill>
+                  <a:srgbClr val="DEE2E6"/>
+                </a:solidFill>
+              </a:rPr>
+              <a:t>KeyboardInfo</a:t>
+            </a:r>
+          </a:p>
+          <a:p>
+            <a:pPr algn="ctr"/>
+            <a:r>
+              <a:rPr sz="1300" b="0">
+                <a:solidFill>
+                  <a:srgbClr val="9AA3AB"/>
+                </a:solidFill>
+              </a:rPr>
+              <a:t>IsKeyDown · WasKeyJustPressed</a:t>
+            </a:r>
+          </a:p>
+        </p:txBody>
+      </p:sp>
+      <p:sp>
+        <p:nvSpPr>
+          <p:cNvPr id="158" name="Rounded Rectangle 157"/>
+          <p:cNvSpPr/>
+          <p:nvPr/>
+        </p:nvSpPr>
+        <p:spPr>
+          <a:xfrm>
+            <a:off x="4937760" y="2560320"/>
+            <a:ext cx="3291840" cy="822960"/>
+          </a:xfrm>
+          <a:prstGeom prst="roundRect">
+            <a:avLst>
+              <a:gd name="adj" fmla="val 12000"/>
+            </a:avLst>
+          </a:prstGeom>
+          <a:solidFill>
+            <a:srgbClr val="2E3338"/>
+          </a:solidFill>
+          <a:ln>
+            <a:noFill/>
+          </a:ln>
+          <a:effectLst/>
+        </p:spPr>
+        <p:style>
+          <a:lnRef idx="1">
+            <a:schemeClr val="accent1"/>
+          </a:lnRef>
+          <a:fillRef idx="3">
+            <a:schemeClr val="accent1"/>
+          </a:fillRef>
+          <a:effectRef idx="2">
+            <a:schemeClr val="accent1"/>
+          </a:effectRef>
+          <a:fontRef idx="minor">
+            <a:schemeClr val="lt1"/>
+          </a:fontRef>
+        </p:style>
+        <p:txBody>
+          <a:bodyPr rtlCol="0" anchor="ctr" wrap="square" lIns="73152" rIns="73152"/>
+          <a:lstStyle/>
+          <a:p>
+            <a:pPr algn="ctr"/>
+            <a:r>
+              <a:rPr sz="1500" b="1">
+                <a:solidFill>
+                  <a:srgbClr val="DEE2E6"/>
+                </a:solidFill>
+              </a:rPr>
+              <a:t>MouseInfo</a:t>
+            </a:r>
+          </a:p>
+          <a:p>
+            <a:pPr algn="ctr"/>
+            <a:r>
+              <a:rPr sz="1300" b="0">
+                <a:solidFill>
+                  <a:srgbClr val="9AA3AB"/>
+                </a:solidFill>
+              </a:rPr>
+              <a:t>Position · WasLeftButtonJustPressed</a:t>
+            </a:r>
+          </a:p>
+        </p:txBody>
+      </p:sp>
+      <p:cxnSp>
+        <p:nvCxnSpPr>
+          <p:cNvPr id="159" name="Connector 158"/>
+          <p:cNvCxnSpPr/>
+          <p:nvPr/>
+        </p:nvCxnSpPr>
+        <p:spPr>
+          <a:xfrm flipH="1">
+            <a:off x="2926080" y="2075688"/>
+            <a:ext cx="914400" cy="466344"/>
+          </a:xfrm>
+          <a:prstGeom prst="line">
+            <a:avLst/>
+          </a:prstGeom>
+          <a:ln w="25400">
+            <a:solidFill>
+              <a:srgbClr val="9AA3AB"/>
+            </a:solidFill>
+            <a:tailEnd type="triangle"/>
+          </a:ln>
+        </p:spPr>
+        <p:style>
+          <a:lnRef idx="2">
+            <a:schemeClr val="accent1"/>
+          </a:lnRef>
+          <a:fillRef idx="0">
+            <a:schemeClr val="accent1"/>
+          </a:fillRef>
+          <a:effectRef idx="1">
+            <a:schemeClr val="accent1"/>
+          </a:effectRef>
+          <a:fontRef idx="minor">
+            <a:schemeClr val="tx1"/>
+          </a:fontRef>
+        </p:style>
+      </p:cxnSp>
+      <p:cxnSp>
+        <p:nvCxnSpPr>
+          <p:cNvPr id="160" name="Connector 159"/>
+          <p:cNvCxnSpPr/>
+          <p:nvPr/>
+        </p:nvCxnSpPr>
+        <p:spPr>
+          <a:xfrm>
+            <a:off x="5303520" y="2075688"/>
+            <a:ext cx="914400" cy="466344"/>
+          </a:xfrm>
+          <a:prstGeom prst="line">
+            <a:avLst/>
+          </a:prstGeom>
+          <a:ln w="25400">
+            <a:solidFill>
+              <a:srgbClr val="9AA3AB"/>
+            </a:solidFill>
+            <a:tailEnd type="triangle"/>
+          </a:ln>
+        </p:spPr>
+        <p:style>
+          <a:lnRef idx="2">
+            <a:schemeClr val="accent1"/>
+          </a:lnRef>
+          <a:fillRef idx="0">
+            <a:schemeClr val="accent1"/>
+          </a:fillRef>
+          <a:effectRef idx="1">
+            <a:schemeClr val="accent1"/>
+          </a:effectRef>
+          <a:fontRef idx="minor">
+            <a:schemeClr val="tx1"/>
+          </a:fontRef>
+        </p:style>
+      </p:cxnSp>
+      <p:sp>
+        <p:nvSpPr>
+          <p:cNvPr id="161" name="TextBox 160"/>
+          <p:cNvSpPr txBox="1"/>
+          <p:nvPr/>
+        </p:nvSpPr>
+        <p:spPr>
+          <a:xfrm>
+            <a:off x="914400" y="3566160"/>
+            <a:ext cx="7315200" cy="365760"/>
+          </a:xfrm>
+          <a:prstGeom prst="rect">
+            <a:avLst/>
+          </a:prstGeom>
+          <a:noFill/>
+        </p:spPr>
+        <p:txBody>
+          <a:bodyPr wrap="square">
+            <a:spAutoFit/>
+          </a:bodyPr>
+          <a:lstStyle/>
+          <a:p>
+            <a:pPr algn="ctr"/>
+            <a:r>
+              <a:rPr sz="1300" b="0" i="0">
+                <a:solidFill>
+                  <a:srgbClr val="9AA3AB"/>
+                </a:solidFill>
+              </a:rPr>
+              <a:t>A flap sets the vertical velocity to an upward jump force. Remember: y points down.</a:t>
+            </a:r>
           </a:p>
         </p:txBody>
       </p:sp>
@@ -14818,7 +15395,7 @@
         <p:spPr>
           <a:xfrm>
             <a:off x="311700" y="885950"/>
-            <a:ext cx="8520600" cy="4023300"/>
+            <a:ext cx="8520600" cy="905256"/>
           </a:xfrm>
           <a:prstGeom prst="rect">
             <a:avLst/>
@@ -14842,143 +15419,7 @@
             </a:pPr>
             <a:r>
               <a:rPr lang="en"/>
-              <a:t>Add the </a:t>
-            </a:r>
-            <a:r>
-              <a:rPr lang="en" u="sng">
-                <a:solidFill>
-                  <a:schemeClr val="hlink"/>
-                </a:solidFill>
-                <a:hlinkClick r:id="rId3"/>
-              </a:rPr>
-              <a:t>pipe</a:t>
-            </a:r>
-            <a:r>
-              <a:rPr lang="en"/>
-              <a:t> to our game</a:t>
-            </a:r>
-            <a:endParaRPr/>
-          </a:p>
-          <a:p>
-            <a:pPr indent="-317500" lvl="1" marL="914400" rtl="0" algn="l">
-              <a:spcBef>
-                <a:spcPts val="0"/>
-              </a:spcBef>
-              <a:spcAft>
-                <a:spcPts val="0"/>
-              </a:spcAft>
-              <a:buSzPts val="1400"/>
-              <a:buChar char="○"/>
-            </a:pPr>
-            <a:r>
-              <a:rPr lang="en"/>
-              <a:t>Unsurprisingly</a:t>
-            </a:r>
-            <a:r>
-              <a:rPr lang="en"/>
-              <a:t>, we will model the Pipe as a class</a:t>
-            </a:r>
-            <a:endParaRPr/>
-          </a:p>
-          <a:p>
-            <a:pPr indent="-317500" lvl="1" marL="914400" rtl="0" algn="l">
-              <a:spcBef>
-                <a:spcPts val="0"/>
-              </a:spcBef>
-              <a:spcAft>
-                <a:spcPts val="0"/>
-              </a:spcAft>
-              <a:buSzPts val="1400"/>
-              <a:buChar char="○"/>
-            </a:pPr>
-            <a:r>
-              <a:rPr lang="en"/>
-              <a:t>Inside the class, you must create a constructor that spawns a pipe at a random vertical position at the rightmost edge and within the lower quarter of the screen</a:t>
-            </a:r>
-            <a:endParaRPr/>
-          </a:p>
-          <a:p>
-            <a:pPr indent="-304800" lvl="2" marL="1371600" rtl="0" algn="l">
-              <a:spcBef>
-                <a:spcPts val="0"/>
-              </a:spcBef>
-              <a:spcAft>
-                <a:spcPts val="0"/>
-              </a:spcAft>
-              <a:buSzPts val="1200"/>
-              <a:buChar char="■"/>
-            </a:pPr>
-            <a:r>
-              <a:rPr lang="en"/>
-              <a:t>The Random class will be useful here</a:t>
-            </a:r>
-            <a:endParaRPr/>
-          </a:p>
-          <a:p>
-            <a:pPr indent="-304800" lvl="2" marL="1371600" rtl="0" algn="l">
-              <a:spcBef>
-                <a:spcPts val="0"/>
-              </a:spcBef>
-              <a:spcAft>
-                <a:spcPts val="0"/>
-              </a:spcAft>
-              <a:buSzPts val="1200"/>
-              <a:buChar char="■"/>
-            </a:pPr>
-            <a:r>
-              <a:rPr lang="en"/>
-              <a:t>You will need to add the Pipe as a Texture2D to the Art class</a:t>
-            </a:r>
-            <a:endParaRPr/>
-          </a:p>
-          <a:p>
-            <a:pPr indent="-317500" lvl="1" marL="914400" rtl="0" algn="l">
-              <a:spcBef>
-                <a:spcPts val="0"/>
-              </a:spcBef>
-              <a:spcAft>
-                <a:spcPts val="0"/>
-              </a:spcAft>
-              <a:buSzPts val="1400"/>
-              <a:buChar char="○"/>
-            </a:pPr>
-            <a:r>
-              <a:rPr lang="en"/>
-              <a:t>You must also create an update method that “scrolls” the Pipe to the left of the screen based on a pipe speed value</a:t>
-            </a:r>
-            <a:endParaRPr/>
-          </a:p>
-          <a:p>
-            <a:pPr indent="-304800" lvl="2" marL="1371600" rtl="0" algn="l">
-              <a:spcBef>
-                <a:spcPts val="0"/>
-              </a:spcBef>
-              <a:spcAft>
-                <a:spcPts val="0"/>
-              </a:spcAft>
-              <a:buSzPts val="1200"/>
-              <a:buChar char="■"/>
-            </a:pPr>
-            <a:r>
-              <a:rPr lang="en"/>
-              <a:t>Picking the same speed as the ground scroll “grounds” the pipes to the ground</a:t>
-            </a:r>
-            <a:endParaRPr/>
-          </a:p>
-          <a:p>
-            <a:pPr indent="-317500" lvl="1" marL="914400" rtl="0" algn="l">
-              <a:spcBef>
-                <a:spcPts val="0"/>
-              </a:spcBef>
-              <a:spcAft>
-                <a:spcPts val="0"/>
-              </a:spcAft>
-              <a:buSzPts val="1400"/>
-              <a:buChar char="○"/>
-            </a:pPr>
-            <a:r>
-              <a:rPr lang="en"/>
-              <a:t>Include functionality for rendering the Pipe to the screen</a:t>
+              <a:t>Goal: pipes that spawn on a timer at random heights, and scroll left.</a:t>
             </a:r>
             <a:endParaRPr/>
           </a:p>
@@ -14995,80 +15436,36 @@
             </a:pPr>
             <a:r>
               <a:rPr lang="en"/>
-              <a:t>Render the pipe an “infinite” amount of times!</a:t>
-            </a:r>
-            <a:endParaRPr/>
-          </a:p>
-          <a:p>
-            <a:pPr indent="-317500" lvl="1" marL="914400" rtl="0" algn="l">
-              <a:spcBef>
-                <a:spcPts val="0"/>
-              </a:spcBef>
-              <a:spcAft>
-                <a:spcPts val="0"/>
-              </a:spcAft>
-              <a:buSzPts val="1400"/>
-              <a:buChar char="○"/>
-            </a:pPr>
-            <a:r>
-              <a:rPr lang="en"/>
-              <a:t>In the Game1 class, add functionality to spawn pipes at a set interval</a:t>
-            </a:r>
-            <a:endParaRPr/>
-          </a:p>
-          <a:p>
-            <a:pPr indent="-317500" lvl="1" marL="914400" rtl="0" algn="l">
-              <a:spcBef>
-                <a:spcPts val="0"/>
-              </a:spcBef>
-              <a:spcAft>
-                <a:spcPts val="0"/>
-              </a:spcAft>
-              <a:buSzPts val="1400"/>
-              <a:buChar char="○"/>
-            </a:pPr>
-            <a:r>
-              <a:rPr lang="en"/>
-              <a:t>You will need two new fields, a spawn timer, and a constant spawn interval</a:t>
-            </a:r>
-            <a:endParaRPr/>
-          </a:p>
-          <a:p>
-            <a:pPr indent="-317500" lvl="1" marL="914400" rtl="0" algn="l">
-              <a:spcBef>
-                <a:spcPts val="0"/>
-              </a:spcBef>
-              <a:spcAft>
-                <a:spcPts val="0"/>
-              </a:spcAft>
-              <a:buSzPts val="1400"/>
-              <a:buChar char="○"/>
-            </a:pPr>
-            <a:r>
-              <a:rPr lang="en"/>
-              <a:t>You will also need a list to keep track of all pipes</a:t>
-            </a:r>
-            <a:endParaRPr/>
-          </a:p>
-          <a:p>
-            <a:pPr indent="-304800" lvl="2" marL="1371600" rtl="0" algn="l">
-              <a:spcBef>
-                <a:spcPts val="0"/>
-              </a:spcBef>
-              <a:spcAft>
-                <a:spcPts val="0"/>
-              </a:spcAft>
-              <a:buSzPts val="1200"/>
-              <a:buChar char="■"/>
-            </a:pPr>
-            <a:r>
-              <a:rPr lang="en"/>
-              <a:t>You will be iterating through the list of pipes both in Update and Draw of Game1</a:t>
+              <a:t>A Pipe class, a spawn timer, and a list of pipes.</a:t>
             </a:r>
             <a:endParaRPr/>
           </a:p>
         </p:txBody>
       </p:sp>
+      <p:pic>
+        <p:nvPicPr>
+          <p:cNvPr id="168" name="Picture 167" descr="f6.png"/>
+          <p:cNvPicPr>
+            <a:picLocks noChangeAspect="1"/>
+          </p:cNvPicPr>
+          <p:nvPr/>
+        </p:nvPicPr>
+        <p:blipFill>
+          <a:blip r:embed="rId4"/>
+          <a:stretch>
+            <a:fillRect/>
+          </a:stretch>
+        </p:blipFill>
+        <p:spPr>
+          <a:xfrm>
+            <a:off x="2377440" y="2148840"/>
+            <a:ext cx="4389120" cy="2468880"/>
+          </a:xfrm>
+          <a:prstGeom prst="rect">
+            <a:avLst/>
+          </a:prstGeom>
+        </p:spPr>
+      </p:pic>
     </p:spTree>
   </p:cSld>
   <p:clrMapOvr>
@@ -15869,7 +16266,7 @@
         <p:spPr>
           <a:xfrm>
             <a:off x="311700" y="885950"/>
-            <a:ext cx="8520600" cy="4023300"/>
+            <a:ext cx="8520600" cy="905256"/>
           </a:xfrm>
           <a:prstGeom prst="rect">
             <a:avLst/>
@@ -15877,380 +16274,69 @@
         </p:spPr>
         <p:txBody>
           <a:bodyPr anchorCtr="0" anchor="t" bIns="91425" lIns="91425" spcFirstLastPara="1" rIns="91425" wrap="square" tIns="91425">
-            <a:normAutofit fontScale="92500" lnSpcReduction="10000"/>
+            <a:normAutofit/>
           </a:bodyPr>
           <a:lstStyle/>
           <a:p>
-            <a:pPr indent="-322580" lvl="0" marL="457200" rtl="0" algn="l">
-              <a:spcBef>
-                <a:spcPts val="0"/>
-              </a:spcBef>
-              <a:spcAft>
-                <a:spcPts val="0"/>
-              </a:spcAft>
-              <a:buSzPct val="100000"/>
+            <a:pPr indent="-330200" lvl="0" marL="457200" rtl="0" algn="l">
+              <a:spcBef>
+                <a:spcPts val="0"/>
+              </a:spcBef>
+              <a:spcAft>
+                <a:spcPts val="0"/>
+              </a:spcAft>
+              <a:buSzPts val="1600"/>
               <a:buChar char="●"/>
             </a:pPr>
             <a:r>
               <a:rPr lang="en"/>
-              <a:t>The p</a:t>
-            </a:r>
-            <a:r>
-              <a:rPr lang="en"/>
-              <a:t>ipes must now be spawned in “pairs”, with one pipe facing up and the other facing down.</a:t>
+              <a:t>Goal: pipes in pairs with a gap, the gap drifting smoothly up and down.</a:t>
             </a:r>
             <a:endParaRPr/>
           </a:p>
           <a:p>
-            <a:pPr indent="-310832" lvl="1" marL="914400" rtl="0" algn="l">
-              <a:spcBef>
-                <a:spcPts val="0"/>
-              </a:spcBef>
-              <a:spcAft>
-                <a:spcPts val="0"/>
-              </a:spcAft>
-              <a:buSzPct val="100000"/>
-              <a:buChar char="○"/>
-            </a:pPr>
-            <a:r>
-              <a:rPr lang="en"/>
-              <a:t>We will model this as a new class, PipePair, wrapping the Pipe class</a:t>
-            </a:r>
-            <a:endParaRPr/>
-          </a:p>
-          <a:p>
-            <a:pPr indent="-310832" lvl="1" marL="914400" rtl="0" algn="l">
-              <a:spcBef>
-                <a:spcPts val="0"/>
-              </a:spcBef>
-              <a:spcAft>
-                <a:spcPts val="0"/>
-              </a:spcAft>
-              <a:buSzPct val="100000"/>
-              <a:buChar char="○"/>
-            </a:pPr>
-            <a:r>
-              <a:rPr lang="en"/>
-              <a:t>The PipePair class will contain</a:t>
-            </a:r>
-            <a:endParaRPr/>
-          </a:p>
-          <a:p>
-            <a:pPr indent="-299085" lvl="2" marL="1371600" rtl="0" algn="l">
-              <a:spcBef>
-                <a:spcPts val="0"/>
-              </a:spcBef>
-              <a:spcAft>
-                <a:spcPts val="0"/>
-              </a:spcAft>
-              <a:buSzPct val="100000"/>
-              <a:buChar char="■"/>
-            </a:pPr>
-            <a:r>
-              <a:rPr lang="en"/>
-              <a:t>A top pipe and a bottom pipe</a:t>
-            </a:r>
-            <a:endParaRPr/>
-          </a:p>
-          <a:p>
-            <a:pPr indent="-299085" lvl="2" marL="1371600" rtl="0" algn="l">
-              <a:spcBef>
-                <a:spcPts val="0"/>
-              </a:spcBef>
-              <a:spcAft>
-                <a:spcPts val="0"/>
-              </a:spcAft>
-              <a:buSzPct val="100000"/>
-              <a:buChar char="■"/>
-            </a:pPr>
-            <a:r>
-              <a:rPr lang="en"/>
-              <a:t>A pipe gap (vertical distance between two pipes)</a:t>
-            </a:r>
-            <a:endParaRPr/>
-          </a:p>
-          <a:p>
-            <a:pPr indent="-299085" lvl="2" marL="1371600" rtl="0" algn="l">
-              <a:spcBef>
-                <a:spcPts val="0"/>
-              </a:spcBef>
-              <a:spcAft>
-                <a:spcPts val="0"/>
-              </a:spcAft>
-              <a:buSzPct val="100000"/>
-              <a:buChar char="■"/>
-            </a:pPr>
-            <a:r>
-              <a:rPr lang="en"/>
-              <a:t>A pipe speed value (move this from the Pipe class to the PipePair class)</a:t>
-            </a:r>
-            <a:endParaRPr/>
-          </a:p>
-          <a:p>
-            <a:pPr indent="-299085" lvl="2" marL="1371600" rtl="0" algn="l">
-              <a:spcBef>
-                <a:spcPts val="0"/>
-              </a:spcBef>
-              <a:spcAft>
-                <a:spcPts val="0"/>
-              </a:spcAft>
-              <a:buSzPct val="100000"/>
-              <a:buChar char="■"/>
-            </a:pPr>
-            <a:r>
-              <a:rPr lang="en"/>
-              <a:t>A float to keep track of the horizontal position of the two pipes</a:t>
-            </a:r>
-            <a:endParaRPr/>
-          </a:p>
-          <a:p>
-            <a:pPr indent="-299085" lvl="2" marL="1371600" rtl="0" algn="l">
-              <a:spcBef>
-                <a:spcPts val="0"/>
-              </a:spcBef>
-              <a:spcAft>
-                <a:spcPts val="0"/>
-              </a:spcAft>
-              <a:buSzPct val="100000"/>
-              <a:buChar char="■"/>
-            </a:pPr>
-            <a:r>
-              <a:rPr lang="en"/>
-              <a:t>A constructor that takes a float y value to define the vertical position of the pipe gap</a:t>
-            </a:r>
-            <a:endParaRPr/>
-          </a:p>
-          <a:p>
-            <a:pPr indent="-299085" lvl="2" marL="1371600" rtl="0" algn="l">
-              <a:spcBef>
-                <a:spcPts val="0"/>
-              </a:spcBef>
-              <a:spcAft>
-                <a:spcPts val="0"/>
-              </a:spcAft>
-              <a:buSzPct val="100000"/>
-              <a:buChar char="■"/>
-            </a:pPr>
-            <a:r>
-              <a:rPr lang="en"/>
-              <a:t>Logic that </a:t>
-            </a:r>
-            <a:r>
-              <a:rPr lang="en"/>
-              <a:t>flags</a:t>
-            </a:r>
-            <a:r>
-              <a:rPr lang="en"/>
-              <a:t> PipePairs for deletion once they go beyond the left side of the screen</a:t>
-            </a:r>
-            <a:endParaRPr/>
-          </a:p>
-          <a:p>
-            <a:pPr indent="-299085" lvl="2" marL="1371600" rtl="0" algn="l">
-              <a:spcBef>
-                <a:spcPts val="0"/>
-              </a:spcBef>
-              <a:spcAft>
-                <a:spcPts val="0"/>
-              </a:spcAft>
-              <a:buSzPct val="100000"/>
-              <a:buChar char="■"/>
-            </a:pPr>
-            <a:r>
-              <a:rPr lang="en"/>
-              <a:t>Since the PipePair will be controlling the pipes, the update and initialization </a:t>
-            </a:r>
-            <a:r>
-              <a:rPr lang="en"/>
-              <a:t>logic</a:t>
-            </a:r>
-            <a:r>
-              <a:rPr lang="en"/>
-              <a:t> of of the Pipe class will be moved to the PipePair class</a:t>
-            </a:r>
-            <a:endParaRPr/>
-          </a:p>
-          <a:p>
-            <a:pPr indent="-310832" lvl="1" marL="914400" rtl="0" algn="l">
-              <a:spcBef>
-                <a:spcPts val="0"/>
-              </a:spcBef>
-              <a:spcAft>
-                <a:spcPts val="0"/>
-              </a:spcAft>
-              <a:buSzPct val="100000"/>
-              <a:buChar char="○"/>
-            </a:pPr>
-            <a:r>
-              <a:rPr lang="en"/>
-              <a:t>The Pipe constructor must now take a position and a bool indicating whether it is flipped</a:t>
-            </a:r>
-            <a:endParaRPr/>
-          </a:p>
-          <a:p>
-            <a:pPr indent="-299085" lvl="2" marL="1371600" rtl="0" algn="l">
-              <a:spcBef>
-                <a:spcPts val="0"/>
-              </a:spcBef>
-              <a:spcAft>
-                <a:spcPts val="0"/>
-              </a:spcAft>
-              <a:buSzPct val="100000"/>
-              <a:buChar char="■"/>
-            </a:pPr>
-            <a:r>
-              <a:rPr lang="en"/>
-              <a:t>The position is purely used to draw the Pipe, as all movement is done in PipePair</a:t>
-            </a:r>
-            <a:endParaRPr/>
-          </a:p>
-          <a:p>
-            <a:pPr indent="-299085" lvl="2" marL="1371600" rtl="0" algn="l">
-              <a:spcBef>
-                <a:spcPts val="0"/>
-              </a:spcBef>
-              <a:spcAft>
-                <a:spcPts val="0"/>
-              </a:spcAft>
-              <a:buSzPct val="100000"/>
-              <a:buChar char="■"/>
-            </a:pPr>
-            <a:r>
-              <a:rPr lang="en"/>
-              <a:t>For flipping the pipe art, you must use a specific </a:t>
-            </a:r>
-            <a:r>
-              <a:rPr lang="en" u="sng">
-                <a:solidFill>
-                  <a:schemeClr val="hlink"/>
-                </a:solidFill>
-                <a:hlinkClick r:id="rId3"/>
-              </a:rPr>
-              <a:t>overload of SpriteBatch.Draw()</a:t>
-            </a:r>
-            <a:r>
-              <a:rPr lang="en"/>
-              <a:t> with a </a:t>
-            </a:r>
-            <a:r>
-              <a:rPr lang="en" u="sng">
-                <a:solidFill>
-                  <a:schemeClr val="hlink"/>
-                </a:solidFill>
-                <a:hlinkClick r:id="rId4"/>
-              </a:rPr>
-              <a:t>SpriteEffects</a:t>
-            </a:r>
-            <a:r>
-              <a:rPr lang="en"/>
-              <a:t> argument</a:t>
-            </a:r>
-            <a:endParaRPr/>
-          </a:p>
-          <a:p>
-            <a:pPr indent="-322580" lvl="0" marL="457200" rtl="0" algn="l">
-              <a:spcBef>
-                <a:spcPts val="0"/>
-              </a:spcBef>
-              <a:spcAft>
-                <a:spcPts val="0"/>
-              </a:spcAft>
-              <a:buSzPct val="100000"/>
+            <a:pPr indent="-330200" lvl="0" marL="457200" rtl="0" algn="l">
+              <a:spcBef>
+                <a:spcPts val="0"/>
+              </a:spcBef>
+              <a:spcAft>
+                <a:spcPts val="0"/>
+              </a:spcAft>
+              <a:buSzPts val="1600"/>
               <a:buChar char="●"/>
             </a:pPr>
             <a:r>
               <a:rPr lang="en"/>
-              <a:t>Update the Game1 class to work with PipePairs instead of Pipes</a:t>
-            </a:r>
-            <a:endParaRPr/>
-          </a:p>
-          <a:p>
-            <a:pPr indent="-310832" lvl="1" marL="914400" rtl="0" algn="l">
-              <a:spcBef>
-                <a:spcPts val="0"/>
-              </a:spcBef>
-              <a:spcAft>
-                <a:spcPts val="0"/>
-              </a:spcAft>
-              <a:buSzPct val="100000"/>
-              <a:buChar char="○"/>
-            </a:pPr>
-            <a:r>
-              <a:rPr lang="en"/>
-              <a:t>The pipe pairs will be spawned given a vertical position for the gap</a:t>
-            </a:r>
-            <a:endParaRPr/>
-          </a:p>
-          <a:p>
-            <a:pPr indent="-299085" lvl="2" marL="1371600" rtl="0" algn="l">
-              <a:spcBef>
-                <a:spcPts val="0"/>
-              </a:spcBef>
-              <a:spcAft>
-                <a:spcPts val="0"/>
-              </a:spcAft>
-              <a:buSzPct val="100000"/>
-              <a:buChar char="■"/>
-            </a:pPr>
-            <a:r>
-              <a:rPr lang="en"/>
-              <a:t>Make this position vary slightly for each pipe pair</a:t>
-            </a:r>
-            <a:endParaRPr/>
-          </a:p>
-          <a:p>
-            <a:pPr indent="-299085" lvl="3" marL="1828800" rtl="0" algn="l">
-              <a:spcBef>
-                <a:spcPts val="0"/>
-              </a:spcBef>
-              <a:spcAft>
-                <a:spcPts val="0"/>
-              </a:spcAft>
-              <a:buSzPct val="100000"/>
-              <a:buChar char="●"/>
-            </a:pPr>
-            <a:r>
-              <a:rPr lang="en"/>
-              <a:t>Keep track of the previous spawn position and add a random value (e.g. -50-50) to it</a:t>
-            </a:r>
-            <a:endParaRPr/>
-          </a:p>
-          <a:p>
-            <a:pPr indent="-299085" lvl="3" marL="1828800" rtl="0" algn="l">
-              <a:spcBef>
-                <a:spcPts val="0"/>
-              </a:spcBef>
-              <a:spcAft>
-                <a:spcPts val="0"/>
-              </a:spcAft>
-              <a:buSzPct val="100000"/>
-              <a:buChar char="●"/>
-            </a:pPr>
-            <a:r>
-              <a:rPr lang="en"/>
-              <a:t>This position must be clamped so that you don’t risk spawning the pipe gap above/below the screen</a:t>
-            </a:r>
-            <a:endParaRPr/>
-          </a:p>
-          <a:p>
-            <a:pPr indent="-310832" lvl="1" marL="914400" rtl="0" algn="l">
-              <a:spcBef>
-                <a:spcPts val="0"/>
-              </a:spcBef>
-              <a:spcAft>
-                <a:spcPts val="0"/>
-              </a:spcAft>
-              <a:buSzPct val="100000"/>
-              <a:buChar char="○"/>
-            </a:pPr>
-            <a:r>
-              <a:rPr lang="en"/>
-              <a:t>Add functionality to delete PipePairs flagged for deletion</a:t>
+              <a:t>A PipePair wraps two pipes; pairs that leave the screen are removed.</a:t>
             </a:r>
             <a:endParaRPr/>
           </a:p>
         </p:txBody>
       </p:sp>
+      <p:pic>
+        <p:nvPicPr>
+          <p:cNvPr id="179" name="Picture 178" descr="f7.png"/>
+          <p:cNvPicPr>
+            <a:picLocks noChangeAspect="1"/>
+          </p:cNvPicPr>
+          <p:nvPr/>
+        </p:nvPicPr>
+        <p:blipFill>
+          <a:blip r:embed="rId5"/>
+          <a:stretch>
+            <a:fillRect/>
+          </a:stretch>
+        </p:blipFill>
+        <p:spPr>
+          <a:xfrm>
+            <a:off x="2377440" y="2148840"/>
+            <a:ext cx="4389120" cy="2468880"/>
+          </a:xfrm>
+          <a:prstGeom prst="rect">
+            <a:avLst/>
+          </a:prstGeom>
+        </p:spPr>
+      </p:pic>
     </p:spTree>
   </p:cSld>
   <p:clrMapOvr>
@@ -17677,7 +17763,7 @@
         <p:spPr>
           <a:xfrm>
             <a:off x="311700" y="885950"/>
-            <a:ext cx="8520600" cy="4023300"/>
+            <a:ext cx="8520600" cy="905256"/>
           </a:xfrm>
           <a:prstGeom prst="rect">
             <a:avLst/>
@@ -17701,75 +17787,7 @@
             </a:pPr>
             <a:r>
               <a:rPr lang="en"/>
-              <a:t>Include collision detection between bird and pipes</a:t>
-            </a:r>
-            <a:endParaRPr/>
-          </a:p>
-          <a:p>
-            <a:pPr indent="-317500" lvl="1" marL="914400" rtl="0" algn="l">
-              <a:spcBef>
-                <a:spcPts val="0"/>
-              </a:spcBef>
-              <a:spcAft>
-                <a:spcPts val="0"/>
-              </a:spcAft>
-              <a:buSzPts val="1400"/>
-              <a:buChar char="○"/>
-            </a:pPr>
-            <a:r>
-              <a:rPr lang="en"/>
-              <a:t>When a bird collides with a pipe, the game should pause</a:t>
-            </a:r>
-            <a:endParaRPr/>
-          </a:p>
-          <a:p>
-            <a:pPr indent="-304800" lvl="2" marL="1371600" rtl="0" algn="l">
-              <a:spcBef>
-                <a:spcPts val="0"/>
-              </a:spcBef>
-              <a:spcAft>
-                <a:spcPts val="0"/>
-              </a:spcAft>
-              <a:buSzPts val="1200"/>
-              <a:buChar char="■"/>
-            </a:pPr>
-            <a:r>
-              <a:rPr lang="en"/>
-              <a:t>Pause can be implemented as a simple boolean flag that is checked in Update</a:t>
-            </a:r>
-            <a:endParaRPr/>
-          </a:p>
-          <a:p>
-            <a:pPr indent="-317500" lvl="1" marL="914400" rtl="0" algn="l">
-              <a:spcBef>
-                <a:spcPts val="0"/>
-              </a:spcBef>
-              <a:spcAft>
-                <a:spcPts val="0"/>
-              </a:spcAft>
-              <a:buSzPts val="1400"/>
-              <a:buChar char="○"/>
-            </a:pPr>
-            <a:r>
-              <a:rPr lang="en"/>
-              <a:t>The Game1 class should react to collisions, but the the actual AABB collision detection should be delegated to the Bird class (similar to last week!)</a:t>
-            </a:r>
-            <a:endParaRPr/>
-          </a:p>
-          <a:p>
-            <a:pPr indent="-317500" lvl="1" marL="914400" rtl="0" algn="l">
-              <a:spcBef>
-                <a:spcPts val="0"/>
-              </a:spcBef>
-              <a:spcAft>
-                <a:spcPts val="0"/>
-              </a:spcAft>
-              <a:buSzPts val="1400"/>
-              <a:buChar char="○"/>
-            </a:pPr>
-            <a:r>
-              <a:rPr lang="en"/>
-              <a:t>Can you figure out a way to make collision detection more forgiving?</a:t>
+              <a:t>Goal: the game stops when the bird hits a pipe, the ground or the ceiling.</a:t>
             </a:r>
             <a:endParaRPr/>
           </a:p>
@@ -17786,46 +17804,36 @@
             </a:pPr>
             <a:r>
               <a:rPr lang="en"/>
-              <a:t>Add a similar collision check between the bird and ground &amp; ceiling of the game</a:t>
+              <a:t>Can you make the collisions a little more forgiving?</a:t>
             </a:r>
             <a:endParaRPr/>
-          </a:p>
-          <a:p>
-            <a:pPr indent="-317500" lvl="1" marL="914400" rtl="0" algn="l">
-              <a:spcBef>
-                <a:spcPts val="0"/>
-              </a:spcBef>
-              <a:spcAft>
-                <a:spcPts val="0"/>
-              </a:spcAft>
-              <a:buSzPts val="1400"/>
-              <a:buChar char="○"/>
-            </a:pPr>
-            <a:r>
-              <a:rPr lang="en"/>
-              <a:t>This check can simply be done in Game1 Update</a:t>
-            </a:r>
-            <a:endParaRPr/>
-          </a:p>
-          <a:p>
-            <a:pPr indent="-317500" lvl="1" marL="914400" rtl="0" algn="l">
-              <a:spcBef>
-                <a:spcPts val="0"/>
-              </a:spcBef>
-              <a:spcAft>
-                <a:spcPts val="0"/>
-              </a:spcAft>
-              <a:buSzPts val="1400"/>
-              <a:buChar char="○"/>
-            </a:pPr>
-            <a:r>
-              <a:rPr lang="en"/>
-              <a:t>It simply compares the bird y position to other values, no AABB collision detection involved...</a:t>
-            </a:r>
-            <a:endParaRPr strike="sngStrike"/>
           </a:p>
         </p:txBody>
       </p:sp>
+      <p:pic>
+        <p:nvPicPr>
+          <p:cNvPr id="191" name="Picture 190" descr="f8.png"/>
+          <p:cNvPicPr>
+            <a:picLocks noChangeAspect="1"/>
+          </p:cNvPicPr>
+          <p:nvPr/>
+        </p:nvPicPr>
+        <p:blipFill>
+          <a:blip r:embed="rId3"/>
+          <a:stretch>
+            <a:fillRect/>
+          </a:stretch>
+        </p:blipFill>
+        <p:spPr>
+          <a:xfrm>
+            <a:off x="2377440" y="2148840"/>
+            <a:ext cx="4389120" cy="2468880"/>
+          </a:xfrm>
+          <a:prstGeom prst="rect">
+            <a:avLst/>
+          </a:prstGeom>
+        </p:spPr>
+      </p:pic>
     </p:spTree>
   </p:cSld>
   <p:clrMapOvr>
@@ -24133,7 +24141,7 @@
         <p:spPr>
           <a:xfrm>
             <a:off x="311700" y="885950"/>
-            <a:ext cx="8520600" cy="4023300"/>
+            <a:ext cx="8520600" cy="905256"/>
           </a:xfrm>
           <a:prstGeom prst="rect">
             <a:avLst/>
@@ -24141,371 +24149,69 @@
         </p:spPr>
         <p:txBody>
           <a:bodyPr anchorCtr="0" anchor="t" bIns="91425" lIns="91425" spcFirstLastPara="1" rIns="91425" wrap="square" tIns="91425">
-            <a:normAutofit fontScale="92500" lnSpcReduction="20000"/>
+            <a:normAutofit/>
           </a:bodyPr>
           <a:lstStyle/>
           <a:p>
-            <a:pPr indent="-322580" lvl="0" marL="457200" rtl="0" algn="l">
-              <a:spcBef>
-                <a:spcPts val="0"/>
-              </a:spcBef>
-              <a:spcAft>
-                <a:spcPts val="0"/>
-              </a:spcAft>
-              <a:buSzPct val="100000"/>
+            <a:pPr indent="-330200" lvl="0" marL="457200" rtl="0" algn="l">
+              <a:spcBef>
+                <a:spcPts val="0"/>
+              </a:spcBef>
+              <a:spcAft>
+                <a:spcPts val="0"/>
+              </a:spcAft>
+              <a:buSzPts val="1600"/>
               <a:buChar char="●"/>
             </a:pPr>
             <a:r>
               <a:rPr lang="en"/>
-              <a:t>Create a new </a:t>
-            </a:r>
-            <a:r>
-              <a:rPr lang="en"/>
-              <a:t>I</a:t>
-            </a:r>
-            <a:r>
-              <a:rPr lang="en"/>
-              <a:t>State interface</a:t>
+              <a:t>Goal: an IState interface, a state machine, a title state and a play state.</a:t>
             </a:r>
             <a:endParaRPr/>
           </a:p>
           <a:p>
-            <a:pPr indent="-310832" lvl="1" marL="914400" rtl="0" algn="l">
-              <a:spcBef>
-                <a:spcPts val="0"/>
-              </a:spcBef>
-              <a:spcAft>
-                <a:spcPts val="0"/>
-              </a:spcAft>
-              <a:buSzPct val="100000"/>
-              <a:buChar char="○"/>
-            </a:pPr>
-            <a:r>
-              <a:rPr lang="en"/>
-              <a:t>The interface must have four methods</a:t>
-            </a:r>
-            <a:endParaRPr/>
-          </a:p>
-          <a:p>
-            <a:pPr indent="-299085" lvl="2" marL="1371600" rtl="0" algn="l">
-              <a:spcBef>
-                <a:spcPts val="0"/>
-              </a:spcBef>
-              <a:spcAft>
-                <a:spcPts val="0"/>
-              </a:spcAft>
-              <a:buSzPct val="100000"/>
-              <a:buChar char="■"/>
-            </a:pPr>
-            <a:r>
-              <a:rPr lang="en"/>
-              <a:t>Enter()</a:t>
-            </a:r>
-            <a:endParaRPr/>
-          </a:p>
-          <a:p>
-            <a:pPr indent="-299085" lvl="2" marL="1371600" rtl="0" algn="l">
-              <a:spcBef>
-                <a:spcPts val="0"/>
-              </a:spcBef>
-              <a:spcAft>
-                <a:spcPts val="0"/>
-              </a:spcAft>
-              <a:buSzPct val="100000"/>
-              <a:buChar char="■"/>
-            </a:pPr>
-            <a:r>
-              <a:rPr lang="en"/>
-              <a:t>Exit()</a:t>
-            </a:r>
-            <a:endParaRPr/>
-          </a:p>
-          <a:p>
-            <a:pPr indent="-299085" lvl="2" marL="1371600" rtl="0" algn="l">
-              <a:spcBef>
-                <a:spcPts val="0"/>
-              </a:spcBef>
-              <a:spcAft>
-                <a:spcPts val="0"/>
-              </a:spcAft>
-              <a:buSzPct val="100000"/>
-              <a:buChar char="■"/>
-            </a:pPr>
-            <a:r>
-              <a:rPr lang="en"/>
-              <a:t>Update(GameTime gameTime)</a:t>
-            </a:r>
-            <a:endParaRPr/>
-          </a:p>
-          <a:p>
-            <a:pPr indent="-299085" lvl="2" marL="1371600" rtl="0" algn="l">
-              <a:spcBef>
-                <a:spcPts val="0"/>
-              </a:spcBef>
-              <a:spcAft>
-                <a:spcPts val="0"/>
-              </a:spcAft>
-              <a:buSzPct val="100000"/>
-              <a:buChar char="■"/>
-            </a:pPr>
-            <a:r>
-              <a:rPr lang="en"/>
-              <a:t>Draw(SpriteBatch spriteBatch)</a:t>
-            </a:r>
-            <a:endParaRPr/>
-          </a:p>
-          <a:p>
-            <a:pPr indent="-322580" lvl="0" marL="457200" rtl="0" algn="l">
-              <a:spcBef>
-                <a:spcPts val="0"/>
-              </a:spcBef>
-              <a:spcAft>
-                <a:spcPts val="0"/>
-              </a:spcAft>
-              <a:buSzPct val="100000"/>
+            <a:pPr indent="-330200" lvl="0" marL="457200" rtl="0" algn="l">
+              <a:spcBef>
+                <a:spcPts val="0"/>
+              </a:spcBef>
+              <a:spcAft>
+                <a:spcPts val="0"/>
+              </a:spcAft>
+              <a:buSzPts val="1600"/>
               <a:buChar char="●"/>
             </a:pPr>
             <a:r>
               <a:rPr lang="en"/>
-              <a:t>Create two new states implementing the interface</a:t>
-            </a:r>
-            <a:endParaRPr/>
-          </a:p>
-          <a:p>
-            <a:pPr indent="-310832" lvl="1" marL="914400" rtl="0" algn="l">
-              <a:spcBef>
-                <a:spcPts val="0"/>
-              </a:spcBef>
-              <a:spcAft>
-                <a:spcPts val="0"/>
-              </a:spcAft>
-              <a:buSzPct val="100000"/>
-              <a:buChar char="○"/>
-            </a:pPr>
-            <a:r>
-              <a:rPr lang="en"/>
-              <a:t>Title state</a:t>
-            </a:r>
-            <a:endParaRPr/>
-          </a:p>
-          <a:p>
-            <a:pPr indent="-299085" lvl="2" marL="1371600" rtl="0" algn="l">
-              <a:spcBef>
-                <a:spcPts val="0"/>
-              </a:spcBef>
-              <a:spcAft>
-                <a:spcPts val="0"/>
-              </a:spcAft>
-              <a:buSzPct val="100000"/>
-              <a:buChar char="■"/>
-            </a:pPr>
-            <a:r>
-              <a:rPr lang="en"/>
-              <a:t>The user sees a title and presses enter to start playing (i.e. transition to play state)</a:t>
-            </a:r>
-            <a:endParaRPr/>
-          </a:p>
-          <a:p>
-            <a:pPr indent="-299085" lvl="2" marL="1371600" rtl="0" algn="l">
-              <a:spcBef>
-                <a:spcPts val="0"/>
-              </a:spcBef>
-              <a:spcAft>
-                <a:spcPts val="0"/>
-              </a:spcAft>
-              <a:buSzPct val="100000"/>
-              <a:buChar char="■"/>
-            </a:pPr>
-            <a:r>
-              <a:rPr lang="en"/>
-              <a:t>The background should not be scrolling in this state! (repurpose the pause functionality to achieve this)</a:t>
-            </a:r>
-            <a:endParaRPr/>
-          </a:p>
-          <a:p>
-            <a:pPr indent="-310832" lvl="1" marL="914400" rtl="0" algn="l">
-              <a:spcBef>
-                <a:spcPts val="0"/>
-              </a:spcBef>
-              <a:spcAft>
-                <a:spcPts val="0"/>
-              </a:spcAft>
-              <a:buSzPct val="100000"/>
-              <a:buChar char="○"/>
-            </a:pPr>
-            <a:r>
-              <a:rPr lang="en"/>
-              <a:t>Play state</a:t>
-            </a:r>
-            <a:endParaRPr/>
-          </a:p>
-          <a:p>
-            <a:pPr indent="-299085" lvl="2" marL="1371600" rtl="0" algn="l">
-              <a:spcBef>
-                <a:spcPts val="0"/>
-              </a:spcBef>
-              <a:spcAft>
-                <a:spcPts val="0"/>
-              </a:spcAft>
-              <a:buSzPct val="100000"/>
-              <a:buChar char="■"/>
-            </a:pPr>
-            <a:r>
-              <a:rPr lang="en"/>
-              <a:t>The main state where the game is played (notice how most of your Game1 gameplay code will be moved here)</a:t>
-            </a:r>
-            <a:endParaRPr/>
-          </a:p>
-          <a:p>
-            <a:pPr indent="-299085" lvl="2" marL="1371600" rtl="0" algn="l">
-              <a:spcBef>
-                <a:spcPts val="0"/>
-              </a:spcBef>
-              <a:spcAft>
-                <a:spcPts val="0"/>
-              </a:spcAft>
-              <a:buSzPct val="100000"/>
-              <a:buChar char="■"/>
-            </a:pPr>
-            <a:r>
-              <a:rPr lang="en"/>
-              <a:t>If the bird collides with anything, return to title state</a:t>
-            </a:r>
-            <a:endParaRPr/>
-          </a:p>
-          <a:p>
-            <a:pPr indent="-299085" lvl="2" marL="1371600" rtl="0" algn="l">
-              <a:spcBef>
-                <a:spcPts val="0"/>
-              </a:spcBef>
-              <a:spcAft>
-                <a:spcPts val="0"/>
-              </a:spcAft>
-              <a:buSzPct val="100000"/>
-              <a:buChar char="■"/>
-            </a:pPr>
-            <a:r>
-              <a:rPr lang="en"/>
-              <a:t>This state will need to reset important gameplay values in the Enter method (to ensure a clean state for every retry)</a:t>
-            </a:r>
-            <a:endParaRPr/>
-          </a:p>
-          <a:p>
-            <a:pPr indent="-322580" lvl="0" marL="457200" rtl="0" algn="l">
-              <a:spcBef>
-                <a:spcPts val="0"/>
-              </a:spcBef>
-              <a:spcAft>
-                <a:spcPts val="0"/>
-              </a:spcAft>
-              <a:buSzPct val="100000"/>
-              <a:buChar char="●"/>
-            </a:pPr>
-            <a:r>
-              <a:rPr lang="en"/>
-              <a:t>Create a s</a:t>
-            </a:r>
-            <a:r>
-              <a:rPr lang="en"/>
-              <a:t>tate machine</a:t>
-            </a:r>
-            <a:r>
-              <a:rPr lang="en"/>
-              <a:t> that controls the global state of the game</a:t>
-            </a:r>
-            <a:endParaRPr/>
-          </a:p>
-          <a:p>
-            <a:pPr indent="-310832" lvl="1" marL="914400" rtl="0" algn="l">
-              <a:spcBef>
-                <a:spcPts val="0"/>
-              </a:spcBef>
-              <a:spcAft>
-                <a:spcPts val="0"/>
-              </a:spcAft>
-              <a:buSzPct val="100000"/>
-              <a:buChar char="○"/>
-            </a:pPr>
-            <a:r>
-              <a:rPr lang="en"/>
-              <a:t>You need to supply a reference of the Game1 instance to the StateMachine constructor, which in turn makes it </a:t>
-            </a:r>
-            <a:r>
-              <a:rPr lang="en"/>
-              <a:t>available</a:t>
-            </a:r>
-            <a:r>
-              <a:rPr lang="en"/>
-              <a:t> to each state through their constructors.</a:t>
-            </a:r>
-            <a:endParaRPr/>
-          </a:p>
-          <a:p>
-            <a:pPr indent="-310832" lvl="1" marL="914400" rtl="0" algn="l">
-              <a:spcBef>
-                <a:spcPts val="0"/>
-              </a:spcBef>
-              <a:spcAft>
-                <a:spcPts val="0"/>
-              </a:spcAft>
-              <a:buSzPct val="100000"/>
-              <a:buChar char="○"/>
-            </a:pPr>
-            <a:r>
-              <a:rPr lang="en"/>
-              <a:t>Remember to initialize the state machine and call its Update and Draw methods from the Game1 class</a:t>
-            </a:r>
-            <a:endParaRPr/>
-          </a:p>
-          <a:p>
-            <a:pPr indent="-322580" lvl="0" marL="457200" rtl="0" algn="l">
-              <a:spcBef>
-                <a:spcPts val="0"/>
-              </a:spcBef>
-              <a:spcAft>
-                <a:spcPts val="0"/>
-              </a:spcAft>
-              <a:buSzPct val="100000"/>
-              <a:buChar char="●"/>
-            </a:pPr>
-            <a:r>
-              <a:rPr lang="en"/>
-              <a:t>Add the </a:t>
-            </a:r>
-            <a:r>
-              <a:rPr lang="en" u="sng">
-                <a:solidFill>
-                  <a:schemeClr val="hlink"/>
-                </a:solidFill>
-                <a:hlinkClick r:id="rId3"/>
-              </a:rPr>
-              <a:t>retro</a:t>
-            </a:r>
-            <a:r>
-              <a:rPr lang="en"/>
-              <a:t> font to the game</a:t>
-            </a:r>
-            <a:endParaRPr/>
-          </a:p>
-          <a:p>
-            <a:pPr indent="-310832" lvl="1" marL="914400" rtl="0" algn="l">
-              <a:spcBef>
-                <a:spcPts val="0"/>
-              </a:spcBef>
-              <a:spcAft>
-                <a:spcPts val="0"/>
-              </a:spcAft>
-              <a:buSzPct val="100000"/>
-              <a:buChar char="○"/>
-            </a:pPr>
-            <a:r>
-              <a:rPr lang="en"/>
-              <a:t>There is an overload method of DrawString() that lets you tweak the scale of the drawn text</a:t>
+              <a:t>Most of Game1’s gameplay code moves into the play state.</a:t>
             </a:r>
             <a:endParaRPr/>
           </a:p>
         </p:txBody>
       </p:sp>
+      <p:pic>
+        <p:nvPicPr>
+          <p:cNvPr id="226" name="Picture 225" descr="f9.png"/>
+          <p:cNvPicPr>
+            <a:picLocks noChangeAspect="1"/>
+          </p:cNvPicPr>
+          <p:nvPr/>
+        </p:nvPicPr>
+        <p:blipFill>
+          <a:blip r:embed="rId4"/>
+          <a:stretch>
+            <a:fillRect/>
+          </a:stretch>
+        </p:blipFill>
+        <p:spPr>
+          <a:xfrm>
+            <a:off x="2377440" y="2148840"/>
+            <a:ext cx="4389120" cy="2468880"/>
+          </a:xfrm>
+          <a:prstGeom prst="rect">
+            <a:avLst/>
+          </a:prstGeom>
+        </p:spPr>
+      </p:pic>
     </p:spTree>
   </p:cSld>
   <p:clrMapOvr>
@@ -25551,7 +25257,7 @@
         <p:spPr>
           <a:xfrm>
             <a:off x="311700" y="885950"/>
-            <a:ext cx="8520600" cy="4023300"/>
+            <a:ext cx="8520600" cy="905256"/>
           </a:xfrm>
           <a:prstGeom prst="rect">
             <a:avLst/>
@@ -25575,75 +25281,7 @@
             </a:pPr>
             <a:r>
               <a:rPr lang="en"/>
-              <a:t>Introduce scoring to the game</a:t>
-            </a:r>
-            <a:endParaRPr/>
-          </a:p>
-          <a:p>
-            <a:pPr indent="-317500" lvl="1" marL="914400" rtl="0" algn="l">
-              <a:spcBef>
-                <a:spcPts val="0"/>
-              </a:spcBef>
-              <a:spcAft>
-                <a:spcPts val="0"/>
-              </a:spcAft>
-              <a:buSzPts val="1400"/>
-              <a:buChar char="○"/>
-            </a:pPr>
-            <a:r>
-              <a:rPr lang="en"/>
-              <a:t>When the bird passes a pipe pair, the score should be incremented by one</a:t>
-            </a:r>
-            <a:endParaRPr/>
-          </a:p>
-          <a:p>
-            <a:pPr indent="-304800" lvl="2" marL="1371600" rtl="0" algn="l">
-              <a:spcBef>
-                <a:spcPts val="0"/>
-              </a:spcBef>
-              <a:spcAft>
-                <a:spcPts val="0"/>
-              </a:spcAft>
-              <a:buSzPts val="1200"/>
-              <a:buChar char="■"/>
-            </a:pPr>
-            <a:r>
-              <a:rPr lang="en" sz="1400"/>
-              <a:t>The score should be tracked in the play state</a:t>
-            </a:r>
-            <a:endParaRPr sz="1400"/>
-          </a:p>
-          <a:p>
-            <a:pPr indent="-317500" lvl="2" marL="1371600" rtl="0" algn="l">
-              <a:spcBef>
-                <a:spcPts val="0"/>
-              </a:spcBef>
-              <a:spcAft>
-                <a:spcPts val="0"/>
-              </a:spcAft>
-              <a:buSzPts val="1400"/>
-              <a:buChar char="■"/>
-            </a:pPr>
-            <a:r>
-              <a:rPr lang="en" sz="1400"/>
-              <a:t>Introduce a property on PipePair to keep track of if that pair has already been scored</a:t>
-            </a:r>
-            <a:endParaRPr sz="1400"/>
-          </a:p>
-          <a:p>
-            <a:pPr indent="-317500" lvl="1" marL="914400" rtl="0" algn="l">
-              <a:spcBef>
-                <a:spcPts val="0"/>
-              </a:spcBef>
-              <a:spcAft>
-                <a:spcPts val="0"/>
-              </a:spcAft>
-              <a:buSzPts val="1400"/>
-              <a:buChar char="○"/>
-            </a:pPr>
-            <a:r>
-              <a:rPr lang="en"/>
-              <a:t>Display the score in the top left corner of the screen while in play state</a:t>
+              <a:t>Goal: a point for every pipe pair passed, and a score state at the end.</a:t>
             </a:r>
             <a:endParaRPr/>
           </a:p>
@@ -25660,84 +25298,36 @@
             </a:pPr>
             <a:r>
               <a:rPr lang="en"/>
-              <a:t>Add a score</a:t>
-            </a:r>
-            <a:r>
-              <a:rPr lang="en"/>
-              <a:t> state that displays the final score</a:t>
-            </a:r>
-            <a:endParaRPr/>
-          </a:p>
-          <a:p>
-            <a:pPr indent="-317500" lvl="1" marL="914400" rtl="0" algn="l">
-              <a:spcBef>
-                <a:spcPts val="0"/>
-              </a:spcBef>
-              <a:spcAft>
-                <a:spcPts val="0"/>
-              </a:spcAft>
-              <a:buSzPts val="1400"/>
-              <a:buChar char="○"/>
-            </a:pPr>
-            <a:r>
-              <a:rPr lang="en"/>
-              <a:t>Display the score in big text in the center of the screen</a:t>
-            </a:r>
-            <a:endParaRPr/>
-          </a:p>
-          <a:p>
-            <a:pPr indent="-304800" lvl="2" marL="1371600" rtl="0" algn="l">
-              <a:spcBef>
-                <a:spcPts val="0"/>
-              </a:spcBef>
-              <a:spcAft>
-                <a:spcPts val="0"/>
-              </a:spcAft>
-              <a:buSzPts val="1200"/>
-              <a:buChar char="■"/>
-            </a:pPr>
-            <a:r>
-              <a:rPr lang="en"/>
-              <a:t>Consider - how do you get access to the score data from this state?</a:t>
-            </a:r>
-            <a:endParaRPr/>
-          </a:p>
-          <a:p>
-            <a:pPr indent="-317500" lvl="1" marL="914400" rtl="0" algn="l">
-              <a:spcBef>
-                <a:spcPts val="0"/>
-              </a:spcBef>
-              <a:spcAft>
-                <a:spcPts val="0"/>
-              </a:spcAft>
-              <a:buSzPts val="1400"/>
-              <a:buChar char="○"/>
-            </a:pPr>
-            <a:r>
-              <a:rPr lang="en"/>
-              <a:t>Transition from play state to score state when the bird has collided with an obstacle</a:t>
-            </a:r>
-            <a:endParaRPr/>
-          </a:p>
-          <a:p>
-            <a:pPr indent="-317500" lvl="1" marL="914400" rtl="0" algn="l">
-              <a:spcBef>
-                <a:spcPts val="0"/>
-              </a:spcBef>
-              <a:spcAft>
-                <a:spcPts val="0"/>
-              </a:spcAft>
-              <a:buSzPts val="1400"/>
-              <a:buChar char="○"/>
-            </a:pPr>
-            <a:r>
-              <a:rPr lang="en"/>
-              <a:t>Transition from score state to play state when space is pressed</a:t>
+              <a:t>How does the score state get the score?</a:t>
             </a:r>
             <a:endParaRPr/>
           </a:p>
         </p:txBody>
       </p:sp>
+      <p:pic>
+        <p:nvPicPr>
+          <p:cNvPr id="232" name="Picture 231" descr="f10.png"/>
+          <p:cNvPicPr>
+            <a:picLocks noChangeAspect="1"/>
+          </p:cNvPicPr>
+          <p:nvPr/>
+        </p:nvPicPr>
+        <p:blipFill>
+          <a:blip r:embed="rId3"/>
+          <a:stretch>
+            <a:fillRect/>
+          </a:stretch>
+        </p:blipFill>
+        <p:spPr>
+          <a:xfrm>
+            <a:off x="2377440" y="2148840"/>
+            <a:ext cx="4389120" cy="2468880"/>
+          </a:xfrm>
+          <a:prstGeom prst="rect">
+            <a:avLst/>
+          </a:prstGeom>
+        </p:spPr>
+      </p:pic>
     </p:spTree>
   </p:cSld>
   <p:clrMapOvr>
@@ -26342,7 +25932,7 @@
         <p:spPr>
           <a:xfrm>
             <a:off x="311700" y="885950"/>
-            <a:ext cx="8520600" cy="4023300"/>
+            <a:ext cx="8520600" cy="521208"/>
           </a:xfrm>
           <a:prstGeom prst="rect">
             <a:avLst/>
@@ -26366,118 +25956,36 @@
             </a:pPr>
             <a:r>
               <a:rPr lang="en"/>
-              <a:t>Add a c</a:t>
-            </a:r>
-            <a:r>
-              <a:rPr lang="en"/>
-              <a:t>ountdown state</a:t>
-            </a:r>
-            <a:endParaRPr/>
-          </a:p>
-          <a:p>
-            <a:pPr indent="-317500" lvl="1" marL="914400" rtl="0" algn="l">
-              <a:spcBef>
-                <a:spcPts val="0"/>
-              </a:spcBef>
-              <a:spcAft>
-                <a:spcPts val="0"/>
-              </a:spcAft>
-              <a:buSzPts val="1400"/>
-              <a:buChar char="○"/>
-            </a:pPr>
-            <a:r>
-              <a:rPr lang="en"/>
-              <a:t>This state sits between title state and play state</a:t>
-            </a:r>
-            <a:endParaRPr/>
-          </a:p>
-          <a:p>
-            <a:pPr indent="-304800" lvl="2" marL="1371600" rtl="0" algn="l">
-              <a:spcBef>
-                <a:spcPts val="0"/>
-              </a:spcBef>
-              <a:spcAft>
-                <a:spcPts val="0"/>
-              </a:spcAft>
-              <a:buSzPts val="1200"/>
-              <a:buChar char="■"/>
-            </a:pPr>
-            <a:r>
-              <a:rPr lang="en"/>
-              <a:t>Title state should now transition to countdown state instead of play state</a:t>
-            </a:r>
-            <a:endParaRPr/>
-          </a:p>
-          <a:p>
-            <a:pPr indent="-304800" lvl="2" marL="1371600" rtl="0" algn="l">
-              <a:spcBef>
-                <a:spcPts val="0"/>
-              </a:spcBef>
-              <a:spcAft>
-                <a:spcPts val="0"/>
-              </a:spcAft>
-              <a:buSzPts val="1200"/>
-              <a:buChar char="■"/>
-            </a:pPr>
-            <a:r>
-              <a:rPr lang="en"/>
-              <a:t>Score state should now transition to countdown state instead of directly to play state</a:t>
-            </a:r>
-            <a:endParaRPr/>
-          </a:p>
-          <a:p>
-            <a:pPr indent="-317500" lvl="1" marL="914400" rtl="0" algn="l">
-              <a:spcBef>
-                <a:spcPts val="0"/>
-              </a:spcBef>
-              <a:spcAft>
-                <a:spcPts val="0"/>
-              </a:spcAft>
-              <a:buSzPts val="1400"/>
-              <a:buChar char="○"/>
-            </a:pPr>
-            <a:r>
-              <a:rPr lang="en"/>
-              <a:t>Countdown state counts down from 3 to 0. When 0 is reached, it transitions to play state</a:t>
-            </a:r>
-            <a:endParaRPr/>
-          </a:p>
-          <a:p>
-            <a:pPr indent="-304800" lvl="2" marL="1371600" rtl="0" algn="l">
-              <a:spcBef>
-                <a:spcPts val="0"/>
-              </a:spcBef>
-              <a:spcAft>
-                <a:spcPts val="0"/>
-              </a:spcAft>
-              <a:buSzPts val="1200"/>
-              <a:buChar char="■"/>
-            </a:pPr>
-            <a:r>
-              <a:rPr lang="en"/>
-              <a:t>Display the countdown in the center of the screen</a:t>
-            </a:r>
-            <a:endParaRPr/>
-          </a:p>
-          <a:p>
-            <a:pPr indent="-304800" lvl="2" marL="1371600" rtl="0" algn="l">
-              <a:spcBef>
-                <a:spcPts val="0"/>
-              </a:spcBef>
-              <a:spcAft>
-                <a:spcPts val="0"/>
-              </a:spcAft>
-              <a:buSzPts val="1200"/>
-              <a:buChar char="■"/>
-            </a:pPr>
-            <a:r>
-              <a:rPr lang="en"/>
-              <a:t>You can reuse some of the timer logic from spawning pipes</a:t>
+              <a:t>Goal: a countdown from 3 between the title (or the score) and play.</a:t>
             </a:r>
             <a:endParaRPr/>
           </a:p>
         </p:txBody>
       </p:sp>
+      <p:pic>
+        <p:nvPicPr>
+          <p:cNvPr id="238" name="Picture 237" descr="f11.png"/>
+          <p:cNvPicPr>
+            <a:picLocks noChangeAspect="1"/>
+          </p:cNvPicPr>
+          <p:nvPr/>
+        </p:nvPicPr>
+        <p:blipFill>
+          <a:blip r:embed="rId3"/>
+          <a:stretch>
+            <a:fillRect/>
+          </a:stretch>
+        </p:blipFill>
+        <p:spPr>
+          <a:xfrm>
+            <a:off x="2377440" y="2148840"/>
+            <a:ext cx="4389120" cy="2468880"/>
+          </a:xfrm>
+          <a:prstGeom prst="rect">
+            <a:avLst/>
+          </a:prstGeom>
+        </p:spPr>
+      </p:pic>
     </p:spTree>
   </p:cSld>
   <p:clrMapOvr>
@@ -26935,7 +26443,7 @@
         <p:spPr>
           <a:xfrm>
             <a:off x="311700" y="885950"/>
-            <a:ext cx="8520600" cy="4023300"/>
+            <a:ext cx="8520600" cy="905256"/>
           </a:xfrm>
           <a:prstGeom prst="rect">
             <a:avLst/>
@@ -26959,76 +26467,7 @@
             </a:pPr>
             <a:r>
               <a:rPr lang="en"/>
-              <a:t>Add background music (i.e. a “</a:t>
-            </a:r>
-            <a:r>
-              <a:rPr lang="en" u="sng">
-                <a:solidFill>
-                  <a:schemeClr val="hlink"/>
-                </a:solidFill>
-                <a:hlinkClick r:id="rId3"/>
-              </a:rPr>
-              <a:t>Song</a:t>
-            </a:r>
-            <a:r>
-              <a:rPr lang="en"/>
-              <a:t>”) to the game</a:t>
-            </a:r>
-            <a:endParaRPr/>
-          </a:p>
-          <a:p>
-            <a:pPr indent="-317500" lvl="1" marL="914400" rtl="0" algn="l">
-              <a:spcBef>
-                <a:spcPts val="0"/>
-              </a:spcBef>
-              <a:spcAft>
-                <a:spcPts val="0"/>
-              </a:spcAft>
-              <a:buSzPts val="1400"/>
-              <a:buChar char="○"/>
-            </a:pPr>
-            <a:r>
-              <a:rPr lang="en"/>
-              <a:t>You can use </a:t>
-            </a:r>
-            <a:r>
-              <a:rPr lang="en" u="sng">
-                <a:solidFill>
-                  <a:schemeClr val="hlink"/>
-                </a:solidFill>
-                <a:hlinkClick r:id="rId4"/>
-              </a:rPr>
-              <a:t>this track</a:t>
-            </a:r>
-            <a:endParaRPr/>
-          </a:p>
-          <a:p>
-            <a:pPr indent="-317500" lvl="1" marL="914400" rtl="0" algn="l">
-              <a:spcBef>
-                <a:spcPts val="0"/>
-              </a:spcBef>
-              <a:spcAft>
-                <a:spcPts val="0"/>
-              </a:spcAft>
-              <a:buSzPts val="1400"/>
-              <a:buChar char="○"/>
-            </a:pPr>
-            <a:r>
-              <a:rPr lang="en"/>
-              <a:t>You will need to use the static </a:t>
-            </a:r>
-            <a:r>
-              <a:rPr lang="en" u="sng">
-                <a:solidFill>
-                  <a:schemeClr val="hlink"/>
-                </a:solidFill>
-                <a:hlinkClick r:id="rId5"/>
-              </a:rPr>
-              <a:t>MediaPlayer.Play(Song song)</a:t>
-            </a:r>
-            <a:r>
-              <a:rPr lang="en"/>
-              <a:t> method to play the song</a:t>
+              <a:t>Goal: music, and sounds for flap, hurt and score.</a:t>
             </a:r>
             <a:endParaRPr/>
           </a:p>
@@ -27045,126 +26484,74 @@
             </a:pPr>
             <a:r>
               <a:rPr lang="en"/>
-              <a:t>Add sound effects to the game</a:t>
+              <a:t>In an Audio class, made a Singleton: Audio.Instance.PlayFlap()</a:t>
             </a:r>
             <a:endParaRPr/>
           </a:p>
-          <a:p>
-            <a:pPr indent="-317500" lvl="1" marL="914400" rtl="0" algn="l">
-              <a:spcBef>
-                <a:spcPts val="0"/>
-              </a:spcBef>
-              <a:spcAft>
-                <a:spcPts val="0"/>
-              </a:spcAft>
-              <a:buSzPts val="1400"/>
-              <a:buChar char="○"/>
-            </a:pPr>
-            <a:r>
-              <a:rPr lang="en"/>
-              <a:t>You must have three distinct sound effects:</a:t>
-            </a:r>
-            <a:endParaRPr/>
-          </a:p>
-          <a:p>
-            <a:pPr indent="-304800" lvl="2" marL="1371600" rtl="0" algn="l">
-              <a:spcBef>
-                <a:spcPts val="0"/>
-              </a:spcBef>
-              <a:spcAft>
-                <a:spcPts val="0"/>
-              </a:spcAft>
-              <a:buSzPts val="1200"/>
-              <a:buChar char="■"/>
-            </a:pPr>
-            <a:r>
-              <a:rPr lang="en" u="sng">
-                <a:solidFill>
-                  <a:schemeClr val="hlink"/>
-                </a:solidFill>
-                <a:hlinkClick r:id="rId6"/>
-              </a:rPr>
-              <a:t>Flap</a:t>
-            </a:r>
-            <a:endParaRPr/>
-          </a:p>
-          <a:p>
-            <a:pPr indent="-304800" lvl="2" marL="1371600" rtl="0" algn="l">
-              <a:spcBef>
-                <a:spcPts val="0"/>
-              </a:spcBef>
-              <a:spcAft>
-                <a:spcPts val="0"/>
-              </a:spcAft>
-              <a:buSzPts val="1200"/>
-              <a:buChar char="■"/>
-            </a:pPr>
-            <a:r>
-              <a:rPr lang="en" u="sng">
-                <a:solidFill>
-                  <a:schemeClr val="hlink"/>
-                </a:solidFill>
-                <a:hlinkClick r:id="rId7"/>
-              </a:rPr>
-              <a:t>Hurt</a:t>
-            </a:r>
-            <a:r>
-              <a:rPr lang="en"/>
-              <a:t> (you can play this together with an </a:t>
-            </a:r>
-            <a:r>
-              <a:rPr lang="en" u="sng">
-                <a:solidFill>
-                  <a:schemeClr val="hlink"/>
-                </a:solidFill>
-                <a:hlinkClick r:id="rId8"/>
-              </a:rPr>
-              <a:t>Explosion</a:t>
-            </a:r>
-            <a:r>
-              <a:rPr lang="en"/>
-              <a:t> sound for extra impact)</a:t>
-            </a:r>
-            <a:endParaRPr/>
-          </a:p>
-          <a:p>
-            <a:pPr indent="-304800" lvl="2" marL="1371600" rtl="0" algn="l">
-              <a:spcBef>
-                <a:spcPts val="0"/>
-              </a:spcBef>
-              <a:spcAft>
-                <a:spcPts val="0"/>
-              </a:spcAft>
-              <a:buSzPts val="1200"/>
-              <a:buChar char="■"/>
-            </a:pPr>
-            <a:r>
-              <a:rPr lang="en" u="sng">
-                <a:solidFill>
-                  <a:schemeClr val="hlink"/>
-                </a:solidFill>
-                <a:hlinkClick r:id="rId9"/>
-              </a:rPr>
-              <a:t>Score</a:t>
-            </a:r>
-            <a:endParaRPr/>
-          </a:p>
-          <a:p>
-            <a:pPr indent="-330200" lvl="0" marL="457200" rtl="0" algn="l">
-              <a:spcBef>
-                <a:spcPts val="0"/>
-              </a:spcBef>
-              <a:spcAft>
-                <a:spcPts val="0"/>
-              </a:spcAft>
-              <a:buSzPts val="1600"/>
-              <a:buChar char="●"/>
-            </a:pPr>
-            <a:r>
-              <a:rPr lang="en"/>
-              <a:t>Organize the sounds in an Audio class, made a Singleton: Audio.Instance.PlayFlap()</a:t>
-            </a:r>
-            <a:endParaRPr/>
+        </p:txBody>
+      </p:sp>
+      <p:sp>
+        <p:nvSpPr>
+          <p:cNvPr id="244" name="Rounded Rectangle 243"/>
+          <p:cNvSpPr/>
+          <p:nvPr/>
+        </p:nvSpPr>
+        <p:spPr>
+          <a:xfrm>
+            <a:off x="1828800" y="2103120"/>
+            <a:ext cx="5486400" cy="1005840"/>
+          </a:xfrm>
+          <a:prstGeom prst="roundRect">
+            <a:avLst>
+              <a:gd name="adj" fmla="val 12000"/>
+            </a:avLst>
+          </a:prstGeom>
+          <a:solidFill>
+            <a:srgbClr val="2E3338"/>
+          </a:solidFill>
+          <a:ln>
+            <a:noFill/>
+          </a:ln>
+          <a:effectLst/>
+        </p:spPr>
+        <p:style>
+          <a:lnRef idx="1">
+            <a:schemeClr val="accent1"/>
+          </a:lnRef>
+          <a:fillRef idx="3">
+            <a:schemeClr val="accent1"/>
+          </a:fillRef>
+          <a:effectRef idx="2">
+            <a:schemeClr val="accent1"/>
+          </a:effectRef>
+          <a:fontRef idx="minor">
+            <a:schemeClr val="lt1"/>
+          </a:fontRef>
+        </p:style>
+        <p:txBody>
+          <a:bodyPr rtlCol="0" anchor="ctr" wrap="square" lIns="73152" rIns="73152"/>
+          <a:lstStyle/>
+          <a:p>
+            <a:pPr algn="ctr"/>
+            <a:r>
+              <a:rPr sz="1600" b="1">
+                <a:solidFill>
+                  <a:srgbClr val="DEE2E6"/>
+                </a:solidFill>
+              </a:rPr>
+              <a:t>Song + MediaPlayer.Play: the music</a:t>
+            </a:r>
+          </a:p>
+          <a:p>
+            <a:pPr algn="ctr"/>
+            <a:r>
+              <a:rPr sz="1400" b="0">
+                <a:solidFill>
+                  <a:srgbClr val="9AA3AB"/>
+                </a:solidFill>
+              </a:rPr>
+              <a:t>SoundEffect: flap, hurt (+ explosion), score</a:t>
+            </a:r>
           </a:p>
         </p:txBody>
       </p:sp>
@@ -30662,6 +30049,162 @@
               <a:t>Groups formed, game concept written, repository created and link uploaded to itslearning</a:t>
             </a:r>
             <a:endParaRPr/>
+          </a:p>
+        </p:txBody>
+      </p:sp>
+    </p:spTree>
+  </p:cSld>
+  <p:clrMapOvr>
+    <a:masterClrMapping/>
+  </p:clrMapOvr>
+</p:sld>
+</file>
+
+<file path=ppt/slides/slide43.xml><?xml version="1.0" encoding="utf-8"?>
+<p:sld xmlns:a="http://schemas.openxmlformats.org/drawingml/2006/main" xmlns:p="http://schemas.openxmlformats.org/presentationml/2006/main" xmlns:r="http://schemas.openxmlformats.org/officeDocument/2006/relationships">
+  <p:cSld>
+    <p:spTree>
+      <p:nvGrpSpPr>
+        <p:cNvPr id="1" name=""/>
+        <p:cNvGrpSpPr/>
+        <p:nvPr/>
+      </p:nvGrpSpPr>
+      <p:grpSpPr/>
+      <p:sp>
+        <p:nvSpPr>
+          <p:cNvPr id="2" name="Title 1"/>
+          <p:cNvSpPr>
+            <a:spLocks noGrp="1"/>
+          </p:cNvSpPr>
+          <p:nvPr>
+            <p:ph type="title"/>
+          </p:nvPr>
+        </p:nvSpPr>
+        <p:spPr/>
+        <p:txBody>
+          <a:bodyPr/>
+          <a:lstStyle/>
+          <a:p>
+            <a:pPr indent="0" lvl="0" marL="0" rtl="0" algn="l">
+              <a:spcBef>
+                <a:spcPts val="0"/>
+              </a:spcBef>
+              <a:spcAft>
+                <a:spcPts val="0"/>
+              </a:spcAft>
+              <a:buNone/>
+            </a:pPr>
+            <a:r>
+              <a:rPr lang="en"/>
+              <a:t>Check Yourself</a:t>
+            </a:r>
+            <a:endParaRPr/>
+          </a:p>
+        </p:txBody>
+      </p:sp>
+      <p:sp>
+        <p:nvSpPr>
+          <p:cNvPr id="3" name="Text Placeholder 2"/>
+          <p:cNvSpPr>
+            <a:spLocks noGrp="1"/>
+          </p:cNvSpPr>
+          <p:nvPr>
+            <p:ph type="body" idx="1"/>
+          </p:nvPr>
+        </p:nvSpPr>
+        <p:spPr>
+          <a:xfrm>
+            <a:off x="311700" y="885950"/>
+            <a:ext cx="8520600" cy="1335024"/>
+          </a:xfrm>
+        </p:spPr>
+        <p:txBody>
+          <a:bodyPr/>
+          <a:lstStyle/>
+          <a:p>
+            <a:pPr indent="-330200" lvl="0" marL="457200" rtl="0" algn="l">
+              <a:spcBef>
+                <a:spcPts val="0"/>
+              </a:spcBef>
+              <a:spcAft>
+                <a:spcPts val="0"/>
+              </a:spcAft>
+              <a:buSzPts val="1600"/>
+              <a:buChar char="●"/>
+            </a:pPr>
+            <a:r>
+              <a:rPr lang="en"/>
+              <a:t>What problem does a state machine solve compared to a string or enum field?</a:t>
+            </a:r>
+            <a:endParaRPr/>
+          </a:p>
+          <a:p>
+            <a:pPr indent="-330200" lvl="0" marL="457200" rtl="0" algn="l">
+              <a:spcBef>
+                <a:spcPts val="0"/>
+              </a:spcBef>
+              <a:spcAft>
+                <a:spcPts val="0"/>
+              </a:spcAft>
+              <a:buSzPts val="1600"/>
+              <a:buChar char="●"/>
+            </a:pPr>
+            <a:r>
+              <a:rPr lang="en"/>
+              <a:t>What happens if you forget to call Exit() when switching state?</a:t>
+            </a:r>
+            <a:endParaRPr/>
+          </a:p>
+          <a:p>
+            <a:pPr indent="-330200" lvl="0" marL="457200" rtl="0" algn="l">
+              <a:spcBef>
+                <a:spcPts val="0"/>
+              </a:spcBef>
+              <a:spcAft>
+                <a:spcPts val="0"/>
+              </a:spcAft>
+              <a:buSzPts val="1600"/>
+              <a:buChar char="●"/>
+            </a:pPr>
+            <a:r>
+              <a:rPr lang="en"/>
+              <a:t>Why is Singleton considered an anti-pattern by many game programmers?</a:t>
+            </a:r>
+            <a:endParaRPr/>
+          </a:p>
+        </p:txBody>
+      </p:sp>
+      <p:sp>
+        <p:nvSpPr>
+          <p:cNvPr id="4" name="TextBox 3"/>
+          <p:cNvSpPr txBox="1"/>
+          <p:nvPr/>
+        </p:nvSpPr>
+        <p:spPr>
+          <a:xfrm>
+            <a:off x="457200" y="2798064"/>
+            <a:ext cx="8229600" cy="457200"/>
+          </a:xfrm>
+          <a:prstGeom prst="rect">
+            <a:avLst/>
+          </a:prstGeom>
+          <a:noFill/>
+        </p:spPr>
+        <p:txBody>
+          <a:bodyPr wrap="square">
+            <a:spAutoFit/>
+          </a:bodyPr>
+          <a:lstStyle/>
+          <a:p>
+            <a:pPr algn="ctr"/>
+            <a:r>
+              <a:rPr sz="1400" b="0" i="0">
+                <a:solidFill>
+                  <a:srgbClr val="9AA3AB"/>
+                </a:solidFill>
+              </a:rPr>
+              <a:t>The answers, and more questions, are on the course site.</a:t>
+            </a:r>
           </a:p>
         </p:txBody>
       </p:sp>

--- a/slides/02 Flappy Bird.pptx
+++ b/slides/02 Flappy Bird.pptx
@@ -823,19 +823,14 @@
           </a:bodyPr>
           <a:lstStyle/>
           <a:p>
-            <a:pPr indent="0" lvl="0" marL="0" rtl="0" algn="l">
-              <a:spcBef>
-                <a:spcPts val="0"/>
-              </a:spcBef>
-              <a:spcAft>
-                <a:spcPts val="0"/>
-              </a:spcAft>
-              <a:buNone/>
-            </a:pPr>
-            <a:r>
-              <a:t/>
-            </a:r>
-            <a:endParaRPr/>
+            <a:r>
+              <a:t>Welcome. Today we build Flappy Bird. The main topic: organizing a growing game.</a:t>
+            </a:r>
+          </a:p>
+          <a:p>
+            <a:r>
+              <a:t>Start by playing the finished game, Flappy12, before any code.</a:t>
+            </a:r>
           </a:p>
         </p:txBody>
       </p:sp>
@@ -922,19 +917,9 @@
           </a:bodyPr>
           <a:lstStyle/>
           <a:p>
-            <a:pPr indent="0" lvl="0" marL="0" rtl="0" algn="l">
-              <a:spcBef>
-                <a:spcPts val="0"/>
-              </a:spcBef>
-              <a:spcAft>
-                <a:spcPts val="0"/>
-              </a:spcAft>
-              <a:buNone/>
-            </a:pPr>
-            <a:r>
-              <a:t/>
-            </a:r>
-            <a:endParaRPr/>
+            <a:r>
+              <a:t>The shape we’re building: GMDCore, referenced by each game. It grows through the course.</a:t>
+            </a:r>
           </a:p>
         </p:txBody>
       </p:sp>
@@ -1022,97 +1007,12 @@
           <a:lstStyle/>
           <a:p>
             <a:r>
-              <a:t>Full instructions (also on the course site):</a:t>
+              <a:t>Exercise: create GMDCore with a Core class that derives from Game and owns the window and screen scaling.</a:t>
             </a:r>
           </a:p>
           <a:p>
             <a:r>
-              <a:t>- Create a MonoGame Game Library project “GMDCore”</a:t>
-            </a:r>
-          </a:p>
-          <a:p>
-            <a:r>
-              <a:t>  - This will be a common core of functionality that we can add to as we create more games</a:t>
-            </a:r>
-          </a:p>
-          <a:p>
-            <a:r>
-              <a:t>  - It is simply a class library with MonoGame installed as a dependency</a:t>
-            </a:r>
-          </a:p>
-          <a:p>
-            <a:r>
-              <a:t>- Create a Core class which derives from the Game class</a:t>
-            </a:r>
-          </a:p>
-          <a:p>
-            <a:r>
-              <a:t>- Add the UpdateScreenScaleMatrix() method from last week to the Core class</a:t>
-            </a:r>
-          </a:p>
-          <a:p>
-            <a:r>
-              <a:t>  - You will need to declare a Matrix field (consider the visibility), as well as fields to store the virtual width and virtual height (they are no longer constants)</a:t>
-            </a:r>
-          </a:p>
-          <a:p>
-            <a:r>
-              <a:t>  - Subscribe the method to the Window.ClientSizeChanged event (like last week)</a:t>
-            </a:r>
-          </a:p>
-          <a:p>
-            <a:r>
-              <a:t>  - Call UpdateScreenScaleMatrix as the game is initialized (like last week)</a:t>
-            </a:r>
-          </a:p>
-          <a:p>
-            <a:r>
-              <a:t>- Add a constructor to the Core class</a:t>
-            </a:r>
-          </a:p>
-          <a:p>
-            <a:r>
-              <a:t>  - It must take these arguments</a:t>
-            </a:r>
-          </a:p>
-          <a:p>
-            <a:r>
-              <a:t>    - string title, int windowWidth, int windowHeight, int virtualWidth, int virtualHeight</a:t>
-            </a:r>
-          </a:p>
-          <a:p>
-            <a:r>
-              <a:t>  - In the constructor, use the provided arguments</a:t>
-            </a:r>
-          </a:p>
-          <a:p>
-            <a:r>
-              <a:t>    - Assign values to virtual width and virtual height fields</a:t>
-            </a:r>
-          </a:p>
-          <a:p>
-            <a:r>
-              <a:t>    - Set the Window.Title property and PreferredBackBufferWidth/Height of the GraphicsDeviceManager</a:t>
-            </a:r>
-          </a:p>
-          <a:p>
-            <a:r>
-              <a:t>- Make the GraphicsDeviceManager and SpriteBatch visible in derived classes</a:t>
-            </a:r>
-          </a:p>
-          <a:p>
-            <a:r>
-              <a:t>  - Consider naming conventions when changing visibility of a field</a:t>
-            </a:r>
-          </a:p>
-          <a:p>
-            <a:r>
-              <a:t>- Move the SpriteBatch initialization to the start of the Initialize() method</a:t>
-            </a:r>
-          </a:p>
-          <a:p>
-            <a:r>
-              <a:t>- Remove the call to GraphicsDevice.Clear() in the Draw method</a:t>
+              <a:t>Full instructions are on the course site; students work from there. Walk round while they work.</a:t>
             </a:r>
           </a:p>
         </p:txBody>
@@ -1201,57 +1101,12 @@
           <a:lstStyle/>
           <a:p>
             <a:r>
-              <a:t>Full instructions (also on the course site):</a:t>
+              <a:t>Exercise: a new game from the gar-starter template whose Game1 derives from Core. The window should look like the screenshot.</a:t>
             </a:r>
           </a:p>
           <a:p>
             <a:r>
-              <a:t>- Create a new MonoGame project “Flappy”</a:t>
-            </a:r>
-          </a:p>
-          <a:p>
-            <a:r>
-              <a:t>  - Start from the gar-starter template on GitHub</a:t>
-            </a:r>
-          </a:p>
-          <a:p>
-            <a:r>
-              <a:t>- Add a reference to the GMDCore class library</a:t>
-            </a:r>
-          </a:p>
-          <a:p>
-            <a:r>
-              <a:t>  - Derive your Game1 class from the Core class in the class library</a:t>
-            </a:r>
-          </a:p>
-          <a:p>
-            <a:r>
-              <a:t>  - Take advantage of the Core class constructor to create a window with…</a:t>
-            </a:r>
-          </a:p>
-          <a:p>
-            <a:r>
-              <a:t>    - 512x288 virtual resolution</a:t>
-            </a:r>
-          </a:p>
-          <a:p>
-            <a:r>
-              <a:t>    - 1280x720 window resolution</a:t>
-            </a:r>
-          </a:p>
-          <a:p>
-            <a:r>
-              <a:t>  - The implementation of your Game1 constructor should be empty for now</a:t>
-            </a:r>
-          </a:p>
-          <a:p>
-            <a:r>
-              <a:t>- Remove the GraphicsDevice &amp; SpriteBatch fields from the Game1 class</a:t>
-            </a:r>
-          </a:p>
-          <a:p>
-            <a:r>
-              <a:t>  - We are now using the base Core class counterparts</a:t>
+              <a:t>Full instructions are on the course site; students work from there. Walk round while they work.</a:t>
             </a:r>
           </a:p>
         </p:txBody>
@@ -1339,19 +1194,9 @@
           </a:bodyPr>
           <a:lstStyle/>
           <a:p>
-            <a:pPr indent="0" lvl="0" marL="0" rtl="0" algn="l">
-              <a:spcBef>
-                <a:spcPts val="0"/>
-              </a:spcBef>
-              <a:spcAft>
-                <a:spcPts val="0"/>
-              </a:spcAft>
-              <a:buNone/>
-            </a:pPr>
-            <a:r>
-              <a:t/>
-            </a:r>
-            <a:endParaRPr/>
+            <a:r>
+              <a:t>An image is just a Texture2D, like Pong’s white pixel, but loaded from a file.</a:t>
+            </a:r>
           </a:p>
         </p:txBody>
       </p:sp>
@@ -1439,22 +1284,12 @@
           <a:lstStyle/>
           <a:p>
             <a:r>
-              <a:t>Full instructions (also on the course site):</a:t>
+              <a:t>Exercise: draw the background and the ground.</a:t>
             </a:r>
           </a:p>
           <a:p>
             <a:r>
-              <a:t>- Add a background image and a ground image to the empty screen</a:t>
-            </a:r>
-          </a:p>
-          <a:p>
-            <a:r>
-              <a:t>  - Store the two images in an “images” folder inside your Assets folder</a:t>
-            </a:r>
-          </a:p>
-          <a:p>
-            <a:r>
-              <a:t>  - Remember to call ContentManager.Load inside LoadContent()</a:t>
+              <a:t>Full instructions are on the course site; students work from there. Walk round while they work.</a:t>
             </a:r>
           </a:p>
         </p:txBody>
@@ -1542,19 +1377,9 @@
           </a:bodyPr>
           <a:lstStyle/>
           <a:p>
-            <a:pPr indent="0" lvl="0" marL="0" rtl="0" algn="l">
-              <a:spcBef>
-                <a:spcPts val="0"/>
-              </a:spcBef>
-              <a:spcAft>
-                <a:spcPts val="0"/>
-              </a:spcAft>
-              <a:buNone/>
-            </a:pPr>
-            <a:r>
-              <a:t/>
-            </a:r>
-            <a:endParaRPr/>
+            <a:r>
+              <a:t>Things further away move slower. Two layers at two speeds are enough to feel depth.</a:t>
+            </a:r>
           </a:p>
         </p:txBody>
       </p:sp>
@@ -1642,42 +1467,17 @@
           <a:lstStyle/>
           <a:p>
             <a:r>
-              <a:t>Full instructions (also on the course site):</a:t>
+              <a:t>Exercise: scroll both layers forever, at different speeds.</a:t>
             </a:r>
           </a:p>
           <a:p>
             <a:r>
-              <a:t>- Implement an infinitely scrolling background using the two provided images</a:t>
+              <a:t>Hint: the looping points (413 and 512) and the % operator.</a:t>
             </a:r>
           </a:p>
           <a:p>
             <a:r>
-              <a:t>  - The background must move slower than the ground in order to create the desired parallax effect</a:t>
-            </a:r>
-          </a:p>
-          <a:p>
-            <a:r>
-              <a:t>  - You will need two new constants to control the scroll speed as well as two new fields to keep track of the position of each element</a:t>
-            </a:r>
-          </a:p>
-          <a:p>
-            <a:r>
-              <a:t>  - For the graphics provided to you, the “looping points” are</a:t>
-            </a:r>
-          </a:p>
-          <a:p>
-            <a:r>
-              <a:t>    - Background: 413</a:t>
-            </a:r>
-          </a:p>
-          <a:p>
-            <a:r>
-              <a:t>    - Ground: 512 (virtual width)</a:t>
-            </a:r>
-          </a:p>
-          <a:p>
-            <a:r>
-              <a:t>  - The % operator might come in handy here</a:t>
+              <a:t>Full instructions are on the course site; students work from there. Walk round while they work.</a:t>
             </a:r>
           </a:p>
         </p:txBody>
@@ -1765,19 +1565,9 @@
           </a:bodyPr>
           <a:lstStyle/>
           <a:p>
-            <a:pPr indent="0" lvl="0" marL="0" rtl="0" algn="l">
-              <a:spcBef>
-                <a:spcPts val="0"/>
-              </a:spcBef>
-              <a:spcAft>
-                <a:spcPts val="0"/>
-              </a:spcAft>
-              <a:buNone/>
-            </a:pPr>
-            <a:r>
-              <a:t/>
-            </a:r>
-            <a:endParaRPr/>
+            <a:r>
+              <a:t>The bird never moves forward: the world scrolls past it. Games fake whatever they can get away with.</a:t>
+            </a:r>
           </a:p>
         </p:txBody>
       </p:sp>
@@ -1865,77 +1655,17 @@
           <a:lstStyle/>
           <a:p>
             <a:r>
-              <a:t>Full instructions (also on the course site):</a:t>
+              <a:t>Ask the question before revealing the answer: how does the Bird get its texture? Let them argue for each box.</a:t>
             </a:r>
           </a:p>
           <a:p>
             <a:r>
-              <a:t>- Add a bird to the screen</a:t>
+              <a:t>We pick a static Art class: one place for every asset. Its cost: it’s global. We come back to that with Singleton.</a:t>
             </a:r>
           </a:p>
           <a:p>
             <a:r>
-              <a:t>  - Create a Bird class to encapsulate the relevant data (for now Position)</a:t>
-            </a:r>
-          </a:p>
-          <a:p>
-            <a:r>
-              <a:t>  - Remember to add relevant methods (Update and Draw)</a:t>
-            </a:r>
-          </a:p>
-          <a:p>
-            <a:r>
-              <a:t>- How do we get a reference to the Bird image in the bird class? Multiple approaches…</a:t>
-            </a:r>
-          </a:p>
-          <a:p>
-            <a:r>
-              <a:t>  - Make the texture available as a public static field in the Game1 class (like last week)</a:t>
-            </a:r>
-          </a:p>
-          <a:p>
-            <a:r>
-              <a:t>    - This breaks encapsulation and bloats the Game1 class…</a:t>
-            </a:r>
-          </a:p>
-          <a:p>
-            <a:r>
-              <a:t>  - Inject the Texture2D or ContentManager into the bird upon initialization</a:t>
-            </a:r>
-          </a:p>
-          <a:p>
-            <a:r>
-              <a:t>    - This is a bit tedious to have to do for every instantiation of an entity</a:t>
-            </a:r>
-          </a:p>
-          <a:p>
-            <a:r>
-              <a:t>  - Make the ContentManager available across our game files</a:t>
-            </a:r>
-          </a:p>
-          <a:p>
-            <a:r>
-              <a:t>    - marking it as a static field in the Core library</a:t>
-            </a:r>
-          </a:p>
-          <a:p>
-            <a:r>
-              <a:t>  - Create a separate, static Art class that holds references to all assets</a:t>
-            </a:r>
-          </a:p>
-          <a:p>
-            <a:r>
-              <a:t>    - This class would then be passed the ContentManager in its constructor</a:t>
-            </a:r>
-          </a:p>
-          <a:p>
-            <a:r>
-              <a:t>- Refactor your existing asset references (background and ground) to use the Art class</a:t>
-            </a:r>
-          </a:p>
-          <a:p>
-            <a:r>
-              <a:t>- Initialize the Bird in the Game1 Initialize method with a default position of 100,100</a:t>
+              <a:t>Full instructions are on the course site; students work from there. Walk round while they work.</a:t>
             </a:r>
           </a:p>
         </p:txBody>
@@ -2024,27 +1754,12 @@
           <a:lstStyle/>
           <a:p>
             <a:r>
-              <a:t>Full instructions (also on the course site):</a:t>
+              <a:t>Exercise: velocity grows every frame; position follows velocity; both scaled by delta time.</a:t>
             </a:r>
           </a:p>
           <a:p>
             <a:r>
-              <a:t>- Add gravity to make the bird fall</a:t>
-            </a:r>
-          </a:p>
-          <a:p>
-            <a:r>
-              <a:t>  - You will need to introduce two new fields</a:t>
-            </a:r>
-          </a:p>
-          <a:p>
-            <a:r>
-              <a:t>    - One constant for gravity (pick a fitting value) and another to keep track of the velocity of the bird</a:t>
-            </a:r>
-          </a:p>
-          <a:p>
-            <a:r>
-              <a:t>    - Remember to normalize both the update in position and velocity by using deltatime</a:t>
+              <a:t>Full instructions are on the course site; students work from there. Walk round while they work.</a:t>
             </a:r>
           </a:p>
         </p:txBody>
@@ -2132,19 +1847,14 @@
           </a:bodyPr>
           <a:lstStyle/>
           <a:p>
-            <a:pPr indent="0" lvl="0" marL="0" rtl="0" algn="l">
-              <a:spcBef>
-                <a:spcPts val="0"/>
-              </a:spcBef>
-              <a:spcAft>
-                <a:spcPts val="0"/>
-              </a:spcAft>
-              <a:buNone/>
-            </a:pPr>
-            <a:r>
-              <a:t/>
-            </a:r>
-            <a:endParaRPr/>
+            <a:r>
+              <a:t>Run Flappy12 and play it for a minute.</a:t>
+            </a:r>
+          </a:p>
+          <a:p>
+            <a:r>
+              <a:t>Ask: what would you need to build this? Collect answers on the board, and come back to them at the end.</a:t>
+            </a:r>
           </a:p>
         </p:txBody>
       </p:sp>
@@ -2232,82 +1942,17 @@
           <a:lstStyle/>
           <a:p>
             <a:r>
-              <a:t>Full instructions (also on the course site):</a:t>
+              <a:t>Walk through the diagram: Core updates the InputManager every frame; games ask it for keys and the mouse.</a:t>
             </a:r>
           </a:p>
           <a:p>
             <a:r>
-              <a:t>- Recall from last week how to emulate a key being pressed down this frame? Add that functionality to the GMDCore library!</a:t>
+              <a:t>A flap sets the vertical velocity upwards. Remind them: y points down.</a:t>
             </a:r>
           </a:p>
           <a:p>
             <a:r>
-              <a:t>  - Create a new folder “Input” in GMDCore</a:t>
-            </a:r>
-          </a:p>
-          <a:p>
-            <a:r>
-              <a:t>    - Add a class “KeyboardInfo” to the folder containing</a:t>
-            </a:r>
-          </a:p>
-          <a:p>
-            <a:r>
-              <a:t>      - A way to keep track of previous and current keyboardstate</a:t>
-            </a:r>
-          </a:p>
-          <a:p>
-            <a:r>
-              <a:t>        - Create a custom Update method to update them each frame</a:t>
-            </a:r>
-          </a:p>
-          <a:p>
-            <a:r>
-              <a:t>      - Methods for checking IsKeyUp, IsKeyDown, WasKeyJustPressed, WasKeyJustReleased</a:t>
-            </a:r>
-          </a:p>
-          <a:p>
-            <a:r>
-              <a:t>    - Add a “MouseInfo” class the same way: IsLeftButtonDown, WasLeftButtonJustPressed, Position</a:t>
-            </a:r>
-          </a:p>
-          <a:p>
-            <a:r>
-              <a:t>    - Add another class “InputManager” in the same folder containing</a:t>
-            </a:r>
-          </a:p>
-          <a:p>
-            <a:r>
-              <a:t>      - A KeyboardInfo and a MouseInfo instance</a:t>
-            </a:r>
-          </a:p>
-          <a:p>
-            <a:r>
-              <a:t>      - An Update method that updates both</a:t>
-            </a:r>
-          </a:p>
-          <a:p>
-            <a:r>
-              <a:t>    - Add the InputManager as static property to the Core class</a:t>
-            </a:r>
-          </a:p>
-          <a:p>
-            <a:r>
-              <a:t>    - Remember to call Update on the InputManager in the Update method of Core</a:t>
-            </a:r>
-          </a:p>
-          <a:p>
-            <a:r>
-              <a:t>- Make the bird flap on Space or a left click to counteract the gravity</a:t>
-            </a:r>
-          </a:p>
-          <a:p>
-            <a:r>
-              <a:t>  - Remember, the 2D coordinate system has its origin in the top left…</a:t>
-            </a:r>
-          </a:p>
-          <a:p>
-            <a:r>
-              <a:t>  - Overwriting the vertical velocity with a “jumpforce” value is a good way to instantly give the bird a jolt of upwards momentum</a:t>
+              <a:t>Full instructions are on the course site; students work from there. Walk round while they work.</a:t>
             </a:r>
           </a:p>
         </p:txBody>
@@ -2395,19 +2040,9 @@
           </a:bodyPr>
           <a:lstStyle/>
           <a:p>
-            <a:pPr indent="0" lvl="0" marL="0" rtl="0" algn="l">
-              <a:spcBef>
-                <a:spcPts val="0"/>
-              </a:spcBef>
-              <a:spcAft>
-                <a:spcPts val="0"/>
-              </a:spcAft>
-              <a:buNone/>
-            </a:pPr>
-            <a:r>
-              <a:t/>
-            </a:r>
-            <a:endParaRPr/>
+            <a:r>
+              <a:t>Content made by rules instead of by hand. Here: where each pipe gap goes. Walk through the figure’s quantities.</a:t>
+            </a:r>
           </a:p>
         </p:txBody>
       </p:sp>
@@ -2495,72 +2130,12 @@
           <a:lstStyle/>
           <a:p>
             <a:r>
-              <a:t>Full instructions (also on the course site):</a:t>
+              <a:t>Exercise: spawn pipes on a timer, scroll them left.</a:t>
             </a:r>
           </a:p>
           <a:p>
             <a:r>
-              <a:t>- Add the pipe to our game</a:t>
-            </a:r>
-          </a:p>
-          <a:p>
-            <a:r>
-              <a:t>  - Unsurprisingly, we will model the Pipe as a class</a:t>
-            </a:r>
-          </a:p>
-          <a:p>
-            <a:r>
-              <a:t>  - Inside the class, you must create a constructor that spawns a pipe at a random vertical position at the rightmost edge and within the lower quarter of the screen</a:t>
-            </a:r>
-          </a:p>
-          <a:p>
-            <a:r>
-              <a:t>    - The Random class will be useful here</a:t>
-            </a:r>
-          </a:p>
-          <a:p>
-            <a:r>
-              <a:t>    - You will need to add the Pipe as a Texture2D to the Art class</a:t>
-            </a:r>
-          </a:p>
-          <a:p>
-            <a:r>
-              <a:t>  - You must also create an update method that “scrolls” the Pipe to the left of the screen based on a pipe speed value</a:t>
-            </a:r>
-          </a:p>
-          <a:p>
-            <a:r>
-              <a:t>    - Picking the same speed as the ground scroll “grounds” the pipes to the ground</a:t>
-            </a:r>
-          </a:p>
-          <a:p>
-            <a:r>
-              <a:t>  - Include functionality for rendering the Pipe to the screen</a:t>
-            </a:r>
-          </a:p>
-          <a:p>
-            <a:r>
-              <a:t>- Render the pipe an “infinite” amount of times!</a:t>
-            </a:r>
-          </a:p>
-          <a:p>
-            <a:r>
-              <a:t>  - In the Game1 class, add functionality to spawn pipes at a set interval</a:t>
-            </a:r>
-          </a:p>
-          <a:p>
-            <a:r>
-              <a:t>  - You will need two new fields, a spawn timer, and a constant spawn interval</a:t>
-            </a:r>
-          </a:p>
-          <a:p>
-            <a:r>
-              <a:t>  - You will also need a list to keep track of all pipes</a:t>
-            </a:r>
-          </a:p>
-          <a:p>
-            <a:r>
-              <a:t>    - You will be iterating through the list of pipes both in Update and Draw of Game1</a:t>
+              <a:t>Full instructions are on the course site; students work from there. Walk round while they work.</a:t>
             </a:r>
           </a:p>
         </p:txBody>
@@ -2648,19 +2223,9 @@
           </a:bodyPr>
           <a:lstStyle/>
           <a:p>
-            <a:pPr indent="0" lvl="0" marL="0" rtl="0" algn="l">
-              <a:spcBef>
-                <a:spcPts val="0"/>
-              </a:spcBef>
-              <a:spcAft>
-                <a:spcPts val="0"/>
-              </a:spcAft>
-              <a:buNone/>
-            </a:pPr>
-            <a:r>
-              <a:t/>
-            </a:r>
-            <a:endParaRPr/>
+            <a:r>
+              <a:t>Pipes spawn off-screen on the right (the spawn zone) and are removed after they leave on the left (the dead zone). The player only ever sees the middle.</a:t>
+            </a:r>
           </a:p>
         </p:txBody>
       </p:sp>
@@ -2748,102 +2313,12 @@
           <a:lstStyle/>
           <a:p>
             <a:r>
-              <a:t>Full instructions (also on the course site):</a:t>
+              <a:t>Exercise: pairs with a gap that drifts smoothly; remove pairs that leave the screen.</a:t>
             </a:r>
           </a:p>
           <a:p>
             <a:r>
-              <a:t>- The pipes must now be spawned in “pairs”, with one pipe facing up and the other facing down.</a:t>
-            </a:r>
-          </a:p>
-          <a:p>
-            <a:r>
-              <a:t>  - We will model this as a new class, PipePair, wrapping the Pipe class</a:t>
-            </a:r>
-          </a:p>
-          <a:p>
-            <a:r>
-              <a:t>  - The PipePair class will contain</a:t>
-            </a:r>
-          </a:p>
-          <a:p>
-            <a:r>
-              <a:t>    - A top pipe and a bottom pipe</a:t>
-            </a:r>
-          </a:p>
-          <a:p>
-            <a:r>
-              <a:t>    - A pipe gap (vertical distance between two pipes)</a:t>
-            </a:r>
-          </a:p>
-          <a:p>
-            <a:r>
-              <a:t>    - A pipe speed value (move this from the Pipe class to the PipePair class)</a:t>
-            </a:r>
-          </a:p>
-          <a:p>
-            <a:r>
-              <a:t>    - A float to keep track of the horizontal position of the two pipes</a:t>
-            </a:r>
-          </a:p>
-          <a:p>
-            <a:r>
-              <a:t>    - A constructor that takes a float y value to define the vertical position of the pipe gap</a:t>
-            </a:r>
-          </a:p>
-          <a:p>
-            <a:r>
-              <a:t>    - Logic that flags PipePairs for deletion once they go beyond the left side of the screen</a:t>
-            </a:r>
-          </a:p>
-          <a:p>
-            <a:r>
-              <a:t>    - Since the PipePair will be controlling the pipes, the update and initialization logic of of the Pipe class will be moved to the PipePair class</a:t>
-            </a:r>
-          </a:p>
-          <a:p>
-            <a:r>
-              <a:t>  - The Pipe constructor must now take a position and a bool indicating whether it is flipped</a:t>
-            </a:r>
-          </a:p>
-          <a:p>
-            <a:r>
-              <a:t>    - The position is purely used to draw the Pipe, as all movement is done in PipePair</a:t>
-            </a:r>
-          </a:p>
-          <a:p>
-            <a:r>
-              <a:t>    - For flipping the pipe art, you must use a specific overload of SpriteBatch.Draw() with a SpriteEffects argument</a:t>
-            </a:r>
-          </a:p>
-          <a:p>
-            <a:r>
-              <a:t>- Update the Game1 class to work with PipePairs instead of Pipes</a:t>
-            </a:r>
-          </a:p>
-          <a:p>
-            <a:r>
-              <a:t>  - The pipe pairs will be spawned given a vertical position for the gap</a:t>
-            </a:r>
-          </a:p>
-          <a:p>
-            <a:r>
-              <a:t>    - Make this position vary slightly for each pipe pair</a:t>
-            </a:r>
-          </a:p>
-          <a:p>
-            <a:r>
-              <a:t>      - Keep track of the previous spawn position and add a random value (e.g. -50-50) to it</a:t>
-            </a:r>
-          </a:p>
-          <a:p>
-            <a:r>
-              <a:t>      - This position must be clamped so that you don’t risk spawning the pipe gap above/below the screen</a:t>
-            </a:r>
-          </a:p>
-          <a:p>
-            <a:r>
-              <a:t>  - Add functionality to delete PipePairs flagged for deletion</a:t>
+              <a:t>Full instructions are on the course site; students work from there. Walk round while they work.</a:t>
             </a:r>
           </a:p>
         </p:txBody>
@@ -2931,19 +2406,9 @@
           </a:bodyPr>
           <a:lstStyle/>
           <a:p>
-            <a:pPr indent="0" lvl="0" marL="0" rtl="0" algn="l">
-              <a:spcBef>
-                <a:spcPts val="0"/>
-              </a:spcBef>
-              <a:spcAft>
-                <a:spcPts val="0"/>
-              </a:spcAft>
-              <a:buNone/>
-            </a:pPr>
-            <a:r>
-              <a:t/>
-            </a:r>
-            <a:endParaRPr/>
+            <a:r>
+              <a:t>Same AABB as Pong. Ask: how could collisions be more forgiving? Answer: a slightly smaller hitbox than the sprite.</a:t>
+            </a:r>
           </a:p>
         </p:txBody>
       </p:sp>
@@ -3031,47 +2496,12 @@
           <a:lstStyle/>
           <a:p>
             <a:r>
-              <a:t>Full instructions (also on the course site):</a:t>
+              <a:t>Exercise: stop on hitting a pipe, the ground or the ceiling.</a:t>
             </a:r>
           </a:p>
           <a:p>
             <a:r>
-              <a:t>- Include collision detection between bird and pipes</a:t>
-            </a:r>
-          </a:p>
-          <a:p>
-            <a:r>
-              <a:t>  - When a bird collides with a pipe, the game should pause</a:t>
-            </a:r>
-          </a:p>
-          <a:p>
-            <a:r>
-              <a:t>    - Pause can be implemented as a simple boolean flag that is checked in Update</a:t>
-            </a:r>
-          </a:p>
-          <a:p>
-            <a:r>
-              <a:t>  - The Game1 class should react to collisions, but the the actual AABB collision detection should be delegated to the Bird class (similar to last week!)</a:t>
-            </a:r>
-          </a:p>
-          <a:p>
-            <a:r>
-              <a:t>  - Can you figure out a way to make collision detection more forgiving?</a:t>
-            </a:r>
-          </a:p>
-          <a:p>
-            <a:r>
-              <a:t>- Add a similar collision check between the bird and ground &amp; ceiling of the game</a:t>
-            </a:r>
-          </a:p>
-          <a:p>
-            <a:r>
-              <a:t>  - This check can simply be done in Game1 Update</a:t>
-            </a:r>
-          </a:p>
-          <a:p>
-            <a:r>
-              <a:t>  - It simply compares the bird y position to other values, no AABB collision detection involved...</a:t>
+              <a:t>Full instructions are on the course site; students work from there. Walk round while they work.</a:t>
             </a:r>
           </a:p>
         </p:txBody>
@@ -3159,19 +2589,9 @@
           </a:bodyPr>
           <a:lstStyle/>
           <a:p>
-            <a:pPr indent="0" lvl="0" marL="0" rtl="0" algn="l">
-              <a:spcBef>
-                <a:spcPts val="0"/>
-              </a:spcBef>
-              <a:spcAft>
-                <a:spcPts val="0"/>
-              </a:spcAft>
-              <a:buNone/>
-            </a:pPr>
-            <a:r>
-              <a:t/>
-            </a:r>
-            <a:endParaRPr/>
+            <a:r>
+              <a:t>Ask: how did Pong handle its modes? A string. Why is that fragile? Typos, and an if-chain in every method.</a:t>
+            </a:r>
           </a:p>
         </p:txBody>
       </p:sp>
@@ -3258,19 +2678,9 @@
           </a:bodyPr>
           <a:lstStyle/>
           <a:p>
-            <a:pPr indent="0" lvl="0" marL="0" rtl="0" algn="l">
-              <a:spcBef>
-                <a:spcPts val="0"/>
-              </a:spcBef>
-              <a:spcAft>
-                <a:spcPts val="0"/>
-              </a:spcAft>
-              <a:buNone/>
-            </a:pPr>
-            <a:r>
-              <a:t/>
-            </a:r>
-            <a:endParaRPr/>
+            <a:r>
+              <a:t>The game’s states and what moves between them. Each state is a class with the same four methods.</a:t>
+            </a:r>
           </a:p>
         </p:txBody>
       </p:sp>
@@ -3357,19 +2767,9 @@
           </a:bodyPr>
           <a:lstStyle/>
           <a:p>
-            <a:pPr indent="0" lvl="0" marL="0" rtl="0" algn="l">
-              <a:spcBef>
-                <a:spcPts val="0"/>
-              </a:spcBef>
-              <a:spcAft>
-                <a:spcPts val="0"/>
-              </a:spcAft>
-              <a:buNone/>
-            </a:pPr>
-            <a:r>
-              <a:t/>
-            </a:r>
-            <a:endParaRPr/>
+            <a:r>
+              <a:t>The life of a state: Enter once, Update and Draw every frame, Exit once. Enter resets, Exit cleans up.</a:t>
+            </a:r>
           </a:p>
         </p:txBody>
       </p:sp>
@@ -3456,19 +2856,14 @@
           </a:bodyPr>
           <a:lstStyle/>
           <a:p>
-            <a:pPr indent="0" lvl="0" marL="0" rtl="0" algn="l">
-              <a:spcBef>
-                <a:spcPts val="0"/>
-              </a:spcBef>
-              <a:spcAft>
-                <a:spcPts val="0"/>
-              </a:spcAft>
-              <a:buNone/>
-            </a:pPr>
-            <a:r>
-              <a:t/>
-            </a:r>
-            <a:endParaRPr/>
+            <a:r>
+              <a:t>The main topic: organizing a game as it grows. A class library for what every game needs, and a state machine for the game’s modes.</a:t>
+            </a:r>
+          </a:p>
+          <a:p>
+            <a:r>
+              <a:t>Every topic has a section on the course site.</a:t>
+            </a:r>
           </a:p>
         </p:txBody>
       </p:sp>
@@ -3555,19 +2950,9 @@
           </a:bodyPr>
           <a:lstStyle/>
           <a:p>
-            <a:pPr indent="0" lvl="0" marL="0" rtl="0" algn="l">
-              <a:spcBef>
-                <a:spcPts val="0"/>
-              </a:spcBef>
-              <a:spcAft>
-                <a:spcPts val="0"/>
-              </a:spcAft>
-              <a:buNone/>
-            </a:pPr>
-            <a:r>
-              <a:t/>
-            </a:r>
-            <a:endParaRPr/>
+            <a:r>
+              <a:t>IState is the contract: every state has Enter, Exit, Update and Draw. The machine only knows the interface.</a:t>
+            </a:r>
           </a:p>
         </p:txBody>
       </p:sp>
@@ -3654,19 +3039,9 @@
           </a:bodyPr>
           <a:lstStyle/>
           <a:p>
-            <a:pPr indent="0" lvl="0" marL="0" rtl="0" algn="l">
-              <a:spcBef>
-                <a:spcPts val="0"/>
-              </a:spcBef>
-              <a:spcAft>
-                <a:spcPts val="0"/>
-              </a:spcAft>
-              <a:buNone/>
-            </a:pPr>
-            <a:r>
-              <a:t/>
-            </a:r>
-            <a:endParaRPr/>
+            <a:r>
+              <a:t>The StateMachine: ChangeState calls Exit on the old state and Enter on the new one. Update and Draw go to the current state.</a:t>
+            </a:r>
           </a:p>
         </p:txBody>
       </p:sp>
@@ -3754,102 +3129,12 @@
           <a:lstStyle/>
           <a:p>
             <a:r>
-              <a:t>Full instructions (also on the course site):</a:t>
+              <a:t>Exercise: IState, a StateMachine, a title state and a play state.</a:t>
             </a:r>
           </a:p>
           <a:p>
             <a:r>
-              <a:t>- Create a new IState interface</a:t>
-            </a:r>
-          </a:p>
-          <a:p>
-            <a:r>
-              <a:t>  - The interface must have four methods</a:t>
-            </a:r>
-          </a:p>
-          <a:p>
-            <a:r>
-              <a:t>    - Enter()</a:t>
-            </a:r>
-          </a:p>
-          <a:p>
-            <a:r>
-              <a:t>    - Exit()</a:t>
-            </a:r>
-          </a:p>
-          <a:p>
-            <a:r>
-              <a:t>    - Update(GameTime gameTime)</a:t>
-            </a:r>
-          </a:p>
-          <a:p>
-            <a:r>
-              <a:t>    - Draw(SpriteBatch spriteBatch)</a:t>
-            </a:r>
-          </a:p>
-          <a:p>
-            <a:r>
-              <a:t>- Create two new states implementing the interface</a:t>
-            </a:r>
-          </a:p>
-          <a:p>
-            <a:r>
-              <a:t>  - Title state</a:t>
-            </a:r>
-          </a:p>
-          <a:p>
-            <a:r>
-              <a:t>    - The user sees a title and presses enter to start playing (i.e. transition to play state)</a:t>
-            </a:r>
-          </a:p>
-          <a:p>
-            <a:r>
-              <a:t>    - The background should not be scrolling in this state! (repurpose the pause functionality to achieve this)</a:t>
-            </a:r>
-          </a:p>
-          <a:p>
-            <a:r>
-              <a:t>  - Play state</a:t>
-            </a:r>
-          </a:p>
-          <a:p>
-            <a:r>
-              <a:t>    - The main state where the game is played (notice how most of your Game1 gameplay code will be moved here)</a:t>
-            </a:r>
-          </a:p>
-          <a:p>
-            <a:r>
-              <a:t>    - If the bird collides with anything, return to title state</a:t>
-            </a:r>
-          </a:p>
-          <a:p>
-            <a:r>
-              <a:t>    - This state will need to reset important gameplay values in the Enter method (to ensure a clean state for every retry)</a:t>
-            </a:r>
-          </a:p>
-          <a:p>
-            <a:r>
-              <a:t>- Create a state machine that controls the global state of the game</a:t>
-            </a:r>
-          </a:p>
-          <a:p>
-            <a:r>
-              <a:t>  - You need to supply a reference of the Game1 instance to the StateMachine constructor, which in turn makes it available to each state through their constructors.</a:t>
-            </a:r>
-          </a:p>
-          <a:p>
-            <a:r>
-              <a:t>  - Remember to initialize the state machine and call its Update and Draw methods from the Game1 class</a:t>
-            </a:r>
-          </a:p>
-          <a:p>
-            <a:r>
-              <a:t>- Add the retro font to the game</a:t>
-            </a:r>
-          </a:p>
-          <a:p>
-            <a:r>
-              <a:t>  - There is an overload method of DrawString() that lets you tweak the scale of the drawn text</a:t>
+              <a:t>Full instructions are on the course site; students work from there. Walk round while they work.</a:t>
             </a:r>
           </a:p>
         </p:txBody>
@@ -3938,57 +3223,12 @@
           <a:lstStyle/>
           <a:p>
             <a:r>
-              <a:t>Full instructions (also on the course site):</a:t>
+              <a:t>Exercise: a point per pipe pair, and a score state. Ask the question on the slide: the score state needs the score; pass it in when changing state.</a:t>
             </a:r>
           </a:p>
           <a:p>
             <a:r>
-              <a:t>- Introduce scoring to the game</a:t>
-            </a:r>
-          </a:p>
-          <a:p>
-            <a:r>
-              <a:t>  - When the bird passes a pipe pair, the score should be incremented by one</a:t>
-            </a:r>
-          </a:p>
-          <a:p>
-            <a:r>
-              <a:t>    - The score should be tracked in the play state</a:t>
-            </a:r>
-          </a:p>
-          <a:p>
-            <a:r>
-              <a:t>    - Introduce a property on PipePair to keep track of if that pair has already been scored</a:t>
-            </a:r>
-          </a:p>
-          <a:p>
-            <a:r>
-              <a:t>  - Display the score in the top left corner of the screen while in play state</a:t>
-            </a:r>
-          </a:p>
-          <a:p>
-            <a:r>
-              <a:t>- Add a score state that displays the final score</a:t>
-            </a:r>
-          </a:p>
-          <a:p>
-            <a:r>
-              <a:t>  - Display the score in big text in the center of the screen</a:t>
-            </a:r>
-          </a:p>
-          <a:p>
-            <a:r>
-              <a:t>    - Consider - how do you get access to the score data from this state?</a:t>
-            </a:r>
-          </a:p>
-          <a:p>
-            <a:r>
-              <a:t>  - Transition from play state to score state when the bird has collided with an obstacle</a:t>
-            </a:r>
-          </a:p>
-          <a:p>
-            <a:r>
-              <a:t>  - Transition from score state to play state when space is pressed</a:t>
+              <a:t>Full instructions are on the course site; students work from there. Walk round while they work.</a:t>
             </a:r>
           </a:p>
         </p:txBody>
@@ -4077,42 +3317,12 @@
           <a:lstStyle/>
           <a:p>
             <a:r>
-              <a:t>Full instructions (also on the course site):</a:t>
+              <a:t>Exercise: a countdown state between the title (or score) and play.</a:t>
             </a:r>
           </a:p>
           <a:p>
             <a:r>
-              <a:t>- Add a countdown state</a:t>
-            </a:r>
-          </a:p>
-          <a:p>
-            <a:r>
-              <a:t>  - This state sits between title state and play state</a:t>
-            </a:r>
-          </a:p>
-          <a:p>
-            <a:r>
-              <a:t>    - Title state should now transition to countdown state instead of play state</a:t>
-            </a:r>
-          </a:p>
-          <a:p>
-            <a:r>
-              <a:t>    - Score state should now transition to countdown state instead of directly to play state</a:t>
-            </a:r>
-          </a:p>
-          <a:p>
-            <a:r>
-              <a:t>  - Countdown state counts down from 3 to 0. When 0 is reached, it transitions to play state</a:t>
-            </a:r>
-          </a:p>
-          <a:p>
-            <a:r>
-              <a:t>    - Display the countdown in the center of the screen</a:t>
-            </a:r>
-          </a:p>
-          <a:p>
-            <a:r>
-              <a:t>    - You can reuse some of the timer logic from spawning pipes</a:t>
+              <a:t>Full instructions are on the course site; students work from there. Walk round while they work.</a:t>
             </a:r>
           </a:p>
         </p:txBody>
@@ -4201,52 +3411,12 @@
           <a:lstStyle/>
           <a:p>
             <a:r>
-              <a:t>Full instructions (also on the course site):</a:t>
+              <a:t>Exercise: music and three sounds, in an Audio class made a Singleton. Next: is that a good idea?</a:t>
             </a:r>
           </a:p>
           <a:p>
             <a:r>
-              <a:t>- Add background music (i.e. a “Song”) to the game</a:t>
-            </a:r>
-          </a:p>
-          <a:p>
-            <a:r>
-              <a:t>  - You can use this track</a:t>
-            </a:r>
-          </a:p>
-          <a:p>
-            <a:r>
-              <a:t>  - You will need to use the static MediaPlayer.Play(Song song) method to play the song</a:t>
-            </a:r>
-          </a:p>
-          <a:p>
-            <a:r>
-              <a:t>- Add sound effects to the game</a:t>
-            </a:r>
-          </a:p>
-          <a:p>
-            <a:r>
-              <a:t>  - You must have three distinct sound effects:</a:t>
-            </a:r>
-          </a:p>
-          <a:p>
-            <a:r>
-              <a:t>    - Flap</a:t>
-            </a:r>
-          </a:p>
-          <a:p>
-            <a:r>
-              <a:t>    - Hurt (you can play this together with an Explosion sound for extra impact)</a:t>
-            </a:r>
-          </a:p>
-          <a:p>
-            <a:r>
-              <a:t>    - Score</a:t>
-            </a:r>
-          </a:p>
-          <a:p>
-            <a:r>
-              <a:t>- Organize the sounds in an Audio class, made a Singleton: Audio.Instance.PlayFlap()</a:t>
+              <a:t>Full instructions are on the course site; students work from there. Walk round while they work.</a:t>
             </a:r>
           </a:p>
         </p:txBody>
@@ -4334,19 +3504,9 @@
           </a:bodyPr>
           <a:lstStyle/>
           <a:p>
-            <a:pPr indent="0" lvl="0" marL="0" rtl="0" algn="l">
-              <a:spcBef>
-                <a:spcPts val="0"/>
-              </a:spcBef>
-              <a:spcAft>
-                <a:spcPts val="0"/>
-              </a:spcAft>
-              <a:buNone/>
-            </a:pPr>
-            <a:r>
-              <a:t/>
-            </a:r>
-            <a:endParaRPr/>
+            <a:r>
+              <a:t>The whole game works. Now the design question we skipped: global access.</a:t>
+            </a:r>
           </a:p>
         </p:txBody>
       </p:sp>
@@ -4433,19 +3593,9 @@
           </a:bodyPr>
           <a:lstStyle/>
           <a:p>
-            <a:pPr indent="0" lvl="0" marL="0" rtl="0" algn="l">
-              <a:spcBef>
-                <a:spcPts val="0"/>
-              </a:spcBef>
-              <a:spcAft>
-                <a:spcPts val="0"/>
-              </a:spcAft>
-              <a:buNone/>
-            </a:pPr>
-            <a:r>
-              <a:t/>
-            </a:r>
-            <a:endParaRPr/>
+            <a:r>
+              <a:t>The Gang of Four’s definition: one instance, and global access to it. The cartoons: everyone reaching for the same object.</a:t>
+            </a:r>
           </a:p>
         </p:txBody>
       </p:sp>
@@ -4532,20 +3682,9 @@
           </a:bodyPr>
           <a:lstStyle/>
           <a:p>
-            <a:pPr indent="0" lvl="0" marL="0" rtl="0" algn="l">
-              <a:spcBef>
-                <a:spcPts val="0"/>
-              </a:spcBef>
-              <a:spcAft>
-                <a:spcPts val="0"/>
-              </a:spcAft>
-              <a:buNone/>
-            </a:pPr>
-            <a:r>
-              <a:rPr lang="en"/>
-              <a:t>Simple example, but not thread safe</a:t>
-            </a:r>
-            <a:endParaRPr/>
+            <a:r>
+              <a:t>The classic implementation. Note: simple, but not thread safe; fine for our games.</a:t>
+            </a:r>
           </a:p>
         </p:txBody>
       </p:sp>
@@ -4632,19 +3771,9 @@
           </a:bodyPr>
           <a:lstStyle/>
           <a:p>
-            <a:pPr indent="0" lvl="0" marL="0" rtl="0" algn="l">
-              <a:spcBef>
-                <a:spcPts val="0"/>
-              </a:spcBef>
-              <a:spcAft>
-                <a:spcPts val="0"/>
-              </a:spcAft>
-              <a:buNone/>
-            </a:pPr>
-            <a:r>
-              <a:t/>
-            </a:r>
-            <a:endParaRPr/>
+            <a:r>
+              <a:t>Nystrom’s warning. Ask: why? Answer: global state, hidden dependencies, hard to replace in a test.</a:t>
+            </a:r>
           </a:p>
         </p:txBody>
       </p:sp>
@@ -4731,19 +3860,14 @@
           </a:bodyPr>
           <a:lstStyle/>
           <a:p>
-            <a:pPr indent="0" lvl="0" marL="0" rtl="0" algn="l">
-              <a:spcBef>
-                <a:spcPts val="0"/>
-              </a:spcBef>
-              <a:spcAft>
-                <a:spcPts val="0"/>
-              </a:spcAft>
-              <a:buNone/>
-            </a:pPr>
-            <a:r>
-              <a:t/>
-            </a:r>
-            <a:endParaRPr/>
+            <a:r>
+              <a:t>Ask: what makes software architecture good? Collect answers, then land on the four on the slide.</a:t>
+            </a:r>
+          </a:p>
+          <a:p>
+            <a:r>
+              <a:t>The one to remember: good architecture makes change cheap.</a:t>
+            </a:r>
           </a:p>
         </p:txBody>
       </p:sp>
@@ -4800,7 +3924,224 @@
           <a:lstStyle/>
           <a:p>
             <a:r>
-              <a:t>Ask, let them answer in pairs for a minute, then take a few answers. These are the site’s Check yourself questions.</a:t>
+              <a:t>Ask one question at a time. Pairs discuss for a minute, then take two or three answers.</a:t>
+            </a:r>
+          </a:p>
+          <a:p>
+            <a:r>
+              <a:t>Expected answers (from the course site):</a:t>
+            </a:r>
+          </a:p>
+          <a:p/>
+          <a:p>
+            <a:r>
+              <a:t>Q: What problem does a state machine solve compared to a string or enum field?</a:t>
+            </a:r>
+          </a:p>
+          <a:p>
+            <a:r>
+              <a:t>A: Each state's behaviour is in one place instead of spread across if-chains. You can add a state without editing the others, and Enter/Exit give reliable places for setup and cleanup.</a:t>
+            </a:r>
+          </a:p>
+          <a:p/>
+          <a:p>
+            <a:r>
+              <a:t>Q: What happens if you forget to call Exit() when switching state?</a:t>
+            </a:r>
+          </a:p>
+          <a:p>
+            <a:r>
+              <a:t>A: Anything the old state set up is never cleaned up: music keeps playing, event subscriptions stay alive, timers keep running.</a:t>
+            </a:r>
+          </a:p>
+          <a:p/>
+          <a:p>
+            <a:r>
+              <a:t>Q: Why is Singleton considered an anti-pattern by many game programmers?</a:t>
+            </a:r>
+          </a:p>
+          <a:p>
+            <a:r>
+              <a:t>A: It is global state in disguise. It hides dependencies, couples code together and makes testing and reasoning harder, and the "exactly one instance" guarantee is rarely needed.</a:t>
+            </a:r>
+          </a:p>
+        </p:txBody>
+      </p:sp>
+    </p:spTree>
+  </p:cSld>
+  <p:clrMapOvr>
+    <a:masterClrMapping/>
+  </p:clrMapOvr>
+</p:notes>
+</file>
+
+<file path=ppt/notesSlides/notesSlide41.xml><?xml version="1.0" encoding="utf-8"?>
+<p:notes xmlns:a="http://schemas.openxmlformats.org/drawingml/2006/main" xmlns:p="http://schemas.openxmlformats.org/presentationml/2006/main" xmlns:r="http://schemas.openxmlformats.org/officeDocument/2006/relationships">
+  <p:cSld>
+    <p:spTree>
+      <p:nvGrpSpPr>
+        <p:cNvPr id="1" name=""/>
+        <p:cNvGrpSpPr/>
+        <p:nvPr/>
+      </p:nvGrpSpPr>
+      <p:grpSpPr>
+        <a:xfrm>
+          <a:off x="0" y="0"/>
+          <a:ext cx="0" cy="0"/>
+          <a:chOff x="0" y="0"/>
+          <a:chExt cx="0" cy="0"/>
+        </a:xfrm>
+      </p:grpSpPr>
+      <p:sp>
+        <p:nvSpPr>
+          <p:cNvPr id="2" name="Slide Image Placeholder 1"/>
+          <p:cNvSpPr>
+            <a:spLocks noGrp="1"/>
+          </p:cNvSpPr>
+          <p:nvPr>
+            <p:ph type="sldImg" idx="2"/>
+          </p:nvPr>
+        </p:nvSpPr>
+        <p:spPr/>
+      </p:sp>
+      <p:sp>
+        <p:nvSpPr>
+          <p:cNvPr id="3" name="Notes Placeholder 2"/>
+          <p:cNvSpPr>
+            <a:spLocks noGrp="1"/>
+          </p:cNvSpPr>
+          <p:nvPr>
+            <p:ph type="body" idx="1"/>
+          </p:nvPr>
+        </p:nvSpPr>
+        <p:spPr/>
+        <p:txBody>
+          <a:bodyPr/>
+          <a:lstStyle/>
+          <a:p>
+            <a:r>
+              <a:t>Art is a static class, Audio a Singleton. Both global; but Audio is an object, so it could implement an interface. Pokemon builds on that with a Service Locator.</a:t>
+            </a:r>
+          </a:p>
+        </p:txBody>
+      </p:sp>
+    </p:spTree>
+  </p:cSld>
+  <p:clrMapOvr>
+    <a:masterClrMapping/>
+  </p:clrMapOvr>
+</p:notes>
+</file>
+
+<file path=ppt/notesSlides/notesSlide42.xml><?xml version="1.0" encoding="utf-8"?>
+<p:notes xmlns:a="http://schemas.openxmlformats.org/drawingml/2006/main" xmlns:p="http://schemas.openxmlformats.org/presentationml/2006/main" xmlns:r="http://schemas.openxmlformats.org/officeDocument/2006/relationships">
+  <p:cSld>
+    <p:spTree>
+      <p:nvGrpSpPr>
+        <p:cNvPr id="1" name=""/>
+        <p:cNvGrpSpPr/>
+        <p:nvPr/>
+      </p:nvGrpSpPr>
+      <p:grpSpPr>
+        <a:xfrm>
+          <a:off x="0" y="0"/>
+          <a:ext cx="0" cy="0"/>
+          <a:chOff x="0" y="0"/>
+          <a:chExt cx="0" cy="0"/>
+        </a:xfrm>
+      </p:grpSpPr>
+      <p:sp>
+        <p:nvSpPr>
+          <p:cNvPr id="2" name="Slide Image Placeholder 1"/>
+          <p:cNvSpPr>
+            <a:spLocks noGrp="1"/>
+          </p:cNvSpPr>
+          <p:nvPr>
+            <p:ph type="sldImg" idx="2"/>
+          </p:nvPr>
+        </p:nvSpPr>
+        <p:spPr/>
+      </p:sp>
+      <p:sp>
+        <p:nvSpPr>
+          <p:cNvPr id="3" name="Notes Placeholder 2"/>
+          <p:cNvSpPr>
+            <a:spLocks noGrp="1"/>
+          </p:cNvSpPr>
+          <p:nvPr>
+            <p:ph type="body" idx="1"/>
+          </p:nvPr>
+        </p:nvSpPr>
+        <p:spPr/>
+        <p:txBody>
+          <a:bodyPr/>
+          <a:lstStyle/>
+          <a:p>
+            <a:r>
+              <a:t>Start from the gar-starter template. First milestone by session 04: groups, a concept, a repository, the link on itslearning.</a:t>
+            </a:r>
+          </a:p>
+        </p:txBody>
+      </p:sp>
+    </p:spTree>
+  </p:cSld>
+  <p:clrMapOvr>
+    <a:masterClrMapping/>
+  </p:clrMapOvr>
+</p:notes>
+</file>
+
+<file path=ppt/notesSlides/notesSlide43.xml><?xml version="1.0" encoding="utf-8"?>
+<p:notes xmlns:a="http://schemas.openxmlformats.org/drawingml/2006/main" xmlns:p="http://schemas.openxmlformats.org/presentationml/2006/main" xmlns:r="http://schemas.openxmlformats.org/officeDocument/2006/relationships">
+  <p:cSld>
+    <p:spTree>
+      <p:nvGrpSpPr>
+        <p:cNvPr id="1" name=""/>
+        <p:cNvGrpSpPr/>
+        <p:nvPr/>
+      </p:nvGrpSpPr>
+      <p:grpSpPr>
+        <a:xfrm>
+          <a:off x="0" y="0"/>
+          <a:ext cx="0" cy="0"/>
+          <a:chOff x="0" y="0"/>
+          <a:chExt cx="0" cy="0"/>
+        </a:xfrm>
+      </p:grpSpPr>
+      <p:sp>
+        <p:nvSpPr>
+          <p:cNvPr id="2" name="Slide Image Placeholder 1"/>
+          <p:cNvSpPr>
+            <a:spLocks noGrp="1"/>
+          </p:cNvSpPr>
+          <p:nvPr>
+            <p:ph type="sldImg" idx="2"/>
+          </p:nvPr>
+        </p:nvSpPr>
+        <p:spPr/>
+      </p:sp>
+      <p:sp>
+        <p:nvSpPr>
+          <p:cNvPr id="3" name="Notes Placeholder 2"/>
+          <p:cNvSpPr>
+            <a:spLocks noGrp="1"/>
+          </p:cNvSpPr>
+          <p:nvPr>
+            <p:ph type="body" idx="1"/>
+          </p:nvPr>
+        </p:nvSpPr>
+        <p:spPr/>
+        <p:txBody>
+          <a:bodyPr/>
+          <a:lstStyle/>
+          <a:p>
+            <a:r>
+              <a:t>Give the project groups five minutes with these questions.</a:t>
+            </a:r>
+          </a:p>
+          <a:p>
+            <a:r>
+              <a:t>Ask two groups to share one answer each. Push for concrete classes and files, not intentions.</a:t>
             </a:r>
           </a:p>
         </p:txBody>
@@ -4888,19 +4229,9 @@
           </a:bodyPr>
           <a:lstStyle/>
           <a:p>
-            <a:pPr indent="0" lvl="0" marL="0" rtl="0" algn="l">
-              <a:spcBef>
-                <a:spcPts val="0"/>
-              </a:spcBef>
-              <a:spcAft>
-                <a:spcPts val="0"/>
-              </a:spcAft>
-              <a:buNone/>
-            </a:pPr>
-            <a:r>
-              <a:t/>
-            </a:r>
-            <a:endParaRPr/>
+            <a:r>
+              <a:t>The cycle of a change: understand the problem, learn the code, write the solution, clean up. Architecture shortens the “learn the code” step.</a:t>
+            </a:r>
           </a:p>
         </p:txBody>
       </p:sp>
@@ -4987,19 +4318,14 @@
           </a:bodyPr>
           <a:lstStyle/>
           <a:p>
-            <a:pPr indent="0" lvl="0" marL="0" rtl="0" algn="l">
-              <a:spcBef>
-                <a:spcPts val="0"/>
-              </a:spcBef>
-              <a:spcAft>
-                <a:spcPts val="0"/>
-              </a:spcAft>
-              <a:buNone/>
-            </a:pPr>
-            <a:r>
-              <a:t/>
-            </a:r>
-            <a:endParaRPr/>
+            <a:r>
+              <a:t>Coupling: how much parts depend on each other (want low). Cohesion: how much a part’s own code belongs together (want high).</a:t>
+            </a:r>
+          </a:p>
+          <a:p>
+            <a:r>
+              <a:t>Ask: which picture would you rather change?</a:t>
+            </a:r>
           </a:p>
         </p:txBody>
       </p:sp>
@@ -5086,19 +4412,9 @@
           </a:bodyPr>
           <a:lstStyle/>
           <a:p>
-            <a:pPr indent="0" lvl="0" marL="0" rtl="0" algn="l">
-              <a:spcBef>
-                <a:spcPts val="0"/>
-              </a:spcBef>
-              <a:spcAft>
-                <a:spcPts val="0"/>
-              </a:spcAft>
-              <a:buNone/>
-            </a:pPr>
-            <a:r>
-              <a:t/>
-            </a:r>
-            <a:endParaRPr/>
+            <a:r>
+              <a:t>Named, reusable solutions to recurring design problems. A shared vocabulary: “make it a state machine” says a lot in four words.</a:t>
+            </a:r>
           </a:p>
         </p:txBody>
       </p:sp>
@@ -5185,19 +4501,14 @@
           </a:bodyPr>
           <a:lstStyle/>
           <a:p>
-            <a:pPr indent="0" lvl="0" marL="0" rtl="0" algn="l">
-              <a:spcBef>
-                <a:spcPts val="0"/>
-              </a:spcBef>
-              <a:spcAft>
-                <a:spcPts val="0"/>
-              </a:spcAft>
-              <a:buNone/>
-            </a:pPr>
-            <a:r>
-              <a:t/>
-            </a:r>
-            <a:endParaRPr/>
+            <a:r>
+              <a:t>Open gar-games/02-flappy live. Show the README: the step table, the code map, how to run a step.</a:t>
+            </a:r>
+          </a:p>
+          <a:p>
+            <a:r>
+              <a:t>Say: the site explains the ideas, the README helps you find them in the code, the slides are for today.</a:t>
+            </a:r>
           </a:p>
         </p:txBody>
       </p:sp>
@@ -5284,19 +4595,9 @@
           </a:bodyPr>
           <a:lstStyle/>
           <a:p>
-            <a:pPr indent="0" lvl="0" marL="0" rtl="0" algn="l">
-              <a:spcBef>
-                <a:spcPts val="0"/>
-              </a:spcBef>
-              <a:spcAft>
-                <a:spcPts val="0"/>
-              </a:spcAft>
-              <a:buNone/>
-            </a:pPr>
-            <a:r>
-              <a:t/>
-            </a:r>
-            <a:endParaRPr/>
+            <a:r>
+              <a:t>Pong copied everything into one project. Code every game needs (window, scaling, input) belongs in a library that every game references.</a:t>
+            </a:r>
           </a:p>
         </p:txBody>
       </p:sp>
@@ -29772,25 +29073,17 @@
       <p:grpSpPr/>
       <p:sp>
         <p:nvSpPr>
-          <p:cNvPr id="57" name="Google Shape;57;p12"/>
-          <p:cNvSpPr txBox="1"/>
+          <p:cNvPr id="2" name="Title 1"/>
+          <p:cNvSpPr>
+            <a:spLocks noGrp="1"/>
+          </p:cNvSpPr>
           <p:nvPr>
             <p:ph type="title"/>
           </p:nvPr>
         </p:nvSpPr>
-        <p:spPr>
-          <a:xfrm>
-            <a:off x="311700" y="195615"/>
-            <a:ext cx="8520600" cy="572700"/>
-          </a:xfrm>
-          <a:prstGeom prst="rect">
-            <a:avLst/>
-          </a:prstGeom>
-        </p:spPr>
+        <p:spPr/>
         <p:txBody>
-          <a:bodyPr anchorCtr="0" anchor="t" bIns="91425" lIns="91425" spcFirstLastPara="1" rIns="91425" wrap="square" tIns="91425">
-            <a:normAutofit fontScale="90000"/>
-          </a:bodyPr>
+          <a:bodyPr/>
           <a:lstStyle/>
           <a:p>
             <a:pPr indent="0" lvl="0" marL="0" rtl="0" algn="l">
@@ -29804,7 +29097,7 @@
             </a:pPr>
             <a:r>
               <a:rPr lang="en"/>
-              <a:t>Apply It to Your Project</a:t>
+              <a:t>Check Yourself</a:t>
             </a:r>
             <a:endParaRPr/>
           </a:p>
@@ -29812,93 +29105,107 @@
       </p:sp>
       <p:sp>
         <p:nvSpPr>
-          <p:cNvPr id="58" name="Google Shape;58;p12"/>
-          <p:cNvSpPr txBox="1"/>
+          <p:cNvPr id="3" name="Text Placeholder 2"/>
+          <p:cNvSpPr>
+            <a:spLocks noGrp="1"/>
+          </p:cNvSpPr>
           <p:nvPr>
-            <p:ph idx="1" type="body"/>
+            <p:ph type="body" idx="1"/>
           </p:nvPr>
         </p:nvSpPr>
         <p:spPr>
           <a:xfrm>
             <a:off x="311700" y="885950"/>
-            <a:ext cx="8520600" cy="4023300"/>
+            <a:ext cx="8520600" cy="1335024"/>
+          </a:xfrm>
+        </p:spPr>
+        <p:txBody>
+          <a:bodyPr/>
+          <a:lstStyle/>
+          <a:p>
+            <a:pPr indent="-330200" lvl="0" marL="457200" rtl="0" algn="l">
+              <a:spcBef>
+                <a:spcPts val="0"/>
+              </a:spcBef>
+              <a:spcAft>
+                <a:spcPts val="0"/>
+              </a:spcAft>
+              <a:buSzPts val="1600"/>
+              <a:buChar char="●"/>
+            </a:pPr>
+            <a:r>
+              <a:rPr lang="en"/>
+              <a:t>What problem does a state machine solve compared to a string or enum field?</a:t>
+            </a:r>
+            <a:endParaRPr/>
+          </a:p>
+          <a:p>
+            <a:pPr indent="-330200" lvl="0" marL="457200" rtl="0" algn="l">
+              <a:spcBef>
+                <a:spcPts val="0"/>
+              </a:spcBef>
+              <a:spcAft>
+                <a:spcPts val="0"/>
+              </a:spcAft>
+              <a:buSzPts val="1600"/>
+              <a:buChar char="●"/>
+            </a:pPr>
+            <a:r>
+              <a:rPr lang="en"/>
+              <a:t>What happens if you forget to call Exit() when switching state?</a:t>
+            </a:r>
+            <a:endParaRPr/>
+          </a:p>
+          <a:p>
+            <a:pPr indent="-330200" lvl="0" marL="457200" rtl="0" algn="l">
+              <a:spcBef>
+                <a:spcPts val="0"/>
+              </a:spcBef>
+              <a:spcAft>
+                <a:spcPts val="0"/>
+              </a:spcAft>
+              <a:buSzPts val="1600"/>
+              <a:buChar char="●"/>
+            </a:pPr>
+            <a:r>
+              <a:rPr lang="en"/>
+              <a:t>Why is Singleton considered an anti-pattern by many game programmers?</a:t>
+            </a:r>
+            <a:endParaRPr/>
+          </a:p>
+        </p:txBody>
+      </p:sp>
+      <p:sp>
+        <p:nvSpPr>
+          <p:cNvPr id="4" name="TextBox 3"/>
+          <p:cNvSpPr txBox="1"/>
+          <p:nvPr/>
+        </p:nvSpPr>
+        <p:spPr>
+          <a:xfrm>
+            <a:off x="457200" y="2798064"/>
+            <a:ext cx="8229600" cy="457200"/>
           </a:xfrm>
           <a:prstGeom prst="rect">
             <a:avLst/>
           </a:prstGeom>
+          <a:noFill/>
         </p:spPr>
         <p:txBody>
-          <a:bodyPr anchorCtr="0" anchor="t" bIns="91425" lIns="91425" spcFirstLastPara="1" rIns="91425" wrap="square" tIns="91425">
-            <a:normAutofit/>
+          <a:bodyPr wrap="square">
+            <a:spAutoFit/>
           </a:bodyPr>
           <a:lstStyle/>
           <a:p>
-            <a:pPr indent="-330200" lvl="0" marL="457200" rtl="0" algn="l">
-              <a:spcBef>
-                <a:spcPts val="0"/>
-              </a:spcBef>
-              <a:spcAft>
-                <a:spcPts val="0"/>
-              </a:spcAft>
-              <a:buSzPts val="1600"/>
-              <a:buChar char="●"/>
-            </a:pPr>
-            <a:r>
-              <a:rPr lang="en"/>
-              <a:t>Which code in your game could another game reuse?</a:t>
-            </a:r>
-            <a:endParaRPr/>
-          </a:p>
-          <a:p>
-            <a:pPr indent="-317500" lvl="1" marL="914400" rtl="0" algn="l">
-              <a:spcBef>
-                <a:spcPts val="0"/>
-              </a:spcBef>
-              <a:spcAft>
-                <a:spcPts val="0"/>
-              </a:spcAft>
-              <a:buSzPts val="1400"/>
-              <a:buChar char="○"/>
-            </a:pPr>
-            <a:r>
-              <a:rPr lang="en"/>
-              <a:t>That belongs in a class library, like GMDCore</a:t>
-            </a:r>
-            <a:endParaRPr/>
-          </a:p>
-          <a:p>
-            <a:pPr indent="-330200" lvl="0" marL="457200" rtl="0" algn="l">
-              <a:spcBef>
-                <a:spcPts val="0"/>
-              </a:spcBef>
-              <a:spcAft>
-                <a:spcPts val="0"/>
-              </a:spcAft>
-              <a:buSzPts val="1600"/>
-              <a:buChar char="●"/>
-            </a:pPr>
-            <a:r>
-              <a:rPr lang="en"/>
-              <a:t>Which states does your game have? Draw them as a state diagram</a:t>
-            </a:r>
-            <a:endParaRPr/>
-          </a:p>
-          <a:p>
-            <a:pPr indent="-330200" lvl="0" marL="457200" rtl="0" algn="l">
-              <a:spcBef>
-                <a:spcPts val="0"/>
-              </a:spcBef>
-              <a:spcAft>
-                <a:spcPts val="0"/>
-              </a:spcAft>
-              <a:buSzPts val="1600"/>
-              <a:buChar char="●"/>
-            </a:pPr>
-            <a:r>
-              <a:rPr lang="en"/>
-              <a:t>Is anything in your game global? Does it need to be?</a:t>
-            </a:r>
-            <a:endParaRPr/>
+            <a:pPr algn="ctr"/>
+            <a:r>
+              <a:rPr sz="1400" b="0" i="0">
+                <a:solidFill>
+                  <a:srgbClr val="9AA3AB"/>
+                </a:solidFill>
+              </a:rPr>
+              <a:t>The answers, and more questions, are on the course site.</a:t>
+            </a:r>
           </a:p>
         </p:txBody>
       </p:sp>
@@ -29954,7 +29261,7 @@
             </a:pPr>
             <a:r>
               <a:rPr lang="en"/>
-              <a:t>Your Course Project</a:t>
+              <a:t>Apply It to Your Project</a:t>
             </a:r>
             <a:endParaRPr/>
           </a:p>
@@ -29995,7 +29302,7 @@
             </a:pPr>
             <a:r>
               <a:rPr lang="en"/>
-              <a:t>Start from the gar-starter template on GitHub</a:t>
+              <a:t>Which code in your game could another game reuse?</a:t>
             </a:r>
             <a:endParaRPr/>
           </a:p>
@@ -30012,7 +29319,7 @@
             </a:pPr>
             <a:r>
               <a:rPr lang="en"/>
-              <a:t>“Use this template”: an empty game with the content builder</a:t>
+              <a:t>That belongs in a class library, like GMDCore</a:t>
             </a:r>
             <a:endParaRPr/>
           </a:p>
@@ -30029,24 +29336,24 @@
             </a:pPr>
             <a:r>
               <a:rPr lang="en"/>
-              <a:t>First milestone, by session 04</a:t>
+              <a:t>Which states does your game have? Draw them as a state diagram</a:t>
             </a:r>
             <a:endParaRPr/>
           </a:p>
           <a:p>
-            <a:pPr indent="-317500" lvl="1" marL="914400" rtl="0" algn="l">
-              <a:spcBef>
-                <a:spcPts val="0"/>
-              </a:spcBef>
-              <a:spcAft>
-                <a:spcPts val="0"/>
-              </a:spcAft>
-              <a:buSzPts val="1400"/>
-              <a:buChar char="○"/>
+            <a:pPr indent="-330200" lvl="0" marL="457200" rtl="0" algn="l">
+              <a:spcBef>
+                <a:spcPts val="0"/>
+              </a:spcBef>
+              <a:spcAft>
+                <a:spcPts val="0"/>
+              </a:spcAft>
+              <a:buSzPts val="1600"/>
+              <a:buChar char="●"/>
             </a:pPr>
             <a:r>
               <a:rPr lang="en"/>
-              <a:t>Groups formed, game concept written, repository created and link uploaded to itslearning</a:t>
+              <a:t>Is anything in your game global? Does it need to be?</a:t>
             </a:r>
             <a:endParaRPr/>
           </a:p>
@@ -30072,17 +29379,25 @@
       <p:grpSpPr/>
       <p:sp>
         <p:nvSpPr>
-          <p:cNvPr id="2" name="Title 1"/>
-          <p:cNvSpPr>
-            <a:spLocks noGrp="1"/>
-          </p:cNvSpPr>
+          <p:cNvPr id="57" name="Google Shape;57;p12"/>
+          <p:cNvSpPr txBox="1"/>
           <p:nvPr>
             <p:ph type="title"/>
           </p:nvPr>
         </p:nvSpPr>
-        <p:spPr/>
+        <p:spPr>
+          <a:xfrm>
+            <a:off x="311700" y="195615"/>
+            <a:ext cx="8520600" cy="572700"/>
+          </a:xfrm>
+          <a:prstGeom prst="rect">
+            <a:avLst/>
+          </a:prstGeom>
+        </p:spPr>
         <p:txBody>
-          <a:bodyPr/>
+          <a:bodyPr anchorCtr="0" anchor="t" bIns="91425" lIns="91425" spcFirstLastPara="1" rIns="91425" wrap="square" tIns="91425">
+            <a:normAutofit fontScale="90000"/>
+          </a:bodyPr>
           <a:lstStyle/>
           <a:p>
             <a:pPr indent="0" lvl="0" marL="0" rtl="0" algn="l">
@@ -30096,7 +29411,7 @@
             </a:pPr>
             <a:r>
               <a:rPr lang="en"/>
-              <a:t>Check Yourself</a:t>
+              <a:t>Your Course Project</a:t>
             </a:r>
             <a:endParaRPr/>
           </a:p>
@@ -30104,22 +29419,25 @@
       </p:sp>
       <p:sp>
         <p:nvSpPr>
-          <p:cNvPr id="3" name="Text Placeholder 2"/>
-          <p:cNvSpPr>
-            <a:spLocks noGrp="1"/>
-          </p:cNvSpPr>
+          <p:cNvPr id="58" name="Google Shape;58;p12"/>
+          <p:cNvSpPr txBox="1"/>
           <p:nvPr>
-            <p:ph type="body" idx="1"/>
+            <p:ph idx="1" type="body"/>
           </p:nvPr>
         </p:nvSpPr>
         <p:spPr>
           <a:xfrm>
             <a:off x="311700" y="885950"/>
-            <a:ext cx="8520600" cy="1335024"/>
+            <a:ext cx="8520600" cy="4023300"/>
           </a:xfrm>
+          <a:prstGeom prst="rect">
+            <a:avLst/>
+          </a:prstGeom>
         </p:spPr>
         <p:txBody>
-          <a:bodyPr/>
+          <a:bodyPr anchorCtr="0" anchor="t" bIns="91425" lIns="91425" spcFirstLastPara="1" rIns="91425" wrap="square" tIns="91425">
+            <a:normAutofit/>
+          </a:bodyPr>
           <a:lstStyle/>
           <a:p>
             <a:pPr indent="-330200" lvl="0" marL="457200" rtl="0" algn="l">
@@ -30134,7 +29452,24 @@
             </a:pPr>
             <a:r>
               <a:rPr lang="en"/>
-              <a:t>What problem does a state machine solve compared to a string or enum field?</a:t>
+              <a:t>Start from the gar-starter template on GitHub</a:t>
+            </a:r>
+            <a:endParaRPr/>
+          </a:p>
+          <a:p>
+            <a:pPr indent="-317500" lvl="1" marL="914400" rtl="0" algn="l">
+              <a:spcBef>
+                <a:spcPts val="0"/>
+              </a:spcBef>
+              <a:spcAft>
+                <a:spcPts val="0"/>
+              </a:spcAft>
+              <a:buSzPts val="1400"/>
+              <a:buChar char="○"/>
+            </a:pPr>
+            <a:r>
+              <a:rPr lang="en"/>
+              <a:t>“Use this template”: an empty game with the content builder</a:t>
             </a:r>
             <a:endParaRPr/>
           </a:p>
@@ -30151,60 +29486,26 @@
             </a:pPr>
             <a:r>
               <a:rPr lang="en"/>
-              <a:t>What happens if you forget to call Exit() when switching state?</a:t>
+              <a:t>First milestone, by session 04</a:t>
             </a:r>
             <a:endParaRPr/>
           </a:p>
           <a:p>
-            <a:pPr indent="-330200" lvl="0" marL="457200" rtl="0" algn="l">
-              <a:spcBef>
-                <a:spcPts val="0"/>
-              </a:spcBef>
-              <a:spcAft>
-                <a:spcPts val="0"/>
-              </a:spcAft>
-              <a:buSzPts val="1600"/>
-              <a:buChar char="●"/>
+            <a:pPr indent="-317500" lvl="1" marL="914400" rtl="0" algn="l">
+              <a:spcBef>
+                <a:spcPts val="0"/>
+              </a:spcBef>
+              <a:spcAft>
+                <a:spcPts val="0"/>
+              </a:spcAft>
+              <a:buSzPts val="1400"/>
+              <a:buChar char="○"/>
             </a:pPr>
             <a:r>
               <a:rPr lang="en"/>
-              <a:t>Why is Singleton considered an anti-pattern by many game programmers?</a:t>
+              <a:t>Groups formed, game concept written, repository created and link uploaded to itslearning</a:t>
             </a:r>
             <a:endParaRPr/>
-          </a:p>
-        </p:txBody>
-      </p:sp>
-      <p:sp>
-        <p:nvSpPr>
-          <p:cNvPr id="4" name="TextBox 3"/>
-          <p:cNvSpPr txBox="1"/>
-          <p:nvPr/>
-        </p:nvSpPr>
-        <p:spPr>
-          <a:xfrm>
-            <a:off x="457200" y="2798064"/>
-            <a:ext cx="8229600" cy="457200"/>
-          </a:xfrm>
-          <a:prstGeom prst="rect">
-            <a:avLst/>
-          </a:prstGeom>
-          <a:noFill/>
-        </p:spPr>
-        <p:txBody>
-          <a:bodyPr wrap="square">
-            <a:spAutoFit/>
-          </a:bodyPr>
-          <a:lstStyle/>
-          <a:p>
-            <a:pPr algn="ctr"/>
-            <a:r>
-              <a:rPr sz="1400" b="0" i="0">
-                <a:solidFill>
-                  <a:srgbClr val="9AA3AB"/>
-                </a:solidFill>
-              </a:rPr>
-              <a:t>The answers, and more questions, are on the course site.</a:t>
-            </a:r>
           </a:p>
         </p:txBody>
       </p:sp>

--- a/slides/02 Flappy Bird.pptx
+++ b/slides/02 Flappy Bird.pptx
@@ -8418,7 +8418,7 @@
                   <a:schemeClr val="accent5"/>
                 </a:solidFill>
               </a:rPr>
-              <a:t>Flappy -1: Class Library</a:t>
+              <a:t>Flappy -1: A Class Library</a:t>
             </a:r>
             <a:endParaRPr>
               <a:solidFill>
@@ -9742,7 +9742,7 @@
                   <a:schemeClr val="accent5"/>
                 </a:solidFill>
               </a:rPr>
-              <a:t>Flappy 0: Consuming the Class Library</a:t>
+              <a:t>Flappy 0: A Game on the Library</a:t>
             </a:r>
             <a:endParaRPr>
               <a:solidFill>
@@ -10668,7 +10668,7 @@
                   <a:schemeClr val="accent5"/>
                 </a:solidFill>
               </a:rPr>
-              <a:t>Flappy 1: Background</a:t>
+              <a:t>Flappy 1: Drawing Images</a:t>
             </a:r>
             <a:endParaRPr>
               <a:solidFill>
@@ -11120,7 +11120,7 @@
                   <a:schemeClr val="accent5"/>
                 </a:solidFill>
               </a:rPr>
-              <a:t>Flappy 2: Parallax</a:t>
+              <a:t>Flappy 2: Parallax Scrolling</a:t>
             </a:r>
             <a:endParaRPr>
               <a:solidFill>
@@ -11826,7 +11826,7 @@
                   <a:schemeClr val="accent5"/>
                 </a:solidFill>
               </a:rPr>
-              <a:t>Flappy 3: Bird &amp; Assets</a:t>
+              <a:t>Flappy 3: The Bird and the Art Class</a:t>
             </a:r>
             <a:endParaRPr>
               <a:solidFill>
@@ -13449,7 +13449,7 @@
                   <a:schemeClr val="accent5"/>
                 </a:solidFill>
               </a:rPr>
-              <a:t>Flappy 5: Flap</a:t>
+              <a:t>Flappy 5: An Input Manager</a:t>
             </a:r>
             <a:endParaRPr>
               <a:solidFill>
@@ -14675,7 +14675,7 @@
                   <a:schemeClr val="accent5"/>
                 </a:solidFill>
               </a:rPr>
-              <a:t>Flappy 6: Infinite Pipes</a:t>
+              <a:t>Flappy 6: Spawning on a Timer</a:t>
             </a:r>
             <a:endParaRPr>
               <a:solidFill>
@@ -15546,7 +15546,7 @@
                   <a:schemeClr val="accent5"/>
                 </a:solidFill>
               </a:rPr>
-              <a:t>Flappy 7: Pipe Pairs</a:t>
+              <a:t>Flappy 7: A Drifting Gap</a:t>
             </a:r>
             <a:endParaRPr>
               <a:solidFill>
@@ -17043,7 +17043,7 @@
                   <a:schemeClr val="accent5"/>
                 </a:solidFill>
               </a:rPr>
-              <a:t>Flappy 8: Collisions</a:t>
+              <a:t>Flappy 8: Hitboxes</a:t>
             </a:r>
             <a:endParaRPr>
               <a:solidFill>
@@ -23421,7 +23421,7 @@
                   <a:schemeClr val="accent5"/>
                 </a:solidFill>
               </a:rPr>
-              <a:t>Flappy 9: State Machine</a:t>
+              <a:t>Flappy 9: A State Machine</a:t>
             </a:r>
             <a:endParaRPr>
               <a:solidFill>
@@ -24537,7 +24537,7 @@
                   <a:schemeClr val="accent5"/>
                 </a:solidFill>
               </a:rPr>
-              <a:t>Flappy 10: Scoring</a:t>
+              <a:t>Flappy 10: Passing Data Between States</a:t>
             </a:r>
             <a:endParaRPr>
               <a:solidFill>
@@ -25212,7 +25212,7 @@
                   <a:schemeClr val="accent5"/>
                 </a:solidFill>
               </a:rPr>
-              <a:t>Flappy 11: Countdown</a:t>
+              <a:t>Flappy 11: A Countdown State</a:t>
             </a:r>
             <a:endParaRPr>
               <a:solidFill>
@@ -25723,7 +25723,7 @@
                   <a:schemeClr val="accent5"/>
                 </a:solidFill>
               </a:rPr>
-              <a:t>Flappy 12: Audio</a:t>
+              <a:t>Flappy 12: Audio as a Singleton</a:t>
             </a:r>
             <a:endParaRPr>
               <a:solidFill>

--- a/slides/02 Flappy Bird.pptx
+++ b/slides/02 Flappy Bird.pptx
@@ -1007,7 +1007,12 @@
           <a:lstStyle/>
           <a:p>
             <a:r>
-              <a:t>Exercise: create GMDCore with a Core class that derives from Game and owns the window and screen scaling.</a:t>
+              <a:t>Exercise: a repository from gar-starter, then GMDCore with a Core class that derives from Game and owns the window and screen scaling.</a:t>
+            </a:r>
+          </a:p>
+          <a:p>
+            <a:r>
+              <a:t>The site has the four dotnet commands; no MonoGame templates needed. Common snag: the classlib template turns on nullable warnings; they delete that line.</a:t>
             </a:r>
           </a:p>
           <a:p>
@@ -1101,7 +1106,7 @@
           <a:lstStyle/>
           <a:p>
             <a:r>
-              <a:t>Exercise: a new game from the gar-starter template whose Game1 derives from Core. The window should look like the screenshot.</a:t>
+              <a:t>Exercise: Game1 derives from Core. The window should look like the screenshot.</a:t>
             </a:r>
           </a:p>
           <a:p>

--- a/slides/02 Flappy Bird.pptx
+++ b/slides/02 Flappy Bird.pptx
@@ -1007,12 +1007,12 @@
           <a:lstStyle/>
           <a:p>
             <a:r>
-              <a:t>Exercise: a repository from gar-starter, then GMDCore with a Core class that derives from Game and owns the window and screen scaling.</a:t>
+              <a:t>Exercise: a repository from gar-starter, which comes with an empty GMDCore library. They write a Core class in it that derives from Game and owns the window and screen scaling.</a:t>
             </a:r>
           </a:p>
           <a:p>
             <a:r>
-              <a:t>The site has the four dotnet commands; no MonoGame templates needed. Common snag: the classlib template turns on nullable warnings; they delete that line.</a:t>
+              <a:t>Before they code, ask: where is the library connected to the game, and which way does the reference point? Answer: the ProjectReference in the game’s .csproj; the game knows the library, never the other way round. So nothing in Core may mention Flappy.</a:t>
             </a:r>
           </a:p>
           <a:p>

--- a/slides/02 Flappy Bird.pptx
+++ b/slides/02 Flappy Bird.pptx
@@ -3967,7 +3967,7 @@
           </a:p>
           <a:p>
             <a:r>
-              <a:t>A: It is global state in disguise. It hides dependencies, couples code together and makes testing and reasoning harder, and the "exactly one instance" guarantee is rarely needed.</a:t>
+              <a:t>A: It is global state. It hides dependencies, couples code together and makes testing and reasoning harder, and games rarely need the "exactly one instance" guarantee.</a:t>
             </a:r>
           </a:p>
         </p:txBody>
@@ -4146,7 +4146,7 @@
           </a:p>
           <a:p>
             <a:r>
-              <a:t>Ask two groups to share one answer each. Push for concrete classes and files, not intentions.</a:t>
+              <a:t>Ask two groups to share one answer each, and push them to name actual classes and files.</a:t>
             </a:r>
           </a:p>
         </p:txBody>

--- a/slides/02 Flappy Bird.pptx
+++ b/slides/02 Flappy Bird.pptx
@@ -9,6 +9,7 @@
   </p:notesMasterIdLst>
   <p:sldIdLst>
     <p:sldId id="256" r:id="rId6"/>
+    <p:sldId id="299" r:id="rId58"/>
     <p:sldId id="257" r:id="rId7"/>
     <p:sldId id="258" r:id="rId8"/>
     <p:sldId id="259" r:id="rId9"/>
@@ -4147,6 +4148,69 @@
           <a:p>
             <a:r>
               <a:t>Ask two groups to share one answer each, and push them to name actual classes and files.</a:t>
+            </a:r>
+          </a:p>
+        </p:txBody>
+      </p:sp>
+    </p:spTree>
+  </p:cSld>
+  <p:clrMapOvr>
+    <a:masterClrMapping/>
+  </p:clrMapOvr>
+</p:notes>
+</file>
+
+<file path=ppt/notesSlides/notesSlide44.xml><?xml version="1.0" encoding="utf-8"?>
+<p:notes xmlns:a="http://schemas.openxmlformats.org/drawingml/2006/main" xmlns:p="http://schemas.openxmlformats.org/presentationml/2006/main" xmlns:r="http://schemas.openxmlformats.org/officeDocument/2006/relationships">
+  <p:cSld>
+    <p:spTree>
+      <p:nvGrpSpPr>
+        <p:cNvPr id="1" name=""/>
+        <p:cNvGrpSpPr/>
+        <p:nvPr/>
+      </p:nvGrpSpPr>
+      <p:grpSpPr>
+        <a:xfrm>
+          <a:off x="0" y="0"/>
+          <a:ext cx="0" cy="0"/>
+          <a:chOff x="0" y="0"/>
+          <a:chExt cx="0" cy="0"/>
+        </a:xfrm>
+      </p:grpSpPr>
+      <p:sp>
+        <p:nvSpPr>
+          <p:cNvPr id="2" name="Slide Image Placeholder 1"/>
+          <p:cNvSpPr>
+            <a:spLocks noGrp="1"/>
+          </p:cNvSpPr>
+          <p:nvPr>
+            <p:ph type="sldImg" idx="2"/>
+          </p:nvPr>
+        </p:nvSpPr>
+        <p:spPr/>
+      </p:sp>
+      <p:sp>
+        <p:nvSpPr>
+          <p:cNvPr id="3" name="Notes Placeholder 2"/>
+          <p:cNvSpPr>
+            <a:spLocks noGrp="1"/>
+          </p:cNvSpPr>
+          <p:nvPr>
+            <p:ph type="body" idx="1"/>
+          </p:nvPr>
+        </p:nvSpPr>
+        <p:spPr/>
+        <p:txBody>
+          <a:bodyPr/>
+          <a:lstStyle/>
+          <a:p>
+            <a:r>
+              <a:t>The original: Flappy Bird. Ask who has played it, and what they remember of how it plays.</a:t>
+            </a:r>
+          </a:p>
+          <a:p>
+            <a:r>
+              <a:t>Today we build the parts that matter for the architecture, not the whole game.</a:t>
             </a:r>
           </a:p>
         </p:txBody>
@@ -8280,6 +8344,99 @@
   <p:cSld>
     <p:spTree>
       <p:nvGrpSpPr>
+        <p:cNvPr id="85" name="Shape 85"/>
+        <p:cNvGrpSpPr/>
+        <p:nvPr/>
+      </p:nvGrpSpPr>
+      <p:grpSpPr>
+        <a:xfrm>
+          <a:off x="0" y="0"/>
+          <a:ext cx="0" cy="0"/>
+          <a:chOff x="0" y="0"/>
+          <a:chExt cx="0" cy="0"/>
+        </a:xfrm>
+      </p:grpSpPr>
+      <p:sp>
+        <p:nvSpPr>
+          <p:cNvPr id="86" name="Google Shape;86;p17"/>
+          <p:cNvSpPr txBox="1"/>
+          <p:nvPr>
+            <p:ph type="title"/>
+          </p:nvPr>
+        </p:nvSpPr>
+        <p:spPr>
+          <a:xfrm>
+            <a:off x="311700" y="195615"/>
+            <a:ext cx="8520600" cy="572700"/>
+          </a:xfrm>
+          <a:prstGeom prst="rect">
+            <a:avLst/>
+          </a:prstGeom>
+        </p:spPr>
+        <p:txBody>
+          <a:bodyPr anchorCtr="0" anchor="t" bIns="91425" lIns="91425" spcFirstLastPara="1" rIns="91425" wrap="square" tIns="91425">
+            <a:normAutofit fontScale="90000"/>
+          </a:bodyPr>
+          <a:lstStyle/>
+          <a:p>
+            <a:pPr indent="0" lvl="0" marL="0" rtl="0" algn="l">
+              <a:spcBef>
+                <a:spcPts val="0"/>
+              </a:spcBef>
+              <a:spcAft>
+                <a:spcPts val="0"/>
+              </a:spcAft>
+              <a:buNone/>
+            </a:pPr>
+            <a:r>
+              <a:rPr lang="en"/>
+              <a:t>Class Library</a:t>
+            </a:r>
+            <a:endParaRPr/>
+          </a:p>
+        </p:txBody>
+      </p:sp>
+      <p:pic>
+        <p:nvPicPr>
+          <p:cNvPr id="87" name="Google Shape;87;p17"/>
+          <p:cNvPicPr preferRelativeResize="0"/>
+          <p:nvPr/>
+        </p:nvPicPr>
+        <p:blipFill>
+          <a:blip r:embed="rId3">
+            <a:alphaModFix/>
+          </a:blip>
+          <a:stretch>
+            <a:fillRect/>
+          </a:stretch>
+        </p:blipFill>
+        <p:spPr>
+          <a:xfrm>
+            <a:off x="270188" y="1400650"/>
+            <a:ext cx="8603624" cy="2342200"/>
+          </a:xfrm>
+          <a:prstGeom prst="rect">
+            <a:avLst/>
+          </a:prstGeom>
+          <a:noFill/>
+          <a:ln>
+            <a:noFill/>
+          </a:ln>
+        </p:spPr>
+      </p:pic>
+    </p:spTree>
+  </p:cSld>
+  <p:clrMapOvr>
+    <a:masterClrMapping/>
+  </p:clrMapOvr>
+</p:sld>
+</file>
+
+<file path=ppt/slides/slide11.xml><?xml version="1.0" encoding="utf-8"?>
+<p:sld xmlns:a="http://schemas.openxmlformats.org/drawingml/2006/main" xmlns:r="http://schemas.openxmlformats.org/officeDocument/2006/relationships" xmlns:mc="http://schemas.openxmlformats.org/markup-compatibility/2006" xmlns:mv="urn:schemas-microsoft-com:mac:vml" xmlns:p="http://schemas.openxmlformats.org/presentationml/2006/main" xmlns:c="http://schemas.openxmlformats.org/drawingml/2006/chart" xmlns:dgm="http://schemas.openxmlformats.org/drawingml/2006/diagram" xmlns:o="urn:schemas-microsoft-com:office:office" xmlns:v="urn:schemas-microsoft-com:vml" xmlns:pvml="urn:schemas-microsoft-com:office:powerpoint" xmlns:com="http://schemas.openxmlformats.org/drawingml/2006/compatibility" xmlns:p14="http://schemas.microsoft.com/office/powerpoint/2010/main" xmlns:p15="http://schemas.microsoft.com/office/powerpoint/2012/main" xmlns:ahyp="http://schemas.microsoft.com/office/drawing/2018/hyperlinkcolor">
+  <p:cSld>
+    <p:spTree>
+      <p:nvGrpSpPr>
         <p:cNvPr id="91" name="Shape 91"/>
         <p:cNvGrpSpPr/>
         <p:nvPr/>
@@ -8368,7 +8525,7 @@
 </p:sld>
 </file>
 
-<file path=ppt/slides/slide11.xml><?xml version="1.0" encoding="utf-8"?>
+<file path=ppt/slides/slide12.xml><?xml version="1.0" encoding="utf-8"?>
 <p:sld xmlns:a="http://schemas.openxmlformats.org/drawingml/2006/main" xmlns:r="http://schemas.openxmlformats.org/officeDocument/2006/relationships" xmlns:mc="http://schemas.openxmlformats.org/markup-compatibility/2006" xmlns:mv="urn:schemas-microsoft-com:mac:vml" xmlns:p="http://schemas.openxmlformats.org/presentationml/2006/main" xmlns:c="http://schemas.openxmlformats.org/drawingml/2006/chart" xmlns:dgm="http://schemas.openxmlformats.org/drawingml/2006/diagram" xmlns:o="urn:schemas-microsoft-com:office:office" xmlns:v="urn:schemas-microsoft-com:vml" xmlns:pvml="urn:schemas-microsoft-com:office:powerpoint" xmlns:com="http://schemas.openxmlformats.org/drawingml/2006/compatibility" xmlns:p14="http://schemas.microsoft.com/office/powerpoint/2010/main" xmlns:p15="http://schemas.microsoft.com/office/powerpoint/2012/main" xmlns:ahyp="http://schemas.microsoft.com/office/drawing/2018/hyperlinkcolor">
   <p:cSld>
     <p:spTree>
@@ -9692,7 +9849,7 @@
 </p:sld>
 </file>
 
-<file path=ppt/slides/slide12.xml><?xml version="1.0" encoding="utf-8"?>
+<file path=ppt/slides/slide13.xml><?xml version="1.0" encoding="utf-8"?>
 <p:sld xmlns:a="http://schemas.openxmlformats.org/drawingml/2006/main" xmlns:r="http://schemas.openxmlformats.org/officeDocument/2006/relationships" xmlns:mc="http://schemas.openxmlformats.org/markup-compatibility/2006" xmlns:mv="urn:schemas-microsoft-com:mac:vml" xmlns:p="http://schemas.openxmlformats.org/presentationml/2006/main" xmlns:c="http://schemas.openxmlformats.org/drawingml/2006/chart" xmlns:dgm="http://schemas.openxmlformats.org/drawingml/2006/diagram" xmlns:o="urn:schemas-microsoft-com:office:office" xmlns:v="urn:schemas-microsoft-com:vml" xmlns:pvml="urn:schemas-microsoft-com:office:powerpoint" xmlns:com="http://schemas.openxmlformats.org/drawingml/2006/compatibility" xmlns:p14="http://schemas.microsoft.com/office/powerpoint/2010/main" xmlns:p15="http://schemas.microsoft.com/office/powerpoint/2012/main" xmlns:ahyp="http://schemas.microsoft.com/office/drawing/2018/hyperlinkcolor">
   <p:cSld>
     <p:spTree>
@@ -10367,7 +10524,7 @@
 </p:sld>
 </file>
 
-<file path=ppt/slides/slide13.xml><?xml version="1.0" encoding="utf-8"?>
+<file path=ppt/slides/slide14.xml><?xml version="1.0" encoding="utf-8"?>
 <p:sld xmlns:a="http://schemas.openxmlformats.org/drawingml/2006/main" xmlns:r="http://schemas.openxmlformats.org/officeDocument/2006/relationships" xmlns:mc="http://schemas.openxmlformats.org/markup-compatibility/2006" xmlns:mv="urn:schemas-microsoft-com:mac:vml" xmlns:p="http://schemas.openxmlformats.org/presentationml/2006/main" xmlns:c="http://schemas.openxmlformats.org/drawingml/2006/chart" xmlns:dgm="http://schemas.openxmlformats.org/drawingml/2006/diagram" xmlns:o="urn:schemas-microsoft-com:office:office" xmlns:v="urn:schemas-microsoft-com:vml" xmlns:pvml="urn:schemas-microsoft-com:office:powerpoint" xmlns:com="http://schemas.openxmlformats.org/drawingml/2006/compatibility" xmlns:p14="http://schemas.microsoft.com/office/powerpoint/2010/main" xmlns:p15="http://schemas.microsoft.com/office/powerpoint/2012/main" xmlns:ahyp="http://schemas.microsoft.com/office/drawing/2018/hyperlinkcolor">
   <p:cSld>
     <p:spTree>
@@ -10618,7 +10775,7 @@
 </p:sld>
 </file>
 
-<file path=ppt/slides/slide14.xml><?xml version="1.0" encoding="utf-8"?>
+<file path=ppt/slides/slide15.xml><?xml version="1.0" encoding="utf-8"?>
 <p:sld xmlns:a="http://schemas.openxmlformats.org/drawingml/2006/main" xmlns:r="http://schemas.openxmlformats.org/officeDocument/2006/relationships" xmlns:mc="http://schemas.openxmlformats.org/markup-compatibility/2006" xmlns:mv="urn:schemas-microsoft-com:mac:vml" xmlns:p="http://schemas.openxmlformats.org/presentationml/2006/main" xmlns:c="http://schemas.openxmlformats.org/drawingml/2006/chart" xmlns:dgm="http://schemas.openxmlformats.org/drawingml/2006/diagram" xmlns:o="urn:schemas-microsoft-com:office:office" xmlns:v="urn:schemas-microsoft-com:vml" xmlns:pvml="urn:schemas-microsoft-com:office:powerpoint" xmlns:com="http://schemas.openxmlformats.org/drawingml/2006/compatibility" xmlns:p14="http://schemas.microsoft.com/office/powerpoint/2010/main" xmlns:p15="http://schemas.microsoft.com/office/powerpoint/2012/main" xmlns:ahyp="http://schemas.microsoft.com/office/drawing/2018/hyperlinkcolor">
   <p:cSld>
     <p:spTree>
@@ -10933,7 +11090,7 @@
 </p:sld>
 </file>
 
-<file path=ppt/slides/slide15.xml><?xml version="1.0" encoding="utf-8"?>
+<file path=ppt/slides/slide16.xml><?xml version="1.0" encoding="utf-8"?>
 <p:sld xmlns:a="http://schemas.openxmlformats.org/drawingml/2006/main" xmlns:r="http://schemas.openxmlformats.org/officeDocument/2006/relationships" xmlns:mc="http://schemas.openxmlformats.org/markup-compatibility/2006" xmlns:mv="urn:schemas-microsoft-com:mac:vml" xmlns:p="http://schemas.openxmlformats.org/presentationml/2006/main" xmlns:c="http://schemas.openxmlformats.org/drawingml/2006/chart" xmlns:dgm="http://schemas.openxmlformats.org/drawingml/2006/diagram" xmlns:o="urn:schemas-microsoft-com:office:office" xmlns:v="urn:schemas-microsoft-com:vml" xmlns:pvml="urn:schemas-microsoft-com:office:powerpoint" xmlns:com="http://schemas.openxmlformats.org/drawingml/2006/compatibility" xmlns:p14="http://schemas.microsoft.com/office/powerpoint/2010/main" xmlns:p15="http://schemas.microsoft.com/office/powerpoint/2012/main" xmlns:ahyp="http://schemas.microsoft.com/office/drawing/2018/hyperlinkcolor">
   <p:cSld>
     <p:spTree>
@@ -11070,7 +11227,7 @@
 </p:sld>
 </file>
 
-<file path=ppt/slides/slide16.xml><?xml version="1.0" encoding="utf-8"?>
+<file path=ppt/slides/slide17.xml><?xml version="1.0" encoding="utf-8"?>
 <p:sld xmlns:a="http://schemas.openxmlformats.org/drawingml/2006/main" xmlns:r="http://schemas.openxmlformats.org/officeDocument/2006/relationships" xmlns:mc="http://schemas.openxmlformats.org/markup-compatibility/2006" xmlns:mv="urn:schemas-microsoft-com:mac:vml" xmlns:p="http://schemas.openxmlformats.org/presentationml/2006/main" xmlns:c="http://schemas.openxmlformats.org/drawingml/2006/chart" xmlns:dgm="http://schemas.openxmlformats.org/drawingml/2006/diagram" xmlns:o="urn:schemas-microsoft-com:office:office" xmlns:v="urn:schemas-microsoft-com:vml" xmlns:pvml="urn:schemas-microsoft-com:office:powerpoint" xmlns:com="http://schemas.openxmlformats.org/drawingml/2006/compatibility" xmlns:p14="http://schemas.microsoft.com/office/powerpoint/2010/main" xmlns:p15="http://schemas.microsoft.com/office/powerpoint/2012/main" xmlns:ahyp="http://schemas.microsoft.com/office/drawing/2018/hyperlinkcolor">
   <p:cSld>
     <p:spTree>
@@ -11598,7 +11755,7 @@
 </p:sld>
 </file>
 
-<file path=ppt/slides/slide17.xml><?xml version="1.0" encoding="utf-8"?>
+<file path=ppt/slides/slide18.xml><?xml version="1.0" encoding="utf-8"?>
 <p:sld xmlns:a="http://schemas.openxmlformats.org/drawingml/2006/main" xmlns:r="http://schemas.openxmlformats.org/officeDocument/2006/relationships" xmlns:mc="http://schemas.openxmlformats.org/markup-compatibility/2006" xmlns:mv="urn:schemas-microsoft-com:mac:vml" xmlns:p="http://schemas.openxmlformats.org/presentationml/2006/main" xmlns:c="http://schemas.openxmlformats.org/drawingml/2006/chart" xmlns:dgm="http://schemas.openxmlformats.org/drawingml/2006/diagram" xmlns:o="urn:schemas-microsoft-com:office:office" xmlns:v="urn:schemas-microsoft-com:vml" xmlns:pvml="urn:schemas-microsoft-com:office:powerpoint" xmlns:com="http://schemas.openxmlformats.org/drawingml/2006/compatibility" xmlns:p14="http://schemas.microsoft.com/office/powerpoint/2010/main" xmlns:p15="http://schemas.microsoft.com/office/powerpoint/2012/main" xmlns:ahyp="http://schemas.microsoft.com/office/drawing/2018/hyperlinkcolor">
   <p:cSld>
     <p:spTree>
@@ -11776,7 +11933,7 @@
 </p:sld>
 </file>
 
-<file path=ppt/slides/slide18.xml><?xml version="1.0" encoding="utf-8"?>
+<file path=ppt/slides/slide19.xml><?xml version="1.0" encoding="utf-8"?>
 <p:sld xmlns:a="http://schemas.openxmlformats.org/drawingml/2006/main" xmlns:r="http://schemas.openxmlformats.org/officeDocument/2006/relationships" xmlns:mc="http://schemas.openxmlformats.org/markup-compatibility/2006" xmlns:mv="urn:schemas-microsoft-com:mac:vml" xmlns:p="http://schemas.openxmlformats.org/presentationml/2006/main" xmlns:c="http://schemas.openxmlformats.org/drawingml/2006/chart" xmlns:dgm="http://schemas.openxmlformats.org/drawingml/2006/diagram" xmlns:o="urn:schemas-microsoft-com:office:office" xmlns:v="urn:schemas-microsoft-com:vml" xmlns:pvml="urn:schemas-microsoft-com:office:powerpoint" xmlns:com="http://schemas.openxmlformats.org/drawingml/2006/compatibility" xmlns:p14="http://schemas.microsoft.com/office/powerpoint/2010/main" xmlns:p15="http://schemas.microsoft.com/office/powerpoint/2012/main" xmlns:ahyp="http://schemas.microsoft.com/office/drawing/2018/hyperlinkcolor">
   <p:cSld>
     <p:spTree>
@@ -12946,7 +13103,120 @@
 </p:sld>
 </file>
 
-<file path=ppt/slides/slide19.xml><?xml version="1.0" encoding="utf-8"?>
+<file path=ppt/slides/slide2.xml><?xml version="1.0" encoding="utf-8"?>
+<p:sld xmlns:a="http://schemas.openxmlformats.org/drawingml/2006/main" xmlns:p="http://schemas.openxmlformats.org/presentationml/2006/main" xmlns:r="http://schemas.openxmlformats.org/officeDocument/2006/relationships">
+  <p:cSld>
+    <p:spTree>
+      <p:nvGrpSpPr>
+        <p:cNvPr id="1" name=""/>
+        <p:cNvGrpSpPr/>
+        <p:nvPr/>
+      </p:nvGrpSpPr>
+      <p:grpSpPr/>
+      <p:sp>
+        <p:nvSpPr>
+          <p:cNvPr id="2" name="Title 1"/>
+          <p:cNvSpPr>
+            <a:spLocks noGrp="1"/>
+          </p:cNvSpPr>
+          <p:nvPr>
+            <p:ph type="title"/>
+          </p:nvPr>
+        </p:nvSpPr>
+        <p:spPr>
+          <a:xfrm>
+            <a:off x="311700" y="195615"/>
+            <a:ext cx="8520600" cy="572700"/>
+          </a:xfrm>
+        </p:spPr>
+        <p:txBody>
+          <a:bodyPr/>
+          <a:lstStyle/>
+          <a:p>
+            <a:pPr indent="0" lvl="0" marL="0" rtl="0" algn="l">
+              <a:spcBef>
+                <a:spcPts val="0"/>
+              </a:spcBef>
+              <a:spcAft>
+                <a:spcPts val="0"/>
+              </a:spcAft>
+              <a:buNone/>
+            </a:pPr>
+            <a:r>
+              <a:rPr lang="en"/>
+              <a:t>Flappy Bird</a:t>
+            </a:r>
+            <a:endParaRPr/>
+          </a:p>
+        </p:txBody>
+      </p:sp>
+      <p:pic>
+        <p:nvPicPr>
+          <p:cNvPr id="3" name="Picture 2" descr="flappy-bird.png"/>
+          <p:cNvPicPr>
+            <a:picLocks noChangeAspect="1"/>
+          </p:cNvPicPr>
+          <p:nvPr/>
+        </p:nvPicPr>
+        <p:blipFill>
+          <a:blip r:embed="rId2"/>
+          <a:stretch>
+            <a:fillRect/>
+          </a:stretch>
+        </p:blipFill>
+        <p:spPr>
+          <a:xfrm>
+            <a:off x="3540034" y="960120"/>
+            <a:ext cx="2063931" cy="3657600"/>
+          </a:xfrm>
+          <a:prstGeom prst="rect">
+            <a:avLst/>
+          </a:prstGeom>
+        </p:spPr>
+      </p:pic>
+      <p:sp>
+        <p:nvSpPr>
+          <p:cNvPr id="4" name="TextBox 3"/>
+          <p:cNvSpPr txBox="1"/>
+          <p:nvPr/>
+        </p:nvSpPr>
+        <p:spPr>
+          <a:xfrm>
+            <a:off x="457200" y="4736592"/>
+            <a:ext cx="8229600" cy="274320"/>
+          </a:xfrm>
+          <a:prstGeom prst="rect">
+            <a:avLst/>
+          </a:prstGeom>
+          <a:noFill/>
+        </p:spPr>
+        <p:txBody>
+          <a:bodyPr wrap="square">
+            <a:spAutoFit/>
+          </a:bodyPr>
+          <a:lstStyle/>
+          <a:p>
+            <a:pPr algn="ctr"/>
+            <a:r>
+              <a:rPr sz="900" b="0" i="0">
+                <a:solidFill>
+                  <a:srgbClr val="9AA3AB"/>
+                </a:solidFill>
+              </a:rPr>
+              <a:t>Flappy Bird (dotGears, 2013). Screenshot © dotGears.</a:t>
+            </a:r>
+          </a:p>
+        </p:txBody>
+      </p:sp>
+    </p:spTree>
+  </p:cSld>
+  <p:clrMapOvr>
+    <a:masterClrMapping/>
+  </p:clrMapOvr>
+</p:sld>
+</file>
+
+<file path=ppt/slides/slide20.xml><?xml version="1.0" encoding="utf-8"?>
 <p:sld xmlns:a="http://schemas.openxmlformats.org/drawingml/2006/main" xmlns:r="http://schemas.openxmlformats.org/officeDocument/2006/relationships" xmlns:mc="http://schemas.openxmlformats.org/markup-compatibility/2006" xmlns:mv="urn:schemas-microsoft-com:mac:vml" xmlns:p="http://schemas.openxmlformats.org/presentationml/2006/main" xmlns:c="http://schemas.openxmlformats.org/drawingml/2006/chart" xmlns:dgm="http://schemas.openxmlformats.org/drawingml/2006/diagram" xmlns:o="urn:schemas-microsoft-com:office:office" xmlns:v="urn:schemas-microsoft-com:vml" xmlns:pvml="urn:schemas-microsoft-com:office:powerpoint" xmlns:com="http://schemas.openxmlformats.org/drawingml/2006/compatibility" xmlns:p14="http://schemas.microsoft.com/office/powerpoint/2010/main" xmlns:p15="http://schemas.microsoft.com/office/powerpoint/2012/main" xmlns:ahyp="http://schemas.microsoft.com/office/drawing/2018/hyperlinkcolor">
   <p:cSld>
     <p:spTree>
@@ -13310,96 +13580,7 @@
 </p:sld>
 </file>
 
-<file path=ppt/slides/slide2.xml><?xml version="1.0" encoding="utf-8"?>
-<p:sld xmlns:a="http://schemas.openxmlformats.org/drawingml/2006/main" xmlns:r="http://schemas.openxmlformats.org/officeDocument/2006/relationships" xmlns:mc="http://schemas.openxmlformats.org/markup-compatibility/2006" xmlns:mv="urn:schemas-microsoft-com:mac:vml" xmlns:p="http://schemas.openxmlformats.org/presentationml/2006/main" xmlns:c="http://schemas.openxmlformats.org/drawingml/2006/chart" xmlns:dgm="http://schemas.openxmlformats.org/drawingml/2006/diagram" xmlns:o="urn:schemas-microsoft-com:office:office" xmlns:v="urn:schemas-microsoft-com:vml" xmlns:pvml="urn:schemas-microsoft-com:office:powerpoint" xmlns:com="http://schemas.openxmlformats.org/drawingml/2006/compatibility" xmlns:p14="http://schemas.microsoft.com/office/powerpoint/2010/main" xmlns:p15="http://schemas.microsoft.com/office/powerpoint/2012/main" xmlns:ahyp="http://schemas.microsoft.com/office/drawing/2018/hyperlinkcolor">
-  <p:cSld>
-    <p:spTree>
-      <p:nvGrpSpPr>
-        <p:cNvPr id="44" name="Shape 44"/>
-        <p:cNvGrpSpPr/>
-        <p:nvPr/>
-      </p:nvGrpSpPr>
-      <p:grpSpPr>
-        <a:xfrm>
-          <a:off x="0" y="0"/>
-          <a:ext cx="0" cy="0"/>
-          <a:chOff x="0" y="0"/>
-          <a:chExt cx="0" cy="0"/>
-        </a:xfrm>
-      </p:grpSpPr>
-      <p:sp>
-        <p:nvSpPr>
-          <p:cNvPr id="45" name="Google Shape;45;p10"/>
-          <p:cNvSpPr txBox="1"/>
-          <p:nvPr>
-            <p:ph type="title"/>
-          </p:nvPr>
-        </p:nvSpPr>
-        <p:spPr>
-          <a:xfrm>
-            <a:off x="311700" y="195615"/>
-            <a:ext cx="8520600" cy="572700"/>
-          </a:xfrm>
-          <a:prstGeom prst="rect">
-            <a:avLst/>
-          </a:prstGeom>
-        </p:spPr>
-        <p:txBody>
-          <a:bodyPr anchorCtr="0" anchor="t" bIns="91425" lIns="91425" spcFirstLastPara="1" rIns="91425" wrap="square" tIns="91425">
-            <a:normAutofit fontScale="90000"/>
-          </a:bodyPr>
-          <a:lstStyle/>
-          <a:p>
-            <a:pPr indent="0" lvl="0" marL="0" rtl="0" algn="l">
-              <a:spcBef>
-                <a:spcPts val="0"/>
-              </a:spcBef>
-              <a:spcAft>
-                <a:spcPts val="0"/>
-              </a:spcAft>
-              <a:buNone/>
-            </a:pPr>
-            <a:r>
-              <a:rPr lang="en"/>
-              <a:t>Today’s Goal</a:t>
-            </a:r>
-            <a:endParaRPr/>
-          </a:p>
-        </p:txBody>
-      </p:sp>
-      <p:pic>
-        <p:nvPicPr>
-          <p:cNvPr id="46" name="Picture 46" descr="gif-flappy.gif"/>
-          <p:cNvPicPr>
-            <a:picLocks noChangeAspect="1"/>
-          </p:cNvPicPr>
-          <p:nvPr/>
-        </p:nvPicPr>
-        <p:blipFill>
-          <a:blip r:embed="rId4"/>
-          <a:stretch>
-            <a:fillRect/>
-          </a:stretch>
-        </p:blipFill>
-        <p:spPr>
-          <a:xfrm>
-            <a:off x="1566089" y="1322900"/>
-            <a:ext cx="6011824" cy="3381651"/>
-          </a:xfrm>
-          <a:prstGeom prst="rect">
-            <a:avLst/>
-          </a:prstGeom>
-        </p:spPr>
-      </p:pic>
-    </p:spTree>
-  </p:cSld>
-  <p:clrMapOvr>
-    <a:masterClrMapping/>
-  </p:clrMapOvr>
-</p:sld>
-</file>
-
-<file path=ppt/slides/slide20.xml><?xml version="1.0" encoding="utf-8"?>
+<file path=ppt/slides/slide21.xml><?xml version="1.0" encoding="utf-8"?>
 <p:sld xmlns:a="http://schemas.openxmlformats.org/drawingml/2006/main" xmlns:r="http://schemas.openxmlformats.org/officeDocument/2006/relationships" xmlns:mc="http://schemas.openxmlformats.org/markup-compatibility/2006" xmlns:mv="urn:schemas-microsoft-com:mac:vml" xmlns:p="http://schemas.openxmlformats.org/presentationml/2006/main" xmlns:c="http://schemas.openxmlformats.org/drawingml/2006/chart" xmlns:dgm="http://schemas.openxmlformats.org/drawingml/2006/diagram" xmlns:o="urn:schemas-microsoft-com:office:office" xmlns:v="urn:schemas-microsoft-com:vml" xmlns:pvml="urn:schemas-microsoft-com:office:powerpoint" xmlns:com="http://schemas.openxmlformats.org/drawingml/2006/compatibility" xmlns:p14="http://schemas.microsoft.com/office/powerpoint/2010/main" xmlns:p15="http://schemas.microsoft.com/office/powerpoint/2012/main" xmlns:ahyp="http://schemas.microsoft.com/office/drawing/2018/hyperlinkcolor">
   <p:cSld>
     <p:spTree>
@@ -14532,7 +14713,7 @@
 </p:sld>
 </file>
 
-<file path=ppt/slides/slide21.xml><?xml version="1.0" encoding="utf-8"?>
+<file path=ppt/slides/slide22.xml><?xml version="1.0" encoding="utf-8"?>
 <p:sld xmlns:a="http://schemas.openxmlformats.org/drawingml/2006/main" xmlns:r="http://schemas.openxmlformats.org/officeDocument/2006/relationships" xmlns:mc="http://schemas.openxmlformats.org/markup-compatibility/2006" xmlns:mv="urn:schemas-microsoft-com:mac:vml" xmlns:p="http://schemas.openxmlformats.org/presentationml/2006/main" xmlns:c="http://schemas.openxmlformats.org/drawingml/2006/chart" xmlns:dgm="http://schemas.openxmlformats.org/drawingml/2006/diagram" xmlns:o="urn:schemas-microsoft-com:office:office" xmlns:v="urn:schemas-microsoft-com:vml" xmlns:pvml="urn:schemas-microsoft-com:office:powerpoint" xmlns:com="http://schemas.openxmlformats.org/drawingml/2006/compatibility" xmlns:p14="http://schemas.microsoft.com/office/powerpoint/2010/main" xmlns:p15="http://schemas.microsoft.com/office/powerpoint/2012/main" xmlns:ahyp="http://schemas.microsoft.com/office/drawing/2018/hyperlinkcolor">
   <p:cSld>
     <p:spTree>
@@ -14625,7 +14806,7 @@
 </p:sld>
 </file>
 
-<file path=ppt/slides/slide22.xml><?xml version="1.0" encoding="utf-8"?>
+<file path=ppt/slides/slide23.xml><?xml version="1.0" encoding="utf-8"?>
 <p:sld xmlns:a="http://schemas.openxmlformats.org/drawingml/2006/main" xmlns:r="http://schemas.openxmlformats.org/officeDocument/2006/relationships" xmlns:mc="http://schemas.openxmlformats.org/markup-compatibility/2006" xmlns:mv="urn:schemas-microsoft-com:mac:vml" xmlns:p="http://schemas.openxmlformats.org/presentationml/2006/main" xmlns:c="http://schemas.openxmlformats.org/drawingml/2006/chart" xmlns:dgm="http://schemas.openxmlformats.org/drawingml/2006/diagram" xmlns:o="urn:schemas-microsoft-com:office:office" xmlns:v="urn:schemas-microsoft-com:vml" xmlns:pvml="urn:schemas-microsoft-com:office:powerpoint" xmlns:com="http://schemas.openxmlformats.org/drawingml/2006/compatibility" xmlns:p14="http://schemas.microsoft.com/office/powerpoint/2010/main" xmlns:p15="http://schemas.microsoft.com/office/powerpoint/2012/main" xmlns:ahyp="http://schemas.microsoft.com/office/drawing/2018/hyperlinkcolor">
   <p:cSld>
     <p:spTree>
@@ -15447,7 +15628,7 @@
 </p:sld>
 </file>
 
-<file path=ppt/slides/slide23.xml><?xml version="1.0" encoding="utf-8"?>
+<file path=ppt/slides/slide24.xml><?xml version="1.0" encoding="utf-8"?>
 <p:sld xmlns:a="http://schemas.openxmlformats.org/drawingml/2006/main" xmlns:r="http://schemas.openxmlformats.org/officeDocument/2006/relationships" xmlns:mc="http://schemas.openxmlformats.org/markup-compatibility/2006" xmlns:mv="urn:schemas-microsoft-com:mac:vml" xmlns:p="http://schemas.openxmlformats.org/presentationml/2006/main" xmlns:c="http://schemas.openxmlformats.org/drawingml/2006/chart" xmlns:dgm="http://schemas.openxmlformats.org/drawingml/2006/diagram" xmlns:o="urn:schemas-microsoft-com:office:office" xmlns:v="urn:schemas-microsoft-com:vml" xmlns:pvml="urn:schemas-microsoft-com:office:powerpoint" xmlns:com="http://schemas.openxmlformats.org/drawingml/2006/compatibility" xmlns:p14="http://schemas.microsoft.com/office/powerpoint/2010/main" xmlns:p15="http://schemas.microsoft.com/office/powerpoint/2012/main" xmlns:ahyp="http://schemas.microsoft.com/office/drawing/2018/hyperlinkcolor">
   <p:cSld>
     <p:spTree>
@@ -15496,7 +15677,7 @@
 </p:sld>
 </file>
 
-<file path=ppt/slides/slide24.xml><?xml version="1.0" encoding="utf-8"?>
+<file path=ppt/slides/slide25.xml><?xml version="1.0" encoding="utf-8"?>
 <p:sld xmlns:a="http://schemas.openxmlformats.org/drawingml/2006/main" xmlns:r="http://schemas.openxmlformats.org/officeDocument/2006/relationships" xmlns:mc="http://schemas.openxmlformats.org/markup-compatibility/2006" xmlns:mv="urn:schemas-microsoft-com:mac:vml" xmlns:p="http://schemas.openxmlformats.org/presentationml/2006/main" xmlns:c="http://schemas.openxmlformats.org/drawingml/2006/chart" xmlns:dgm="http://schemas.openxmlformats.org/drawingml/2006/diagram" xmlns:o="urn:schemas-microsoft-com:office:office" xmlns:v="urn:schemas-microsoft-com:vml" xmlns:pvml="urn:schemas-microsoft-com:office:powerpoint" xmlns:com="http://schemas.openxmlformats.org/drawingml/2006/compatibility" xmlns:p14="http://schemas.microsoft.com/office/powerpoint/2010/main" xmlns:p15="http://schemas.microsoft.com/office/powerpoint/2012/main" xmlns:ahyp="http://schemas.microsoft.com/office/drawing/2018/hyperlinkcolor">
   <p:cSld>
     <p:spTree>
@@ -16612,7 +16793,7 @@
 </p:sld>
 </file>
 
-<file path=ppt/slides/slide25.xml><?xml version="1.0" encoding="utf-8"?>
+<file path=ppt/slides/slide26.xml><?xml version="1.0" encoding="utf-8"?>
 <p:sld xmlns:a="http://schemas.openxmlformats.org/drawingml/2006/main" xmlns:r="http://schemas.openxmlformats.org/officeDocument/2006/relationships" xmlns:mc="http://schemas.openxmlformats.org/markup-compatibility/2006" xmlns:mv="urn:schemas-microsoft-com:mac:vml" xmlns:p="http://schemas.openxmlformats.org/presentationml/2006/main" xmlns:c="http://schemas.openxmlformats.org/drawingml/2006/chart" xmlns:dgm="http://schemas.openxmlformats.org/drawingml/2006/diagram" xmlns:o="urn:schemas-microsoft-com:office:office" xmlns:v="urn:schemas-microsoft-com:vml" xmlns:pvml="urn:schemas-microsoft-com:office:powerpoint" xmlns:com="http://schemas.openxmlformats.org/drawingml/2006/compatibility" xmlns:p14="http://schemas.microsoft.com/office/powerpoint/2010/main" xmlns:p15="http://schemas.microsoft.com/office/powerpoint/2012/main" xmlns:ahyp="http://schemas.microsoft.com/office/drawing/2018/hyperlinkcolor">
   <p:cSld>
     <p:spTree>
@@ -16993,7 +17174,7 @@
 </p:sld>
 </file>
 
-<file path=ppt/slides/slide26.xml><?xml version="1.0" encoding="utf-8"?>
+<file path=ppt/slides/slide27.xml><?xml version="1.0" encoding="utf-8"?>
 <p:sld xmlns:a="http://schemas.openxmlformats.org/drawingml/2006/main" xmlns:r="http://schemas.openxmlformats.org/officeDocument/2006/relationships" xmlns:mc="http://schemas.openxmlformats.org/markup-compatibility/2006" xmlns:mv="urn:schemas-microsoft-com:mac:vml" xmlns:p="http://schemas.openxmlformats.org/presentationml/2006/main" xmlns:c="http://schemas.openxmlformats.org/drawingml/2006/chart" xmlns:dgm="http://schemas.openxmlformats.org/drawingml/2006/diagram" xmlns:o="urn:schemas-microsoft-com:office:office" xmlns:v="urn:schemas-microsoft-com:vml" xmlns:pvml="urn:schemas-microsoft-com:office:powerpoint" xmlns:com="http://schemas.openxmlformats.org/drawingml/2006/compatibility" xmlns:p14="http://schemas.microsoft.com/office/powerpoint/2010/main" xmlns:p15="http://schemas.microsoft.com/office/powerpoint/2012/main" xmlns:ahyp="http://schemas.microsoft.com/office/drawing/2018/hyperlinkcolor">
   <p:cSld>
     <p:spTree>
@@ -17570,7 +17751,7 @@
 </p:sld>
 </file>
 
-<file path=ppt/slides/slide27.xml><?xml version="1.0" encoding="utf-8"?>
+<file path=ppt/slides/slide28.xml><?xml version="1.0" encoding="utf-8"?>
 <p:sld xmlns:a="http://schemas.openxmlformats.org/drawingml/2006/main" xmlns:r="http://schemas.openxmlformats.org/officeDocument/2006/relationships" xmlns:mc="http://schemas.openxmlformats.org/markup-compatibility/2006" xmlns:mv="urn:schemas-microsoft-com:mac:vml" xmlns:p="http://schemas.openxmlformats.org/presentationml/2006/main" xmlns:c="http://schemas.openxmlformats.org/drawingml/2006/chart" xmlns:dgm="http://schemas.openxmlformats.org/drawingml/2006/diagram" xmlns:o="urn:schemas-microsoft-com:office:office" xmlns:v="urn:schemas-microsoft-com:vml" xmlns:pvml="urn:schemas-microsoft-com:office:powerpoint" xmlns:com="http://schemas.openxmlformats.org/drawingml/2006/compatibility" xmlns:p14="http://schemas.microsoft.com/office/powerpoint/2010/main" xmlns:p15="http://schemas.microsoft.com/office/powerpoint/2012/main" xmlns:ahyp="http://schemas.microsoft.com/office/drawing/2018/hyperlinkcolor">
   <p:cSld>
     <p:spTree>
@@ -17821,7 +18002,7 @@
 </p:sld>
 </file>
 
-<file path=ppt/slides/slide28.xml><?xml version="1.0" encoding="utf-8"?>
+<file path=ppt/slides/slide29.xml><?xml version="1.0" encoding="utf-8"?>
 <p:sld xmlns:a="http://schemas.openxmlformats.org/drawingml/2006/main" xmlns:r="http://schemas.openxmlformats.org/officeDocument/2006/relationships" xmlns:mc="http://schemas.openxmlformats.org/markup-compatibility/2006" xmlns:mv="urn:schemas-microsoft-com:mac:vml" xmlns:p="http://schemas.openxmlformats.org/presentationml/2006/main" xmlns:c="http://schemas.openxmlformats.org/drawingml/2006/chart" xmlns:dgm="http://schemas.openxmlformats.org/drawingml/2006/diagram" xmlns:o="urn:schemas-microsoft-com:office:office" xmlns:v="urn:schemas-microsoft-com:vml" xmlns:pvml="urn:schemas-microsoft-com:office:powerpoint" xmlns:com="http://schemas.openxmlformats.org/drawingml/2006/compatibility" xmlns:p14="http://schemas.microsoft.com/office/powerpoint/2010/main" xmlns:p15="http://schemas.microsoft.com/office/powerpoint/2012/main" xmlns:ahyp="http://schemas.microsoft.com/office/drawing/2018/hyperlinkcolor">
   <p:cSld>
     <p:spTree>
@@ -17914,7 +18095,96 @@
 </p:sld>
 </file>
 
-<file path=ppt/slides/slide29.xml><?xml version="1.0" encoding="utf-8"?>
+<file path=ppt/slides/slide3.xml><?xml version="1.0" encoding="utf-8"?>
+<p:sld xmlns:a="http://schemas.openxmlformats.org/drawingml/2006/main" xmlns:r="http://schemas.openxmlformats.org/officeDocument/2006/relationships" xmlns:mc="http://schemas.openxmlformats.org/markup-compatibility/2006" xmlns:mv="urn:schemas-microsoft-com:mac:vml" xmlns:p="http://schemas.openxmlformats.org/presentationml/2006/main" xmlns:c="http://schemas.openxmlformats.org/drawingml/2006/chart" xmlns:dgm="http://schemas.openxmlformats.org/drawingml/2006/diagram" xmlns:o="urn:schemas-microsoft-com:office:office" xmlns:v="urn:schemas-microsoft-com:vml" xmlns:pvml="urn:schemas-microsoft-com:office:powerpoint" xmlns:com="http://schemas.openxmlformats.org/drawingml/2006/compatibility" xmlns:p14="http://schemas.microsoft.com/office/powerpoint/2010/main" xmlns:p15="http://schemas.microsoft.com/office/powerpoint/2012/main" xmlns:ahyp="http://schemas.microsoft.com/office/drawing/2018/hyperlinkcolor">
+  <p:cSld>
+    <p:spTree>
+      <p:nvGrpSpPr>
+        <p:cNvPr id="44" name="Shape 44"/>
+        <p:cNvGrpSpPr/>
+        <p:nvPr/>
+      </p:nvGrpSpPr>
+      <p:grpSpPr>
+        <a:xfrm>
+          <a:off x="0" y="0"/>
+          <a:ext cx="0" cy="0"/>
+          <a:chOff x="0" y="0"/>
+          <a:chExt cx="0" cy="0"/>
+        </a:xfrm>
+      </p:grpSpPr>
+      <p:sp>
+        <p:nvSpPr>
+          <p:cNvPr id="45" name="Google Shape;45;p10"/>
+          <p:cNvSpPr txBox="1"/>
+          <p:nvPr>
+            <p:ph type="title"/>
+          </p:nvPr>
+        </p:nvSpPr>
+        <p:spPr>
+          <a:xfrm>
+            <a:off x="311700" y="195615"/>
+            <a:ext cx="8520600" cy="572700"/>
+          </a:xfrm>
+          <a:prstGeom prst="rect">
+            <a:avLst/>
+          </a:prstGeom>
+        </p:spPr>
+        <p:txBody>
+          <a:bodyPr anchorCtr="0" anchor="t" bIns="91425" lIns="91425" spcFirstLastPara="1" rIns="91425" wrap="square" tIns="91425">
+            <a:normAutofit fontScale="90000"/>
+          </a:bodyPr>
+          <a:lstStyle/>
+          <a:p>
+            <a:pPr indent="0" lvl="0" marL="0" rtl="0" algn="l">
+              <a:spcBef>
+                <a:spcPts val="0"/>
+              </a:spcBef>
+              <a:spcAft>
+                <a:spcPts val="0"/>
+              </a:spcAft>
+              <a:buNone/>
+            </a:pPr>
+            <a:r>
+              <a:rPr lang="en"/>
+              <a:t>Today’s Goal</a:t>
+            </a:r>
+            <a:endParaRPr/>
+          </a:p>
+        </p:txBody>
+      </p:sp>
+      <p:pic>
+        <p:nvPicPr>
+          <p:cNvPr id="46" name="Picture 46" descr="gif-flappy.gif"/>
+          <p:cNvPicPr>
+            <a:picLocks noChangeAspect="1"/>
+          </p:cNvPicPr>
+          <p:nvPr/>
+        </p:nvPicPr>
+        <p:blipFill>
+          <a:blip r:embed="rId4"/>
+          <a:stretch>
+            <a:fillRect/>
+          </a:stretch>
+        </p:blipFill>
+        <p:spPr>
+          <a:xfrm>
+            <a:off x="1566089" y="1322900"/>
+            <a:ext cx="6011824" cy="3381651"/>
+          </a:xfrm>
+          <a:prstGeom prst="rect">
+            <a:avLst/>
+          </a:prstGeom>
+        </p:spPr>
+      </p:pic>
+    </p:spTree>
+  </p:cSld>
+  <p:clrMapOvr>
+    <a:masterClrMapping/>
+  </p:clrMapOvr>
+</p:sld>
+</file>
+
+<file path=ppt/slides/slide30.xml><?xml version="1.0" encoding="utf-8"?>
 <p:sld xmlns:a="http://schemas.openxmlformats.org/drawingml/2006/main" xmlns:r="http://schemas.openxmlformats.org/officeDocument/2006/relationships" xmlns:mc="http://schemas.openxmlformats.org/markup-compatibility/2006" xmlns:mv="urn:schemas-microsoft-com:mac:vml" xmlns:p="http://schemas.openxmlformats.org/presentationml/2006/main" xmlns:c="http://schemas.openxmlformats.org/drawingml/2006/chart" xmlns:dgm="http://schemas.openxmlformats.org/drawingml/2006/diagram" xmlns:o="urn:schemas-microsoft-com:office:office" xmlns:v="urn:schemas-microsoft-com:vml" xmlns:pvml="urn:schemas-microsoft-com:office:powerpoint" xmlns:com="http://schemas.openxmlformats.org/drawingml/2006/compatibility" xmlns:p14="http://schemas.microsoft.com/office/powerpoint/2010/main" xmlns:p15="http://schemas.microsoft.com/office/powerpoint/2012/main" xmlns:ahyp="http://schemas.microsoft.com/office/drawing/2018/hyperlinkcolor">
   <p:cSld>
     <p:spTree>
@@ -17967,654 +18237,7 @@
 </p:sld>
 </file>
 
-<file path=ppt/slides/slide3.xml><?xml version="1.0" encoding="utf-8"?>
-<p:sld xmlns:a="http://schemas.openxmlformats.org/drawingml/2006/main" xmlns:r="http://schemas.openxmlformats.org/officeDocument/2006/relationships" xmlns:mc="http://schemas.openxmlformats.org/markup-compatibility/2006" xmlns:mv="urn:schemas-microsoft-com:mac:vml" xmlns:p="http://schemas.openxmlformats.org/presentationml/2006/main" xmlns:c="http://schemas.openxmlformats.org/drawingml/2006/chart" xmlns:dgm="http://schemas.openxmlformats.org/drawingml/2006/diagram" xmlns:o="urn:schemas-microsoft-com:office:office" xmlns:v="urn:schemas-microsoft-com:vml" xmlns:pvml="urn:schemas-microsoft-com:office:powerpoint" xmlns:com="http://schemas.openxmlformats.org/drawingml/2006/compatibility" xmlns:p14="http://schemas.microsoft.com/office/powerpoint/2010/main" xmlns:p15="http://schemas.microsoft.com/office/powerpoint/2012/main" xmlns:ahyp="http://schemas.microsoft.com/office/drawing/2018/hyperlinkcolor">
-  <p:cSld>
-    <p:spTree>
-      <p:nvGrpSpPr>
-        <p:cNvPr id="50" name="Shape 50"/>
-        <p:cNvGrpSpPr/>
-        <p:nvPr/>
-      </p:nvGrpSpPr>
-      <p:grpSpPr>
-        <a:xfrm>
-          <a:off x="0" y="0"/>
-          <a:ext cx="0" cy="0"/>
-          <a:chOff x="0" y="0"/>
-          <a:chExt cx="0" cy="0"/>
-        </a:xfrm>
-      </p:grpSpPr>
-      <p:sp>
-        <p:nvSpPr>
-          <p:cNvPr id="51" name="Google Shape;51;p11"/>
-          <p:cNvSpPr txBox="1"/>
-          <p:nvPr>
-            <p:ph type="title"/>
-          </p:nvPr>
-        </p:nvSpPr>
-        <p:spPr>
-          <a:xfrm>
-            <a:off x="311700" y="195615"/>
-            <a:ext cx="8520600" cy="572700"/>
-          </a:xfrm>
-          <a:prstGeom prst="rect">
-            <a:avLst/>
-          </a:prstGeom>
-        </p:spPr>
-        <p:txBody>
-          <a:bodyPr anchorCtr="0" anchor="t" bIns="91425" lIns="91425" spcFirstLastPara="1" rIns="91425" wrap="square" tIns="91425">
-            <a:normAutofit fontScale="90000"/>
-          </a:bodyPr>
-          <a:lstStyle/>
-          <a:p>
-            <a:pPr indent="0" lvl="0" marL="0" rtl="0" algn="l">
-              <a:spcBef>
-                <a:spcPts val="0"/>
-              </a:spcBef>
-              <a:spcAft>
-                <a:spcPts val="0"/>
-              </a:spcAft>
-              <a:buNone/>
-            </a:pPr>
-            <a:r>
-              <a:rPr lang="en"/>
-              <a:t>Today’s Topics</a:t>
-            </a:r>
-            <a:endParaRPr/>
-          </a:p>
-        </p:txBody>
-      </p:sp>
-      <p:sp>
-        <p:nvSpPr>
-          <p:cNvPr id="52" name="Google Shape;52;p11"/>
-          <p:cNvSpPr txBox="1"/>
-          <p:nvPr>
-            <p:ph idx="1" type="body"/>
-          </p:nvPr>
-        </p:nvSpPr>
-        <p:spPr>
-          <a:xfrm>
-            <a:off x="311700" y="885950"/>
-            <a:ext cx="8520600" cy="4023300"/>
-          </a:xfrm>
-          <a:prstGeom prst="rect">
-            <a:avLst/>
-          </a:prstGeom>
-        </p:spPr>
-        <p:txBody>
-          <a:bodyPr anchorCtr="0" anchor="t" bIns="91425" lIns="91425" spcFirstLastPara="1" rIns="91425" wrap="square" tIns="91425">
-            <a:normAutofit/>
-          </a:bodyPr>
-          <a:lstStyle/>
-          <a:p>
-            <a:pPr indent="-330200" lvl="0" marL="457200" rtl="0" algn="l">
-              <a:spcBef>
-                <a:spcPts val="0"/>
-              </a:spcBef>
-              <a:spcAft>
-                <a:spcPts val="0"/>
-              </a:spcAft>
-              <a:buSzPts val="1600"/>
-              <a:buChar char="●"/>
-            </a:pPr>
-            <a:r>
-              <a:rPr lang="en"/>
-              <a:t>Game Architecture</a:t>
-            </a:r>
-            <a:endParaRPr/>
-          </a:p>
-          <a:p>
-            <a:pPr indent="-330200" lvl="0" marL="457200" rtl="0" algn="l">
-              <a:spcBef>
-                <a:spcPts val="0"/>
-              </a:spcBef>
-              <a:spcAft>
-                <a:spcPts val="0"/>
-              </a:spcAft>
-              <a:buSzPts val="1600"/>
-              <a:buChar char="●"/>
-            </a:pPr>
-            <a:r>
-              <a:rPr lang="en"/>
-              <a:t>Class Libraries</a:t>
-            </a:r>
-            <a:endParaRPr/>
-          </a:p>
-          <a:p>
-            <a:pPr indent="-330200" lvl="0" marL="457200" rtl="0" algn="l">
-              <a:spcBef>
-                <a:spcPts val="0"/>
-              </a:spcBef>
-              <a:spcAft>
-                <a:spcPts val="0"/>
-              </a:spcAft>
-              <a:buSzPts val="1600"/>
-              <a:buChar char="●"/>
-            </a:pPr>
-            <a:r>
-              <a:rPr lang="en"/>
-              <a:t>Images</a:t>
-            </a:r>
-            <a:endParaRPr/>
-          </a:p>
-          <a:p>
-            <a:pPr indent="-330200" lvl="0" marL="457200" rtl="0" algn="l">
-              <a:spcBef>
-                <a:spcPts val="0"/>
-              </a:spcBef>
-              <a:spcAft>
-                <a:spcPts val="0"/>
-              </a:spcAft>
-              <a:buSzPts val="1600"/>
-              <a:buChar char="●"/>
-            </a:pPr>
-            <a:r>
-              <a:rPr lang="en"/>
-              <a:t>Infinite Scrolling</a:t>
-            </a:r>
-            <a:endParaRPr/>
-          </a:p>
-          <a:p>
-            <a:pPr indent="-330200" lvl="0" marL="457200" rtl="0" algn="l">
-              <a:spcBef>
-                <a:spcPts val="0"/>
-              </a:spcBef>
-              <a:spcAft>
-                <a:spcPts val="0"/>
-              </a:spcAft>
-              <a:buSzPts val="1600"/>
-              <a:buChar char="●"/>
-            </a:pPr>
-            <a:r>
-              <a:rPr lang="en"/>
-              <a:t>Procedural Generation</a:t>
-            </a:r>
-            <a:endParaRPr/>
-          </a:p>
-          <a:p>
-            <a:pPr indent="-330200" lvl="0" marL="457200" rtl="0" algn="l">
-              <a:spcBef>
-                <a:spcPts val="0"/>
-              </a:spcBef>
-              <a:spcAft>
-                <a:spcPts val="0"/>
-              </a:spcAft>
-              <a:buSzPts val="1600"/>
-              <a:buChar char="●"/>
-            </a:pPr>
-            <a:r>
-              <a:rPr lang="en"/>
-              <a:t>Interfaces</a:t>
-            </a:r>
-            <a:endParaRPr/>
-          </a:p>
-          <a:p>
-            <a:pPr indent="-330200" lvl="0" marL="457200" rtl="0" algn="l">
-              <a:spcBef>
-                <a:spcPts val="0"/>
-              </a:spcBef>
-              <a:spcAft>
-                <a:spcPts val="0"/>
-              </a:spcAft>
-              <a:buSzPts val="1600"/>
-              <a:buChar char="●"/>
-            </a:pPr>
-            <a:r>
-              <a:rPr lang="en"/>
-              <a:t>State Machines</a:t>
-            </a:r>
-            <a:endParaRPr/>
-          </a:p>
-          <a:p>
-            <a:pPr indent="-330200" lvl="0" marL="457200" rtl="0" algn="l">
-              <a:spcBef>
-                <a:spcPts val="0"/>
-              </a:spcBef>
-              <a:spcAft>
-                <a:spcPts val="0"/>
-              </a:spcAft>
-              <a:buSzPts val="1600"/>
-              <a:buChar char="●"/>
-            </a:pPr>
-            <a:r>
-              <a:rPr lang="en"/>
-              <a:t>Singleton Pattern</a:t>
-            </a:r>
-            <a:endParaRPr/>
-          </a:p>
-        </p:txBody>
-      </p:sp>
-    </p:spTree>
-  </p:cSld>
-  <p:clrMapOvr>
-    <a:masterClrMapping/>
-  </p:clrMapOvr>
-  <p:timing>
-    <p:tnLst>
-      <p:par>
-        <p:cTn dur="indefinite" nodeType="tmRoot" restart="never">
-          <p:childTnLst>
-            <p:seq concurrent="1" nextAc="seek">
-              <p:cTn dur="indefinite" id="2" nodeType="mainSeq">
-                <p:childTnLst>
-                  <p:par>
-                    <p:cTn fill="hold">
-                      <p:stCondLst>
-                        <p:cond delay="indefinite"/>
-                      </p:stCondLst>
-                      <p:childTnLst>
-                        <p:par>
-                          <p:cTn fill="hold">
-                            <p:stCondLst>
-                              <p:cond delay="0"/>
-                            </p:stCondLst>
-                            <p:childTnLst>
-                              <p:par>
-                                <p:cTn fill="hold" nodeType="clickEffect" presetClass="entr" presetID="1" presetSubtype="0">
-                                  <p:stCondLst>
-                                    <p:cond delay="0"/>
-                                  </p:stCondLst>
-                                  <p:childTnLst>
-                                    <p:set>
-                                      <p:cBhvr>
-                                        <p:cTn dur="1" fill="hold">
-                                          <p:stCondLst>
-                                            <p:cond delay="0"/>
-                                          </p:stCondLst>
-                                        </p:cTn>
-                                        <p:tgtEl>
-                                          <p:spTgt spid="52">
-                                            <p:txEl>
-                                              <p:pRg end="0" st="0"/>
-                                            </p:txEl>
-                                          </p:spTgt>
-                                        </p:tgtEl>
-                                        <p:attrNameLst>
-                                          <p:attrName>style.visibility</p:attrName>
-                                        </p:attrNameLst>
-                                      </p:cBhvr>
-                                      <p:to>
-                                        <p:strVal val="visible"/>
-                                      </p:to>
-                                    </p:set>
-                                  </p:childTnLst>
-                                </p:cTn>
-                              </p:par>
-                            </p:childTnLst>
-                          </p:cTn>
-                        </p:par>
-                      </p:childTnLst>
-                    </p:cTn>
-                  </p:par>
-                  <p:par>
-                    <p:cTn fill="hold">
-                      <p:stCondLst>
-                        <p:cond delay="indefinite"/>
-                      </p:stCondLst>
-                      <p:childTnLst>
-                        <p:par>
-                          <p:cTn fill="hold">
-                            <p:stCondLst>
-                              <p:cond delay="0"/>
-                            </p:stCondLst>
-                            <p:childTnLst>
-                              <p:par>
-                                <p:cTn fill="hold" nodeType="clickEffect" presetClass="entr" presetID="1" presetSubtype="0">
-                                  <p:stCondLst>
-                                    <p:cond delay="0"/>
-                                  </p:stCondLst>
-                                  <p:childTnLst>
-                                    <p:set>
-                                      <p:cBhvr>
-                                        <p:cTn dur="1" fill="hold">
-                                          <p:stCondLst>
-                                            <p:cond delay="0"/>
-                                          </p:stCondLst>
-                                        </p:cTn>
-                                        <p:tgtEl>
-                                          <p:spTgt spid="52">
-                                            <p:txEl>
-                                              <p:pRg end="1" st="1"/>
-                                            </p:txEl>
-                                          </p:spTgt>
-                                        </p:tgtEl>
-                                        <p:attrNameLst>
-                                          <p:attrName>style.visibility</p:attrName>
-                                        </p:attrNameLst>
-                                      </p:cBhvr>
-                                      <p:to>
-                                        <p:strVal val="visible"/>
-                                      </p:to>
-                                    </p:set>
-                                  </p:childTnLst>
-                                </p:cTn>
-                              </p:par>
-                            </p:childTnLst>
-                          </p:cTn>
-                        </p:par>
-                      </p:childTnLst>
-                    </p:cTn>
-                  </p:par>
-                  <p:par>
-                    <p:cTn fill="hold">
-                      <p:stCondLst>
-                        <p:cond delay="indefinite"/>
-                      </p:stCondLst>
-                      <p:childTnLst>
-                        <p:par>
-                          <p:cTn fill="hold">
-                            <p:stCondLst>
-                              <p:cond delay="0"/>
-                            </p:stCondLst>
-                            <p:childTnLst>
-                              <p:par>
-                                <p:cTn fill="hold" nodeType="clickEffect" presetClass="entr" presetID="1" presetSubtype="0">
-                                  <p:stCondLst>
-                                    <p:cond delay="0"/>
-                                  </p:stCondLst>
-                                  <p:childTnLst>
-                                    <p:set>
-                                      <p:cBhvr>
-                                        <p:cTn dur="1" fill="hold">
-                                          <p:stCondLst>
-                                            <p:cond delay="0"/>
-                                          </p:stCondLst>
-                                        </p:cTn>
-                                        <p:tgtEl>
-                                          <p:spTgt spid="52">
-                                            <p:txEl>
-                                              <p:pRg end="2" st="2"/>
-                                            </p:txEl>
-                                          </p:spTgt>
-                                        </p:tgtEl>
-                                        <p:attrNameLst>
-                                          <p:attrName>style.visibility</p:attrName>
-                                        </p:attrNameLst>
-                                      </p:cBhvr>
-                                      <p:to>
-                                        <p:strVal val="visible"/>
-                                      </p:to>
-                                    </p:set>
-                                  </p:childTnLst>
-                                </p:cTn>
-                              </p:par>
-                            </p:childTnLst>
-                          </p:cTn>
-                        </p:par>
-                      </p:childTnLst>
-                    </p:cTn>
-                  </p:par>
-                  <p:par>
-                    <p:cTn fill="hold">
-                      <p:stCondLst>
-                        <p:cond delay="indefinite"/>
-                      </p:stCondLst>
-                      <p:childTnLst>
-                        <p:par>
-                          <p:cTn fill="hold">
-                            <p:stCondLst>
-                              <p:cond delay="0"/>
-                            </p:stCondLst>
-                            <p:childTnLst>
-                              <p:par>
-                                <p:cTn fill="hold" nodeType="clickEffect" presetClass="entr" presetID="1" presetSubtype="0">
-                                  <p:stCondLst>
-                                    <p:cond delay="0"/>
-                                  </p:stCondLst>
-                                  <p:childTnLst>
-                                    <p:set>
-                                      <p:cBhvr>
-                                        <p:cTn dur="1" fill="hold">
-                                          <p:stCondLst>
-                                            <p:cond delay="0"/>
-                                          </p:stCondLst>
-                                        </p:cTn>
-                                        <p:tgtEl>
-                                          <p:spTgt spid="52">
-                                            <p:txEl>
-                                              <p:pRg end="3" st="3"/>
-                                            </p:txEl>
-                                          </p:spTgt>
-                                        </p:tgtEl>
-                                        <p:attrNameLst>
-                                          <p:attrName>style.visibility</p:attrName>
-                                        </p:attrNameLst>
-                                      </p:cBhvr>
-                                      <p:to>
-                                        <p:strVal val="visible"/>
-                                      </p:to>
-                                    </p:set>
-                                  </p:childTnLst>
-                                </p:cTn>
-                              </p:par>
-                            </p:childTnLst>
-                          </p:cTn>
-                        </p:par>
-                      </p:childTnLst>
-                    </p:cTn>
-                  </p:par>
-                  <p:par>
-                    <p:cTn fill="hold">
-                      <p:stCondLst>
-                        <p:cond delay="indefinite"/>
-                      </p:stCondLst>
-                      <p:childTnLst>
-                        <p:par>
-                          <p:cTn fill="hold">
-                            <p:stCondLst>
-                              <p:cond delay="0"/>
-                            </p:stCondLst>
-                            <p:childTnLst>
-                              <p:par>
-                                <p:cTn fill="hold" nodeType="clickEffect" presetClass="entr" presetID="1" presetSubtype="0">
-                                  <p:stCondLst>
-                                    <p:cond delay="0"/>
-                                  </p:stCondLst>
-                                  <p:childTnLst>
-                                    <p:set>
-                                      <p:cBhvr>
-                                        <p:cTn dur="1" fill="hold">
-                                          <p:stCondLst>
-                                            <p:cond delay="0"/>
-                                          </p:stCondLst>
-                                        </p:cTn>
-                                        <p:tgtEl>
-                                          <p:spTgt spid="52">
-                                            <p:txEl>
-                                              <p:pRg end="4" st="4"/>
-                                            </p:txEl>
-                                          </p:spTgt>
-                                        </p:tgtEl>
-                                        <p:attrNameLst>
-                                          <p:attrName>style.visibility</p:attrName>
-                                        </p:attrNameLst>
-                                      </p:cBhvr>
-                                      <p:to>
-                                        <p:strVal val="visible"/>
-                                      </p:to>
-                                    </p:set>
-                                  </p:childTnLst>
-                                </p:cTn>
-                              </p:par>
-                            </p:childTnLst>
-                          </p:cTn>
-                        </p:par>
-                      </p:childTnLst>
-                    </p:cTn>
-                  </p:par>
-                  <p:par>
-                    <p:cTn fill="hold">
-                      <p:stCondLst>
-                        <p:cond delay="indefinite"/>
-                      </p:stCondLst>
-                      <p:childTnLst>
-                        <p:par>
-                          <p:cTn fill="hold">
-                            <p:stCondLst>
-                              <p:cond delay="0"/>
-                            </p:stCondLst>
-                            <p:childTnLst>
-                              <p:par>
-                                <p:cTn fill="hold" nodeType="clickEffect" presetClass="entr" presetID="1" presetSubtype="0">
-                                  <p:stCondLst>
-                                    <p:cond delay="0"/>
-                                  </p:stCondLst>
-                                  <p:childTnLst>
-                                    <p:set>
-                                      <p:cBhvr>
-                                        <p:cTn dur="1" fill="hold">
-                                          <p:stCondLst>
-                                            <p:cond delay="0"/>
-                                          </p:stCondLst>
-                                        </p:cTn>
-                                        <p:tgtEl>
-                                          <p:spTgt spid="52">
-                                            <p:txEl>
-                                              <p:pRg end="5" st="5"/>
-                                            </p:txEl>
-                                          </p:spTgt>
-                                        </p:tgtEl>
-                                        <p:attrNameLst>
-                                          <p:attrName>style.visibility</p:attrName>
-                                        </p:attrNameLst>
-                                      </p:cBhvr>
-                                      <p:to>
-                                        <p:strVal val="visible"/>
-                                      </p:to>
-                                    </p:set>
-                                  </p:childTnLst>
-                                </p:cTn>
-                              </p:par>
-                            </p:childTnLst>
-                          </p:cTn>
-                        </p:par>
-                      </p:childTnLst>
-                    </p:cTn>
-                  </p:par>
-                  <p:par>
-                    <p:cTn fill="hold">
-                      <p:stCondLst>
-                        <p:cond delay="indefinite"/>
-                      </p:stCondLst>
-                      <p:childTnLst>
-                        <p:par>
-                          <p:cTn fill="hold">
-                            <p:stCondLst>
-                              <p:cond delay="0"/>
-                            </p:stCondLst>
-                            <p:childTnLst>
-                              <p:par>
-                                <p:cTn fill="hold" nodeType="clickEffect" presetClass="entr" presetID="1" presetSubtype="0">
-                                  <p:stCondLst>
-                                    <p:cond delay="0"/>
-                                  </p:stCondLst>
-                                  <p:childTnLst>
-                                    <p:set>
-                                      <p:cBhvr>
-                                        <p:cTn dur="1" fill="hold">
-                                          <p:stCondLst>
-                                            <p:cond delay="0"/>
-                                          </p:stCondLst>
-                                        </p:cTn>
-                                        <p:tgtEl>
-                                          <p:spTgt spid="52">
-                                            <p:txEl>
-                                              <p:pRg end="6" st="6"/>
-                                            </p:txEl>
-                                          </p:spTgt>
-                                        </p:tgtEl>
-                                        <p:attrNameLst>
-                                          <p:attrName>style.visibility</p:attrName>
-                                        </p:attrNameLst>
-                                      </p:cBhvr>
-                                      <p:to>
-                                        <p:strVal val="visible"/>
-                                      </p:to>
-                                    </p:set>
-                                  </p:childTnLst>
-                                </p:cTn>
-                              </p:par>
-                            </p:childTnLst>
-                          </p:cTn>
-                        </p:par>
-                      </p:childTnLst>
-                    </p:cTn>
-                  </p:par>
-                  <p:par>
-                    <p:cTn fill="hold">
-                      <p:stCondLst>
-                        <p:cond delay="indefinite"/>
-                      </p:stCondLst>
-                      <p:childTnLst>
-                        <p:par>
-                          <p:cTn fill="hold">
-                            <p:stCondLst>
-                              <p:cond delay="0"/>
-                            </p:stCondLst>
-                            <p:childTnLst>
-                              <p:par>
-                                <p:cTn fill="hold" nodeType="clickEffect" presetClass="entr" presetID="1" presetSubtype="0">
-                                  <p:stCondLst>
-                                    <p:cond delay="0"/>
-                                  </p:stCondLst>
-                                  <p:childTnLst>
-                                    <p:set>
-                                      <p:cBhvr>
-                                        <p:cTn dur="1" fill="hold">
-                                          <p:stCondLst>
-                                            <p:cond delay="0"/>
-                                          </p:stCondLst>
-                                        </p:cTn>
-                                        <p:tgtEl>
-                                          <p:spTgt spid="52">
-                                            <p:txEl>
-                                              <p:pRg end="7" st="7"/>
-                                            </p:txEl>
-                                          </p:spTgt>
-                                        </p:tgtEl>
-                                        <p:attrNameLst>
-                                          <p:attrName>style.visibility</p:attrName>
-                                        </p:attrNameLst>
-                                      </p:cBhvr>
-                                      <p:to>
-                                        <p:strVal val="visible"/>
-                                      </p:to>
-                                    </p:set>
-                                  </p:childTnLst>
-                                </p:cTn>
-                              </p:par>
-                            </p:childTnLst>
-                          </p:cTn>
-                        </p:par>
-                      </p:childTnLst>
-                    </p:cTn>
-                  </p:par>
-                </p:childTnLst>
-              </p:cTn>
-              <p:prevCondLst>
-                <p:cond evt="onPrev">
-                  <p:tgtEl>
-                    <p:sldTgt/>
-                  </p:tgtEl>
-                </p:cond>
-              </p:prevCondLst>
-              <p:nextCondLst>
-                <p:cond evt="onNext">
-                  <p:tgtEl>
-                    <p:sldTgt/>
-                  </p:tgtEl>
-                </p:cond>
-              </p:nextCondLst>
-            </p:seq>
-          </p:childTnLst>
-        </p:cTn>
-      </p:par>
-    </p:tnLst>
-  </p:timing>
-</p:sld>
-</file>
-
-<file path=ppt/slides/slide30.xml><?xml version="1.0" encoding="utf-8"?>
+<file path=ppt/slides/slide31.xml><?xml version="1.0" encoding="utf-8"?>
 <p:sld xmlns:a="http://schemas.openxmlformats.org/drawingml/2006/main" xmlns:r="http://schemas.openxmlformats.org/officeDocument/2006/relationships" xmlns:mc="http://schemas.openxmlformats.org/markup-compatibility/2006" xmlns:mv="urn:schemas-microsoft-com:mac:vml" xmlns:p="http://schemas.openxmlformats.org/presentationml/2006/main" xmlns:c="http://schemas.openxmlformats.org/drawingml/2006/chart" xmlns:dgm="http://schemas.openxmlformats.org/drawingml/2006/diagram" xmlns:o="urn:schemas-microsoft-com:office:office" xmlns:v="urn:schemas-microsoft-com:vml" xmlns:pvml="urn:schemas-microsoft-com:office:powerpoint" xmlns:com="http://schemas.openxmlformats.org/drawingml/2006/compatibility" xmlns:p14="http://schemas.microsoft.com/office/powerpoint/2010/main" xmlns:p15="http://schemas.microsoft.com/office/powerpoint/2012/main" xmlns:ahyp="http://schemas.microsoft.com/office/drawing/2018/hyperlinkcolor">
   <p:cSld>
     <p:spTree>
@@ -20717,7 +20340,7 @@
 </p:sld>
 </file>
 
-<file path=ppt/slides/slide31.xml><?xml version="1.0" encoding="utf-8"?>
+<file path=ppt/slides/slide32.xml><?xml version="1.0" encoding="utf-8"?>
 <p:sld xmlns:a="http://schemas.openxmlformats.org/drawingml/2006/main" xmlns:r="http://schemas.openxmlformats.org/officeDocument/2006/relationships" xmlns:mc="http://schemas.openxmlformats.org/markup-compatibility/2006" xmlns:mv="urn:schemas-microsoft-com:mac:vml" xmlns:p="http://schemas.openxmlformats.org/presentationml/2006/main" xmlns:c="http://schemas.openxmlformats.org/drawingml/2006/chart" xmlns:dgm="http://schemas.openxmlformats.org/drawingml/2006/diagram" xmlns:o="urn:schemas-microsoft-com:office:office" xmlns:v="urn:schemas-microsoft-com:vml" xmlns:pvml="urn:schemas-microsoft-com:office:powerpoint" xmlns:com="http://schemas.openxmlformats.org/drawingml/2006/compatibility" xmlns:p14="http://schemas.microsoft.com/office/powerpoint/2010/main" xmlns:p15="http://schemas.microsoft.com/office/powerpoint/2012/main" xmlns:ahyp="http://schemas.microsoft.com/office/drawing/2018/hyperlinkcolor">
   <p:cSld>
     <p:spTree>
@@ -23371,7 +22994,7 @@
 </p:sld>
 </file>
 
-<file path=ppt/slides/slide32.xml><?xml version="1.0" encoding="utf-8"?>
+<file path=ppt/slides/slide33.xml><?xml version="1.0" encoding="utf-8"?>
 <p:sld xmlns:a="http://schemas.openxmlformats.org/drawingml/2006/main" xmlns:r="http://schemas.openxmlformats.org/officeDocument/2006/relationships" xmlns:mc="http://schemas.openxmlformats.org/markup-compatibility/2006" xmlns:mv="urn:schemas-microsoft-com:mac:vml" xmlns:p="http://schemas.openxmlformats.org/presentationml/2006/main" xmlns:c="http://schemas.openxmlformats.org/drawingml/2006/chart" xmlns:dgm="http://schemas.openxmlformats.org/drawingml/2006/diagram" xmlns:o="urn:schemas-microsoft-com:office:office" xmlns:v="urn:schemas-microsoft-com:vml" xmlns:pvml="urn:schemas-microsoft-com:office:powerpoint" xmlns:com="http://schemas.openxmlformats.org/drawingml/2006/compatibility" xmlns:p14="http://schemas.microsoft.com/office/powerpoint/2010/main" xmlns:p15="http://schemas.microsoft.com/office/powerpoint/2012/main" xmlns:ahyp="http://schemas.microsoft.com/office/drawing/2018/hyperlinkcolor">
   <p:cSld>
     <p:spTree>
@@ -24487,7 +24110,7 @@
 </p:sld>
 </file>
 
-<file path=ppt/slides/slide33.xml><?xml version="1.0" encoding="utf-8"?>
+<file path=ppt/slides/slide34.xml><?xml version="1.0" encoding="utf-8"?>
 <p:sld xmlns:a="http://schemas.openxmlformats.org/drawingml/2006/main" xmlns:r="http://schemas.openxmlformats.org/officeDocument/2006/relationships" xmlns:mc="http://schemas.openxmlformats.org/markup-compatibility/2006" xmlns:mv="urn:schemas-microsoft-com:mac:vml" xmlns:p="http://schemas.openxmlformats.org/presentationml/2006/main" xmlns:c="http://schemas.openxmlformats.org/drawingml/2006/chart" xmlns:dgm="http://schemas.openxmlformats.org/drawingml/2006/diagram" xmlns:o="urn:schemas-microsoft-com:office:office" xmlns:v="urn:schemas-microsoft-com:vml" xmlns:pvml="urn:schemas-microsoft-com:office:powerpoint" xmlns:com="http://schemas.openxmlformats.org/drawingml/2006/compatibility" xmlns:p14="http://schemas.microsoft.com/office/powerpoint/2010/main" xmlns:p15="http://schemas.microsoft.com/office/powerpoint/2012/main" xmlns:ahyp="http://schemas.microsoft.com/office/drawing/2018/hyperlinkcolor">
   <p:cSld>
     <p:spTree>
@@ -25162,7 +24785,7 @@
 </p:sld>
 </file>
 
-<file path=ppt/slides/slide34.xml><?xml version="1.0" encoding="utf-8"?>
+<file path=ppt/slides/slide35.xml><?xml version="1.0" encoding="utf-8"?>
 <p:sld xmlns:a="http://schemas.openxmlformats.org/drawingml/2006/main" xmlns:r="http://schemas.openxmlformats.org/officeDocument/2006/relationships" xmlns:mc="http://schemas.openxmlformats.org/markup-compatibility/2006" xmlns:mv="urn:schemas-microsoft-com:mac:vml" xmlns:p="http://schemas.openxmlformats.org/presentationml/2006/main" xmlns:c="http://schemas.openxmlformats.org/drawingml/2006/chart" xmlns:dgm="http://schemas.openxmlformats.org/drawingml/2006/diagram" xmlns:o="urn:schemas-microsoft-com:office:office" xmlns:v="urn:schemas-microsoft-com:vml" xmlns:pvml="urn:schemas-microsoft-com:office:powerpoint" xmlns:com="http://schemas.openxmlformats.org/drawingml/2006/compatibility" xmlns:p14="http://schemas.microsoft.com/office/powerpoint/2010/main" xmlns:p15="http://schemas.microsoft.com/office/powerpoint/2012/main" xmlns:ahyp="http://schemas.microsoft.com/office/drawing/2018/hyperlinkcolor">
   <p:cSld>
     <p:spTree>
@@ -25673,7 +25296,7 @@
 </p:sld>
 </file>
 
-<file path=ppt/slides/slide35.xml><?xml version="1.0" encoding="utf-8"?>
+<file path=ppt/slides/slide36.xml><?xml version="1.0" encoding="utf-8"?>
 <p:sld xmlns:a="http://schemas.openxmlformats.org/drawingml/2006/main" xmlns:r="http://schemas.openxmlformats.org/officeDocument/2006/relationships" xmlns:mc="http://schemas.openxmlformats.org/markup-compatibility/2006" xmlns:mv="urn:schemas-microsoft-com:mac:vml" xmlns:p="http://schemas.openxmlformats.org/presentationml/2006/main" xmlns:c="http://schemas.openxmlformats.org/drawingml/2006/chart" xmlns:dgm="http://schemas.openxmlformats.org/drawingml/2006/diagram" xmlns:o="urn:schemas-microsoft-com:office:office" xmlns:v="urn:schemas-microsoft-com:vml" xmlns:pvml="urn:schemas-microsoft-com:office:powerpoint" xmlns:com="http://schemas.openxmlformats.org/drawingml/2006/compatibility" xmlns:p14="http://schemas.microsoft.com/office/powerpoint/2010/main" xmlns:p15="http://schemas.microsoft.com/office/powerpoint/2012/main" xmlns:ahyp="http://schemas.microsoft.com/office/drawing/2018/hyperlinkcolor">
   <p:cSld>
     <p:spTree>
@@ -26340,7 +25963,7 @@
 </p:sld>
 </file>
 
-<file path=ppt/slides/slide36.xml><?xml version="1.0" encoding="utf-8"?>
+<file path=ppt/slides/slide37.xml><?xml version="1.0" encoding="utf-8"?>
 <p:sld xmlns:a="http://schemas.openxmlformats.org/drawingml/2006/main" xmlns:r="http://schemas.openxmlformats.org/officeDocument/2006/relationships" xmlns:mc="http://schemas.openxmlformats.org/markup-compatibility/2006" xmlns:mv="urn:schemas-microsoft-com:mac:vml" xmlns:p="http://schemas.openxmlformats.org/presentationml/2006/main" xmlns:c="http://schemas.openxmlformats.org/drawingml/2006/chart" xmlns:dgm="http://schemas.openxmlformats.org/drawingml/2006/diagram" xmlns:o="urn:schemas-microsoft-com:office:office" xmlns:v="urn:schemas-microsoft-com:vml" xmlns:pvml="urn:schemas-microsoft-com:office:powerpoint" xmlns:com="http://schemas.openxmlformats.org/drawingml/2006/compatibility" xmlns:p14="http://schemas.microsoft.com/office/powerpoint/2010/main" xmlns:p15="http://schemas.microsoft.com/office/powerpoint/2012/main" xmlns:ahyp="http://schemas.microsoft.com/office/drawing/2018/hyperlinkcolor">
   <p:cSld>
     <p:spTree>
@@ -26473,7 +26096,7 @@
 </p:sld>
 </file>
 
-<file path=ppt/slides/slide37.xml><?xml version="1.0" encoding="utf-8"?>
+<file path=ppt/slides/slide38.xml><?xml version="1.0" encoding="utf-8"?>
 <p:sld xmlns:a="http://schemas.openxmlformats.org/drawingml/2006/main" xmlns:r="http://schemas.openxmlformats.org/officeDocument/2006/relationships" xmlns:mc="http://schemas.openxmlformats.org/markup-compatibility/2006" xmlns:mv="urn:schemas-microsoft-com:mac:vml" xmlns:p="http://schemas.openxmlformats.org/presentationml/2006/main" xmlns:c="http://schemas.openxmlformats.org/drawingml/2006/chart" xmlns:dgm="http://schemas.openxmlformats.org/drawingml/2006/diagram" xmlns:o="urn:schemas-microsoft-com:office:office" xmlns:v="urn:schemas-microsoft-com:vml" xmlns:pvml="urn:schemas-microsoft-com:office:powerpoint" xmlns:com="http://schemas.openxmlformats.org/drawingml/2006/compatibility" xmlns:p14="http://schemas.microsoft.com/office/powerpoint/2010/main" xmlns:p15="http://schemas.microsoft.com/office/powerpoint/2012/main" xmlns:ahyp="http://schemas.microsoft.com/office/drawing/2018/hyperlinkcolor">
   <p:cSld>
     <p:spTree>
@@ -26687,7 +26310,7 @@
 </p:sld>
 </file>
 
-<file path=ppt/slides/slide38.xml><?xml version="1.0" encoding="utf-8"?>
+<file path=ppt/slides/slide39.xml><?xml version="1.0" encoding="utf-8"?>
 <p:sld xmlns:a="http://schemas.openxmlformats.org/drawingml/2006/main" xmlns:r="http://schemas.openxmlformats.org/officeDocument/2006/relationships" xmlns:mc="http://schemas.openxmlformats.org/markup-compatibility/2006" xmlns:mv="urn:schemas-microsoft-com:mac:vml" xmlns:p="http://schemas.openxmlformats.org/presentationml/2006/main" xmlns:c="http://schemas.openxmlformats.org/drawingml/2006/chart" xmlns:dgm="http://schemas.openxmlformats.org/drawingml/2006/diagram" xmlns:o="urn:schemas-microsoft-com:office:office" xmlns:v="urn:schemas-microsoft-com:vml" xmlns:pvml="urn:schemas-microsoft-com:office:powerpoint" xmlns:com="http://schemas.openxmlformats.org/drawingml/2006/compatibility" xmlns:p14="http://schemas.microsoft.com/office/powerpoint/2010/main" xmlns:p15="http://schemas.microsoft.com/office/powerpoint/2012/main" xmlns:ahyp="http://schemas.microsoft.com/office/drawing/2018/hyperlinkcolor">
   <p:cSld>
     <p:spTree>
@@ -27765,7 +27388,654 @@
 </p:sld>
 </file>
 
-<file path=ppt/slides/slide39.xml><?xml version="1.0" encoding="utf-8"?>
+<file path=ppt/slides/slide4.xml><?xml version="1.0" encoding="utf-8"?>
+<p:sld xmlns:a="http://schemas.openxmlformats.org/drawingml/2006/main" xmlns:r="http://schemas.openxmlformats.org/officeDocument/2006/relationships" xmlns:mc="http://schemas.openxmlformats.org/markup-compatibility/2006" xmlns:mv="urn:schemas-microsoft-com:mac:vml" xmlns:p="http://schemas.openxmlformats.org/presentationml/2006/main" xmlns:c="http://schemas.openxmlformats.org/drawingml/2006/chart" xmlns:dgm="http://schemas.openxmlformats.org/drawingml/2006/diagram" xmlns:o="urn:schemas-microsoft-com:office:office" xmlns:v="urn:schemas-microsoft-com:vml" xmlns:pvml="urn:schemas-microsoft-com:office:powerpoint" xmlns:com="http://schemas.openxmlformats.org/drawingml/2006/compatibility" xmlns:p14="http://schemas.microsoft.com/office/powerpoint/2010/main" xmlns:p15="http://schemas.microsoft.com/office/powerpoint/2012/main" xmlns:ahyp="http://schemas.microsoft.com/office/drawing/2018/hyperlinkcolor">
+  <p:cSld>
+    <p:spTree>
+      <p:nvGrpSpPr>
+        <p:cNvPr id="50" name="Shape 50"/>
+        <p:cNvGrpSpPr/>
+        <p:nvPr/>
+      </p:nvGrpSpPr>
+      <p:grpSpPr>
+        <a:xfrm>
+          <a:off x="0" y="0"/>
+          <a:ext cx="0" cy="0"/>
+          <a:chOff x="0" y="0"/>
+          <a:chExt cx="0" cy="0"/>
+        </a:xfrm>
+      </p:grpSpPr>
+      <p:sp>
+        <p:nvSpPr>
+          <p:cNvPr id="51" name="Google Shape;51;p11"/>
+          <p:cNvSpPr txBox="1"/>
+          <p:nvPr>
+            <p:ph type="title"/>
+          </p:nvPr>
+        </p:nvSpPr>
+        <p:spPr>
+          <a:xfrm>
+            <a:off x="311700" y="195615"/>
+            <a:ext cx="8520600" cy="572700"/>
+          </a:xfrm>
+          <a:prstGeom prst="rect">
+            <a:avLst/>
+          </a:prstGeom>
+        </p:spPr>
+        <p:txBody>
+          <a:bodyPr anchorCtr="0" anchor="t" bIns="91425" lIns="91425" spcFirstLastPara="1" rIns="91425" wrap="square" tIns="91425">
+            <a:normAutofit fontScale="90000"/>
+          </a:bodyPr>
+          <a:lstStyle/>
+          <a:p>
+            <a:pPr indent="0" lvl="0" marL="0" rtl="0" algn="l">
+              <a:spcBef>
+                <a:spcPts val="0"/>
+              </a:spcBef>
+              <a:spcAft>
+                <a:spcPts val="0"/>
+              </a:spcAft>
+              <a:buNone/>
+            </a:pPr>
+            <a:r>
+              <a:rPr lang="en"/>
+              <a:t>Today’s Topics</a:t>
+            </a:r>
+            <a:endParaRPr/>
+          </a:p>
+        </p:txBody>
+      </p:sp>
+      <p:sp>
+        <p:nvSpPr>
+          <p:cNvPr id="52" name="Google Shape;52;p11"/>
+          <p:cNvSpPr txBox="1"/>
+          <p:nvPr>
+            <p:ph idx="1" type="body"/>
+          </p:nvPr>
+        </p:nvSpPr>
+        <p:spPr>
+          <a:xfrm>
+            <a:off x="311700" y="885950"/>
+            <a:ext cx="8520600" cy="4023300"/>
+          </a:xfrm>
+          <a:prstGeom prst="rect">
+            <a:avLst/>
+          </a:prstGeom>
+        </p:spPr>
+        <p:txBody>
+          <a:bodyPr anchorCtr="0" anchor="t" bIns="91425" lIns="91425" spcFirstLastPara="1" rIns="91425" wrap="square" tIns="91425">
+            <a:normAutofit/>
+          </a:bodyPr>
+          <a:lstStyle/>
+          <a:p>
+            <a:pPr indent="-330200" lvl="0" marL="457200" rtl="0" algn="l">
+              <a:spcBef>
+                <a:spcPts val="0"/>
+              </a:spcBef>
+              <a:spcAft>
+                <a:spcPts val="0"/>
+              </a:spcAft>
+              <a:buSzPts val="1600"/>
+              <a:buChar char="●"/>
+            </a:pPr>
+            <a:r>
+              <a:rPr lang="en"/>
+              <a:t>Game Architecture</a:t>
+            </a:r>
+            <a:endParaRPr/>
+          </a:p>
+          <a:p>
+            <a:pPr indent="-330200" lvl="0" marL="457200" rtl="0" algn="l">
+              <a:spcBef>
+                <a:spcPts val="0"/>
+              </a:spcBef>
+              <a:spcAft>
+                <a:spcPts val="0"/>
+              </a:spcAft>
+              <a:buSzPts val="1600"/>
+              <a:buChar char="●"/>
+            </a:pPr>
+            <a:r>
+              <a:rPr lang="en"/>
+              <a:t>Class Libraries</a:t>
+            </a:r>
+            <a:endParaRPr/>
+          </a:p>
+          <a:p>
+            <a:pPr indent="-330200" lvl="0" marL="457200" rtl="0" algn="l">
+              <a:spcBef>
+                <a:spcPts val="0"/>
+              </a:spcBef>
+              <a:spcAft>
+                <a:spcPts val="0"/>
+              </a:spcAft>
+              <a:buSzPts val="1600"/>
+              <a:buChar char="●"/>
+            </a:pPr>
+            <a:r>
+              <a:rPr lang="en"/>
+              <a:t>Images</a:t>
+            </a:r>
+            <a:endParaRPr/>
+          </a:p>
+          <a:p>
+            <a:pPr indent="-330200" lvl="0" marL="457200" rtl="0" algn="l">
+              <a:spcBef>
+                <a:spcPts val="0"/>
+              </a:spcBef>
+              <a:spcAft>
+                <a:spcPts val="0"/>
+              </a:spcAft>
+              <a:buSzPts val="1600"/>
+              <a:buChar char="●"/>
+            </a:pPr>
+            <a:r>
+              <a:rPr lang="en"/>
+              <a:t>Infinite Scrolling</a:t>
+            </a:r>
+            <a:endParaRPr/>
+          </a:p>
+          <a:p>
+            <a:pPr indent="-330200" lvl="0" marL="457200" rtl="0" algn="l">
+              <a:spcBef>
+                <a:spcPts val="0"/>
+              </a:spcBef>
+              <a:spcAft>
+                <a:spcPts val="0"/>
+              </a:spcAft>
+              <a:buSzPts val="1600"/>
+              <a:buChar char="●"/>
+            </a:pPr>
+            <a:r>
+              <a:rPr lang="en"/>
+              <a:t>Procedural Generation</a:t>
+            </a:r>
+            <a:endParaRPr/>
+          </a:p>
+          <a:p>
+            <a:pPr indent="-330200" lvl="0" marL="457200" rtl="0" algn="l">
+              <a:spcBef>
+                <a:spcPts val="0"/>
+              </a:spcBef>
+              <a:spcAft>
+                <a:spcPts val="0"/>
+              </a:spcAft>
+              <a:buSzPts val="1600"/>
+              <a:buChar char="●"/>
+            </a:pPr>
+            <a:r>
+              <a:rPr lang="en"/>
+              <a:t>Interfaces</a:t>
+            </a:r>
+            <a:endParaRPr/>
+          </a:p>
+          <a:p>
+            <a:pPr indent="-330200" lvl="0" marL="457200" rtl="0" algn="l">
+              <a:spcBef>
+                <a:spcPts val="0"/>
+              </a:spcBef>
+              <a:spcAft>
+                <a:spcPts val="0"/>
+              </a:spcAft>
+              <a:buSzPts val="1600"/>
+              <a:buChar char="●"/>
+            </a:pPr>
+            <a:r>
+              <a:rPr lang="en"/>
+              <a:t>State Machines</a:t>
+            </a:r>
+            <a:endParaRPr/>
+          </a:p>
+          <a:p>
+            <a:pPr indent="-330200" lvl="0" marL="457200" rtl="0" algn="l">
+              <a:spcBef>
+                <a:spcPts val="0"/>
+              </a:spcBef>
+              <a:spcAft>
+                <a:spcPts val="0"/>
+              </a:spcAft>
+              <a:buSzPts val="1600"/>
+              <a:buChar char="●"/>
+            </a:pPr>
+            <a:r>
+              <a:rPr lang="en"/>
+              <a:t>Singleton Pattern</a:t>
+            </a:r>
+            <a:endParaRPr/>
+          </a:p>
+        </p:txBody>
+      </p:sp>
+    </p:spTree>
+  </p:cSld>
+  <p:clrMapOvr>
+    <a:masterClrMapping/>
+  </p:clrMapOvr>
+  <p:timing>
+    <p:tnLst>
+      <p:par>
+        <p:cTn dur="indefinite" nodeType="tmRoot" restart="never">
+          <p:childTnLst>
+            <p:seq concurrent="1" nextAc="seek">
+              <p:cTn dur="indefinite" id="2" nodeType="mainSeq">
+                <p:childTnLst>
+                  <p:par>
+                    <p:cTn fill="hold">
+                      <p:stCondLst>
+                        <p:cond delay="indefinite"/>
+                      </p:stCondLst>
+                      <p:childTnLst>
+                        <p:par>
+                          <p:cTn fill="hold">
+                            <p:stCondLst>
+                              <p:cond delay="0"/>
+                            </p:stCondLst>
+                            <p:childTnLst>
+                              <p:par>
+                                <p:cTn fill="hold" nodeType="clickEffect" presetClass="entr" presetID="1" presetSubtype="0">
+                                  <p:stCondLst>
+                                    <p:cond delay="0"/>
+                                  </p:stCondLst>
+                                  <p:childTnLst>
+                                    <p:set>
+                                      <p:cBhvr>
+                                        <p:cTn dur="1" fill="hold">
+                                          <p:stCondLst>
+                                            <p:cond delay="0"/>
+                                          </p:stCondLst>
+                                        </p:cTn>
+                                        <p:tgtEl>
+                                          <p:spTgt spid="52">
+                                            <p:txEl>
+                                              <p:pRg end="0" st="0"/>
+                                            </p:txEl>
+                                          </p:spTgt>
+                                        </p:tgtEl>
+                                        <p:attrNameLst>
+                                          <p:attrName>style.visibility</p:attrName>
+                                        </p:attrNameLst>
+                                      </p:cBhvr>
+                                      <p:to>
+                                        <p:strVal val="visible"/>
+                                      </p:to>
+                                    </p:set>
+                                  </p:childTnLst>
+                                </p:cTn>
+                              </p:par>
+                            </p:childTnLst>
+                          </p:cTn>
+                        </p:par>
+                      </p:childTnLst>
+                    </p:cTn>
+                  </p:par>
+                  <p:par>
+                    <p:cTn fill="hold">
+                      <p:stCondLst>
+                        <p:cond delay="indefinite"/>
+                      </p:stCondLst>
+                      <p:childTnLst>
+                        <p:par>
+                          <p:cTn fill="hold">
+                            <p:stCondLst>
+                              <p:cond delay="0"/>
+                            </p:stCondLst>
+                            <p:childTnLst>
+                              <p:par>
+                                <p:cTn fill="hold" nodeType="clickEffect" presetClass="entr" presetID="1" presetSubtype="0">
+                                  <p:stCondLst>
+                                    <p:cond delay="0"/>
+                                  </p:stCondLst>
+                                  <p:childTnLst>
+                                    <p:set>
+                                      <p:cBhvr>
+                                        <p:cTn dur="1" fill="hold">
+                                          <p:stCondLst>
+                                            <p:cond delay="0"/>
+                                          </p:stCondLst>
+                                        </p:cTn>
+                                        <p:tgtEl>
+                                          <p:spTgt spid="52">
+                                            <p:txEl>
+                                              <p:pRg end="1" st="1"/>
+                                            </p:txEl>
+                                          </p:spTgt>
+                                        </p:tgtEl>
+                                        <p:attrNameLst>
+                                          <p:attrName>style.visibility</p:attrName>
+                                        </p:attrNameLst>
+                                      </p:cBhvr>
+                                      <p:to>
+                                        <p:strVal val="visible"/>
+                                      </p:to>
+                                    </p:set>
+                                  </p:childTnLst>
+                                </p:cTn>
+                              </p:par>
+                            </p:childTnLst>
+                          </p:cTn>
+                        </p:par>
+                      </p:childTnLst>
+                    </p:cTn>
+                  </p:par>
+                  <p:par>
+                    <p:cTn fill="hold">
+                      <p:stCondLst>
+                        <p:cond delay="indefinite"/>
+                      </p:stCondLst>
+                      <p:childTnLst>
+                        <p:par>
+                          <p:cTn fill="hold">
+                            <p:stCondLst>
+                              <p:cond delay="0"/>
+                            </p:stCondLst>
+                            <p:childTnLst>
+                              <p:par>
+                                <p:cTn fill="hold" nodeType="clickEffect" presetClass="entr" presetID="1" presetSubtype="0">
+                                  <p:stCondLst>
+                                    <p:cond delay="0"/>
+                                  </p:stCondLst>
+                                  <p:childTnLst>
+                                    <p:set>
+                                      <p:cBhvr>
+                                        <p:cTn dur="1" fill="hold">
+                                          <p:stCondLst>
+                                            <p:cond delay="0"/>
+                                          </p:stCondLst>
+                                        </p:cTn>
+                                        <p:tgtEl>
+                                          <p:spTgt spid="52">
+                                            <p:txEl>
+                                              <p:pRg end="2" st="2"/>
+                                            </p:txEl>
+                                          </p:spTgt>
+                                        </p:tgtEl>
+                                        <p:attrNameLst>
+                                          <p:attrName>style.visibility</p:attrName>
+                                        </p:attrNameLst>
+                                      </p:cBhvr>
+                                      <p:to>
+                                        <p:strVal val="visible"/>
+                                      </p:to>
+                                    </p:set>
+                                  </p:childTnLst>
+                                </p:cTn>
+                              </p:par>
+                            </p:childTnLst>
+                          </p:cTn>
+                        </p:par>
+                      </p:childTnLst>
+                    </p:cTn>
+                  </p:par>
+                  <p:par>
+                    <p:cTn fill="hold">
+                      <p:stCondLst>
+                        <p:cond delay="indefinite"/>
+                      </p:stCondLst>
+                      <p:childTnLst>
+                        <p:par>
+                          <p:cTn fill="hold">
+                            <p:stCondLst>
+                              <p:cond delay="0"/>
+                            </p:stCondLst>
+                            <p:childTnLst>
+                              <p:par>
+                                <p:cTn fill="hold" nodeType="clickEffect" presetClass="entr" presetID="1" presetSubtype="0">
+                                  <p:stCondLst>
+                                    <p:cond delay="0"/>
+                                  </p:stCondLst>
+                                  <p:childTnLst>
+                                    <p:set>
+                                      <p:cBhvr>
+                                        <p:cTn dur="1" fill="hold">
+                                          <p:stCondLst>
+                                            <p:cond delay="0"/>
+                                          </p:stCondLst>
+                                        </p:cTn>
+                                        <p:tgtEl>
+                                          <p:spTgt spid="52">
+                                            <p:txEl>
+                                              <p:pRg end="3" st="3"/>
+                                            </p:txEl>
+                                          </p:spTgt>
+                                        </p:tgtEl>
+                                        <p:attrNameLst>
+                                          <p:attrName>style.visibility</p:attrName>
+                                        </p:attrNameLst>
+                                      </p:cBhvr>
+                                      <p:to>
+                                        <p:strVal val="visible"/>
+                                      </p:to>
+                                    </p:set>
+                                  </p:childTnLst>
+                                </p:cTn>
+                              </p:par>
+                            </p:childTnLst>
+                          </p:cTn>
+                        </p:par>
+                      </p:childTnLst>
+                    </p:cTn>
+                  </p:par>
+                  <p:par>
+                    <p:cTn fill="hold">
+                      <p:stCondLst>
+                        <p:cond delay="indefinite"/>
+                      </p:stCondLst>
+                      <p:childTnLst>
+                        <p:par>
+                          <p:cTn fill="hold">
+                            <p:stCondLst>
+                              <p:cond delay="0"/>
+                            </p:stCondLst>
+                            <p:childTnLst>
+                              <p:par>
+                                <p:cTn fill="hold" nodeType="clickEffect" presetClass="entr" presetID="1" presetSubtype="0">
+                                  <p:stCondLst>
+                                    <p:cond delay="0"/>
+                                  </p:stCondLst>
+                                  <p:childTnLst>
+                                    <p:set>
+                                      <p:cBhvr>
+                                        <p:cTn dur="1" fill="hold">
+                                          <p:stCondLst>
+                                            <p:cond delay="0"/>
+                                          </p:stCondLst>
+                                        </p:cTn>
+                                        <p:tgtEl>
+                                          <p:spTgt spid="52">
+                                            <p:txEl>
+                                              <p:pRg end="4" st="4"/>
+                                            </p:txEl>
+                                          </p:spTgt>
+                                        </p:tgtEl>
+                                        <p:attrNameLst>
+                                          <p:attrName>style.visibility</p:attrName>
+                                        </p:attrNameLst>
+                                      </p:cBhvr>
+                                      <p:to>
+                                        <p:strVal val="visible"/>
+                                      </p:to>
+                                    </p:set>
+                                  </p:childTnLst>
+                                </p:cTn>
+                              </p:par>
+                            </p:childTnLst>
+                          </p:cTn>
+                        </p:par>
+                      </p:childTnLst>
+                    </p:cTn>
+                  </p:par>
+                  <p:par>
+                    <p:cTn fill="hold">
+                      <p:stCondLst>
+                        <p:cond delay="indefinite"/>
+                      </p:stCondLst>
+                      <p:childTnLst>
+                        <p:par>
+                          <p:cTn fill="hold">
+                            <p:stCondLst>
+                              <p:cond delay="0"/>
+                            </p:stCondLst>
+                            <p:childTnLst>
+                              <p:par>
+                                <p:cTn fill="hold" nodeType="clickEffect" presetClass="entr" presetID="1" presetSubtype="0">
+                                  <p:stCondLst>
+                                    <p:cond delay="0"/>
+                                  </p:stCondLst>
+                                  <p:childTnLst>
+                                    <p:set>
+                                      <p:cBhvr>
+                                        <p:cTn dur="1" fill="hold">
+                                          <p:stCondLst>
+                                            <p:cond delay="0"/>
+                                          </p:stCondLst>
+                                        </p:cTn>
+                                        <p:tgtEl>
+                                          <p:spTgt spid="52">
+                                            <p:txEl>
+                                              <p:pRg end="5" st="5"/>
+                                            </p:txEl>
+                                          </p:spTgt>
+                                        </p:tgtEl>
+                                        <p:attrNameLst>
+                                          <p:attrName>style.visibility</p:attrName>
+                                        </p:attrNameLst>
+                                      </p:cBhvr>
+                                      <p:to>
+                                        <p:strVal val="visible"/>
+                                      </p:to>
+                                    </p:set>
+                                  </p:childTnLst>
+                                </p:cTn>
+                              </p:par>
+                            </p:childTnLst>
+                          </p:cTn>
+                        </p:par>
+                      </p:childTnLst>
+                    </p:cTn>
+                  </p:par>
+                  <p:par>
+                    <p:cTn fill="hold">
+                      <p:stCondLst>
+                        <p:cond delay="indefinite"/>
+                      </p:stCondLst>
+                      <p:childTnLst>
+                        <p:par>
+                          <p:cTn fill="hold">
+                            <p:stCondLst>
+                              <p:cond delay="0"/>
+                            </p:stCondLst>
+                            <p:childTnLst>
+                              <p:par>
+                                <p:cTn fill="hold" nodeType="clickEffect" presetClass="entr" presetID="1" presetSubtype="0">
+                                  <p:stCondLst>
+                                    <p:cond delay="0"/>
+                                  </p:stCondLst>
+                                  <p:childTnLst>
+                                    <p:set>
+                                      <p:cBhvr>
+                                        <p:cTn dur="1" fill="hold">
+                                          <p:stCondLst>
+                                            <p:cond delay="0"/>
+                                          </p:stCondLst>
+                                        </p:cTn>
+                                        <p:tgtEl>
+                                          <p:spTgt spid="52">
+                                            <p:txEl>
+                                              <p:pRg end="6" st="6"/>
+                                            </p:txEl>
+                                          </p:spTgt>
+                                        </p:tgtEl>
+                                        <p:attrNameLst>
+                                          <p:attrName>style.visibility</p:attrName>
+                                        </p:attrNameLst>
+                                      </p:cBhvr>
+                                      <p:to>
+                                        <p:strVal val="visible"/>
+                                      </p:to>
+                                    </p:set>
+                                  </p:childTnLst>
+                                </p:cTn>
+                              </p:par>
+                            </p:childTnLst>
+                          </p:cTn>
+                        </p:par>
+                      </p:childTnLst>
+                    </p:cTn>
+                  </p:par>
+                  <p:par>
+                    <p:cTn fill="hold">
+                      <p:stCondLst>
+                        <p:cond delay="indefinite"/>
+                      </p:stCondLst>
+                      <p:childTnLst>
+                        <p:par>
+                          <p:cTn fill="hold">
+                            <p:stCondLst>
+                              <p:cond delay="0"/>
+                            </p:stCondLst>
+                            <p:childTnLst>
+                              <p:par>
+                                <p:cTn fill="hold" nodeType="clickEffect" presetClass="entr" presetID="1" presetSubtype="0">
+                                  <p:stCondLst>
+                                    <p:cond delay="0"/>
+                                  </p:stCondLst>
+                                  <p:childTnLst>
+                                    <p:set>
+                                      <p:cBhvr>
+                                        <p:cTn dur="1" fill="hold">
+                                          <p:stCondLst>
+                                            <p:cond delay="0"/>
+                                          </p:stCondLst>
+                                        </p:cTn>
+                                        <p:tgtEl>
+                                          <p:spTgt spid="52">
+                                            <p:txEl>
+                                              <p:pRg end="7" st="7"/>
+                                            </p:txEl>
+                                          </p:spTgt>
+                                        </p:tgtEl>
+                                        <p:attrNameLst>
+                                          <p:attrName>style.visibility</p:attrName>
+                                        </p:attrNameLst>
+                                      </p:cBhvr>
+                                      <p:to>
+                                        <p:strVal val="visible"/>
+                                      </p:to>
+                                    </p:set>
+                                  </p:childTnLst>
+                                </p:cTn>
+                              </p:par>
+                            </p:childTnLst>
+                          </p:cTn>
+                        </p:par>
+                      </p:childTnLst>
+                    </p:cTn>
+                  </p:par>
+                </p:childTnLst>
+              </p:cTn>
+              <p:prevCondLst>
+                <p:cond evt="onPrev">
+                  <p:tgtEl>
+                    <p:sldTgt/>
+                  </p:tgtEl>
+                </p:cond>
+              </p:prevCondLst>
+              <p:nextCondLst>
+                <p:cond evt="onNext">
+                  <p:tgtEl>
+                    <p:sldTgt/>
+                  </p:tgtEl>
+                </p:cond>
+              </p:nextCondLst>
+            </p:seq>
+          </p:childTnLst>
+        </p:cTn>
+      </p:par>
+    </p:tnLst>
+  </p:timing>
+</p:sld>
+</file>
+
+<file path=ppt/slides/slide40.xml><?xml version="1.0" encoding="utf-8"?>
 <p:sld xmlns:a="http://schemas.openxmlformats.org/drawingml/2006/main" xmlns:r="http://schemas.openxmlformats.org/officeDocument/2006/relationships" xmlns:mc="http://schemas.openxmlformats.org/markup-compatibility/2006" xmlns:mv="urn:schemas-microsoft-com:mac:vml" xmlns:p="http://schemas.openxmlformats.org/presentationml/2006/main" xmlns:c="http://schemas.openxmlformats.org/drawingml/2006/chart" xmlns:dgm="http://schemas.openxmlformats.org/drawingml/2006/diagram" xmlns:o="urn:schemas-microsoft-com:office:office" xmlns:v="urn:schemas-microsoft-com:vml" xmlns:pvml="urn:schemas-microsoft-com:office:powerpoint" xmlns:com="http://schemas.openxmlformats.org/drawingml/2006/compatibility" xmlns:p14="http://schemas.microsoft.com/office/powerpoint/2010/main" xmlns:p15="http://schemas.microsoft.com/office/powerpoint/2012/main" xmlns:ahyp="http://schemas.microsoft.com/office/drawing/2018/hyperlinkcolor">
   <p:cSld>
     <p:spTree>
@@ -27898,7 +28168,1182 @@
 </p:sld>
 </file>
 
-<file path=ppt/slides/slide4.xml><?xml version="1.0" encoding="utf-8"?>
+<file path=ppt/slides/slide41.xml><?xml version="1.0" encoding="utf-8"?>
+<p:sld xmlns:a="http://schemas.openxmlformats.org/drawingml/2006/main" xmlns:p="http://schemas.openxmlformats.org/presentationml/2006/main" xmlns:r="http://schemas.openxmlformats.org/officeDocument/2006/relationships">
+  <p:cSld>
+    <p:spTree>
+      <p:nvGrpSpPr>
+        <p:cNvPr id="1" name=""/>
+        <p:cNvGrpSpPr/>
+        <p:nvPr/>
+      </p:nvGrpSpPr>
+      <p:grpSpPr/>
+      <p:sp>
+        <p:nvSpPr>
+          <p:cNvPr id="263" name="Google Shape;263;p46"/>
+          <p:cNvSpPr txBox="1"/>
+          <p:nvPr>
+            <p:ph type="title"/>
+          </p:nvPr>
+        </p:nvSpPr>
+        <p:spPr>
+          <a:xfrm>
+            <a:off x="311700" y="195615"/>
+            <a:ext cx="8520600" cy="572700"/>
+          </a:xfrm>
+          <a:prstGeom prst="rect">
+            <a:avLst/>
+          </a:prstGeom>
+        </p:spPr>
+        <p:txBody>
+          <a:bodyPr anchorCtr="0" anchor="t" bIns="91425" lIns="91425" spcFirstLastPara="1" rIns="91425" wrap="square" tIns="91425">
+            <a:normAutofit fontScale="90000"/>
+          </a:bodyPr>
+          <a:lstStyle/>
+          <a:p>
+            <a:pPr indent="0" lvl="0" marL="0" rtl="0" algn="l">
+              <a:spcBef>
+                <a:spcPts val="0"/>
+              </a:spcBef>
+              <a:spcAft>
+                <a:spcPts val="0"/>
+              </a:spcAft>
+              <a:buNone/>
+            </a:pPr>
+            <a:r>
+              <a:rPr lang="en"/>
+              <a:t>Singleton in Flappy Bird</a:t>
+            </a:r>
+            <a:endParaRPr/>
+          </a:p>
+        </p:txBody>
+      </p:sp>
+      <p:sp>
+        <p:nvSpPr>
+          <p:cNvPr id="243" name="Google Shape;243;p43"/>
+          <p:cNvSpPr txBox="1"/>
+          <p:nvPr>
+            <p:ph idx="1" type="body"/>
+          </p:nvPr>
+        </p:nvSpPr>
+        <p:spPr>
+          <a:xfrm>
+            <a:off x="311700" y="1152475"/>
+            <a:ext cx="3900000" cy="3400000"/>
+          </a:xfrm>
+          <a:prstGeom prst="rect">
+            <a:avLst/>
+          </a:prstGeom>
+        </p:spPr>
+        <p:txBody>
+          <a:bodyPr anchorCtr="0" anchor="t" bIns="91425" lIns="91425" spcFirstLastPara="1" rIns="91425" wrap="square" tIns="91425">
+            <a:normAutofit/>
+          </a:bodyPr>
+          <a:lstStyle/>
+          <a:p>
+            <a:pPr indent="-330200" lvl="0" marL="457200" rtl="0" algn="l">
+              <a:spcBef>
+                <a:spcPts val="0"/>
+              </a:spcBef>
+              <a:spcAft>
+                <a:spcPts val="0"/>
+              </a:spcAft>
+              <a:buSzPts val="1600"/>
+              <a:buChar char="●"/>
+            </a:pPr>
+            <a:r>
+              <a:rPr lang="en"/>
+              <a:t>Audio is a Singleton: one object, reached through Audio.Instance</a:t>
+            </a:r>
+            <a:endParaRPr/>
+          </a:p>
+          <a:p>
+            <a:pPr indent="-330200" lvl="0" marL="457200" rtl="0" algn="l">
+              <a:spcBef>
+                <a:spcPts val="0"/>
+              </a:spcBef>
+              <a:spcAft>
+                <a:spcPts val="0"/>
+              </a:spcAft>
+              <a:buSzPts val="1600"/>
+              <a:buChar char="●"/>
+            </a:pPr>
+            <a:r>
+              <a:rPr lang="en"/>
+              <a:t>Art is a static class</a:t>
+            </a:r>
+            <a:endParaRPr/>
+          </a:p>
+          <a:p>
+            <a:pPr indent="-330200" lvl="0" marL="457200" rtl="0" algn="l">
+              <a:spcBef>
+                <a:spcPts val="0"/>
+              </a:spcBef>
+              <a:spcAft>
+                <a:spcPts val="0"/>
+              </a:spcAft>
+              <a:buSzPts val="1600"/>
+              <a:buChar char="●"/>
+            </a:pPr>
+            <a:r>
+              <a:rPr lang="en"/>
+              <a:t>Both give global access</a:t>
+            </a:r>
+            <a:endParaRPr/>
+          </a:p>
+          <a:p>
+            <a:pPr indent="-330200" lvl="0" marL="457200" rtl="0" algn="l">
+              <a:spcBef>
+                <a:spcPts val="0"/>
+              </a:spcBef>
+              <a:spcAft>
+                <a:spcPts val="0"/>
+              </a:spcAft>
+              <a:buSzPts val="1600"/>
+              <a:buChar char="●"/>
+            </a:pPr>
+            <a:r>
+              <a:rPr lang="en"/>
+              <a:t>But Audio is an object</a:t>
+            </a:r>
+            <a:endParaRPr/>
+          </a:p>
+          <a:p>
+            <a:pPr indent="-317500" lvl="1" marL="914400" rtl="0" algn="l">
+              <a:spcBef>
+                <a:spcPts val="0"/>
+              </a:spcBef>
+              <a:spcAft>
+                <a:spcPts val="0"/>
+              </a:spcAft>
+              <a:buSzPts val="1400"/>
+              <a:buChar char="○"/>
+            </a:pPr>
+            <a:r>
+              <a:rPr lang="en"/>
+              <a:t>It could implement an interface or be passed as a parameter</a:t>
+            </a:r>
+            <a:endParaRPr/>
+          </a:p>
+          <a:p>
+            <a:pPr indent="-317500" lvl="1" marL="914400" rtl="0" algn="l">
+              <a:spcBef>
+                <a:spcPts val="0"/>
+              </a:spcBef>
+              <a:spcAft>
+                <a:spcPts val="0"/>
+              </a:spcAft>
+              <a:buSzPts val="1400"/>
+              <a:buChar char="○"/>
+            </a:pPr>
+            <a:r>
+              <a:rPr lang="en"/>
+              <a:t>Pokemon builds on this with a Service Locator</a:t>
+            </a:r>
+            <a:endParaRPr/>
+          </a:p>
+          <a:p>
+            <a:pPr indent="-330200" lvl="0" marL="457200" rtl="0" algn="l">
+              <a:spcBef>
+                <a:spcPts val="0"/>
+              </a:spcBef>
+              <a:spcAft>
+                <a:spcPts val="0"/>
+              </a:spcAft>
+              <a:buSzPts val="1600"/>
+              <a:buChar char="●"/>
+            </a:pPr>
+            <a:r>
+              <a:rPr lang="en"/>
+              <a:t>Step: Flappy12</a:t>
+            </a:r>
+            <a:endParaRPr/>
+          </a:p>
+        </p:txBody>
+      </p:sp>
+      <p:sp>
+        <p:nvSpPr>
+          <p:cNvPr id="264" name="Google Shape;264;p46"/>
+          <p:cNvSpPr txBox="1"/>
+          <p:nvPr>
+            <p:ph idx="2" type="body"/>
+          </p:nvPr>
+        </p:nvSpPr>
+        <p:spPr>
+          <a:xfrm>
+            <a:off x="4500000" y="1152475"/>
+            <a:ext cx="4400000" cy="3600000"/>
+          </a:xfrm>
+          <a:prstGeom prst="rect">
+            <a:avLst/>
+          </a:prstGeom>
+        </p:spPr>
+        <p:txBody>
+          <a:bodyPr anchorCtr="0" anchor="t" bIns="91425" lIns="91425" spcFirstLastPara="1" rIns="91425" wrap="square" tIns="91425">
+            <a:noAutofit/>
+          </a:bodyPr>
+          <a:lstStyle/>
+          <a:p>
+            <a:pPr indent="0" lvl="0" marL="0" rtl="0" algn="l">
+              <a:lnSpc>
+                <a:spcPct val="115000"/>
+              </a:lnSpc>
+              <a:spcBef>
+                <a:spcPts val="0"/>
+              </a:spcBef>
+              <a:spcAft>
+                <a:spcPts val="0"/>
+              </a:spcAft>
+              <a:buNone/>
+            </a:pPr>
+            <a:r>
+              <a:rPr lang="en" sz="1000">
+                <a:highlight>
+                  <a:srgbClr val="1F1F1F"/>
+                </a:highlight>
+                <a:latin typeface="Consolas"/>
+                <a:ea typeface="Consolas"/>
+                <a:cs typeface="Consolas"/>
+                <a:sym typeface="Consolas"/>
+              </a:rPr>
+              <a:t>public class Audio</a:t>
+            </a:r>
+            <a:endParaRPr sz="1000">
+              <a:solidFill>
+                <a:srgbClr val="4EC9B0"/>
+              </a:solidFill>
+              <a:highlight>
+                <a:srgbClr val="1F1F1F"/>
+              </a:highlight>
+              <a:latin typeface="Consolas"/>
+              <a:ea typeface="Consolas"/>
+              <a:cs typeface="Consolas"/>
+              <a:sym typeface="Consolas"/>
+            </a:endParaRPr>
+          </a:p>
+          <a:p>
+            <a:pPr indent="0" lvl="0" marL="0" rtl="0" algn="l">
+              <a:lnSpc>
+                <a:spcPct val="115000"/>
+              </a:lnSpc>
+              <a:spcBef>
+                <a:spcPts val="0"/>
+              </a:spcBef>
+              <a:spcAft>
+                <a:spcPts val="0"/>
+              </a:spcAft>
+              <a:buNone/>
+            </a:pPr>
+            <a:r>
+              <a:rPr lang="en" sz="1000">
+                <a:highlight>
+                  <a:srgbClr val="1F1F1F"/>
+                </a:highlight>
+                <a:latin typeface="Consolas"/>
+                <a:ea typeface="Consolas"/>
+                <a:cs typeface="Consolas"/>
+                <a:sym typeface="Consolas"/>
+              </a:rPr>
+              <a:t>{</a:t>
+            </a:r>
+            <a:endParaRPr sz="1000">
+              <a:solidFill>
+                <a:srgbClr val="4EC9B0"/>
+              </a:solidFill>
+              <a:highlight>
+                <a:srgbClr val="1F1F1F"/>
+              </a:highlight>
+              <a:latin typeface="Consolas"/>
+              <a:ea typeface="Consolas"/>
+              <a:cs typeface="Consolas"/>
+              <a:sym typeface="Consolas"/>
+            </a:endParaRPr>
+          </a:p>
+          <a:p>
+            <a:pPr indent="0" lvl="0" marL="0" rtl="0" algn="l">
+              <a:lnSpc>
+                <a:spcPct val="115000"/>
+              </a:lnSpc>
+              <a:spcBef>
+                <a:spcPts val="0"/>
+              </a:spcBef>
+              <a:spcAft>
+                <a:spcPts val="0"/>
+              </a:spcAft>
+              <a:buNone/>
+            </a:pPr>
+            <a:r>
+              <a:rPr lang="en" sz="1000">
+                <a:highlight>
+                  <a:srgbClr val="1F1F1F"/>
+                </a:highlight>
+                <a:latin typeface="Consolas"/>
+                <a:ea typeface="Consolas"/>
+                <a:cs typeface="Consolas"/>
+                <a:sym typeface="Consolas"/>
+              </a:rPr>
+              <a:t>    public static Audio Instance { get; }</a:t>
+            </a:r>
+            <a:endParaRPr sz="1000">
+              <a:solidFill>
+                <a:srgbClr val="4EC9B0"/>
+              </a:solidFill>
+              <a:highlight>
+                <a:srgbClr val="1F1F1F"/>
+              </a:highlight>
+              <a:latin typeface="Consolas"/>
+              <a:ea typeface="Consolas"/>
+              <a:cs typeface="Consolas"/>
+              <a:sym typeface="Consolas"/>
+            </a:endParaRPr>
+          </a:p>
+          <a:p>
+            <a:pPr indent="0" lvl="0" marL="0" rtl="0" algn="l">
+              <a:lnSpc>
+                <a:spcPct val="115000"/>
+              </a:lnSpc>
+              <a:spcBef>
+                <a:spcPts val="0"/>
+              </a:spcBef>
+              <a:spcAft>
+                <a:spcPts val="0"/>
+              </a:spcAft>
+              <a:buNone/>
+            </a:pPr>
+            <a:r>
+              <a:rPr lang="en" sz="1000">
+                <a:highlight>
+                  <a:srgbClr val="1F1F1F"/>
+                </a:highlight>
+                <a:latin typeface="Consolas"/>
+                <a:ea typeface="Consolas"/>
+                <a:cs typeface="Consolas"/>
+                <a:sym typeface="Consolas"/>
+              </a:rPr>
+              <a:t>        = new Audio();</a:t>
+            </a:r>
+            <a:endParaRPr sz="1000">
+              <a:solidFill>
+                <a:srgbClr val="4EC9B0"/>
+              </a:solidFill>
+              <a:highlight>
+                <a:srgbClr val="1F1F1F"/>
+              </a:highlight>
+              <a:latin typeface="Consolas"/>
+              <a:ea typeface="Consolas"/>
+              <a:cs typeface="Consolas"/>
+              <a:sym typeface="Consolas"/>
+            </a:endParaRPr>
+          </a:p>
+          <a:p>
+            <a:pPr indent="0" lvl="0" marL="0" rtl="0" algn="l">
+              <a:lnSpc>
+                <a:spcPct val="115000"/>
+              </a:lnSpc>
+              <a:spcBef>
+                <a:spcPts val="0"/>
+              </a:spcBef>
+              <a:spcAft>
+                <a:spcPts val="0"/>
+              </a:spcAft>
+              <a:buNone/>
+            </a:pPr>
+            <a:r>
+              <a:rPr lang="en" sz="1000">
+                <a:highlight>
+                  <a:srgbClr val="1F1F1F"/>
+                </a:highlight>
+                <a:latin typeface="Consolas"/>
+                <a:ea typeface="Consolas"/>
+                <a:cs typeface="Consolas"/>
+                <a:sym typeface="Consolas"/>
+              </a:rPr>
+              <a:t/>
+            </a:r>
+            <a:endParaRPr sz="1000">
+              <a:solidFill>
+                <a:srgbClr val="4EC9B0"/>
+              </a:solidFill>
+              <a:highlight>
+                <a:srgbClr val="1F1F1F"/>
+              </a:highlight>
+              <a:latin typeface="Consolas"/>
+              <a:ea typeface="Consolas"/>
+              <a:cs typeface="Consolas"/>
+              <a:sym typeface="Consolas"/>
+            </a:endParaRPr>
+          </a:p>
+          <a:p>
+            <a:pPr indent="0" lvl="0" marL="0" rtl="0" algn="l">
+              <a:lnSpc>
+                <a:spcPct val="115000"/>
+              </a:lnSpc>
+              <a:spcBef>
+                <a:spcPts val="0"/>
+              </a:spcBef>
+              <a:spcAft>
+                <a:spcPts val="0"/>
+              </a:spcAft>
+              <a:buNone/>
+            </a:pPr>
+            <a:r>
+              <a:rPr lang="en" sz="1000">
+                <a:highlight>
+                  <a:srgbClr val="1F1F1F"/>
+                </a:highlight>
+                <a:latin typeface="Consolas"/>
+                <a:ea typeface="Consolas"/>
+                <a:cs typeface="Consolas"/>
+                <a:sym typeface="Consolas"/>
+              </a:rPr>
+              <a:t>    private Audio() { }</a:t>
+            </a:r>
+            <a:endParaRPr sz="1000">
+              <a:solidFill>
+                <a:srgbClr val="4EC9B0"/>
+              </a:solidFill>
+              <a:highlight>
+                <a:srgbClr val="1F1F1F"/>
+              </a:highlight>
+              <a:latin typeface="Consolas"/>
+              <a:ea typeface="Consolas"/>
+              <a:cs typeface="Consolas"/>
+              <a:sym typeface="Consolas"/>
+            </a:endParaRPr>
+          </a:p>
+          <a:p>
+            <a:pPr indent="0" lvl="0" marL="0" rtl="0" algn="l">
+              <a:lnSpc>
+                <a:spcPct val="115000"/>
+              </a:lnSpc>
+              <a:spcBef>
+                <a:spcPts val="0"/>
+              </a:spcBef>
+              <a:spcAft>
+                <a:spcPts val="0"/>
+              </a:spcAft>
+              <a:buNone/>
+            </a:pPr>
+            <a:r>
+              <a:rPr lang="en" sz="1000">
+                <a:highlight>
+                  <a:srgbClr val="1F1F1F"/>
+                </a:highlight>
+                <a:latin typeface="Consolas"/>
+                <a:ea typeface="Consolas"/>
+                <a:cs typeface="Consolas"/>
+                <a:sym typeface="Consolas"/>
+              </a:rPr>
+              <a:t/>
+            </a:r>
+            <a:endParaRPr sz="1000">
+              <a:solidFill>
+                <a:srgbClr val="4EC9B0"/>
+              </a:solidFill>
+              <a:highlight>
+                <a:srgbClr val="1F1F1F"/>
+              </a:highlight>
+              <a:latin typeface="Consolas"/>
+              <a:ea typeface="Consolas"/>
+              <a:cs typeface="Consolas"/>
+              <a:sym typeface="Consolas"/>
+            </a:endParaRPr>
+          </a:p>
+          <a:p>
+            <a:pPr indent="0" lvl="0" marL="0" rtl="0" algn="l">
+              <a:lnSpc>
+                <a:spcPct val="115000"/>
+              </a:lnSpc>
+              <a:spcBef>
+                <a:spcPts val="0"/>
+              </a:spcBef>
+              <a:spcAft>
+                <a:spcPts val="0"/>
+              </a:spcAft>
+              <a:buNone/>
+            </a:pPr>
+            <a:r>
+              <a:rPr lang="en" sz="1000">
+                <a:highlight>
+                  <a:srgbClr val="1F1F1F"/>
+                </a:highlight>
+                <a:latin typeface="Consolas"/>
+                <a:ea typeface="Consolas"/>
+                <a:cs typeface="Consolas"/>
+                <a:sym typeface="Consolas"/>
+              </a:rPr>
+              <a:t>    public void PlayFlap() =&gt; _flap.Play();</a:t>
+            </a:r>
+            <a:endParaRPr sz="1000">
+              <a:solidFill>
+                <a:srgbClr val="4EC9B0"/>
+              </a:solidFill>
+              <a:highlight>
+                <a:srgbClr val="1F1F1F"/>
+              </a:highlight>
+              <a:latin typeface="Consolas"/>
+              <a:ea typeface="Consolas"/>
+              <a:cs typeface="Consolas"/>
+              <a:sym typeface="Consolas"/>
+            </a:endParaRPr>
+          </a:p>
+          <a:p>
+            <a:pPr indent="0" lvl="0" marL="0" rtl="0" algn="l">
+              <a:lnSpc>
+                <a:spcPct val="115000"/>
+              </a:lnSpc>
+              <a:spcBef>
+                <a:spcPts val="0"/>
+              </a:spcBef>
+              <a:spcAft>
+                <a:spcPts val="0"/>
+              </a:spcAft>
+              <a:buNone/>
+            </a:pPr>
+            <a:r>
+              <a:rPr lang="en" sz="1000">
+                <a:highlight>
+                  <a:srgbClr val="1F1F1F"/>
+                </a:highlight>
+                <a:latin typeface="Consolas"/>
+                <a:ea typeface="Consolas"/>
+                <a:cs typeface="Consolas"/>
+                <a:sym typeface="Consolas"/>
+              </a:rPr>
+              <a:t>    // PlayMusic, PlayScore, PlayCrash...</a:t>
+            </a:r>
+            <a:endParaRPr sz="1000">
+              <a:solidFill>
+                <a:srgbClr val="4EC9B0"/>
+              </a:solidFill>
+              <a:highlight>
+                <a:srgbClr val="1F1F1F"/>
+              </a:highlight>
+              <a:latin typeface="Consolas"/>
+              <a:ea typeface="Consolas"/>
+              <a:cs typeface="Consolas"/>
+              <a:sym typeface="Consolas"/>
+            </a:endParaRPr>
+          </a:p>
+          <a:p>
+            <a:pPr indent="0" lvl="0" marL="0" rtl="0" algn="l">
+              <a:lnSpc>
+                <a:spcPct val="115000"/>
+              </a:lnSpc>
+              <a:spcBef>
+                <a:spcPts val="0"/>
+              </a:spcBef>
+              <a:spcAft>
+                <a:spcPts val="0"/>
+              </a:spcAft>
+              <a:buNone/>
+            </a:pPr>
+            <a:r>
+              <a:rPr lang="en" sz="1000">
+                <a:highlight>
+                  <a:srgbClr val="1F1F1F"/>
+                </a:highlight>
+                <a:latin typeface="Consolas"/>
+                <a:ea typeface="Consolas"/>
+                <a:cs typeface="Consolas"/>
+                <a:sym typeface="Consolas"/>
+              </a:rPr>
+              <a:t>}</a:t>
+            </a:r>
+            <a:endParaRPr sz="1000">
+              <a:solidFill>
+                <a:srgbClr val="4EC9B0"/>
+              </a:solidFill>
+              <a:highlight>
+                <a:srgbClr val="1F1F1F"/>
+              </a:highlight>
+              <a:latin typeface="Consolas"/>
+              <a:ea typeface="Consolas"/>
+              <a:cs typeface="Consolas"/>
+              <a:sym typeface="Consolas"/>
+            </a:endParaRPr>
+          </a:p>
+          <a:p>
+            <a:pPr indent="0" lvl="0" marL="0" rtl="0" algn="l">
+              <a:lnSpc>
+                <a:spcPct val="115000"/>
+              </a:lnSpc>
+              <a:spcBef>
+                <a:spcPts val="0"/>
+              </a:spcBef>
+              <a:spcAft>
+                <a:spcPts val="0"/>
+              </a:spcAft>
+              <a:buNone/>
+            </a:pPr>
+            <a:r>
+              <a:rPr lang="en" sz="1000">
+                <a:highlight>
+                  <a:srgbClr val="1F1F1F"/>
+                </a:highlight>
+                <a:latin typeface="Consolas"/>
+                <a:ea typeface="Consolas"/>
+                <a:cs typeface="Consolas"/>
+                <a:sym typeface="Consolas"/>
+              </a:rPr>
+              <a:t/>
+            </a:r>
+            <a:endParaRPr sz="1000">
+              <a:solidFill>
+                <a:srgbClr val="4EC9B0"/>
+              </a:solidFill>
+              <a:highlight>
+                <a:srgbClr val="1F1F1F"/>
+              </a:highlight>
+              <a:latin typeface="Consolas"/>
+              <a:ea typeface="Consolas"/>
+              <a:cs typeface="Consolas"/>
+              <a:sym typeface="Consolas"/>
+            </a:endParaRPr>
+          </a:p>
+          <a:p>
+            <a:pPr indent="0" lvl="0" marL="0" rtl="0" algn="l">
+              <a:lnSpc>
+                <a:spcPct val="115000"/>
+              </a:lnSpc>
+              <a:spcBef>
+                <a:spcPts val="0"/>
+              </a:spcBef>
+              <a:spcAft>
+                <a:spcPts val="0"/>
+              </a:spcAft>
+              <a:buNone/>
+            </a:pPr>
+            <a:r>
+              <a:rPr lang="en" sz="1000">
+                <a:highlight>
+                  <a:srgbClr val="1F1F1F"/>
+                </a:highlight>
+                <a:latin typeface="Consolas"/>
+                <a:ea typeface="Consolas"/>
+                <a:cs typeface="Consolas"/>
+                <a:sym typeface="Consolas"/>
+              </a:rPr>
+              <a:t>// Anywhere in the game</a:t>
+            </a:r>
+            <a:endParaRPr sz="1000">
+              <a:solidFill>
+                <a:srgbClr val="4EC9B0"/>
+              </a:solidFill>
+              <a:highlight>
+                <a:srgbClr val="1F1F1F"/>
+              </a:highlight>
+              <a:latin typeface="Consolas"/>
+              <a:ea typeface="Consolas"/>
+              <a:cs typeface="Consolas"/>
+              <a:sym typeface="Consolas"/>
+            </a:endParaRPr>
+          </a:p>
+          <a:p>
+            <a:pPr indent="0" lvl="0" marL="0" rtl="0" algn="l">
+              <a:lnSpc>
+                <a:spcPct val="115000"/>
+              </a:lnSpc>
+              <a:spcBef>
+                <a:spcPts val="0"/>
+              </a:spcBef>
+              <a:spcAft>
+                <a:spcPts val="0"/>
+              </a:spcAft>
+              <a:buNone/>
+            </a:pPr>
+            <a:r>
+              <a:rPr lang="en" sz="1000">
+                <a:highlight>
+                  <a:srgbClr val="1F1F1F"/>
+                </a:highlight>
+                <a:latin typeface="Consolas"/>
+                <a:ea typeface="Consolas"/>
+                <a:cs typeface="Consolas"/>
+                <a:sym typeface="Consolas"/>
+              </a:rPr>
+              <a:t>Audio.Instance.PlayFlap();</a:t>
+            </a:r>
+            <a:endParaRPr sz="1000">
+              <a:solidFill>
+                <a:srgbClr val="4EC9B0"/>
+              </a:solidFill>
+              <a:highlight>
+                <a:srgbClr val="1F1F1F"/>
+              </a:highlight>
+              <a:latin typeface="Consolas"/>
+              <a:ea typeface="Consolas"/>
+              <a:cs typeface="Consolas"/>
+              <a:sym typeface="Consolas"/>
+            </a:endParaRPr>
+          </a:p>
+        </p:txBody>
+      </p:sp>
+    </p:spTree>
+  </p:cSld>
+  <p:clrMapOvr>
+    <a:masterClrMapping/>
+  </p:clrMapOvr>
+</p:sld>
+</file>
+
+<file path=ppt/slides/slide42.xml><?xml version="1.0" encoding="utf-8"?>
+<p:sld xmlns:a="http://schemas.openxmlformats.org/drawingml/2006/main" xmlns:p="http://schemas.openxmlformats.org/presentationml/2006/main" xmlns:r="http://schemas.openxmlformats.org/officeDocument/2006/relationships">
+  <p:cSld>
+    <p:spTree>
+      <p:nvGrpSpPr>
+        <p:cNvPr id="1" name=""/>
+        <p:cNvGrpSpPr/>
+        <p:nvPr/>
+      </p:nvGrpSpPr>
+      <p:grpSpPr/>
+      <p:sp>
+        <p:nvSpPr>
+          <p:cNvPr id="2" name="Title 1"/>
+          <p:cNvSpPr>
+            <a:spLocks noGrp="1"/>
+          </p:cNvSpPr>
+          <p:nvPr>
+            <p:ph type="title"/>
+          </p:nvPr>
+        </p:nvSpPr>
+        <p:spPr/>
+        <p:txBody>
+          <a:bodyPr/>
+          <a:lstStyle/>
+          <a:p>
+            <a:pPr indent="0" lvl="0" marL="0" rtl="0" algn="l">
+              <a:spcBef>
+                <a:spcPts val="0"/>
+              </a:spcBef>
+              <a:spcAft>
+                <a:spcPts val="0"/>
+              </a:spcAft>
+              <a:buNone/>
+            </a:pPr>
+            <a:r>
+              <a:rPr lang="en"/>
+              <a:t>Check Yourself</a:t>
+            </a:r>
+            <a:endParaRPr/>
+          </a:p>
+        </p:txBody>
+      </p:sp>
+      <p:sp>
+        <p:nvSpPr>
+          <p:cNvPr id="3" name="Text Placeholder 2"/>
+          <p:cNvSpPr>
+            <a:spLocks noGrp="1"/>
+          </p:cNvSpPr>
+          <p:nvPr>
+            <p:ph type="body" idx="1"/>
+          </p:nvPr>
+        </p:nvSpPr>
+        <p:spPr>
+          <a:xfrm>
+            <a:off x="311700" y="885950"/>
+            <a:ext cx="8520600" cy="1335024"/>
+          </a:xfrm>
+        </p:spPr>
+        <p:txBody>
+          <a:bodyPr/>
+          <a:lstStyle/>
+          <a:p>
+            <a:pPr indent="-330200" lvl="0" marL="457200" rtl="0" algn="l">
+              <a:spcBef>
+                <a:spcPts val="0"/>
+              </a:spcBef>
+              <a:spcAft>
+                <a:spcPts val="0"/>
+              </a:spcAft>
+              <a:buSzPts val="1600"/>
+              <a:buChar char="●"/>
+            </a:pPr>
+            <a:r>
+              <a:rPr lang="en"/>
+              <a:t>What problem does a state machine solve compared to a string or enum field?</a:t>
+            </a:r>
+            <a:endParaRPr/>
+          </a:p>
+          <a:p>
+            <a:pPr indent="-330200" lvl="0" marL="457200" rtl="0" algn="l">
+              <a:spcBef>
+                <a:spcPts val="0"/>
+              </a:spcBef>
+              <a:spcAft>
+                <a:spcPts val="0"/>
+              </a:spcAft>
+              <a:buSzPts val="1600"/>
+              <a:buChar char="●"/>
+            </a:pPr>
+            <a:r>
+              <a:rPr lang="en"/>
+              <a:t>What happens if you forget to call Exit() when switching state?</a:t>
+            </a:r>
+            <a:endParaRPr/>
+          </a:p>
+          <a:p>
+            <a:pPr indent="-330200" lvl="0" marL="457200" rtl="0" algn="l">
+              <a:spcBef>
+                <a:spcPts val="0"/>
+              </a:spcBef>
+              <a:spcAft>
+                <a:spcPts val="0"/>
+              </a:spcAft>
+              <a:buSzPts val="1600"/>
+              <a:buChar char="●"/>
+            </a:pPr>
+            <a:r>
+              <a:rPr lang="en"/>
+              <a:t>Why is Singleton considered an anti-pattern by many game programmers?</a:t>
+            </a:r>
+            <a:endParaRPr/>
+          </a:p>
+        </p:txBody>
+      </p:sp>
+      <p:sp>
+        <p:nvSpPr>
+          <p:cNvPr id="4" name="TextBox 3"/>
+          <p:cNvSpPr txBox="1"/>
+          <p:nvPr/>
+        </p:nvSpPr>
+        <p:spPr>
+          <a:xfrm>
+            <a:off x="457200" y="2798064"/>
+            <a:ext cx="8229600" cy="457200"/>
+          </a:xfrm>
+          <a:prstGeom prst="rect">
+            <a:avLst/>
+          </a:prstGeom>
+          <a:noFill/>
+        </p:spPr>
+        <p:txBody>
+          <a:bodyPr wrap="square">
+            <a:spAutoFit/>
+          </a:bodyPr>
+          <a:lstStyle/>
+          <a:p>
+            <a:pPr algn="ctr"/>
+            <a:r>
+              <a:rPr sz="1400" b="0" i="0">
+                <a:solidFill>
+                  <a:srgbClr val="9AA3AB"/>
+                </a:solidFill>
+              </a:rPr>
+              <a:t>The answers, and more questions, are on the course site.</a:t>
+            </a:r>
+          </a:p>
+        </p:txBody>
+      </p:sp>
+    </p:spTree>
+  </p:cSld>
+  <p:clrMapOvr>
+    <a:masterClrMapping/>
+  </p:clrMapOvr>
+</p:sld>
+</file>
+
+<file path=ppt/slides/slide43.xml><?xml version="1.0" encoding="utf-8"?>
+<p:sld xmlns:a="http://schemas.openxmlformats.org/drawingml/2006/main" xmlns:p="http://schemas.openxmlformats.org/presentationml/2006/main" xmlns:r="http://schemas.openxmlformats.org/officeDocument/2006/relationships">
+  <p:cSld>
+    <p:spTree>
+      <p:nvGrpSpPr>
+        <p:cNvPr id="1" name=""/>
+        <p:cNvGrpSpPr/>
+        <p:nvPr/>
+      </p:nvGrpSpPr>
+      <p:grpSpPr/>
+      <p:sp>
+        <p:nvSpPr>
+          <p:cNvPr id="57" name="Google Shape;57;p12"/>
+          <p:cNvSpPr txBox="1"/>
+          <p:nvPr>
+            <p:ph type="title"/>
+          </p:nvPr>
+        </p:nvSpPr>
+        <p:spPr>
+          <a:xfrm>
+            <a:off x="311700" y="195615"/>
+            <a:ext cx="8520600" cy="572700"/>
+          </a:xfrm>
+          <a:prstGeom prst="rect">
+            <a:avLst/>
+          </a:prstGeom>
+        </p:spPr>
+        <p:txBody>
+          <a:bodyPr anchorCtr="0" anchor="t" bIns="91425" lIns="91425" spcFirstLastPara="1" rIns="91425" wrap="square" tIns="91425">
+            <a:normAutofit fontScale="90000"/>
+          </a:bodyPr>
+          <a:lstStyle/>
+          <a:p>
+            <a:pPr indent="0" lvl="0" marL="0" rtl="0" algn="l">
+              <a:spcBef>
+                <a:spcPts val="0"/>
+              </a:spcBef>
+              <a:spcAft>
+                <a:spcPts val="0"/>
+              </a:spcAft>
+              <a:buNone/>
+            </a:pPr>
+            <a:r>
+              <a:rPr lang="en"/>
+              <a:t>Apply It to Your Project</a:t>
+            </a:r>
+            <a:endParaRPr/>
+          </a:p>
+        </p:txBody>
+      </p:sp>
+      <p:sp>
+        <p:nvSpPr>
+          <p:cNvPr id="58" name="Google Shape;58;p12"/>
+          <p:cNvSpPr txBox="1"/>
+          <p:nvPr>
+            <p:ph idx="1" type="body"/>
+          </p:nvPr>
+        </p:nvSpPr>
+        <p:spPr>
+          <a:xfrm>
+            <a:off x="311700" y="885950"/>
+            <a:ext cx="8520600" cy="4023300"/>
+          </a:xfrm>
+          <a:prstGeom prst="rect">
+            <a:avLst/>
+          </a:prstGeom>
+        </p:spPr>
+        <p:txBody>
+          <a:bodyPr anchorCtr="0" anchor="t" bIns="91425" lIns="91425" spcFirstLastPara="1" rIns="91425" wrap="square" tIns="91425">
+            <a:normAutofit/>
+          </a:bodyPr>
+          <a:lstStyle/>
+          <a:p>
+            <a:pPr indent="-330200" lvl="0" marL="457200" rtl="0" algn="l">
+              <a:spcBef>
+                <a:spcPts val="0"/>
+              </a:spcBef>
+              <a:spcAft>
+                <a:spcPts val="0"/>
+              </a:spcAft>
+              <a:buSzPts val="1600"/>
+              <a:buChar char="●"/>
+            </a:pPr>
+            <a:r>
+              <a:rPr lang="en"/>
+              <a:t>Which code in your game could another game reuse?</a:t>
+            </a:r>
+            <a:endParaRPr/>
+          </a:p>
+          <a:p>
+            <a:pPr indent="-317500" lvl="1" marL="914400" rtl="0" algn="l">
+              <a:spcBef>
+                <a:spcPts val="0"/>
+              </a:spcBef>
+              <a:spcAft>
+                <a:spcPts val="0"/>
+              </a:spcAft>
+              <a:buSzPts val="1400"/>
+              <a:buChar char="○"/>
+            </a:pPr>
+            <a:r>
+              <a:rPr lang="en"/>
+              <a:t>That belongs in a class library, like GMDCore</a:t>
+            </a:r>
+            <a:endParaRPr/>
+          </a:p>
+          <a:p>
+            <a:pPr indent="-330200" lvl="0" marL="457200" rtl="0" algn="l">
+              <a:spcBef>
+                <a:spcPts val="0"/>
+              </a:spcBef>
+              <a:spcAft>
+                <a:spcPts val="0"/>
+              </a:spcAft>
+              <a:buSzPts val="1600"/>
+              <a:buChar char="●"/>
+            </a:pPr>
+            <a:r>
+              <a:rPr lang="en"/>
+              <a:t>Which states does your game have? Draw them as a state diagram</a:t>
+            </a:r>
+            <a:endParaRPr/>
+          </a:p>
+          <a:p>
+            <a:pPr indent="-330200" lvl="0" marL="457200" rtl="0" algn="l">
+              <a:spcBef>
+                <a:spcPts val="0"/>
+              </a:spcBef>
+              <a:spcAft>
+                <a:spcPts val="0"/>
+              </a:spcAft>
+              <a:buSzPts val="1600"/>
+              <a:buChar char="●"/>
+            </a:pPr>
+            <a:r>
+              <a:rPr lang="en"/>
+              <a:t>Is anything in your game global? Does it need to be?</a:t>
+            </a:r>
+            <a:endParaRPr/>
+          </a:p>
+        </p:txBody>
+      </p:sp>
+    </p:spTree>
+  </p:cSld>
+  <p:clrMapOvr>
+    <a:masterClrMapping/>
+  </p:clrMapOvr>
+</p:sld>
+</file>
+
+<file path=ppt/slides/slide44.xml><?xml version="1.0" encoding="utf-8"?>
+<p:sld xmlns:a="http://schemas.openxmlformats.org/drawingml/2006/main" xmlns:p="http://schemas.openxmlformats.org/presentationml/2006/main" xmlns:r="http://schemas.openxmlformats.org/officeDocument/2006/relationships">
+  <p:cSld>
+    <p:spTree>
+      <p:nvGrpSpPr>
+        <p:cNvPr id="1" name=""/>
+        <p:cNvGrpSpPr/>
+        <p:nvPr/>
+      </p:nvGrpSpPr>
+      <p:grpSpPr/>
+      <p:sp>
+        <p:nvSpPr>
+          <p:cNvPr id="57" name="Google Shape;57;p12"/>
+          <p:cNvSpPr txBox="1"/>
+          <p:nvPr>
+            <p:ph type="title"/>
+          </p:nvPr>
+        </p:nvSpPr>
+        <p:spPr>
+          <a:xfrm>
+            <a:off x="311700" y="195615"/>
+            <a:ext cx="8520600" cy="572700"/>
+          </a:xfrm>
+          <a:prstGeom prst="rect">
+            <a:avLst/>
+          </a:prstGeom>
+        </p:spPr>
+        <p:txBody>
+          <a:bodyPr anchorCtr="0" anchor="t" bIns="91425" lIns="91425" spcFirstLastPara="1" rIns="91425" wrap="square" tIns="91425">
+            <a:normAutofit fontScale="90000"/>
+          </a:bodyPr>
+          <a:lstStyle/>
+          <a:p>
+            <a:pPr indent="0" lvl="0" marL="0" rtl="0" algn="l">
+              <a:spcBef>
+                <a:spcPts val="0"/>
+              </a:spcBef>
+              <a:spcAft>
+                <a:spcPts val="0"/>
+              </a:spcAft>
+              <a:buNone/>
+            </a:pPr>
+            <a:r>
+              <a:rPr lang="en"/>
+              <a:t>Your Course Project</a:t>
+            </a:r>
+            <a:endParaRPr/>
+          </a:p>
+        </p:txBody>
+      </p:sp>
+      <p:sp>
+        <p:nvSpPr>
+          <p:cNvPr id="58" name="Google Shape;58;p12"/>
+          <p:cNvSpPr txBox="1"/>
+          <p:nvPr>
+            <p:ph idx="1" type="body"/>
+          </p:nvPr>
+        </p:nvSpPr>
+        <p:spPr>
+          <a:xfrm>
+            <a:off x="311700" y="885950"/>
+            <a:ext cx="8520600" cy="4023300"/>
+          </a:xfrm>
+          <a:prstGeom prst="rect">
+            <a:avLst/>
+          </a:prstGeom>
+        </p:spPr>
+        <p:txBody>
+          <a:bodyPr anchorCtr="0" anchor="t" bIns="91425" lIns="91425" spcFirstLastPara="1" rIns="91425" wrap="square" tIns="91425">
+            <a:normAutofit/>
+          </a:bodyPr>
+          <a:lstStyle/>
+          <a:p>
+            <a:pPr indent="-330200" lvl="0" marL="457200" rtl="0" algn="l">
+              <a:spcBef>
+                <a:spcPts val="0"/>
+              </a:spcBef>
+              <a:spcAft>
+                <a:spcPts val="0"/>
+              </a:spcAft>
+              <a:buSzPts val="1600"/>
+              <a:buChar char="●"/>
+            </a:pPr>
+            <a:r>
+              <a:rPr lang="en"/>
+              <a:t>Start from the gar-starter template on GitHub</a:t>
+            </a:r>
+            <a:endParaRPr/>
+          </a:p>
+          <a:p>
+            <a:pPr indent="-317500" lvl="1" marL="914400" rtl="0" algn="l">
+              <a:spcBef>
+                <a:spcPts val="0"/>
+              </a:spcBef>
+              <a:spcAft>
+                <a:spcPts val="0"/>
+              </a:spcAft>
+              <a:buSzPts val="1400"/>
+              <a:buChar char="○"/>
+            </a:pPr>
+            <a:r>
+              <a:rPr lang="en"/>
+              <a:t>“Use this template”: an empty game with the content builder</a:t>
+            </a:r>
+            <a:endParaRPr/>
+          </a:p>
+          <a:p>
+            <a:pPr indent="-330200" lvl="0" marL="457200" rtl="0" algn="l">
+              <a:spcBef>
+                <a:spcPts val="0"/>
+              </a:spcBef>
+              <a:spcAft>
+                <a:spcPts val="0"/>
+              </a:spcAft>
+              <a:buSzPts val="1600"/>
+              <a:buChar char="●"/>
+            </a:pPr>
+            <a:r>
+              <a:rPr lang="en"/>
+              <a:t>First milestone, by session 04</a:t>
+            </a:r>
+            <a:endParaRPr/>
+          </a:p>
+          <a:p>
+            <a:pPr indent="-317500" lvl="1" marL="914400" rtl="0" algn="l">
+              <a:spcBef>
+                <a:spcPts val="0"/>
+              </a:spcBef>
+              <a:spcAft>
+                <a:spcPts val="0"/>
+              </a:spcAft>
+              <a:buSzPts val="1400"/>
+              <a:buChar char="○"/>
+            </a:pPr>
+            <a:r>
+              <a:rPr lang="en"/>
+              <a:t>Groups formed, game concept written, repository created and link uploaded to itslearning</a:t>
+            </a:r>
+            <a:endParaRPr/>
+          </a:p>
+        </p:txBody>
+      </p:sp>
+    </p:spTree>
+  </p:cSld>
+  <p:clrMapOvr>
+    <a:masterClrMapping/>
+  </p:clrMapOvr>
+</p:sld>
+</file>
+
+<file path=ppt/slides/slide5.xml><?xml version="1.0" encoding="utf-8"?>
 <p:sld xmlns:a="http://schemas.openxmlformats.org/drawingml/2006/main" xmlns:r="http://schemas.openxmlformats.org/officeDocument/2006/relationships" xmlns:mc="http://schemas.openxmlformats.org/markup-compatibility/2006" xmlns:mv="urn:schemas-microsoft-com:mac:vml" xmlns:p="http://schemas.openxmlformats.org/presentationml/2006/main" xmlns:c="http://schemas.openxmlformats.org/drawingml/2006/chart" xmlns:dgm="http://schemas.openxmlformats.org/drawingml/2006/diagram" xmlns:o="urn:schemas-microsoft-com:office:office" xmlns:v="urn:schemas-microsoft-com:vml" xmlns:pvml="urn:schemas-microsoft-com:office:powerpoint" xmlns:com="http://schemas.openxmlformats.org/drawingml/2006/compatibility" xmlns:p14="http://schemas.microsoft.com/office/powerpoint/2010/main" xmlns:p15="http://schemas.microsoft.com/office/powerpoint/2012/main" xmlns:ahyp="http://schemas.microsoft.com/office/drawing/2018/hyperlinkcolor">
   <p:cSld>
     <p:spTree>
@@ -28347,1182 +29792,7 @@
 </p:sld>
 </file>
 
-<file path=ppt/slides/slide40.xml><?xml version="1.0" encoding="utf-8"?>
-<p:sld xmlns:a="http://schemas.openxmlformats.org/drawingml/2006/main" xmlns:p="http://schemas.openxmlformats.org/presentationml/2006/main" xmlns:r="http://schemas.openxmlformats.org/officeDocument/2006/relationships">
-  <p:cSld>
-    <p:spTree>
-      <p:nvGrpSpPr>
-        <p:cNvPr id="1" name=""/>
-        <p:cNvGrpSpPr/>
-        <p:nvPr/>
-      </p:nvGrpSpPr>
-      <p:grpSpPr/>
-      <p:sp>
-        <p:nvSpPr>
-          <p:cNvPr id="263" name="Google Shape;263;p46"/>
-          <p:cNvSpPr txBox="1"/>
-          <p:nvPr>
-            <p:ph type="title"/>
-          </p:nvPr>
-        </p:nvSpPr>
-        <p:spPr>
-          <a:xfrm>
-            <a:off x="311700" y="195615"/>
-            <a:ext cx="8520600" cy="572700"/>
-          </a:xfrm>
-          <a:prstGeom prst="rect">
-            <a:avLst/>
-          </a:prstGeom>
-        </p:spPr>
-        <p:txBody>
-          <a:bodyPr anchorCtr="0" anchor="t" bIns="91425" lIns="91425" spcFirstLastPara="1" rIns="91425" wrap="square" tIns="91425">
-            <a:normAutofit fontScale="90000"/>
-          </a:bodyPr>
-          <a:lstStyle/>
-          <a:p>
-            <a:pPr indent="0" lvl="0" marL="0" rtl="0" algn="l">
-              <a:spcBef>
-                <a:spcPts val="0"/>
-              </a:spcBef>
-              <a:spcAft>
-                <a:spcPts val="0"/>
-              </a:spcAft>
-              <a:buNone/>
-            </a:pPr>
-            <a:r>
-              <a:rPr lang="en"/>
-              <a:t>Singleton in Flappy Bird</a:t>
-            </a:r>
-            <a:endParaRPr/>
-          </a:p>
-        </p:txBody>
-      </p:sp>
-      <p:sp>
-        <p:nvSpPr>
-          <p:cNvPr id="243" name="Google Shape;243;p43"/>
-          <p:cNvSpPr txBox="1"/>
-          <p:nvPr>
-            <p:ph idx="1" type="body"/>
-          </p:nvPr>
-        </p:nvSpPr>
-        <p:spPr>
-          <a:xfrm>
-            <a:off x="311700" y="1152475"/>
-            <a:ext cx="3900000" cy="3400000"/>
-          </a:xfrm>
-          <a:prstGeom prst="rect">
-            <a:avLst/>
-          </a:prstGeom>
-        </p:spPr>
-        <p:txBody>
-          <a:bodyPr anchorCtr="0" anchor="t" bIns="91425" lIns="91425" spcFirstLastPara="1" rIns="91425" wrap="square" tIns="91425">
-            <a:normAutofit/>
-          </a:bodyPr>
-          <a:lstStyle/>
-          <a:p>
-            <a:pPr indent="-330200" lvl="0" marL="457200" rtl="0" algn="l">
-              <a:spcBef>
-                <a:spcPts val="0"/>
-              </a:spcBef>
-              <a:spcAft>
-                <a:spcPts val="0"/>
-              </a:spcAft>
-              <a:buSzPts val="1600"/>
-              <a:buChar char="●"/>
-            </a:pPr>
-            <a:r>
-              <a:rPr lang="en"/>
-              <a:t>Audio is a Singleton: one object, reached through Audio.Instance</a:t>
-            </a:r>
-            <a:endParaRPr/>
-          </a:p>
-          <a:p>
-            <a:pPr indent="-330200" lvl="0" marL="457200" rtl="0" algn="l">
-              <a:spcBef>
-                <a:spcPts val="0"/>
-              </a:spcBef>
-              <a:spcAft>
-                <a:spcPts val="0"/>
-              </a:spcAft>
-              <a:buSzPts val="1600"/>
-              <a:buChar char="●"/>
-            </a:pPr>
-            <a:r>
-              <a:rPr lang="en"/>
-              <a:t>Art is a static class</a:t>
-            </a:r>
-            <a:endParaRPr/>
-          </a:p>
-          <a:p>
-            <a:pPr indent="-330200" lvl="0" marL="457200" rtl="0" algn="l">
-              <a:spcBef>
-                <a:spcPts val="0"/>
-              </a:spcBef>
-              <a:spcAft>
-                <a:spcPts val="0"/>
-              </a:spcAft>
-              <a:buSzPts val="1600"/>
-              <a:buChar char="●"/>
-            </a:pPr>
-            <a:r>
-              <a:rPr lang="en"/>
-              <a:t>Both give global access</a:t>
-            </a:r>
-            <a:endParaRPr/>
-          </a:p>
-          <a:p>
-            <a:pPr indent="-330200" lvl="0" marL="457200" rtl="0" algn="l">
-              <a:spcBef>
-                <a:spcPts val="0"/>
-              </a:spcBef>
-              <a:spcAft>
-                <a:spcPts val="0"/>
-              </a:spcAft>
-              <a:buSzPts val="1600"/>
-              <a:buChar char="●"/>
-            </a:pPr>
-            <a:r>
-              <a:rPr lang="en"/>
-              <a:t>But Audio is an object</a:t>
-            </a:r>
-            <a:endParaRPr/>
-          </a:p>
-          <a:p>
-            <a:pPr indent="-317500" lvl="1" marL="914400" rtl="0" algn="l">
-              <a:spcBef>
-                <a:spcPts val="0"/>
-              </a:spcBef>
-              <a:spcAft>
-                <a:spcPts val="0"/>
-              </a:spcAft>
-              <a:buSzPts val="1400"/>
-              <a:buChar char="○"/>
-            </a:pPr>
-            <a:r>
-              <a:rPr lang="en"/>
-              <a:t>It could implement an interface or be passed as a parameter</a:t>
-            </a:r>
-            <a:endParaRPr/>
-          </a:p>
-          <a:p>
-            <a:pPr indent="-317500" lvl="1" marL="914400" rtl="0" algn="l">
-              <a:spcBef>
-                <a:spcPts val="0"/>
-              </a:spcBef>
-              <a:spcAft>
-                <a:spcPts val="0"/>
-              </a:spcAft>
-              <a:buSzPts val="1400"/>
-              <a:buChar char="○"/>
-            </a:pPr>
-            <a:r>
-              <a:rPr lang="en"/>
-              <a:t>Pokemon builds on this with a Service Locator</a:t>
-            </a:r>
-            <a:endParaRPr/>
-          </a:p>
-          <a:p>
-            <a:pPr indent="-330200" lvl="0" marL="457200" rtl="0" algn="l">
-              <a:spcBef>
-                <a:spcPts val="0"/>
-              </a:spcBef>
-              <a:spcAft>
-                <a:spcPts val="0"/>
-              </a:spcAft>
-              <a:buSzPts val="1600"/>
-              <a:buChar char="●"/>
-            </a:pPr>
-            <a:r>
-              <a:rPr lang="en"/>
-              <a:t>Step: Flappy12</a:t>
-            </a:r>
-            <a:endParaRPr/>
-          </a:p>
-        </p:txBody>
-      </p:sp>
-      <p:sp>
-        <p:nvSpPr>
-          <p:cNvPr id="264" name="Google Shape;264;p46"/>
-          <p:cNvSpPr txBox="1"/>
-          <p:nvPr>
-            <p:ph idx="2" type="body"/>
-          </p:nvPr>
-        </p:nvSpPr>
-        <p:spPr>
-          <a:xfrm>
-            <a:off x="4500000" y="1152475"/>
-            <a:ext cx="4400000" cy="3600000"/>
-          </a:xfrm>
-          <a:prstGeom prst="rect">
-            <a:avLst/>
-          </a:prstGeom>
-        </p:spPr>
-        <p:txBody>
-          <a:bodyPr anchorCtr="0" anchor="t" bIns="91425" lIns="91425" spcFirstLastPara="1" rIns="91425" wrap="square" tIns="91425">
-            <a:noAutofit/>
-          </a:bodyPr>
-          <a:lstStyle/>
-          <a:p>
-            <a:pPr indent="0" lvl="0" marL="0" rtl="0" algn="l">
-              <a:lnSpc>
-                <a:spcPct val="115000"/>
-              </a:lnSpc>
-              <a:spcBef>
-                <a:spcPts val="0"/>
-              </a:spcBef>
-              <a:spcAft>
-                <a:spcPts val="0"/>
-              </a:spcAft>
-              <a:buNone/>
-            </a:pPr>
-            <a:r>
-              <a:rPr lang="en" sz="1000">
-                <a:highlight>
-                  <a:srgbClr val="1F1F1F"/>
-                </a:highlight>
-                <a:latin typeface="Consolas"/>
-                <a:ea typeface="Consolas"/>
-                <a:cs typeface="Consolas"/>
-                <a:sym typeface="Consolas"/>
-              </a:rPr>
-              <a:t>public class Audio</a:t>
-            </a:r>
-            <a:endParaRPr sz="1000">
-              <a:solidFill>
-                <a:srgbClr val="4EC9B0"/>
-              </a:solidFill>
-              <a:highlight>
-                <a:srgbClr val="1F1F1F"/>
-              </a:highlight>
-              <a:latin typeface="Consolas"/>
-              <a:ea typeface="Consolas"/>
-              <a:cs typeface="Consolas"/>
-              <a:sym typeface="Consolas"/>
-            </a:endParaRPr>
-          </a:p>
-          <a:p>
-            <a:pPr indent="0" lvl="0" marL="0" rtl="0" algn="l">
-              <a:lnSpc>
-                <a:spcPct val="115000"/>
-              </a:lnSpc>
-              <a:spcBef>
-                <a:spcPts val="0"/>
-              </a:spcBef>
-              <a:spcAft>
-                <a:spcPts val="0"/>
-              </a:spcAft>
-              <a:buNone/>
-            </a:pPr>
-            <a:r>
-              <a:rPr lang="en" sz="1000">
-                <a:highlight>
-                  <a:srgbClr val="1F1F1F"/>
-                </a:highlight>
-                <a:latin typeface="Consolas"/>
-                <a:ea typeface="Consolas"/>
-                <a:cs typeface="Consolas"/>
-                <a:sym typeface="Consolas"/>
-              </a:rPr>
-              <a:t>{</a:t>
-            </a:r>
-            <a:endParaRPr sz="1000">
-              <a:solidFill>
-                <a:srgbClr val="4EC9B0"/>
-              </a:solidFill>
-              <a:highlight>
-                <a:srgbClr val="1F1F1F"/>
-              </a:highlight>
-              <a:latin typeface="Consolas"/>
-              <a:ea typeface="Consolas"/>
-              <a:cs typeface="Consolas"/>
-              <a:sym typeface="Consolas"/>
-            </a:endParaRPr>
-          </a:p>
-          <a:p>
-            <a:pPr indent="0" lvl="0" marL="0" rtl="0" algn="l">
-              <a:lnSpc>
-                <a:spcPct val="115000"/>
-              </a:lnSpc>
-              <a:spcBef>
-                <a:spcPts val="0"/>
-              </a:spcBef>
-              <a:spcAft>
-                <a:spcPts val="0"/>
-              </a:spcAft>
-              <a:buNone/>
-            </a:pPr>
-            <a:r>
-              <a:rPr lang="en" sz="1000">
-                <a:highlight>
-                  <a:srgbClr val="1F1F1F"/>
-                </a:highlight>
-                <a:latin typeface="Consolas"/>
-                <a:ea typeface="Consolas"/>
-                <a:cs typeface="Consolas"/>
-                <a:sym typeface="Consolas"/>
-              </a:rPr>
-              <a:t>    public static Audio Instance { get; }</a:t>
-            </a:r>
-            <a:endParaRPr sz="1000">
-              <a:solidFill>
-                <a:srgbClr val="4EC9B0"/>
-              </a:solidFill>
-              <a:highlight>
-                <a:srgbClr val="1F1F1F"/>
-              </a:highlight>
-              <a:latin typeface="Consolas"/>
-              <a:ea typeface="Consolas"/>
-              <a:cs typeface="Consolas"/>
-              <a:sym typeface="Consolas"/>
-            </a:endParaRPr>
-          </a:p>
-          <a:p>
-            <a:pPr indent="0" lvl="0" marL="0" rtl="0" algn="l">
-              <a:lnSpc>
-                <a:spcPct val="115000"/>
-              </a:lnSpc>
-              <a:spcBef>
-                <a:spcPts val="0"/>
-              </a:spcBef>
-              <a:spcAft>
-                <a:spcPts val="0"/>
-              </a:spcAft>
-              <a:buNone/>
-            </a:pPr>
-            <a:r>
-              <a:rPr lang="en" sz="1000">
-                <a:highlight>
-                  <a:srgbClr val="1F1F1F"/>
-                </a:highlight>
-                <a:latin typeface="Consolas"/>
-                <a:ea typeface="Consolas"/>
-                <a:cs typeface="Consolas"/>
-                <a:sym typeface="Consolas"/>
-              </a:rPr>
-              <a:t>        = new Audio();</a:t>
-            </a:r>
-            <a:endParaRPr sz="1000">
-              <a:solidFill>
-                <a:srgbClr val="4EC9B0"/>
-              </a:solidFill>
-              <a:highlight>
-                <a:srgbClr val="1F1F1F"/>
-              </a:highlight>
-              <a:latin typeface="Consolas"/>
-              <a:ea typeface="Consolas"/>
-              <a:cs typeface="Consolas"/>
-              <a:sym typeface="Consolas"/>
-            </a:endParaRPr>
-          </a:p>
-          <a:p>
-            <a:pPr indent="0" lvl="0" marL="0" rtl="0" algn="l">
-              <a:lnSpc>
-                <a:spcPct val="115000"/>
-              </a:lnSpc>
-              <a:spcBef>
-                <a:spcPts val="0"/>
-              </a:spcBef>
-              <a:spcAft>
-                <a:spcPts val="0"/>
-              </a:spcAft>
-              <a:buNone/>
-            </a:pPr>
-            <a:r>
-              <a:rPr lang="en" sz="1000">
-                <a:highlight>
-                  <a:srgbClr val="1F1F1F"/>
-                </a:highlight>
-                <a:latin typeface="Consolas"/>
-                <a:ea typeface="Consolas"/>
-                <a:cs typeface="Consolas"/>
-                <a:sym typeface="Consolas"/>
-              </a:rPr>
-              <a:t/>
-            </a:r>
-            <a:endParaRPr sz="1000">
-              <a:solidFill>
-                <a:srgbClr val="4EC9B0"/>
-              </a:solidFill>
-              <a:highlight>
-                <a:srgbClr val="1F1F1F"/>
-              </a:highlight>
-              <a:latin typeface="Consolas"/>
-              <a:ea typeface="Consolas"/>
-              <a:cs typeface="Consolas"/>
-              <a:sym typeface="Consolas"/>
-            </a:endParaRPr>
-          </a:p>
-          <a:p>
-            <a:pPr indent="0" lvl="0" marL="0" rtl="0" algn="l">
-              <a:lnSpc>
-                <a:spcPct val="115000"/>
-              </a:lnSpc>
-              <a:spcBef>
-                <a:spcPts val="0"/>
-              </a:spcBef>
-              <a:spcAft>
-                <a:spcPts val="0"/>
-              </a:spcAft>
-              <a:buNone/>
-            </a:pPr>
-            <a:r>
-              <a:rPr lang="en" sz="1000">
-                <a:highlight>
-                  <a:srgbClr val="1F1F1F"/>
-                </a:highlight>
-                <a:latin typeface="Consolas"/>
-                <a:ea typeface="Consolas"/>
-                <a:cs typeface="Consolas"/>
-                <a:sym typeface="Consolas"/>
-              </a:rPr>
-              <a:t>    private Audio() { }</a:t>
-            </a:r>
-            <a:endParaRPr sz="1000">
-              <a:solidFill>
-                <a:srgbClr val="4EC9B0"/>
-              </a:solidFill>
-              <a:highlight>
-                <a:srgbClr val="1F1F1F"/>
-              </a:highlight>
-              <a:latin typeface="Consolas"/>
-              <a:ea typeface="Consolas"/>
-              <a:cs typeface="Consolas"/>
-              <a:sym typeface="Consolas"/>
-            </a:endParaRPr>
-          </a:p>
-          <a:p>
-            <a:pPr indent="0" lvl="0" marL="0" rtl="0" algn="l">
-              <a:lnSpc>
-                <a:spcPct val="115000"/>
-              </a:lnSpc>
-              <a:spcBef>
-                <a:spcPts val="0"/>
-              </a:spcBef>
-              <a:spcAft>
-                <a:spcPts val="0"/>
-              </a:spcAft>
-              <a:buNone/>
-            </a:pPr>
-            <a:r>
-              <a:rPr lang="en" sz="1000">
-                <a:highlight>
-                  <a:srgbClr val="1F1F1F"/>
-                </a:highlight>
-                <a:latin typeface="Consolas"/>
-                <a:ea typeface="Consolas"/>
-                <a:cs typeface="Consolas"/>
-                <a:sym typeface="Consolas"/>
-              </a:rPr>
-              <a:t/>
-            </a:r>
-            <a:endParaRPr sz="1000">
-              <a:solidFill>
-                <a:srgbClr val="4EC9B0"/>
-              </a:solidFill>
-              <a:highlight>
-                <a:srgbClr val="1F1F1F"/>
-              </a:highlight>
-              <a:latin typeface="Consolas"/>
-              <a:ea typeface="Consolas"/>
-              <a:cs typeface="Consolas"/>
-              <a:sym typeface="Consolas"/>
-            </a:endParaRPr>
-          </a:p>
-          <a:p>
-            <a:pPr indent="0" lvl="0" marL="0" rtl="0" algn="l">
-              <a:lnSpc>
-                <a:spcPct val="115000"/>
-              </a:lnSpc>
-              <a:spcBef>
-                <a:spcPts val="0"/>
-              </a:spcBef>
-              <a:spcAft>
-                <a:spcPts val="0"/>
-              </a:spcAft>
-              <a:buNone/>
-            </a:pPr>
-            <a:r>
-              <a:rPr lang="en" sz="1000">
-                <a:highlight>
-                  <a:srgbClr val="1F1F1F"/>
-                </a:highlight>
-                <a:latin typeface="Consolas"/>
-                <a:ea typeface="Consolas"/>
-                <a:cs typeface="Consolas"/>
-                <a:sym typeface="Consolas"/>
-              </a:rPr>
-              <a:t>    public void PlayFlap() =&gt; _flap.Play();</a:t>
-            </a:r>
-            <a:endParaRPr sz="1000">
-              <a:solidFill>
-                <a:srgbClr val="4EC9B0"/>
-              </a:solidFill>
-              <a:highlight>
-                <a:srgbClr val="1F1F1F"/>
-              </a:highlight>
-              <a:latin typeface="Consolas"/>
-              <a:ea typeface="Consolas"/>
-              <a:cs typeface="Consolas"/>
-              <a:sym typeface="Consolas"/>
-            </a:endParaRPr>
-          </a:p>
-          <a:p>
-            <a:pPr indent="0" lvl="0" marL="0" rtl="0" algn="l">
-              <a:lnSpc>
-                <a:spcPct val="115000"/>
-              </a:lnSpc>
-              <a:spcBef>
-                <a:spcPts val="0"/>
-              </a:spcBef>
-              <a:spcAft>
-                <a:spcPts val="0"/>
-              </a:spcAft>
-              <a:buNone/>
-            </a:pPr>
-            <a:r>
-              <a:rPr lang="en" sz="1000">
-                <a:highlight>
-                  <a:srgbClr val="1F1F1F"/>
-                </a:highlight>
-                <a:latin typeface="Consolas"/>
-                <a:ea typeface="Consolas"/>
-                <a:cs typeface="Consolas"/>
-                <a:sym typeface="Consolas"/>
-              </a:rPr>
-              <a:t>    // PlayMusic, PlayScore, PlayCrash...</a:t>
-            </a:r>
-            <a:endParaRPr sz="1000">
-              <a:solidFill>
-                <a:srgbClr val="4EC9B0"/>
-              </a:solidFill>
-              <a:highlight>
-                <a:srgbClr val="1F1F1F"/>
-              </a:highlight>
-              <a:latin typeface="Consolas"/>
-              <a:ea typeface="Consolas"/>
-              <a:cs typeface="Consolas"/>
-              <a:sym typeface="Consolas"/>
-            </a:endParaRPr>
-          </a:p>
-          <a:p>
-            <a:pPr indent="0" lvl="0" marL="0" rtl="0" algn="l">
-              <a:lnSpc>
-                <a:spcPct val="115000"/>
-              </a:lnSpc>
-              <a:spcBef>
-                <a:spcPts val="0"/>
-              </a:spcBef>
-              <a:spcAft>
-                <a:spcPts val="0"/>
-              </a:spcAft>
-              <a:buNone/>
-            </a:pPr>
-            <a:r>
-              <a:rPr lang="en" sz="1000">
-                <a:highlight>
-                  <a:srgbClr val="1F1F1F"/>
-                </a:highlight>
-                <a:latin typeface="Consolas"/>
-                <a:ea typeface="Consolas"/>
-                <a:cs typeface="Consolas"/>
-                <a:sym typeface="Consolas"/>
-              </a:rPr>
-              <a:t>}</a:t>
-            </a:r>
-            <a:endParaRPr sz="1000">
-              <a:solidFill>
-                <a:srgbClr val="4EC9B0"/>
-              </a:solidFill>
-              <a:highlight>
-                <a:srgbClr val="1F1F1F"/>
-              </a:highlight>
-              <a:latin typeface="Consolas"/>
-              <a:ea typeface="Consolas"/>
-              <a:cs typeface="Consolas"/>
-              <a:sym typeface="Consolas"/>
-            </a:endParaRPr>
-          </a:p>
-          <a:p>
-            <a:pPr indent="0" lvl="0" marL="0" rtl="0" algn="l">
-              <a:lnSpc>
-                <a:spcPct val="115000"/>
-              </a:lnSpc>
-              <a:spcBef>
-                <a:spcPts val="0"/>
-              </a:spcBef>
-              <a:spcAft>
-                <a:spcPts val="0"/>
-              </a:spcAft>
-              <a:buNone/>
-            </a:pPr>
-            <a:r>
-              <a:rPr lang="en" sz="1000">
-                <a:highlight>
-                  <a:srgbClr val="1F1F1F"/>
-                </a:highlight>
-                <a:latin typeface="Consolas"/>
-                <a:ea typeface="Consolas"/>
-                <a:cs typeface="Consolas"/>
-                <a:sym typeface="Consolas"/>
-              </a:rPr>
-              <a:t/>
-            </a:r>
-            <a:endParaRPr sz="1000">
-              <a:solidFill>
-                <a:srgbClr val="4EC9B0"/>
-              </a:solidFill>
-              <a:highlight>
-                <a:srgbClr val="1F1F1F"/>
-              </a:highlight>
-              <a:latin typeface="Consolas"/>
-              <a:ea typeface="Consolas"/>
-              <a:cs typeface="Consolas"/>
-              <a:sym typeface="Consolas"/>
-            </a:endParaRPr>
-          </a:p>
-          <a:p>
-            <a:pPr indent="0" lvl="0" marL="0" rtl="0" algn="l">
-              <a:lnSpc>
-                <a:spcPct val="115000"/>
-              </a:lnSpc>
-              <a:spcBef>
-                <a:spcPts val="0"/>
-              </a:spcBef>
-              <a:spcAft>
-                <a:spcPts val="0"/>
-              </a:spcAft>
-              <a:buNone/>
-            </a:pPr>
-            <a:r>
-              <a:rPr lang="en" sz="1000">
-                <a:highlight>
-                  <a:srgbClr val="1F1F1F"/>
-                </a:highlight>
-                <a:latin typeface="Consolas"/>
-                <a:ea typeface="Consolas"/>
-                <a:cs typeface="Consolas"/>
-                <a:sym typeface="Consolas"/>
-              </a:rPr>
-              <a:t>// Anywhere in the game</a:t>
-            </a:r>
-            <a:endParaRPr sz="1000">
-              <a:solidFill>
-                <a:srgbClr val="4EC9B0"/>
-              </a:solidFill>
-              <a:highlight>
-                <a:srgbClr val="1F1F1F"/>
-              </a:highlight>
-              <a:latin typeface="Consolas"/>
-              <a:ea typeface="Consolas"/>
-              <a:cs typeface="Consolas"/>
-              <a:sym typeface="Consolas"/>
-            </a:endParaRPr>
-          </a:p>
-          <a:p>
-            <a:pPr indent="0" lvl="0" marL="0" rtl="0" algn="l">
-              <a:lnSpc>
-                <a:spcPct val="115000"/>
-              </a:lnSpc>
-              <a:spcBef>
-                <a:spcPts val="0"/>
-              </a:spcBef>
-              <a:spcAft>
-                <a:spcPts val="0"/>
-              </a:spcAft>
-              <a:buNone/>
-            </a:pPr>
-            <a:r>
-              <a:rPr lang="en" sz="1000">
-                <a:highlight>
-                  <a:srgbClr val="1F1F1F"/>
-                </a:highlight>
-                <a:latin typeface="Consolas"/>
-                <a:ea typeface="Consolas"/>
-                <a:cs typeface="Consolas"/>
-                <a:sym typeface="Consolas"/>
-              </a:rPr>
-              <a:t>Audio.Instance.PlayFlap();</a:t>
-            </a:r>
-            <a:endParaRPr sz="1000">
-              <a:solidFill>
-                <a:srgbClr val="4EC9B0"/>
-              </a:solidFill>
-              <a:highlight>
-                <a:srgbClr val="1F1F1F"/>
-              </a:highlight>
-              <a:latin typeface="Consolas"/>
-              <a:ea typeface="Consolas"/>
-              <a:cs typeface="Consolas"/>
-              <a:sym typeface="Consolas"/>
-            </a:endParaRPr>
-          </a:p>
-        </p:txBody>
-      </p:sp>
-    </p:spTree>
-  </p:cSld>
-  <p:clrMapOvr>
-    <a:masterClrMapping/>
-  </p:clrMapOvr>
-</p:sld>
-</file>
-
-<file path=ppt/slides/slide41.xml><?xml version="1.0" encoding="utf-8"?>
-<p:sld xmlns:a="http://schemas.openxmlformats.org/drawingml/2006/main" xmlns:p="http://schemas.openxmlformats.org/presentationml/2006/main" xmlns:r="http://schemas.openxmlformats.org/officeDocument/2006/relationships">
-  <p:cSld>
-    <p:spTree>
-      <p:nvGrpSpPr>
-        <p:cNvPr id="1" name=""/>
-        <p:cNvGrpSpPr/>
-        <p:nvPr/>
-      </p:nvGrpSpPr>
-      <p:grpSpPr/>
-      <p:sp>
-        <p:nvSpPr>
-          <p:cNvPr id="2" name="Title 1"/>
-          <p:cNvSpPr>
-            <a:spLocks noGrp="1"/>
-          </p:cNvSpPr>
-          <p:nvPr>
-            <p:ph type="title"/>
-          </p:nvPr>
-        </p:nvSpPr>
-        <p:spPr/>
-        <p:txBody>
-          <a:bodyPr/>
-          <a:lstStyle/>
-          <a:p>
-            <a:pPr indent="0" lvl="0" marL="0" rtl="0" algn="l">
-              <a:spcBef>
-                <a:spcPts val="0"/>
-              </a:spcBef>
-              <a:spcAft>
-                <a:spcPts val="0"/>
-              </a:spcAft>
-              <a:buNone/>
-            </a:pPr>
-            <a:r>
-              <a:rPr lang="en"/>
-              <a:t>Check Yourself</a:t>
-            </a:r>
-            <a:endParaRPr/>
-          </a:p>
-        </p:txBody>
-      </p:sp>
-      <p:sp>
-        <p:nvSpPr>
-          <p:cNvPr id="3" name="Text Placeholder 2"/>
-          <p:cNvSpPr>
-            <a:spLocks noGrp="1"/>
-          </p:cNvSpPr>
-          <p:nvPr>
-            <p:ph type="body" idx="1"/>
-          </p:nvPr>
-        </p:nvSpPr>
-        <p:spPr>
-          <a:xfrm>
-            <a:off x="311700" y="885950"/>
-            <a:ext cx="8520600" cy="1335024"/>
-          </a:xfrm>
-        </p:spPr>
-        <p:txBody>
-          <a:bodyPr/>
-          <a:lstStyle/>
-          <a:p>
-            <a:pPr indent="-330200" lvl="0" marL="457200" rtl="0" algn="l">
-              <a:spcBef>
-                <a:spcPts val="0"/>
-              </a:spcBef>
-              <a:spcAft>
-                <a:spcPts val="0"/>
-              </a:spcAft>
-              <a:buSzPts val="1600"/>
-              <a:buChar char="●"/>
-            </a:pPr>
-            <a:r>
-              <a:rPr lang="en"/>
-              <a:t>What problem does a state machine solve compared to a string or enum field?</a:t>
-            </a:r>
-            <a:endParaRPr/>
-          </a:p>
-          <a:p>
-            <a:pPr indent="-330200" lvl="0" marL="457200" rtl="0" algn="l">
-              <a:spcBef>
-                <a:spcPts val="0"/>
-              </a:spcBef>
-              <a:spcAft>
-                <a:spcPts val="0"/>
-              </a:spcAft>
-              <a:buSzPts val="1600"/>
-              <a:buChar char="●"/>
-            </a:pPr>
-            <a:r>
-              <a:rPr lang="en"/>
-              <a:t>What happens if you forget to call Exit() when switching state?</a:t>
-            </a:r>
-            <a:endParaRPr/>
-          </a:p>
-          <a:p>
-            <a:pPr indent="-330200" lvl="0" marL="457200" rtl="0" algn="l">
-              <a:spcBef>
-                <a:spcPts val="0"/>
-              </a:spcBef>
-              <a:spcAft>
-                <a:spcPts val="0"/>
-              </a:spcAft>
-              <a:buSzPts val="1600"/>
-              <a:buChar char="●"/>
-            </a:pPr>
-            <a:r>
-              <a:rPr lang="en"/>
-              <a:t>Why is Singleton considered an anti-pattern by many game programmers?</a:t>
-            </a:r>
-            <a:endParaRPr/>
-          </a:p>
-        </p:txBody>
-      </p:sp>
-      <p:sp>
-        <p:nvSpPr>
-          <p:cNvPr id="4" name="TextBox 3"/>
-          <p:cNvSpPr txBox="1"/>
-          <p:nvPr/>
-        </p:nvSpPr>
-        <p:spPr>
-          <a:xfrm>
-            <a:off x="457200" y="2798064"/>
-            <a:ext cx="8229600" cy="457200"/>
-          </a:xfrm>
-          <a:prstGeom prst="rect">
-            <a:avLst/>
-          </a:prstGeom>
-          <a:noFill/>
-        </p:spPr>
-        <p:txBody>
-          <a:bodyPr wrap="square">
-            <a:spAutoFit/>
-          </a:bodyPr>
-          <a:lstStyle/>
-          <a:p>
-            <a:pPr algn="ctr"/>
-            <a:r>
-              <a:rPr sz="1400" b="0" i="0">
-                <a:solidFill>
-                  <a:srgbClr val="9AA3AB"/>
-                </a:solidFill>
-              </a:rPr>
-              <a:t>The answers, and more questions, are on the course site.</a:t>
-            </a:r>
-          </a:p>
-        </p:txBody>
-      </p:sp>
-    </p:spTree>
-  </p:cSld>
-  <p:clrMapOvr>
-    <a:masterClrMapping/>
-  </p:clrMapOvr>
-</p:sld>
-</file>
-
-<file path=ppt/slides/slide42.xml><?xml version="1.0" encoding="utf-8"?>
-<p:sld xmlns:a="http://schemas.openxmlformats.org/drawingml/2006/main" xmlns:p="http://schemas.openxmlformats.org/presentationml/2006/main" xmlns:r="http://schemas.openxmlformats.org/officeDocument/2006/relationships">
-  <p:cSld>
-    <p:spTree>
-      <p:nvGrpSpPr>
-        <p:cNvPr id="1" name=""/>
-        <p:cNvGrpSpPr/>
-        <p:nvPr/>
-      </p:nvGrpSpPr>
-      <p:grpSpPr/>
-      <p:sp>
-        <p:nvSpPr>
-          <p:cNvPr id="57" name="Google Shape;57;p12"/>
-          <p:cNvSpPr txBox="1"/>
-          <p:nvPr>
-            <p:ph type="title"/>
-          </p:nvPr>
-        </p:nvSpPr>
-        <p:spPr>
-          <a:xfrm>
-            <a:off x="311700" y="195615"/>
-            <a:ext cx="8520600" cy="572700"/>
-          </a:xfrm>
-          <a:prstGeom prst="rect">
-            <a:avLst/>
-          </a:prstGeom>
-        </p:spPr>
-        <p:txBody>
-          <a:bodyPr anchorCtr="0" anchor="t" bIns="91425" lIns="91425" spcFirstLastPara="1" rIns="91425" wrap="square" tIns="91425">
-            <a:normAutofit fontScale="90000"/>
-          </a:bodyPr>
-          <a:lstStyle/>
-          <a:p>
-            <a:pPr indent="0" lvl="0" marL="0" rtl="0" algn="l">
-              <a:spcBef>
-                <a:spcPts val="0"/>
-              </a:spcBef>
-              <a:spcAft>
-                <a:spcPts val="0"/>
-              </a:spcAft>
-              <a:buNone/>
-            </a:pPr>
-            <a:r>
-              <a:rPr lang="en"/>
-              <a:t>Apply It to Your Project</a:t>
-            </a:r>
-            <a:endParaRPr/>
-          </a:p>
-        </p:txBody>
-      </p:sp>
-      <p:sp>
-        <p:nvSpPr>
-          <p:cNvPr id="58" name="Google Shape;58;p12"/>
-          <p:cNvSpPr txBox="1"/>
-          <p:nvPr>
-            <p:ph idx="1" type="body"/>
-          </p:nvPr>
-        </p:nvSpPr>
-        <p:spPr>
-          <a:xfrm>
-            <a:off x="311700" y="885950"/>
-            <a:ext cx="8520600" cy="4023300"/>
-          </a:xfrm>
-          <a:prstGeom prst="rect">
-            <a:avLst/>
-          </a:prstGeom>
-        </p:spPr>
-        <p:txBody>
-          <a:bodyPr anchorCtr="0" anchor="t" bIns="91425" lIns="91425" spcFirstLastPara="1" rIns="91425" wrap="square" tIns="91425">
-            <a:normAutofit/>
-          </a:bodyPr>
-          <a:lstStyle/>
-          <a:p>
-            <a:pPr indent="-330200" lvl="0" marL="457200" rtl="0" algn="l">
-              <a:spcBef>
-                <a:spcPts val="0"/>
-              </a:spcBef>
-              <a:spcAft>
-                <a:spcPts val="0"/>
-              </a:spcAft>
-              <a:buSzPts val="1600"/>
-              <a:buChar char="●"/>
-            </a:pPr>
-            <a:r>
-              <a:rPr lang="en"/>
-              <a:t>Which code in your game could another game reuse?</a:t>
-            </a:r>
-            <a:endParaRPr/>
-          </a:p>
-          <a:p>
-            <a:pPr indent="-317500" lvl="1" marL="914400" rtl="0" algn="l">
-              <a:spcBef>
-                <a:spcPts val="0"/>
-              </a:spcBef>
-              <a:spcAft>
-                <a:spcPts val="0"/>
-              </a:spcAft>
-              <a:buSzPts val="1400"/>
-              <a:buChar char="○"/>
-            </a:pPr>
-            <a:r>
-              <a:rPr lang="en"/>
-              <a:t>That belongs in a class library, like GMDCore</a:t>
-            </a:r>
-            <a:endParaRPr/>
-          </a:p>
-          <a:p>
-            <a:pPr indent="-330200" lvl="0" marL="457200" rtl="0" algn="l">
-              <a:spcBef>
-                <a:spcPts val="0"/>
-              </a:spcBef>
-              <a:spcAft>
-                <a:spcPts val="0"/>
-              </a:spcAft>
-              <a:buSzPts val="1600"/>
-              <a:buChar char="●"/>
-            </a:pPr>
-            <a:r>
-              <a:rPr lang="en"/>
-              <a:t>Which states does your game have? Draw them as a state diagram</a:t>
-            </a:r>
-            <a:endParaRPr/>
-          </a:p>
-          <a:p>
-            <a:pPr indent="-330200" lvl="0" marL="457200" rtl="0" algn="l">
-              <a:spcBef>
-                <a:spcPts val="0"/>
-              </a:spcBef>
-              <a:spcAft>
-                <a:spcPts val="0"/>
-              </a:spcAft>
-              <a:buSzPts val="1600"/>
-              <a:buChar char="●"/>
-            </a:pPr>
-            <a:r>
-              <a:rPr lang="en"/>
-              <a:t>Is anything in your game global? Does it need to be?</a:t>
-            </a:r>
-            <a:endParaRPr/>
-          </a:p>
-        </p:txBody>
-      </p:sp>
-    </p:spTree>
-  </p:cSld>
-  <p:clrMapOvr>
-    <a:masterClrMapping/>
-  </p:clrMapOvr>
-</p:sld>
-</file>
-
-<file path=ppt/slides/slide43.xml><?xml version="1.0" encoding="utf-8"?>
-<p:sld xmlns:a="http://schemas.openxmlformats.org/drawingml/2006/main" xmlns:p="http://schemas.openxmlformats.org/presentationml/2006/main" xmlns:r="http://schemas.openxmlformats.org/officeDocument/2006/relationships">
-  <p:cSld>
-    <p:spTree>
-      <p:nvGrpSpPr>
-        <p:cNvPr id="1" name=""/>
-        <p:cNvGrpSpPr/>
-        <p:nvPr/>
-      </p:nvGrpSpPr>
-      <p:grpSpPr/>
-      <p:sp>
-        <p:nvSpPr>
-          <p:cNvPr id="57" name="Google Shape;57;p12"/>
-          <p:cNvSpPr txBox="1"/>
-          <p:nvPr>
-            <p:ph type="title"/>
-          </p:nvPr>
-        </p:nvSpPr>
-        <p:spPr>
-          <a:xfrm>
-            <a:off x="311700" y="195615"/>
-            <a:ext cx="8520600" cy="572700"/>
-          </a:xfrm>
-          <a:prstGeom prst="rect">
-            <a:avLst/>
-          </a:prstGeom>
-        </p:spPr>
-        <p:txBody>
-          <a:bodyPr anchorCtr="0" anchor="t" bIns="91425" lIns="91425" spcFirstLastPara="1" rIns="91425" wrap="square" tIns="91425">
-            <a:normAutofit fontScale="90000"/>
-          </a:bodyPr>
-          <a:lstStyle/>
-          <a:p>
-            <a:pPr indent="0" lvl="0" marL="0" rtl="0" algn="l">
-              <a:spcBef>
-                <a:spcPts val="0"/>
-              </a:spcBef>
-              <a:spcAft>
-                <a:spcPts val="0"/>
-              </a:spcAft>
-              <a:buNone/>
-            </a:pPr>
-            <a:r>
-              <a:rPr lang="en"/>
-              <a:t>Your Course Project</a:t>
-            </a:r>
-            <a:endParaRPr/>
-          </a:p>
-        </p:txBody>
-      </p:sp>
-      <p:sp>
-        <p:nvSpPr>
-          <p:cNvPr id="58" name="Google Shape;58;p12"/>
-          <p:cNvSpPr txBox="1"/>
-          <p:nvPr>
-            <p:ph idx="1" type="body"/>
-          </p:nvPr>
-        </p:nvSpPr>
-        <p:spPr>
-          <a:xfrm>
-            <a:off x="311700" y="885950"/>
-            <a:ext cx="8520600" cy="4023300"/>
-          </a:xfrm>
-          <a:prstGeom prst="rect">
-            <a:avLst/>
-          </a:prstGeom>
-        </p:spPr>
-        <p:txBody>
-          <a:bodyPr anchorCtr="0" anchor="t" bIns="91425" lIns="91425" spcFirstLastPara="1" rIns="91425" wrap="square" tIns="91425">
-            <a:normAutofit/>
-          </a:bodyPr>
-          <a:lstStyle/>
-          <a:p>
-            <a:pPr indent="-330200" lvl="0" marL="457200" rtl="0" algn="l">
-              <a:spcBef>
-                <a:spcPts val="0"/>
-              </a:spcBef>
-              <a:spcAft>
-                <a:spcPts val="0"/>
-              </a:spcAft>
-              <a:buSzPts val="1600"/>
-              <a:buChar char="●"/>
-            </a:pPr>
-            <a:r>
-              <a:rPr lang="en"/>
-              <a:t>Start from the gar-starter template on GitHub</a:t>
-            </a:r>
-            <a:endParaRPr/>
-          </a:p>
-          <a:p>
-            <a:pPr indent="-317500" lvl="1" marL="914400" rtl="0" algn="l">
-              <a:spcBef>
-                <a:spcPts val="0"/>
-              </a:spcBef>
-              <a:spcAft>
-                <a:spcPts val="0"/>
-              </a:spcAft>
-              <a:buSzPts val="1400"/>
-              <a:buChar char="○"/>
-            </a:pPr>
-            <a:r>
-              <a:rPr lang="en"/>
-              <a:t>“Use this template”: an empty game with the content builder</a:t>
-            </a:r>
-            <a:endParaRPr/>
-          </a:p>
-          <a:p>
-            <a:pPr indent="-330200" lvl="0" marL="457200" rtl="0" algn="l">
-              <a:spcBef>
-                <a:spcPts val="0"/>
-              </a:spcBef>
-              <a:spcAft>
-                <a:spcPts val="0"/>
-              </a:spcAft>
-              <a:buSzPts val="1600"/>
-              <a:buChar char="●"/>
-            </a:pPr>
-            <a:r>
-              <a:rPr lang="en"/>
-              <a:t>First milestone, by session 04</a:t>
-            </a:r>
-            <a:endParaRPr/>
-          </a:p>
-          <a:p>
-            <a:pPr indent="-317500" lvl="1" marL="914400" rtl="0" algn="l">
-              <a:spcBef>
-                <a:spcPts val="0"/>
-              </a:spcBef>
-              <a:spcAft>
-                <a:spcPts val="0"/>
-              </a:spcAft>
-              <a:buSzPts val="1400"/>
-              <a:buChar char="○"/>
-            </a:pPr>
-            <a:r>
-              <a:rPr lang="en"/>
-              <a:t>Groups formed, game concept written, repository created and link uploaded to itslearning</a:t>
-            </a:r>
-            <a:endParaRPr/>
-          </a:p>
-        </p:txBody>
-      </p:sp>
-    </p:spTree>
-  </p:cSld>
-  <p:clrMapOvr>
-    <a:masterClrMapping/>
-  </p:clrMapOvr>
-</p:sld>
-</file>
-
-<file path=ppt/slides/slide5.xml><?xml version="1.0" encoding="utf-8"?>
+<file path=ppt/slides/slide6.xml><?xml version="1.0" encoding="utf-8"?>
 <p:sld xmlns:a="http://schemas.openxmlformats.org/drawingml/2006/main" xmlns:r="http://schemas.openxmlformats.org/officeDocument/2006/relationships" xmlns:mc="http://schemas.openxmlformats.org/markup-compatibility/2006" xmlns:mv="urn:schemas-microsoft-com:mac:vml" xmlns:p="http://schemas.openxmlformats.org/presentationml/2006/main" xmlns:c="http://schemas.openxmlformats.org/drawingml/2006/chart" xmlns:dgm="http://schemas.openxmlformats.org/drawingml/2006/diagram" xmlns:o="urn:schemas-microsoft-com:office:office" xmlns:v="urn:schemas-microsoft-com:vml" xmlns:pvml="urn:schemas-microsoft-com:office:powerpoint" xmlns:com="http://schemas.openxmlformats.org/drawingml/2006/compatibility" xmlns:p14="http://schemas.microsoft.com/office/powerpoint/2010/main" xmlns:p15="http://schemas.microsoft.com/office/powerpoint/2012/main" xmlns:ahyp="http://schemas.microsoft.com/office/drawing/2018/hyperlinkcolor">
   <p:cSld>
     <p:spTree>
@@ -29575,7 +29845,7 @@
 </p:sld>
 </file>
 
-<file path=ppt/slides/slide6.xml><?xml version="1.0" encoding="utf-8"?>
+<file path=ppt/slides/slide7.xml><?xml version="1.0" encoding="utf-8"?>
 <p:sld xmlns:a="http://schemas.openxmlformats.org/drawingml/2006/main" xmlns:r="http://schemas.openxmlformats.org/officeDocument/2006/relationships" xmlns:mc="http://schemas.openxmlformats.org/markup-compatibility/2006" xmlns:mv="urn:schemas-microsoft-com:mac:vml" xmlns:p="http://schemas.openxmlformats.org/presentationml/2006/main" xmlns:c="http://schemas.openxmlformats.org/drawingml/2006/chart" xmlns:dgm="http://schemas.openxmlformats.org/drawingml/2006/diagram" xmlns:o="urn:schemas-microsoft-com:office:office" xmlns:v="urn:schemas-microsoft-com:vml" xmlns:pvml="urn:schemas-microsoft-com:office:powerpoint" xmlns:com="http://schemas.openxmlformats.org/drawingml/2006/compatibility" xmlns:p14="http://schemas.microsoft.com/office/powerpoint/2010/main" xmlns:p15="http://schemas.microsoft.com/office/powerpoint/2012/main" xmlns:ahyp="http://schemas.microsoft.com/office/drawing/2018/hyperlinkcolor">
   <p:cSld>
     <p:spTree>
@@ -29668,7 +29938,7 @@
 </p:sld>
 </file>
 
-<file path=ppt/slides/slide7.xml><?xml version="1.0" encoding="utf-8"?>
+<file path=ppt/slides/slide8.xml><?xml version="1.0" encoding="utf-8"?>
 <p:sld xmlns:a="http://schemas.openxmlformats.org/drawingml/2006/main" xmlns:r="http://schemas.openxmlformats.org/officeDocument/2006/relationships" xmlns:mc="http://schemas.openxmlformats.org/markup-compatibility/2006" xmlns:mv="urn:schemas-microsoft-com:mac:vml" xmlns:p="http://schemas.openxmlformats.org/presentationml/2006/main" xmlns:c="http://schemas.openxmlformats.org/drawingml/2006/chart" xmlns:dgm="http://schemas.openxmlformats.org/drawingml/2006/diagram" xmlns:o="urn:schemas-microsoft-com:office:office" xmlns:v="urn:schemas-microsoft-com:vml" xmlns:pvml="urn:schemas-microsoft-com:office:powerpoint" xmlns:com="http://schemas.openxmlformats.org/drawingml/2006/compatibility" xmlns:p14="http://schemas.microsoft.com/office/powerpoint/2010/main" xmlns:p15="http://schemas.microsoft.com/office/powerpoint/2012/main" xmlns:ahyp="http://schemas.microsoft.com/office/drawing/2018/hyperlinkcolor">
   <p:cSld>
     <p:spTree>
@@ -29761,7 +30031,7 @@
 </p:sld>
 </file>
 
-<file path=ppt/slides/slide8.xml><?xml version="1.0" encoding="utf-8"?>
+<file path=ppt/slides/slide9.xml><?xml version="1.0" encoding="utf-8"?>
 <p:sld xmlns:a="http://schemas.openxmlformats.org/drawingml/2006/main" xmlns:r="http://schemas.openxmlformats.org/officeDocument/2006/relationships" xmlns:mc="http://schemas.openxmlformats.org/markup-compatibility/2006" xmlns:mv="urn:schemas-microsoft-com:mac:vml" xmlns:p="http://schemas.openxmlformats.org/presentationml/2006/main" xmlns:c="http://schemas.openxmlformats.org/drawingml/2006/chart" xmlns:dgm="http://schemas.openxmlformats.org/drawingml/2006/diagram" xmlns:o="urn:schemas-microsoft-com:office:office" xmlns:v="urn:schemas-microsoft-com:vml" xmlns:pvml="urn:schemas-microsoft-com:office:powerpoint" xmlns:com="http://schemas.openxmlformats.org/drawingml/2006/compatibility" xmlns:p14="http://schemas.microsoft.com/office/powerpoint/2010/main" xmlns:p15="http://schemas.microsoft.com/office/powerpoint/2012/main" xmlns:ahyp="http://schemas.microsoft.com/office/drawing/2018/hyperlinkcolor">
   <p:cSld>
     <p:spTree>
@@ -29881,99 +30151,6 @@
           </a:p>
         </p:txBody>
       </p:sp>
-    </p:spTree>
-  </p:cSld>
-  <p:clrMapOvr>
-    <a:masterClrMapping/>
-  </p:clrMapOvr>
-</p:sld>
-</file>
-
-<file path=ppt/slides/slide9.xml><?xml version="1.0" encoding="utf-8"?>
-<p:sld xmlns:a="http://schemas.openxmlformats.org/drawingml/2006/main" xmlns:r="http://schemas.openxmlformats.org/officeDocument/2006/relationships" xmlns:mc="http://schemas.openxmlformats.org/markup-compatibility/2006" xmlns:mv="urn:schemas-microsoft-com:mac:vml" xmlns:p="http://schemas.openxmlformats.org/presentationml/2006/main" xmlns:c="http://schemas.openxmlformats.org/drawingml/2006/chart" xmlns:dgm="http://schemas.openxmlformats.org/drawingml/2006/diagram" xmlns:o="urn:schemas-microsoft-com:office:office" xmlns:v="urn:schemas-microsoft-com:vml" xmlns:pvml="urn:schemas-microsoft-com:office:powerpoint" xmlns:com="http://schemas.openxmlformats.org/drawingml/2006/compatibility" xmlns:p14="http://schemas.microsoft.com/office/powerpoint/2010/main" xmlns:p15="http://schemas.microsoft.com/office/powerpoint/2012/main" xmlns:ahyp="http://schemas.microsoft.com/office/drawing/2018/hyperlinkcolor">
-  <p:cSld>
-    <p:spTree>
-      <p:nvGrpSpPr>
-        <p:cNvPr id="85" name="Shape 85"/>
-        <p:cNvGrpSpPr/>
-        <p:nvPr/>
-      </p:nvGrpSpPr>
-      <p:grpSpPr>
-        <a:xfrm>
-          <a:off x="0" y="0"/>
-          <a:ext cx="0" cy="0"/>
-          <a:chOff x="0" y="0"/>
-          <a:chExt cx="0" cy="0"/>
-        </a:xfrm>
-      </p:grpSpPr>
-      <p:sp>
-        <p:nvSpPr>
-          <p:cNvPr id="86" name="Google Shape;86;p17"/>
-          <p:cNvSpPr txBox="1"/>
-          <p:nvPr>
-            <p:ph type="title"/>
-          </p:nvPr>
-        </p:nvSpPr>
-        <p:spPr>
-          <a:xfrm>
-            <a:off x="311700" y="195615"/>
-            <a:ext cx="8520600" cy="572700"/>
-          </a:xfrm>
-          <a:prstGeom prst="rect">
-            <a:avLst/>
-          </a:prstGeom>
-        </p:spPr>
-        <p:txBody>
-          <a:bodyPr anchorCtr="0" anchor="t" bIns="91425" lIns="91425" spcFirstLastPara="1" rIns="91425" wrap="square" tIns="91425">
-            <a:normAutofit fontScale="90000"/>
-          </a:bodyPr>
-          <a:lstStyle/>
-          <a:p>
-            <a:pPr indent="0" lvl="0" marL="0" rtl="0" algn="l">
-              <a:spcBef>
-                <a:spcPts val="0"/>
-              </a:spcBef>
-              <a:spcAft>
-                <a:spcPts val="0"/>
-              </a:spcAft>
-              <a:buNone/>
-            </a:pPr>
-            <a:r>
-              <a:rPr lang="en"/>
-              <a:t>Class Library</a:t>
-            </a:r>
-            <a:endParaRPr/>
-          </a:p>
-        </p:txBody>
-      </p:sp>
-      <p:pic>
-        <p:nvPicPr>
-          <p:cNvPr id="87" name="Google Shape;87;p17"/>
-          <p:cNvPicPr preferRelativeResize="0"/>
-          <p:nvPr/>
-        </p:nvPicPr>
-        <p:blipFill>
-          <a:blip r:embed="rId3">
-            <a:alphaModFix/>
-          </a:blip>
-          <a:stretch>
-            <a:fillRect/>
-          </a:stretch>
-        </p:blipFill>
-        <p:spPr>
-          <a:xfrm>
-            <a:off x="270188" y="1400650"/>
-            <a:ext cx="8603624" cy="2342200"/>
-          </a:xfrm>
-          <a:prstGeom prst="rect">
-            <a:avLst/>
-          </a:prstGeom>
-          <a:noFill/>
-          <a:ln>
-            <a:noFill/>
-          </a:ln>
-        </p:spPr>
-      </p:pic>
     </p:spTree>
   </p:cSld>
   <p:clrMapOvr>

--- a/slides/02 Flappy Bird.pptx
+++ b/slides/02 Flappy Bird.pptx
@@ -51,7 +51,6 @@
     <p:sldId id="295" r:id="rId54"/>
     <p:sldId id="298" r:id="rId57"/>
     <p:sldId id="296" r:id="rId55"/>
-    <p:sldId id="297" r:id="rId56"/>
   </p:sldIdLst>
   <p:sldSz cy="5143500" cx="9144000"/>
   <p:notesSz cx="6858000" cy="9144000"/>
@@ -4027,64 +4026,6 @@
           <a:p>
             <a:r>
               <a:t>Art is a static class, Audio a Singleton. Both global; but Audio is an object, so it could implement an interface. Pokemon builds on that with a Service Locator.</a:t>
-            </a:r>
-          </a:p>
-        </p:txBody>
-      </p:sp>
-    </p:spTree>
-  </p:cSld>
-  <p:clrMapOvr>
-    <a:masterClrMapping/>
-  </p:clrMapOvr>
-</p:notes>
-</file>
-
-<file path=ppt/notesSlides/notesSlide42.xml><?xml version="1.0" encoding="utf-8"?>
-<p:notes xmlns:a="http://schemas.openxmlformats.org/drawingml/2006/main" xmlns:p="http://schemas.openxmlformats.org/presentationml/2006/main" xmlns:r="http://schemas.openxmlformats.org/officeDocument/2006/relationships">
-  <p:cSld>
-    <p:spTree>
-      <p:nvGrpSpPr>
-        <p:cNvPr id="1" name=""/>
-        <p:cNvGrpSpPr/>
-        <p:nvPr/>
-      </p:nvGrpSpPr>
-      <p:grpSpPr>
-        <a:xfrm>
-          <a:off x="0" y="0"/>
-          <a:ext cx="0" cy="0"/>
-          <a:chOff x="0" y="0"/>
-          <a:chExt cx="0" cy="0"/>
-        </a:xfrm>
-      </p:grpSpPr>
-      <p:sp>
-        <p:nvSpPr>
-          <p:cNvPr id="2" name="Slide Image Placeholder 1"/>
-          <p:cNvSpPr>
-            <a:spLocks noGrp="1"/>
-          </p:cNvSpPr>
-          <p:nvPr>
-            <p:ph type="sldImg" idx="2"/>
-          </p:nvPr>
-        </p:nvSpPr>
-        <p:spPr/>
-      </p:sp>
-      <p:sp>
-        <p:nvSpPr>
-          <p:cNvPr id="3" name="Notes Placeholder 2"/>
-          <p:cNvSpPr>
-            <a:spLocks noGrp="1"/>
-          </p:cNvSpPr>
-          <p:nvPr>
-            <p:ph type="body" idx="1"/>
-          </p:nvPr>
-        </p:nvSpPr>
-        <p:spPr/>
-        <p:txBody>
-          <a:bodyPr/>
-          <a:lstStyle/>
-          <a:p>
-            <a:r>
-              <a:t>Start from the gar-starter template. First milestone by session 04: groups, a concept, a repository, the link on itslearning.</a:t>
             </a:r>
           </a:p>
         </p:txBody>
@@ -10616,7 +10557,7 @@
             </a:pPr>
             <a:r>
               <a:rPr lang="en"/>
-              <a:t>Remember from last week?</a:t>
+              <a:t>Remember from Pong?</a:t>
             </a:r>
             <a:endParaRPr/>
           </a:p>
@@ -16902,7 +16843,7 @@
             </a:pPr>
             <a:r>
               <a:rPr lang="en"/>
-              <a:t>AABB - same as last week!</a:t>
+              <a:t>AABB, as in Pong</a:t>
             </a:r>
             <a:endParaRPr/>
           </a:p>
@@ -29193,156 +29134,6 @@
 </p:sld>
 </file>
 
-<file path=ppt/slides/slide44.xml><?xml version="1.0" encoding="utf-8"?>
-<p:sld xmlns:a="http://schemas.openxmlformats.org/drawingml/2006/main" xmlns:p="http://schemas.openxmlformats.org/presentationml/2006/main" xmlns:r="http://schemas.openxmlformats.org/officeDocument/2006/relationships">
-  <p:cSld>
-    <p:spTree>
-      <p:nvGrpSpPr>
-        <p:cNvPr id="1" name=""/>
-        <p:cNvGrpSpPr/>
-        <p:nvPr/>
-      </p:nvGrpSpPr>
-      <p:grpSpPr/>
-      <p:sp>
-        <p:nvSpPr>
-          <p:cNvPr id="57" name="Google Shape;57;p12"/>
-          <p:cNvSpPr txBox="1"/>
-          <p:nvPr>
-            <p:ph type="title"/>
-          </p:nvPr>
-        </p:nvSpPr>
-        <p:spPr>
-          <a:xfrm>
-            <a:off x="311700" y="195615"/>
-            <a:ext cx="8520600" cy="572700"/>
-          </a:xfrm>
-          <a:prstGeom prst="rect">
-            <a:avLst/>
-          </a:prstGeom>
-        </p:spPr>
-        <p:txBody>
-          <a:bodyPr anchorCtr="0" anchor="t" bIns="91425" lIns="91425" spcFirstLastPara="1" rIns="91425" wrap="square" tIns="91425">
-            <a:normAutofit fontScale="90000"/>
-          </a:bodyPr>
-          <a:lstStyle/>
-          <a:p>
-            <a:pPr indent="0" lvl="0" marL="0" rtl="0" algn="l">
-              <a:spcBef>
-                <a:spcPts val="0"/>
-              </a:spcBef>
-              <a:spcAft>
-                <a:spcPts val="0"/>
-              </a:spcAft>
-              <a:buNone/>
-            </a:pPr>
-            <a:r>
-              <a:rPr lang="en"/>
-              <a:t>Your Course Project</a:t>
-            </a:r>
-            <a:endParaRPr/>
-          </a:p>
-        </p:txBody>
-      </p:sp>
-      <p:sp>
-        <p:nvSpPr>
-          <p:cNvPr id="58" name="Google Shape;58;p12"/>
-          <p:cNvSpPr txBox="1"/>
-          <p:nvPr>
-            <p:ph idx="1" type="body"/>
-          </p:nvPr>
-        </p:nvSpPr>
-        <p:spPr>
-          <a:xfrm>
-            <a:off x="311700" y="885950"/>
-            <a:ext cx="8520600" cy="4023300"/>
-          </a:xfrm>
-          <a:prstGeom prst="rect">
-            <a:avLst/>
-          </a:prstGeom>
-        </p:spPr>
-        <p:txBody>
-          <a:bodyPr anchorCtr="0" anchor="t" bIns="91425" lIns="91425" spcFirstLastPara="1" rIns="91425" wrap="square" tIns="91425">
-            <a:normAutofit/>
-          </a:bodyPr>
-          <a:lstStyle/>
-          <a:p>
-            <a:pPr indent="-330200" lvl="0" marL="457200" rtl="0" algn="l">
-              <a:spcBef>
-                <a:spcPts val="0"/>
-              </a:spcBef>
-              <a:spcAft>
-                <a:spcPts val="0"/>
-              </a:spcAft>
-              <a:buSzPts val="1600"/>
-              <a:buChar char="●"/>
-            </a:pPr>
-            <a:r>
-              <a:rPr lang="en"/>
-              <a:t>Start from the gar-starter template on GitHub</a:t>
-            </a:r>
-            <a:endParaRPr/>
-          </a:p>
-          <a:p>
-            <a:pPr indent="-317500" lvl="1" marL="914400" rtl="0" algn="l">
-              <a:spcBef>
-                <a:spcPts val="0"/>
-              </a:spcBef>
-              <a:spcAft>
-                <a:spcPts val="0"/>
-              </a:spcAft>
-              <a:buSzPts val="1400"/>
-              <a:buChar char="○"/>
-            </a:pPr>
-            <a:r>
-              <a:rPr lang="en"/>
-              <a:t>“Use this template”: an empty game with the content builder</a:t>
-            </a:r>
-            <a:endParaRPr/>
-          </a:p>
-          <a:p>
-            <a:pPr indent="-330200" lvl="0" marL="457200" rtl="0" algn="l">
-              <a:spcBef>
-                <a:spcPts val="0"/>
-              </a:spcBef>
-              <a:spcAft>
-                <a:spcPts val="0"/>
-              </a:spcAft>
-              <a:buSzPts val="1600"/>
-              <a:buChar char="●"/>
-            </a:pPr>
-            <a:r>
-              <a:rPr lang="en"/>
-              <a:t>First milestone, by session 04</a:t>
-            </a:r>
-            <a:endParaRPr/>
-          </a:p>
-          <a:p>
-            <a:pPr indent="-317500" lvl="1" marL="914400" rtl="0" algn="l">
-              <a:spcBef>
-                <a:spcPts val="0"/>
-              </a:spcBef>
-              <a:spcAft>
-                <a:spcPts val="0"/>
-              </a:spcAft>
-              <a:buSzPts val="1400"/>
-              <a:buChar char="○"/>
-            </a:pPr>
-            <a:r>
-              <a:rPr lang="en"/>
-              <a:t>Groups formed, game concept written, repository created and link uploaded to itslearning</a:t>
-            </a:r>
-            <a:endParaRPr/>
-          </a:p>
-        </p:txBody>
-      </p:sp>
-    </p:spTree>
-  </p:cSld>
-  <p:clrMapOvr>
-    <a:masterClrMapping/>
-  </p:clrMapOvr>
-</p:sld>
-</file>
-
 <file path=ppt/slides/slide5.xml><?xml version="1.0" encoding="utf-8"?>
 <p:sld xmlns:a="http://schemas.openxmlformats.org/drawingml/2006/main" xmlns:r="http://schemas.openxmlformats.org/officeDocument/2006/relationships" xmlns:mc="http://schemas.openxmlformats.org/markup-compatibility/2006" xmlns:mv="urn:schemas-microsoft-com:mac:vml" xmlns:p="http://schemas.openxmlformats.org/presentationml/2006/main" xmlns:c="http://schemas.openxmlformats.org/drawingml/2006/chart" xmlns:dgm="http://schemas.openxmlformats.org/drawingml/2006/diagram" xmlns:o="urn:schemas-microsoft-com:office:office" xmlns:v="urn:schemas-microsoft-com:vml" xmlns:pvml="urn:schemas-microsoft-com:office:powerpoint" xmlns:com="http://schemas.openxmlformats.org/drawingml/2006/compatibility" xmlns:p14="http://schemas.microsoft.com/office/powerpoint/2010/main" xmlns:p15="http://schemas.microsoft.com/office/powerpoint/2012/main" xmlns:ahyp="http://schemas.microsoft.com/office/drawing/2018/hyperlinkcolor">
   <p:cSld>

--- a/slides/02 Flappy Bird.pptx
+++ b/slides/02 Flappy Bird.pptx
@@ -4512,7 +4512,7 @@
           <a:lstStyle/>
           <a:p>
             <a:r>
-              <a:t>Open gar-games/02-flappy live. Show the README: the step table, the code map, how to run a step.</a:t>
+              <a:t>Open gar-games/02-flappy-bird live. Show the README: the step table, the code map, how to run a step.</a:t>
             </a:r>
           </a:p>
           <a:p>
@@ -29936,7 +29936,7 @@
                 </a:solidFill>
                 <a:hlinkClick r:id="rId3"/>
               </a:rPr>
-              <a:t>github.com/Metamate/gar-games (folder 02-flappy)</a:t>
+              <a:t>github.com/Metamate/gar-games (folder 02-flappy-bird)</a:t>
             </a:r>
             <a:endParaRPr/>
           </a:p>

--- a/slides/02 Flappy Bird.pptx
+++ b/slides/02 Flappy Bird.pptx
@@ -29890,7 +29890,7 @@
         <p:spPr>
           <a:xfrm>
             <a:off x="311700" y="885950"/>
-            <a:ext cx="8520600" cy="4023300"/>
+            <a:ext cx="8520600" cy="1289304"/>
           </a:xfrm>
           <a:prstGeom prst="rect">
             <a:avLst/>
@@ -29914,29 +29914,41 @@
             </a:pPr>
             <a:r>
               <a:rPr lang="en"/>
-              <a:t>All Source code for today’s game can be found here:</a:t>
+              <a:t>github.com/Metamate/gar-games, folder 02-flappy-bird</a:t>
             </a:r>
             <a:endParaRPr/>
           </a:p>
           <a:p>
-            <a:pPr indent="-317500" lvl="1" marL="914400" rtl="0" algn="l">
-              <a:spcBef>
-                <a:spcPts val="0"/>
-              </a:spcBef>
-              <a:spcAft>
-                <a:spcPts val="0"/>
-              </a:spcAft>
-              <a:buSzPts val="1400"/>
-              <a:buChar char="○"/>
+            <a:pPr indent="-330200" lvl="0" marL="457200" rtl="0" algn="l">
+              <a:spcBef>
+                <a:spcPts val="0"/>
+              </a:spcBef>
+              <a:spcAft>
+                <a:spcPts val="0"/>
+              </a:spcAft>
+              <a:buSzPts val="1600"/>
+              <a:buChar char="●"/>
             </a:pPr>
             <a:r>
-              <a:rPr lang="en" u="sng">
-                <a:solidFill>
-                  <a:schemeClr val="hlink"/>
-                </a:solidFill>
-                <a:hlinkClick r:id="rId3"/>
-              </a:rPr>
-              <a:t>github.com/Metamate/gar-games (folder 02-flappy-bird)</a:t>
+              <a:rPr lang="en"/>
+              <a:t>Its README: the steps (Flappy0 to Flappy12), where things are in the code, how to run it</a:t>
+            </a:r>
+            <a:endParaRPr/>
+          </a:p>
+          <a:p>
+            <a:pPr indent="-330200" lvl="0" marL="457200" rtl="0" algn="l">
+              <a:spcBef>
+                <a:spcPts val="0"/>
+              </a:spcBef>
+              <a:spcAft>
+                <a:spcPts val="0"/>
+              </a:spcAft>
+              <a:buSzPts val="1600"/>
+              <a:buChar char="●"/>
+            </a:pPr>
+            <a:r>
+              <a:rPr lang="en"/>
+              <a:t>The course site: today’s concepts in full, the exercises, and questions to check yourself</a:t>
             </a:r>
             <a:endParaRPr/>
           </a:p>

--- a/slides/02 Flappy Bird.pptx
+++ b/slides/02 Flappy Bird.pptx
@@ -22,17 +22,17 @@
     <p:sldId id="266" r:id="rId16"/>
     <p:sldId id="267" r:id="rId17"/>
     <p:sldId id="268" r:id="rId18"/>
-    <p:sldId id="269" r:id="rId19"/>
     <p:sldId id="270" r:id="rId20"/>
     <p:sldId id="271" r:id="rId21"/>
+    <p:sldId id="300" r:id="rId56"/>
     <p:sldId id="272" r:id="rId22"/>
     <p:sldId id="273" r:id="rId23"/>
     <p:sldId id="274" r:id="rId24"/>
     <p:sldId id="275" r:id="rId25"/>
     <p:sldId id="276" r:id="rId26"/>
-    <p:sldId id="277" r:id="rId27"/>
     <p:sldId id="278" r:id="rId28"/>
     <p:sldId id="279" r:id="rId29"/>
+    <p:sldId id="301" r:id="rId59"/>
     <p:sldId id="280" r:id="rId30"/>
     <p:sldId id="281" r:id="rId31"/>
     <p:sldId id="282" r:id="rId32"/>
@@ -41,8 +41,8 @@
     <p:sldId id="285" r:id="rId35"/>
     <p:sldId id="286" r:id="rId36"/>
     <p:sldId id="287" r:id="rId37"/>
-    <p:sldId id="288" r:id="rId38"/>
     <p:sldId id="289" r:id="rId39"/>
+    <p:sldId id="302" r:id="rId60"/>
     <p:sldId id="290" r:id="rId40"/>
     <p:sldId id="291" r:id="rId41"/>
     <p:sldId id="292" r:id="rId42"/>
@@ -1213,100 +1213,6 @@
 </p:notes>
 </file>
 
-<file path=ppt/notesSlides/notesSlide14.xml><?xml version="1.0" encoding="utf-8"?>
-<p:notes xmlns:a="http://schemas.openxmlformats.org/drawingml/2006/main" xmlns:r="http://schemas.openxmlformats.org/officeDocument/2006/relationships" xmlns:mc="http://schemas.openxmlformats.org/markup-compatibility/2006" xmlns:mv="urn:schemas-microsoft-com:mac:vml" xmlns:p="http://schemas.openxmlformats.org/presentationml/2006/main" xmlns:c="http://schemas.openxmlformats.org/drawingml/2006/chart" xmlns:dgm="http://schemas.openxmlformats.org/drawingml/2006/diagram" xmlns:o="urn:schemas-microsoft-com:office:office" xmlns:v="urn:schemas-microsoft-com:vml" xmlns:pvml="urn:schemas-microsoft-com:office:powerpoint" xmlns:com="http://schemas.openxmlformats.org/drawingml/2006/compatibility" xmlns:p14="http://schemas.microsoft.com/office/powerpoint/2010/main" xmlns:p15="http://schemas.microsoft.com/office/powerpoint/2012/main" xmlns:ahyp="http://schemas.microsoft.com/office/drawing/2018/hyperlinkcolor" showMasterPhAnim="0" showMasterSp="0">
-  <p:cSld>
-    <p:spTree>
-      <p:nvGrpSpPr>
-        <p:cNvPr id="112" name="Shape 112"/>
-        <p:cNvGrpSpPr/>
-        <p:nvPr/>
-      </p:nvGrpSpPr>
-      <p:grpSpPr>
-        <a:xfrm>
-          <a:off x="0" y="0"/>
-          <a:ext cx="0" cy="0"/>
-          <a:chOff x="0" y="0"/>
-          <a:chExt cx="0" cy="0"/>
-        </a:xfrm>
-      </p:grpSpPr>
-      <p:sp>
-        <p:nvSpPr>
-          <p:cNvPr id="113" name="Google Shape;113;g3c83da3f632_0_18:notes"/>
-          <p:cNvSpPr/>
-          <p:nvPr>
-            <p:ph idx="2" type="sldImg"/>
-          </p:nvPr>
-        </p:nvSpPr>
-        <p:spPr>
-          <a:xfrm>
-            <a:off x="381300" y="685800"/>
-            <a:ext cx="6096000" cy="3429000"/>
-          </a:xfrm>
-          <a:custGeom>
-            <a:rect b="b" l="l" r="r" t="t"/>
-            <a:pathLst>
-              <a:path extrusionOk="0" h="120000" w="120000">
-                <a:moveTo>
-                  <a:pt x="0" y="0"/>
-                </a:moveTo>
-                <a:lnTo>
-                  <a:pt x="120000" y="0"/>
-                </a:lnTo>
-                <a:lnTo>
-                  <a:pt x="120000" y="120000"/>
-                </a:lnTo>
-                <a:lnTo>
-                  <a:pt x="0" y="120000"/>
-                </a:lnTo>
-                <a:close/>
-              </a:path>
-            </a:pathLst>
-          </a:custGeom>
-        </p:spPr>
-      </p:sp>
-      <p:sp>
-        <p:nvSpPr>
-          <p:cNvPr id="114" name="Google Shape;114;g3c83da3f632_0_18:notes"/>
-          <p:cNvSpPr txBox="1"/>
-          <p:nvPr>
-            <p:ph idx="1" type="body"/>
-          </p:nvPr>
-        </p:nvSpPr>
-        <p:spPr>
-          <a:xfrm>
-            <a:off x="685800" y="4343400"/>
-            <a:ext cx="5486400" cy="4114800"/>
-          </a:xfrm>
-          <a:prstGeom prst="rect">
-            <a:avLst/>
-          </a:prstGeom>
-        </p:spPr>
-        <p:txBody>
-          <a:bodyPr anchorCtr="0" anchor="t" bIns="91425" lIns="91425" spcFirstLastPara="1" rIns="91425" wrap="square" tIns="91425">
-            <a:noAutofit/>
-          </a:bodyPr>
-          <a:lstStyle/>
-          <a:p>
-            <a:r>
-              <a:t>Exercise: draw the background and the ground.</a:t>
-            </a:r>
-          </a:p>
-          <a:p>
-            <a:r>
-              <a:t>Full instructions are on the course site; students work from there. Walk round while they work.</a:t>
-            </a:r>
-          </a:p>
-        </p:txBody>
-      </p:sp>
-    </p:spTree>
-  </p:cSld>
-  <p:clrMapOvr>
-    <a:masterClrMapping/>
-  </p:clrMapOvr>
-</p:notes>
-</file>
-
 <file path=ppt/notesSlides/notesSlide15.xml><?xml version="1.0" encoding="utf-8"?>
 <p:notes xmlns:a="http://schemas.openxmlformats.org/drawingml/2006/main" xmlns:r="http://schemas.openxmlformats.org/officeDocument/2006/relationships" xmlns:mc="http://schemas.openxmlformats.org/markup-compatibility/2006" xmlns:mv="urn:schemas-microsoft-com:mac:vml" xmlns:p="http://schemas.openxmlformats.org/presentationml/2006/main" xmlns:c="http://schemas.openxmlformats.org/drawingml/2006/chart" xmlns:dgm="http://schemas.openxmlformats.org/drawingml/2006/diagram" xmlns:o="urn:schemas-microsoft-com:office:office" xmlns:v="urn:schemas-microsoft-com:vml" xmlns:pvml="urn:schemas-microsoft-com:office:powerpoint" xmlns:com="http://schemas.openxmlformats.org/drawingml/2006/compatibility" xmlns:p14="http://schemas.microsoft.com/office/powerpoint/2010/main" xmlns:p15="http://schemas.microsoft.com/office/powerpoint/2012/main" xmlns:ahyp="http://schemas.microsoft.com/office/drawing/2018/hyperlinkcolor" showMasterPhAnim="0" showMasterSp="0">
   <p:cSld>
@@ -1472,17 +1378,17 @@
           <a:lstStyle/>
           <a:p>
             <a:r>
-              <a:t>Exercise: scroll both layers forever, at different speeds.</a:t>
-            </a:r>
-          </a:p>
-          <a:p>
-            <a:r>
-              <a:t>Hint: the looping points (413 and 512) and the % operator.</a:t>
-            </a:r>
-          </a:p>
-          <a:p>
-            <a:r>
-              <a:t>Full instructions are on the course site; students work from there. Walk round while they work.</a:t>
+              <a:t>Demo: open Flappy0 and Flappy2 side by side, then run Flappy2.</a:t>
+            </a:r>
+          </a:p>
+          <a:p>
+            <a:r>
+              <a:t>- Flappy1: the background and the ground, drawn</a:t>
+            </a:r>
+          </a:p>
+          <a:p>
+            <a:r>
+              <a:t>- Flappy2: both scrolling, looping with %</a:t>
             </a:r>
           </a:p>
         </p:txBody>
@@ -2060,11 +1966,11 @@
 </file>
 
 <file path=ppt/notesSlides/notesSlide22.xml><?xml version="1.0" encoding="utf-8"?>
-<p:notes xmlns:a="http://schemas.openxmlformats.org/drawingml/2006/main" xmlns:r="http://schemas.openxmlformats.org/officeDocument/2006/relationships" xmlns:mc="http://schemas.openxmlformats.org/markup-compatibility/2006" xmlns:mv="urn:schemas-microsoft-com:mac:vml" xmlns:p="http://schemas.openxmlformats.org/presentationml/2006/main" xmlns:c="http://schemas.openxmlformats.org/drawingml/2006/chart" xmlns:dgm="http://schemas.openxmlformats.org/drawingml/2006/diagram" xmlns:o="urn:schemas-microsoft-com:office:office" xmlns:v="urn:schemas-microsoft-com:vml" xmlns:pvml="urn:schemas-microsoft-com:office:powerpoint" xmlns:com="http://schemas.openxmlformats.org/drawingml/2006/compatibility" xmlns:p14="http://schemas.microsoft.com/office/powerpoint/2010/main" xmlns:p15="http://schemas.microsoft.com/office/powerpoint/2012/main" xmlns:ahyp="http://schemas.microsoft.com/office/drawing/2018/hyperlinkcolor" showMasterPhAnim="0" showMasterSp="0">
+<p:notes xmlns:a="http://schemas.openxmlformats.org/drawingml/2006/main" xmlns:p="http://schemas.openxmlformats.org/presentationml/2006/main" xmlns:r="http://schemas.openxmlformats.org/officeDocument/2006/relationships">
   <p:cSld>
     <p:spTree>
       <p:nvGrpSpPr>
-        <p:cNvPr id="162" name="Shape 162"/>
+        <p:cNvPr id="1" name=""/>
         <p:cNvGrpSpPr/>
         <p:nvPr/>
       </p:nvGrpSpPr>
@@ -2078,69 +1984,33 @@
       </p:grpSpPr>
       <p:sp>
         <p:nvSpPr>
-          <p:cNvPr id="163" name="Google Shape;163;g3c79d334e77_0_25:notes"/>
-          <p:cNvSpPr/>
+          <p:cNvPr id="2" name="Slide Image Placeholder 1"/>
+          <p:cNvSpPr>
+            <a:spLocks noGrp="1"/>
+          </p:cNvSpPr>
           <p:nvPr>
-            <p:ph idx="2" type="sldImg"/>
+            <p:ph type="sldImg" idx="2"/>
           </p:nvPr>
         </p:nvSpPr>
-        <p:spPr>
-          <a:xfrm>
-            <a:off x="381300" y="685800"/>
-            <a:ext cx="6096000" cy="3429000"/>
-          </a:xfrm>
-          <a:custGeom>
-            <a:rect b="b" l="l" r="r" t="t"/>
-            <a:pathLst>
-              <a:path extrusionOk="0" h="120000" w="120000">
-                <a:moveTo>
-                  <a:pt x="0" y="0"/>
-                </a:moveTo>
-                <a:lnTo>
-                  <a:pt x="120000" y="0"/>
-                </a:lnTo>
-                <a:lnTo>
-                  <a:pt x="120000" y="120000"/>
-                </a:lnTo>
-                <a:lnTo>
-                  <a:pt x="0" y="120000"/>
-                </a:lnTo>
-                <a:close/>
-              </a:path>
-            </a:pathLst>
-          </a:custGeom>
-        </p:spPr>
+        <p:spPr/>
       </p:sp>
       <p:sp>
         <p:nvSpPr>
-          <p:cNvPr id="164" name="Google Shape;164;g3c79d334e77_0_25:notes"/>
-          <p:cNvSpPr txBox="1"/>
+          <p:cNvPr id="3" name="Notes Placeholder 2"/>
+          <p:cNvSpPr>
+            <a:spLocks noGrp="1"/>
+          </p:cNvSpPr>
           <p:nvPr>
-            <p:ph idx="1" type="body"/>
+            <p:ph type="body" idx="1"/>
           </p:nvPr>
         </p:nvSpPr>
-        <p:spPr>
-          <a:xfrm>
-            <a:off x="685800" y="4343400"/>
-            <a:ext cx="5486400" cy="4114800"/>
-          </a:xfrm>
-          <a:prstGeom prst="rect">
-            <a:avLst/>
-          </a:prstGeom>
-        </p:spPr>
+        <p:spPr/>
         <p:txBody>
-          <a:bodyPr anchorCtr="0" anchor="t" bIns="91425" lIns="91425" spcFirstLastPara="1" rIns="91425" wrap="square" tIns="91425">
-            <a:noAutofit/>
-          </a:bodyPr>
+          <a:bodyPr/>
           <a:lstStyle/>
           <a:p>
             <a:r>
-              <a:t>Exercise: spawn pipes on a timer, scroll them left.</a:t>
-            </a:r>
-          </a:p>
-          <a:p>
-            <a:r>
-              <a:t>Full instructions are on the course site; students work from there. Walk round while they work.</a:t>
+              <a:t>Pairs, about 6 minutes. Count and Interval in CountdownState. The best score can live in ScoreState or PlayState: the state objects are made once and reused, so a field survives.</a:t>
             </a:r>
           </a:p>
         </p:txBody>
@@ -2318,12 +2188,17 @@
           <a:lstStyle/>
           <a:p>
             <a:r>
-              <a:t>Exercise: pairs with a gap that drifts smoothly; remove pairs that leave the screen.</a:t>
-            </a:r>
-          </a:p>
-          <a:p>
-            <a:r>
-              <a:t>Full instructions are on the course site; students work from there. Walk round while they work.</a:t>
+              <a:t>Demo: open Flappy5 and Flappy7 side by side, then run Flappy7.</a:t>
+            </a:r>
+          </a:p>
+          <a:p>
+            <a:r>
+              <a:t>- Flappy6: a pipe on a timer, at a random height</a:t>
+            </a:r>
+          </a:p>
+          <a:p>
+            <a:r>
+              <a:t>- Flappy7: PipePair, the drifting gap, and removing pairs off-screen</a:t>
             </a:r>
           </a:p>
         </p:txBody>
@@ -3153,11 +3028,11 @@
 </file>
 
 <file path=ppt/notesSlides/notesSlide33.xml><?xml version="1.0" encoding="utf-8"?>
-<p:notes xmlns:a="http://schemas.openxmlformats.org/drawingml/2006/main" xmlns:r="http://schemas.openxmlformats.org/officeDocument/2006/relationships" xmlns:mc="http://schemas.openxmlformats.org/markup-compatibility/2006" xmlns:mv="urn:schemas-microsoft-com:mac:vml" xmlns:p="http://schemas.openxmlformats.org/presentationml/2006/main" xmlns:c="http://schemas.openxmlformats.org/drawingml/2006/chart" xmlns:dgm="http://schemas.openxmlformats.org/drawingml/2006/diagram" xmlns:o="urn:schemas-microsoft-com:office:office" xmlns:v="urn:schemas-microsoft-com:vml" xmlns:pvml="urn:schemas-microsoft-com:office:powerpoint" xmlns:com="http://schemas.openxmlformats.org/drawingml/2006/compatibility" xmlns:p14="http://schemas.microsoft.com/office/powerpoint/2010/main" xmlns:p15="http://schemas.microsoft.com/office/powerpoint/2012/main" xmlns:ahyp="http://schemas.microsoft.com/office/drawing/2018/hyperlinkcolor" showMasterPhAnim="0" showMasterSp="0">
+<p:notes xmlns:a="http://schemas.openxmlformats.org/drawingml/2006/main" xmlns:p="http://schemas.openxmlformats.org/presentationml/2006/main" xmlns:r="http://schemas.openxmlformats.org/officeDocument/2006/relationships">
   <p:cSld>
     <p:spTree>
       <p:nvGrpSpPr>
-        <p:cNvPr id="226" name="Shape 226"/>
+        <p:cNvPr id="1" name=""/>
         <p:cNvGrpSpPr/>
         <p:nvPr/>
       </p:nvGrpSpPr>
@@ -3171,69 +3046,33 @@
       </p:grpSpPr>
       <p:sp>
         <p:nvSpPr>
-          <p:cNvPr id="227" name="Google Shape;227;g3c79d334e77_0_45:notes"/>
-          <p:cNvSpPr/>
+          <p:cNvPr id="2" name="Slide Image Placeholder 1"/>
+          <p:cNvSpPr>
+            <a:spLocks noGrp="1"/>
+          </p:cNvSpPr>
           <p:nvPr>
-            <p:ph idx="2" type="sldImg"/>
+            <p:ph type="sldImg" idx="2"/>
           </p:nvPr>
         </p:nvSpPr>
-        <p:spPr>
-          <a:xfrm>
-            <a:off x="381300" y="685800"/>
-            <a:ext cx="6096000" cy="3429000"/>
-          </a:xfrm>
-          <a:custGeom>
-            <a:rect b="b" l="l" r="r" t="t"/>
-            <a:pathLst>
-              <a:path extrusionOk="0" h="120000" w="120000">
-                <a:moveTo>
-                  <a:pt x="0" y="0"/>
-                </a:moveTo>
-                <a:lnTo>
-                  <a:pt x="120000" y="0"/>
-                </a:lnTo>
-                <a:lnTo>
-                  <a:pt x="120000" y="120000"/>
-                </a:lnTo>
-                <a:lnTo>
-                  <a:pt x="0" y="120000"/>
-                </a:lnTo>
-                <a:close/>
-              </a:path>
-            </a:pathLst>
-          </a:custGeom>
-        </p:spPr>
+        <p:spPr/>
       </p:sp>
       <p:sp>
         <p:nvSpPr>
-          <p:cNvPr id="228" name="Google Shape;228;g3c79d334e77_0_45:notes"/>
-          <p:cNvSpPr txBox="1"/>
+          <p:cNvPr id="3" name="Notes Placeholder 2"/>
+          <p:cNvSpPr>
+            <a:spLocks noGrp="1"/>
+          </p:cNvSpPr>
           <p:nvPr>
-            <p:ph idx="1" type="body"/>
+            <p:ph type="body" idx="1"/>
           </p:nvPr>
         </p:nvSpPr>
-        <p:spPr>
-          <a:xfrm>
-            <a:off x="685800" y="4343400"/>
-            <a:ext cx="5486400" cy="4114800"/>
-          </a:xfrm>
-          <a:prstGeom prst="rect">
-            <a:avLst/>
-          </a:prstGeom>
-        </p:spPr>
+        <p:spPr/>
         <p:txBody>
-          <a:bodyPr anchorCtr="0" anchor="t" bIns="91425" lIns="91425" spcFirstLastPara="1" rIns="91425" wrap="square" tIns="91425">
-            <a:noAutofit/>
-          </a:bodyPr>
+          <a:bodyPr/>
           <a:lstStyle/>
           <a:p>
             <a:r>
-              <a:t>Exercise: a point per pipe pair, and a score state. Ask the question on the slide: the score state needs the score; pass it in when changing state.</a:t>
-            </a:r>
-          </a:p>
-          <a:p>
-            <a:r>
-              <a:t>Full instructions are on the course site; students work from there. Walk round while they work.</a:t>
+              <a:t>Pairs, about 5 minutes. The two constants at the top of Game1. Swapped, the ground seems further away than the hills: the eye reads slower as further.</a:t>
             </a:r>
           </a:p>
         </p:txBody>
@@ -3322,12 +3161,17 @@
           <a:lstStyle/>
           <a:p>
             <a:r>
-              <a:t>Exercise: a countdown state between the title (or score) and play.</a:t>
-            </a:r>
-          </a:p>
-          <a:p>
-            <a:r>
-              <a:t>Full instructions are on the course site; students work from there. Walk round while they work.</a:t>
+              <a:t>Demo: open Flappy9 and Flappy11 side by side, then run Flappy11.</a:t>
+            </a:r>
+          </a:p>
+          <a:p>
+            <a:r>
+              <a:t>- Flappy10: a point per pair; ScoreState reads the score through the state machine</a:t>
+            </a:r>
+          </a:p>
+          <a:p>
+            <a:r>
+              <a:t>- Flappy11: CountdownState, 3, 2, 1, between the title or score and play</a:t>
             </a:r>
           </a:p>
         </p:txBody>
@@ -4026,6 +3870,64 @@
           <a:p>
             <a:r>
               <a:t>Art is a static class, Audio a Singleton. Both global; but Audio is an object, so it could implement an interface. Pokemon builds on that with a Service Locator.</a:t>
+            </a:r>
+          </a:p>
+        </p:txBody>
+      </p:sp>
+    </p:spTree>
+  </p:cSld>
+  <p:clrMapOvr>
+    <a:masterClrMapping/>
+  </p:clrMapOvr>
+</p:notes>
+</file>
+
+<file path=ppt/notesSlides/notesSlide42.xml><?xml version="1.0" encoding="utf-8"?>
+<p:notes xmlns:a="http://schemas.openxmlformats.org/drawingml/2006/main" xmlns:p="http://schemas.openxmlformats.org/presentationml/2006/main" xmlns:r="http://schemas.openxmlformats.org/officeDocument/2006/relationships">
+  <p:cSld>
+    <p:spTree>
+      <p:nvGrpSpPr>
+        <p:cNvPr id="1" name=""/>
+        <p:cNvGrpSpPr/>
+        <p:nvPr/>
+      </p:nvGrpSpPr>
+      <p:grpSpPr>
+        <a:xfrm>
+          <a:off x="0" y="0"/>
+          <a:ext cx="0" cy="0"/>
+          <a:chOff x="0" y="0"/>
+          <a:chExt cx="0" cy="0"/>
+        </a:xfrm>
+      </p:grpSpPr>
+      <p:sp>
+        <p:nvSpPr>
+          <p:cNvPr id="2" name="Slide Image Placeholder 1"/>
+          <p:cNvSpPr>
+            <a:spLocks noGrp="1"/>
+          </p:cNvSpPr>
+          <p:nvPr>
+            <p:ph type="sldImg" idx="2"/>
+          </p:nvPr>
+        </p:nvSpPr>
+        <p:spPr/>
+      </p:sp>
+      <p:sp>
+        <p:nvSpPr>
+          <p:cNvPr id="3" name="Notes Placeholder 2"/>
+          <p:cNvSpPr>
+            <a:spLocks noGrp="1"/>
+          </p:cNvSpPr>
+          <p:nvPr>
+            <p:ph type="body" idx="1"/>
+          </p:nvPr>
+        </p:nvSpPr>
+        <p:spPr/>
+        <p:txBody>
+          <a:bodyPr/>
+          <a:lstStyle/>
+          <a:p>
+            <a:r>
+              <a:t>Pairs, about 5 minutes. PipeGap in PipePair, PipeSpawnInterval in Game1. The drift: the random step (-50 to 50) and the clamp in SpawnPipePair.</a:t>
             </a:r>
           </a:p>
         </p:txBody>
@@ -10721,321 +10623,6 @@
   <p:cSld>
     <p:spTree>
       <p:nvGrpSpPr>
-        <p:cNvPr id="115" name="Shape 115"/>
-        <p:cNvGrpSpPr/>
-        <p:nvPr/>
-      </p:nvGrpSpPr>
-      <p:grpSpPr>
-        <a:xfrm>
-          <a:off x="0" y="0"/>
-          <a:ext cx="0" cy="0"/>
-          <a:chOff x="0" y="0"/>
-          <a:chExt cx="0" cy="0"/>
-        </a:xfrm>
-      </p:grpSpPr>
-      <p:sp>
-        <p:nvSpPr>
-          <p:cNvPr id="116" name="Google Shape;116;p22"/>
-          <p:cNvSpPr txBox="1"/>
-          <p:nvPr>
-            <p:ph type="title"/>
-          </p:nvPr>
-        </p:nvSpPr>
-        <p:spPr>
-          <a:xfrm>
-            <a:off x="311700" y="195615"/>
-            <a:ext cx="8520600" cy="572700"/>
-          </a:xfrm>
-          <a:prstGeom prst="rect">
-            <a:avLst/>
-          </a:prstGeom>
-        </p:spPr>
-        <p:txBody>
-          <a:bodyPr anchorCtr="0" anchor="t" bIns="91425" lIns="91425" spcFirstLastPara="1" rIns="91425" wrap="square" tIns="91425">
-            <a:normAutofit fontScale="90000"/>
-          </a:bodyPr>
-          <a:lstStyle/>
-          <a:p>
-            <a:pPr indent="0" lvl="0" marL="0" rtl="0" algn="l">
-              <a:spcBef>
-                <a:spcPts val="0"/>
-              </a:spcBef>
-              <a:spcAft>
-                <a:spcPts val="0"/>
-              </a:spcAft>
-              <a:buNone/>
-            </a:pPr>
-            <a:r>
-              <a:rPr lang="en">
-                <a:solidFill>
-                  <a:schemeClr val="accent5"/>
-                </a:solidFill>
-              </a:rPr>
-              <a:t>Flappy 1: Drawing Images</a:t>
-            </a:r>
-            <a:endParaRPr>
-              <a:solidFill>
-                <a:schemeClr val="accent5"/>
-              </a:solidFill>
-            </a:endParaRPr>
-          </a:p>
-        </p:txBody>
-      </p:sp>
-      <p:sp>
-        <p:nvSpPr>
-          <p:cNvPr id="117" name="Google Shape;117;p22"/>
-          <p:cNvSpPr txBox="1"/>
-          <p:nvPr>
-            <p:ph idx="1" type="body"/>
-          </p:nvPr>
-        </p:nvSpPr>
-        <p:spPr>
-          <a:xfrm>
-            <a:off x="311700" y="885950"/>
-            <a:ext cx="8520600" cy="521208"/>
-          </a:xfrm>
-          <a:prstGeom prst="rect">
-            <a:avLst/>
-          </a:prstGeom>
-        </p:spPr>
-        <p:txBody>
-          <a:bodyPr anchorCtr="0" anchor="t" bIns="91425" lIns="91425" spcFirstLastPara="1" rIns="91425" wrap="square" tIns="91425">
-            <a:normAutofit/>
-          </a:bodyPr>
-          <a:lstStyle/>
-          <a:p>
-            <a:pPr indent="-330200" lvl="0" marL="457200" rtl="0" algn="l">
-              <a:spcBef>
-                <a:spcPts val="0"/>
-              </a:spcBef>
-              <a:spcAft>
-                <a:spcPts val="0"/>
-              </a:spcAft>
-              <a:buSzPts val="1600"/>
-              <a:buChar char="●"/>
-            </a:pPr>
-            <a:r>
-              <a:rPr lang="en"/>
-              <a:t>Goal: draw the background and the ground.</a:t>
-            </a:r>
-            <a:endParaRPr/>
-          </a:p>
-        </p:txBody>
-      </p:sp>
-      <p:pic>
-        <p:nvPicPr>
-          <p:cNvPr id="118" name="Picture 117" descr="f2.png"/>
-          <p:cNvPicPr>
-            <a:picLocks noChangeAspect="1"/>
-          </p:cNvPicPr>
-          <p:nvPr/>
-        </p:nvPicPr>
-        <p:blipFill>
-          <a:blip r:embed="rId5"/>
-          <a:stretch>
-            <a:fillRect/>
-          </a:stretch>
-        </p:blipFill>
-        <p:spPr>
-          <a:xfrm>
-            <a:off x="2377440" y="2148840"/>
-            <a:ext cx="4389120" cy="2468880"/>
-          </a:xfrm>
-          <a:prstGeom prst="rect">
-            <a:avLst/>
-          </a:prstGeom>
-        </p:spPr>
-      </p:pic>
-    </p:spTree>
-  </p:cSld>
-  <p:clrMapOvr>
-    <a:masterClrMapping/>
-  </p:clrMapOvr>
-  <p:timing>
-    <p:tnLst>
-      <p:par>
-        <p:cTn dur="indefinite" nodeType="tmRoot" restart="never">
-          <p:childTnLst>
-            <p:seq concurrent="1" nextAc="seek">
-              <p:cTn dur="indefinite" id="2" nodeType="mainSeq">
-                <p:childTnLst>
-                  <p:par>
-                    <p:cTn fill="hold">
-                      <p:stCondLst>
-                        <p:cond delay="indefinite"/>
-                      </p:stCondLst>
-                      <p:childTnLst>
-                        <p:par>
-                          <p:cTn fill="hold">
-                            <p:stCondLst>
-                              <p:cond delay="0"/>
-                            </p:stCondLst>
-                            <p:childTnLst>
-                              <p:par>
-                                <p:cTn fill="hold" nodeType="clickEffect" presetClass="entr" presetID="1" presetSubtype="0">
-                                  <p:stCondLst>
-                                    <p:cond delay="0"/>
-                                  </p:stCondLst>
-                                  <p:childTnLst>
-                                    <p:set>
-                                      <p:cBhvr>
-                                        <p:cTn dur="1" fill="hold">
-                                          <p:stCondLst>
-                                            <p:cond delay="0"/>
-                                          </p:stCondLst>
-                                        </p:cTn>
-                                        <p:tgtEl>
-                                          <p:spTgt spid="117">
-                                            <p:txEl>
-                                              <p:pRg end="0" st="0"/>
-                                            </p:txEl>
-                                          </p:spTgt>
-                                        </p:tgtEl>
-                                        <p:attrNameLst>
-                                          <p:attrName>style.visibility</p:attrName>
-                                        </p:attrNameLst>
-                                      </p:cBhvr>
-                                      <p:to>
-                                        <p:strVal val="visible"/>
-                                      </p:to>
-                                    </p:set>
-                                  </p:childTnLst>
-                                </p:cTn>
-                              </p:par>
-                            </p:childTnLst>
-                          </p:cTn>
-                        </p:par>
-                      </p:childTnLst>
-                    </p:cTn>
-                  </p:par>
-                  <p:par>
-                    <p:cTn fill="hold">
-                      <p:stCondLst>
-                        <p:cond delay="indefinite"/>
-                      </p:stCondLst>
-                      <p:childTnLst>
-                        <p:par>
-                          <p:cTn fill="hold">
-                            <p:stCondLst>
-                              <p:cond delay="0"/>
-                            </p:stCondLst>
-                            <p:childTnLst>
-                              <p:par>
-                                <p:cTn fill="hold" nodeType="clickEffect" presetClass="entr" presetID="1" presetSubtype="0">
-                                  <p:stCondLst>
-                                    <p:cond delay="0"/>
-                                  </p:stCondLst>
-                                  <p:childTnLst>
-                                    <p:set>
-                                      <p:cBhvr>
-                                        <p:cTn dur="1" fill="hold">
-                                          <p:stCondLst>
-                                            <p:cond delay="0"/>
-                                          </p:stCondLst>
-                                        </p:cTn>
-                                        <p:tgtEl>
-                                          <p:spTgt spid="117">
-                                            <p:txEl>
-                                              <p:pRg end="1" st="1"/>
-                                            </p:txEl>
-                                          </p:spTgt>
-                                        </p:tgtEl>
-                                        <p:attrNameLst>
-                                          <p:attrName>style.visibility</p:attrName>
-                                        </p:attrNameLst>
-                                      </p:cBhvr>
-                                      <p:to>
-                                        <p:strVal val="visible"/>
-                                      </p:to>
-                                    </p:set>
-                                  </p:childTnLst>
-                                </p:cTn>
-                              </p:par>
-                            </p:childTnLst>
-                          </p:cTn>
-                        </p:par>
-                      </p:childTnLst>
-                    </p:cTn>
-                  </p:par>
-                  <p:par>
-                    <p:cTn fill="hold">
-                      <p:stCondLst>
-                        <p:cond delay="indefinite"/>
-                      </p:stCondLst>
-                      <p:childTnLst>
-                        <p:par>
-                          <p:cTn fill="hold">
-                            <p:stCondLst>
-                              <p:cond delay="0"/>
-                            </p:stCondLst>
-                            <p:childTnLst>
-                              <p:par>
-                                <p:cTn fill="hold" nodeType="clickEffect" presetClass="entr" presetID="1" presetSubtype="0">
-                                  <p:stCondLst>
-                                    <p:cond delay="0"/>
-                                  </p:stCondLst>
-                                  <p:childTnLst>
-                                    <p:set>
-                                      <p:cBhvr>
-                                        <p:cTn dur="1" fill="hold">
-                                          <p:stCondLst>
-                                            <p:cond delay="0"/>
-                                          </p:stCondLst>
-                                        </p:cTn>
-                                        <p:tgtEl>
-                                          <p:spTgt spid="117">
-                                            <p:txEl>
-                                              <p:pRg end="2" st="2"/>
-                                            </p:txEl>
-                                          </p:spTgt>
-                                        </p:tgtEl>
-                                        <p:attrNameLst>
-                                          <p:attrName>style.visibility</p:attrName>
-                                        </p:attrNameLst>
-                                      </p:cBhvr>
-                                      <p:to>
-                                        <p:strVal val="visible"/>
-                                      </p:to>
-                                    </p:set>
-                                  </p:childTnLst>
-                                </p:cTn>
-                              </p:par>
-                            </p:childTnLst>
-                          </p:cTn>
-                        </p:par>
-                      </p:childTnLst>
-                    </p:cTn>
-                  </p:par>
-                </p:childTnLst>
-              </p:cTn>
-              <p:prevCondLst>
-                <p:cond evt="onPrev">
-                  <p:tgtEl>
-                    <p:sldTgt/>
-                  </p:tgtEl>
-                </p:cond>
-              </p:prevCondLst>
-              <p:nextCondLst>
-                <p:cond evt="onNext">
-                  <p:tgtEl>
-                    <p:sldTgt/>
-                  </p:tgtEl>
-                </p:cond>
-              </p:nextCondLst>
-            </p:seq>
-          </p:childTnLst>
-        </p:cTn>
-      </p:par>
-    </p:tnLst>
-  </p:timing>
-</p:sld>
-</file>
-
-<file path=ppt/slides/slide16.xml><?xml version="1.0" encoding="utf-8"?>
-<p:sld xmlns:a="http://schemas.openxmlformats.org/drawingml/2006/main" xmlns:r="http://schemas.openxmlformats.org/officeDocument/2006/relationships" xmlns:mc="http://schemas.openxmlformats.org/markup-compatibility/2006" xmlns:mv="urn:schemas-microsoft-com:mac:vml" xmlns:p="http://schemas.openxmlformats.org/presentationml/2006/main" xmlns:c="http://schemas.openxmlformats.org/drawingml/2006/chart" xmlns:dgm="http://schemas.openxmlformats.org/drawingml/2006/diagram" xmlns:o="urn:schemas-microsoft-com:office:office" xmlns:v="urn:schemas-microsoft-com:vml" xmlns:pvml="urn:schemas-microsoft-com:office:powerpoint" xmlns:com="http://schemas.openxmlformats.org/drawingml/2006/compatibility" xmlns:p14="http://schemas.microsoft.com/office/powerpoint/2010/main" xmlns:p15="http://schemas.microsoft.com/office/powerpoint/2012/main" xmlns:ahyp="http://schemas.microsoft.com/office/drawing/2018/hyperlinkcolor">
-  <p:cSld>
-    <p:spTree>
-      <p:nvGrpSpPr>
         <p:cNvPr id="122" name="Shape 122"/>
         <p:cNvGrpSpPr/>
         <p:nvPr/>
@@ -11168,7 +10755,7 @@
 </p:sld>
 </file>
 
-<file path=ppt/slides/slide17.xml><?xml version="1.0" encoding="utf-8"?>
+<file path=ppt/slides/slide16.xml><?xml version="1.0" encoding="utf-8"?>
 <p:sld xmlns:a="http://schemas.openxmlformats.org/drawingml/2006/main" xmlns:r="http://schemas.openxmlformats.org/officeDocument/2006/relationships" xmlns:mc="http://schemas.openxmlformats.org/markup-compatibility/2006" xmlns:mv="urn:schemas-microsoft-com:mac:vml" xmlns:p="http://schemas.openxmlformats.org/presentationml/2006/main" xmlns:c="http://schemas.openxmlformats.org/drawingml/2006/chart" xmlns:dgm="http://schemas.openxmlformats.org/drawingml/2006/diagram" xmlns:o="urn:schemas-microsoft-com:office:office" xmlns:v="urn:schemas-microsoft-com:vml" xmlns:pvml="urn:schemas-microsoft-com:office:powerpoint" xmlns:com="http://schemas.openxmlformats.org/drawingml/2006/compatibility" xmlns:p14="http://schemas.microsoft.com/office/powerpoint/2010/main" xmlns:p15="http://schemas.microsoft.com/office/powerpoint/2012/main" xmlns:ahyp="http://schemas.microsoft.com/office/drawing/2018/hyperlinkcolor">
   <p:cSld>
     <p:spTree>
@@ -11223,7 +10810,7 @@
                   <a:schemeClr val="accent5"/>
                 </a:solidFill>
               </a:rPr>
-              <a:t>Flappy 2: Parallax Scrolling</a:t>
+              <a:t>Images &amp; Parallax Implementation</a:t>
             </a:r>
             <a:endParaRPr>
               <a:solidFill>
@@ -11268,7 +10855,7 @@
             </a:pPr>
             <a:r>
               <a:rPr lang="en"/>
-              <a:t>Goal: scroll them forever, the background slower than the ground.</a:t>
+              <a:t>Demo: Flappy0 → Flappy2: the background and the ground, scrolling at 30 and 60</a:t>
             </a:r>
             <a:endParaRPr/>
           </a:p>
@@ -11285,7 +10872,7 @@
             </a:pPr>
             <a:r>
               <a:rPr lang="en"/>
-              <a:t>Looping points: background 413, ground 512. Try the % operator.</a:t>
+              <a:t>Each layer loops at its own point with %: background 413, ground 512</a:t>
             </a:r>
             <a:endParaRPr/>
           </a:p>
@@ -11696,6 +11283,145 @@
 </p:sld>
 </file>
 
+<file path=ppt/slides/slide17.xml><?xml version="1.0" encoding="utf-8"?>
+<p:sld xmlns:a="http://schemas.openxmlformats.org/drawingml/2006/main" xmlns:p="http://schemas.openxmlformats.org/presentationml/2006/main" xmlns:r="http://schemas.openxmlformats.org/officeDocument/2006/relationships">
+  <p:cSld>
+    <p:spTree>
+      <p:nvGrpSpPr>
+        <p:cNvPr id="1" name=""/>
+        <p:cNvGrpSpPr/>
+        <p:nvPr/>
+      </p:nvGrpSpPr>
+      <p:grpSpPr/>
+      <p:sp>
+        <p:nvSpPr>
+          <p:cNvPr id="2" name="Title 1"/>
+          <p:cNvSpPr>
+            <a:spLocks noGrp="1"/>
+          </p:cNvSpPr>
+          <p:nvPr>
+            <p:ph type="title"/>
+          </p:nvPr>
+        </p:nvSpPr>
+        <p:spPr/>
+        <p:txBody>
+          <a:bodyPr/>
+          <a:lstStyle/>
+          <a:p>
+            <a:pPr indent="0" lvl="0" marL="0" rtl="0" algn="l">
+              <a:spcBef>
+                <a:spcPts val="0"/>
+              </a:spcBef>
+              <a:spcAft>
+                <a:spcPts val="0"/>
+              </a:spcAft>
+              <a:buNone/>
+            </a:pPr>
+            <a:r>
+              <a:rPr lang="en"/>
+              <a:t>Try It: Speeds and Depth</a:t>
+            </a:r>
+            <a:endParaRPr/>
+          </a:p>
+        </p:txBody>
+      </p:sp>
+      <p:sp>
+        <p:nvSpPr>
+          <p:cNvPr id="3" name="Text Placeholder 2"/>
+          <p:cNvSpPr>
+            <a:spLocks noGrp="1"/>
+          </p:cNvSpPr>
+          <p:nvPr>
+            <p:ph type="body" idx="1"/>
+          </p:nvPr>
+        </p:nvSpPr>
+        <p:spPr>
+          <a:xfrm>
+            <a:off x="311700" y="885950"/>
+            <a:ext cx="8520600" cy="1673352"/>
+          </a:xfrm>
+        </p:spPr>
+        <p:txBody>
+          <a:bodyPr/>
+          <a:lstStyle/>
+          <a:p>
+            <a:pPr indent="-330200" lvl="0" marL="457200" rtl="0" algn="l">
+              <a:spcBef>
+                <a:spcPts val="0"/>
+              </a:spcBef>
+              <a:spcAft>
+                <a:spcPts val="0"/>
+              </a:spcAft>
+              <a:buSzPts val="1600"/>
+              <a:buChar char="●"/>
+            </a:pPr>
+            <a:r>
+              <a:rPr lang="en"/>
+              <a:t>In Flappy2:</a:t>
+            </a:r>
+            <a:endParaRPr/>
+          </a:p>
+          <a:p>
+            <a:pPr indent="-330200" lvl="0" marL="457200" rtl="0" algn="l">
+              <a:spcBef>
+                <a:spcPts val="0"/>
+              </a:spcBef>
+              <a:spcAft>
+                <a:spcPts val="0"/>
+              </a:spcAft>
+              <a:buSzPts val="1600"/>
+              <a:buChar char="●"/>
+            </a:pPr>
+            <a:r>
+              <a:rPr lang="en"/>
+              <a:t>Ground at 120, background at 15</a:t>
+            </a:r>
+            <a:endParaRPr/>
+          </a:p>
+          <a:p>
+            <a:pPr indent="-330200" lvl="0" marL="457200" rtl="0" algn="l">
+              <a:spcBef>
+                <a:spcPts val="0"/>
+              </a:spcBef>
+              <a:spcAft>
+                <a:spcPts val="0"/>
+              </a:spcAft>
+              <a:buSzPts val="1600"/>
+              <a:buChar char="●"/>
+            </a:pPr>
+            <a:r>
+              <a:rPr lang="en"/>
+              <a:t>Then swap the two speeds</a:t>
+            </a:r>
+            <a:endParaRPr/>
+          </a:p>
+          <a:p>
+            <a:pPr indent="-330200" lvl="0" marL="457200" rtl="0" algn="l">
+              <a:spcBef>
+                <a:spcPts val="0"/>
+              </a:spcBef>
+              <a:spcAft>
+                <a:spcPts val="0"/>
+              </a:spcAft>
+              <a:buSzPts val="1600"/>
+              <a:buChar char="●"/>
+            </a:pPr>
+            <a:r>
+              <a:rPr lang="en"/>
+              <a:t>What happens to the sense of depth?</a:t>
+            </a:r>
+            <a:endParaRPr/>
+          </a:p>
+        </p:txBody>
+      </p:sp>
+    </p:spTree>
+  </p:cSld>
+  <p:clrMapOvr>
+    <a:masterClrMapping/>
+  </p:clrMapOvr>
+</p:sld>
+</file>
+
 <file path=ppt/slides/slide18.xml><?xml version="1.0" encoding="utf-8"?>
 <p:sld xmlns:a="http://schemas.openxmlformats.org/drawingml/2006/main" xmlns:r="http://schemas.openxmlformats.org/officeDocument/2006/relationships" xmlns:mc="http://schemas.openxmlformats.org/markup-compatibility/2006" xmlns:mv="urn:schemas-microsoft-com:mac:vml" xmlns:p="http://schemas.openxmlformats.org/presentationml/2006/main" xmlns:c="http://schemas.openxmlformats.org/drawingml/2006/chart" xmlns:dgm="http://schemas.openxmlformats.org/drawingml/2006/diagram" xmlns:o="urn:schemas-microsoft-com:office:office" xmlns:v="urn:schemas-microsoft-com:vml" xmlns:pvml="urn:schemas-microsoft-com:office:powerpoint" xmlns:com="http://schemas.openxmlformats.org/drawingml/2006/compatibility" xmlns:p14="http://schemas.microsoft.com/office/powerpoint/2010/main" xmlns:p15="http://schemas.microsoft.com/office/powerpoint/2012/main" xmlns:ahyp="http://schemas.microsoft.com/office/drawing/2018/hyperlinkcolor">
   <p:cSld>
@@ -11974,7 +11700,7 @@
             </a:pPr>
             <a:r>
               <a:rPr lang="en"/>
-              <a:t>Goal: a Bird class with Update and Draw. But how does it get its texture?</a:t>
+              <a:t>From Flappy2: a Bird class with Update and Draw. But how does it get its texture?</a:t>
             </a:r>
             <a:endParaRPr/>
           </a:p>
@@ -14752,828 +14478,6 @@
   <p:cSld>
     <p:spTree>
       <p:nvGrpSpPr>
-        <p:cNvPr id="165" name="Shape 165"/>
-        <p:cNvGrpSpPr/>
-        <p:nvPr/>
-      </p:nvGrpSpPr>
-      <p:grpSpPr>
-        <a:xfrm>
-          <a:off x="0" y="0"/>
-          <a:ext cx="0" cy="0"/>
-          <a:chOff x="0" y="0"/>
-          <a:chExt cx="0" cy="0"/>
-        </a:xfrm>
-      </p:grpSpPr>
-      <p:sp>
-        <p:nvSpPr>
-          <p:cNvPr id="166" name="Google Shape;166;p30"/>
-          <p:cNvSpPr txBox="1"/>
-          <p:nvPr>
-            <p:ph type="title"/>
-          </p:nvPr>
-        </p:nvSpPr>
-        <p:spPr>
-          <a:xfrm>
-            <a:off x="311700" y="195615"/>
-            <a:ext cx="8520600" cy="572700"/>
-          </a:xfrm>
-          <a:prstGeom prst="rect">
-            <a:avLst/>
-          </a:prstGeom>
-        </p:spPr>
-        <p:txBody>
-          <a:bodyPr anchorCtr="0" anchor="t" bIns="91425" lIns="91425" spcFirstLastPara="1" rIns="91425" wrap="square" tIns="91425">
-            <a:normAutofit fontScale="90000"/>
-          </a:bodyPr>
-          <a:lstStyle/>
-          <a:p>
-            <a:pPr indent="0" lvl="0" marL="0" rtl="0" algn="l">
-              <a:spcBef>
-                <a:spcPts val="0"/>
-              </a:spcBef>
-              <a:spcAft>
-                <a:spcPts val="0"/>
-              </a:spcAft>
-              <a:buNone/>
-            </a:pPr>
-            <a:r>
-              <a:rPr lang="en">
-                <a:solidFill>
-                  <a:schemeClr val="accent5"/>
-                </a:solidFill>
-              </a:rPr>
-              <a:t>Flappy 6: Spawning on a Timer</a:t>
-            </a:r>
-            <a:endParaRPr>
-              <a:solidFill>
-                <a:schemeClr val="accent5"/>
-              </a:solidFill>
-            </a:endParaRPr>
-          </a:p>
-        </p:txBody>
-      </p:sp>
-      <p:sp>
-        <p:nvSpPr>
-          <p:cNvPr id="167" name="Google Shape;167;p30"/>
-          <p:cNvSpPr txBox="1"/>
-          <p:nvPr>
-            <p:ph idx="1" type="body"/>
-          </p:nvPr>
-        </p:nvSpPr>
-        <p:spPr>
-          <a:xfrm>
-            <a:off x="311700" y="885950"/>
-            <a:ext cx="8520600" cy="905256"/>
-          </a:xfrm>
-          <a:prstGeom prst="rect">
-            <a:avLst/>
-          </a:prstGeom>
-        </p:spPr>
-        <p:txBody>
-          <a:bodyPr anchorCtr="0" anchor="t" bIns="91425" lIns="91425" spcFirstLastPara="1" rIns="91425" wrap="square" tIns="91425">
-            <a:normAutofit/>
-          </a:bodyPr>
-          <a:lstStyle/>
-          <a:p>
-            <a:pPr indent="-330200" lvl="0" marL="457200" rtl="0" algn="l">
-              <a:spcBef>
-                <a:spcPts val="0"/>
-              </a:spcBef>
-              <a:spcAft>
-                <a:spcPts val="0"/>
-              </a:spcAft>
-              <a:buSzPts val="1600"/>
-              <a:buChar char="●"/>
-            </a:pPr>
-            <a:r>
-              <a:rPr lang="en"/>
-              <a:t>Goal: pipes that spawn on a timer at random heights, and scroll left.</a:t>
-            </a:r>
-            <a:endParaRPr/>
-          </a:p>
-          <a:p>
-            <a:pPr indent="-330200" lvl="0" marL="457200" rtl="0" algn="l">
-              <a:spcBef>
-                <a:spcPts val="0"/>
-              </a:spcBef>
-              <a:spcAft>
-                <a:spcPts val="0"/>
-              </a:spcAft>
-              <a:buSzPts val="1600"/>
-              <a:buChar char="●"/>
-            </a:pPr>
-            <a:r>
-              <a:rPr lang="en"/>
-              <a:t>A Pipe class, a spawn timer, and a list of pipes.</a:t>
-            </a:r>
-            <a:endParaRPr/>
-          </a:p>
-        </p:txBody>
-      </p:sp>
-      <p:pic>
-        <p:nvPicPr>
-          <p:cNvPr id="168" name="Picture 167" descr="f6.png"/>
-          <p:cNvPicPr>
-            <a:picLocks noChangeAspect="1"/>
-          </p:cNvPicPr>
-          <p:nvPr/>
-        </p:nvPicPr>
-        <p:blipFill>
-          <a:blip r:embed="rId4"/>
-          <a:stretch>
-            <a:fillRect/>
-          </a:stretch>
-        </p:blipFill>
-        <p:spPr>
-          <a:xfrm>
-            <a:off x="2377440" y="2148840"/>
-            <a:ext cx="4389120" cy="2468880"/>
-          </a:xfrm>
-          <a:prstGeom prst="rect">
-            <a:avLst/>
-          </a:prstGeom>
-        </p:spPr>
-      </p:pic>
-    </p:spTree>
-  </p:cSld>
-  <p:clrMapOvr>
-    <a:masterClrMapping/>
-  </p:clrMapOvr>
-  <p:timing>
-    <p:tnLst>
-      <p:par>
-        <p:cTn dur="indefinite" nodeType="tmRoot" restart="never">
-          <p:childTnLst>
-            <p:seq concurrent="1" nextAc="seek">
-              <p:cTn dur="indefinite" id="2" nodeType="mainSeq">
-                <p:childTnLst>
-                  <p:par>
-                    <p:cTn fill="hold">
-                      <p:stCondLst>
-                        <p:cond delay="indefinite"/>
-                      </p:stCondLst>
-                      <p:childTnLst>
-                        <p:par>
-                          <p:cTn fill="hold">
-                            <p:stCondLst>
-                              <p:cond delay="0"/>
-                            </p:stCondLst>
-                            <p:childTnLst>
-                              <p:par>
-                                <p:cTn fill="hold" nodeType="clickEffect" presetClass="entr" presetID="1" presetSubtype="0">
-                                  <p:stCondLst>
-                                    <p:cond delay="0"/>
-                                  </p:stCondLst>
-                                  <p:childTnLst>
-                                    <p:set>
-                                      <p:cBhvr>
-                                        <p:cTn dur="1" fill="hold">
-                                          <p:stCondLst>
-                                            <p:cond delay="0"/>
-                                          </p:stCondLst>
-                                        </p:cTn>
-                                        <p:tgtEl>
-                                          <p:spTgt spid="167">
-                                            <p:txEl>
-                                              <p:pRg end="0" st="0"/>
-                                            </p:txEl>
-                                          </p:spTgt>
-                                        </p:tgtEl>
-                                        <p:attrNameLst>
-                                          <p:attrName>style.visibility</p:attrName>
-                                        </p:attrNameLst>
-                                      </p:cBhvr>
-                                      <p:to>
-                                        <p:strVal val="visible"/>
-                                      </p:to>
-                                    </p:set>
-                                  </p:childTnLst>
-                                </p:cTn>
-                              </p:par>
-                            </p:childTnLst>
-                          </p:cTn>
-                        </p:par>
-                      </p:childTnLst>
-                    </p:cTn>
-                  </p:par>
-                  <p:par>
-                    <p:cTn fill="hold">
-                      <p:stCondLst>
-                        <p:cond delay="indefinite"/>
-                      </p:stCondLst>
-                      <p:childTnLst>
-                        <p:par>
-                          <p:cTn fill="hold">
-                            <p:stCondLst>
-                              <p:cond delay="0"/>
-                            </p:stCondLst>
-                            <p:childTnLst>
-                              <p:par>
-                                <p:cTn fill="hold" nodeType="clickEffect" presetClass="entr" presetID="1" presetSubtype="0">
-                                  <p:stCondLst>
-                                    <p:cond delay="0"/>
-                                  </p:stCondLst>
-                                  <p:childTnLst>
-                                    <p:set>
-                                      <p:cBhvr>
-                                        <p:cTn dur="1" fill="hold">
-                                          <p:stCondLst>
-                                            <p:cond delay="0"/>
-                                          </p:stCondLst>
-                                        </p:cTn>
-                                        <p:tgtEl>
-                                          <p:spTgt spid="167">
-                                            <p:txEl>
-                                              <p:pRg end="1" st="1"/>
-                                            </p:txEl>
-                                          </p:spTgt>
-                                        </p:tgtEl>
-                                        <p:attrNameLst>
-                                          <p:attrName>style.visibility</p:attrName>
-                                        </p:attrNameLst>
-                                      </p:cBhvr>
-                                      <p:to>
-                                        <p:strVal val="visible"/>
-                                      </p:to>
-                                    </p:set>
-                                  </p:childTnLst>
-                                </p:cTn>
-                              </p:par>
-                            </p:childTnLst>
-                          </p:cTn>
-                        </p:par>
-                      </p:childTnLst>
-                    </p:cTn>
-                  </p:par>
-                  <p:par>
-                    <p:cTn fill="hold">
-                      <p:stCondLst>
-                        <p:cond delay="indefinite"/>
-                      </p:stCondLst>
-                      <p:childTnLst>
-                        <p:par>
-                          <p:cTn fill="hold">
-                            <p:stCondLst>
-                              <p:cond delay="0"/>
-                            </p:stCondLst>
-                            <p:childTnLst>
-                              <p:par>
-                                <p:cTn fill="hold" nodeType="clickEffect" presetClass="entr" presetID="1" presetSubtype="0">
-                                  <p:stCondLst>
-                                    <p:cond delay="0"/>
-                                  </p:stCondLst>
-                                  <p:childTnLst>
-                                    <p:set>
-                                      <p:cBhvr>
-                                        <p:cTn dur="1" fill="hold">
-                                          <p:stCondLst>
-                                            <p:cond delay="0"/>
-                                          </p:stCondLst>
-                                        </p:cTn>
-                                        <p:tgtEl>
-                                          <p:spTgt spid="167">
-                                            <p:txEl>
-                                              <p:pRg end="2" st="2"/>
-                                            </p:txEl>
-                                          </p:spTgt>
-                                        </p:tgtEl>
-                                        <p:attrNameLst>
-                                          <p:attrName>style.visibility</p:attrName>
-                                        </p:attrNameLst>
-                                      </p:cBhvr>
-                                      <p:to>
-                                        <p:strVal val="visible"/>
-                                      </p:to>
-                                    </p:set>
-                                  </p:childTnLst>
-                                </p:cTn>
-                              </p:par>
-                            </p:childTnLst>
-                          </p:cTn>
-                        </p:par>
-                      </p:childTnLst>
-                    </p:cTn>
-                  </p:par>
-                  <p:par>
-                    <p:cTn fill="hold">
-                      <p:stCondLst>
-                        <p:cond delay="indefinite"/>
-                      </p:stCondLst>
-                      <p:childTnLst>
-                        <p:par>
-                          <p:cTn fill="hold">
-                            <p:stCondLst>
-                              <p:cond delay="0"/>
-                            </p:stCondLst>
-                            <p:childTnLst>
-                              <p:par>
-                                <p:cTn fill="hold" nodeType="clickEffect" presetClass="entr" presetID="1" presetSubtype="0">
-                                  <p:stCondLst>
-                                    <p:cond delay="0"/>
-                                  </p:stCondLst>
-                                  <p:childTnLst>
-                                    <p:set>
-                                      <p:cBhvr>
-                                        <p:cTn dur="1" fill="hold">
-                                          <p:stCondLst>
-                                            <p:cond delay="0"/>
-                                          </p:stCondLst>
-                                        </p:cTn>
-                                        <p:tgtEl>
-                                          <p:spTgt spid="167">
-                                            <p:txEl>
-                                              <p:pRg end="3" st="3"/>
-                                            </p:txEl>
-                                          </p:spTgt>
-                                        </p:tgtEl>
-                                        <p:attrNameLst>
-                                          <p:attrName>style.visibility</p:attrName>
-                                        </p:attrNameLst>
-                                      </p:cBhvr>
-                                      <p:to>
-                                        <p:strVal val="visible"/>
-                                      </p:to>
-                                    </p:set>
-                                  </p:childTnLst>
-                                </p:cTn>
-                              </p:par>
-                            </p:childTnLst>
-                          </p:cTn>
-                        </p:par>
-                      </p:childTnLst>
-                    </p:cTn>
-                  </p:par>
-                  <p:par>
-                    <p:cTn fill="hold">
-                      <p:stCondLst>
-                        <p:cond delay="indefinite"/>
-                      </p:stCondLst>
-                      <p:childTnLst>
-                        <p:par>
-                          <p:cTn fill="hold">
-                            <p:stCondLst>
-                              <p:cond delay="0"/>
-                            </p:stCondLst>
-                            <p:childTnLst>
-                              <p:par>
-                                <p:cTn fill="hold" nodeType="clickEffect" presetClass="entr" presetID="1" presetSubtype="0">
-                                  <p:stCondLst>
-                                    <p:cond delay="0"/>
-                                  </p:stCondLst>
-                                  <p:childTnLst>
-                                    <p:set>
-                                      <p:cBhvr>
-                                        <p:cTn dur="1" fill="hold">
-                                          <p:stCondLst>
-                                            <p:cond delay="0"/>
-                                          </p:stCondLst>
-                                        </p:cTn>
-                                        <p:tgtEl>
-                                          <p:spTgt spid="167">
-                                            <p:txEl>
-                                              <p:pRg end="4" st="4"/>
-                                            </p:txEl>
-                                          </p:spTgt>
-                                        </p:tgtEl>
-                                        <p:attrNameLst>
-                                          <p:attrName>style.visibility</p:attrName>
-                                        </p:attrNameLst>
-                                      </p:cBhvr>
-                                      <p:to>
-                                        <p:strVal val="visible"/>
-                                      </p:to>
-                                    </p:set>
-                                  </p:childTnLst>
-                                </p:cTn>
-                              </p:par>
-                            </p:childTnLst>
-                          </p:cTn>
-                        </p:par>
-                      </p:childTnLst>
-                    </p:cTn>
-                  </p:par>
-                  <p:par>
-                    <p:cTn fill="hold">
-                      <p:stCondLst>
-                        <p:cond delay="indefinite"/>
-                      </p:stCondLst>
-                      <p:childTnLst>
-                        <p:par>
-                          <p:cTn fill="hold">
-                            <p:stCondLst>
-                              <p:cond delay="0"/>
-                            </p:stCondLst>
-                            <p:childTnLst>
-                              <p:par>
-                                <p:cTn fill="hold" nodeType="clickEffect" presetClass="entr" presetID="1" presetSubtype="0">
-                                  <p:stCondLst>
-                                    <p:cond delay="0"/>
-                                  </p:stCondLst>
-                                  <p:childTnLst>
-                                    <p:set>
-                                      <p:cBhvr>
-                                        <p:cTn dur="1" fill="hold">
-                                          <p:stCondLst>
-                                            <p:cond delay="0"/>
-                                          </p:stCondLst>
-                                        </p:cTn>
-                                        <p:tgtEl>
-                                          <p:spTgt spid="167">
-                                            <p:txEl>
-                                              <p:pRg end="5" st="5"/>
-                                            </p:txEl>
-                                          </p:spTgt>
-                                        </p:tgtEl>
-                                        <p:attrNameLst>
-                                          <p:attrName>style.visibility</p:attrName>
-                                        </p:attrNameLst>
-                                      </p:cBhvr>
-                                      <p:to>
-                                        <p:strVal val="visible"/>
-                                      </p:to>
-                                    </p:set>
-                                  </p:childTnLst>
-                                </p:cTn>
-                              </p:par>
-                            </p:childTnLst>
-                          </p:cTn>
-                        </p:par>
-                      </p:childTnLst>
-                    </p:cTn>
-                  </p:par>
-                  <p:par>
-                    <p:cTn fill="hold">
-                      <p:stCondLst>
-                        <p:cond delay="indefinite"/>
-                      </p:stCondLst>
-                      <p:childTnLst>
-                        <p:par>
-                          <p:cTn fill="hold">
-                            <p:stCondLst>
-                              <p:cond delay="0"/>
-                            </p:stCondLst>
-                            <p:childTnLst>
-                              <p:par>
-                                <p:cTn fill="hold" nodeType="clickEffect" presetClass="entr" presetID="1" presetSubtype="0">
-                                  <p:stCondLst>
-                                    <p:cond delay="0"/>
-                                  </p:stCondLst>
-                                  <p:childTnLst>
-                                    <p:set>
-                                      <p:cBhvr>
-                                        <p:cTn dur="1" fill="hold">
-                                          <p:stCondLst>
-                                            <p:cond delay="0"/>
-                                          </p:stCondLst>
-                                        </p:cTn>
-                                        <p:tgtEl>
-                                          <p:spTgt spid="167">
-                                            <p:txEl>
-                                              <p:pRg end="6" st="6"/>
-                                            </p:txEl>
-                                          </p:spTgt>
-                                        </p:tgtEl>
-                                        <p:attrNameLst>
-                                          <p:attrName>style.visibility</p:attrName>
-                                        </p:attrNameLst>
-                                      </p:cBhvr>
-                                      <p:to>
-                                        <p:strVal val="visible"/>
-                                      </p:to>
-                                    </p:set>
-                                  </p:childTnLst>
-                                </p:cTn>
-                              </p:par>
-                            </p:childTnLst>
-                          </p:cTn>
-                        </p:par>
-                      </p:childTnLst>
-                    </p:cTn>
-                  </p:par>
-                  <p:par>
-                    <p:cTn fill="hold">
-                      <p:stCondLst>
-                        <p:cond delay="indefinite"/>
-                      </p:stCondLst>
-                      <p:childTnLst>
-                        <p:par>
-                          <p:cTn fill="hold">
-                            <p:stCondLst>
-                              <p:cond delay="0"/>
-                            </p:stCondLst>
-                            <p:childTnLst>
-                              <p:par>
-                                <p:cTn fill="hold" nodeType="clickEffect" presetClass="entr" presetID="1" presetSubtype="0">
-                                  <p:stCondLst>
-                                    <p:cond delay="0"/>
-                                  </p:stCondLst>
-                                  <p:childTnLst>
-                                    <p:set>
-                                      <p:cBhvr>
-                                        <p:cTn dur="1" fill="hold">
-                                          <p:stCondLst>
-                                            <p:cond delay="0"/>
-                                          </p:stCondLst>
-                                        </p:cTn>
-                                        <p:tgtEl>
-                                          <p:spTgt spid="167">
-                                            <p:txEl>
-                                              <p:pRg end="7" st="7"/>
-                                            </p:txEl>
-                                          </p:spTgt>
-                                        </p:tgtEl>
-                                        <p:attrNameLst>
-                                          <p:attrName>style.visibility</p:attrName>
-                                        </p:attrNameLst>
-                                      </p:cBhvr>
-                                      <p:to>
-                                        <p:strVal val="visible"/>
-                                      </p:to>
-                                    </p:set>
-                                  </p:childTnLst>
-                                </p:cTn>
-                              </p:par>
-                            </p:childTnLst>
-                          </p:cTn>
-                        </p:par>
-                      </p:childTnLst>
-                    </p:cTn>
-                  </p:par>
-                  <p:par>
-                    <p:cTn fill="hold">
-                      <p:stCondLst>
-                        <p:cond delay="indefinite"/>
-                      </p:stCondLst>
-                      <p:childTnLst>
-                        <p:par>
-                          <p:cTn fill="hold">
-                            <p:stCondLst>
-                              <p:cond delay="0"/>
-                            </p:stCondLst>
-                            <p:childTnLst>
-                              <p:par>
-                                <p:cTn fill="hold" nodeType="clickEffect" presetClass="entr" presetID="1" presetSubtype="0">
-                                  <p:stCondLst>
-                                    <p:cond delay="0"/>
-                                  </p:stCondLst>
-                                  <p:childTnLst>
-                                    <p:set>
-                                      <p:cBhvr>
-                                        <p:cTn dur="1" fill="hold">
-                                          <p:stCondLst>
-                                            <p:cond delay="0"/>
-                                          </p:stCondLst>
-                                        </p:cTn>
-                                        <p:tgtEl>
-                                          <p:spTgt spid="167">
-                                            <p:txEl>
-                                              <p:pRg end="8" st="8"/>
-                                            </p:txEl>
-                                          </p:spTgt>
-                                        </p:tgtEl>
-                                        <p:attrNameLst>
-                                          <p:attrName>style.visibility</p:attrName>
-                                        </p:attrNameLst>
-                                      </p:cBhvr>
-                                      <p:to>
-                                        <p:strVal val="visible"/>
-                                      </p:to>
-                                    </p:set>
-                                  </p:childTnLst>
-                                </p:cTn>
-                              </p:par>
-                            </p:childTnLst>
-                          </p:cTn>
-                        </p:par>
-                      </p:childTnLst>
-                    </p:cTn>
-                  </p:par>
-                  <p:par>
-                    <p:cTn fill="hold">
-                      <p:stCondLst>
-                        <p:cond delay="indefinite"/>
-                      </p:stCondLst>
-                      <p:childTnLst>
-                        <p:par>
-                          <p:cTn fill="hold">
-                            <p:stCondLst>
-                              <p:cond delay="0"/>
-                            </p:stCondLst>
-                            <p:childTnLst>
-                              <p:par>
-                                <p:cTn fill="hold" nodeType="clickEffect" presetClass="entr" presetID="1" presetSubtype="0">
-                                  <p:stCondLst>
-                                    <p:cond delay="0"/>
-                                  </p:stCondLst>
-                                  <p:childTnLst>
-                                    <p:set>
-                                      <p:cBhvr>
-                                        <p:cTn dur="1" fill="hold">
-                                          <p:stCondLst>
-                                            <p:cond delay="0"/>
-                                          </p:stCondLst>
-                                        </p:cTn>
-                                        <p:tgtEl>
-                                          <p:spTgt spid="167">
-                                            <p:txEl>
-                                              <p:pRg end="9" st="9"/>
-                                            </p:txEl>
-                                          </p:spTgt>
-                                        </p:tgtEl>
-                                        <p:attrNameLst>
-                                          <p:attrName>style.visibility</p:attrName>
-                                        </p:attrNameLst>
-                                      </p:cBhvr>
-                                      <p:to>
-                                        <p:strVal val="visible"/>
-                                      </p:to>
-                                    </p:set>
-                                  </p:childTnLst>
-                                </p:cTn>
-                              </p:par>
-                            </p:childTnLst>
-                          </p:cTn>
-                        </p:par>
-                      </p:childTnLst>
-                    </p:cTn>
-                  </p:par>
-                  <p:par>
-                    <p:cTn fill="hold">
-                      <p:stCondLst>
-                        <p:cond delay="indefinite"/>
-                      </p:stCondLst>
-                      <p:childTnLst>
-                        <p:par>
-                          <p:cTn fill="hold">
-                            <p:stCondLst>
-                              <p:cond delay="0"/>
-                            </p:stCondLst>
-                            <p:childTnLst>
-                              <p:par>
-                                <p:cTn fill="hold" nodeType="clickEffect" presetClass="entr" presetID="1" presetSubtype="0">
-                                  <p:stCondLst>
-                                    <p:cond delay="0"/>
-                                  </p:stCondLst>
-                                  <p:childTnLst>
-                                    <p:set>
-                                      <p:cBhvr>
-                                        <p:cTn dur="1" fill="hold">
-                                          <p:stCondLst>
-                                            <p:cond delay="0"/>
-                                          </p:stCondLst>
-                                        </p:cTn>
-                                        <p:tgtEl>
-                                          <p:spTgt spid="167">
-                                            <p:txEl>
-                                              <p:pRg end="10" st="10"/>
-                                            </p:txEl>
-                                          </p:spTgt>
-                                        </p:tgtEl>
-                                        <p:attrNameLst>
-                                          <p:attrName>style.visibility</p:attrName>
-                                        </p:attrNameLst>
-                                      </p:cBhvr>
-                                      <p:to>
-                                        <p:strVal val="visible"/>
-                                      </p:to>
-                                    </p:set>
-                                  </p:childTnLst>
-                                </p:cTn>
-                              </p:par>
-                            </p:childTnLst>
-                          </p:cTn>
-                        </p:par>
-                      </p:childTnLst>
-                    </p:cTn>
-                  </p:par>
-                  <p:par>
-                    <p:cTn fill="hold">
-                      <p:stCondLst>
-                        <p:cond delay="indefinite"/>
-                      </p:stCondLst>
-                      <p:childTnLst>
-                        <p:par>
-                          <p:cTn fill="hold">
-                            <p:stCondLst>
-                              <p:cond delay="0"/>
-                            </p:stCondLst>
-                            <p:childTnLst>
-                              <p:par>
-                                <p:cTn fill="hold" nodeType="clickEffect" presetClass="entr" presetID="1" presetSubtype="0">
-                                  <p:stCondLst>
-                                    <p:cond delay="0"/>
-                                  </p:stCondLst>
-                                  <p:childTnLst>
-                                    <p:set>
-                                      <p:cBhvr>
-                                        <p:cTn dur="1" fill="hold">
-                                          <p:stCondLst>
-                                            <p:cond delay="0"/>
-                                          </p:stCondLst>
-                                        </p:cTn>
-                                        <p:tgtEl>
-                                          <p:spTgt spid="167">
-                                            <p:txEl>
-                                              <p:pRg end="11" st="11"/>
-                                            </p:txEl>
-                                          </p:spTgt>
-                                        </p:tgtEl>
-                                        <p:attrNameLst>
-                                          <p:attrName>style.visibility</p:attrName>
-                                        </p:attrNameLst>
-                                      </p:cBhvr>
-                                      <p:to>
-                                        <p:strVal val="visible"/>
-                                      </p:to>
-                                    </p:set>
-                                  </p:childTnLst>
-                                </p:cTn>
-                              </p:par>
-                            </p:childTnLst>
-                          </p:cTn>
-                        </p:par>
-                      </p:childTnLst>
-                    </p:cTn>
-                  </p:par>
-                  <p:par>
-                    <p:cTn fill="hold">
-                      <p:stCondLst>
-                        <p:cond delay="indefinite"/>
-                      </p:stCondLst>
-                      <p:childTnLst>
-                        <p:par>
-                          <p:cTn fill="hold">
-                            <p:stCondLst>
-                              <p:cond delay="0"/>
-                            </p:stCondLst>
-                            <p:childTnLst>
-                              <p:par>
-                                <p:cTn fill="hold" nodeType="clickEffect" presetClass="entr" presetID="1" presetSubtype="0">
-                                  <p:stCondLst>
-                                    <p:cond delay="0"/>
-                                  </p:stCondLst>
-                                  <p:childTnLst>
-                                    <p:set>
-                                      <p:cBhvr>
-                                        <p:cTn dur="1" fill="hold">
-                                          <p:stCondLst>
-                                            <p:cond delay="0"/>
-                                          </p:stCondLst>
-                                        </p:cTn>
-                                        <p:tgtEl>
-                                          <p:spTgt spid="167">
-                                            <p:txEl>
-                                              <p:pRg end="12" st="12"/>
-                                            </p:txEl>
-                                          </p:spTgt>
-                                        </p:tgtEl>
-                                        <p:attrNameLst>
-                                          <p:attrName>style.visibility</p:attrName>
-                                        </p:attrNameLst>
-                                      </p:cBhvr>
-                                      <p:to>
-                                        <p:strVal val="visible"/>
-                                      </p:to>
-                                    </p:set>
-                                  </p:childTnLst>
-                                </p:cTn>
-                              </p:par>
-                            </p:childTnLst>
-                          </p:cTn>
-                        </p:par>
-                      </p:childTnLst>
-                    </p:cTn>
-                  </p:par>
-                </p:childTnLst>
-              </p:cTn>
-              <p:prevCondLst>
-                <p:cond evt="onPrev">
-                  <p:tgtEl>
-                    <p:sldTgt/>
-                  </p:tgtEl>
-                </p:cond>
-              </p:prevCondLst>
-              <p:nextCondLst>
-                <p:cond evt="onNext">
-                  <p:tgtEl>
-                    <p:sldTgt/>
-                  </p:tgtEl>
-                </p:cond>
-              </p:nextCondLst>
-            </p:seq>
-          </p:childTnLst>
-        </p:cTn>
-      </p:par>
-    </p:tnLst>
-  </p:timing>
-</p:sld>
-</file>
-
-<file path=ppt/slides/slide24.xml><?xml version="1.0" encoding="utf-8"?>
-<p:sld xmlns:a="http://schemas.openxmlformats.org/drawingml/2006/main" xmlns:r="http://schemas.openxmlformats.org/officeDocument/2006/relationships" xmlns:mc="http://schemas.openxmlformats.org/markup-compatibility/2006" xmlns:mv="urn:schemas-microsoft-com:mac:vml" xmlns:p="http://schemas.openxmlformats.org/presentationml/2006/main" xmlns:c="http://schemas.openxmlformats.org/drawingml/2006/chart" xmlns:dgm="http://schemas.openxmlformats.org/drawingml/2006/diagram" xmlns:o="urn:schemas-microsoft-com:office:office" xmlns:v="urn:schemas-microsoft-com:vml" xmlns:pvml="urn:schemas-microsoft-com:office:powerpoint" xmlns:com="http://schemas.openxmlformats.org/drawingml/2006/compatibility" xmlns:p14="http://schemas.microsoft.com/office/powerpoint/2010/main" xmlns:p15="http://schemas.microsoft.com/office/powerpoint/2012/main" xmlns:ahyp="http://schemas.microsoft.com/office/drawing/2018/hyperlinkcolor">
-  <p:cSld>
-    <p:spTree>
-      <p:nvGrpSpPr>
         <p:cNvPr id="171" name="Shape 171"/>
         <p:cNvGrpSpPr/>
         <p:nvPr/>
@@ -15618,7 +14522,7 @@
 </p:sld>
 </file>
 
-<file path=ppt/slides/slide25.xml><?xml version="1.0" encoding="utf-8"?>
+<file path=ppt/slides/slide24.xml><?xml version="1.0" encoding="utf-8"?>
 <p:sld xmlns:a="http://schemas.openxmlformats.org/drawingml/2006/main" xmlns:r="http://schemas.openxmlformats.org/officeDocument/2006/relationships" xmlns:mc="http://schemas.openxmlformats.org/markup-compatibility/2006" xmlns:mv="urn:schemas-microsoft-com:mac:vml" xmlns:p="http://schemas.openxmlformats.org/presentationml/2006/main" xmlns:c="http://schemas.openxmlformats.org/drawingml/2006/chart" xmlns:dgm="http://schemas.openxmlformats.org/drawingml/2006/diagram" xmlns:o="urn:schemas-microsoft-com:office:office" xmlns:v="urn:schemas-microsoft-com:vml" xmlns:pvml="urn:schemas-microsoft-com:office:powerpoint" xmlns:com="http://schemas.openxmlformats.org/drawingml/2006/compatibility" xmlns:p14="http://schemas.microsoft.com/office/powerpoint/2010/main" xmlns:p15="http://schemas.microsoft.com/office/powerpoint/2012/main" xmlns:ahyp="http://schemas.microsoft.com/office/drawing/2018/hyperlinkcolor">
   <p:cSld>
     <p:spTree>
@@ -15673,7 +14577,7 @@
                   <a:schemeClr val="accent5"/>
                 </a:solidFill>
               </a:rPr>
-              <a:t>Flappy 7: A Drifting Gap</a:t>
+              <a:t>Procedural Generation Implementation</a:t>
             </a:r>
             <a:endParaRPr>
               <a:solidFill>
@@ -15718,7 +14622,7 @@
             </a:pPr>
             <a:r>
               <a:rPr lang="en"/>
-              <a:t>Goal: pipes in pairs with a gap, the gap drifting smoothly up and down.</a:t>
+              <a:t>Demo: Flappy5 → Flappy7: pipes on a timer, then pairs with a drifting gap</a:t>
             </a:r>
             <a:endParaRPr/>
           </a:p>
@@ -16734,6 +15638,145 @@
 </p:sld>
 </file>
 
+<file path=ppt/slides/slide25.xml><?xml version="1.0" encoding="utf-8"?>
+<p:sld xmlns:a="http://schemas.openxmlformats.org/drawingml/2006/main" xmlns:p="http://schemas.openxmlformats.org/presentationml/2006/main" xmlns:r="http://schemas.openxmlformats.org/officeDocument/2006/relationships">
+  <p:cSld>
+    <p:spTree>
+      <p:nvGrpSpPr>
+        <p:cNvPr id="1" name=""/>
+        <p:cNvGrpSpPr/>
+        <p:nvPr/>
+      </p:nvGrpSpPr>
+      <p:grpSpPr/>
+      <p:sp>
+        <p:nvSpPr>
+          <p:cNvPr id="2" name="Title 1"/>
+          <p:cNvSpPr>
+            <a:spLocks noGrp="1"/>
+          </p:cNvSpPr>
+          <p:nvPr>
+            <p:ph type="title"/>
+          </p:nvPr>
+        </p:nvSpPr>
+        <p:spPr/>
+        <p:txBody>
+          <a:bodyPr/>
+          <a:lstStyle/>
+          <a:p>
+            <a:pPr indent="0" lvl="0" marL="0" rtl="0" algn="l">
+              <a:spcBef>
+                <a:spcPts val="0"/>
+              </a:spcBef>
+              <a:spcAft>
+                <a:spcPts val="0"/>
+              </a:spcAft>
+              <a:buNone/>
+            </a:pPr>
+            <a:r>
+              <a:rPr lang="en"/>
+              <a:t>Try It: A Harder Gap</a:t>
+            </a:r>
+            <a:endParaRPr/>
+          </a:p>
+        </p:txBody>
+      </p:sp>
+      <p:sp>
+        <p:nvSpPr>
+          <p:cNvPr id="3" name="Text Placeholder 2"/>
+          <p:cNvSpPr>
+            <a:spLocks noGrp="1"/>
+          </p:cNvSpPr>
+          <p:nvPr>
+            <p:ph type="body" idx="1"/>
+          </p:nvPr>
+        </p:nvSpPr>
+        <p:spPr>
+          <a:xfrm>
+            <a:off x="311700" y="885950"/>
+            <a:ext cx="8520600" cy="1673352"/>
+          </a:xfrm>
+        </p:spPr>
+        <p:txBody>
+          <a:bodyPr/>
+          <a:lstStyle/>
+          <a:p>
+            <a:pPr indent="-330200" lvl="0" marL="457200" rtl="0" algn="l">
+              <a:spcBef>
+                <a:spcPts val="0"/>
+              </a:spcBef>
+              <a:spcAft>
+                <a:spcPts val="0"/>
+              </a:spcAft>
+              <a:buSzPts val="1600"/>
+              <a:buChar char="●"/>
+            </a:pPr>
+            <a:r>
+              <a:rPr lang="en"/>
+              <a:t>In Flappy7:</a:t>
+            </a:r>
+            <a:endParaRPr/>
+          </a:p>
+          <a:p>
+            <a:pPr indent="-330200" lvl="0" marL="457200" rtl="0" algn="l">
+              <a:spcBef>
+                <a:spcPts val="0"/>
+              </a:spcBef>
+              <a:spcAft>
+                <a:spcPts val="0"/>
+              </a:spcAft>
+              <a:buSzPts val="1600"/>
+              <a:buChar char="●"/>
+            </a:pPr>
+            <a:r>
+              <a:rPr lang="en"/>
+              <a:t>A 60-pixel gap, and a pair every 1.5 seconds</a:t>
+            </a:r>
+            <a:endParaRPr/>
+          </a:p>
+          <a:p>
+            <a:pPr indent="-330200" lvl="0" marL="457200" rtl="0" algn="l">
+              <a:spcBef>
+                <a:spcPts val="0"/>
+              </a:spcBef>
+              <a:spcAft>
+                <a:spcPts val="0"/>
+              </a:spcAft>
+              <a:buSzPts val="1600"/>
+              <a:buChar char="●"/>
+            </a:pPr>
+            <a:r>
+              <a:rPr lang="en"/>
+              <a:t>Is it still fair?</a:t>
+            </a:r>
+            <a:endParaRPr/>
+          </a:p>
+          <a:p>
+            <a:pPr indent="-330200" lvl="0" marL="457200" rtl="0" algn="l">
+              <a:spcBef>
+                <a:spcPts val="0"/>
+              </a:spcBef>
+              <a:spcAft>
+                <a:spcPts val="0"/>
+              </a:spcAft>
+              <a:buSzPts val="1600"/>
+              <a:buChar char="●"/>
+            </a:pPr>
+            <a:r>
+              <a:rPr lang="en"/>
+              <a:t>Which numbers in SpawnPipePair make the drift gentler?</a:t>
+            </a:r>
+            <a:endParaRPr/>
+          </a:p>
+        </p:txBody>
+      </p:sp>
+    </p:spTree>
+  </p:cSld>
+  <p:clrMapOvr>
+    <a:masterClrMapping/>
+  </p:clrMapOvr>
+</p:sld>
+</file>
+
 <file path=ppt/slides/slide26.xml><?xml version="1.0" encoding="utf-8"?>
 <p:sld xmlns:a="http://schemas.openxmlformats.org/drawingml/2006/main" xmlns:r="http://schemas.openxmlformats.org/officeDocument/2006/relationships" xmlns:mc="http://schemas.openxmlformats.org/markup-compatibility/2006" xmlns:mv="urn:schemas-microsoft-com:mac:vml" xmlns:p="http://schemas.openxmlformats.org/presentationml/2006/main" xmlns:c="http://schemas.openxmlformats.org/drawingml/2006/chart" xmlns:dgm="http://schemas.openxmlformats.org/drawingml/2006/diagram" xmlns:o="urn:schemas-microsoft-com:office:office" xmlns:v="urn:schemas-microsoft-com:vml" xmlns:pvml="urn:schemas-microsoft-com:office:powerpoint" xmlns:com="http://schemas.openxmlformats.org/drawingml/2006/compatibility" xmlns:p14="http://schemas.microsoft.com/office/powerpoint/2010/main" xmlns:p15="http://schemas.microsoft.com/office/powerpoint/2012/main" xmlns:ahyp="http://schemas.microsoft.com/office/drawing/2018/hyperlinkcolor">
   <p:cSld>
@@ -17215,7 +16258,7 @@
             </a:pPr>
             <a:r>
               <a:rPr lang="en"/>
-              <a:t>Goal: the game stops when the bird hits a pipe, the ground or the ceiling.</a:t>
+              <a:t>From Flappy7: the game stops when the bird hits a pipe, the ground or the ceiling.</a:t>
             </a:r>
             <a:endParaRPr/>
           </a:p>
@@ -24056,681 +23099,6 @@
   <p:cSld>
     <p:spTree>
       <p:nvGrpSpPr>
-        <p:cNvPr id="229" name="Shape 229"/>
-        <p:cNvGrpSpPr/>
-        <p:nvPr/>
-      </p:nvGrpSpPr>
-      <p:grpSpPr>
-        <a:xfrm>
-          <a:off x="0" y="0"/>
-          <a:ext cx="0" cy="0"/>
-          <a:chOff x="0" y="0"/>
-          <a:chExt cx="0" cy="0"/>
-        </a:xfrm>
-      </p:grpSpPr>
-      <p:sp>
-        <p:nvSpPr>
-          <p:cNvPr id="230" name="Google Shape;230;p41"/>
-          <p:cNvSpPr txBox="1"/>
-          <p:nvPr>
-            <p:ph type="title"/>
-          </p:nvPr>
-        </p:nvSpPr>
-        <p:spPr>
-          <a:xfrm>
-            <a:off x="311700" y="195615"/>
-            <a:ext cx="8520600" cy="572700"/>
-          </a:xfrm>
-          <a:prstGeom prst="rect">
-            <a:avLst/>
-          </a:prstGeom>
-        </p:spPr>
-        <p:txBody>
-          <a:bodyPr anchorCtr="0" anchor="t" bIns="91425" lIns="91425" spcFirstLastPara="1" rIns="91425" wrap="square" tIns="91425">
-            <a:normAutofit fontScale="90000"/>
-          </a:bodyPr>
-          <a:lstStyle/>
-          <a:p>
-            <a:pPr indent="0" lvl="0" marL="0" rtl="0" algn="l">
-              <a:spcBef>
-                <a:spcPts val="0"/>
-              </a:spcBef>
-              <a:spcAft>
-                <a:spcPts val="0"/>
-              </a:spcAft>
-              <a:buNone/>
-            </a:pPr>
-            <a:r>
-              <a:rPr lang="en">
-                <a:solidFill>
-                  <a:schemeClr val="accent5"/>
-                </a:solidFill>
-              </a:rPr>
-              <a:t>Flappy 10: Passing Data Between States</a:t>
-            </a:r>
-            <a:endParaRPr>
-              <a:solidFill>
-                <a:schemeClr val="accent5"/>
-              </a:solidFill>
-            </a:endParaRPr>
-          </a:p>
-        </p:txBody>
-      </p:sp>
-      <p:sp>
-        <p:nvSpPr>
-          <p:cNvPr id="231" name="Google Shape;231;p41"/>
-          <p:cNvSpPr txBox="1"/>
-          <p:nvPr>
-            <p:ph idx="1" type="body"/>
-          </p:nvPr>
-        </p:nvSpPr>
-        <p:spPr>
-          <a:xfrm>
-            <a:off x="311700" y="885950"/>
-            <a:ext cx="8520600" cy="905256"/>
-          </a:xfrm>
-          <a:prstGeom prst="rect">
-            <a:avLst/>
-          </a:prstGeom>
-        </p:spPr>
-        <p:txBody>
-          <a:bodyPr anchorCtr="0" anchor="t" bIns="91425" lIns="91425" spcFirstLastPara="1" rIns="91425" wrap="square" tIns="91425">
-            <a:normAutofit/>
-          </a:bodyPr>
-          <a:lstStyle/>
-          <a:p>
-            <a:pPr indent="-330200" lvl="0" marL="457200" rtl="0" algn="l">
-              <a:spcBef>
-                <a:spcPts val="0"/>
-              </a:spcBef>
-              <a:spcAft>
-                <a:spcPts val="0"/>
-              </a:spcAft>
-              <a:buSzPts val="1600"/>
-              <a:buChar char="●"/>
-            </a:pPr>
-            <a:r>
-              <a:rPr lang="en"/>
-              <a:t>Goal: a point for every pipe pair passed, and a score state at the end.</a:t>
-            </a:r>
-            <a:endParaRPr/>
-          </a:p>
-          <a:p>
-            <a:pPr indent="-330200" lvl="0" marL="457200" rtl="0" algn="l">
-              <a:spcBef>
-                <a:spcPts val="0"/>
-              </a:spcBef>
-              <a:spcAft>
-                <a:spcPts val="0"/>
-              </a:spcAft>
-              <a:buSzPts val="1600"/>
-              <a:buChar char="●"/>
-            </a:pPr>
-            <a:r>
-              <a:rPr lang="en"/>
-              <a:t>How does the score state get the score?</a:t>
-            </a:r>
-            <a:endParaRPr/>
-          </a:p>
-        </p:txBody>
-      </p:sp>
-      <p:pic>
-        <p:nvPicPr>
-          <p:cNvPr id="232" name="Picture 231" descr="f10.png"/>
-          <p:cNvPicPr>
-            <a:picLocks noChangeAspect="1"/>
-          </p:cNvPicPr>
-          <p:nvPr/>
-        </p:nvPicPr>
-        <p:blipFill>
-          <a:blip r:embed="rId3"/>
-          <a:stretch>
-            <a:fillRect/>
-          </a:stretch>
-        </p:blipFill>
-        <p:spPr>
-          <a:xfrm>
-            <a:off x="2377440" y="2148840"/>
-            <a:ext cx="4389120" cy="2468880"/>
-          </a:xfrm>
-          <a:prstGeom prst="rect">
-            <a:avLst/>
-          </a:prstGeom>
-        </p:spPr>
-      </p:pic>
-    </p:spTree>
-  </p:cSld>
-  <p:clrMapOvr>
-    <a:masterClrMapping/>
-  </p:clrMapOvr>
-  <p:timing>
-    <p:tnLst>
-      <p:par>
-        <p:cTn dur="indefinite" nodeType="tmRoot" restart="never">
-          <p:childTnLst>
-            <p:seq concurrent="1" nextAc="seek">
-              <p:cTn dur="indefinite" id="2" nodeType="mainSeq">
-                <p:childTnLst>
-                  <p:par>
-                    <p:cTn fill="hold">
-                      <p:stCondLst>
-                        <p:cond delay="indefinite"/>
-                      </p:stCondLst>
-                      <p:childTnLst>
-                        <p:par>
-                          <p:cTn fill="hold">
-                            <p:stCondLst>
-                              <p:cond delay="0"/>
-                            </p:stCondLst>
-                            <p:childTnLst>
-                              <p:par>
-                                <p:cTn fill="hold" nodeType="clickEffect" presetClass="entr" presetID="1" presetSubtype="0">
-                                  <p:stCondLst>
-                                    <p:cond delay="0"/>
-                                  </p:stCondLst>
-                                  <p:childTnLst>
-                                    <p:set>
-                                      <p:cBhvr>
-                                        <p:cTn dur="1" fill="hold">
-                                          <p:stCondLst>
-                                            <p:cond delay="0"/>
-                                          </p:stCondLst>
-                                        </p:cTn>
-                                        <p:tgtEl>
-                                          <p:spTgt spid="231">
-                                            <p:txEl>
-                                              <p:pRg end="0" st="0"/>
-                                            </p:txEl>
-                                          </p:spTgt>
-                                        </p:tgtEl>
-                                        <p:attrNameLst>
-                                          <p:attrName>style.visibility</p:attrName>
-                                        </p:attrNameLst>
-                                      </p:cBhvr>
-                                      <p:to>
-                                        <p:strVal val="visible"/>
-                                      </p:to>
-                                    </p:set>
-                                  </p:childTnLst>
-                                </p:cTn>
-                              </p:par>
-                            </p:childTnLst>
-                          </p:cTn>
-                        </p:par>
-                      </p:childTnLst>
-                    </p:cTn>
-                  </p:par>
-                  <p:par>
-                    <p:cTn fill="hold">
-                      <p:stCondLst>
-                        <p:cond delay="indefinite"/>
-                      </p:stCondLst>
-                      <p:childTnLst>
-                        <p:par>
-                          <p:cTn fill="hold">
-                            <p:stCondLst>
-                              <p:cond delay="0"/>
-                            </p:stCondLst>
-                            <p:childTnLst>
-                              <p:par>
-                                <p:cTn fill="hold" nodeType="clickEffect" presetClass="entr" presetID="1" presetSubtype="0">
-                                  <p:stCondLst>
-                                    <p:cond delay="0"/>
-                                  </p:stCondLst>
-                                  <p:childTnLst>
-                                    <p:set>
-                                      <p:cBhvr>
-                                        <p:cTn dur="1" fill="hold">
-                                          <p:stCondLst>
-                                            <p:cond delay="0"/>
-                                          </p:stCondLst>
-                                        </p:cTn>
-                                        <p:tgtEl>
-                                          <p:spTgt spid="231">
-                                            <p:txEl>
-                                              <p:pRg end="1" st="1"/>
-                                            </p:txEl>
-                                          </p:spTgt>
-                                        </p:tgtEl>
-                                        <p:attrNameLst>
-                                          <p:attrName>style.visibility</p:attrName>
-                                        </p:attrNameLst>
-                                      </p:cBhvr>
-                                      <p:to>
-                                        <p:strVal val="visible"/>
-                                      </p:to>
-                                    </p:set>
-                                  </p:childTnLst>
-                                </p:cTn>
-                              </p:par>
-                            </p:childTnLst>
-                          </p:cTn>
-                        </p:par>
-                      </p:childTnLst>
-                    </p:cTn>
-                  </p:par>
-                  <p:par>
-                    <p:cTn fill="hold">
-                      <p:stCondLst>
-                        <p:cond delay="indefinite"/>
-                      </p:stCondLst>
-                      <p:childTnLst>
-                        <p:par>
-                          <p:cTn fill="hold">
-                            <p:stCondLst>
-                              <p:cond delay="0"/>
-                            </p:stCondLst>
-                            <p:childTnLst>
-                              <p:par>
-                                <p:cTn fill="hold" nodeType="clickEffect" presetClass="entr" presetID="1" presetSubtype="0">
-                                  <p:stCondLst>
-                                    <p:cond delay="0"/>
-                                  </p:stCondLst>
-                                  <p:childTnLst>
-                                    <p:set>
-                                      <p:cBhvr>
-                                        <p:cTn dur="1" fill="hold">
-                                          <p:stCondLst>
-                                            <p:cond delay="0"/>
-                                          </p:stCondLst>
-                                        </p:cTn>
-                                        <p:tgtEl>
-                                          <p:spTgt spid="231">
-                                            <p:txEl>
-                                              <p:pRg end="2" st="2"/>
-                                            </p:txEl>
-                                          </p:spTgt>
-                                        </p:tgtEl>
-                                        <p:attrNameLst>
-                                          <p:attrName>style.visibility</p:attrName>
-                                        </p:attrNameLst>
-                                      </p:cBhvr>
-                                      <p:to>
-                                        <p:strVal val="visible"/>
-                                      </p:to>
-                                    </p:set>
-                                  </p:childTnLst>
-                                </p:cTn>
-                              </p:par>
-                            </p:childTnLst>
-                          </p:cTn>
-                        </p:par>
-                      </p:childTnLst>
-                    </p:cTn>
-                  </p:par>
-                  <p:par>
-                    <p:cTn fill="hold">
-                      <p:stCondLst>
-                        <p:cond delay="indefinite"/>
-                      </p:stCondLst>
-                      <p:childTnLst>
-                        <p:par>
-                          <p:cTn fill="hold">
-                            <p:stCondLst>
-                              <p:cond delay="0"/>
-                            </p:stCondLst>
-                            <p:childTnLst>
-                              <p:par>
-                                <p:cTn fill="hold" nodeType="clickEffect" presetClass="entr" presetID="1" presetSubtype="0">
-                                  <p:stCondLst>
-                                    <p:cond delay="0"/>
-                                  </p:stCondLst>
-                                  <p:childTnLst>
-                                    <p:set>
-                                      <p:cBhvr>
-                                        <p:cTn dur="1" fill="hold">
-                                          <p:stCondLst>
-                                            <p:cond delay="0"/>
-                                          </p:stCondLst>
-                                        </p:cTn>
-                                        <p:tgtEl>
-                                          <p:spTgt spid="231">
-                                            <p:txEl>
-                                              <p:pRg end="3" st="3"/>
-                                            </p:txEl>
-                                          </p:spTgt>
-                                        </p:tgtEl>
-                                        <p:attrNameLst>
-                                          <p:attrName>style.visibility</p:attrName>
-                                        </p:attrNameLst>
-                                      </p:cBhvr>
-                                      <p:to>
-                                        <p:strVal val="visible"/>
-                                      </p:to>
-                                    </p:set>
-                                  </p:childTnLst>
-                                </p:cTn>
-                              </p:par>
-                            </p:childTnLst>
-                          </p:cTn>
-                        </p:par>
-                      </p:childTnLst>
-                    </p:cTn>
-                  </p:par>
-                  <p:par>
-                    <p:cTn fill="hold">
-                      <p:stCondLst>
-                        <p:cond delay="indefinite"/>
-                      </p:stCondLst>
-                      <p:childTnLst>
-                        <p:par>
-                          <p:cTn fill="hold">
-                            <p:stCondLst>
-                              <p:cond delay="0"/>
-                            </p:stCondLst>
-                            <p:childTnLst>
-                              <p:par>
-                                <p:cTn fill="hold" nodeType="clickEffect" presetClass="entr" presetID="1" presetSubtype="0">
-                                  <p:stCondLst>
-                                    <p:cond delay="0"/>
-                                  </p:stCondLst>
-                                  <p:childTnLst>
-                                    <p:set>
-                                      <p:cBhvr>
-                                        <p:cTn dur="1" fill="hold">
-                                          <p:stCondLst>
-                                            <p:cond delay="0"/>
-                                          </p:stCondLst>
-                                        </p:cTn>
-                                        <p:tgtEl>
-                                          <p:spTgt spid="231">
-                                            <p:txEl>
-                                              <p:pRg end="4" st="4"/>
-                                            </p:txEl>
-                                          </p:spTgt>
-                                        </p:tgtEl>
-                                        <p:attrNameLst>
-                                          <p:attrName>style.visibility</p:attrName>
-                                        </p:attrNameLst>
-                                      </p:cBhvr>
-                                      <p:to>
-                                        <p:strVal val="visible"/>
-                                      </p:to>
-                                    </p:set>
-                                  </p:childTnLst>
-                                </p:cTn>
-                              </p:par>
-                            </p:childTnLst>
-                          </p:cTn>
-                        </p:par>
-                      </p:childTnLst>
-                    </p:cTn>
-                  </p:par>
-                  <p:par>
-                    <p:cTn fill="hold">
-                      <p:stCondLst>
-                        <p:cond delay="indefinite"/>
-                      </p:stCondLst>
-                      <p:childTnLst>
-                        <p:par>
-                          <p:cTn fill="hold">
-                            <p:stCondLst>
-                              <p:cond delay="0"/>
-                            </p:stCondLst>
-                            <p:childTnLst>
-                              <p:par>
-                                <p:cTn fill="hold" nodeType="clickEffect" presetClass="entr" presetID="1" presetSubtype="0">
-                                  <p:stCondLst>
-                                    <p:cond delay="0"/>
-                                  </p:stCondLst>
-                                  <p:childTnLst>
-                                    <p:set>
-                                      <p:cBhvr>
-                                        <p:cTn dur="1" fill="hold">
-                                          <p:stCondLst>
-                                            <p:cond delay="0"/>
-                                          </p:stCondLst>
-                                        </p:cTn>
-                                        <p:tgtEl>
-                                          <p:spTgt spid="231">
-                                            <p:txEl>
-                                              <p:pRg end="5" st="5"/>
-                                            </p:txEl>
-                                          </p:spTgt>
-                                        </p:tgtEl>
-                                        <p:attrNameLst>
-                                          <p:attrName>style.visibility</p:attrName>
-                                        </p:attrNameLst>
-                                      </p:cBhvr>
-                                      <p:to>
-                                        <p:strVal val="visible"/>
-                                      </p:to>
-                                    </p:set>
-                                  </p:childTnLst>
-                                </p:cTn>
-                              </p:par>
-                            </p:childTnLst>
-                          </p:cTn>
-                        </p:par>
-                      </p:childTnLst>
-                    </p:cTn>
-                  </p:par>
-                  <p:par>
-                    <p:cTn fill="hold">
-                      <p:stCondLst>
-                        <p:cond delay="indefinite"/>
-                      </p:stCondLst>
-                      <p:childTnLst>
-                        <p:par>
-                          <p:cTn fill="hold">
-                            <p:stCondLst>
-                              <p:cond delay="0"/>
-                            </p:stCondLst>
-                            <p:childTnLst>
-                              <p:par>
-                                <p:cTn fill="hold" nodeType="clickEffect" presetClass="entr" presetID="1" presetSubtype="0">
-                                  <p:stCondLst>
-                                    <p:cond delay="0"/>
-                                  </p:stCondLst>
-                                  <p:childTnLst>
-                                    <p:set>
-                                      <p:cBhvr>
-                                        <p:cTn dur="1" fill="hold">
-                                          <p:stCondLst>
-                                            <p:cond delay="0"/>
-                                          </p:stCondLst>
-                                        </p:cTn>
-                                        <p:tgtEl>
-                                          <p:spTgt spid="231">
-                                            <p:txEl>
-                                              <p:pRg end="6" st="6"/>
-                                            </p:txEl>
-                                          </p:spTgt>
-                                        </p:tgtEl>
-                                        <p:attrNameLst>
-                                          <p:attrName>style.visibility</p:attrName>
-                                        </p:attrNameLst>
-                                      </p:cBhvr>
-                                      <p:to>
-                                        <p:strVal val="visible"/>
-                                      </p:to>
-                                    </p:set>
-                                  </p:childTnLst>
-                                </p:cTn>
-                              </p:par>
-                            </p:childTnLst>
-                          </p:cTn>
-                        </p:par>
-                      </p:childTnLst>
-                    </p:cTn>
-                  </p:par>
-                  <p:par>
-                    <p:cTn fill="hold">
-                      <p:stCondLst>
-                        <p:cond delay="indefinite"/>
-                      </p:stCondLst>
-                      <p:childTnLst>
-                        <p:par>
-                          <p:cTn fill="hold">
-                            <p:stCondLst>
-                              <p:cond delay="0"/>
-                            </p:stCondLst>
-                            <p:childTnLst>
-                              <p:par>
-                                <p:cTn fill="hold" nodeType="clickEffect" presetClass="entr" presetID="1" presetSubtype="0">
-                                  <p:stCondLst>
-                                    <p:cond delay="0"/>
-                                  </p:stCondLst>
-                                  <p:childTnLst>
-                                    <p:set>
-                                      <p:cBhvr>
-                                        <p:cTn dur="1" fill="hold">
-                                          <p:stCondLst>
-                                            <p:cond delay="0"/>
-                                          </p:stCondLst>
-                                        </p:cTn>
-                                        <p:tgtEl>
-                                          <p:spTgt spid="231">
-                                            <p:txEl>
-                                              <p:pRg end="7" st="7"/>
-                                            </p:txEl>
-                                          </p:spTgt>
-                                        </p:tgtEl>
-                                        <p:attrNameLst>
-                                          <p:attrName>style.visibility</p:attrName>
-                                        </p:attrNameLst>
-                                      </p:cBhvr>
-                                      <p:to>
-                                        <p:strVal val="visible"/>
-                                      </p:to>
-                                    </p:set>
-                                  </p:childTnLst>
-                                </p:cTn>
-                              </p:par>
-                            </p:childTnLst>
-                          </p:cTn>
-                        </p:par>
-                      </p:childTnLst>
-                    </p:cTn>
-                  </p:par>
-                  <p:par>
-                    <p:cTn fill="hold">
-                      <p:stCondLst>
-                        <p:cond delay="indefinite"/>
-                      </p:stCondLst>
-                      <p:childTnLst>
-                        <p:par>
-                          <p:cTn fill="hold">
-                            <p:stCondLst>
-                              <p:cond delay="0"/>
-                            </p:stCondLst>
-                            <p:childTnLst>
-                              <p:par>
-                                <p:cTn fill="hold" nodeType="clickEffect" presetClass="entr" presetID="1" presetSubtype="0">
-                                  <p:stCondLst>
-                                    <p:cond delay="0"/>
-                                  </p:stCondLst>
-                                  <p:childTnLst>
-                                    <p:set>
-                                      <p:cBhvr>
-                                        <p:cTn dur="1" fill="hold">
-                                          <p:stCondLst>
-                                            <p:cond delay="0"/>
-                                          </p:stCondLst>
-                                        </p:cTn>
-                                        <p:tgtEl>
-                                          <p:spTgt spid="231">
-                                            <p:txEl>
-                                              <p:pRg end="8" st="8"/>
-                                            </p:txEl>
-                                          </p:spTgt>
-                                        </p:tgtEl>
-                                        <p:attrNameLst>
-                                          <p:attrName>style.visibility</p:attrName>
-                                        </p:attrNameLst>
-                                      </p:cBhvr>
-                                      <p:to>
-                                        <p:strVal val="visible"/>
-                                      </p:to>
-                                    </p:set>
-                                  </p:childTnLst>
-                                </p:cTn>
-                              </p:par>
-                            </p:childTnLst>
-                          </p:cTn>
-                        </p:par>
-                      </p:childTnLst>
-                    </p:cTn>
-                  </p:par>
-                  <p:par>
-                    <p:cTn fill="hold">
-                      <p:stCondLst>
-                        <p:cond delay="indefinite"/>
-                      </p:stCondLst>
-                      <p:childTnLst>
-                        <p:par>
-                          <p:cTn fill="hold">
-                            <p:stCondLst>
-                              <p:cond delay="0"/>
-                            </p:stCondLst>
-                            <p:childTnLst>
-                              <p:par>
-                                <p:cTn fill="hold" nodeType="clickEffect" presetClass="entr" presetID="1" presetSubtype="0">
-                                  <p:stCondLst>
-                                    <p:cond delay="0"/>
-                                  </p:stCondLst>
-                                  <p:childTnLst>
-                                    <p:set>
-                                      <p:cBhvr>
-                                        <p:cTn dur="1" fill="hold">
-                                          <p:stCondLst>
-                                            <p:cond delay="0"/>
-                                          </p:stCondLst>
-                                        </p:cTn>
-                                        <p:tgtEl>
-                                          <p:spTgt spid="231">
-                                            <p:txEl>
-                                              <p:pRg end="9" st="9"/>
-                                            </p:txEl>
-                                          </p:spTgt>
-                                        </p:tgtEl>
-                                        <p:attrNameLst>
-                                          <p:attrName>style.visibility</p:attrName>
-                                        </p:attrNameLst>
-                                      </p:cBhvr>
-                                      <p:to>
-                                        <p:strVal val="visible"/>
-                                      </p:to>
-                                    </p:set>
-                                  </p:childTnLst>
-                                </p:cTn>
-                              </p:par>
-                            </p:childTnLst>
-                          </p:cTn>
-                        </p:par>
-                      </p:childTnLst>
-                    </p:cTn>
-                  </p:par>
-                </p:childTnLst>
-              </p:cTn>
-              <p:prevCondLst>
-                <p:cond evt="onPrev">
-                  <p:tgtEl>
-                    <p:sldTgt/>
-                  </p:tgtEl>
-                </p:cond>
-              </p:prevCondLst>
-              <p:nextCondLst>
-                <p:cond evt="onNext">
-                  <p:tgtEl>
-                    <p:sldTgt/>
-                  </p:tgtEl>
-                </p:cond>
-              </p:nextCondLst>
-            </p:seq>
-          </p:childTnLst>
-        </p:cTn>
-      </p:par>
-    </p:tnLst>
-  </p:timing>
-</p:sld>
-</file>
-
-<file path=ppt/slides/slide35.xml><?xml version="1.0" encoding="utf-8"?>
-<p:sld xmlns:a="http://schemas.openxmlformats.org/drawingml/2006/main" xmlns:r="http://schemas.openxmlformats.org/officeDocument/2006/relationships" xmlns:mc="http://schemas.openxmlformats.org/markup-compatibility/2006" xmlns:mv="urn:schemas-microsoft-com:mac:vml" xmlns:p="http://schemas.openxmlformats.org/presentationml/2006/main" xmlns:c="http://schemas.openxmlformats.org/drawingml/2006/chart" xmlns:dgm="http://schemas.openxmlformats.org/drawingml/2006/diagram" xmlns:o="urn:schemas-microsoft-com:office:office" xmlns:v="urn:schemas-microsoft-com:vml" xmlns:pvml="urn:schemas-microsoft-com:office:powerpoint" xmlns:com="http://schemas.openxmlformats.org/drawingml/2006/compatibility" xmlns:p14="http://schemas.microsoft.com/office/powerpoint/2010/main" xmlns:p15="http://schemas.microsoft.com/office/powerpoint/2012/main" xmlns:ahyp="http://schemas.microsoft.com/office/drawing/2018/hyperlinkcolor">
-  <p:cSld>
-    <p:spTree>
-      <p:nvGrpSpPr>
         <p:cNvPr id="235" name="Shape 235"/>
         <p:cNvGrpSpPr/>
         <p:nvPr/>
@@ -24781,7 +23149,7 @@
                   <a:schemeClr val="accent5"/>
                 </a:solidFill>
               </a:rPr>
-              <a:t>Flappy 11: A Countdown State</a:t>
+              <a:t>Score and Countdown Implementation</a:t>
             </a:r>
             <a:endParaRPr>
               <a:solidFill>
@@ -24826,7 +23194,7 @@
             </a:pPr>
             <a:r>
               <a:rPr lang="en"/>
-              <a:t>Goal: a countdown from 3 between the title (or the score) and play.</a:t>
+              <a:t>Demo: Flappy9 → Flappy11: a score state that reads the score, and a countdown from 3</a:t>
             </a:r>
             <a:endParaRPr/>
           </a:p>
@@ -25237,6 +23605,145 @@
 </p:sld>
 </file>
 
+<file path=ppt/slides/slide35.xml><?xml version="1.0" encoding="utf-8"?>
+<p:sld xmlns:a="http://schemas.openxmlformats.org/drawingml/2006/main" xmlns:p="http://schemas.openxmlformats.org/presentationml/2006/main" xmlns:r="http://schemas.openxmlformats.org/officeDocument/2006/relationships">
+  <p:cSld>
+    <p:spTree>
+      <p:nvGrpSpPr>
+        <p:cNvPr id="1" name=""/>
+        <p:cNvGrpSpPr/>
+        <p:nvPr/>
+      </p:nvGrpSpPr>
+      <p:grpSpPr/>
+      <p:sp>
+        <p:nvSpPr>
+          <p:cNvPr id="2" name="Title 1"/>
+          <p:cNvSpPr>
+            <a:spLocks noGrp="1"/>
+          </p:cNvSpPr>
+          <p:nvPr>
+            <p:ph type="title"/>
+          </p:nvPr>
+        </p:nvSpPr>
+        <p:spPr/>
+        <p:txBody>
+          <a:bodyPr/>
+          <a:lstStyle/>
+          <a:p>
+            <a:pPr indent="0" lvl="0" marL="0" rtl="0" algn="l">
+              <a:spcBef>
+                <a:spcPts val="0"/>
+              </a:spcBef>
+              <a:spcAft>
+                <a:spcPts val="0"/>
+              </a:spcAft>
+              <a:buNone/>
+            </a:pPr>
+            <a:r>
+              <a:rPr lang="en"/>
+              <a:t>Try It: Countdown and Best Score</a:t>
+            </a:r>
+            <a:endParaRPr/>
+          </a:p>
+        </p:txBody>
+      </p:sp>
+      <p:sp>
+        <p:nvSpPr>
+          <p:cNvPr id="3" name="Text Placeholder 2"/>
+          <p:cNvSpPr>
+            <a:spLocks noGrp="1"/>
+          </p:cNvSpPr>
+          <p:nvPr>
+            <p:ph type="body" idx="1"/>
+          </p:nvPr>
+        </p:nvSpPr>
+        <p:spPr>
+          <a:xfrm>
+            <a:off x="311700" y="885950"/>
+            <a:ext cx="8520600" cy="1673352"/>
+          </a:xfrm>
+        </p:spPr>
+        <p:txBody>
+          <a:bodyPr/>
+          <a:lstStyle/>
+          <a:p>
+            <a:pPr indent="-330200" lvl="0" marL="457200" rtl="0" algn="l">
+              <a:spcBef>
+                <a:spcPts val="0"/>
+              </a:spcBef>
+              <a:spcAft>
+                <a:spcPts val="0"/>
+              </a:spcAft>
+              <a:buSzPts val="1600"/>
+              <a:buChar char="●"/>
+            </a:pPr>
+            <a:r>
+              <a:rPr lang="en"/>
+              <a:t>In Flappy11:</a:t>
+            </a:r>
+            <a:endParaRPr/>
+          </a:p>
+          <a:p>
+            <a:pPr indent="-330200" lvl="0" marL="457200" rtl="0" algn="l">
+              <a:spcBef>
+                <a:spcPts val="0"/>
+              </a:spcBef>
+              <a:spcAft>
+                <a:spcPts val="0"/>
+              </a:spcAft>
+              <a:buSzPts val="1600"/>
+              <a:buChar char="●"/>
+            </a:pPr>
+            <a:r>
+              <a:rPr lang="en"/>
+              <a:t>Start the countdown at 5, and tick every 0.3 seconds</a:t>
+            </a:r>
+            <a:endParaRPr/>
+          </a:p>
+          <a:p>
+            <a:pPr indent="-330200" lvl="0" marL="457200" rtl="0" algn="l">
+              <a:spcBef>
+                <a:spcPts val="0"/>
+              </a:spcBef>
+              <a:spcAft>
+                <a:spcPts val="0"/>
+              </a:spcAft>
+              <a:buSzPts val="1600"/>
+              <a:buChar char="●"/>
+            </a:pPr>
+            <a:r>
+              <a:rPr lang="en"/>
+              <a:t>Show a best score on the score screen</a:t>
+            </a:r>
+            <a:endParaRPr/>
+          </a:p>
+          <a:p>
+            <a:pPr indent="-330200" lvl="0" marL="457200" rtl="0" algn="l">
+              <a:spcBef>
+                <a:spcPts val="0"/>
+              </a:spcBef>
+              <a:spcAft>
+                <a:spcPts val="0"/>
+              </a:spcAft>
+              <a:buSzPts val="1600"/>
+              <a:buChar char="●"/>
+            </a:pPr>
+            <a:r>
+              <a:rPr lang="en"/>
+              <a:t>Where does it live, so it survives the next game?</a:t>
+            </a:r>
+            <a:endParaRPr/>
+          </a:p>
+        </p:txBody>
+      </p:sp>
+    </p:spTree>
+  </p:cSld>
+  <p:clrMapOvr>
+    <a:masterClrMapping/>
+  </p:clrMapOvr>
+</p:sld>
+</file>
+
 <file path=ppt/slides/slide36.xml><?xml version="1.0" encoding="utf-8"?>
 <p:sld xmlns:a="http://schemas.openxmlformats.org/drawingml/2006/main" xmlns:r="http://schemas.openxmlformats.org/officeDocument/2006/relationships" xmlns:mc="http://schemas.openxmlformats.org/markup-compatibility/2006" xmlns:mv="urn:schemas-microsoft-com:mac:vml" xmlns:p="http://schemas.openxmlformats.org/presentationml/2006/main" xmlns:c="http://schemas.openxmlformats.org/drawingml/2006/chart" xmlns:dgm="http://schemas.openxmlformats.org/drawingml/2006/diagram" xmlns:o="urn:schemas-microsoft-com:office:office" xmlns:v="urn:schemas-microsoft-com:vml" xmlns:pvml="urn:schemas-microsoft-com:office:powerpoint" xmlns:com="http://schemas.openxmlformats.org/drawingml/2006/compatibility" xmlns:p14="http://schemas.microsoft.com/office/powerpoint/2010/main" xmlns:p15="http://schemas.microsoft.com/office/powerpoint/2012/main" xmlns:ahyp="http://schemas.microsoft.com/office/drawing/2018/hyperlinkcolor">
   <p:cSld>
@@ -25337,7 +23844,7 @@
             </a:pPr>
             <a:r>
               <a:rPr lang="en"/>
-              <a:t>Goal: music, and sounds for flap, hurt and score.</a:t>
+              <a:t>From Flappy11: music, and sounds for flap, hurt and score.</a:t>
             </a:r>
             <a:endParaRPr/>
           </a:p>

--- a/slides/02 Flappy Bird.pptx
+++ b/slides/02 Flappy Bird.pptx
@@ -918,7 +918,7 @@
           <a:lstStyle/>
           <a:p>
             <a:r>
-              <a:t>The shape we’re building: GMDCore, referenced by each game. It grows through the course.</a:t>
+              <a:t>The shape we’re building: GARCore, referenced by each game. It grows through the course.</a:t>
             </a:r>
           </a:p>
         </p:txBody>
@@ -1007,7 +1007,7 @@
           <a:lstStyle/>
           <a:p>
             <a:r>
-              <a:t>Exercise: a repository from gar-starter, which comes with an empty GMDCore library. They write a Core class in it that derives from Game and owns the window and screen scaling.</a:t>
+              <a:t>Exercise: a repository from gar-starter, which comes with an empty GARCore library. They write a Core class in it that derives from Game and owns the window and screen scaling.</a:t>
             </a:r>
           </a:p>
           <a:p>
@@ -8468,7 +8468,7 @@
             </a:pPr>
             <a:r>
               <a:rPr lang="en"/>
-              <a:t>Goal: move what every game needs into a class library, GMDCore.</a:t>
+              <a:t>Goal: move what every game needs into a class library, GARCore.</a:t>
             </a:r>
             <a:endParaRPr/>
           </a:p>
@@ -8542,7 +8542,7 @@
                   <a:srgbClr val="DEE2E6"/>
                 </a:solidFill>
               </a:rPr>
-              <a:t>GMDCore</a:t>
+              <a:t>GARCore</a:t>
             </a:r>
           </a:p>
           <a:p>
@@ -13347,7 +13347,7 @@
             </a:pPr>
             <a:r>
               <a:rPr lang="en"/>
-              <a:t>Goal: flap on Space or a click, with input classes in GMDCore.</a:t>
+              <a:t>Goal: flap on Space or a click, with input classes in GARCore.</a:t>
             </a:r>
             <a:endParaRPr/>
           </a:p>
@@ -27593,7 +27593,7 @@
             </a:pPr>
             <a:r>
               <a:rPr lang="en"/>
-              <a:t>That belongs in a class library, like GMDCore</a:t>
+              <a:t>That belongs in a class library, like GARCore</a:t>
             </a:r>
             <a:endParaRPr/>
           </a:p>

--- a/slides/02 Flappy Bird.pptx
+++ b/slides/02 Flappy Bird.pptx
@@ -25904,7 +25904,7 @@
         <p:spPr>
           <a:xfrm>
             <a:off x="311700" y="885950"/>
-            <a:ext cx="8520600" cy="4023300"/>
+            <a:ext cx="8520600" cy="3593592"/>
           </a:xfrm>
           <a:prstGeom prst="rect">
             <a:avLst/>
@@ -25915,6 +25915,23 @@
             <a:normAutofit/>
           </a:bodyPr>
           <a:lstStyle/>
+          <a:p>
+            <a:pPr indent="-330200" lvl="0" marL="457200" rtl="0" algn="l">
+              <a:spcBef>
+                <a:spcPts val="0"/>
+              </a:spcBef>
+              <a:spcAft>
+                <a:spcPts val="0"/>
+              </a:spcAft>
+              <a:buSzPts val="1600"/>
+              <a:buChar char="●"/>
+            </a:pPr>
+            <a:r>
+              <a:rPr lang="en" b="1"/>
+              <a:t>Main topic: Organizing a growing game</a:t>
+            </a:r>
+            <a:endParaRPr/>
+          </a:p>
           <a:p>
             <a:pPr indent="-330200" lvl="0" marL="457200" rtl="0" algn="l">
               <a:spcBef>

--- a/slides/02 Flappy Bird.pptx
+++ b/slides/02 Flappy Bird.pptx
@@ -824,7 +824,7 @@
           <a:lstStyle/>
           <a:p>
             <a:r>
-              <a:t>Welcome. Today we build Flappy Bird. The main topic: organizing a growing game.</a:t>
+              <a:t>Welcome. Today we build Flappy Bird. The main topic: structuring the code.</a:t>
             </a:r>
           </a:p>
           <a:p>
@@ -2737,7 +2737,7 @@
           <a:lstStyle/>
           <a:p>
             <a:r>
-              <a:t>The main topic: organizing a game as it grows. A class library for what every game needs, and a state machine for the game’s modes.</a:t>
+              <a:t>Today’s main topic is structuring the code as the game grows. We move shared code into a class library, and the game’s modes into a state machine.</a:t>
             </a:r>
           </a:p>
           <a:p>
@@ -25928,7 +25928,7 @@
             </a:pPr>
             <a:r>
               <a:rPr lang="en" b="1"/>
-              <a:t>Main topic: Organizing a growing game</a:t>
+              <a:t>Main topic: Structuring the code</a:t>
             </a:r>
             <a:endParaRPr/>
           </a:p>

--- a/slides/02 Flappy Bird.pptx
+++ b/slides/02 Flappy Bird.pptx
@@ -3789,7 +3789,7 @@
           </a:p>
           <a:p>
             <a:r>
-              <a:t>A: Each state's behaviour is in one place instead of spread across if-chains. You can add a state without editing the others, and Enter/Exit give reliable places for setup and cleanup.</a:t>
+              <a:t>A: Each state's behaviour is in one place. You can add a state without editing the others, and Enter/Exit give reliable places for setup and cleanup.</a:t>
             </a:r>
           </a:p>
           <a:p/>
@@ -3800,7 +3800,7 @@
           </a:p>
           <a:p>
             <a:r>
-              <a:t>A: Anything the old state set up is never cleaned up: music keeps playing, event subscriptions stay alive, timers keep running.</a:t>
+              <a:t>A: Anything the old state set up is never cleaned up. Music keeps playing, event subscriptions stay alive and timers keep running.</a:t>
             </a:r>
           </a:p>
           <a:p/>
@@ -3811,7 +3811,7 @@
           </a:p>
           <a:p>
             <a:r>
-              <a:t>A: It is global state. It hides dependencies, couples code together and makes testing and reasoning harder, and games rarely need the "exactly one instance" guarantee.</a:t>
+              <a:t>A: It is global state. It hides dependencies, couples code together and makes testing and reasoning harder, and games rarely need the guarantee of a single instance.</a:t>
             </a:r>
           </a:p>
         </p:txBody>
@@ -4053,7 +4053,7 @@
           </a:p>
           <a:p>
             <a:r>
-              <a:t>Today we build the parts that matter for the architecture, not the whole game.</a:t>
+              <a:t>Today we build the parts that matter for the architecture.</a:t>
             </a:r>
           </a:p>
         </p:txBody>

--- a/slides/02 Flappy Bird.pptx
+++ b/slides/02 Flappy Bird.pptx
@@ -10872,7 +10872,7 @@
             </a:pPr>
             <a:r>
               <a:rPr lang="en"/>
-              <a:t>Each layer loops at its own point with %: background 413, ground 512</a:t>
+              <a:t>Each layer loops at its own point with %: background 412, ground 512</a:t>
             </a:r>
             <a:endParaRPr/>
           </a:p>

--- a/slides/02 Flappy Bird.pptx
+++ b/slides/02 Flappy Bird.pptx
@@ -10880,14 +10880,14 @@
       </p:sp>
       <p:pic>
         <p:nvPicPr>
-          <p:cNvPr id="132" name="Picture 131" descr="f2.png"/>
+          <p:cNvPr id="132" name="Picture 132" descr="Flappy2.png"/>
           <p:cNvPicPr>
             <a:picLocks noChangeAspect="1"/>
           </p:cNvPicPr>
           <p:nvPr/>
         </p:nvPicPr>
         <p:blipFill>
-          <a:blip r:embed="rId3"/>
+          <a:blip r:embed="rId4"/>
           <a:stretch>
             <a:fillRect/>
           </a:stretch>
@@ -12991,14 +12991,14 @@
       </p:sp>
       <p:pic>
         <p:nvPicPr>
-          <p:cNvPr id="150" name="Picture 149" descr="f3.png"/>
+          <p:cNvPr id="150" name="Picture 150" descr="Flappy3.png"/>
           <p:cNvPicPr>
             <a:picLocks noChangeAspect="1"/>
           </p:cNvPicPr>
           <p:nvPr/>
         </p:nvPicPr>
         <p:blipFill>
-          <a:blip r:embed="rId3"/>
+          <a:blip r:embed="rId4"/>
           <a:stretch>
             <a:fillRect/>
           </a:stretch>
@@ -14499,7 +14499,7 @@
           <p:nvPr/>
         </p:nvPicPr>
         <p:blipFill>
-          <a:blip r:embed="rId4"/>
+          <a:blip r:embed="rId3"/>
           <a:stretch>
             <a:fillRect/>
           </a:stretch>
@@ -14507,7 +14507,7 @@
         <p:spPr>
           <a:xfrm>
             <a:off x="1521325" y="332167"/>
-            <a:ext cx="6101351" cy="4479166"/>
+            <a:ext cx="6101350" cy="4479166"/>
           </a:xfrm>
           <a:prstGeom prst="rect">
             <a:avLst/>
@@ -14647,14 +14647,14 @@
       </p:sp>
       <p:pic>
         <p:nvPicPr>
-          <p:cNvPr id="179" name="Picture 178" descr="f7.png"/>
+          <p:cNvPr id="179" name="Picture 179" descr="Flappy7.png"/>
           <p:cNvPicPr>
             <a:picLocks noChangeAspect="1"/>
           </p:cNvPicPr>
           <p:nvPr/>
         </p:nvPicPr>
         <p:blipFill>
-          <a:blip r:embed="rId5"/>
+          <a:blip r:embed="rId6"/>
           <a:stretch>
             <a:fillRect/>
           </a:stretch>
@@ -16283,14 +16283,14 @@
       </p:sp>
       <p:pic>
         <p:nvPicPr>
-          <p:cNvPr id="191" name="Picture 190" descr="f8.png"/>
+          <p:cNvPr id="191" name="Picture 191" descr="Flappy8.png"/>
           <p:cNvPicPr>
             <a:picLocks noChangeAspect="1"/>
           </p:cNvPicPr>
           <p:nvPr/>
         </p:nvPicPr>
         <p:blipFill>
-          <a:blip r:embed="rId3"/>
+          <a:blip r:embed="rId4"/>
           <a:stretch>
             <a:fillRect/>
           </a:stretch>
@@ -17138,14 +17138,14 @@
       </p:sp>
       <p:pic>
         <p:nvPicPr>
-          <p:cNvPr id="46" name="Picture 46" descr="gif-flappy.gif"/>
+          <p:cNvPr id="46" name="Picture 46" descr="flappy-bird.gif"/>
           <p:cNvPicPr>
             <a:picLocks noChangeAspect="1"/>
           </p:cNvPicPr>
           <p:nvPr/>
         </p:nvPicPr>
         <p:blipFill>
-          <a:blip r:embed="rId4"/>
+          <a:blip r:embed="rId3"/>
           <a:stretch>
             <a:fillRect/>
           </a:stretch>
@@ -22103,14 +22103,14 @@
       </p:sp>
       <p:pic>
         <p:nvPicPr>
-          <p:cNvPr id="226" name="Picture 225" descr="f9.png"/>
+          <p:cNvPr id="226" name="Picture 226" descr="Flappy9.png"/>
           <p:cNvPicPr>
             <a:picLocks noChangeAspect="1"/>
           </p:cNvPicPr>
           <p:nvPr/>
         </p:nvPicPr>
         <p:blipFill>
-          <a:blip r:embed="rId4"/>
+          <a:blip r:embed="rId5"/>
           <a:stretch>
             <a:fillRect/>
           </a:stretch>
@@ -23202,14 +23202,14 @@
       </p:sp>
       <p:pic>
         <p:nvPicPr>
-          <p:cNvPr id="238" name="Picture 237" descr="f11.png"/>
+          <p:cNvPr id="238" name="Picture 238" descr="Flappy11.png"/>
           <p:cNvPicPr>
             <a:picLocks noChangeAspect="1"/>
           </p:cNvPicPr>
           <p:nvPr/>
         </p:nvPicPr>
         <p:blipFill>
-          <a:blip r:embed="rId3"/>
+          <a:blip r:embed="rId4"/>
           <a:stretch>
             <a:fillRect/>
           </a:stretch>

--- a/slides/02 Flappy Bird.pptx
+++ b/slides/02 Flappy Bird.pptx
@@ -9809,7 +9809,7 @@
             </a:pPr>
             <a:r>
               <a:rPr lang="en"/>
-              <a:t>512 × 288 virtual resolution in a 1280 × 720 window.</a:t>
+              <a:t>640 × 360 virtual resolution in a 1280 × 720 window.</a:t>
             </a:r>
             <a:endParaRPr/>
           </a:p>

--- a/slides/02 Flappy Bird.pptx
+++ b/slides/02 Flappy Bird.pptx
@@ -18,14 +18,12 @@
     <p:sldId id="262" r:id="rId12"/>
     <p:sldId id="263" r:id="rId13"/>
     <p:sldId id="264" r:id="rId14"/>
-    <p:sldId id="265" r:id="rId15"/>
     <p:sldId id="266" r:id="rId16"/>
     <p:sldId id="267" r:id="rId17"/>
     <p:sldId id="268" r:id="rId18"/>
     <p:sldId id="270" r:id="rId20"/>
     <p:sldId id="271" r:id="rId21"/>
     <p:sldId id="300" r:id="rId56"/>
-    <p:sldId id="272" r:id="rId22"/>
     <p:sldId id="273" r:id="rId23"/>
     <p:sldId id="304" r:id="rId27"/>
     <p:sldId id="275" r:id="rId25"/>
@@ -844,95 +842,6 @@
 </p:notes>
 </file>
 
-<file path=ppt/notesSlides/notesSlide10.xml><?xml version="1.0" encoding="utf-8"?>
-<p:notes xmlns:a="http://schemas.openxmlformats.org/drawingml/2006/main" xmlns:r="http://schemas.openxmlformats.org/officeDocument/2006/relationships" xmlns:mc="http://schemas.openxmlformats.org/markup-compatibility/2006" xmlns:mv="urn:schemas-microsoft-com:mac:vml" xmlns:p="http://schemas.openxmlformats.org/presentationml/2006/main" xmlns:c="http://schemas.openxmlformats.org/drawingml/2006/chart" xmlns:dgm="http://schemas.openxmlformats.org/drawingml/2006/diagram" xmlns:o="urn:schemas-microsoft-com:office:office" xmlns:v="urn:schemas-microsoft-com:vml" xmlns:pvml="urn:schemas-microsoft-com:office:powerpoint" xmlns:com="http://schemas.openxmlformats.org/drawingml/2006/compatibility" xmlns:p14="http://schemas.microsoft.com/office/powerpoint/2010/main" xmlns:p15="http://schemas.microsoft.com/office/powerpoint/2012/main" xmlns:ahyp="http://schemas.microsoft.com/office/drawing/2018/hyperlinkcolor" showMasterPhAnim="0" showMasterSp="0">
-  <p:cSld>
-    <p:spTree>
-      <p:nvGrpSpPr>
-        <p:cNvPr id="88" name="Shape 88"/>
-        <p:cNvGrpSpPr/>
-        <p:nvPr/>
-      </p:nvGrpSpPr>
-      <p:grpSpPr>
-        <a:xfrm>
-          <a:off x="0" y="0"/>
-          <a:ext cx="0" cy="0"/>
-          <a:chOff x="0" y="0"/>
-          <a:chExt cx="0" cy="0"/>
-        </a:xfrm>
-      </p:grpSpPr>
-      <p:sp>
-        <p:nvSpPr>
-          <p:cNvPr id="89" name="Google Shape;89;g3c83da3f632_0_7:notes"/>
-          <p:cNvSpPr/>
-          <p:nvPr>
-            <p:ph idx="2" type="sldImg"/>
-          </p:nvPr>
-        </p:nvSpPr>
-        <p:spPr>
-          <a:xfrm>
-            <a:off x="381300" y="685800"/>
-            <a:ext cx="6096000" cy="3429000"/>
-          </a:xfrm>
-          <a:custGeom>
-            <a:rect b="b" l="l" r="r" t="t"/>
-            <a:pathLst>
-              <a:path extrusionOk="0" h="120000" w="120000">
-                <a:moveTo>
-                  <a:pt x="0" y="0"/>
-                </a:moveTo>
-                <a:lnTo>
-                  <a:pt x="120000" y="0"/>
-                </a:lnTo>
-                <a:lnTo>
-                  <a:pt x="120000" y="120000"/>
-                </a:lnTo>
-                <a:lnTo>
-                  <a:pt x="0" y="120000"/>
-                </a:lnTo>
-                <a:close/>
-              </a:path>
-            </a:pathLst>
-          </a:custGeom>
-        </p:spPr>
-      </p:sp>
-      <p:sp>
-        <p:nvSpPr>
-          <p:cNvPr id="90" name="Google Shape;90;g3c83da3f632_0_7:notes"/>
-          <p:cNvSpPr txBox="1"/>
-          <p:nvPr>
-            <p:ph idx="1" type="body"/>
-          </p:nvPr>
-        </p:nvSpPr>
-        <p:spPr>
-          <a:xfrm>
-            <a:off x="685800" y="4343400"/>
-            <a:ext cx="5486400" cy="4114800"/>
-          </a:xfrm>
-          <a:prstGeom prst="rect">
-            <a:avLst/>
-          </a:prstGeom>
-        </p:spPr>
-        <p:txBody>
-          <a:bodyPr anchorCtr="0" anchor="t" bIns="91425" lIns="91425" spcFirstLastPara="1" rIns="91425" wrap="square" tIns="91425">
-            <a:noAutofit/>
-          </a:bodyPr>
-          <a:lstStyle/>
-          <a:p>
-            <a:r>
-              <a:t>The shape we’re building: GARCore, referenced by each game. It grows through the course.</a:t>
-            </a:r>
-          </a:p>
-        </p:txBody>
-      </p:sp>
-    </p:spTree>
-  </p:cSld>
-  <p:clrMapOvr>
-    <a:masterClrMapping/>
-  </p:clrMapOvr>
-</p:notes>
-</file>
-
 <file path=ppt/notesSlides/notesSlide11.xml><?xml version="1.0" encoding="utf-8"?>
 <p:notes xmlns:a="http://schemas.openxmlformats.org/drawingml/2006/main" xmlns:r="http://schemas.openxmlformats.org/officeDocument/2006/relationships" xmlns:mc="http://schemas.openxmlformats.org/markup-compatibility/2006" xmlns:mv="urn:schemas-microsoft-com:mac:vml" xmlns:p="http://schemas.openxmlformats.org/presentationml/2006/main" xmlns:c="http://schemas.openxmlformats.org/drawingml/2006/chart" xmlns:dgm="http://schemas.openxmlformats.org/drawingml/2006/diagram" xmlns:o="urn:schemas-microsoft-com:office:office" xmlns:v="urn:schemas-microsoft-com:vml" xmlns:pvml="urn:schemas-microsoft-com:office:powerpoint" xmlns:com="http://schemas.openxmlformats.org/drawingml/2006/compatibility" xmlns:p14="http://schemas.microsoft.com/office/powerpoint/2010/main" xmlns:p15="http://schemas.microsoft.com/office/powerpoint/2012/main" xmlns:ahyp="http://schemas.microsoft.com/office/drawing/2018/hyperlinkcolor" showMasterPhAnim="0" showMasterSp="0">
   <p:cSld>
@@ -1466,95 +1375,6 @@
 </p:notes>
 </file>
 
-<file path=ppt/notesSlides/notesSlide17.xml><?xml version="1.0" encoding="utf-8"?>
-<p:notes xmlns:a="http://schemas.openxmlformats.org/drawingml/2006/main" xmlns:r="http://schemas.openxmlformats.org/officeDocument/2006/relationships" xmlns:mc="http://schemas.openxmlformats.org/markup-compatibility/2006" xmlns:mv="urn:schemas-microsoft-com:mac:vml" xmlns:p="http://schemas.openxmlformats.org/presentationml/2006/main" xmlns:c="http://schemas.openxmlformats.org/drawingml/2006/chart" xmlns:dgm="http://schemas.openxmlformats.org/drawingml/2006/diagram" xmlns:o="urn:schemas-microsoft-com:office:office" xmlns:v="urn:schemas-microsoft-com:vml" xmlns:pvml="urn:schemas-microsoft-com:office:powerpoint" xmlns:com="http://schemas.openxmlformats.org/drawingml/2006/compatibility" xmlns:p14="http://schemas.microsoft.com/office/powerpoint/2010/main" xmlns:p15="http://schemas.microsoft.com/office/powerpoint/2012/main" xmlns:ahyp="http://schemas.microsoft.com/office/drawing/2018/hyperlinkcolor" showMasterPhAnim="0" showMasterSp="0">
-  <p:cSld>
-    <p:spTree>
-      <p:nvGrpSpPr>
-        <p:cNvPr id="132" name="Shape 132"/>
-        <p:cNvGrpSpPr/>
-        <p:nvPr/>
-      </p:nvGrpSpPr>
-      <p:grpSpPr>
-        <a:xfrm>
-          <a:off x="0" y="0"/>
-          <a:ext cx="0" cy="0"/>
-          <a:chOff x="0" y="0"/>
-          <a:chExt cx="0" cy="0"/>
-        </a:xfrm>
-      </p:grpSpPr>
-      <p:sp>
-        <p:nvSpPr>
-          <p:cNvPr id="133" name="Google Shape;133;g393cde93488_0_5:notes"/>
-          <p:cNvSpPr/>
-          <p:nvPr>
-            <p:ph idx="2" type="sldImg"/>
-          </p:nvPr>
-        </p:nvSpPr>
-        <p:spPr>
-          <a:xfrm>
-            <a:off x="381300" y="685800"/>
-            <a:ext cx="6096000" cy="3429000"/>
-          </a:xfrm>
-          <a:custGeom>
-            <a:rect b="b" l="l" r="r" t="t"/>
-            <a:pathLst>
-              <a:path extrusionOk="0" h="120000" w="120000">
-                <a:moveTo>
-                  <a:pt x="0" y="0"/>
-                </a:moveTo>
-                <a:lnTo>
-                  <a:pt x="120000" y="0"/>
-                </a:lnTo>
-                <a:lnTo>
-                  <a:pt x="120000" y="120000"/>
-                </a:lnTo>
-                <a:lnTo>
-                  <a:pt x="0" y="120000"/>
-                </a:lnTo>
-                <a:close/>
-              </a:path>
-            </a:pathLst>
-          </a:custGeom>
-        </p:spPr>
-      </p:sp>
-      <p:sp>
-        <p:nvSpPr>
-          <p:cNvPr id="134" name="Google Shape;134;g393cde93488_0_5:notes"/>
-          <p:cNvSpPr txBox="1"/>
-          <p:nvPr>
-            <p:ph idx="1" type="body"/>
-          </p:nvPr>
-        </p:nvSpPr>
-        <p:spPr>
-          <a:xfrm>
-            <a:off x="685800" y="4343400"/>
-            <a:ext cx="5486400" cy="4114800"/>
-          </a:xfrm>
-          <a:prstGeom prst="rect">
-            <a:avLst/>
-          </a:prstGeom>
-        </p:spPr>
-        <p:txBody>
-          <a:bodyPr anchorCtr="0" anchor="t" bIns="91425" lIns="91425" spcFirstLastPara="1" rIns="91425" wrap="square" tIns="91425">
-            <a:noAutofit/>
-          </a:bodyPr>
-          <a:lstStyle/>
-          <a:p>
-            <a:r>
-              <a:t>The bird never moves forward: the world scrolls past it. Games fake whatever they can get away with.</a:t>
-            </a:r>
-          </a:p>
-        </p:txBody>
-      </p:sp>
-    </p:spTree>
-  </p:cSld>
-  <p:clrMapOvr>
-    <a:masterClrMapping/>
-  </p:clrMapOvr>
-</p:notes>
-</file>
-
 <file path=ppt/notesSlides/notesSlide18.xml><?xml version="1.0" encoding="utf-8"?>
 <p:notes xmlns:a="http://schemas.openxmlformats.org/drawingml/2006/main" xmlns:r="http://schemas.openxmlformats.org/officeDocument/2006/relationships" xmlns:mc="http://schemas.openxmlformats.org/markup-compatibility/2006" xmlns:mv="urn:schemas-microsoft-com:mac:vml" xmlns:p="http://schemas.openxmlformats.org/presentationml/2006/main" xmlns:c="http://schemas.openxmlformats.org/drawingml/2006/chart" xmlns:dgm="http://schemas.openxmlformats.org/drawingml/2006/diagram" xmlns:o="urn:schemas-microsoft-com:office:office" xmlns:v="urn:schemas-microsoft-com:vml" xmlns:pvml="urn:schemas-microsoft-com:office:powerpoint" xmlns:com="http://schemas.openxmlformats.org/drawingml/2006/compatibility" xmlns:p14="http://schemas.microsoft.com/office/powerpoint/2010/main" xmlns:p15="http://schemas.microsoft.com/office/powerpoint/2012/main" xmlns:ahyp="http://schemas.microsoft.com/office/drawing/2018/hyperlinkcolor" showMasterPhAnim="0" showMasterSp="0">
   <p:cSld>
@@ -4637,6 +4457,11 @@
           <a:p>
             <a:r>
               <a:t>Pong copied everything into one project. Code every game needs (window, scaling, input) belongs in a library that every game references.</a:t>
+            </a:r>
+          </a:p>
+          <a:p>
+            <a:r>
+              <a:t>GARCore is referenced by each game, and it grows through the course.</a:t>
             </a:r>
           </a:p>
         </p:txBody>
@@ -8369,30 +8194,26 @@
       </p:sp>
       <p:pic>
         <p:nvPicPr>
-          <p:cNvPr id="87" name="Google Shape;87;p17"/>
-          <p:cNvPicPr preferRelativeResize="0"/>
+          <p:cNvPr id="87" name="Picture 86" descr="class-library.png"/>
+          <p:cNvPicPr>
+            <a:picLocks noChangeAspect="1"/>
+          </p:cNvPicPr>
           <p:nvPr/>
         </p:nvPicPr>
         <p:blipFill>
-          <a:blip r:embed="rId3">
-            <a:alphaModFix/>
-          </a:blip>
+          <a:blip r:embed="rId4"/>
           <a:stretch>
             <a:fillRect/>
           </a:stretch>
         </p:blipFill>
         <p:spPr>
           <a:xfrm>
-            <a:off x="270188" y="1400650"/>
-            <a:ext cx="8603624" cy="2342200"/>
+            <a:off x="320039" y="1051560"/>
+            <a:ext cx="8503920" cy="3779520"/>
           </a:xfrm>
           <a:prstGeom prst="rect">
             <a:avLst/>
           </a:prstGeom>
-          <a:noFill/>
-          <a:ln>
-            <a:noFill/>
-          </a:ln>
         </p:spPr>
       </p:pic>
     </p:spTree>
@@ -8404,99 +8225,6 @@
 </file>
 
 <file path=ppt/slides/slide11.xml><?xml version="1.0" encoding="utf-8"?>
-<p:sld xmlns:a="http://schemas.openxmlformats.org/drawingml/2006/main" xmlns:r="http://schemas.openxmlformats.org/officeDocument/2006/relationships" xmlns:mc="http://schemas.openxmlformats.org/markup-compatibility/2006" xmlns:mv="urn:schemas-microsoft-com:mac:vml" xmlns:p="http://schemas.openxmlformats.org/presentationml/2006/main" xmlns:c="http://schemas.openxmlformats.org/drawingml/2006/chart" xmlns:dgm="http://schemas.openxmlformats.org/drawingml/2006/diagram" xmlns:o="urn:schemas-microsoft-com:office:office" xmlns:v="urn:schemas-microsoft-com:vml" xmlns:pvml="urn:schemas-microsoft-com:office:powerpoint" xmlns:com="http://schemas.openxmlformats.org/drawingml/2006/compatibility" xmlns:p14="http://schemas.microsoft.com/office/powerpoint/2010/main" xmlns:p15="http://schemas.microsoft.com/office/powerpoint/2012/main" xmlns:ahyp="http://schemas.microsoft.com/office/drawing/2018/hyperlinkcolor">
-  <p:cSld>
-    <p:spTree>
-      <p:nvGrpSpPr>
-        <p:cNvPr id="91" name="Shape 91"/>
-        <p:cNvGrpSpPr/>
-        <p:nvPr/>
-      </p:nvGrpSpPr>
-      <p:grpSpPr>
-        <a:xfrm>
-          <a:off x="0" y="0"/>
-          <a:ext cx="0" cy="0"/>
-          <a:chOff x="0" y="0"/>
-          <a:chExt cx="0" cy="0"/>
-        </a:xfrm>
-      </p:grpSpPr>
-      <p:sp>
-        <p:nvSpPr>
-          <p:cNvPr id="92" name="Google Shape;92;p18"/>
-          <p:cNvSpPr txBox="1"/>
-          <p:nvPr>
-            <p:ph type="title"/>
-          </p:nvPr>
-        </p:nvSpPr>
-        <p:spPr>
-          <a:xfrm>
-            <a:off x="311700" y="195615"/>
-            <a:ext cx="8520600" cy="572700"/>
-          </a:xfrm>
-          <a:prstGeom prst="rect">
-            <a:avLst/>
-          </a:prstGeom>
-        </p:spPr>
-        <p:txBody>
-          <a:bodyPr anchorCtr="0" anchor="t" bIns="91425" lIns="91425" spcFirstLastPara="1" rIns="91425" wrap="square" tIns="91425">
-            <a:normAutofit fontScale="90000"/>
-          </a:bodyPr>
-          <a:lstStyle/>
-          <a:p>
-            <a:pPr indent="0" lvl="0" marL="0" rtl="0" algn="l">
-              <a:spcBef>
-                <a:spcPts val="0"/>
-              </a:spcBef>
-              <a:spcAft>
-                <a:spcPts val="0"/>
-              </a:spcAft>
-              <a:buNone/>
-            </a:pPr>
-            <a:r>
-              <a:rPr lang="en"/>
-              <a:t>Class Library</a:t>
-            </a:r>
-            <a:endParaRPr/>
-          </a:p>
-        </p:txBody>
-      </p:sp>
-      <p:pic>
-        <p:nvPicPr>
-          <p:cNvPr id="93" name="Google Shape;93;p18"/>
-          <p:cNvPicPr preferRelativeResize="0"/>
-          <p:nvPr/>
-        </p:nvPicPr>
-        <p:blipFill>
-          <a:blip r:embed="rId3">
-            <a:alphaModFix/>
-          </a:blip>
-          <a:stretch>
-            <a:fillRect/>
-          </a:stretch>
-        </p:blipFill>
-        <p:spPr>
-          <a:xfrm>
-            <a:off x="252837" y="900688"/>
-            <a:ext cx="8638324" cy="3342119"/>
-          </a:xfrm>
-          <a:prstGeom prst="rect">
-            <a:avLst/>
-          </a:prstGeom>
-          <a:noFill/>
-          <a:ln>
-            <a:noFill/>
-          </a:ln>
-        </p:spPr>
-      </p:pic>
-    </p:spTree>
-  </p:cSld>
-  <p:clrMapOvr>
-    <a:masterClrMapping/>
-  </p:clrMapOvr>
-</p:sld>
-</file>
-
-<file path=ppt/slides/slide12.xml><?xml version="1.0" encoding="utf-8"?>
 <p:sld xmlns:a="http://schemas.openxmlformats.org/drawingml/2006/main" xmlns:r="http://schemas.openxmlformats.org/officeDocument/2006/relationships" xmlns:mc="http://schemas.openxmlformats.org/markup-compatibility/2006" xmlns:mv="urn:schemas-microsoft-com:mac:vml" xmlns:p="http://schemas.openxmlformats.org/presentationml/2006/main" xmlns:c="http://schemas.openxmlformats.org/drawingml/2006/chart" xmlns:dgm="http://schemas.openxmlformats.org/drawingml/2006/diagram" xmlns:o="urn:schemas-microsoft-com:office:office" xmlns:v="urn:schemas-microsoft-com:vml" xmlns:pvml="urn:schemas-microsoft-com:office:powerpoint" xmlns:com="http://schemas.openxmlformats.org/drawingml/2006/compatibility" xmlns:p14="http://schemas.microsoft.com/office/powerpoint/2010/main" xmlns:p15="http://schemas.microsoft.com/office/powerpoint/2012/main" xmlns:ahyp="http://schemas.microsoft.com/office/drawing/2018/hyperlinkcolor">
   <p:cSld>
     <p:spTree>
@@ -9820,7 +9548,7 @@
 </p:sld>
 </file>
 
-<file path=ppt/slides/slide13.xml><?xml version="1.0" encoding="utf-8"?>
+<file path=ppt/slides/slide12.xml><?xml version="1.0" encoding="utf-8"?>
 <p:sld xmlns:a="http://schemas.openxmlformats.org/drawingml/2006/main" xmlns:r="http://schemas.openxmlformats.org/officeDocument/2006/relationships" xmlns:mc="http://schemas.openxmlformats.org/markup-compatibility/2006" xmlns:mv="urn:schemas-microsoft-com:mac:vml" xmlns:p="http://schemas.openxmlformats.org/presentationml/2006/main" xmlns:c="http://schemas.openxmlformats.org/drawingml/2006/chart" xmlns:dgm="http://schemas.openxmlformats.org/drawingml/2006/diagram" xmlns:o="urn:schemas-microsoft-com:office:office" xmlns:v="urn:schemas-microsoft-com:vml" xmlns:pvml="urn:schemas-microsoft-com:office:powerpoint" xmlns:com="http://schemas.openxmlformats.org/drawingml/2006/compatibility" xmlns:p14="http://schemas.microsoft.com/office/powerpoint/2010/main" xmlns:p15="http://schemas.microsoft.com/office/powerpoint/2012/main" xmlns:ahyp="http://schemas.microsoft.com/office/drawing/2018/hyperlinkcolor">
   <p:cSld>
     <p:spTree>
@@ -10495,7 +10223,7 @@
 </p:sld>
 </file>
 
-<file path=ppt/slides/slide14.xml><?xml version="1.0" encoding="utf-8"?>
+<file path=ppt/slides/slide13.xml><?xml version="1.0" encoding="utf-8"?>
 <p:sld xmlns:a="http://schemas.openxmlformats.org/drawingml/2006/main" xmlns:r="http://schemas.openxmlformats.org/officeDocument/2006/relationships" xmlns:mc="http://schemas.openxmlformats.org/markup-compatibility/2006" xmlns:mv="urn:schemas-microsoft-com:mac:vml" xmlns:p="http://schemas.openxmlformats.org/presentationml/2006/main" xmlns:c="http://schemas.openxmlformats.org/drawingml/2006/chart" xmlns:dgm="http://schemas.openxmlformats.org/drawingml/2006/diagram" xmlns:o="urn:schemas-microsoft-com:office:office" xmlns:v="urn:schemas-microsoft-com:vml" xmlns:pvml="urn:schemas-microsoft-com:office:powerpoint" xmlns:com="http://schemas.openxmlformats.org/drawingml/2006/compatibility" xmlns:p14="http://schemas.microsoft.com/office/powerpoint/2010/main" xmlns:p15="http://schemas.microsoft.com/office/powerpoint/2012/main" xmlns:ahyp="http://schemas.microsoft.com/office/drawing/2018/hyperlinkcolor">
   <p:cSld>
     <p:spTree>
@@ -10746,7 +10474,7 @@
 </p:sld>
 </file>
 
-<file path=ppt/slides/slide15.xml><?xml version="1.0" encoding="utf-8"?>
+<file path=ppt/slides/slide14.xml><?xml version="1.0" encoding="utf-8"?>
 <p:sld xmlns:a="http://schemas.openxmlformats.org/drawingml/2006/main" xmlns:r="http://schemas.openxmlformats.org/officeDocument/2006/relationships" xmlns:mc="http://schemas.openxmlformats.org/markup-compatibility/2006" xmlns:mv="urn:schemas-microsoft-com:mac:vml" xmlns:p="http://schemas.openxmlformats.org/presentationml/2006/main" xmlns:c="http://schemas.openxmlformats.org/drawingml/2006/chart" xmlns:dgm="http://schemas.openxmlformats.org/drawingml/2006/diagram" xmlns:o="urn:schemas-microsoft-com:office:office" xmlns:v="urn:schemas-microsoft-com:vml" xmlns:pvml="urn:schemas-microsoft-com:office:powerpoint" xmlns:com="http://schemas.openxmlformats.org/drawingml/2006/compatibility" xmlns:p14="http://schemas.microsoft.com/office/powerpoint/2010/main" xmlns:p15="http://schemas.microsoft.com/office/powerpoint/2012/main" xmlns:ahyp="http://schemas.microsoft.com/office/drawing/2018/hyperlinkcolor">
   <p:cSld>
     <p:spTree>
@@ -10879,7 +10607,7 @@
 </p:sld>
 </file>
 
-<file path=ppt/slides/slide16.xml><?xml version="1.0" encoding="utf-8"?>
+<file path=ppt/slides/slide15.xml><?xml version="1.0" encoding="utf-8"?>
 <p:sld xmlns:a="http://schemas.openxmlformats.org/drawingml/2006/main" xmlns:r="http://schemas.openxmlformats.org/officeDocument/2006/relationships" xmlns:mc="http://schemas.openxmlformats.org/markup-compatibility/2006" xmlns:mv="urn:schemas-microsoft-com:mac:vml" xmlns:p="http://schemas.openxmlformats.org/presentationml/2006/main" xmlns:c="http://schemas.openxmlformats.org/drawingml/2006/chart" xmlns:dgm="http://schemas.openxmlformats.org/drawingml/2006/diagram" xmlns:o="urn:schemas-microsoft-com:office:office" xmlns:v="urn:schemas-microsoft-com:vml" xmlns:pvml="urn:schemas-microsoft-com:office:powerpoint" xmlns:com="http://schemas.openxmlformats.org/drawingml/2006/compatibility" xmlns:p14="http://schemas.microsoft.com/office/powerpoint/2010/main" xmlns:p15="http://schemas.microsoft.com/office/powerpoint/2012/main" xmlns:ahyp="http://schemas.microsoft.com/office/drawing/2018/hyperlinkcolor">
   <p:cSld>
     <p:spTree>
@@ -11407,7 +11135,7 @@
 </p:sld>
 </file>
 
-<file path=ppt/slides/slide17.xml><?xml version="1.0" encoding="utf-8"?>
+<file path=ppt/slides/slide16.xml><?xml version="1.0" encoding="utf-8"?>
 <p:sld xmlns:a="http://schemas.openxmlformats.org/drawingml/2006/main" xmlns:p="http://schemas.openxmlformats.org/presentationml/2006/main" xmlns:r="http://schemas.openxmlformats.org/officeDocument/2006/relationships">
   <p:cSld>
     <p:spTree>
@@ -11546,185 +11274,7 @@
 </p:sld>
 </file>
 
-<file path=ppt/slides/slide18.xml><?xml version="1.0" encoding="utf-8"?>
-<p:sld xmlns:a="http://schemas.openxmlformats.org/drawingml/2006/main" xmlns:r="http://schemas.openxmlformats.org/officeDocument/2006/relationships" xmlns:mc="http://schemas.openxmlformats.org/markup-compatibility/2006" xmlns:mv="urn:schemas-microsoft-com:mac:vml" xmlns:p="http://schemas.openxmlformats.org/presentationml/2006/main" xmlns:c="http://schemas.openxmlformats.org/drawingml/2006/chart" xmlns:dgm="http://schemas.openxmlformats.org/drawingml/2006/diagram" xmlns:o="urn:schemas-microsoft-com:office:office" xmlns:v="urn:schemas-microsoft-com:vml" xmlns:pvml="urn:schemas-microsoft-com:office:powerpoint" xmlns:com="http://schemas.openxmlformats.org/drawingml/2006/compatibility" xmlns:p14="http://schemas.microsoft.com/office/powerpoint/2010/main" xmlns:p15="http://schemas.microsoft.com/office/powerpoint/2012/main" xmlns:ahyp="http://schemas.microsoft.com/office/drawing/2018/hyperlinkcolor">
-  <p:cSld>
-    <p:spTree>
-      <p:nvGrpSpPr>
-        <p:cNvPr id="135" name="Shape 135"/>
-        <p:cNvGrpSpPr/>
-        <p:nvPr/>
-      </p:nvGrpSpPr>
-      <p:grpSpPr>
-        <a:xfrm>
-          <a:off x="0" y="0"/>
-          <a:ext cx="0" cy="0"/>
-          <a:chOff x="0" y="0"/>
-          <a:chExt cx="0" cy="0"/>
-        </a:xfrm>
-      </p:grpSpPr>
-      <p:sp>
-        <p:nvSpPr>
-          <p:cNvPr id="136" name="Google Shape;136;p25"/>
-          <p:cNvSpPr txBox="1"/>
-          <p:nvPr>
-            <p:ph type="title"/>
-          </p:nvPr>
-        </p:nvSpPr>
-        <p:spPr>
-          <a:xfrm>
-            <a:off x="311700" y="195615"/>
-            <a:ext cx="8520600" cy="572700"/>
-          </a:xfrm>
-          <a:prstGeom prst="rect">
-            <a:avLst/>
-          </a:prstGeom>
-        </p:spPr>
-        <p:txBody>
-          <a:bodyPr anchorCtr="0" anchor="t" bIns="91425" lIns="91425" spcFirstLastPara="1" rIns="91425" wrap="square" tIns="91425">
-            <a:normAutofit fontScale="90000"/>
-          </a:bodyPr>
-          <a:lstStyle/>
-          <a:p>
-            <a:pPr indent="0" lvl="0" marL="0" rtl="0" algn="l">
-              <a:spcBef>
-                <a:spcPts val="0"/>
-              </a:spcBef>
-              <a:spcAft>
-                <a:spcPts val="0"/>
-              </a:spcAft>
-              <a:buNone/>
-            </a:pPr>
-            <a:r>
-              <a:rPr lang="en"/>
-              <a:t>Games are Illusions</a:t>
-            </a:r>
-            <a:endParaRPr/>
-          </a:p>
-        </p:txBody>
-      </p:sp>
-      <p:pic>
-        <p:nvPicPr>
-          <p:cNvPr descr="THE NEWER VERSION: https://youtu.be/xFdgkMpVzLo&#10;&#10;I'm so incredibly thankful to everyone who came on for this episode. This was my attempt at making an episode feel as important as the game i was covering. And while i will leave it to the viewers to decide if it was properly pulled off, it wouldnt have had any weight to it without the support of everyone who came on to help it feel that way. Here are links to all the contributors. If you enjoyed this episode, it would mean a lot to me if you checked them out and maybe let them know you appreciated their support as much as I did.&#10;&#10;The intro animator Michael Chin - https://www.youtube.com/user/MichaelChin1994&#10;&#10;Joey Ferris - https://www.youtube.com/user/TheFerrisofWheels&#10;&#10;Zeltik - https://www.youtube.com/channel/UCudx6plmpbs5WtWvsvu-EdQ&#10;&#10;HMK - https://www.youtube.com/user/HMK9CAPN&#10;&#10;Darrin Harr III from www.ZeldaInformer.com - https://www.youtube.com/user/ZeldaInformer&#10;&#10;Voiced by Brandon Acosta and written by Alex Trevino on behalf of www.ZeldaUniverse.com - https://www.youtube.com/user/ZeldaUniverseTV&#10;&#10;Also, you can follow me on twitter if you want screen shots of boundary break-esk stuff throughout the week!:&#10;https://twitter.com/BoundaryBreak&#10;&#10;Source for lower third:&#10;https://youtu.be/IXtr2C8SccQ&#10;&#10;By request of the guy who actually made the map for Haunted Wasteland (he was a very cool guy) Please check out www.VGmaps.com for more video game related maps!" id="137" name="Google Shape;137;p25" title="Boundary Break: Ocarina of Time (OLD - See Description for updated version)">
-            <a:hlinkClick r:id="rId3"/>
-          </p:cNvPr>
-          <p:cNvPicPr preferRelativeResize="0"/>
-          <p:nvPr/>
-        </p:nvPicPr>
-        <p:blipFill>
-          <a:blip r:embed="rId4">
-            <a:alphaModFix/>
-          </a:blip>
-          <a:stretch>
-            <a:fillRect/>
-          </a:stretch>
-        </p:blipFill>
-        <p:spPr>
-          <a:xfrm>
-            <a:off x="1907200" y="1456375"/>
-            <a:ext cx="5259975" cy="2958725"/>
-          </a:xfrm>
-          <a:prstGeom prst="rect">
-            <a:avLst/>
-          </a:prstGeom>
-          <a:noFill/>
-          <a:ln>
-            <a:noFill/>
-          </a:ln>
-        </p:spPr>
-      </p:pic>
-    </p:spTree>
-  </p:cSld>
-  <p:clrMapOvr>
-    <a:masterClrMapping/>
-  </p:clrMapOvr>
-  <p:timing>
-    <p:tnLst>
-      <p:par>
-        <p:cTn dur="indefinite" nodeType="tmRoot" restart="never">
-          <p:childTnLst>
-            <p:seq concurrent="1" nextAc="seek">
-              <p:cTn dur="indefinite" id="2" nodeType="mainSeq">
-                <p:childTnLst>
-                  <p:par>
-                    <p:cTn fill="hold">
-                      <p:stCondLst>
-                        <p:cond delay="indefinite"/>
-                      </p:stCondLst>
-                      <p:childTnLst>
-                        <p:par>
-                          <p:cTn fill="hold">
-                            <p:stCondLst>
-                              <p:cond delay="0"/>
-                            </p:stCondLst>
-                            <p:childTnLst>
-                              <p:par>
-                                <p:cTn fill="hold" nodeType="clickEffect" presetClass="entr" presetID="10" presetSubtype="0">
-                                  <p:stCondLst>
-                                    <p:cond delay="0"/>
-                                  </p:stCondLst>
-                                  <p:childTnLst>
-                                    <p:set>
-                                      <p:cBhvr>
-                                        <p:cTn dur="1" fill="hold">
-                                          <p:stCondLst>
-                                            <p:cond delay="0"/>
-                                          </p:stCondLst>
-                                        </p:cTn>
-                                        <p:tgtEl>
-                                          <p:spTgt spid="137"/>
-                                        </p:tgtEl>
-                                        <p:attrNameLst>
-                                          <p:attrName>style.visibility</p:attrName>
-                                        </p:attrNameLst>
-                                      </p:cBhvr>
-                                      <p:to>
-                                        <p:strVal val="visible"/>
-                                      </p:to>
-                                    </p:set>
-                                    <p:animEffect filter="fade" transition="in">
-                                      <p:cBhvr>
-                                        <p:cTn dur="1000"/>
-                                        <p:tgtEl>
-                                          <p:spTgt spid="137"/>
-                                        </p:tgtEl>
-                                      </p:cBhvr>
-                                    </p:animEffect>
-                                  </p:childTnLst>
-                                </p:cTn>
-                              </p:par>
-                            </p:childTnLst>
-                          </p:cTn>
-                        </p:par>
-                      </p:childTnLst>
-                    </p:cTn>
-                  </p:par>
-                </p:childTnLst>
-              </p:cTn>
-              <p:prevCondLst>
-                <p:cond evt="onPrev">
-                  <p:tgtEl>
-                    <p:sldTgt/>
-                  </p:tgtEl>
-                </p:cond>
-              </p:prevCondLst>
-              <p:nextCondLst>
-                <p:cond evt="onNext">
-                  <p:tgtEl>
-                    <p:sldTgt/>
-                  </p:tgtEl>
-                </p:cond>
-              </p:nextCondLst>
-            </p:seq>
-          </p:childTnLst>
-        </p:cTn>
-      </p:par>
-    </p:tnLst>
-  </p:timing>
-</p:sld>
-</file>
-
-<file path=ppt/slides/slide19.xml><?xml version="1.0" encoding="utf-8"?>
+<file path=ppt/slides/slide17.xml><?xml version="1.0" encoding="utf-8"?>
 <p:sld xmlns:a="http://schemas.openxmlformats.org/drawingml/2006/main" xmlns:r="http://schemas.openxmlformats.org/officeDocument/2006/relationships" xmlns:mc="http://schemas.openxmlformats.org/markup-compatibility/2006" xmlns:mv="urn:schemas-microsoft-com:mac:vml" xmlns:p="http://schemas.openxmlformats.org/presentationml/2006/main" xmlns:c="http://schemas.openxmlformats.org/drawingml/2006/chart" xmlns:dgm="http://schemas.openxmlformats.org/drawingml/2006/diagram" xmlns:o="urn:schemas-microsoft-com:office:office" xmlns:v="urn:schemas-microsoft-com:vml" xmlns:pvml="urn:schemas-microsoft-com:office:powerpoint" xmlns:com="http://schemas.openxmlformats.org/drawingml/2006/compatibility" xmlns:p14="http://schemas.microsoft.com/office/powerpoint/2010/main" xmlns:p15="http://schemas.microsoft.com/office/powerpoint/2012/main" xmlns:ahyp="http://schemas.microsoft.com/office/drawing/2018/hyperlinkcolor">
   <p:cSld>
     <p:spTree>
@@ -12894,7 +12444,7 @@
 </p:sld>
 </file>
 
-<file path=ppt/slides/slide2.xml><?xml version="1.0" encoding="utf-8"?>
+<file path=ppt/slides/slide18.xml><?xml version="1.0" encoding="utf-8"?>
 <p:sld xmlns:a="http://schemas.openxmlformats.org/drawingml/2006/main" xmlns:p="http://schemas.openxmlformats.org/presentationml/2006/main" xmlns:r="http://schemas.openxmlformats.org/officeDocument/2006/relationships">
   <p:cSld>
     <p:spTree>
@@ -12914,12 +12464,7 @@
             <p:ph type="title"/>
           </p:nvPr>
         </p:nvSpPr>
-        <p:spPr>
-          <a:xfrm>
-            <a:off x="311700" y="195615"/>
-            <a:ext cx="8520600" cy="572700"/>
-          </a:xfrm>
-        </p:spPr>
+        <p:spPr/>
         <p:txBody>
           <a:bodyPr/>
           <a:lstStyle/>
@@ -12935,7 +12480,7 @@
             </a:pPr>
             <a:r>
               <a:rPr lang="en"/>
-              <a:t>Flappy Bird</a:t>
+              <a:t>Gravity</a:t>
             </a:r>
             <a:endParaRPr/>
           </a:p>
@@ -12943,7 +12488,7 @@
       </p:sp>
       <p:pic>
         <p:nvPicPr>
-          <p:cNvPr id="3" name="Picture 2" descr="flappy-bird.png"/>
+          <p:cNvPr id="3" name="Picture 2" descr="gravity.png"/>
           <p:cNvPicPr>
             <a:picLocks noChangeAspect="1"/>
           </p:cNvPicPr>
@@ -12957,48 +12502,14 @@
         </p:blipFill>
         <p:spPr>
           <a:xfrm>
-            <a:off x="3540034" y="960120"/>
-            <a:ext cx="2063931" cy="3657600"/>
+            <a:off x="360381" y="1051560"/>
+            <a:ext cx="8423237" cy="3977640"/>
           </a:xfrm>
           <a:prstGeom prst="rect">
             <a:avLst/>
           </a:prstGeom>
         </p:spPr>
       </p:pic>
-      <p:sp>
-        <p:nvSpPr>
-          <p:cNvPr id="4" name="TextBox 3"/>
-          <p:cNvSpPr txBox="1"/>
-          <p:nvPr/>
-        </p:nvSpPr>
-        <p:spPr>
-          <a:xfrm>
-            <a:off x="457200" y="4736592"/>
-            <a:ext cx="8229600" cy="274320"/>
-          </a:xfrm>
-          <a:prstGeom prst="rect">
-            <a:avLst/>
-          </a:prstGeom>
-          <a:noFill/>
-        </p:spPr>
-        <p:txBody>
-          <a:bodyPr wrap="square">
-            <a:spAutoFit/>
-          </a:bodyPr>
-          <a:lstStyle/>
-          <a:p>
-            <a:pPr algn="ctr"/>
-            <a:r>
-              <a:rPr sz="900" b="0" i="0">
-                <a:solidFill>
-                  <a:srgbClr val="9AA3AB"/>
-                </a:solidFill>
-              </a:rPr>
-              <a:t>Flappy Bird (dotGears, 2013). Screenshot © dotGears.</a:t>
-            </a:r>
-          </a:p>
-        </p:txBody>
-      </p:sp>
     </p:spTree>
   </p:cSld>
   <p:clrMapOvr>
@@ -13007,7 +12518,7 @@
 </p:sld>
 </file>
 
-<file path=ppt/slides/slide20.xml><?xml version="1.0" encoding="utf-8"?>
+<file path=ppt/slides/slide19.xml><?xml version="1.0" encoding="utf-8"?>
 <p:sld xmlns:a="http://schemas.openxmlformats.org/drawingml/2006/main" xmlns:r="http://schemas.openxmlformats.org/officeDocument/2006/relationships" xmlns:mc="http://schemas.openxmlformats.org/markup-compatibility/2006" xmlns:mv="urn:schemas-microsoft-com:mac:vml" xmlns:p="http://schemas.openxmlformats.org/presentationml/2006/main" xmlns:c="http://schemas.openxmlformats.org/drawingml/2006/chart" xmlns:dgm="http://schemas.openxmlformats.org/drawingml/2006/diagram" xmlns:o="urn:schemas-microsoft-com:office:office" xmlns:v="urn:schemas-microsoft-com:vml" xmlns:pvml="urn:schemas-microsoft-com:office:powerpoint" xmlns:com="http://schemas.openxmlformats.org/drawingml/2006/compatibility" xmlns:p14="http://schemas.microsoft.com/office/powerpoint/2010/main" xmlns:p15="http://schemas.microsoft.com/office/powerpoint/2012/main" xmlns:ahyp="http://schemas.microsoft.com/office/drawing/2018/hyperlinkcolor">
   <p:cSld>
     <p:spTree>
@@ -14140,7 +13651,120 @@
 </p:sld>
 </file>
 
-<file path=ppt/slides/slide21.xml><?xml version="1.0" encoding="utf-8"?>
+<file path=ppt/slides/slide2.xml><?xml version="1.0" encoding="utf-8"?>
+<p:sld xmlns:a="http://schemas.openxmlformats.org/drawingml/2006/main" xmlns:p="http://schemas.openxmlformats.org/presentationml/2006/main" xmlns:r="http://schemas.openxmlformats.org/officeDocument/2006/relationships">
+  <p:cSld>
+    <p:spTree>
+      <p:nvGrpSpPr>
+        <p:cNvPr id="1" name=""/>
+        <p:cNvGrpSpPr/>
+        <p:nvPr/>
+      </p:nvGrpSpPr>
+      <p:grpSpPr/>
+      <p:sp>
+        <p:nvSpPr>
+          <p:cNvPr id="2" name="Title 1"/>
+          <p:cNvSpPr>
+            <a:spLocks noGrp="1"/>
+          </p:cNvSpPr>
+          <p:nvPr>
+            <p:ph type="title"/>
+          </p:nvPr>
+        </p:nvSpPr>
+        <p:spPr>
+          <a:xfrm>
+            <a:off x="311700" y="195615"/>
+            <a:ext cx="8520600" cy="572700"/>
+          </a:xfrm>
+        </p:spPr>
+        <p:txBody>
+          <a:bodyPr/>
+          <a:lstStyle/>
+          <a:p>
+            <a:pPr indent="0" lvl="0" marL="0" rtl="0" algn="l">
+              <a:spcBef>
+                <a:spcPts val="0"/>
+              </a:spcBef>
+              <a:spcAft>
+                <a:spcPts val="0"/>
+              </a:spcAft>
+              <a:buNone/>
+            </a:pPr>
+            <a:r>
+              <a:rPr lang="en"/>
+              <a:t>Flappy Bird</a:t>
+            </a:r>
+            <a:endParaRPr/>
+          </a:p>
+        </p:txBody>
+      </p:sp>
+      <p:pic>
+        <p:nvPicPr>
+          <p:cNvPr id="3" name="Picture 2" descr="flappy-bird.png"/>
+          <p:cNvPicPr>
+            <a:picLocks noChangeAspect="1"/>
+          </p:cNvPicPr>
+          <p:nvPr/>
+        </p:nvPicPr>
+        <p:blipFill>
+          <a:blip r:embed="rId2"/>
+          <a:stretch>
+            <a:fillRect/>
+          </a:stretch>
+        </p:blipFill>
+        <p:spPr>
+          <a:xfrm>
+            <a:off x="3540034" y="960120"/>
+            <a:ext cx="2063931" cy="3657600"/>
+          </a:xfrm>
+          <a:prstGeom prst="rect">
+            <a:avLst/>
+          </a:prstGeom>
+        </p:spPr>
+      </p:pic>
+      <p:sp>
+        <p:nvSpPr>
+          <p:cNvPr id="4" name="TextBox 3"/>
+          <p:cNvSpPr txBox="1"/>
+          <p:nvPr/>
+        </p:nvSpPr>
+        <p:spPr>
+          <a:xfrm>
+            <a:off x="457200" y="4736592"/>
+            <a:ext cx="8229600" cy="274320"/>
+          </a:xfrm>
+          <a:prstGeom prst="rect">
+            <a:avLst/>
+          </a:prstGeom>
+          <a:noFill/>
+        </p:spPr>
+        <p:txBody>
+          <a:bodyPr wrap="square">
+            <a:spAutoFit/>
+          </a:bodyPr>
+          <a:lstStyle/>
+          <a:p>
+            <a:pPr algn="ctr"/>
+            <a:r>
+              <a:rPr sz="900" b="0" i="0">
+                <a:solidFill>
+                  <a:srgbClr val="9AA3AB"/>
+                </a:solidFill>
+              </a:rPr>
+              <a:t>Flappy Bird (dotGears, 2013). Screenshot © dotGears.</a:t>
+            </a:r>
+          </a:p>
+        </p:txBody>
+      </p:sp>
+    </p:spTree>
+  </p:cSld>
+  <p:clrMapOvr>
+    <a:masterClrMapping/>
+  </p:clrMapOvr>
+</p:sld>
+</file>
+
+<file path=ppt/slides/slide20.xml><?xml version="1.0" encoding="utf-8"?>
 <p:sld xmlns:a="http://schemas.openxmlformats.org/drawingml/2006/main" xmlns:r="http://schemas.openxmlformats.org/officeDocument/2006/relationships" xmlns:mc="http://schemas.openxmlformats.org/markup-compatibility/2006" xmlns:mv="urn:schemas-microsoft-com:mac:vml" xmlns:p="http://schemas.openxmlformats.org/presentationml/2006/main" xmlns:c="http://schemas.openxmlformats.org/drawingml/2006/chart" xmlns:dgm="http://schemas.openxmlformats.org/drawingml/2006/diagram" xmlns:o="urn:schemas-microsoft-com:office:office" xmlns:v="urn:schemas-microsoft-com:vml" xmlns:pvml="urn:schemas-microsoft-com:office:powerpoint" xmlns:com="http://schemas.openxmlformats.org/drawingml/2006/compatibility" xmlns:p14="http://schemas.microsoft.com/office/powerpoint/2010/main" xmlns:p15="http://schemas.microsoft.com/office/powerpoint/2012/main" xmlns:ahyp="http://schemas.microsoft.com/office/drawing/2018/hyperlinkcolor">
   <p:cSld>
     <p:spTree>
@@ -14504,7 +14128,7 @@
 </p:sld>
 </file>
 
-<file path=ppt/slides/slide22.xml><?xml version="1.0" encoding="utf-8"?>
+<file path=ppt/slides/slide21.xml><?xml version="1.0" encoding="utf-8"?>
 <p:sld xmlns:a="http://schemas.openxmlformats.org/drawingml/2006/main" xmlns:p="http://schemas.openxmlformats.org/presentationml/2006/main" xmlns:r="http://schemas.openxmlformats.org/officeDocument/2006/relationships">
   <p:cSld>
     <p:spTree>
@@ -14643,7 +14267,7 @@
 </p:sld>
 </file>
 
-<file path=ppt/slides/slide23.xml><?xml version="1.0" encoding="utf-8"?>
+<file path=ppt/slides/slide22.xml><?xml version="1.0" encoding="utf-8"?>
 <p:sld xmlns:a="http://schemas.openxmlformats.org/drawingml/2006/main" xmlns:r="http://schemas.openxmlformats.org/officeDocument/2006/relationships" xmlns:mc="http://schemas.openxmlformats.org/markup-compatibility/2006" xmlns:mv="urn:schemas-microsoft-com:mac:vml" xmlns:p="http://schemas.openxmlformats.org/presentationml/2006/main" xmlns:c="http://schemas.openxmlformats.org/drawingml/2006/chart" xmlns:dgm="http://schemas.openxmlformats.org/drawingml/2006/diagram" xmlns:o="urn:schemas-microsoft-com:office:office" xmlns:v="urn:schemas-microsoft-com:vml" xmlns:pvml="urn:schemas-microsoft-com:office:powerpoint" xmlns:com="http://schemas.openxmlformats.org/drawingml/2006/compatibility" xmlns:p14="http://schemas.microsoft.com/office/powerpoint/2010/main" xmlns:p15="http://schemas.microsoft.com/office/powerpoint/2012/main" xmlns:ahyp="http://schemas.microsoft.com/office/drawing/2018/hyperlinkcolor">
   <p:cSld>
     <p:spTree>
@@ -14732,7 +14356,7 @@
 </p:sld>
 </file>
 
-<file path=ppt/slides/slide24.xml><?xml version="1.0" encoding="utf-8"?>
+<file path=ppt/slides/slide23.xml><?xml version="1.0" encoding="utf-8"?>
 <p:sld xmlns:a="http://schemas.openxmlformats.org/drawingml/2006/main" xmlns:r="http://schemas.openxmlformats.org/officeDocument/2006/relationships" xmlns:mc="http://schemas.openxmlformats.org/markup-compatibility/2006" xmlns:mv="urn:schemas-microsoft-com:mac:vml" xmlns:p="http://schemas.openxmlformats.org/presentationml/2006/main" xmlns:c="http://schemas.openxmlformats.org/drawingml/2006/chart" xmlns:dgm="http://schemas.openxmlformats.org/drawingml/2006/diagram" xmlns:o="urn:schemas-microsoft-com:office:office" xmlns:v="urn:schemas-microsoft-com:vml" xmlns:pvml="urn:schemas-microsoft-com:office:powerpoint" xmlns:com="http://schemas.openxmlformats.org/drawingml/2006/compatibility" xmlns:p14="http://schemas.microsoft.com/office/powerpoint/2010/main" xmlns:p15="http://schemas.microsoft.com/office/powerpoint/2012/main" xmlns:ahyp="http://schemas.microsoft.com/office/drawing/2018/hyperlinkcolor">
   <p:cSld>
     <p:spTree>
@@ -14781,7 +14405,7 @@
 </p:sld>
 </file>
 
-<file path=ppt/slides/slide25.xml><?xml version="1.0" encoding="utf-8"?>
+<file path=ppt/slides/slide24.xml><?xml version="1.0" encoding="utf-8"?>
 <p:sld xmlns:a="http://schemas.openxmlformats.org/drawingml/2006/main" xmlns:r="http://schemas.openxmlformats.org/officeDocument/2006/relationships" xmlns:mc="http://schemas.openxmlformats.org/markup-compatibility/2006" xmlns:mv="urn:schemas-microsoft-com:mac:vml" xmlns:p="http://schemas.openxmlformats.org/presentationml/2006/main" xmlns:c="http://schemas.openxmlformats.org/drawingml/2006/chart" xmlns:dgm="http://schemas.openxmlformats.org/drawingml/2006/diagram" xmlns:o="urn:schemas-microsoft-com:office:office" xmlns:v="urn:schemas-microsoft-com:vml" xmlns:pvml="urn:schemas-microsoft-com:office:powerpoint" xmlns:com="http://schemas.openxmlformats.org/drawingml/2006/compatibility" xmlns:p14="http://schemas.microsoft.com/office/powerpoint/2010/main" xmlns:p15="http://schemas.microsoft.com/office/powerpoint/2012/main" xmlns:ahyp="http://schemas.microsoft.com/office/drawing/2018/hyperlinkcolor">
   <p:cSld>
     <p:spTree>
@@ -15897,7 +15521,7 @@
 </p:sld>
 </file>
 
-<file path=ppt/slides/slide26.xml><?xml version="1.0" encoding="utf-8"?>
+<file path=ppt/slides/slide25.xml><?xml version="1.0" encoding="utf-8"?>
 <p:sld xmlns:a="http://schemas.openxmlformats.org/drawingml/2006/main" xmlns:p="http://schemas.openxmlformats.org/presentationml/2006/main" xmlns:r="http://schemas.openxmlformats.org/officeDocument/2006/relationships">
   <p:cSld>
     <p:spTree>
@@ -16036,7 +15660,7 @@
 </p:sld>
 </file>
 
-<file path=ppt/slides/slide27.xml><?xml version="1.0" encoding="utf-8"?>
+<file path=ppt/slides/slide26.xml><?xml version="1.0" encoding="utf-8"?>
 <p:sld xmlns:a="http://schemas.openxmlformats.org/drawingml/2006/main" xmlns:r="http://schemas.openxmlformats.org/officeDocument/2006/relationships" xmlns:mc="http://schemas.openxmlformats.org/markup-compatibility/2006" xmlns:mv="urn:schemas-microsoft-com:mac:vml" xmlns:p="http://schemas.openxmlformats.org/presentationml/2006/main" xmlns:c="http://schemas.openxmlformats.org/drawingml/2006/chart" xmlns:dgm="http://schemas.openxmlformats.org/drawingml/2006/diagram" xmlns:o="urn:schemas-microsoft-com:office:office" xmlns:v="urn:schemas-microsoft-com:vml" xmlns:pvml="urn:schemas-microsoft-com:office:powerpoint" xmlns:com="http://schemas.openxmlformats.org/drawingml/2006/compatibility" xmlns:p14="http://schemas.microsoft.com/office/powerpoint/2010/main" xmlns:p15="http://schemas.microsoft.com/office/powerpoint/2012/main" xmlns:ahyp="http://schemas.microsoft.com/office/drawing/2018/hyperlinkcolor">
   <p:cSld>
     <p:spTree>
@@ -16417,7 +16041,7 @@
 </p:sld>
 </file>
 
-<file path=ppt/slides/slide28.xml><?xml version="1.0" encoding="utf-8"?>
+<file path=ppt/slides/slide27.xml><?xml version="1.0" encoding="utf-8"?>
 <p:sld xmlns:a="http://schemas.openxmlformats.org/drawingml/2006/main" xmlns:r="http://schemas.openxmlformats.org/officeDocument/2006/relationships" xmlns:mc="http://schemas.openxmlformats.org/markup-compatibility/2006" xmlns:mv="urn:schemas-microsoft-com:mac:vml" xmlns:p="http://schemas.openxmlformats.org/presentationml/2006/main" xmlns:c="http://schemas.openxmlformats.org/drawingml/2006/chart" xmlns:dgm="http://schemas.openxmlformats.org/drawingml/2006/diagram" xmlns:o="urn:schemas-microsoft-com:office:office" xmlns:v="urn:schemas-microsoft-com:vml" xmlns:pvml="urn:schemas-microsoft-com:office:powerpoint" xmlns:com="http://schemas.openxmlformats.org/drawingml/2006/compatibility" xmlns:p14="http://schemas.microsoft.com/office/powerpoint/2010/main" xmlns:p15="http://schemas.microsoft.com/office/powerpoint/2012/main" xmlns:ahyp="http://schemas.microsoft.com/office/drawing/2018/hyperlinkcolor">
   <p:cSld>
     <p:spTree>
@@ -16994,7 +16618,7 @@
 </p:sld>
 </file>
 
-<file path=ppt/slides/slide29.xml><?xml version="1.0" encoding="utf-8"?>
+<file path=ppt/slides/slide28.xml><?xml version="1.0" encoding="utf-8"?>
 <p:sld xmlns:a="http://schemas.openxmlformats.org/drawingml/2006/main" xmlns:r="http://schemas.openxmlformats.org/officeDocument/2006/relationships" xmlns:mc="http://schemas.openxmlformats.org/markup-compatibility/2006" xmlns:mv="urn:schemas-microsoft-com:mac:vml" xmlns:p="http://schemas.openxmlformats.org/presentationml/2006/main" xmlns:c="http://schemas.openxmlformats.org/drawingml/2006/chart" xmlns:dgm="http://schemas.openxmlformats.org/drawingml/2006/diagram" xmlns:o="urn:schemas-microsoft-com:office:office" xmlns:v="urn:schemas-microsoft-com:vml" xmlns:pvml="urn:schemas-microsoft-com:office:powerpoint" xmlns:com="http://schemas.openxmlformats.org/drawingml/2006/compatibility" xmlns:p14="http://schemas.microsoft.com/office/powerpoint/2010/main" xmlns:p15="http://schemas.microsoft.com/office/powerpoint/2012/main" xmlns:ahyp="http://schemas.microsoft.com/office/drawing/2018/hyperlinkcolor">
   <p:cSld>
     <p:spTree>
@@ -17245,6 +16869,95 @@
 </p:sld>
 </file>
 
+<file path=ppt/slides/slide29.xml><?xml version="1.0" encoding="utf-8"?>
+<p:sld xmlns:a="http://schemas.openxmlformats.org/drawingml/2006/main" xmlns:r="http://schemas.openxmlformats.org/officeDocument/2006/relationships" xmlns:mc="http://schemas.openxmlformats.org/markup-compatibility/2006" xmlns:mv="urn:schemas-microsoft-com:mac:vml" xmlns:p="http://schemas.openxmlformats.org/presentationml/2006/main" xmlns:c="http://schemas.openxmlformats.org/drawingml/2006/chart" xmlns:dgm="http://schemas.openxmlformats.org/drawingml/2006/diagram" xmlns:o="urn:schemas-microsoft-com:office:office" xmlns:v="urn:schemas-microsoft-com:vml" xmlns:pvml="urn:schemas-microsoft-com:office:powerpoint" xmlns:com="http://schemas.openxmlformats.org/drawingml/2006/compatibility" xmlns:p14="http://schemas.microsoft.com/office/powerpoint/2010/main" xmlns:p15="http://schemas.microsoft.com/office/powerpoint/2012/main" xmlns:ahyp="http://schemas.microsoft.com/office/drawing/2018/hyperlinkcolor">
+  <p:cSld>
+    <p:spTree>
+      <p:nvGrpSpPr>
+        <p:cNvPr id="200" name="Shape 200"/>
+        <p:cNvGrpSpPr/>
+        <p:nvPr/>
+      </p:nvGrpSpPr>
+      <p:grpSpPr>
+        <a:xfrm>
+          <a:off x="0" y="0"/>
+          <a:ext cx="0" cy="0"/>
+          <a:chOff x="0" y="0"/>
+          <a:chExt cx="0" cy="0"/>
+        </a:xfrm>
+      </p:grpSpPr>
+      <p:sp>
+        <p:nvSpPr>
+          <p:cNvPr id="201" name="Google Shape;201;p36"/>
+          <p:cNvSpPr txBox="1"/>
+          <p:nvPr>
+            <p:ph type="title"/>
+          </p:nvPr>
+        </p:nvSpPr>
+        <p:spPr>
+          <a:xfrm>
+            <a:off x="311700" y="195615"/>
+            <a:ext cx="8520600" cy="572700"/>
+          </a:xfrm>
+          <a:prstGeom prst="rect">
+            <a:avLst/>
+          </a:prstGeom>
+        </p:spPr>
+        <p:txBody>
+          <a:bodyPr anchorCtr="0" anchor="t" bIns="91425" lIns="91425" spcFirstLastPara="1" rIns="91425" wrap="square" tIns="91425">
+            <a:normAutofit fontScale="90000"/>
+          </a:bodyPr>
+          <a:lstStyle/>
+          <a:p>
+            <a:pPr indent="0" lvl="0" marL="0" rtl="0" algn="l">
+              <a:spcBef>
+                <a:spcPts val="0"/>
+              </a:spcBef>
+              <a:spcAft>
+                <a:spcPts val="0"/>
+              </a:spcAft>
+              <a:buNone/>
+            </a:pPr>
+            <a:r>
+              <a:rPr lang="en"/>
+              <a:t>Flappy Bird State Machine</a:t>
+            </a:r>
+            <a:endParaRPr/>
+          </a:p>
+        </p:txBody>
+      </p:sp>
+      <p:pic>
+        <p:nvPicPr>
+          <p:cNvPr id="202" name="Picture 201" descr="states.png"/>
+          <p:cNvPicPr>
+            <a:picLocks noChangeAspect="1"/>
+          </p:cNvPicPr>
+          <p:nvPr/>
+        </p:nvPicPr>
+        <p:blipFill>
+          <a:blip r:embed="rId4"/>
+          <a:stretch>
+            <a:fillRect/>
+          </a:stretch>
+        </p:blipFill>
+        <p:spPr>
+          <a:xfrm>
+            <a:off x="320039" y="1051560"/>
+            <a:ext cx="8503920" cy="3188970"/>
+          </a:xfrm>
+          <a:prstGeom prst="rect">
+            <a:avLst/>
+          </a:prstGeom>
+        </p:spPr>
+      </p:pic>
+    </p:spTree>
+  </p:cSld>
+  <p:clrMapOvr>
+    <a:masterClrMapping/>
+  </p:clrMapOvr>
+</p:sld>
+</file>
+
 <file path=ppt/slides/slide3.xml><?xml version="1.0" encoding="utf-8"?>
 <p:sld xmlns:a="http://schemas.openxmlformats.org/drawingml/2006/main" xmlns:r="http://schemas.openxmlformats.org/officeDocument/2006/relationships" xmlns:mc="http://schemas.openxmlformats.org/markup-compatibility/2006" xmlns:mv="urn:schemas-microsoft-com:mac:vml" xmlns:p="http://schemas.openxmlformats.org/presentationml/2006/main" xmlns:c="http://schemas.openxmlformats.org/drawingml/2006/chart" xmlns:dgm="http://schemas.openxmlformats.org/drawingml/2006/diagram" xmlns:o="urn:schemas-microsoft-com:office:office" xmlns:v="urn:schemas-microsoft-com:vml" xmlns:pvml="urn:schemas-microsoft-com:office:powerpoint" xmlns:com="http://schemas.openxmlformats.org/drawingml/2006/compatibility" xmlns:p14="http://schemas.microsoft.com/office/powerpoint/2010/main" xmlns:p15="http://schemas.microsoft.com/office/powerpoint/2012/main" xmlns:ahyp="http://schemas.microsoft.com/office/drawing/2018/hyperlinkcolor">
   <p:cSld>
@@ -17335,99 +17048,6 @@
 </file>
 
 <file path=ppt/slides/slide30.xml><?xml version="1.0" encoding="utf-8"?>
-<p:sld xmlns:a="http://schemas.openxmlformats.org/drawingml/2006/main" xmlns:r="http://schemas.openxmlformats.org/officeDocument/2006/relationships" xmlns:mc="http://schemas.openxmlformats.org/markup-compatibility/2006" xmlns:mv="urn:schemas-microsoft-com:mac:vml" xmlns:p="http://schemas.openxmlformats.org/presentationml/2006/main" xmlns:c="http://schemas.openxmlformats.org/drawingml/2006/chart" xmlns:dgm="http://schemas.openxmlformats.org/drawingml/2006/diagram" xmlns:o="urn:schemas-microsoft-com:office:office" xmlns:v="urn:schemas-microsoft-com:vml" xmlns:pvml="urn:schemas-microsoft-com:office:powerpoint" xmlns:com="http://schemas.openxmlformats.org/drawingml/2006/compatibility" xmlns:p14="http://schemas.microsoft.com/office/powerpoint/2010/main" xmlns:p15="http://schemas.microsoft.com/office/powerpoint/2012/main" xmlns:ahyp="http://schemas.microsoft.com/office/drawing/2018/hyperlinkcolor">
-  <p:cSld>
-    <p:spTree>
-      <p:nvGrpSpPr>
-        <p:cNvPr id="200" name="Shape 200"/>
-        <p:cNvGrpSpPr/>
-        <p:nvPr/>
-      </p:nvGrpSpPr>
-      <p:grpSpPr>
-        <a:xfrm>
-          <a:off x="0" y="0"/>
-          <a:ext cx="0" cy="0"/>
-          <a:chOff x="0" y="0"/>
-          <a:chExt cx="0" cy="0"/>
-        </a:xfrm>
-      </p:grpSpPr>
-      <p:sp>
-        <p:nvSpPr>
-          <p:cNvPr id="201" name="Google Shape;201;p36"/>
-          <p:cNvSpPr txBox="1"/>
-          <p:nvPr>
-            <p:ph type="title"/>
-          </p:nvPr>
-        </p:nvSpPr>
-        <p:spPr>
-          <a:xfrm>
-            <a:off x="311700" y="195615"/>
-            <a:ext cx="8520600" cy="572700"/>
-          </a:xfrm>
-          <a:prstGeom prst="rect">
-            <a:avLst/>
-          </a:prstGeom>
-        </p:spPr>
-        <p:txBody>
-          <a:bodyPr anchorCtr="0" anchor="t" bIns="91425" lIns="91425" spcFirstLastPara="1" rIns="91425" wrap="square" tIns="91425">
-            <a:normAutofit fontScale="90000"/>
-          </a:bodyPr>
-          <a:lstStyle/>
-          <a:p>
-            <a:pPr indent="0" lvl="0" marL="0" rtl="0" algn="l">
-              <a:spcBef>
-                <a:spcPts val="0"/>
-              </a:spcBef>
-              <a:spcAft>
-                <a:spcPts val="0"/>
-              </a:spcAft>
-              <a:buNone/>
-            </a:pPr>
-            <a:r>
-              <a:rPr lang="en"/>
-              <a:t>Flappy Bird State Machine</a:t>
-            </a:r>
-            <a:endParaRPr/>
-          </a:p>
-        </p:txBody>
-      </p:sp>
-      <p:pic>
-        <p:nvPicPr>
-          <p:cNvPr id="202" name="Google Shape;202;p36"/>
-          <p:cNvPicPr preferRelativeResize="0"/>
-          <p:nvPr/>
-        </p:nvPicPr>
-        <p:blipFill>
-          <a:blip r:embed="rId3">
-            <a:alphaModFix/>
-          </a:blip>
-          <a:stretch>
-            <a:fillRect/>
-          </a:stretch>
-        </p:blipFill>
-        <p:spPr>
-          <a:xfrm>
-            <a:off x="152400" y="1441590"/>
-            <a:ext cx="8839200" cy="3271330"/>
-          </a:xfrm>
-          <a:prstGeom prst="rect">
-            <a:avLst/>
-          </a:prstGeom>
-          <a:noFill/>
-          <a:ln>
-            <a:noFill/>
-          </a:ln>
-        </p:spPr>
-      </p:pic>
-    </p:spTree>
-  </p:cSld>
-  <p:clrMapOvr>
-    <a:masterClrMapping/>
-  </p:clrMapOvr>
-</p:sld>
-</file>
-
-<file path=ppt/slides/slide31.xml><?xml version="1.0" encoding="utf-8"?>
 <p:sld xmlns:a="http://schemas.openxmlformats.org/drawingml/2006/main" xmlns:r="http://schemas.openxmlformats.org/officeDocument/2006/relationships" xmlns:mc="http://schemas.openxmlformats.org/markup-compatibility/2006" xmlns:mv="urn:schemas-microsoft-com:mac:vml" xmlns:p="http://schemas.openxmlformats.org/presentationml/2006/main" xmlns:c="http://schemas.openxmlformats.org/drawingml/2006/chart" xmlns:dgm="http://schemas.openxmlformats.org/drawingml/2006/diagram" xmlns:o="urn:schemas-microsoft-com:office:office" xmlns:v="urn:schemas-microsoft-com:vml" xmlns:pvml="urn:schemas-microsoft-com:office:powerpoint" xmlns:com="http://schemas.openxmlformats.org/drawingml/2006/compatibility" xmlns:p14="http://schemas.microsoft.com/office/powerpoint/2010/main" xmlns:p15="http://schemas.microsoft.com/office/powerpoint/2012/main" xmlns:ahyp="http://schemas.microsoft.com/office/drawing/2018/hyperlinkcolor">
   <p:cSld>
     <p:spTree>
@@ -17476,7 +17096,7 @@
 </p:sld>
 </file>
 
-<file path=ppt/slides/slide32.xml><?xml version="1.0" encoding="utf-8"?>
+<file path=ppt/slides/slide31.xml><?xml version="1.0" encoding="utf-8"?>
 <p:sld xmlns:a="http://schemas.openxmlformats.org/drawingml/2006/main" xmlns:r="http://schemas.openxmlformats.org/officeDocument/2006/relationships" xmlns:mc="http://schemas.openxmlformats.org/markup-compatibility/2006" xmlns:mv="urn:schemas-microsoft-com:mac:vml" xmlns:p="http://schemas.openxmlformats.org/presentationml/2006/main" xmlns:c="http://schemas.openxmlformats.org/drawingml/2006/chart" xmlns:dgm="http://schemas.openxmlformats.org/drawingml/2006/diagram" xmlns:o="urn:schemas-microsoft-com:office:office" xmlns:v="urn:schemas-microsoft-com:vml" xmlns:pvml="urn:schemas-microsoft-com:office:powerpoint" xmlns:com="http://schemas.openxmlformats.org/drawingml/2006/compatibility" xmlns:p14="http://schemas.microsoft.com/office/powerpoint/2010/main" xmlns:p15="http://schemas.microsoft.com/office/powerpoint/2012/main" xmlns:ahyp="http://schemas.microsoft.com/office/drawing/2018/hyperlinkcolor">
   <p:cSld>
     <p:spTree>
@@ -19579,7 +19199,7 @@
 </p:sld>
 </file>
 
-<file path=ppt/slides/slide33.xml><?xml version="1.0" encoding="utf-8"?>
+<file path=ppt/slides/slide32.xml><?xml version="1.0" encoding="utf-8"?>
 <p:sld xmlns:a="http://schemas.openxmlformats.org/drawingml/2006/main" xmlns:r="http://schemas.openxmlformats.org/officeDocument/2006/relationships" xmlns:mc="http://schemas.openxmlformats.org/markup-compatibility/2006" xmlns:mv="urn:schemas-microsoft-com:mac:vml" xmlns:p="http://schemas.openxmlformats.org/presentationml/2006/main" xmlns:c="http://schemas.openxmlformats.org/drawingml/2006/chart" xmlns:dgm="http://schemas.openxmlformats.org/drawingml/2006/diagram" xmlns:o="urn:schemas-microsoft-com:office:office" xmlns:v="urn:schemas-microsoft-com:vml" xmlns:pvml="urn:schemas-microsoft-com:office:powerpoint" xmlns:com="http://schemas.openxmlformats.org/drawingml/2006/compatibility" xmlns:p14="http://schemas.microsoft.com/office/powerpoint/2010/main" xmlns:p15="http://schemas.microsoft.com/office/powerpoint/2012/main" xmlns:ahyp="http://schemas.microsoft.com/office/drawing/2018/hyperlinkcolor">
   <p:cSld>
     <p:spTree>
@@ -22233,7 +21853,7 @@
 </p:sld>
 </file>
 
-<file path=ppt/slides/slide34.xml><?xml version="1.0" encoding="utf-8"?>
+<file path=ppt/slides/slide33.xml><?xml version="1.0" encoding="utf-8"?>
 <p:sld xmlns:a="http://schemas.openxmlformats.org/drawingml/2006/main" xmlns:r="http://schemas.openxmlformats.org/officeDocument/2006/relationships" xmlns:mc="http://schemas.openxmlformats.org/markup-compatibility/2006" xmlns:mv="urn:schemas-microsoft-com:mac:vml" xmlns:p="http://schemas.openxmlformats.org/presentationml/2006/main" xmlns:c="http://schemas.openxmlformats.org/drawingml/2006/chart" xmlns:dgm="http://schemas.openxmlformats.org/drawingml/2006/diagram" xmlns:o="urn:schemas-microsoft-com:office:office" xmlns:v="urn:schemas-microsoft-com:vml" xmlns:pvml="urn:schemas-microsoft-com:office:powerpoint" xmlns:com="http://schemas.openxmlformats.org/drawingml/2006/compatibility" xmlns:p14="http://schemas.microsoft.com/office/powerpoint/2010/main" xmlns:p15="http://schemas.microsoft.com/office/powerpoint/2012/main" xmlns:ahyp="http://schemas.microsoft.com/office/drawing/2018/hyperlinkcolor">
   <p:cSld>
     <p:spTree>
@@ -23349,7 +22969,7 @@
 </p:sld>
 </file>
 
-<file path=ppt/slides/slide35.xml><?xml version="1.0" encoding="utf-8"?>
+<file path=ppt/slides/slide34.xml><?xml version="1.0" encoding="utf-8"?>
 <p:sld xmlns:a="http://schemas.openxmlformats.org/drawingml/2006/main" xmlns:r="http://schemas.openxmlformats.org/officeDocument/2006/relationships" xmlns:mc="http://schemas.openxmlformats.org/markup-compatibility/2006" xmlns:mv="urn:schemas-microsoft-com:mac:vml" xmlns:p="http://schemas.openxmlformats.org/presentationml/2006/main" xmlns:c="http://schemas.openxmlformats.org/drawingml/2006/chart" xmlns:dgm="http://schemas.openxmlformats.org/drawingml/2006/diagram" xmlns:o="urn:schemas-microsoft-com:office:office" xmlns:v="urn:schemas-microsoft-com:vml" xmlns:pvml="urn:schemas-microsoft-com:office:powerpoint" xmlns:com="http://schemas.openxmlformats.org/drawingml/2006/compatibility" xmlns:p14="http://schemas.microsoft.com/office/powerpoint/2010/main" xmlns:p15="http://schemas.microsoft.com/office/powerpoint/2012/main" xmlns:ahyp="http://schemas.microsoft.com/office/drawing/2018/hyperlinkcolor">
   <p:cSld>
     <p:spTree>
@@ -23860,7 +23480,7 @@
 </p:sld>
 </file>
 
-<file path=ppt/slides/slide36.xml><?xml version="1.0" encoding="utf-8"?>
+<file path=ppt/slides/slide35.xml><?xml version="1.0" encoding="utf-8"?>
 <p:sld xmlns:a="http://schemas.openxmlformats.org/drawingml/2006/main" xmlns:p="http://schemas.openxmlformats.org/presentationml/2006/main" xmlns:r="http://schemas.openxmlformats.org/officeDocument/2006/relationships">
   <p:cSld>
     <p:spTree>
@@ -23999,7 +23619,7 @@
 </p:sld>
 </file>
 
-<file path=ppt/slides/slide37.xml><?xml version="1.0" encoding="utf-8"?>
+<file path=ppt/slides/slide36.xml><?xml version="1.0" encoding="utf-8"?>
 <p:sld xmlns:a="http://schemas.openxmlformats.org/drawingml/2006/main" xmlns:r="http://schemas.openxmlformats.org/officeDocument/2006/relationships" xmlns:mc="http://schemas.openxmlformats.org/markup-compatibility/2006" xmlns:mv="urn:schemas-microsoft-com:mac:vml" xmlns:p="http://schemas.openxmlformats.org/presentationml/2006/main" xmlns:c="http://schemas.openxmlformats.org/drawingml/2006/chart" xmlns:dgm="http://schemas.openxmlformats.org/drawingml/2006/diagram" xmlns:o="urn:schemas-microsoft-com:office:office" xmlns:v="urn:schemas-microsoft-com:vml" xmlns:pvml="urn:schemas-microsoft-com:office:powerpoint" xmlns:com="http://schemas.openxmlformats.org/drawingml/2006/compatibility" xmlns:p14="http://schemas.microsoft.com/office/powerpoint/2010/main" xmlns:p15="http://schemas.microsoft.com/office/powerpoint/2012/main" xmlns:ahyp="http://schemas.microsoft.com/office/drawing/2018/hyperlinkcolor">
   <p:cSld>
     <p:spTree>
@@ -24666,7 +24286,7 @@
 </p:sld>
 </file>
 
-<file path=ppt/slides/slide38.xml><?xml version="1.0" encoding="utf-8"?>
+<file path=ppt/slides/slide37.xml><?xml version="1.0" encoding="utf-8"?>
 <p:sld xmlns:a="http://schemas.openxmlformats.org/drawingml/2006/main" xmlns:r="http://schemas.openxmlformats.org/officeDocument/2006/relationships" xmlns:mc="http://schemas.openxmlformats.org/markup-compatibility/2006" xmlns:mv="urn:schemas-microsoft-com:mac:vml" xmlns:p="http://schemas.openxmlformats.org/presentationml/2006/main" xmlns:c="http://schemas.openxmlformats.org/drawingml/2006/chart" xmlns:dgm="http://schemas.openxmlformats.org/drawingml/2006/diagram" xmlns:o="urn:schemas-microsoft-com:office:office" xmlns:v="urn:schemas-microsoft-com:vml" xmlns:pvml="urn:schemas-microsoft-com:office:powerpoint" xmlns:com="http://schemas.openxmlformats.org/drawingml/2006/compatibility" xmlns:p14="http://schemas.microsoft.com/office/powerpoint/2010/main" xmlns:p15="http://schemas.microsoft.com/office/powerpoint/2012/main" xmlns:ahyp="http://schemas.microsoft.com/office/drawing/2018/hyperlinkcolor">
   <p:cSld>
     <p:spTree>
@@ -24763,34 +24383,6 @@
           </a:p>
         </p:txBody>
       </p:sp>
-      <p:pic>
-        <p:nvPicPr>
-          <p:cNvPr id="250" name="Google Shape;250;p44"/>
-          <p:cNvPicPr preferRelativeResize="0"/>
-          <p:nvPr/>
-        </p:nvPicPr>
-        <p:blipFill>
-          <a:blip r:embed="rId3">
-            <a:alphaModFix/>
-          </a:blip>
-          <a:stretch>
-            <a:fillRect/>
-          </a:stretch>
-        </p:blipFill>
-        <p:spPr>
-          <a:xfrm>
-            <a:off x="1066538" y="2195848"/>
-            <a:ext cx="7010925" cy="1403500"/>
-          </a:xfrm>
-          <a:prstGeom prst="rect">
-            <a:avLst/>
-          </a:prstGeom>
-          <a:noFill/>
-          <a:ln>
-            <a:noFill/>
-          </a:ln>
-        </p:spPr>
-      </p:pic>
     </p:spTree>
   </p:cSld>
   <p:clrMapOvr>
@@ -24799,7 +24391,7 @@
 </p:sld>
 </file>
 
-<file path=ppt/slides/slide39.xml><?xml version="1.0" encoding="utf-8"?>
+<file path=ppt/slides/slide38.xml><?xml version="1.0" encoding="utf-8"?>
 <p:sld xmlns:a="http://schemas.openxmlformats.org/drawingml/2006/main" xmlns:r="http://schemas.openxmlformats.org/officeDocument/2006/relationships" xmlns:mc="http://schemas.openxmlformats.org/markup-compatibility/2006" xmlns:mv="urn:schemas-microsoft-com:mac:vml" xmlns:p="http://schemas.openxmlformats.org/presentationml/2006/main" xmlns:c="http://schemas.openxmlformats.org/drawingml/2006/chart" xmlns:dgm="http://schemas.openxmlformats.org/drawingml/2006/diagram" xmlns:o="urn:schemas-microsoft-com:office:office" xmlns:v="urn:schemas-microsoft-com:vml" xmlns:pvml="urn:schemas-microsoft-com:office:powerpoint" xmlns:com="http://schemas.openxmlformats.org/drawingml/2006/compatibility" xmlns:p14="http://schemas.microsoft.com/office/powerpoint/2010/main" xmlns:p15="http://schemas.microsoft.com/office/powerpoint/2012/main" xmlns:ahyp="http://schemas.microsoft.com/office/drawing/2018/hyperlinkcolor">
   <p:cSld>
     <p:spTree>
@@ -24951,60 +24543,1078 @@
       </p:sp>
       <p:pic>
         <p:nvPicPr>
-          <p:cNvPr id="257" name="Google Shape;257;p45"/>
-          <p:cNvPicPr preferRelativeResize="0"/>
+          <p:cNvPr id="257" name="Picture 256" descr="singleton.png"/>
+          <p:cNvPicPr>
+            <a:picLocks noChangeAspect="1"/>
+          </p:cNvPicPr>
           <p:nvPr/>
         </p:nvPicPr>
         <p:blipFill>
-          <a:blip r:embed="rId3">
-            <a:alphaModFix/>
-          </a:blip>
+          <a:blip r:embed="rId5"/>
           <a:stretch>
             <a:fillRect/>
           </a:stretch>
         </p:blipFill>
         <p:spPr>
           <a:xfrm>
-            <a:off x="485450" y="2438100"/>
-            <a:ext cx="3642878" cy="2276775"/>
+            <a:off x="1280160" y="2103120"/>
+            <a:ext cx="6583680" cy="2926080"/>
           </a:xfrm>
           <a:prstGeom prst="rect">
             <a:avLst/>
           </a:prstGeom>
-          <a:noFill/>
-          <a:ln>
-            <a:noFill/>
-          </a:ln>
         </p:spPr>
       </p:pic>
-      <p:pic>
-        <p:nvPicPr>
-          <p:cNvPr id="258" name="Google Shape;258;p45"/>
-          <p:cNvPicPr preferRelativeResize="0"/>
-          <p:nvPr/>
-        </p:nvPicPr>
-        <p:blipFill>
-          <a:blip r:embed="rId4">
-            <a:alphaModFix/>
-          </a:blip>
-          <a:stretch>
-            <a:fillRect/>
-          </a:stretch>
-        </p:blipFill>
+    </p:spTree>
+  </p:cSld>
+  <p:clrMapOvr>
+    <a:masterClrMapping/>
+  </p:clrMapOvr>
+</p:sld>
+</file>
+
+<file path=ppt/slides/slide39.xml><?xml version="1.0" encoding="utf-8"?>
+<p:sld xmlns:a="http://schemas.openxmlformats.org/drawingml/2006/main" xmlns:r="http://schemas.openxmlformats.org/officeDocument/2006/relationships" xmlns:mc="http://schemas.openxmlformats.org/markup-compatibility/2006" xmlns:mv="urn:schemas-microsoft-com:mac:vml" xmlns:p="http://schemas.openxmlformats.org/presentationml/2006/main" xmlns:c="http://schemas.openxmlformats.org/drawingml/2006/chart" xmlns:dgm="http://schemas.openxmlformats.org/drawingml/2006/diagram" xmlns:o="urn:schemas-microsoft-com:office:office" xmlns:v="urn:schemas-microsoft-com:vml" xmlns:pvml="urn:schemas-microsoft-com:office:powerpoint" xmlns:com="http://schemas.openxmlformats.org/drawingml/2006/compatibility" xmlns:p14="http://schemas.microsoft.com/office/powerpoint/2010/main" xmlns:p15="http://schemas.microsoft.com/office/powerpoint/2012/main" xmlns:ahyp="http://schemas.microsoft.com/office/drawing/2018/hyperlinkcolor">
+  <p:cSld>
+    <p:spTree>
+      <p:nvGrpSpPr>
+        <p:cNvPr id="262" name="Shape 262"/>
+        <p:cNvGrpSpPr/>
+        <p:nvPr/>
+      </p:nvGrpSpPr>
+      <p:grpSpPr>
+        <a:xfrm>
+          <a:off x="0" y="0"/>
+          <a:ext cx="0" cy="0"/>
+          <a:chOff x="0" y="0"/>
+          <a:chExt cx="0" cy="0"/>
+        </a:xfrm>
+      </p:grpSpPr>
+      <p:sp>
+        <p:nvSpPr>
+          <p:cNvPr id="263" name="Google Shape;263;p46"/>
+          <p:cNvSpPr txBox="1"/>
+          <p:nvPr>
+            <p:ph type="title"/>
+          </p:nvPr>
+        </p:nvSpPr>
         <p:spPr>
           <a:xfrm>
-            <a:off x="4304675" y="2438100"/>
-            <a:ext cx="4553575" cy="2276775"/>
+            <a:off x="311700" y="195615"/>
+            <a:ext cx="8520600" cy="572700"/>
           </a:xfrm>
           <a:prstGeom prst="rect">
             <a:avLst/>
           </a:prstGeom>
-          <a:noFill/>
-          <a:ln>
-            <a:noFill/>
-          </a:ln>
         </p:spPr>
-      </p:pic>
+        <p:txBody>
+          <a:bodyPr anchorCtr="0" anchor="t" bIns="91425" lIns="91425" spcFirstLastPara="1" rIns="91425" wrap="square" tIns="91425">
+            <a:normAutofit fontScale="90000"/>
+          </a:bodyPr>
+          <a:lstStyle/>
+          <a:p>
+            <a:pPr indent="0" lvl="0" marL="0" rtl="0" algn="l">
+              <a:spcBef>
+                <a:spcPts val="0"/>
+              </a:spcBef>
+              <a:spcAft>
+                <a:spcPts val="0"/>
+              </a:spcAft>
+              <a:buNone/>
+            </a:pPr>
+            <a:r>
+              <a:rPr lang="en"/>
+              <a:t>Singleton Pattern: Solution</a:t>
+            </a:r>
+            <a:endParaRPr/>
+          </a:p>
+        </p:txBody>
+      </p:sp>
+      <p:sp>
+        <p:nvSpPr>
+          <p:cNvPr id="264" name="Google Shape;264;p46"/>
+          <p:cNvSpPr txBox="1"/>
+          <p:nvPr>
+            <p:ph idx="2" type="body"/>
+          </p:nvPr>
+        </p:nvSpPr>
+        <p:spPr>
+          <a:xfrm>
+            <a:off x="4433925" y="1353675"/>
+            <a:ext cx="3999900" cy="3004800"/>
+          </a:xfrm>
+          <a:prstGeom prst="rect">
+            <a:avLst/>
+          </a:prstGeom>
+        </p:spPr>
+        <p:txBody>
+          <a:bodyPr anchorCtr="0" anchor="t" bIns="91425" lIns="91425" spcFirstLastPara="1" rIns="91425" wrap="square" tIns="91425">
+            <a:noAutofit/>
+          </a:bodyPr>
+          <a:lstStyle/>
+          <a:p>
+            <a:pPr indent="0" lvl="0" marL="0" rtl="0" algn="l">
+              <a:lnSpc>
+                <a:spcPct val="157500"/>
+              </a:lnSpc>
+              <a:spcBef>
+                <a:spcPts val="0"/>
+              </a:spcBef>
+              <a:spcAft>
+                <a:spcPts val="0"/>
+              </a:spcAft>
+              <a:buNone/>
+            </a:pPr>
+            <a:r>
+              <a:rPr lang="en" sz="1000">
+                <a:solidFill>
+                  <a:srgbClr val="569CD6"/>
+                </a:solidFill>
+                <a:highlight>
+                  <a:srgbClr val="1F1F1F"/>
+                </a:highlight>
+                <a:latin typeface="Consolas"/>
+                <a:ea typeface="Consolas"/>
+                <a:cs typeface="Consolas"/>
+                <a:sym typeface="Consolas"/>
+              </a:rPr>
+              <a:t>public</a:t>
+            </a:r>
+            <a:r>
+              <a:rPr lang="en" sz="1000">
+                <a:solidFill>
+                  <a:srgbClr val="CCCCCC"/>
+                </a:solidFill>
+                <a:highlight>
+                  <a:srgbClr val="1F1F1F"/>
+                </a:highlight>
+                <a:latin typeface="Consolas"/>
+                <a:ea typeface="Consolas"/>
+                <a:cs typeface="Consolas"/>
+                <a:sym typeface="Consolas"/>
+              </a:rPr>
+              <a:t> </a:t>
+            </a:r>
+            <a:r>
+              <a:rPr lang="en" sz="1000">
+                <a:solidFill>
+                  <a:srgbClr val="569CD6"/>
+                </a:solidFill>
+                <a:highlight>
+                  <a:srgbClr val="1F1F1F"/>
+                </a:highlight>
+                <a:latin typeface="Consolas"/>
+                <a:ea typeface="Consolas"/>
+                <a:cs typeface="Consolas"/>
+                <a:sym typeface="Consolas"/>
+              </a:rPr>
+              <a:t>class</a:t>
+            </a:r>
+            <a:r>
+              <a:rPr lang="en" sz="1000">
+                <a:solidFill>
+                  <a:srgbClr val="CCCCCC"/>
+                </a:solidFill>
+                <a:highlight>
+                  <a:srgbClr val="1F1F1F"/>
+                </a:highlight>
+                <a:latin typeface="Consolas"/>
+                <a:ea typeface="Consolas"/>
+                <a:cs typeface="Consolas"/>
+                <a:sym typeface="Consolas"/>
+              </a:rPr>
+              <a:t> </a:t>
+            </a:r>
+            <a:r>
+              <a:rPr lang="en" sz="1000">
+                <a:solidFill>
+                  <a:srgbClr val="4EC9B0"/>
+                </a:solidFill>
+                <a:highlight>
+                  <a:srgbClr val="1F1F1F"/>
+                </a:highlight>
+                <a:latin typeface="Consolas"/>
+                <a:ea typeface="Consolas"/>
+                <a:cs typeface="Consolas"/>
+                <a:sym typeface="Consolas"/>
+              </a:rPr>
+              <a:t>Singleton</a:t>
+            </a:r>
+            <a:endParaRPr sz="1000">
+              <a:solidFill>
+                <a:srgbClr val="4EC9B0"/>
+              </a:solidFill>
+              <a:highlight>
+                <a:srgbClr val="1F1F1F"/>
+              </a:highlight>
+              <a:latin typeface="Consolas"/>
+              <a:ea typeface="Consolas"/>
+              <a:cs typeface="Consolas"/>
+              <a:sym typeface="Consolas"/>
+            </a:endParaRPr>
+          </a:p>
+          <a:p>
+            <a:pPr indent="0" lvl="0" marL="0" rtl="0" algn="l">
+              <a:lnSpc>
+                <a:spcPct val="157500"/>
+              </a:lnSpc>
+              <a:spcBef>
+                <a:spcPts val="0"/>
+              </a:spcBef>
+              <a:spcAft>
+                <a:spcPts val="0"/>
+              </a:spcAft>
+              <a:buNone/>
+            </a:pPr>
+            <a:r>
+              <a:rPr lang="en" sz="1000">
+                <a:solidFill>
+                  <a:srgbClr val="CCCCCC"/>
+                </a:solidFill>
+                <a:highlight>
+                  <a:srgbClr val="1F1F1F"/>
+                </a:highlight>
+                <a:latin typeface="Consolas"/>
+                <a:ea typeface="Consolas"/>
+                <a:cs typeface="Consolas"/>
+                <a:sym typeface="Consolas"/>
+              </a:rPr>
+              <a:t>{</a:t>
+            </a:r>
+            <a:endParaRPr sz="1000">
+              <a:solidFill>
+                <a:srgbClr val="CCCCCC"/>
+              </a:solidFill>
+              <a:highlight>
+                <a:srgbClr val="1F1F1F"/>
+              </a:highlight>
+              <a:latin typeface="Consolas"/>
+              <a:ea typeface="Consolas"/>
+              <a:cs typeface="Consolas"/>
+              <a:sym typeface="Consolas"/>
+            </a:endParaRPr>
+          </a:p>
+          <a:p>
+            <a:pPr indent="0" lvl="0" marL="0" rtl="0" algn="l">
+              <a:lnSpc>
+                <a:spcPct val="157500"/>
+              </a:lnSpc>
+              <a:spcBef>
+                <a:spcPts val="0"/>
+              </a:spcBef>
+              <a:spcAft>
+                <a:spcPts val="0"/>
+              </a:spcAft>
+              <a:buNone/>
+            </a:pPr>
+            <a:r>
+              <a:rPr lang="en" sz="1000">
+                <a:solidFill>
+                  <a:srgbClr val="CCCCCC"/>
+                </a:solidFill>
+                <a:highlight>
+                  <a:srgbClr val="1F1F1F"/>
+                </a:highlight>
+                <a:latin typeface="Consolas"/>
+                <a:ea typeface="Consolas"/>
+                <a:cs typeface="Consolas"/>
+                <a:sym typeface="Consolas"/>
+              </a:rPr>
+              <a:t>    </a:t>
+            </a:r>
+            <a:r>
+              <a:rPr lang="en" sz="1000">
+                <a:solidFill>
+                  <a:srgbClr val="569CD6"/>
+                </a:solidFill>
+                <a:highlight>
+                  <a:srgbClr val="1F1F1F"/>
+                </a:highlight>
+                <a:latin typeface="Consolas"/>
+                <a:ea typeface="Consolas"/>
+                <a:cs typeface="Consolas"/>
+                <a:sym typeface="Consolas"/>
+              </a:rPr>
+              <a:t>private</a:t>
+            </a:r>
+            <a:r>
+              <a:rPr lang="en" sz="1000">
+                <a:solidFill>
+                  <a:srgbClr val="CCCCCC"/>
+                </a:solidFill>
+                <a:highlight>
+                  <a:srgbClr val="1F1F1F"/>
+                </a:highlight>
+                <a:latin typeface="Consolas"/>
+                <a:ea typeface="Consolas"/>
+                <a:cs typeface="Consolas"/>
+                <a:sym typeface="Consolas"/>
+              </a:rPr>
+              <a:t> </a:t>
+            </a:r>
+            <a:r>
+              <a:rPr lang="en" sz="1000">
+                <a:solidFill>
+                  <a:srgbClr val="569CD6"/>
+                </a:solidFill>
+                <a:highlight>
+                  <a:srgbClr val="1F1F1F"/>
+                </a:highlight>
+                <a:latin typeface="Consolas"/>
+                <a:ea typeface="Consolas"/>
+                <a:cs typeface="Consolas"/>
+                <a:sym typeface="Consolas"/>
+              </a:rPr>
+              <a:t>static</a:t>
+            </a:r>
+            <a:r>
+              <a:rPr lang="en" sz="1000">
+                <a:solidFill>
+                  <a:srgbClr val="CCCCCC"/>
+                </a:solidFill>
+                <a:highlight>
+                  <a:srgbClr val="1F1F1F"/>
+                </a:highlight>
+                <a:latin typeface="Consolas"/>
+                <a:ea typeface="Consolas"/>
+                <a:cs typeface="Consolas"/>
+                <a:sym typeface="Consolas"/>
+              </a:rPr>
+              <a:t> </a:t>
+            </a:r>
+            <a:r>
+              <a:rPr lang="en" sz="1000">
+                <a:solidFill>
+                  <a:srgbClr val="4EC9B0"/>
+                </a:solidFill>
+                <a:highlight>
+                  <a:srgbClr val="1F1F1F"/>
+                </a:highlight>
+                <a:latin typeface="Consolas"/>
+                <a:ea typeface="Consolas"/>
+                <a:cs typeface="Consolas"/>
+                <a:sym typeface="Consolas"/>
+              </a:rPr>
+              <a:t>Singleton</a:t>
+            </a:r>
+            <a:r>
+              <a:rPr lang="en" sz="1000">
+                <a:solidFill>
+                  <a:srgbClr val="CCCCCC"/>
+                </a:solidFill>
+                <a:highlight>
+                  <a:srgbClr val="1F1F1F"/>
+                </a:highlight>
+                <a:latin typeface="Consolas"/>
+                <a:ea typeface="Consolas"/>
+                <a:cs typeface="Consolas"/>
+                <a:sym typeface="Consolas"/>
+              </a:rPr>
+              <a:t> </a:t>
+            </a:r>
+            <a:r>
+              <a:rPr lang="en" sz="1000">
+                <a:solidFill>
+                  <a:srgbClr val="9CDCFE"/>
+                </a:solidFill>
+                <a:highlight>
+                  <a:srgbClr val="1F1F1F"/>
+                </a:highlight>
+                <a:latin typeface="Consolas"/>
+                <a:ea typeface="Consolas"/>
+                <a:cs typeface="Consolas"/>
+                <a:sym typeface="Consolas"/>
+              </a:rPr>
+              <a:t>_instance</a:t>
+            </a:r>
+            <a:r>
+              <a:rPr lang="en" sz="1000">
+                <a:solidFill>
+                  <a:srgbClr val="CCCCCC"/>
+                </a:solidFill>
+                <a:highlight>
+                  <a:srgbClr val="1F1F1F"/>
+                </a:highlight>
+                <a:latin typeface="Consolas"/>
+                <a:ea typeface="Consolas"/>
+                <a:cs typeface="Consolas"/>
+                <a:sym typeface="Consolas"/>
+              </a:rPr>
+              <a:t>;</a:t>
+            </a:r>
+            <a:endParaRPr sz="1000">
+              <a:solidFill>
+                <a:srgbClr val="CCCCCC"/>
+              </a:solidFill>
+              <a:highlight>
+                <a:srgbClr val="1F1F1F"/>
+              </a:highlight>
+              <a:latin typeface="Consolas"/>
+              <a:ea typeface="Consolas"/>
+              <a:cs typeface="Consolas"/>
+              <a:sym typeface="Consolas"/>
+            </a:endParaRPr>
+          </a:p>
+          <a:p>
+            <a:pPr indent="0" lvl="0" marL="0" rtl="0" algn="l">
+              <a:lnSpc>
+                <a:spcPct val="157500"/>
+              </a:lnSpc>
+              <a:spcBef>
+                <a:spcPts val="0"/>
+              </a:spcBef>
+              <a:spcAft>
+                <a:spcPts val="0"/>
+              </a:spcAft>
+              <a:buNone/>
+            </a:pPr>
+            <a:r>
+              <a:rPr lang="en" sz="1000">
+                <a:solidFill>
+                  <a:srgbClr val="CCCCCC"/>
+                </a:solidFill>
+                <a:highlight>
+                  <a:srgbClr val="1F1F1F"/>
+                </a:highlight>
+                <a:latin typeface="Consolas"/>
+                <a:ea typeface="Consolas"/>
+                <a:cs typeface="Consolas"/>
+                <a:sym typeface="Consolas"/>
+              </a:rPr>
+              <a:t>    </a:t>
+            </a:r>
+            <a:r>
+              <a:rPr lang="en" sz="1000">
+                <a:solidFill>
+                  <a:srgbClr val="569CD6"/>
+                </a:solidFill>
+                <a:highlight>
+                  <a:srgbClr val="1F1F1F"/>
+                </a:highlight>
+                <a:latin typeface="Consolas"/>
+                <a:ea typeface="Consolas"/>
+                <a:cs typeface="Consolas"/>
+                <a:sym typeface="Consolas"/>
+              </a:rPr>
+              <a:t>public</a:t>
+            </a:r>
+            <a:r>
+              <a:rPr lang="en" sz="1000">
+                <a:solidFill>
+                  <a:srgbClr val="CCCCCC"/>
+                </a:solidFill>
+                <a:highlight>
+                  <a:srgbClr val="1F1F1F"/>
+                </a:highlight>
+                <a:latin typeface="Consolas"/>
+                <a:ea typeface="Consolas"/>
+                <a:cs typeface="Consolas"/>
+                <a:sym typeface="Consolas"/>
+              </a:rPr>
+              <a:t> </a:t>
+            </a:r>
+            <a:r>
+              <a:rPr lang="en" sz="1000">
+                <a:solidFill>
+                  <a:srgbClr val="569CD6"/>
+                </a:solidFill>
+                <a:highlight>
+                  <a:srgbClr val="1F1F1F"/>
+                </a:highlight>
+                <a:latin typeface="Consolas"/>
+                <a:ea typeface="Consolas"/>
+                <a:cs typeface="Consolas"/>
+                <a:sym typeface="Consolas"/>
+              </a:rPr>
+              <a:t>static</a:t>
+            </a:r>
+            <a:r>
+              <a:rPr lang="en" sz="1000">
+                <a:solidFill>
+                  <a:srgbClr val="CCCCCC"/>
+                </a:solidFill>
+                <a:highlight>
+                  <a:srgbClr val="1F1F1F"/>
+                </a:highlight>
+                <a:latin typeface="Consolas"/>
+                <a:ea typeface="Consolas"/>
+                <a:cs typeface="Consolas"/>
+                <a:sym typeface="Consolas"/>
+              </a:rPr>
+              <a:t> </a:t>
+            </a:r>
+            <a:r>
+              <a:rPr lang="en" sz="1000">
+                <a:solidFill>
+                  <a:srgbClr val="4EC9B0"/>
+                </a:solidFill>
+                <a:highlight>
+                  <a:srgbClr val="1F1F1F"/>
+                </a:highlight>
+                <a:latin typeface="Consolas"/>
+                <a:ea typeface="Consolas"/>
+                <a:cs typeface="Consolas"/>
+                <a:sym typeface="Consolas"/>
+              </a:rPr>
+              <a:t>Singleton</a:t>
+            </a:r>
+            <a:r>
+              <a:rPr lang="en" sz="1000">
+                <a:solidFill>
+                  <a:srgbClr val="CCCCCC"/>
+                </a:solidFill>
+                <a:highlight>
+                  <a:srgbClr val="1F1F1F"/>
+                </a:highlight>
+                <a:latin typeface="Consolas"/>
+                <a:ea typeface="Consolas"/>
+                <a:cs typeface="Consolas"/>
+                <a:sym typeface="Consolas"/>
+              </a:rPr>
+              <a:t> </a:t>
+            </a:r>
+            <a:r>
+              <a:rPr lang="en" sz="1000">
+                <a:solidFill>
+                  <a:srgbClr val="9CDCFE"/>
+                </a:solidFill>
+                <a:highlight>
+                  <a:srgbClr val="1F1F1F"/>
+                </a:highlight>
+                <a:latin typeface="Consolas"/>
+                <a:ea typeface="Consolas"/>
+                <a:cs typeface="Consolas"/>
+                <a:sym typeface="Consolas"/>
+              </a:rPr>
+              <a:t>Instance</a:t>
+            </a:r>
+            <a:endParaRPr sz="1000">
+              <a:solidFill>
+                <a:srgbClr val="9CDCFE"/>
+              </a:solidFill>
+              <a:highlight>
+                <a:srgbClr val="1F1F1F"/>
+              </a:highlight>
+              <a:latin typeface="Consolas"/>
+              <a:ea typeface="Consolas"/>
+              <a:cs typeface="Consolas"/>
+              <a:sym typeface="Consolas"/>
+            </a:endParaRPr>
+          </a:p>
+          <a:p>
+            <a:pPr indent="0" lvl="0" marL="0" rtl="0" algn="l">
+              <a:lnSpc>
+                <a:spcPct val="157500"/>
+              </a:lnSpc>
+              <a:spcBef>
+                <a:spcPts val="0"/>
+              </a:spcBef>
+              <a:spcAft>
+                <a:spcPts val="0"/>
+              </a:spcAft>
+              <a:buNone/>
+            </a:pPr>
+            <a:r>
+              <a:rPr lang="en" sz="1000">
+                <a:solidFill>
+                  <a:srgbClr val="CCCCCC"/>
+                </a:solidFill>
+                <a:highlight>
+                  <a:srgbClr val="1F1F1F"/>
+                </a:highlight>
+                <a:latin typeface="Consolas"/>
+                <a:ea typeface="Consolas"/>
+                <a:cs typeface="Consolas"/>
+                <a:sym typeface="Consolas"/>
+              </a:rPr>
+              <a:t>    {</a:t>
+            </a:r>
+            <a:endParaRPr sz="1000">
+              <a:solidFill>
+                <a:srgbClr val="CCCCCC"/>
+              </a:solidFill>
+              <a:highlight>
+                <a:srgbClr val="1F1F1F"/>
+              </a:highlight>
+              <a:latin typeface="Consolas"/>
+              <a:ea typeface="Consolas"/>
+              <a:cs typeface="Consolas"/>
+              <a:sym typeface="Consolas"/>
+            </a:endParaRPr>
+          </a:p>
+          <a:p>
+            <a:pPr indent="0" lvl="0" marL="0" rtl="0" algn="l">
+              <a:lnSpc>
+                <a:spcPct val="157500"/>
+              </a:lnSpc>
+              <a:spcBef>
+                <a:spcPts val="0"/>
+              </a:spcBef>
+              <a:spcAft>
+                <a:spcPts val="0"/>
+              </a:spcAft>
+              <a:buNone/>
+            </a:pPr>
+            <a:r>
+              <a:rPr lang="en" sz="1000">
+                <a:solidFill>
+                  <a:srgbClr val="CCCCCC"/>
+                </a:solidFill>
+                <a:highlight>
+                  <a:srgbClr val="1F1F1F"/>
+                </a:highlight>
+                <a:latin typeface="Consolas"/>
+                <a:ea typeface="Consolas"/>
+                <a:cs typeface="Consolas"/>
+                <a:sym typeface="Consolas"/>
+              </a:rPr>
+              <a:t>        </a:t>
+            </a:r>
+            <a:r>
+              <a:rPr lang="en" sz="1000">
+                <a:solidFill>
+                  <a:srgbClr val="569CD6"/>
+                </a:solidFill>
+                <a:highlight>
+                  <a:srgbClr val="1F1F1F"/>
+                </a:highlight>
+                <a:latin typeface="Consolas"/>
+                <a:ea typeface="Consolas"/>
+                <a:cs typeface="Consolas"/>
+                <a:sym typeface="Consolas"/>
+              </a:rPr>
+              <a:t>get</a:t>
+            </a:r>
+            <a:endParaRPr sz="1000">
+              <a:solidFill>
+                <a:srgbClr val="569CD6"/>
+              </a:solidFill>
+              <a:highlight>
+                <a:srgbClr val="1F1F1F"/>
+              </a:highlight>
+              <a:latin typeface="Consolas"/>
+              <a:ea typeface="Consolas"/>
+              <a:cs typeface="Consolas"/>
+              <a:sym typeface="Consolas"/>
+            </a:endParaRPr>
+          </a:p>
+          <a:p>
+            <a:pPr indent="0" lvl="0" marL="0" rtl="0" algn="l">
+              <a:lnSpc>
+                <a:spcPct val="157500"/>
+              </a:lnSpc>
+              <a:spcBef>
+                <a:spcPts val="0"/>
+              </a:spcBef>
+              <a:spcAft>
+                <a:spcPts val="0"/>
+              </a:spcAft>
+              <a:buNone/>
+            </a:pPr>
+            <a:r>
+              <a:rPr lang="en" sz="1000">
+                <a:solidFill>
+                  <a:srgbClr val="CCCCCC"/>
+                </a:solidFill>
+                <a:highlight>
+                  <a:srgbClr val="1F1F1F"/>
+                </a:highlight>
+                <a:latin typeface="Consolas"/>
+                <a:ea typeface="Consolas"/>
+                <a:cs typeface="Consolas"/>
+                <a:sym typeface="Consolas"/>
+              </a:rPr>
+              <a:t>        {</a:t>
+            </a:r>
+            <a:endParaRPr sz="1000">
+              <a:solidFill>
+                <a:srgbClr val="CCCCCC"/>
+              </a:solidFill>
+              <a:highlight>
+                <a:srgbClr val="1F1F1F"/>
+              </a:highlight>
+              <a:latin typeface="Consolas"/>
+              <a:ea typeface="Consolas"/>
+              <a:cs typeface="Consolas"/>
+              <a:sym typeface="Consolas"/>
+            </a:endParaRPr>
+          </a:p>
+          <a:p>
+            <a:pPr indent="0" lvl="0" marL="0" rtl="0" algn="l">
+              <a:lnSpc>
+                <a:spcPct val="157500"/>
+              </a:lnSpc>
+              <a:spcBef>
+                <a:spcPts val="0"/>
+              </a:spcBef>
+              <a:spcAft>
+                <a:spcPts val="0"/>
+              </a:spcAft>
+              <a:buNone/>
+            </a:pPr>
+            <a:r>
+              <a:rPr lang="en" sz="1000">
+                <a:solidFill>
+                  <a:srgbClr val="CCCCCC"/>
+                </a:solidFill>
+                <a:highlight>
+                  <a:srgbClr val="1F1F1F"/>
+                </a:highlight>
+                <a:latin typeface="Consolas"/>
+                <a:ea typeface="Consolas"/>
+                <a:cs typeface="Consolas"/>
+                <a:sym typeface="Consolas"/>
+              </a:rPr>
+              <a:t>            </a:t>
+            </a:r>
+            <a:r>
+              <a:rPr lang="en" sz="1000">
+                <a:solidFill>
+                  <a:srgbClr val="9CDCFE"/>
+                </a:solidFill>
+                <a:highlight>
+                  <a:srgbClr val="1F1F1F"/>
+                </a:highlight>
+                <a:latin typeface="Consolas"/>
+                <a:ea typeface="Consolas"/>
+                <a:cs typeface="Consolas"/>
+                <a:sym typeface="Consolas"/>
+              </a:rPr>
+              <a:t>_instance</a:t>
+            </a:r>
+            <a:r>
+              <a:rPr lang="en" sz="1000">
+                <a:solidFill>
+                  <a:srgbClr val="CCCCCC"/>
+                </a:solidFill>
+                <a:highlight>
+                  <a:srgbClr val="1F1F1F"/>
+                </a:highlight>
+                <a:latin typeface="Consolas"/>
+                <a:ea typeface="Consolas"/>
+                <a:cs typeface="Consolas"/>
+                <a:sym typeface="Consolas"/>
+              </a:rPr>
+              <a:t> </a:t>
+            </a:r>
+            <a:r>
+              <a:rPr lang="en" sz="1000">
+                <a:solidFill>
+                  <a:srgbClr val="D4D4D4"/>
+                </a:solidFill>
+                <a:highlight>
+                  <a:srgbClr val="1F1F1F"/>
+                </a:highlight>
+                <a:latin typeface="Consolas"/>
+                <a:ea typeface="Consolas"/>
+                <a:cs typeface="Consolas"/>
+                <a:sym typeface="Consolas"/>
+              </a:rPr>
+              <a:t>??=</a:t>
+            </a:r>
+            <a:r>
+              <a:rPr lang="en" sz="1000">
+                <a:solidFill>
+                  <a:srgbClr val="CCCCCC"/>
+                </a:solidFill>
+                <a:highlight>
+                  <a:srgbClr val="1F1F1F"/>
+                </a:highlight>
+                <a:latin typeface="Consolas"/>
+                <a:ea typeface="Consolas"/>
+                <a:cs typeface="Consolas"/>
+                <a:sym typeface="Consolas"/>
+              </a:rPr>
+              <a:t> </a:t>
+            </a:r>
+            <a:r>
+              <a:rPr lang="en" sz="1000">
+                <a:solidFill>
+                  <a:srgbClr val="569CD6"/>
+                </a:solidFill>
+                <a:highlight>
+                  <a:srgbClr val="1F1F1F"/>
+                </a:highlight>
+                <a:latin typeface="Consolas"/>
+                <a:ea typeface="Consolas"/>
+                <a:cs typeface="Consolas"/>
+                <a:sym typeface="Consolas"/>
+              </a:rPr>
+              <a:t>new</a:t>
+            </a:r>
+            <a:r>
+              <a:rPr lang="en" sz="1000">
+                <a:solidFill>
+                  <a:srgbClr val="CCCCCC"/>
+                </a:solidFill>
+                <a:highlight>
+                  <a:srgbClr val="1F1F1F"/>
+                </a:highlight>
+                <a:latin typeface="Consolas"/>
+                <a:ea typeface="Consolas"/>
+                <a:cs typeface="Consolas"/>
+                <a:sym typeface="Consolas"/>
+              </a:rPr>
+              <a:t> </a:t>
+            </a:r>
+            <a:r>
+              <a:rPr lang="en" sz="1000">
+                <a:solidFill>
+                  <a:srgbClr val="4EC9B0"/>
+                </a:solidFill>
+                <a:highlight>
+                  <a:srgbClr val="1F1F1F"/>
+                </a:highlight>
+                <a:latin typeface="Consolas"/>
+                <a:ea typeface="Consolas"/>
+                <a:cs typeface="Consolas"/>
+                <a:sym typeface="Consolas"/>
+              </a:rPr>
+              <a:t>Singleton</a:t>
+            </a:r>
+            <a:r>
+              <a:rPr lang="en" sz="1000">
+                <a:solidFill>
+                  <a:srgbClr val="CCCCCC"/>
+                </a:solidFill>
+                <a:highlight>
+                  <a:srgbClr val="1F1F1F"/>
+                </a:highlight>
+                <a:latin typeface="Consolas"/>
+                <a:ea typeface="Consolas"/>
+                <a:cs typeface="Consolas"/>
+                <a:sym typeface="Consolas"/>
+              </a:rPr>
+              <a:t>();</a:t>
+            </a:r>
+            <a:endParaRPr sz="1000">
+              <a:solidFill>
+                <a:srgbClr val="CCCCCC"/>
+              </a:solidFill>
+              <a:highlight>
+                <a:srgbClr val="1F1F1F"/>
+              </a:highlight>
+              <a:latin typeface="Consolas"/>
+              <a:ea typeface="Consolas"/>
+              <a:cs typeface="Consolas"/>
+              <a:sym typeface="Consolas"/>
+            </a:endParaRPr>
+          </a:p>
+          <a:p>
+            <a:pPr indent="0" lvl="0" marL="0" rtl="0" algn="l">
+              <a:lnSpc>
+                <a:spcPct val="157500"/>
+              </a:lnSpc>
+              <a:spcBef>
+                <a:spcPts val="0"/>
+              </a:spcBef>
+              <a:spcAft>
+                <a:spcPts val="0"/>
+              </a:spcAft>
+              <a:buNone/>
+            </a:pPr>
+            <a:r>
+              <a:rPr lang="en" sz="1000">
+                <a:solidFill>
+                  <a:srgbClr val="CCCCCC"/>
+                </a:solidFill>
+                <a:highlight>
+                  <a:srgbClr val="1F1F1F"/>
+                </a:highlight>
+                <a:latin typeface="Consolas"/>
+                <a:ea typeface="Consolas"/>
+                <a:cs typeface="Consolas"/>
+                <a:sym typeface="Consolas"/>
+              </a:rPr>
+              <a:t>            </a:t>
+            </a:r>
+            <a:r>
+              <a:rPr lang="en" sz="1000">
+                <a:solidFill>
+                  <a:srgbClr val="C586C0"/>
+                </a:solidFill>
+                <a:highlight>
+                  <a:srgbClr val="1F1F1F"/>
+                </a:highlight>
+                <a:latin typeface="Consolas"/>
+                <a:ea typeface="Consolas"/>
+                <a:cs typeface="Consolas"/>
+                <a:sym typeface="Consolas"/>
+              </a:rPr>
+              <a:t>return</a:t>
+            </a:r>
+            <a:r>
+              <a:rPr lang="en" sz="1000">
+                <a:solidFill>
+                  <a:srgbClr val="CCCCCC"/>
+                </a:solidFill>
+                <a:highlight>
+                  <a:srgbClr val="1F1F1F"/>
+                </a:highlight>
+                <a:latin typeface="Consolas"/>
+                <a:ea typeface="Consolas"/>
+                <a:cs typeface="Consolas"/>
+                <a:sym typeface="Consolas"/>
+              </a:rPr>
+              <a:t> </a:t>
+            </a:r>
+            <a:r>
+              <a:rPr lang="en" sz="1000">
+                <a:solidFill>
+                  <a:srgbClr val="9CDCFE"/>
+                </a:solidFill>
+                <a:highlight>
+                  <a:srgbClr val="1F1F1F"/>
+                </a:highlight>
+                <a:latin typeface="Consolas"/>
+                <a:ea typeface="Consolas"/>
+                <a:cs typeface="Consolas"/>
+                <a:sym typeface="Consolas"/>
+              </a:rPr>
+              <a:t>_instance</a:t>
+            </a:r>
+            <a:r>
+              <a:rPr lang="en" sz="1000">
+                <a:solidFill>
+                  <a:srgbClr val="CCCCCC"/>
+                </a:solidFill>
+                <a:highlight>
+                  <a:srgbClr val="1F1F1F"/>
+                </a:highlight>
+                <a:latin typeface="Consolas"/>
+                <a:ea typeface="Consolas"/>
+                <a:cs typeface="Consolas"/>
+                <a:sym typeface="Consolas"/>
+              </a:rPr>
+              <a:t>;</a:t>
+            </a:r>
+            <a:endParaRPr sz="1000">
+              <a:solidFill>
+                <a:srgbClr val="CCCCCC"/>
+              </a:solidFill>
+              <a:highlight>
+                <a:srgbClr val="1F1F1F"/>
+              </a:highlight>
+              <a:latin typeface="Consolas"/>
+              <a:ea typeface="Consolas"/>
+              <a:cs typeface="Consolas"/>
+              <a:sym typeface="Consolas"/>
+            </a:endParaRPr>
+          </a:p>
+          <a:p>
+            <a:pPr indent="0" lvl="0" marL="0" rtl="0" algn="l">
+              <a:lnSpc>
+                <a:spcPct val="157500"/>
+              </a:lnSpc>
+              <a:spcBef>
+                <a:spcPts val="0"/>
+              </a:spcBef>
+              <a:spcAft>
+                <a:spcPts val="0"/>
+              </a:spcAft>
+              <a:buNone/>
+            </a:pPr>
+            <a:r>
+              <a:rPr lang="en" sz="1000">
+                <a:solidFill>
+                  <a:srgbClr val="CCCCCC"/>
+                </a:solidFill>
+                <a:highlight>
+                  <a:srgbClr val="1F1F1F"/>
+                </a:highlight>
+                <a:latin typeface="Consolas"/>
+                <a:ea typeface="Consolas"/>
+                <a:cs typeface="Consolas"/>
+                <a:sym typeface="Consolas"/>
+              </a:rPr>
+              <a:t>        }</a:t>
+            </a:r>
+            <a:endParaRPr sz="1000">
+              <a:solidFill>
+                <a:srgbClr val="CCCCCC"/>
+              </a:solidFill>
+              <a:highlight>
+                <a:srgbClr val="1F1F1F"/>
+              </a:highlight>
+              <a:latin typeface="Consolas"/>
+              <a:ea typeface="Consolas"/>
+              <a:cs typeface="Consolas"/>
+              <a:sym typeface="Consolas"/>
+            </a:endParaRPr>
+          </a:p>
+          <a:p>
+            <a:pPr indent="0" lvl="0" marL="0" rtl="0" algn="l">
+              <a:lnSpc>
+                <a:spcPct val="157500"/>
+              </a:lnSpc>
+              <a:spcBef>
+                <a:spcPts val="0"/>
+              </a:spcBef>
+              <a:spcAft>
+                <a:spcPts val="0"/>
+              </a:spcAft>
+              <a:buNone/>
+            </a:pPr>
+            <a:r>
+              <a:rPr lang="en" sz="1000">
+                <a:solidFill>
+                  <a:srgbClr val="CCCCCC"/>
+                </a:solidFill>
+                <a:highlight>
+                  <a:srgbClr val="1F1F1F"/>
+                </a:highlight>
+                <a:latin typeface="Consolas"/>
+                <a:ea typeface="Consolas"/>
+                <a:cs typeface="Consolas"/>
+                <a:sym typeface="Consolas"/>
+              </a:rPr>
+              <a:t>    }</a:t>
+            </a:r>
+            <a:endParaRPr sz="1000">
+              <a:solidFill>
+                <a:srgbClr val="CCCCCC"/>
+              </a:solidFill>
+              <a:highlight>
+                <a:srgbClr val="1F1F1F"/>
+              </a:highlight>
+              <a:latin typeface="Consolas"/>
+              <a:ea typeface="Consolas"/>
+              <a:cs typeface="Consolas"/>
+              <a:sym typeface="Consolas"/>
+            </a:endParaRPr>
+          </a:p>
+          <a:p>
+            <a:pPr indent="0" lvl="0" marL="0" rtl="0" algn="l">
+              <a:lnSpc>
+                <a:spcPct val="157500"/>
+              </a:lnSpc>
+              <a:spcBef>
+                <a:spcPts val="0"/>
+              </a:spcBef>
+              <a:spcAft>
+                <a:spcPts val="0"/>
+              </a:spcAft>
+              <a:buNone/>
+            </a:pPr>
+            <a:r>
+              <a:rPr lang="en" sz="1000">
+                <a:solidFill>
+                  <a:srgbClr val="CCCCCC"/>
+                </a:solidFill>
+                <a:highlight>
+                  <a:srgbClr val="1F1F1F"/>
+                </a:highlight>
+                <a:latin typeface="Consolas"/>
+                <a:ea typeface="Consolas"/>
+                <a:cs typeface="Consolas"/>
+                <a:sym typeface="Consolas"/>
+              </a:rPr>
+              <a:t>}</a:t>
+            </a:r>
+            <a:endParaRPr/>
+          </a:p>
+        </p:txBody>
+      </p:sp>
     </p:spTree>
   </p:cSld>
   <p:clrMapOvr>
@@ -25682,1084 +26292,6 @@
   <p:cSld>
     <p:spTree>
       <p:nvGrpSpPr>
-        <p:cNvPr id="262" name="Shape 262"/>
-        <p:cNvGrpSpPr/>
-        <p:nvPr/>
-      </p:nvGrpSpPr>
-      <p:grpSpPr>
-        <a:xfrm>
-          <a:off x="0" y="0"/>
-          <a:ext cx="0" cy="0"/>
-          <a:chOff x="0" y="0"/>
-          <a:chExt cx="0" cy="0"/>
-        </a:xfrm>
-      </p:grpSpPr>
-      <p:sp>
-        <p:nvSpPr>
-          <p:cNvPr id="263" name="Google Shape;263;p46"/>
-          <p:cNvSpPr txBox="1"/>
-          <p:nvPr>
-            <p:ph type="title"/>
-          </p:nvPr>
-        </p:nvSpPr>
-        <p:spPr>
-          <a:xfrm>
-            <a:off x="311700" y="195615"/>
-            <a:ext cx="8520600" cy="572700"/>
-          </a:xfrm>
-          <a:prstGeom prst="rect">
-            <a:avLst/>
-          </a:prstGeom>
-        </p:spPr>
-        <p:txBody>
-          <a:bodyPr anchorCtr="0" anchor="t" bIns="91425" lIns="91425" spcFirstLastPara="1" rIns="91425" wrap="square" tIns="91425">
-            <a:normAutofit fontScale="90000"/>
-          </a:bodyPr>
-          <a:lstStyle/>
-          <a:p>
-            <a:pPr indent="0" lvl="0" marL="0" rtl="0" algn="l">
-              <a:spcBef>
-                <a:spcPts val="0"/>
-              </a:spcBef>
-              <a:spcAft>
-                <a:spcPts val="0"/>
-              </a:spcAft>
-              <a:buNone/>
-            </a:pPr>
-            <a:r>
-              <a:rPr lang="en"/>
-              <a:t>Singleton Pattern: Solution</a:t>
-            </a:r>
-            <a:endParaRPr/>
-          </a:p>
-        </p:txBody>
-      </p:sp>
-      <p:sp>
-        <p:nvSpPr>
-          <p:cNvPr id="264" name="Google Shape;264;p46"/>
-          <p:cNvSpPr txBox="1"/>
-          <p:nvPr>
-            <p:ph idx="2" type="body"/>
-          </p:nvPr>
-        </p:nvSpPr>
-        <p:spPr>
-          <a:xfrm>
-            <a:off x="4433925" y="1353675"/>
-            <a:ext cx="3999900" cy="3004800"/>
-          </a:xfrm>
-          <a:prstGeom prst="rect">
-            <a:avLst/>
-          </a:prstGeom>
-        </p:spPr>
-        <p:txBody>
-          <a:bodyPr anchorCtr="0" anchor="t" bIns="91425" lIns="91425" spcFirstLastPara="1" rIns="91425" wrap="square" tIns="91425">
-            <a:noAutofit/>
-          </a:bodyPr>
-          <a:lstStyle/>
-          <a:p>
-            <a:pPr indent="0" lvl="0" marL="0" rtl="0" algn="l">
-              <a:lnSpc>
-                <a:spcPct val="157500"/>
-              </a:lnSpc>
-              <a:spcBef>
-                <a:spcPts val="0"/>
-              </a:spcBef>
-              <a:spcAft>
-                <a:spcPts val="0"/>
-              </a:spcAft>
-              <a:buNone/>
-            </a:pPr>
-            <a:r>
-              <a:rPr lang="en" sz="1000">
-                <a:solidFill>
-                  <a:srgbClr val="569CD6"/>
-                </a:solidFill>
-                <a:highlight>
-                  <a:srgbClr val="1F1F1F"/>
-                </a:highlight>
-                <a:latin typeface="Consolas"/>
-                <a:ea typeface="Consolas"/>
-                <a:cs typeface="Consolas"/>
-                <a:sym typeface="Consolas"/>
-              </a:rPr>
-              <a:t>public</a:t>
-            </a:r>
-            <a:r>
-              <a:rPr lang="en" sz="1000">
-                <a:solidFill>
-                  <a:srgbClr val="CCCCCC"/>
-                </a:solidFill>
-                <a:highlight>
-                  <a:srgbClr val="1F1F1F"/>
-                </a:highlight>
-                <a:latin typeface="Consolas"/>
-                <a:ea typeface="Consolas"/>
-                <a:cs typeface="Consolas"/>
-                <a:sym typeface="Consolas"/>
-              </a:rPr>
-              <a:t> </a:t>
-            </a:r>
-            <a:r>
-              <a:rPr lang="en" sz="1000">
-                <a:solidFill>
-                  <a:srgbClr val="569CD6"/>
-                </a:solidFill>
-                <a:highlight>
-                  <a:srgbClr val="1F1F1F"/>
-                </a:highlight>
-                <a:latin typeface="Consolas"/>
-                <a:ea typeface="Consolas"/>
-                <a:cs typeface="Consolas"/>
-                <a:sym typeface="Consolas"/>
-              </a:rPr>
-              <a:t>class</a:t>
-            </a:r>
-            <a:r>
-              <a:rPr lang="en" sz="1000">
-                <a:solidFill>
-                  <a:srgbClr val="CCCCCC"/>
-                </a:solidFill>
-                <a:highlight>
-                  <a:srgbClr val="1F1F1F"/>
-                </a:highlight>
-                <a:latin typeface="Consolas"/>
-                <a:ea typeface="Consolas"/>
-                <a:cs typeface="Consolas"/>
-                <a:sym typeface="Consolas"/>
-              </a:rPr>
-              <a:t> </a:t>
-            </a:r>
-            <a:r>
-              <a:rPr lang="en" sz="1000">
-                <a:solidFill>
-                  <a:srgbClr val="4EC9B0"/>
-                </a:solidFill>
-                <a:highlight>
-                  <a:srgbClr val="1F1F1F"/>
-                </a:highlight>
-                <a:latin typeface="Consolas"/>
-                <a:ea typeface="Consolas"/>
-                <a:cs typeface="Consolas"/>
-                <a:sym typeface="Consolas"/>
-              </a:rPr>
-              <a:t>Singleton</a:t>
-            </a:r>
-            <a:endParaRPr sz="1000">
-              <a:solidFill>
-                <a:srgbClr val="4EC9B0"/>
-              </a:solidFill>
-              <a:highlight>
-                <a:srgbClr val="1F1F1F"/>
-              </a:highlight>
-              <a:latin typeface="Consolas"/>
-              <a:ea typeface="Consolas"/>
-              <a:cs typeface="Consolas"/>
-              <a:sym typeface="Consolas"/>
-            </a:endParaRPr>
-          </a:p>
-          <a:p>
-            <a:pPr indent="0" lvl="0" marL="0" rtl="0" algn="l">
-              <a:lnSpc>
-                <a:spcPct val="157500"/>
-              </a:lnSpc>
-              <a:spcBef>
-                <a:spcPts val="0"/>
-              </a:spcBef>
-              <a:spcAft>
-                <a:spcPts val="0"/>
-              </a:spcAft>
-              <a:buNone/>
-            </a:pPr>
-            <a:r>
-              <a:rPr lang="en" sz="1000">
-                <a:solidFill>
-                  <a:srgbClr val="CCCCCC"/>
-                </a:solidFill>
-                <a:highlight>
-                  <a:srgbClr val="1F1F1F"/>
-                </a:highlight>
-                <a:latin typeface="Consolas"/>
-                <a:ea typeface="Consolas"/>
-                <a:cs typeface="Consolas"/>
-                <a:sym typeface="Consolas"/>
-              </a:rPr>
-              <a:t>{</a:t>
-            </a:r>
-            <a:endParaRPr sz="1000">
-              <a:solidFill>
-                <a:srgbClr val="CCCCCC"/>
-              </a:solidFill>
-              <a:highlight>
-                <a:srgbClr val="1F1F1F"/>
-              </a:highlight>
-              <a:latin typeface="Consolas"/>
-              <a:ea typeface="Consolas"/>
-              <a:cs typeface="Consolas"/>
-              <a:sym typeface="Consolas"/>
-            </a:endParaRPr>
-          </a:p>
-          <a:p>
-            <a:pPr indent="0" lvl="0" marL="0" rtl="0" algn="l">
-              <a:lnSpc>
-                <a:spcPct val="157500"/>
-              </a:lnSpc>
-              <a:spcBef>
-                <a:spcPts val="0"/>
-              </a:spcBef>
-              <a:spcAft>
-                <a:spcPts val="0"/>
-              </a:spcAft>
-              <a:buNone/>
-            </a:pPr>
-            <a:r>
-              <a:rPr lang="en" sz="1000">
-                <a:solidFill>
-                  <a:srgbClr val="CCCCCC"/>
-                </a:solidFill>
-                <a:highlight>
-                  <a:srgbClr val="1F1F1F"/>
-                </a:highlight>
-                <a:latin typeface="Consolas"/>
-                <a:ea typeface="Consolas"/>
-                <a:cs typeface="Consolas"/>
-                <a:sym typeface="Consolas"/>
-              </a:rPr>
-              <a:t>    </a:t>
-            </a:r>
-            <a:r>
-              <a:rPr lang="en" sz="1000">
-                <a:solidFill>
-                  <a:srgbClr val="569CD6"/>
-                </a:solidFill>
-                <a:highlight>
-                  <a:srgbClr val="1F1F1F"/>
-                </a:highlight>
-                <a:latin typeface="Consolas"/>
-                <a:ea typeface="Consolas"/>
-                <a:cs typeface="Consolas"/>
-                <a:sym typeface="Consolas"/>
-              </a:rPr>
-              <a:t>private</a:t>
-            </a:r>
-            <a:r>
-              <a:rPr lang="en" sz="1000">
-                <a:solidFill>
-                  <a:srgbClr val="CCCCCC"/>
-                </a:solidFill>
-                <a:highlight>
-                  <a:srgbClr val="1F1F1F"/>
-                </a:highlight>
-                <a:latin typeface="Consolas"/>
-                <a:ea typeface="Consolas"/>
-                <a:cs typeface="Consolas"/>
-                <a:sym typeface="Consolas"/>
-              </a:rPr>
-              <a:t> </a:t>
-            </a:r>
-            <a:r>
-              <a:rPr lang="en" sz="1000">
-                <a:solidFill>
-                  <a:srgbClr val="569CD6"/>
-                </a:solidFill>
-                <a:highlight>
-                  <a:srgbClr val="1F1F1F"/>
-                </a:highlight>
-                <a:latin typeface="Consolas"/>
-                <a:ea typeface="Consolas"/>
-                <a:cs typeface="Consolas"/>
-                <a:sym typeface="Consolas"/>
-              </a:rPr>
-              <a:t>static</a:t>
-            </a:r>
-            <a:r>
-              <a:rPr lang="en" sz="1000">
-                <a:solidFill>
-                  <a:srgbClr val="CCCCCC"/>
-                </a:solidFill>
-                <a:highlight>
-                  <a:srgbClr val="1F1F1F"/>
-                </a:highlight>
-                <a:latin typeface="Consolas"/>
-                <a:ea typeface="Consolas"/>
-                <a:cs typeface="Consolas"/>
-                <a:sym typeface="Consolas"/>
-              </a:rPr>
-              <a:t> </a:t>
-            </a:r>
-            <a:r>
-              <a:rPr lang="en" sz="1000">
-                <a:solidFill>
-                  <a:srgbClr val="4EC9B0"/>
-                </a:solidFill>
-                <a:highlight>
-                  <a:srgbClr val="1F1F1F"/>
-                </a:highlight>
-                <a:latin typeface="Consolas"/>
-                <a:ea typeface="Consolas"/>
-                <a:cs typeface="Consolas"/>
-                <a:sym typeface="Consolas"/>
-              </a:rPr>
-              <a:t>Singleton</a:t>
-            </a:r>
-            <a:r>
-              <a:rPr lang="en" sz="1000">
-                <a:solidFill>
-                  <a:srgbClr val="CCCCCC"/>
-                </a:solidFill>
-                <a:highlight>
-                  <a:srgbClr val="1F1F1F"/>
-                </a:highlight>
-                <a:latin typeface="Consolas"/>
-                <a:ea typeface="Consolas"/>
-                <a:cs typeface="Consolas"/>
-                <a:sym typeface="Consolas"/>
-              </a:rPr>
-              <a:t> </a:t>
-            </a:r>
-            <a:r>
-              <a:rPr lang="en" sz="1000">
-                <a:solidFill>
-                  <a:srgbClr val="9CDCFE"/>
-                </a:solidFill>
-                <a:highlight>
-                  <a:srgbClr val="1F1F1F"/>
-                </a:highlight>
-                <a:latin typeface="Consolas"/>
-                <a:ea typeface="Consolas"/>
-                <a:cs typeface="Consolas"/>
-                <a:sym typeface="Consolas"/>
-              </a:rPr>
-              <a:t>_instance</a:t>
-            </a:r>
-            <a:r>
-              <a:rPr lang="en" sz="1000">
-                <a:solidFill>
-                  <a:srgbClr val="CCCCCC"/>
-                </a:solidFill>
-                <a:highlight>
-                  <a:srgbClr val="1F1F1F"/>
-                </a:highlight>
-                <a:latin typeface="Consolas"/>
-                <a:ea typeface="Consolas"/>
-                <a:cs typeface="Consolas"/>
-                <a:sym typeface="Consolas"/>
-              </a:rPr>
-              <a:t>;</a:t>
-            </a:r>
-            <a:endParaRPr sz="1000">
-              <a:solidFill>
-                <a:srgbClr val="CCCCCC"/>
-              </a:solidFill>
-              <a:highlight>
-                <a:srgbClr val="1F1F1F"/>
-              </a:highlight>
-              <a:latin typeface="Consolas"/>
-              <a:ea typeface="Consolas"/>
-              <a:cs typeface="Consolas"/>
-              <a:sym typeface="Consolas"/>
-            </a:endParaRPr>
-          </a:p>
-          <a:p>
-            <a:pPr indent="0" lvl="0" marL="0" rtl="0" algn="l">
-              <a:lnSpc>
-                <a:spcPct val="157500"/>
-              </a:lnSpc>
-              <a:spcBef>
-                <a:spcPts val="0"/>
-              </a:spcBef>
-              <a:spcAft>
-                <a:spcPts val="0"/>
-              </a:spcAft>
-              <a:buNone/>
-            </a:pPr>
-            <a:r>
-              <a:rPr lang="en" sz="1000">
-                <a:solidFill>
-                  <a:srgbClr val="CCCCCC"/>
-                </a:solidFill>
-                <a:highlight>
-                  <a:srgbClr val="1F1F1F"/>
-                </a:highlight>
-                <a:latin typeface="Consolas"/>
-                <a:ea typeface="Consolas"/>
-                <a:cs typeface="Consolas"/>
-                <a:sym typeface="Consolas"/>
-              </a:rPr>
-              <a:t>    </a:t>
-            </a:r>
-            <a:r>
-              <a:rPr lang="en" sz="1000">
-                <a:solidFill>
-                  <a:srgbClr val="569CD6"/>
-                </a:solidFill>
-                <a:highlight>
-                  <a:srgbClr val="1F1F1F"/>
-                </a:highlight>
-                <a:latin typeface="Consolas"/>
-                <a:ea typeface="Consolas"/>
-                <a:cs typeface="Consolas"/>
-                <a:sym typeface="Consolas"/>
-              </a:rPr>
-              <a:t>public</a:t>
-            </a:r>
-            <a:r>
-              <a:rPr lang="en" sz="1000">
-                <a:solidFill>
-                  <a:srgbClr val="CCCCCC"/>
-                </a:solidFill>
-                <a:highlight>
-                  <a:srgbClr val="1F1F1F"/>
-                </a:highlight>
-                <a:latin typeface="Consolas"/>
-                <a:ea typeface="Consolas"/>
-                <a:cs typeface="Consolas"/>
-                <a:sym typeface="Consolas"/>
-              </a:rPr>
-              <a:t> </a:t>
-            </a:r>
-            <a:r>
-              <a:rPr lang="en" sz="1000">
-                <a:solidFill>
-                  <a:srgbClr val="569CD6"/>
-                </a:solidFill>
-                <a:highlight>
-                  <a:srgbClr val="1F1F1F"/>
-                </a:highlight>
-                <a:latin typeface="Consolas"/>
-                <a:ea typeface="Consolas"/>
-                <a:cs typeface="Consolas"/>
-                <a:sym typeface="Consolas"/>
-              </a:rPr>
-              <a:t>static</a:t>
-            </a:r>
-            <a:r>
-              <a:rPr lang="en" sz="1000">
-                <a:solidFill>
-                  <a:srgbClr val="CCCCCC"/>
-                </a:solidFill>
-                <a:highlight>
-                  <a:srgbClr val="1F1F1F"/>
-                </a:highlight>
-                <a:latin typeface="Consolas"/>
-                <a:ea typeface="Consolas"/>
-                <a:cs typeface="Consolas"/>
-                <a:sym typeface="Consolas"/>
-              </a:rPr>
-              <a:t> </a:t>
-            </a:r>
-            <a:r>
-              <a:rPr lang="en" sz="1000">
-                <a:solidFill>
-                  <a:srgbClr val="4EC9B0"/>
-                </a:solidFill>
-                <a:highlight>
-                  <a:srgbClr val="1F1F1F"/>
-                </a:highlight>
-                <a:latin typeface="Consolas"/>
-                <a:ea typeface="Consolas"/>
-                <a:cs typeface="Consolas"/>
-                <a:sym typeface="Consolas"/>
-              </a:rPr>
-              <a:t>Singleton</a:t>
-            </a:r>
-            <a:r>
-              <a:rPr lang="en" sz="1000">
-                <a:solidFill>
-                  <a:srgbClr val="CCCCCC"/>
-                </a:solidFill>
-                <a:highlight>
-                  <a:srgbClr val="1F1F1F"/>
-                </a:highlight>
-                <a:latin typeface="Consolas"/>
-                <a:ea typeface="Consolas"/>
-                <a:cs typeface="Consolas"/>
-                <a:sym typeface="Consolas"/>
-              </a:rPr>
-              <a:t> </a:t>
-            </a:r>
-            <a:r>
-              <a:rPr lang="en" sz="1000">
-                <a:solidFill>
-                  <a:srgbClr val="9CDCFE"/>
-                </a:solidFill>
-                <a:highlight>
-                  <a:srgbClr val="1F1F1F"/>
-                </a:highlight>
-                <a:latin typeface="Consolas"/>
-                <a:ea typeface="Consolas"/>
-                <a:cs typeface="Consolas"/>
-                <a:sym typeface="Consolas"/>
-              </a:rPr>
-              <a:t>Instance</a:t>
-            </a:r>
-            <a:endParaRPr sz="1000">
-              <a:solidFill>
-                <a:srgbClr val="9CDCFE"/>
-              </a:solidFill>
-              <a:highlight>
-                <a:srgbClr val="1F1F1F"/>
-              </a:highlight>
-              <a:latin typeface="Consolas"/>
-              <a:ea typeface="Consolas"/>
-              <a:cs typeface="Consolas"/>
-              <a:sym typeface="Consolas"/>
-            </a:endParaRPr>
-          </a:p>
-          <a:p>
-            <a:pPr indent="0" lvl="0" marL="0" rtl="0" algn="l">
-              <a:lnSpc>
-                <a:spcPct val="157500"/>
-              </a:lnSpc>
-              <a:spcBef>
-                <a:spcPts val="0"/>
-              </a:spcBef>
-              <a:spcAft>
-                <a:spcPts val="0"/>
-              </a:spcAft>
-              <a:buNone/>
-            </a:pPr>
-            <a:r>
-              <a:rPr lang="en" sz="1000">
-                <a:solidFill>
-                  <a:srgbClr val="CCCCCC"/>
-                </a:solidFill>
-                <a:highlight>
-                  <a:srgbClr val="1F1F1F"/>
-                </a:highlight>
-                <a:latin typeface="Consolas"/>
-                <a:ea typeface="Consolas"/>
-                <a:cs typeface="Consolas"/>
-                <a:sym typeface="Consolas"/>
-              </a:rPr>
-              <a:t>    {</a:t>
-            </a:r>
-            <a:endParaRPr sz="1000">
-              <a:solidFill>
-                <a:srgbClr val="CCCCCC"/>
-              </a:solidFill>
-              <a:highlight>
-                <a:srgbClr val="1F1F1F"/>
-              </a:highlight>
-              <a:latin typeface="Consolas"/>
-              <a:ea typeface="Consolas"/>
-              <a:cs typeface="Consolas"/>
-              <a:sym typeface="Consolas"/>
-            </a:endParaRPr>
-          </a:p>
-          <a:p>
-            <a:pPr indent="0" lvl="0" marL="0" rtl="0" algn="l">
-              <a:lnSpc>
-                <a:spcPct val="157500"/>
-              </a:lnSpc>
-              <a:spcBef>
-                <a:spcPts val="0"/>
-              </a:spcBef>
-              <a:spcAft>
-                <a:spcPts val="0"/>
-              </a:spcAft>
-              <a:buNone/>
-            </a:pPr>
-            <a:r>
-              <a:rPr lang="en" sz="1000">
-                <a:solidFill>
-                  <a:srgbClr val="CCCCCC"/>
-                </a:solidFill>
-                <a:highlight>
-                  <a:srgbClr val="1F1F1F"/>
-                </a:highlight>
-                <a:latin typeface="Consolas"/>
-                <a:ea typeface="Consolas"/>
-                <a:cs typeface="Consolas"/>
-                <a:sym typeface="Consolas"/>
-              </a:rPr>
-              <a:t>        </a:t>
-            </a:r>
-            <a:r>
-              <a:rPr lang="en" sz="1000">
-                <a:solidFill>
-                  <a:srgbClr val="569CD6"/>
-                </a:solidFill>
-                <a:highlight>
-                  <a:srgbClr val="1F1F1F"/>
-                </a:highlight>
-                <a:latin typeface="Consolas"/>
-                <a:ea typeface="Consolas"/>
-                <a:cs typeface="Consolas"/>
-                <a:sym typeface="Consolas"/>
-              </a:rPr>
-              <a:t>get</a:t>
-            </a:r>
-            <a:endParaRPr sz="1000">
-              <a:solidFill>
-                <a:srgbClr val="569CD6"/>
-              </a:solidFill>
-              <a:highlight>
-                <a:srgbClr val="1F1F1F"/>
-              </a:highlight>
-              <a:latin typeface="Consolas"/>
-              <a:ea typeface="Consolas"/>
-              <a:cs typeface="Consolas"/>
-              <a:sym typeface="Consolas"/>
-            </a:endParaRPr>
-          </a:p>
-          <a:p>
-            <a:pPr indent="0" lvl="0" marL="0" rtl="0" algn="l">
-              <a:lnSpc>
-                <a:spcPct val="157500"/>
-              </a:lnSpc>
-              <a:spcBef>
-                <a:spcPts val="0"/>
-              </a:spcBef>
-              <a:spcAft>
-                <a:spcPts val="0"/>
-              </a:spcAft>
-              <a:buNone/>
-            </a:pPr>
-            <a:r>
-              <a:rPr lang="en" sz="1000">
-                <a:solidFill>
-                  <a:srgbClr val="CCCCCC"/>
-                </a:solidFill>
-                <a:highlight>
-                  <a:srgbClr val="1F1F1F"/>
-                </a:highlight>
-                <a:latin typeface="Consolas"/>
-                <a:ea typeface="Consolas"/>
-                <a:cs typeface="Consolas"/>
-                <a:sym typeface="Consolas"/>
-              </a:rPr>
-              <a:t>        {</a:t>
-            </a:r>
-            <a:endParaRPr sz="1000">
-              <a:solidFill>
-                <a:srgbClr val="CCCCCC"/>
-              </a:solidFill>
-              <a:highlight>
-                <a:srgbClr val="1F1F1F"/>
-              </a:highlight>
-              <a:latin typeface="Consolas"/>
-              <a:ea typeface="Consolas"/>
-              <a:cs typeface="Consolas"/>
-              <a:sym typeface="Consolas"/>
-            </a:endParaRPr>
-          </a:p>
-          <a:p>
-            <a:pPr indent="0" lvl="0" marL="0" rtl="0" algn="l">
-              <a:lnSpc>
-                <a:spcPct val="157500"/>
-              </a:lnSpc>
-              <a:spcBef>
-                <a:spcPts val="0"/>
-              </a:spcBef>
-              <a:spcAft>
-                <a:spcPts val="0"/>
-              </a:spcAft>
-              <a:buNone/>
-            </a:pPr>
-            <a:r>
-              <a:rPr lang="en" sz="1000">
-                <a:solidFill>
-                  <a:srgbClr val="CCCCCC"/>
-                </a:solidFill>
-                <a:highlight>
-                  <a:srgbClr val="1F1F1F"/>
-                </a:highlight>
-                <a:latin typeface="Consolas"/>
-                <a:ea typeface="Consolas"/>
-                <a:cs typeface="Consolas"/>
-                <a:sym typeface="Consolas"/>
-              </a:rPr>
-              <a:t>            </a:t>
-            </a:r>
-            <a:r>
-              <a:rPr lang="en" sz="1000">
-                <a:solidFill>
-                  <a:srgbClr val="9CDCFE"/>
-                </a:solidFill>
-                <a:highlight>
-                  <a:srgbClr val="1F1F1F"/>
-                </a:highlight>
-                <a:latin typeface="Consolas"/>
-                <a:ea typeface="Consolas"/>
-                <a:cs typeface="Consolas"/>
-                <a:sym typeface="Consolas"/>
-              </a:rPr>
-              <a:t>_instance</a:t>
-            </a:r>
-            <a:r>
-              <a:rPr lang="en" sz="1000">
-                <a:solidFill>
-                  <a:srgbClr val="CCCCCC"/>
-                </a:solidFill>
-                <a:highlight>
-                  <a:srgbClr val="1F1F1F"/>
-                </a:highlight>
-                <a:latin typeface="Consolas"/>
-                <a:ea typeface="Consolas"/>
-                <a:cs typeface="Consolas"/>
-                <a:sym typeface="Consolas"/>
-              </a:rPr>
-              <a:t> </a:t>
-            </a:r>
-            <a:r>
-              <a:rPr lang="en" sz="1000">
-                <a:solidFill>
-                  <a:srgbClr val="D4D4D4"/>
-                </a:solidFill>
-                <a:highlight>
-                  <a:srgbClr val="1F1F1F"/>
-                </a:highlight>
-                <a:latin typeface="Consolas"/>
-                <a:ea typeface="Consolas"/>
-                <a:cs typeface="Consolas"/>
-                <a:sym typeface="Consolas"/>
-              </a:rPr>
-              <a:t>??=</a:t>
-            </a:r>
-            <a:r>
-              <a:rPr lang="en" sz="1000">
-                <a:solidFill>
-                  <a:srgbClr val="CCCCCC"/>
-                </a:solidFill>
-                <a:highlight>
-                  <a:srgbClr val="1F1F1F"/>
-                </a:highlight>
-                <a:latin typeface="Consolas"/>
-                <a:ea typeface="Consolas"/>
-                <a:cs typeface="Consolas"/>
-                <a:sym typeface="Consolas"/>
-              </a:rPr>
-              <a:t> </a:t>
-            </a:r>
-            <a:r>
-              <a:rPr lang="en" sz="1000">
-                <a:solidFill>
-                  <a:srgbClr val="569CD6"/>
-                </a:solidFill>
-                <a:highlight>
-                  <a:srgbClr val="1F1F1F"/>
-                </a:highlight>
-                <a:latin typeface="Consolas"/>
-                <a:ea typeface="Consolas"/>
-                <a:cs typeface="Consolas"/>
-                <a:sym typeface="Consolas"/>
-              </a:rPr>
-              <a:t>new</a:t>
-            </a:r>
-            <a:r>
-              <a:rPr lang="en" sz="1000">
-                <a:solidFill>
-                  <a:srgbClr val="CCCCCC"/>
-                </a:solidFill>
-                <a:highlight>
-                  <a:srgbClr val="1F1F1F"/>
-                </a:highlight>
-                <a:latin typeface="Consolas"/>
-                <a:ea typeface="Consolas"/>
-                <a:cs typeface="Consolas"/>
-                <a:sym typeface="Consolas"/>
-              </a:rPr>
-              <a:t> </a:t>
-            </a:r>
-            <a:r>
-              <a:rPr lang="en" sz="1000">
-                <a:solidFill>
-                  <a:srgbClr val="4EC9B0"/>
-                </a:solidFill>
-                <a:highlight>
-                  <a:srgbClr val="1F1F1F"/>
-                </a:highlight>
-                <a:latin typeface="Consolas"/>
-                <a:ea typeface="Consolas"/>
-                <a:cs typeface="Consolas"/>
-                <a:sym typeface="Consolas"/>
-              </a:rPr>
-              <a:t>Singleton</a:t>
-            </a:r>
-            <a:r>
-              <a:rPr lang="en" sz="1000">
-                <a:solidFill>
-                  <a:srgbClr val="CCCCCC"/>
-                </a:solidFill>
-                <a:highlight>
-                  <a:srgbClr val="1F1F1F"/>
-                </a:highlight>
-                <a:latin typeface="Consolas"/>
-                <a:ea typeface="Consolas"/>
-                <a:cs typeface="Consolas"/>
-                <a:sym typeface="Consolas"/>
-              </a:rPr>
-              <a:t>();</a:t>
-            </a:r>
-            <a:endParaRPr sz="1000">
-              <a:solidFill>
-                <a:srgbClr val="CCCCCC"/>
-              </a:solidFill>
-              <a:highlight>
-                <a:srgbClr val="1F1F1F"/>
-              </a:highlight>
-              <a:latin typeface="Consolas"/>
-              <a:ea typeface="Consolas"/>
-              <a:cs typeface="Consolas"/>
-              <a:sym typeface="Consolas"/>
-            </a:endParaRPr>
-          </a:p>
-          <a:p>
-            <a:pPr indent="0" lvl="0" marL="0" rtl="0" algn="l">
-              <a:lnSpc>
-                <a:spcPct val="157500"/>
-              </a:lnSpc>
-              <a:spcBef>
-                <a:spcPts val="0"/>
-              </a:spcBef>
-              <a:spcAft>
-                <a:spcPts val="0"/>
-              </a:spcAft>
-              <a:buNone/>
-            </a:pPr>
-            <a:r>
-              <a:rPr lang="en" sz="1000">
-                <a:solidFill>
-                  <a:srgbClr val="CCCCCC"/>
-                </a:solidFill>
-                <a:highlight>
-                  <a:srgbClr val="1F1F1F"/>
-                </a:highlight>
-                <a:latin typeface="Consolas"/>
-                <a:ea typeface="Consolas"/>
-                <a:cs typeface="Consolas"/>
-                <a:sym typeface="Consolas"/>
-              </a:rPr>
-              <a:t>            </a:t>
-            </a:r>
-            <a:r>
-              <a:rPr lang="en" sz="1000">
-                <a:solidFill>
-                  <a:srgbClr val="C586C0"/>
-                </a:solidFill>
-                <a:highlight>
-                  <a:srgbClr val="1F1F1F"/>
-                </a:highlight>
-                <a:latin typeface="Consolas"/>
-                <a:ea typeface="Consolas"/>
-                <a:cs typeface="Consolas"/>
-                <a:sym typeface="Consolas"/>
-              </a:rPr>
-              <a:t>return</a:t>
-            </a:r>
-            <a:r>
-              <a:rPr lang="en" sz="1000">
-                <a:solidFill>
-                  <a:srgbClr val="CCCCCC"/>
-                </a:solidFill>
-                <a:highlight>
-                  <a:srgbClr val="1F1F1F"/>
-                </a:highlight>
-                <a:latin typeface="Consolas"/>
-                <a:ea typeface="Consolas"/>
-                <a:cs typeface="Consolas"/>
-                <a:sym typeface="Consolas"/>
-              </a:rPr>
-              <a:t> </a:t>
-            </a:r>
-            <a:r>
-              <a:rPr lang="en" sz="1000">
-                <a:solidFill>
-                  <a:srgbClr val="9CDCFE"/>
-                </a:solidFill>
-                <a:highlight>
-                  <a:srgbClr val="1F1F1F"/>
-                </a:highlight>
-                <a:latin typeface="Consolas"/>
-                <a:ea typeface="Consolas"/>
-                <a:cs typeface="Consolas"/>
-                <a:sym typeface="Consolas"/>
-              </a:rPr>
-              <a:t>_instance</a:t>
-            </a:r>
-            <a:r>
-              <a:rPr lang="en" sz="1000">
-                <a:solidFill>
-                  <a:srgbClr val="CCCCCC"/>
-                </a:solidFill>
-                <a:highlight>
-                  <a:srgbClr val="1F1F1F"/>
-                </a:highlight>
-                <a:latin typeface="Consolas"/>
-                <a:ea typeface="Consolas"/>
-                <a:cs typeface="Consolas"/>
-                <a:sym typeface="Consolas"/>
-              </a:rPr>
-              <a:t>;</a:t>
-            </a:r>
-            <a:endParaRPr sz="1000">
-              <a:solidFill>
-                <a:srgbClr val="CCCCCC"/>
-              </a:solidFill>
-              <a:highlight>
-                <a:srgbClr val="1F1F1F"/>
-              </a:highlight>
-              <a:latin typeface="Consolas"/>
-              <a:ea typeface="Consolas"/>
-              <a:cs typeface="Consolas"/>
-              <a:sym typeface="Consolas"/>
-            </a:endParaRPr>
-          </a:p>
-          <a:p>
-            <a:pPr indent="0" lvl="0" marL="0" rtl="0" algn="l">
-              <a:lnSpc>
-                <a:spcPct val="157500"/>
-              </a:lnSpc>
-              <a:spcBef>
-                <a:spcPts val="0"/>
-              </a:spcBef>
-              <a:spcAft>
-                <a:spcPts val="0"/>
-              </a:spcAft>
-              <a:buNone/>
-            </a:pPr>
-            <a:r>
-              <a:rPr lang="en" sz="1000">
-                <a:solidFill>
-                  <a:srgbClr val="CCCCCC"/>
-                </a:solidFill>
-                <a:highlight>
-                  <a:srgbClr val="1F1F1F"/>
-                </a:highlight>
-                <a:latin typeface="Consolas"/>
-                <a:ea typeface="Consolas"/>
-                <a:cs typeface="Consolas"/>
-                <a:sym typeface="Consolas"/>
-              </a:rPr>
-              <a:t>        }</a:t>
-            </a:r>
-            <a:endParaRPr sz="1000">
-              <a:solidFill>
-                <a:srgbClr val="CCCCCC"/>
-              </a:solidFill>
-              <a:highlight>
-                <a:srgbClr val="1F1F1F"/>
-              </a:highlight>
-              <a:latin typeface="Consolas"/>
-              <a:ea typeface="Consolas"/>
-              <a:cs typeface="Consolas"/>
-              <a:sym typeface="Consolas"/>
-            </a:endParaRPr>
-          </a:p>
-          <a:p>
-            <a:pPr indent="0" lvl="0" marL="0" rtl="0" algn="l">
-              <a:lnSpc>
-                <a:spcPct val="157500"/>
-              </a:lnSpc>
-              <a:spcBef>
-                <a:spcPts val="0"/>
-              </a:spcBef>
-              <a:spcAft>
-                <a:spcPts val="0"/>
-              </a:spcAft>
-              <a:buNone/>
-            </a:pPr>
-            <a:r>
-              <a:rPr lang="en" sz="1000">
-                <a:solidFill>
-                  <a:srgbClr val="CCCCCC"/>
-                </a:solidFill>
-                <a:highlight>
-                  <a:srgbClr val="1F1F1F"/>
-                </a:highlight>
-                <a:latin typeface="Consolas"/>
-                <a:ea typeface="Consolas"/>
-                <a:cs typeface="Consolas"/>
-                <a:sym typeface="Consolas"/>
-              </a:rPr>
-              <a:t>    }</a:t>
-            </a:r>
-            <a:endParaRPr sz="1000">
-              <a:solidFill>
-                <a:srgbClr val="CCCCCC"/>
-              </a:solidFill>
-              <a:highlight>
-                <a:srgbClr val="1F1F1F"/>
-              </a:highlight>
-              <a:latin typeface="Consolas"/>
-              <a:ea typeface="Consolas"/>
-              <a:cs typeface="Consolas"/>
-              <a:sym typeface="Consolas"/>
-            </a:endParaRPr>
-          </a:p>
-          <a:p>
-            <a:pPr indent="0" lvl="0" marL="0" rtl="0" algn="l">
-              <a:lnSpc>
-                <a:spcPct val="157500"/>
-              </a:lnSpc>
-              <a:spcBef>
-                <a:spcPts val="0"/>
-              </a:spcBef>
-              <a:spcAft>
-                <a:spcPts val="0"/>
-              </a:spcAft>
-              <a:buNone/>
-            </a:pPr>
-            <a:r>
-              <a:rPr lang="en" sz="1000">
-                <a:solidFill>
-                  <a:srgbClr val="CCCCCC"/>
-                </a:solidFill>
-                <a:highlight>
-                  <a:srgbClr val="1F1F1F"/>
-                </a:highlight>
-                <a:latin typeface="Consolas"/>
-                <a:ea typeface="Consolas"/>
-                <a:cs typeface="Consolas"/>
-                <a:sym typeface="Consolas"/>
-              </a:rPr>
-              <a:t>}</a:t>
-            </a:r>
-            <a:endParaRPr/>
-          </a:p>
-        </p:txBody>
-      </p:sp>
-      <p:pic>
-        <p:nvPicPr>
-          <p:cNvPr id="265" name="Google Shape;265;p46"/>
-          <p:cNvPicPr preferRelativeResize="0"/>
-          <p:nvPr/>
-        </p:nvPicPr>
-        <p:blipFill>
-          <a:blip r:embed="rId3">
-            <a:alphaModFix/>
-          </a:blip>
-          <a:stretch>
-            <a:fillRect/>
-          </a:stretch>
-        </p:blipFill>
-        <p:spPr>
-          <a:xfrm>
-            <a:off x="160900" y="1463690"/>
-            <a:ext cx="4129126" cy="2784759"/>
-          </a:xfrm>
-          <a:prstGeom prst="rect">
-            <a:avLst/>
-          </a:prstGeom>
-          <a:noFill/>
-          <a:ln>
-            <a:noFill/>
-          </a:ln>
-        </p:spPr>
-      </p:pic>
-    </p:spTree>
-  </p:cSld>
-  <p:clrMapOvr>
-    <a:masterClrMapping/>
-  </p:clrMapOvr>
-</p:sld>
-</file>
-
-<file path=ppt/slides/slide41.xml><?xml version="1.0" encoding="utf-8"?>
-<p:sld xmlns:a="http://schemas.openxmlformats.org/drawingml/2006/main" xmlns:r="http://schemas.openxmlformats.org/officeDocument/2006/relationships" xmlns:mc="http://schemas.openxmlformats.org/markup-compatibility/2006" xmlns:mv="urn:schemas-microsoft-com:mac:vml" xmlns:p="http://schemas.openxmlformats.org/presentationml/2006/main" xmlns:c="http://schemas.openxmlformats.org/drawingml/2006/chart" xmlns:dgm="http://schemas.openxmlformats.org/drawingml/2006/diagram" xmlns:o="urn:schemas-microsoft-com:office:office" xmlns:v="urn:schemas-microsoft-com:vml" xmlns:pvml="urn:schemas-microsoft-com:office:powerpoint" xmlns:com="http://schemas.openxmlformats.org/drawingml/2006/compatibility" xmlns:p14="http://schemas.microsoft.com/office/powerpoint/2010/main" xmlns:p15="http://schemas.microsoft.com/office/powerpoint/2012/main" xmlns:ahyp="http://schemas.microsoft.com/office/drawing/2018/hyperlinkcolor">
-  <p:cSld>
-    <p:spTree>
-      <p:nvGrpSpPr>
         <p:cNvPr id="269" name="Shape 269"/>
         <p:cNvGrpSpPr/>
         <p:nvPr/>
@@ -26888,7 +26420,7 @@
 </p:sld>
 </file>
 
-<file path=ppt/slides/slide42.xml><?xml version="1.0" encoding="utf-8"?>
+<file path=ppt/slides/slide41.xml><?xml version="1.0" encoding="utf-8"?>
 <p:sld xmlns:a="http://schemas.openxmlformats.org/drawingml/2006/main" xmlns:p="http://schemas.openxmlformats.org/presentationml/2006/main" xmlns:r="http://schemas.openxmlformats.org/officeDocument/2006/relationships">
   <p:cSld>
     <p:spTree>
@@ -27607,7 +27139,7 @@
 </p:sld>
 </file>
 
-<file path=ppt/slides/slide43.xml><?xml version="1.0" encoding="utf-8"?>
+<file path=ppt/slides/slide42.xml><?xml version="1.0" encoding="utf-8"?>
 <p:sld xmlns:a="http://schemas.openxmlformats.org/drawingml/2006/main" xmlns:p="http://schemas.openxmlformats.org/presentationml/2006/main" xmlns:r="http://schemas.openxmlformats.org/officeDocument/2006/relationships">
   <p:cSld>
     <p:spTree>
@@ -27763,7 +27295,7 @@
 </p:sld>
 </file>
 
-<file path=ppt/slides/slide44.xml><?xml version="1.0" encoding="utf-8"?>
+<file path=ppt/slides/slide43.xml><?xml version="1.0" encoding="utf-8"?>
 <p:sld xmlns:a="http://schemas.openxmlformats.org/drawingml/2006/main" xmlns:p="http://schemas.openxmlformats.org/presentationml/2006/main" xmlns:r="http://schemas.openxmlformats.org/officeDocument/2006/relationships">
   <p:cSld>
     <p:spTree>
@@ -27905,80 +27437,6 @@
           </a:p>
         </p:txBody>
       </p:sp>
-    </p:spTree>
-  </p:cSld>
-  <p:clrMapOvr>
-    <a:masterClrMapping/>
-  </p:clrMapOvr>
-</p:sld>
-</file>
-
-<file path=ppt/slides/slide45.xml><?xml version="1.0" encoding="utf-8"?>
-<p:sld xmlns:a="http://schemas.openxmlformats.org/drawingml/2006/main" xmlns:p="http://schemas.openxmlformats.org/presentationml/2006/main" xmlns:r="http://schemas.openxmlformats.org/officeDocument/2006/relationships">
-  <p:cSld>
-    <p:spTree>
-      <p:nvGrpSpPr>
-        <p:cNvPr id="1" name=""/>
-        <p:cNvGrpSpPr/>
-        <p:nvPr/>
-      </p:nvGrpSpPr>
-      <p:grpSpPr/>
-      <p:sp>
-        <p:nvSpPr>
-          <p:cNvPr id="2" name="Title 1"/>
-          <p:cNvSpPr>
-            <a:spLocks noGrp="1"/>
-          </p:cNvSpPr>
-          <p:nvPr>
-            <p:ph type="title"/>
-          </p:nvPr>
-        </p:nvSpPr>
-        <p:spPr/>
-        <p:txBody>
-          <a:bodyPr/>
-          <a:lstStyle/>
-          <a:p>
-            <a:pPr indent="0" lvl="0" marL="0" rtl="0" algn="l">
-              <a:spcBef>
-                <a:spcPts val="0"/>
-              </a:spcBef>
-              <a:spcAft>
-                <a:spcPts val="0"/>
-              </a:spcAft>
-              <a:buNone/>
-            </a:pPr>
-            <a:r>
-              <a:rPr lang="en"/>
-              <a:t>Gravity</a:t>
-            </a:r>
-            <a:endParaRPr/>
-          </a:p>
-        </p:txBody>
-      </p:sp>
-      <p:pic>
-        <p:nvPicPr>
-          <p:cNvPr id="3" name="Picture 2" descr="gravity.png"/>
-          <p:cNvPicPr>
-            <a:picLocks noChangeAspect="1"/>
-          </p:cNvPicPr>
-          <p:nvPr/>
-        </p:nvPicPr>
-        <p:blipFill>
-          <a:blip r:embed="rId2"/>
-          <a:stretch>
-            <a:fillRect/>
-          </a:stretch>
-        </p:blipFill>
-        <p:spPr>
-          <a:xfrm>
-            <a:off x="360381" y="1051560"/>
-            <a:ext cx="8423237" cy="3977640"/>
-          </a:xfrm>
-          <a:prstGeom prst="rect">
-            <a:avLst/>
-          </a:prstGeom>
-        </p:spPr>
-      </p:pic>
     </p:spTree>
   </p:cSld>
   <p:clrMapOvr>
@@ -28455,30 +27913,26 @@
       </p:grpSpPr>
       <p:pic>
         <p:nvPicPr>
-          <p:cNvPr id="63" name="Google Shape;63;p13"/>
-          <p:cNvPicPr preferRelativeResize="0"/>
+          <p:cNvPr id="63" name="Picture 62" descr="change-cycle.png"/>
+          <p:cNvPicPr>
+            <a:picLocks noChangeAspect="1"/>
+          </p:cNvPicPr>
           <p:nvPr/>
         </p:nvPicPr>
         <p:blipFill>
-          <a:blip r:embed="rId3">
-            <a:alphaModFix/>
-          </a:blip>
+          <a:blip r:embed="rId4"/>
           <a:stretch>
             <a:fillRect/>
           </a:stretch>
         </p:blipFill>
         <p:spPr>
           <a:xfrm>
-            <a:off x="1267375" y="792336"/>
-            <a:ext cx="6609249" cy="3558825"/>
+            <a:off x="320039" y="457200"/>
+            <a:ext cx="8503920" cy="3897630"/>
           </a:xfrm>
           <a:prstGeom prst="rect">
             <a:avLst/>
           </a:prstGeom>
-          <a:noFill/>
-          <a:ln>
-            <a:noFill/>
-          </a:ln>
         </p:spPr>
       </p:pic>
     </p:spTree>
@@ -28635,34 +28089,74 @@
           </a:p>
         </p:txBody>
       </p:sp>
-      <p:pic>
-        <p:nvPicPr>
-          <p:cNvPr id="75" name="Google Shape;75;p15"/>
-          <p:cNvPicPr preferRelativeResize="0"/>
+      <p:sp>
+        <p:nvSpPr>
+          <p:cNvPr id="75" name="TextBox 74"/>
+          <p:cNvSpPr txBox="1"/>
           <p:nvPr/>
-        </p:nvPicPr>
-        <p:blipFill>
-          <a:blip r:embed="rId3">
-            <a:alphaModFix/>
-          </a:blip>
-          <a:stretch>
-            <a:fillRect/>
-          </a:stretch>
-        </p:blipFill>
+        </p:nvSpPr>
         <p:spPr>
           <a:xfrm>
-            <a:off x="1726622" y="1383898"/>
-            <a:ext cx="5690752" cy="3203824"/>
+            <a:off x="457200" y="2011680"/>
+            <a:ext cx="8229600" cy="457200"/>
           </a:xfrm>
           <a:prstGeom prst="rect">
             <a:avLst/>
           </a:prstGeom>
           <a:noFill/>
-          <a:ln>
-            <a:noFill/>
-          </a:ln>
         </p:spPr>
-      </p:pic>
+        <p:txBody>
+          <a:bodyPr wrap="square">
+            <a:spAutoFit/>
+          </a:bodyPr>
+          <a:lstStyle/>
+          <a:p>
+            <a:pPr algn="ctr"/>
+            <a:r>
+              <a:rPr sz="2200" b="0" i="0">
+                <a:solidFill>
+                  <a:srgbClr val="DEE2E6"/>
+                </a:solidFill>
+              </a:rPr>
+              <a:t>Named, reusable solutions to recurring design problems</a:t>
+            </a:r>
+          </a:p>
+        </p:txBody>
+      </p:sp>
+      <p:sp>
+        <p:nvSpPr>
+          <p:cNvPr id="76" name="TextBox 75"/>
+          <p:cNvSpPr txBox="1"/>
+          <p:nvPr/>
+        </p:nvSpPr>
+        <p:spPr>
+          <a:xfrm>
+            <a:off x="457200" y="2651760"/>
+            <a:ext cx="8229600" cy="457200"/>
+          </a:xfrm>
+          <a:prstGeom prst="rect">
+            <a:avLst/>
+          </a:prstGeom>
+          <a:noFill/>
+        </p:spPr>
+        <p:txBody>
+          <a:bodyPr wrap="square">
+            <a:spAutoFit/>
+          </a:bodyPr>
+          <a:lstStyle/>
+          <a:p>
+            <a:pPr algn="ctr"/>
+            <a:r>
+              <a:rPr sz="1800" b="0" i="0">
+                <a:solidFill>
+                  <a:srgbClr val="9AA3AB"/>
+                </a:solidFill>
+              </a:rPr>
+              <a:t>A shared vocabulary for talking about code</a:t>
+            </a:r>
+          </a:p>
+        </p:txBody>
+      </p:sp>
     </p:spTree>
   </p:cSld>
   <p:clrMapOvr>

--- a/slides/02 Flappy Bird.pptx
+++ b/slides/02 Flappy Bird.pptx
@@ -10565,11 +10565,7 @@
             </a:pPr>
             <a:r>
               <a:rPr lang="en"/>
-              <a:t>Illusion of movement </a:t>
-            </a:r>
-            <a:r>
-              <a:rPr lang="en"/>
-              <a:t>given two frames of reference that are moving at different rates</a:t>
+              <a:t>Layers that scroll at different speeds look as if they are at different distances</a:t>
             </a:r>
             <a:endParaRPr/>
           </a:p>
@@ -16920,7 +16916,7 @@
             </a:pPr>
             <a:r>
               <a:rPr lang="en"/>
-              <a:t>Flappy Bird State Machine</a:t>
+              <a:t>The States of the Game</a:t>
             </a:r>
             <a:endParaRPr/>
           </a:p>

--- a/slides/02 Flappy Bird.pptx
+++ b/slides/02 Flappy Bird.pptx
@@ -46,6 +46,7 @@
     <p:sldId id="290" r:id="rId40"/>
     <p:sldId id="291" r:id="rId41"/>
     <p:sldId id="292" r:id="rId42"/>
+    <p:sldId id="305" r:id="rId22"/>
     <p:sldId id="293" r:id="rId43"/>
     <p:sldId id="294" r:id="rId44"/>
     <p:sldId id="295" r:id="rId54"/>
@@ -1363,6 +1364,69 @@
           <a:p>
             <a:r>
               <a:t>- Flappy2: both scrolling, looping with %</a:t>
+            </a:r>
+          </a:p>
+        </p:txBody>
+      </p:sp>
+    </p:spTree>
+  </p:cSld>
+  <p:clrMapOvr>
+    <a:masterClrMapping/>
+  </p:clrMapOvr>
+</p:notes>
+</file>
+
+<file path=ppt/notesSlides/notesSlide17.xml><?xml version="1.0" encoding="utf-8"?>
+<p:notes xmlns:a="http://schemas.openxmlformats.org/drawingml/2006/main" xmlns:p="http://schemas.openxmlformats.org/presentationml/2006/main" xmlns:r="http://schemas.openxmlformats.org/officeDocument/2006/relationships">
+  <p:cSld>
+    <p:spTree>
+      <p:nvGrpSpPr>
+        <p:cNvPr id="1" name=""/>
+        <p:cNvGrpSpPr/>
+        <p:nvPr/>
+      </p:nvGrpSpPr>
+      <p:grpSpPr>
+        <a:xfrm>
+          <a:off x="0" y="0"/>
+          <a:ext cx="0" cy="0"/>
+          <a:chOff x="0" y="0"/>
+          <a:chExt cx="0" cy="0"/>
+        </a:xfrm>
+      </p:grpSpPr>
+      <p:sp>
+        <p:nvSpPr>
+          <p:cNvPr id="2" name="Slide Image Placeholder 1"/>
+          <p:cNvSpPr>
+            <a:spLocks noGrp="1"/>
+          </p:cNvSpPr>
+          <p:nvPr>
+            <p:ph type="sldImg" idx="2"/>
+          </p:nvPr>
+        </p:nvSpPr>
+        <p:spPr/>
+      </p:sp>
+      <p:sp>
+        <p:nvSpPr>
+          <p:cNvPr id="3" name="Notes Placeholder 2"/>
+          <p:cNvSpPr>
+            <a:spLocks noGrp="1"/>
+          </p:cNvSpPr>
+          <p:nvPr>
+            <p:ph type="body" idx="1"/>
+          </p:nvPr>
+        </p:nvSpPr>
+        <p:spPr/>
+        <p:txBody>
+          <a:bodyPr/>
+          <a:lstStyle/>
+          <a:p>
+            <a:r>
+              <a:t>Every class on the left reaches the same Audio object through Audio.Instance.</a:t>
+            </a:r>
+          </a:p>
+          <a:p>
+            <a:r>
+              <a:t>Ask: which of these classes depend on Audio, judging by their constructors? Answer: you cannot tell, and that is the cost.</a:t>
             </a:r>
           </a:p>
         </p:txBody>
@@ -10580,7 +10644,7 @@
           <p:nvPr/>
         </p:nvPicPr>
         <p:blipFill>
-          <a:blip r:embed="rId4"/>
+          <a:blip r:embed="rId3"/>
           <a:stretch>
             <a:fillRect/>
           </a:stretch>
@@ -24537,30 +24601,6 @@
           </a:p>
         </p:txBody>
       </p:sp>
-      <p:pic>
-        <p:nvPicPr>
-          <p:cNvPr id="257" name="Picture 256" descr="singleton.png"/>
-          <p:cNvPicPr>
-            <a:picLocks noChangeAspect="1"/>
-          </p:cNvPicPr>
-          <p:nvPr/>
-        </p:nvPicPr>
-        <p:blipFill>
-          <a:blip r:embed="rId5"/>
-          <a:stretch>
-            <a:fillRect/>
-          </a:stretch>
-        </p:blipFill>
-        <p:spPr>
-          <a:xfrm>
-            <a:off x="1280160" y="2103120"/>
-            <a:ext cx="6583680" cy="2926080"/>
-          </a:xfrm>
-          <a:prstGeom prst="rect">
-            <a:avLst/>
-          </a:prstGeom>
-        </p:spPr>
-      </p:pic>
     </p:spTree>
   </p:cSld>
   <p:clrMapOvr>
@@ -27433,6 +27473,80 @@
           </a:p>
         </p:txBody>
       </p:sp>
+    </p:spTree>
+  </p:cSld>
+  <p:clrMapOvr>
+    <a:masterClrMapping/>
+  </p:clrMapOvr>
+</p:sld>
+</file>
+
+<file path=ppt/slides/slide44.xml><?xml version="1.0" encoding="utf-8"?>
+<p:sld xmlns:a="http://schemas.openxmlformats.org/drawingml/2006/main" xmlns:p="http://schemas.openxmlformats.org/presentationml/2006/main" xmlns:r="http://schemas.openxmlformats.org/officeDocument/2006/relationships">
+  <p:cSld>
+    <p:spTree>
+      <p:nvGrpSpPr>
+        <p:cNvPr id="1" name=""/>
+        <p:cNvGrpSpPr/>
+        <p:nvPr/>
+      </p:nvGrpSpPr>
+      <p:grpSpPr/>
+      <p:sp>
+        <p:nvSpPr>
+          <p:cNvPr id="2" name="Title 1"/>
+          <p:cNvSpPr>
+            <a:spLocks noGrp="1"/>
+          </p:cNvSpPr>
+          <p:nvPr>
+            <p:ph type="title"/>
+          </p:nvPr>
+        </p:nvSpPr>
+        <p:spPr/>
+        <p:txBody>
+          <a:bodyPr/>
+          <a:lstStyle/>
+          <a:p>
+            <a:pPr indent="0" lvl="0" marL="0" rtl="0" algn="l">
+              <a:spcBef>
+                <a:spcPts val="0"/>
+              </a:spcBef>
+              <a:spcAft>
+                <a:spcPts val="0"/>
+              </a:spcAft>
+              <a:buNone/>
+            </a:pPr>
+            <a:r>
+              <a:rPr lang="en"/>
+              <a:t>One Instance, Reached From Anywhere</a:t>
+            </a:r>
+            <a:endParaRPr/>
+          </a:p>
+        </p:txBody>
+      </p:sp>
+      <p:pic>
+        <p:nvPicPr>
+          <p:cNvPr id="3" name="Picture 2" descr="image.png"/>
+          <p:cNvPicPr>
+            <a:picLocks noChangeAspect="1"/>
+          </p:cNvPicPr>
+          <p:nvPr/>
+        </p:nvPicPr>
+        <p:blipFill>
+          <a:blip r:embed="rId2"/>
+          <a:stretch>
+            <a:fillRect/>
+          </a:stretch>
+        </p:blipFill>
+        <p:spPr>
+          <a:xfrm>
+            <a:off x="320039" y="1051560"/>
+            <a:ext cx="8503920" cy="3779520"/>
+          </a:xfrm>
+          <a:prstGeom prst="rect">
+            <a:avLst/>
+          </a:prstGeom>
+        </p:spPr>
+      </p:pic>
     </p:spTree>
   </p:cSld>
   <p:clrMapOvr>

--- a/slides/02 Flappy Bird.pptx
+++ b/slides/02 Flappy Bird.pptx
@@ -22031,6 +22031,23 @@
             <a:r>
               <a:rPr lang="en"/>
               <a:t>Most of Game1’s gameplay code moves into the play state.</a:t>
+            </a:r>
+            <a:endParaRPr/>
+          </a:p>
+          <a:p>
+            <a:pPr indent="-330200" lvl="0" marL="457200" rtl="0" algn="l">
+              <a:spcBef>
+                <a:spcPts val="0"/>
+              </a:spcBef>
+              <a:spcAft>
+                <a:spcPts val="0"/>
+              </a:spcAft>
+              <a:buSzPts val="1600"/>
+              <a:buChar char="●"/>
+            </a:pPr>
+            <a:r>
+              <a:rPr lang="en"/>
+              <a:t>What goes in Enter, and why not in the constructor?</a:t>
             </a:r>
             <a:endParaRPr/>
           </a:p>
@@ -23800,6 +23817,23 @@
             </a:r>
             <a:endParaRPr/>
           </a:p>
+          <a:p>
+            <a:pPr indent="-330200" lvl="0" marL="457200" rtl="0" algn="l">
+              <a:spcBef>
+                <a:spcPts val="0"/>
+              </a:spcBef>
+              <a:spcAft>
+                <a:spcPts val="0"/>
+              </a:spcAft>
+              <a:buSzPts val="1600"/>
+              <a:buChar char="●"/>
+            </a:pPr>
+            <a:r>
+              <a:rPr lang="en"/>
+              <a:t>Which classes use Audio? Do their constructors show it?</a:t>
+            </a:r>
+            <a:endParaRPr/>
+          </a:p>
         </p:txBody>
       </p:sp>
       <p:sp>
@@ -24610,1047 +24644,71 @@
 </file>
 
 <file path=ppt/slides/slide39.xml><?xml version="1.0" encoding="utf-8"?>
-<p:sld xmlns:a="http://schemas.openxmlformats.org/drawingml/2006/main" xmlns:r="http://schemas.openxmlformats.org/officeDocument/2006/relationships" xmlns:mc="http://schemas.openxmlformats.org/markup-compatibility/2006" xmlns:mv="urn:schemas-microsoft-com:mac:vml" xmlns:p="http://schemas.openxmlformats.org/presentationml/2006/main" xmlns:c="http://schemas.openxmlformats.org/drawingml/2006/chart" xmlns:dgm="http://schemas.openxmlformats.org/drawingml/2006/diagram" xmlns:o="urn:schemas-microsoft-com:office:office" xmlns:v="urn:schemas-microsoft-com:vml" xmlns:pvml="urn:schemas-microsoft-com:office:powerpoint" xmlns:com="http://schemas.openxmlformats.org/drawingml/2006/compatibility" xmlns:p14="http://schemas.microsoft.com/office/powerpoint/2010/main" xmlns:p15="http://schemas.microsoft.com/office/powerpoint/2012/main" xmlns:ahyp="http://schemas.microsoft.com/office/drawing/2018/hyperlinkcolor">
+<p:sld xmlns:a="http://schemas.openxmlformats.org/drawingml/2006/main" xmlns:p="http://schemas.openxmlformats.org/presentationml/2006/main" xmlns:r="http://schemas.openxmlformats.org/officeDocument/2006/relationships">
   <p:cSld>
     <p:spTree>
       <p:nvGrpSpPr>
-        <p:cNvPr id="262" name="Shape 262"/>
+        <p:cNvPr id="1" name=""/>
         <p:cNvGrpSpPr/>
         <p:nvPr/>
       </p:nvGrpSpPr>
-      <p:grpSpPr>
-        <a:xfrm>
-          <a:off x="0" y="0"/>
-          <a:ext cx="0" cy="0"/>
-          <a:chOff x="0" y="0"/>
-          <a:chExt cx="0" cy="0"/>
-        </a:xfrm>
-      </p:grpSpPr>
+      <p:grpSpPr/>
       <p:sp>
         <p:nvSpPr>
-          <p:cNvPr id="263" name="Google Shape;263;p46"/>
-          <p:cNvSpPr txBox="1"/>
+          <p:cNvPr id="2" name="Title 1"/>
+          <p:cNvSpPr>
+            <a:spLocks noGrp="1"/>
+          </p:cNvSpPr>
           <p:nvPr>
             <p:ph type="title"/>
           </p:nvPr>
         </p:nvSpPr>
+        <p:spPr/>
+        <p:txBody>
+          <a:bodyPr/>
+          <a:lstStyle/>
+          <a:p>
+            <a:pPr indent="0" lvl="0" marL="0" rtl="0" algn="l">
+              <a:spcBef>
+                <a:spcPts val="0"/>
+              </a:spcBef>
+              <a:spcAft>
+                <a:spcPts val="0"/>
+              </a:spcAft>
+              <a:buNone/>
+            </a:pPr>
+            <a:r>
+              <a:rPr lang="en"/>
+              <a:t>One Instance, Reached From Anywhere</a:t>
+            </a:r>
+            <a:endParaRPr/>
+          </a:p>
+        </p:txBody>
+      </p:sp>
+      <p:pic>
+        <p:nvPicPr>
+          <p:cNvPr id="3" name="Picture 2" descr="image.png"/>
+          <p:cNvPicPr>
+            <a:picLocks noChangeAspect="1"/>
+          </p:cNvPicPr>
+          <p:nvPr/>
+        </p:nvPicPr>
+        <p:blipFill>
+          <a:blip r:embed="rId2"/>
+          <a:stretch>
+            <a:fillRect/>
+          </a:stretch>
+        </p:blipFill>
         <p:spPr>
           <a:xfrm>
-            <a:off x="311700" y="195615"/>
-            <a:ext cx="8520600" cy="572700"/>
+            <a:off x="320039" y="1051560"/>
+            <a:ext cx="8503920" cy="3779520"/>
           </a:xfrm>
           <a:prstGeom prst="rect">
             <a:avLst/>
           </a:prstGeom>
         </p:spPr>
-        <p:txBody>
-          <a:bodyPr anchorCtr="0" anchor="t" bIns="91425" lIns="91425" spcFirstLastPara="1" rIns="91425" wrap="square" tIns="91425">
-            <a:normAutofit fontScale="90000"/>
-          </a:bodyPr>
-          <a:lstStyle/>
-          <a:p>
-            <a:pPr indent="0" lvl="0" marL="0" rtl="0" algn="l">
-              <a:spcBef>
-                <a:spcPts val="0"/>
-              </a:spcBef>
-              <a:spcAft>
-                <a:spcPts val="0"/>
-              </a:spcAft>
-              <a:buNone/>
-            </a:pPr>
-            <a:r>
-              <a:rPr lang="en"/>
-              <a:t>Singleton Pattern: Solution</a:t>
-            </a:r>
-            <a:endParaRPr/>
-          </a:p>
-        </p:txBody>
-      </p:sp>
-      <p:sp>
-        <p:nvSpPr>
-          <p:cNvPr id="264" name="Google Shape;264;p46"/>
-          <p:cNvSpPr txBox="1"/>
-          <p:nvPr>
-            <p:ph idx="2" type="body"/>
-          </p:nvPr>
-        </p:nvSpPr>
-        <p:spPr>
-          <a:xfrm>
-            <a:off x="4433925" y="1353675"/>
-            <a:ext cx="3999900" cy="3004800"/>
-          </a:xfrm>
-          <a:prstGeom prst="rect">
-            <a:avLst/>
-          </a:prstGeom>
-        </p:spPr>
-        <p:txBody>
-          <a:bodyPr anchorCtr="0" anchor="t" bIns="91425" lIns="91425" spcFirstLastPara="1" rIns="91425" wrap="square" tIns="91425">
-            <a:noAutofit/>
-          </a:bodyPr>
-          <a:lstStyle/>
-          <a:p>
-            <a:pPr indent="0" lvl="0" marL="0" rtl="0" algn="l">
-              <a:lnSpc>
-                <a:spcPct val="157500"/>
-              </a:lnSpc>
-              <a:spcBef>
-                <a:spcPts val="0"/>
-              </a:spcBef>
-              <a:spcAft>
-                <a:spcPts val="0"/>
-              </a:spcAft>
-              <a:buNone/>
-            </a:pPr>
-            <a:r>
-              <a:rPr lang="en" sz="1000">
-                <a:solidFill>
-                  <a:srgbClr val="569CD6"/>
-                </a:solidFill>
-                <a:highlight>
-                  <a:srgbClr val="1F1F1F"/>
-                </a:highlight>
-                <a:latin typeface="Consolas"/>
-                <a:ea typeface="Consolas"/>
-                <a:cs typeface="Consolas"/>
-                <a:sym typeface="Consolas"/>
-              </a:rPr>
-              <a:t>public</a:t>
-            </a:r>
-            <a:r>
-              <a:rPr lang="en" sz="1000">
-                <a:solidFill>
-                  <a:srgbClr val="CCCCCC"/>
-                </a:solidFill>
-                <a:highlight>
-                  <a:srgbClr val="1F1F1F"/>
-                </a:highlight>
-                <a:latin typeface="Consolas"/>
-                <a:ea typeface="Consolas"/>
-                <a:cs typeface="Consolas"/>
-                <a:sym typeface="Consolas"/>
-              </a:rPr>
-              <a:t> </a:t>
-            </a:r>
-            <a:r>
-              <a:rPr lang="en" sz="1000">
-                <a:solidFill>
-                  <a:srgbClr val="569CD6"/>
-                </a:solidFill>
-                <a:highlight>
-                  <a:srgbClr val="1F1F1F"/>
-                </a:highlight>
-                <a:latin typeface="Consolas"/>
-                <a:ea typeface="Consolas"/>
-                <a:cs typeface="Consolas"/>
-                <a:sym typeface="Consolas"/>
-              </a:rPr>
-              <a:t>class</a:t>
-            </a:r>
-            <a:r>
-              <a:rPr lang="en" sz="1000">
-                <a:solidFill>
-                  <a:srgbClr val="CCCCCC"/>
-                </a:solidFill>
-                <a:highlight>
-                  <a:srgbClr val="1F1F1F"/>
-                </a:highlight>
-                <a:latin typeface="Consolas"/>
-                <a:ea typeface="Consolas"/>
-                <a:cs typeface="Consolas"/>
-                <a:sym typeface="Consolas"/>
-              </a:rPr>
-              <a:t> </a:t>
-            </a:r>
-            <a:r>
-              <a:rPr lang="en" sz="1000">
-                <a:solidFill>
-                  <a:srgbClr val="4EC9B0"/>
-                </a:solidFill>
-                <a:highlight>
-                  <a:srgbClr val="1F1F1F"/>
-                </a:highlight>
-                <a:latin typeface="Consolas"/>
-                <a:ea typeface="Consolas"/>
-                <a:cs typeface="Consolas"/>
-                <a:sym typeface="Consolas"/>
-              </a:rPr>
-              <a:t>Singleton</a:t>
-            </a:r>
-            <a:endParaRPr sz="1000">
-              <a:solidFill>
-                <a:srgbClr val="4EC9B0"/>
-              </a:solidFill>
-              <a:highlight>
-                <a:srgbClr val="1F1F1F"/>
-              </a:highlight>
-              <a:latin typeface="Consolas"/>
-              <a:ea typeface="Consolas"/>
-              <a:cs typeface="Consolas"/>
-              <a:sym typeface="Consolas"/>
-            </a:endParaRPr>
-          </a:p>
-          <a:p>
-            <a:pPr indent="0" lvl="0" marL="0" rtl="0" algn="l">
-              <a:lnSpc>
-                <a:spcPct val="157500"/>
-              </a:lnSpc>
-              <a:spcBef>
-                <a:spcPts val="0"/>
-              </a:spcBef>
-              <a:spcAft>
-                <a:spcPts val="0"/>
-              </a:spcAft>
-              <a:buNone/>
-            </a:pPr>
-            <a:r>
-              <a:rPr lang="en" sz="1000">
-                <a:solidFill>
-                  <a:srgbClr val="CCCCCC"/>
-                </a:solidFill>
-                <a:highlight>
-                  <a:srgbClr val="1F1F1F"/>
-                </a:highlight>
-                <a:latin typeface="Consolas"/>
-                <a:ea typeface="Consolas"/>
-                <a:cs typeface="Consolas"/>
-                <a:sym typeface="Consolas"/>
-              </a:rPr>
-              <a:t>{</a:t>
-            </a:r>
-            <a:endParaRPr sz="1000">
-              <a:solidFill>
-                <a:srgbClr val="CCCCCC"/>
-              </a:solidFill>
-              <a:highlight>
-                <a:srgbClr val="1F1F1F"/>
-              </a:highlight>
-              <a:latin typeface="Consolas"/>
-              <a:ea typeface="Consolas"/>
-              <a:cs typeface="Consolas"/>
-              <a:sym typeface="Consolas"/>
-            </a:endParaRPr>
-          </a:p>
-          <a:p>
-            <a:pPr indent="0" lvl="0" marL="0" rtl="0" algn="l">
-              <a:lnSpc>
-                <a:spcPct val="157500"/>
-              </a:lnSpc>
-              <a:spcBef>
-                <a:spcPts val="0"/>
-              </a:spcBef>
-              <a:spcAft>
-                <a:spcPts val="0"/>
-              </a:spcAft>
-              <a:buNone/>
-            </a:pPr>
-            <a:r>
-              <a:rPr lang="en" sz="1000">
-                <a:solidFill>
-                  <a:srgbClr val="CCCCCC"/>
-                </a:solidFill>
-                <a:highlight>
-                  <a:srgbClr val="1F1F1F"/>
-                </a:highlight>
-                <a:latin typeface="Consolas"/>
-                <a:ea typeface="Consolas"/>
-                <a:cs typeface="Consolas"/>
-                <a:sym typeface="Consolas"/>
-              </a:rPr>
-              <a:t>    </a:t>
-            </a:r>
-            <a:r>
-              <a:rPr lang="en" sz="1000">
-                <a:solidFill>
-                  <a:srgbClr val="569CD6"/>
-                </a:solidFill>
-                <a:highlight>
-                  <a:srgbClr val="1F1F1F"/>
-                </a:highlight>
-                <a:latin typeface="Consolas"/>
-                <a:ea typeface="Consolas"/>
-                <a:cs typeface="Consolas"/>
-                <a:sym typeface="Consolas"/>
-              </a:rPr>
-              <a:t>private</a:t>
-            </a:r>
-            <a:r>
-              <a:rPr lang="en" sz="1000">
-                <a:solidFill>
-                  <a:srgbClr val="CCCCCC"/>
-                </a:solidFill>
-                <a:highlight>
-                  <a:srgbClr val="1F1F1F"/>
-                </a:highlight>
-                <a:latin typeface="Consolas"/>
-                <a:ea typeface="Consolas"/>
-                <a:cs typeface="Consolas"/>
-                <a:sym typeface="Consolas"/>
-              </a:rPr>
-              <a:t> </a:t>
-            </a:r>
-            <a:r>
-              <a:rPr lang="en" sz="1000">
-                <a:solidFill>
-                  <a:srgbClr val="569CD6"/>
-                </a:solidFill>
-                <a:highlight>
-                  <a:srgbClr val="1F1F1F"/>
-                </a:highlight>
-                <a:latin typeface="Consolas"/>
-                <a:ea typeface="Consolas"/>
-                <a:cs typeface="Consolas"/>
-                <a:sym typeface="Consolas"/>
-              </a:rPr>
-              <a:t>static</a:t>
-            </a:r>
-            <a:r>
-              <a:rPr lang="en" sz="1000">
-                <a:solidFill>
-                  <a:srgbClr val="CCCCCC"/>
-                </a:solidFill>
-                <a:highlight>
-                  <a:srgbClr val="1F1F1F"/>
-                </a:highlight>
-                <a:latin typeface="Consolas"/>
-                <a:ea typeface="Consolas"/>
-                <a:cs typeface="Consolas"/>
-                <a:sym typeface="Consolas"/>
-              </a:rPr>
-              <a:t> </a:t>
-            </a:r>
-            <a:r>
-              <a:rPr lang="en" sz="1000">
-                <a:solidFill>
-                  <a:srgbClr val="4EC9B0"/>
-                </a:solidFill>
-                <a:highlight>
-                  <a:srgbClr val="1F1F1F"/>
-                </a:highlight>
-                <a:latin typeface="Consolas"/>
-                <a:ea typeface="Consolas"/>
-                <a:cs typeface="Consolas"/>
-                <a:sym typeface="Consolas"/>
-              </a:rPr>
-              <a:t>Singleton</a:t>
-            </a:r>
-            <a:r>
-              <a:rPr lang="en" sz="1000">
-                <a:solidFill>
-                  <a:srgbClr val="CCCCCC"/>
-                </a:solidFill>
-                <a:highlight>
-                  <a:srgbClr val="1F1F1F"/>
-                </a:highlight>
-                <a:latin typeface="Consolas"/>
-                <a:ea typeface="Consolas"/>
-                <a:cs typeface="Consolas"/>
-                <a:sym typeface="Consolas"/>
-              </a:rPr>
-              <a:t> </a:t>
-            </a:r>
-            <a:r>
-              <a:rPr lang="en" sz="1000">
-                <a:solidFill>
-                  <a:srgbClr val="9CDCFE"/>
-                </a:solidFill>
-                <a:highlight>
-                  <a:srgbClr val="1F1F1F"/>
-                </a:highlight>
-                <a:latin typeface="Consolas"/>
-                <a:ea typeface="Consolas"/>
-                <a:cs typeface="Consolas"/>
-                <a:sym typeface="Consolas"/>
-              </a:rPr>
-              <a:t>_instance</a:t>
-            </a:r>
-            <a:r>
-              <a:rPr lang="en" sz="1000">
-                <a:solidFill>
-                  <a:srgbClr val="CCCCCC"/>
-                </a:solidFill>
-                <a:highlight>
-                  <a:srgbClr val="1F1F1F"/>
-                </a:highlight>
-                <a:latin typeface="Consolas"/>
-                <a:ea typeface="Consolas"/>
-                <a:cs typeface="Consolas"/>
-                <a:sym typeface="Consolas"/>
-              </a:rPr>
-              <a:t>;</a:t>
-            </a:r>
-            <a:endParaRPr sz="1000">
-              <a:solidFill>
-                <a:srgbClr val="CCCCCC"/>
-              </a:solidFill>
-              <a:highlight>
-                <a:srgbClr val="1F1F1F"/>
-              </a:highlight>
-              <a:latin typeface="Consolas"/>
-              <a:ea typeface="Consolas"/>
-              <a:cs typeface="Consolas"/>
-              <a:sym typeface="Consolas"/>
-            </a:endParaRPr>
-          </a:p>
-          <a:p>
-            <a:pPr indent="0" lvl="0" marL="0" rtl="0" algn="l">
-              <a:lnSpc>
-                <a:spcPct val="157500"/>
-              </a:lnSpc>
-              <a:spcBef>
-                <a:spcPts val="0"/>
-              </a:spcBef>
-              <a:spcAft>
-                <a:spcPts val="0"/>
-              </a:spcAft>
-              <a:buNone/>
-            </a:pPr>
-            <a:r>
-              <a:rPr lang="en" sz="1000">
-                <a:solidFill>
-                  <a:srgbClr val="CCCCCC"/>
-                </a:solidFill>
-                <a:highlight>
-                  <a:srgbClr val="1F1F1F"/>
-                </a:highlight>
-                <a:latin typeface="Consolas"/>
-                <a:ea typeface="Consolas"/>
-                <a:cs typeface="Consolas"/>
-                <a:sym typeface="Consolas"/>
-              </a:rPr>
-              <a:t>    </a:t>
-            </a:r>
-            <a:r>
-              <a:rPr lang="en" sz="1000">
-                <a:solidFill>
-                  <a:srgbClr val="569CD6"/>
-                </a:solidFill>
-                <a:highlight>
-                  <a:srgbClr val="1F1F1F"/>
-                </a:highlight>
-                <a:latin typeface="Consolas"/>
-                <a:ea typeface="Consolas"/>
-                <a:cs typeface="Consolas"/>
-                <a:sym typeface="Consolas"/>
-              </a:rPr>
-              <a:t>public</a:t>
-            </a:r>
-            <a:r>
-              <a:rPr lang="en" sz="1000">
-                <a:solidFill>
-                  <a:srgbClr val="CCCCCC"/>
-                </a:solidFill>
-                <a:highlight>
-                  <a:srgbClr val="1F1F1F"/>
-                </a:highlight>
-                <a:latin typeface="Consolas"/>
-                <a:ea typeface="Consolas"/>
-                <a:cs typeface="Consolas"/>
-                <a:sym typeface="Consolas"/>
-              </a:rPr>
-              <a:t> </a:t>
-            </a:r>
-            <a:r>
-              <a:rPr lang="en" sz="1000">
-                <a:solidFill>
-                  <a:srgbClr val="569CD6"/>
-                </a:solidFill>
-                <a:highlight>
-                  <a:srgbClr val="1F1F1F"/>
-                </a:highlight>
-                <a:latin typeface="Consolas"/>
-                <a:ea typeface="Consolas"/>
-                <a:cs typeface="Consolas"/>
-                <a:sym typeface="Consolas"/>
-              </a:rPr>
-              <a:t>static</a:t>
-            </a:r>
-            <a:r>
-              <a:rPr lang="en" sz="1000">
-                <a:solidFill>
-                  <a:srgbClr val="CCCCCC"/>
-                </a:solidFill>
-                <a:highlight>
-                  <a:srgbClr val="1F1F1F"/>
-                </a:highlight>
-                <a:latin typeface="Consolas"/>
-                <a:ea typeface="Consolas"/>
-                <a:cs typeface="Consolas"/>
-                <a:sym typeface="Consolas"/>
-              </a:rPr>
-              <a:t> </a:t>
-            </a:r>
-            <a:r>
-              <a:rPr lang="en" sz="1000">
-                <a:solidFill>
-                  <a:srgbClr val="4EC9B0"/>
-                </a:solidFill>
-                <a:highlight>
-                  <a:srgbClr val="1F1F1F"/>
-                </a:highlight>
-                <a:latin typeface="Consolas"/>
-                <a:ea typeface="Consolas"/>
-                <a:cs typeface="Consolas"/>
-                <a:sym typeface="Consolas"/>
-              </a:rPr>
-              <a:t>Singleton</a:t>
-            </a:r>
-            <a:r>
-              <a:rPr lang="en" sz="1000">
-                <a:solidFill>
-                  <a:srgbClr val="CCCCCC"/>
-                </a:solidFill>
-                <a:highlight>
-                  <a:srgbClr val="1F1F1F"/>
-                </a:highlight>
-                <a:latin typeface="Consolas"/>
-                <a:ea typeface="Consolas"/>
-                <a:cs typeface="Consolas"/>
-                <a:sym typeface="Consolas"/>
-              </a:rPr>
-              <a:t> </a:t>
-            </a:r>
-            <a:r>
-              <a:rPr lang="en" sz="1000">
-                <a:solidFill>
-                  <a:srgbClr val="9CDCFE"/>
-                </a:solidFill>
-                <a:highlight>
-                  <a:srgbClr val="1F1F1F"/>
-                </a:highlight>
-                <a:latin typeface="Consolas"/>
-                <a:ea typeface="Consolas"/>
-                <a:cs typeface="Consolas"/>
-                <a:sym typeface="Consolas"/>
-              </a:rPr>
-              <a:t>Instance</a:t>
-            </a:r>
-            <a:endParaRPr sz="1000">
-              <a:solidFill>
-                <a:srgbClr val="9CDCFE"/>
-              </a:solidFill>
-              <a:highlight>
-                <a:srgbClr val="1F1F1F"/>
-              </a:highlight>
-              <a:latin typeface="Consolas"/>
-              <a:ea typeface="Consolas"/>
-              <a:cs typeface="Consolas"/>
-              <a:sym typeface="Consolas"/>
-            </a:endParaRPr>
-          </a:p>
-          <a:p>
-            <a:pPr indent="0" lvl="0" marL="0" rtl="0" algn="l">
-              <a:lnSpc>
-                <a:spcPct val="157500"/>
-              </a:lnSpc>
-              <a:spcBef>
-                <a:spcPts val="0"/>
-              </a:spcBef>
-              <a:spcAft>
-                <a:spcPts val="0"/>
-              </a:spcAft>
-              <a:buNone/>
-            </a:pPr>
-            <a:r>
-              <a:rPr lang="en" sz="1000">
-                <a:solidFill>
-                  <a:srgbClr val="CCCCCC"/>
-                </a:solidFill>
-                <a:highlight>
-                  <a:srgbClr val="1F1F1F"/>
-                </a:highlight>
-                <a:latin typeface="Consolas"/>
-                <a:ea typeface="Consolas"/>
-                <a:cs typeface="Consolas"/>
-                <a:sym typeface="Consolas"/>
-              </a:rPr>
-              <a:t>    {</a:t>
-            </a:r>
-            <a:endParaRPr sz="1000">
-              <a:solidFill>
-                <a:srgbClr val="CCCCCC"/>
-              </a:solidFill>
-              <a:highlight>
-                <a:srgbClr val="1F1F1F"/>
-              </a:highlight>
-              <a:latin typeface="Consolas"/>
-              <a:ea typeface="Consolas"/>
-              <a:cs typeface="Consolas"/>
-              <a:sym typeface="Consolas"/>
-            </a:endParaRPr>
-          </a:p>
-          <a:p>
-            <a:pPr indent="0" lvl="0" marL="0" rtl="0" algn="l">
-              <a:lnSpc>
-                <a:spcPct val="157500"/>
-              </a:lnSpc>
-              <a:spcBef>
-                <a:spcPts val="0"/>
-              </a:spcBef>
-              <a:spcAft>
-                <a:spcPts val="0"/>
-              </a:spcAft>
-              <a:buNone/>
-            </a:pPr>
-            <a:r>
-              <a:rPr lang="en" sz="1000">
-                <a:solidFill>
-                  <a:srgbClr val="CCCCCC"/>
-                </a:solidFill>
-                <a:highlight>
-                  <a:srgbClr val="1F1F1F"/>
-                </a:highlight>
-                <a:latin typeface="Consolas"/>
-                <a:ea typeface="Consolas"/>
-                <a:cs typeface="Consolas"/>
-                <a:sym typeface="Consolas"/>
-              </a:rPr>
-              <a:t>        </a:t>
-            </a:r>
-            <a:r>
-              <a:rPr lang="en" sz="1000">
-                <a:solidFill>
-                  <a:srgbClr val="569CD6"/>
-                </a:solidFill>
-                <a:highlight>
-                  <a:srgbClr val="1F1F1F"/>
-                </a:highlight>
-                <a:latin typeface="Consolas"/>
-                <a:ea typeface="Consolas"/>
-                <a:cs typeface="Consolas"/>
-                <a:sym typeface="Consolas"/>
-              </a:rPr>
-              <a:t>get</a:t>
-            </a:r>
-            <a:endParaRPr sz="1000">
-              <a:solidFill>
-                <a:srgbClr val="569CD6"/>
-              </a:solidFill>
-              <a:highlight>
-                <a:srgbClr val="1F1F1F"/>
-              </a:highlight>
-              <a:latin typeface="Consolas"/>
-              <a:ea typeface="Consolas"/>
-              <a:cs typeface="Consolas"/>
-              <a:sym typeface="Consolas"/>
-            </a:endParaRPr>
-          </a:p>
-          <a:p>
-            <a:pPr indent="0" lvl="0" marL="0" rtl="0" algn="l">
-              <a:lnSpc>
-                <a:spcPct val="157500"/>
-              </a:lnSpc>
-              <a:spcBef>
-                <a:spcPts val="0"/>
-              </a:spcBef>
-              <a:spcAft>
-                <a:spcPts val="0"/>
-              </a:spcAft>
-              <a:buNone/>
-            </a:pPr>
-            <a:r>
-              <a:rPr lang="en" sz="1000">
-                <a:solidFill>
-                  <a:srgbClr val="CCCCCC"/>
-                </a:solidFill>
-                <a:highlight>
-                  <a:srgbClr val="1F1F1F"/>
-                </a:highlight>
-                <a:latin typeface="Consolas"/>
-                <a:ea typeface="Consolas"/>
-                <a:cs typeface="Consolas"/>
-                <a:sym typeface="Consolas"/>
-              </a:rPr>
-              <a:t>        {</a:t>
-            </a:r>
-            <a:endParaRPr sz="1000">
-              <a:solidFill>
-                <a:srgbClr val="CCCCCC"/>
-              </a:solidFill>
-              <a:highlight>
-                <a:srgbClr val="1F1F1F"/>
-              </a:highlight>
-              <a:latin typeface="Consolas"/>
-              <a:ea typeface="Consolas"/>
-              <a:cs typeface="Consolas"/>
-              <a:sym typeface="Consolas"/>
-            </a:endParaRPr>
-          </a:p>
-          <a:p>
-            <a:pPr indent="0" lvl="0" marL="0" rtl="0" algn="l">
-              <a:lnSpc>
-                <a:spcPct val="157500"/>
-              </a:lnSpc>
-              <a:spcBef>
-                <a:spcPts val="0"/>
-              </a:spcBef>
-              <a:spcAft>
-                <a:spcPts val="0"/>
-              </a:spcAft>
-              <a:buNone/>
-            </a:pPr>
-            <a:r>
-              <a:rPr lang="en" sz="1000">
-                <a:solidFill>
-                  <a:srgbClr val="CCCCCC"/>
-                </a:solidFill>
-                <a:highlight>
-                  <a:srgbClr val="1F1F1F"/>
-                </a:highlight>
-                <a:latin typeface="Consolas"/>
-                <a:ea typeface="Consolas"/>
-                <a:cs typeface="Consolas"/>
-                <a:sym typeface="Consolas"/>
-              </a:rPr>
-              <a:t>            </a:t>
-            </a:r>
-            <a:r>
-              <a:rPr lang="en" sz="1000">
-                <a:solidFill>
-                  <a:srgbClr val="9CDCFE"/>
-                </a:solidFill>
-                <a:highlight>
-                  <a:srgbClr val="1F1F1F"/>
-                </a:highlight>
-                <a:latin typeface="Consolas"/>
-                <a:ea typeface="Consolas"/>
-                <a:cs typeface="Consolas"/>
-                <a:sym typeface="Consolas"/>
-              </a:rPr>
-              <a:t>_instance</a:t>
-            </a:r>
-            <a:r>
-              <a:rPr lang="en" sz="1000">
-                <a:solidFill>
-                  <a:srgbClr val="CCCCCC"/>
-                </a:solidFill>
-                <a:highlight>
-                  <a:srgbClr val="1F1F1F"/>
-                </a:highlight>
-                <a:latin typeface="Consolas"/>
-                <a:ea typeface="Consolas"/>
-                <a:cs typeface="Consolas"/>
-                <a:sym typeface="Consolas"/>
-              </a:rPr>
-              <a:t> </a:t>
-            </a:r>
-            <a:r>
-              <a:rPr lang="en" sz="1000">
-                <a:solidFill>
-                  <a:srgbClr val="D4D4D4"/>
-                </a:solidFill>
-                <a:highlight>
-                  <a:srgbClr val="1F1F1F"/>
-                </a:highlight>
-                <a:latin typeface="Consolas"/>
-                <a:ea typeface="Consolas"/>
-                <a:cs typeface="Consolas"/>
-                <a:sym typeface="Consolas"/>
-              </a:rPr>
-              <a:t>??=</a:t>
-            </a:r>
-            <a:r>
-              <a:rPr lang="en" sz="1000">
-                <a:solidFill>
-                  <a:srgbClr val="CCCCCC"/>
-                </a:solidFill>
-                <a:highlight>
-                  <a:srgbClr val="1F1F1F"/>
-                </a:highlight>
-                <a:latin typeface="Consolas"/>
-                <a:ea typeface="Consolas"/>
-                <a:cs typeface="Consolas"/>
-                <a:sym typeface="Consolas"/>
-              </a:rPr>
-              <a:t> </a:t>
-            </a:r>
-            <a:r>
-              <a:rPr lang="en" sz="1000">
-                <a:solidFill>
-                  <a:srgbClr val="569CD6"/>
-                </a:solidFill>
-                <a:highlight>
-                  <a:srgbClr val="1F1F1F"/>
-                </a:highlight>
-                <a:latin typeface="Consolas"/>
-                <a:ea typeface="Consolas"/>
-                <a:cs typeface="Consolas"/>
-                <a:sym typeface="Consolas"/>
-              </a:rPr>
-              <a:t>new</a:t>
-            </a:r>
-            <a:r>
-              <a:rPr lang="en" sz="1000">
-                <a:solidFill>
-                  <a:srgbClr val="CCCCCC"/>
-                </a:solidFill>
-                <a:highlight>
-                  <a:srgbClr val="1F1F1F"/>
-                </a:highlight>
-                <a:latin typeface="Consolas"/>
-                <a:ea typeface="Consolas"/>
-                <a:cs typeface="Consolas"/>
-                <a:sym typeface="Consolas"/>
-              </a:rPr>
-              <a:t> </a:t>
-            </a:r>
-            <a:r>
-              <a:rPr lang="en" sz="1000">
-                <a:solidFill>
-                  <a:srgbClr val="4EC9B0"/>
-                </a:solidFill>
-                <a:highlight>
-                  <a:srgbClr val="1F1F1F"/>
-                </a:highlight>
-                <a:latin typeface="Consolas"/>
-                <a:ea typeface="Consolas"/>
-                <a:cs typeface="Consolas"/>
-                <a:sym typeface="Consolas"/>
-              </a:rPr>
-              <a:t>Singleton</a:t>
-            </a:r>
-            <a:r>
-              <a:rPr lang="en" sz="1000">
-                <a:solidFill>
-                  <a:srgbClr val="CCCCCC"/>
-                </a:solidFill>
-                <a:highlight>
-                  <a:srgbClr val="1F1F1F"/>
-                </a:highlight>
-                <a:latin typeface="Consolas"/>
-                <a:ea typeface="Consolas"/>
-                <a:cs typeface="Consolas"/>
-                <a:sym typeface="Consolas"/>
-              </a:rPr>
-              <a:t>();</a:t>
-            </a:r>
-            <a:endParaRPr sz="1000">
-              <a:solidFill>
-                <a:srgbClr val="CCCCCC"/>
-              </a:solidFill>
-              <a:highlight>
-                <a:srgbClr val="1F1F1F"/>
-              </a:highlight>
-              <a:latin typeface="Consolas"/>
-              <a:ea typeface="Consolas"/>
-              <a:cs typeface="Consolas"/>
-              <a:sym typeface="Consolas"/>
-            </a:endParaRPr>
-          </a:p>
-          <a:p>
-            <a:pPr indent="0" lvl="0" marL="0" rtl="0" algn="l">
-              <a:lnSpc>
-                <a:spcPct val="157500"/>
-              </a:lnSpc>
-              <a:spcBef>
-                <a:spcPts val="0"/>
-              </a:spcBef>
-              <a:spcAft>
-                <a:spcPts val="0"/>
-              </a:spcAft>
-              <a:buNone/>
-            </a:pPr>
-            <a:r>
-              <a:rPr lang="en" sz="1000">
-                <a:solidFill>
-                  <a:srgbClr val="CCCCCC"/>
-                </a:solidFill>
-                <a:highlight>
-                  <a:srgbClr val="1F1F1F"/>
-                </a:highlight>
-                <a:latin typeface="Consolas"/>
-                <a:ea typeface="Consolas"/>
-                <a:cs typeface="Consolas"/>
-                <a:sym typeface="Consolas"/>
-              </a:rPr>
-              <a:t>            </a:t>
-            </a:r>
-            <a:r>
-              <a:rPr lang="en" sz="1000">
-                <a:solidFill>
-                  <a:srgbClr val="C586C0"/>
-                </a:solidFill>
-                <a:highlight>
-                  <a:srgbClr val="1F1F1F"/>
-                </a:highlight>
-                <a:latin typeface="Consolas"/>
-                <a:ea typeface="Consolas"/>
-                <a:cs typeface="Consolas"/>
-                <a:sym typeface="Consolas"/>
-              </a:rPr>
-              <a:t>return</a:t>
-            </a:r>
-            <a:r>
-              <a:rPr lang="en" sz="1000">
-                <a:solidFill>
-                  <a:srgbClr val="CCCCCC"/>
-                </a:solidFill>
-                <a:highlight>
-                  <a:srgbClr val="1F1F1F"/>
-                </a:highlight>
-                <a:latin typeface="Consolas"/>
-                <a:ea typeface="Consolas"/>
-                <a:cs typeface="Consolas"/>
-                <a:sym typeface="Consolas"/>
-              </a:rPr>
-              <a:t> </a:t>
-            </a:r>
-            <a:r>
-              <a:rPr lang="en" sz="1000">
-                <a:solidFill>
-                  <a:srgbClr val="9CDCFE"/>
-                </a:solidFill>
-                <a:highlight>
-                  <a:srgbClr val="1F1F1F"/>
-                </a:highlight>
-                <a:latin typeface="Consolas"/>
-                <a:ea typeface="Consolas"/>
-                <a:cs typeface="Consolas"/>
-                <a:sym typeface="Consolas"/>
-              </a:rPr>
-              <a:t>_instance</a:t>
-            </a:r>
-            <a:r>
-              <a:rPr lang="en" sz="1000">
-                <a:solidFill>
-                  <a:srgbClr val="CCCCCC"/>
-                </a:solidFill>
-                <a:highlight>
-                  <a:srgbClr val="1F1F1F"/>
-                </a:highlight>
-                <a:latin typeface="Consolas"/>
-                <a:ea typeface="Consolas"/>
-                <a:cs typeface="Consolas"/>
-                <a:sym typeface="Consolas"/>
-              </a:rPr>
-              <a:t>;</a:t>
-            </a:r>
-            <a:endParaRPr sz="1000">
-              <a:solidFill>
-                <a:srgbClr val="CCCCCC"/>
-              </a:solidFill>
-              <a:highlight>
-                <a:srgbClr val="1F1F1F"/>
-              </a:highlight>
-              <a:latin typeface="Consolas"/>
-              <a:ea typeface="Consolas"/>
-              <a:cs typeface="Consolas"/>
-              <a:sym typeface="Consolas"/>
-            </a:endParaRPr>
-          </a:p>
-          <a:p>
-            <a:pPr indent="0" lvl="0" marL="0" rtl="0" algn="l">
-              <a:lnSpc>
-                <a:spcPct val="157500"/>
-              </a:lnSpc>
-              <a:spcBef>
-                <a:spcPts val="0"/>
-              </a:spcBef>
-              <a:spcAft>
-                <a:spcPts val="0"/>
-              </a:spcAft>
-              <a:buNone/>
-            </a:pPr>
-            <a:r>
-              <a:rPr lang="en" sz="1000">
-                <a:solidFill>
-                  <a:srgbClr val="CCCCCC"/>
-                </a:solidFill>
-                <a:highlight>
-                  <a:srgbClr val="1F1F1F"/>
-                </a:highlight>
-                <a:latin typeface="Consolas"/>
-                <a:ea typeface="Consolas"/>
-                <a:cs typeface="Consolas"/>
-                <a:sym typeface="Consolas"/>
-              </a:rPr>
-              <a:t>        }</a:t>
-            </a:r>
-            <a:endParaRPr sz="1000">
-              <a:solidFill>
-                <a:srgbClr val="CCCCCC"/>
-              </a:solidFill>
-              <a:highlight>
-                <a:srgbClr val="1F1F1F"/>
-              </a:highlight>
-              <a:latin typeface="Consolas"/>
-              <a:ea typeface="Consolas"/>
-              <a:cs typeface="Consolas"/>
-              <a:sym typeface="Consolas"/>
-            </a:endParaRPr>
-          </a:p>
-          <a:p>
-            <a:pPr indent="0" lvl="0" marL="0" rtl="0" algn="l">
-              <a:lnSpc>
-                <a:spcPct val="157500"/>
-              </a:lnSpc>
-              <a:spcBef>
-                <a:spcPts val="0"/>
-              </a:spcBef>
-              <a:spcAft>
-                <a:spcPts val="0"/>
-              </a:spcAft>
-              <a:buNone/>
-            </a:pPr>
-            <a:r>
-              <a:rPr lang="en" sz="1000">
-                <a:solidFill>
-                  <a:srgbClr val="CCCCCC"/>
-                </a:solidFill>
-                <a:highlight>
-                  <a:srgbClr val="1F1F1F"/>
-                </a:highlight>
-                <a:latin typeface="Consolas"/>
-                <a:ea typeface="Consolas"/>
-                <a:cs typeface="Consolas"/>
-                <a:sym typeface="Consolas"/>
-              </a:rPr>
-              <a:t>    }</a:t>
-            </a:r>
-            <a:endParaRPr sz="1000">
-              <a:solidFill>
-                <a:srgbClr val="CCCCCC"/>
-              </a:solidFill>
-              <a:highlight>
-                <a:srgbClr val="1F1F1F"/>
-              </a:highlight>
-              <a:latin typeface="Consolas"/>
-              <a:ea typeface="Consolas"/>
-              <a:cs typeface="Consolas"/>
-              <a:sym typeface="Consolas"/>
-            </a:endParaRPr>
-          </a:p>
-          <a:p>
-            <a:pPr indent="0" lvl="0" marL="0" rtl="0" algn="l">
-              <a:lnSpc>
-                <a:spcPct val="157500"/>
-              </a:lnSpc>
-              <a:spcBef>
-                <a:spcPts val="0"/>
-              </a:spcBef>
-              <a:spcAft>
-                <a:spcPts val="0"/>
-              </a:spcAft>
-              <a:buNone/>
-            </a:pPr>
-            <a:r>
-              <a:rPr lang="en" sz="1000">
-                <a:solidFill>
-                  <a:srgbClr val="CCCCCC"/>
-                </a:solidFill>
-                <a:highlight>
-                  <a:srgbClr val="1F1F1F"/>
-                </a:highlight>
-                <a:latin typeface="Consolas"/>
-                <a:ea typeface="Consolas"/>
-                <a:cs typeface="Consolas"/>
-                <a:sym typeface="Consolas"/>
-              </a:rPr>
-              <a:t>}</a:t>
-            </a:r>
-            <a:endParaRPr/>
-          </a:p>
-        </p:txBody>
-      </p:sp>
+      </p:pic>
     </p:spTree>
   </p:cSld>
   <p:clrMapOvr>
@@ -26328,6 +25386,1056 @@
   <p:cSld>
     <p:spTree>
       <p:nvGrpSpPr>
+        <p:cNvPr id="262" name="Shape 262"/>
+        <p:cNvGrpSpPr/>
+        <p:nvPr/>
+      </p:nvGrpSpPr>
+      <p:grpSpPr>
+        <a:xfrm>
+          <a:off x="0" y="0"/>
+          <a:ext cx="0" cy="0"/>
+          <a:chOff x="0" y="0"/>
+          <a:chExt cx="0" cy="0"/>
+        </a:xfrm>
+      </p:grpSpPr>
+      <p:sp>
+        <p:nvSpPr>
+          <p:cNvPr id="263" name="Google Shape;263;p46"/>
+          <p:cNvSpPr txBox="1"/>
+          <p:nvPr>
+            <p:ph type="title"/>
+          </p:nvPr>
+        </p:nvSpPr>
+        <p:spPr>
+          <a:xfrm>
+            <a:off x="311700" y="195615"/>
+            <a:ext cx="8520600" cy="572700"/>
+          </a:xfrm>
+          <a:prstGeom prst="rect">
+            <a:avLst/>
+          </a:prstGeom>
+        </p:spPr>
+        <p:txBody>
+          <a:bodyPr anchorCtr="0" anchor="t" bIns="91425" lIns="91425" spcFirstLastPara="1" rIns="91425" wrap="square" tIns="91425">
+            <a:normAutofit fontScale="90000"/>
+          </a:bodyPr>
+          <a:lstStyle/>
+          <a:p>
+            <a:pPr indent="0" lvl="0" marL="0" rtl="0" algn="l">
+              <a:spcBef>
+                <a:spcPts val="0"/>
+              </a:spcBef>
+              <a:spcAft>
+                <a:spcPts val="0"/>
+              </a:spcAft>
+              <a:buNone/>
+            </a:pPr>
+            <a:r>
+              <a:rPr lang="en"/>
+              <a:t>Singleton Pattern: Solution</a:t>
+            </a:r>
+            <a:endParaRPr/>
+          </a:p>
+        </p:txBody>
+      </p:sp>
+      <p:sp>
+        <p:nvSpPr>
+          <p:cNvPr id="264" name="Google Shape;264;p46"/>
+          <p:cNvSpPr txBox="1"/>
+          <p:nvPr>
+            <p:ph idx="2" type="body"/>
+          </p:nvPr>
+        </p:nvSpPr>
+        <p:spPr>
+          <a:xfrm>
+            <a:off x="4433925" y="1353675"/>
+            <a:ext cx="3999900" cy="3004800"/>
+          </a:xfrm>
+          <a:prstGeom prst="rect">
+            <a:avLst/>
+          </a:prstGeom>
+        </p:spPr>
+        <p:txBody>
+          <a:bodyPr anchorCtr="0" anchor="t" bIns="91425" lIns="91425" spcFirstLastPara="1" rIns="91425" wrap="square" tIns="91425">
+            <a:noAutofit/>
+          </a:bodyPr>
+          <a:lstStyle/>
+          <a:p>
+            <a:pPr indent="0" lvl="0" marL="0" rtl="0" algn="l">
+              <a:lnSpc>
+                <a:spcPct val="157500"/>
+              </a:lnSpc>
+              <a:spcBef>
+                <a:spcPts val="0"/>
+              </a:spcBef>
+              <a:spcAft>
+                <a:spcPts val="0"/>
+              </a:spcAft>
+              <a:buNone/>
+            </a:pPr>
+            <a:r>
+              <a:rPr lang="en" sz="1000">
+                <a:solidFill>
+                  <a:srgbClr val="569CD6"/>
+                </a:solidFill>
+                <a:highlight>
+                  <a:srgbClr val="1F1F1F"/>
+                </a:highlight>
+                <a:latin typeface="Consolas"/>
+                <a:ea typeface="Consolas"/>
+                <a:cs typeface="Consolas"/>
+                <a:sym typeface="Consolas"/>
+              </a:rPr>
+              <a:t>public</a:t>
+            </a:r>
+            <a:r>
+              <a:rPr lang="en" sz="1000">
+                <a:solidFill>
+                  <a:srgbClr val="CCCCCC"/>
+                </a:solidFill>
+                <a:highlight>
+                  <a:srgbClr val="1F1F1F"/>
+                </a:highlight>
+                <a:latin typeface="Consolas"/>
+                <a:ea typeface="Consolas"/>
+                <a:cs typeface="Consolas"/>
+                <a:sym typeface="Consolas"/>
+              </a:rPr>
+              <a:t> </a:t>
+            </a:r>
+            <a:r>
+              <a:rPr lang="en" sz="1000">
+                <a:solidFill>
+                  <a:srgbClr val="569CD6"/>
+                </a:solidFill>
+                <a:highlight>
+                  <a:srgbClr val="1F1F1F"/>
+                </a:highlight>
+                <a:latin typeface="Consolas"/>
+                <a:ea typeface="Consolas"/>
+                <a:cs typeface="Consolas"/>
+                <a:sym typeface="Consolas"/>
+              </a:rPr>
+              <a:t>class</a:t>
+            </a:r>
+            <a:r>
+              <a:rPr lang="en" sz="1000">
+                <a:solidFill>
+                  <a:srgbClr val="CCCCCC"/>
+                </a:solidFill>
+                <a:highlight>
+                  <a:srgbClr val="1F1F1F"/>
+                </a:highlight>
+                <a:latin typeface="Consolas"/>
+                <a:ea typeface="Consolas"/>
+                <a:cs typeface="Consolas"/>
+                <a:sym typeface="Consolas"/>
+              </a:rPr>
+              <a:t> </a:t>
+            </a:r>
+            <a:r>
+              <a:rPr lang="en" sz="1000">
+                <a:solidFill>
+                  <a:srgbClr val="4EC9B0"/>
+                </a:solidFill>
+                <a:highlight>
+                  <a:srgbClr val="1F1F1F"/>
+                </a:highlight>
+                <a:latin typeface="Consolas"/>
+                <a:ea typeface="Consolas"/>
+                <a:cs typeface="Consolas"/>
+                <a:sym typeface="Consolas"/>
+              </a:rPr>
+              <a:t>Singleton</a:t>
+            </a:r>
+            <a:endParaRPr sz="1000">
+              <a:solidFill>
+                <a:srgbClr val="4EC9B0"/>
+              </a:solidFill>
+              <a:highlight>
+                <a:srgbClr val="1F1F1F"/>
+              </a:highlight>
+              <a:latin typeface="Consolas"/>
+              <a:ea typeface="Consolas"/>
+              <a:cs typeface="Consolas"/>
+              <a:sym typeface="Consolas"/>
+            </a:endParaRPr>
+          </a:p>
+          <a:p>
+            <a:pPr indent="0" lvl="0" marL="0" rtl="0" algn="l">
+              <a:lnSpc>
+                <a:spcPct val="157500"/>
+              </a:lnSpc>
+              <a:spcBef>
+                <a:spcPts val="0"/>
+              </a:spcBef>
+              <a:spcAft>
+                <a:spcPts val="0"/>
+              </a:spcAft>
+              <a:buNone/>
+            </a:pPr>
+            <a:r>
+              <a:rPr lang="en" sz="1000">
+                <a:solidFill>
+                  <a:srgbClr val="CCCCCC"/>
+                </a:solidFill>
+                <a:highlight>
+                  <a:srgbClr val="1F1F1F"/>
+                </a:highlight>
+                <a:latin typeface="Consolas"/>
+                <a:ea typeface="Consolas"/>
+                <a:cs typeface="Consolas"/>
+                <a:sym typeface="Consolas"/>
+              </a:rPr>
+              <a:t>{</a:t>
+            </a:r>
+            <a:endParaRPr sz="1000">
+              <a:solidFill>
+                <a:srgbClr val="CCCCCC"/>
+              </a:solidFill>
+              <a:highlight>
+                <a:srgbClr val="1F1F1F"/>
+              </a:highlight>
+              <a:latin typeface="Consolas"/>
+              <a:ea typeface="Consolas"/>
+              <a:cs typeface="Consolas"/>
+              <a:sym typeface="Consolas"/>
+            </a:endParaRPr>
+          </a:p>
+          <a:p>
+            <a:pPr indent="0" lvl="0" marL="0" rtl="0" algn="l">
+              <a:lnSpc>
+                <a:spcPct val="157500"/>
+              </a:lnSpc>
+              <a:spcBef>
+                <a:spcPts val="0"/>
+              </a:spcBef>
+              <a:spcAft>
+                <a:spcPts val="0"/>
+              </a:spcAft>
+              <a:buNone/>
+            </a:pPr>
+            <a:r>
+              <a:rPr lang="en" sz="1000">
+                <a:solidFill>
+                  <a:srgbClr val="CCCCCC"/>
+                </a:solidFill>
+                <a:highlight>
+                  <a:srgbClr val="1F1F1F"/>
+                </a:highlight>
+                <a:latin typeface="Consolas"/>
+                <a:ea typeface="Consolas"/>
+                <a:cs typeface="Consolas"/>
+                <a:sym typeface="Consolas"/>
+              </a:rPr>
+              <a:t>    </a:t>
+            </a:r>
+            <a:r>
+              <a:rPr lang="en" sz="1000">
+                <a:solidFill>
+                  <a:srgbClr val="569CD6"/>
+                </a:solidFill>
+                <a:highlight>
+                  <a:srgbClr val="1F1F1F"/>
+                </a:highlight>
+                <a:latin typeface="Consolas"/>
+                <a:ea typeface="Consolas"/>
+                <a:cs typeface="Consolas"/>
+                <a:sym typeface="Consolas"/>
+              </a:rPr>
+              <a:t>private</a:t>
+            </a:r>
+            <a:r>
+              <a:rPr lang="en" sz="1000">
+                <a:solidFill>
+                  <a:srgbClr val="CCCCCC"/>
+                </a:solidFill>
+                <a:highlight>
+                  <a:srgbClr val="1F1F1F"/>
+                </a:highlight>
+                <a:latin typeface="Consolas"/>
+                <a:ea typeface="Consolas"/>
+                <a:cs typeface="Consolas"/>
+                <a:sym typeface="Consolas"/>
+              </a:rPr>
+              <a:t> </a:t>
+            </a:r>
+            <a:r>
+              <a:rPr lang="en" sz="1000">
+                <a:solidFill>
+                  <a:srgbClr val="569CD6"/>
+                </a:solidFill>
+                <a:highlight>
+                  <a:srgbClr val="1F1F1F"/>
+                </a:highlight>
+                <a:latin typeface="Consolas"/>
+                <a:ea typeface="Consolas"/>
+                <a:cs typeface="Consolas"/>
+                <a:sym typeface="Consolas"/>
+              </a:rPr>
+              <a:t>static</a:t>
+            </a:r>
+            <a:r>
+              <a:rPr lang="en" sz="1000">
+                <a:solidFill>
+                  <a:srgbClr val="CCCCCC"/>
+                </a:solidFill>
+                <a:highlight>
+                  <a:srgbClr val="1F1F1F"/>
+                </a:highlight>
+                <a:latin typeface="Consolas"/>
+                <a:ea typeface="Consolas"/>
+                <a:cs typeface="Consolas"/>
+                <a:sym typeface="Consolas"/>
+              </a:rPr>
+              <a:t> </a:t>
+            </a:r>
+            <a:r>
+              <a:rPr lang="en" sz="1000">
+                <a:solidFill>
+                  <a:srgbClr val="4EC9B0"/>
+                </a:solidFill>
+                <a:highlight>
+                  <a:srgbClr val="1F1F1F"/>
+                </a:highlight>
+                <a:latin typeface="Consolas"/>
+                <a:ea typeface="Consolas"/>
+                <a:cs typeface="Consolas"/>
+                <a:sym typeface="Consolas"/>
+              </a:rPr>
+              <a:t>Singleton</a:t>
+            </a:r>
+            <a:r>
+              <a:rPr lang="en" sz="1000">
+                <a:solidFill>
+                  <a:srgbClr val="CCCCCC"/>
+                </a:solidFill>
+                <a:highlight>
+                  <a:srgbClr val="1F1F1F"/>
+                </a:highlight>
+                <a:latin typeface="Consolas"/>
+                <a:ea typeface="Consolas"/>
+                <a:cs typeface="Consolas"/>
+                <a:sym typeface="Consolas"/>
+              </a:rPr>
+              <a:t> </a:t>
+            </a:r>
+            <a:r>
+              <a:rPr lang="en" sz="1000">
+                <a:solidFill>
+                  <a:srgbClr val="9CDCFE"/>
+                </a:solidFill>
+                <a:highlight>
+                  <a:srgbClr val="1F1F1F"/>
+                </a:highlight>
+                <a:latin typeface="Consolas"/>
+                <a:ea typeface="Consolas"/>
+                <a:cs typeface="Consolas"/>
+                <a:sym typeface="Consolas"/>
+              </a:rPr>
+              <a:t>_instance</a:t>
+            </a:r>
+            <a:r>
+              <a:rPr lang="en" sz="1000">
+                <a:solidFill>
+                  <a:srgbClr val="CCCCCC"/>
+                </a:solidFill>
+                <a:highlight>
+                  <a:srgbClr val="1F1F1F"/>
+                </a:highlight>
+                <a:latin typeface="Consolas"/>
+                <a:ea typeface="Consolas"/>
+                <a:cs typeface="Consolas"/>
+                <a:sym typeface="Consolas"/>
+              </a:rPr>
+              <a:t>;</a:t>
+            </a:r>
+            <a:endParaRPr sz="1000">
+              <a:solidFill>
+                <a:srgbClr val="CCCCCC"/>
+              </a:solidFill>
+              <a:highlight>
+                <a:srgbClr val="1F1F1F"/>
+              </a:highlight>
+              <a:latin typeface="Consolas"/>
+              <a:ea typeface="Consolas"/>
+              <a:cs typeface="Consolas"/>
+              <a:sym typeface="Consolas"/>
+            </a:endParaRPr>
+          </a:p>
+          <a:p>
+            <a:pPr indent="0" lvl="0" marL="0" rtl="0" algn="l">
+              <a:lnSpc>
+                <a:spcPct val="157500"/>
+              </a:lnSpc>
+              <a:spcBef>
+                <a:spcPts val="0"/>
+              </a:spcBef>
+              <a:spcAft>
+                <a:spcPts val="0"/>
+              </a:spcAft>
+              <a:buNone/>
+            </a:pPr>
+            <a:r>
+              <a:rPr lang="en" sz="1000">
+                <a:solidFill>
+                  <a:srgbClr val="CCCCCC"/>
+                </a:solidFill>
+                <a:highlight>
+                  <a:srgbClr val="1F1F1F"/>
+                </a:highlight>
+                <a:latin typeface="Consolas"/>
+                <a:ea typeface="Consolas"/>
+                <a:cs typeface="Consolas"/>
+                <a:sym typeface="Consolas"/>
+              </a:rPr>
+              <a:t>    </a:t>
+            </a:r>
+            <a:r>
+              <a:rPr lang="en" sz="1000">
+                <a:solidFill>
+                  <a:srgbClr val="569CD6"/>
+                </a:solidFill>
+                <a:highlight>
+                  <a:srgbClr val="1F1F1F"/>
+                </a:highlight>
+                <a:latin typeface="Consolas"/>
+                <a:ea typeface="Consolas"/>
+                <a:cs typeface="Consolas"/>
+                <a:sym typeface="Consolas"/>
+              </a:rPr>
+              <a:t>public</a:t>
+            </a:r>
+            <a:r>
+              <a:rPr lang="en" sz="1000">
+                <a:solidFill>
+                  <a:srgbClr val="CCCCCC"/>
+                </a:solidFill>
+                <a:highlight>
+                  <a:srgbClr val="1F1F1F"/>
+                </a:highlight>
+                <a:latin typeface="Consolas"/>
+                <a:ea typeface="Consolas"/>
+                <a:cs typeface="Consolas"/>
+                <a:sym typeface="Consolas"/>
+              </a:rPr>
+              <a:t> </a:t>
+            </a:r>
+            <a:r>
+              <a:rPr lang="en" sz="1000">
+                <a:solidFill>
+                  <a:srgbClr val="569CD6"/>
+                </a:solidFill>
+                <a:highlight>
+                  <a:srgbClr val="1F1F1F"/>
+                </a:highlight>
+                <a:latin typeface="Consolas"/>
+                <a:ea typeface="Consolas"/>
+                <a:cs typeface="Consolas"/>
+                <a:sym typeface="Consolas"/>
+              </a:rPr>
+              <a:t>static</a:t>
+            </a:r>
+            <a:r>
+              <a:rPr lang="en" sz="1000">
+                <a:solidFill>
+                  <a:srgbClr val="CCCCCC"/>
+                </a:solidFill>
+                <a:highlight>
+                  <a:srgbClr val="1F1F1F"/>
+                </a:highlight>
+                <a:latin typeface="Consolas"/>
+                <a:ea typeface="Consolas"/>
+                <a:cs typeface="Consolas"/>
+                <a:sym typeface="Consolas"/>
+              </a:rPr>
+              <a:t> </a:t>
+            </a:r>
+            <a:r>
+              <a:rPr lang="en" sz="1000">
+                <a:solidFill>
+                  <a:srgbClr val="4EC9B0"/>
+                </a:solidFill>
+                <a:highlight>
+                  <a:srgbClr val="1F1F1F"/>
+                </a:highlight>
+                <a:latin typeface="Consolas"/>
+                <a:ea typeface="Consolas"/>
+                <a:cs typeface="Consolas"/>
+                <a:sym typeface="Consolas"/>
+              </a:rPr>
+              <a:t>Singleton</a:t>
+            </a:r>
+            <a:r>
+              <a:rPr lang="en" sz="1000">
+                <a:solidFill>
+                  <a:srgbClr val="CCCCCC"/>
+                </a:solidFill>
+                <a:highlight>
+                  <a:srgbClr val="1F1F1F"/>
+                </a:highlight>
+                <a:latin typeface="Consolas"/>
+                <a:ea typeface="Consolas"/>
+                <a:cs typeface="Consolas"/>
+                <a:sym typeface="Consolas"/>
+              </a:rPr>
+              <a:t> </a:t>
+            </a:r>
+            <a:r>
+              <a:rPr lang="en" sz="1000">
+                <a:solidFill>
+                  <a:srgbClr val="9CDCFE"/>
+                </a:solidFill>
+                <a:highlight>
+                  <a:srgbClr val="1F1F1F"/>
+                </a:highlight>
+                <a:latin typeface="Consolas"/>
+                <a:ea typeface="Consolas"/>
+                <a:cs typeface="Consolas"/>
+                <a:sym typeface="Consolas"/>
+              </a:rPr>
+              <a:t>Instance</a:t>
+            </a:r>
+            <a:endParaRPr sz="1000">
+              <a:solidFill>
+                <a:srgbClr val="9CDCFE"/>
+              </a:solidFill>
+              <a:highlight>
+                <a:srgbClr val="1F1F1F"/>
+              </a:highlight>
+              <a:latin typeface="Consolas"/>
+              <a:ea typeface="Consolas"/>
+              <a:cs typeface="Consolas"/>
+              <a:sym typeface="Consolas"/>
+            </a:endParaRPr>
+          </a:p>
+          <a:p>
+            <a:pPr indent="0" lvl="0" marL="0" rtl="0" algn="l">
+              <a:lnSpc>
+                <a:spcPct val="157500"/>
+              </a:lnSpc>
+              <a:spcBef>
+                <a:spcPts val="0"/>
+              </a:spcBef>
+              <a:spcAft>
+                <a:spcPts val="0"/>
+              </a:spcAft>
+              <a:buNone/>
+            </a:pPr>
+            <a:r>
+              <a:rPr lang="en" sz="1000">
+                <a:solidFill>
+                  <a:srgbClr val="CCCCCC"/>
+                </a:solidFill>
+                <a:highlight>
+                  <a:srgbClr val="1F1F1F"/>
+                </a:highlight>
+                <a:latin typeface="Consolas"/>
+                <a:ea typeface="Consolas"/>
+                <a:cs typeface="Consolas"/>
+                <a:sym typeface="Consolas"/>
+              </a:rPr>
+              <a:t>    {</a:t>
+            </a:r>
+            <a:endParaRPr sz="1000">
+              <a:solidFill>
+                <a:srgbClr val="CCCCCC"/>
+              </a:solidFill>
+              <a:highlight>
+                <a:srgbClr val="1F1F1F"/>
+              </a:highlight>
+              <a:latin typeface="Consolas"/>
+              <a:ea typeface="Consolas"/>
+              <a:cs typeface="Consolas"/>
+              <a:sym typeface="Consolas"/>
+            </a:endParaRPr>
+          </a:p>
+          <a:p>
+            <a:pPr indent="0" lvl="0" marL="0" rtl="0" algn="l">
+              <a:lnSpc>
+                <a:spcPct val="157500"/>
+              </a:lnSpc>
+              <a:spcBef>
+                <a:spcPts val="0"/>
+              </a:spcBef>
+              <a:spcAft>
+                <a:spcPts val="0"/>
+              </a:spcAft>
+              <a:buNone/>
+            </a:pPr>
+            <a:r>
+              <a:rPr lang="en" sz="1000">
+                <a:solidFill>
+                  <a:srgbClr val="CCCCCC"/>
+                </a:solidFill>
+                <a:highlight>
+                  <a:srgbClr val="1F1F1F"/>
+                </a:highlight>
+                <a:latin typeface="Consolas"/>
+                <a:ea typeface="Consolas"/>
+                <a:cs typeface="Consolas"/>
+                <a:sym typeface="Consolas"/>
+              </a:rPr>
+              <a:t>        </a:t>
+            </a:r>
+            <a:r>
+              <a:rPr lang="en" sz="1000">
+                <a:solidFill>
+                  <a:srgbClr val="569CD6"/>
+                </a:solidFill>
+                <a:highlight>
+                  <a:srgbClr val="1F1F1F"/>
+                </a:highlight>
+                <a:latin typeface="Consolas"/>
+                <a:ea typeface="Consolas"/>
+                <a:cs typeface="Consolas"/>
+                <a:sym typeface="Consolas"/>
+              </a:rPr>
+              <a:t>get</a:t>
+            </a:r>
+            <a:endParaRPr sz="1000">
+              <a:solidFill>
+                <a:srgbClr val="569CD6"/>
+              </a:solidFill>
+              <a:highlight>
+                <a:srgbClr val="1F1F1F"/>
+              </a:highlight>
+              <a:latin typeface="Consolas"/>
+              <a:ea typeface="Consolas"/>
+              <a:cs typeface="Consolas"/>
+              <a:sym typeface="Consolas"/>
+            </a:endParaRPr>
+          </a:p>
+          <a:p>
+            <a:pPr indent="0" lvl="0" marL="0" rtl="0" algn="l">
+              <a:lnSpc>
+                <a:spcPct val="157500"/>
+              </a:lnSpc>
+              <a:spcBef>
+                <a:spcPts val="0"/>
+              </a:spcBef>
+              <a:spcAft>
+                <a:spcPts val="0"/>
+              </a:spcAft>
+              <a:buNone/>
+            </a:pPr>
+            <a:r>
+              <a:rPr lang="en" sz="1000">
+                <a:solidFill>
+                  <a:srgbClr val="CCCCCC"/>
+                </a:solidFill>
+                <a:highlight>
+                  <a:srgbClr val="1F1F1F"/>
+                </a:highlight>
+                <a:latin typeface="Consolas"/>
+                <a:ea typeface="Consolas"/>
+                <a:cs typeface="Consolas"/>
+                <a:sym typeface="Consolas"/>
+              </a:rPr>
+              <a:t>        {</a:t>
+            </a:r>
+            <a:endParaRPr sz="1000">
+              <a:solidFill>
+                <a:srgbClr val="CCCCCC"/>
+              </a:solidFill>
+              <a:highlight>
+                <a:srgbClr val="1F1F1F"/>
+              </a:highlight>
+              <a:latin typeface="Consolas"/>
+              <a:ea typeface="Consolas"/>
+              <a:cs typeface="Consolas"/>
+              <a:sym typeface="Consolas"/>
+            </a:endParaRPr>
+          </a:p>
+          <a:p>
+            <a:pPr indent="0" lvl="0" marL="0" rtl="0" algn="l">
+              <a:lnSpc>
+                <a:spcPct val="157500"/>
+              </a:lnSpc>
+              <a:spcBef>
+                <a:spcPts val="0"/>
+              </a:spcBef>
+              <a:spcAft>
+                <a:spcPts val="0"/>
+              </a:spcAft>
+              <a:buNone/>
+            </a:pPr>
+            <a:r>
+              <a:rPr lang="en" sz="1000">
+                <a:solidFill>
+                  <a:srgbClr val="CCCCCC"/>
+                </a:solidFill>
+                <a:highlight>
+                  <a:srgbClr val="1F1F1F"/>
+                </a:highlight>
+                <a:latin typeface="Consolas"/>
+                <a:ea typeface="Consolas"/>
+                <a:cs typeface="Consolas"/>
+                <a:sym typeface="Consolas"/>
+              </a:rPr>
+              <a:t>            </a:t>
+            </a:r>
+            <a:r>
+              <a:rPr lang="en" sz="1000">
+                <a:solidFill>
+                  <a:srgbClr val="9CDCFE"/>
+                </a:solidFill>
+                <a:highlight>
+                  <a:srgbClr val="1F1F1F"/>
+                </a:highlight>
+                <a:latin typeface="Consolas"/>
+                <a:ea typeface="Consolas"/>
+                <a:cs typeface="Consolas"/>
+                <a:sym typeface="Consolas"/>
+              </a:rPr>
+              <a:t>_instance</a:t>
+            </a:r>
+            <a:r>
+              <a:rPr lang="en" sz="1000">
+                <a:solidFill>
+                  <a:srgbClr val="CCCCCC"/>
+                </a:solidFill>
+                <a:highlight>
+                  <a:srgbClr val="1F1F1F"/>
+                </a:highlight>
+                <a:latin typeface="Consolas"/>
+                <a:ea typeface="Consolas"/>
+                <a:cs typeface="Consolas"/>
+                <a:sym typeface="Consolas"/>
+              </a:rPr>
+              <a:t> </a:t>
+            </a:r>
+            <a:r>
+              <a:rPr lang="en" sz="1000">
+                <a:solidFill>
+                  <a:srgbClr val="D4D4D4"/>
+                </a:solidFill>
+                <a:highlight>
+                  <a:srgbClr val="1F1F1F"/>
+                </a:highlight>
+                <a:latin typeface="Consolas"/>
+                <a:ea typeface="Consolas"/>
+                <a:cs typeface="Consolas"/>
+                <a:sym typeface="Consolas"/>
+              </a:rPr>
+              <a:t>??=</a:t>
+            </a:r>
+            <a:r>
+              <a:rPr lang="en" sz="1000">
+                <a:solidFill>
+                  <a:srgbClr val="CCCCCC"/>
+                </a:solidFill>
+                <a:highlight>
+                  <a:srgbClr val="1F1F1F"/>
+                </a:highlight>
+                <a:latin typeface="Consolas"/>
+                <a:ea typeface="Consolas"/>
+                <a:cs typeface="Consolas"/>
+                <a:sym typeface="Consolas"/>
+              </a:rPr>
+              <a:t> </a:t>
+            </a:r>
+            <a:r>
+              <a:rPr lang="en" sz="1000">
+                <a:solidFill>
+                  <a:srgbClr val="569CD6"/>
+                </a:solidFill>
+                <a:highlight>
+                  <a:srgbClr val="1F1F1F"/>
+                </a:highlight>
+                <a:latin typeface="Consolas"/>
+                <a:ea typeface="Consolas"/>
+                <a:cs typeface="Consolas"/>
+                <a:sym typeface="Consolas"/>
+              </a:rPr>
+              <a:t>new</a:t>
+            </a:r>
+            <a:r>
+              <a:rPr lang="en" sz="1000">
+                <a:solidFill>
+                  <a:srgbClr val="CCCCCC"/>
+                </a:solidFill>
+                <a:highlight>
+                  <a:srgbClr val="1F1F1F"/>
+                </a:highlight>
+                <a:latin typeface="Consolas"/>
+                <a:ea typeface="Consolas"/>
+                <a:cs typeface="Consolas"/>
+                <a:sym typeface="Consolas"/>
+              </a:rPr>
+              <a:t> </a:t>
+            </a:r>
+            <a:r>
+              <a:rPr lang="en" sz="1000">
+                <a:solidFill>
+                  <a:srgbClr val="4EC9B0"/>
+                </a:solidFill>
+                <a:highlight>
+                  <a:srgbClr val="1F1F1F"/>
+                </a:highlight>
+                <a:latin typeface="Consolas"/>
+                <a:ea typeface="Consolas"/>
+                <a:cs typeface="Consolas"/>
+                <a:sym typeface="Consolas"/>
+              </a:rPr>
+              <a:t>Singleton</a:t>
+            </a:r>
+            <a:r>
+              <a:rPr lang="en" sz="1000">
+                <a:solidFill>
+                  <a:srgbClr val="CCCCCC"/>
+                </a:solidFill>
+                <a:highlight>
+                  <a:srgbClr val="1F1F1F"/>
+                </a:highlight>
+                <a:latin typeface="Consolas"/>
+                <a:ea typeface="Consolas"/>
+                <a:cs typeface="Consolas"/>
+                <a:sym typeface="Consolas"/>
+              </a:rPr>
+              <a:t>();</a:t>
+            </a:r>
+            <a:endParaRPr sz="1000">
+              <a:solidFill>
+                <a:srgbClr val="CCCCCC"/>
+              </a:solidFill>
+              <a:highlight>
+                <a:srgbClr val="1F1F1F"/>
+              </a:highlight>
+              <a:latin typeface="Consolas"/>
+              <a:ea typeface="Consolas"/>
+              <a:cs typeface="Consolas"/>
+              <a:sym typeface="Consolas"/>
+            </a:endParaRPr>
+          </a:p>
+          <a:p>
+            <a:pPr indent="0" lvl="0" marL="0" rtl="0" algn="l">
+              <a:lnSpc>
+                <a:spcPct val="157500"/>
+              </a:lnSpc>
+              <a:spcBef>
+                <a:spcPts val="0"/>
+              </a:spcBef>
+              <a:spcAft>
+                <a:spcPts val="0"/>
+              </a:spcAft>
+              <a:buNone/>
+            </a:pPr>
+            <a:r>
+              <a:rPr lang="en" sz="1000">
+                <a:solidFill>
+                  <a:srgbClr val="CCCCCC"/>
+                </a:solidFill>
+                <a:highlight>
+                  <a:srgbClr val="1F1F1F"/>
+                </a:highlight>
+                <a:latin typeface="Consolas"/>
+                <a:ea typeface="Consolas"/>
+                <a:cs typeface="Consolas"/>
+                <a:sym typeface="Consolas"/>
+              </a:rPr>
+              <a:t>            </a:t>
+            </a:r>
+            <a:r>
+              <a:rPr lang="en" sz="1000">
+                <a:solidFill>
+                  <a:srgbClr val="C586C0"/>
+                </a:solidFill>
+                <a:highlight>
+                  <a:srgbClr val="1F1F1F"/>
+                </a:highlight>
+                <a:latin typeface="Consolas"/>
+                <a:ea typeface="Consolas"/>
+                <a:cs typeface="Consolas"/>
+                <a:sym typeface="Consolas"/>
+              </a:rPr>
+              <a:t>return</a:t>
+            </a:r>
+            <a:r>
+              <a:rPr lang="en" sz="1000">
+                <a:solidFill>
+                  <a:srgbClr val="CCCCCC"/>
+                </a:solidFill>
+                <a:highlight>
+                  <a:srgbClr val="1F1F1F"/>
+                </a:highlight>
+                <a:latin typeface="Consolas"/>
+                <a:ea typeface="Consolas"/>
+                <a:cs typeface="Consolas"/>
+                <a:sym typeface="Consolas"/>
+              </a:rPr>
+              <a:t> </a:t>
+            </a:r>
+            <a:r>
+              <a:rPr lang="en" sz="1000">
+                <a:solidFill>
+                  <a:srgbClr val="9CDCFE"/>
+                </a:solidFill>
+                <a:highlight>
+                  <a:srgbClr val="1F1F1F"/>
+                </a:highlight>
+                <a:latin typeface="Consolas"/>
+                <a:ea typeface="Consolas"/>
+                <a:cs typeface="Consolas"/>
+                <a:sym typeface="Consolas"/>
+              </a:rPr>
+              <a:t>_instance</a:t>
+            </a:r>
+            <a:r>
+              <a:rPr lang="en" sz="1000">
+                <a:solidFill>
+                  <a:srgbClr val="CCCCCC"/>
+                </a:solidFill>
+                <a:highlight>
+                  <a:srgbClr val="1F1F1F"/>
+                </a:highlight>
+                <a:latin typeface="Consolas"/>
+                <a:ea typeface="Consolas"/>
+                <a:cs typeface="Consolas"/>
+                <a:sym typeface="Consolas"/>
+              </a:rPr>
+              <a:t>;</a:t>
+            </a:r>
+            <a:endParaRPr sz="1000">
+              <a:solidFill>
+                <a:srgbClr val="CCCCCC"/>
+              </a:solidFill>
+              <a:highlight>
+                <a:srgbClr val="1F1F1F"/>
+              </a:highlight>
+              <a:latin typeface="Consolas"/>
+              <a:ea typeface="Consolas"/>
+              <a:cs typeface="Consolas"/>
+              <a:sym typeface="Consolas"/>
+            </a:endParaRPr>
+          </a:p>
+          <a:p>
+            <a:pPr indent="0" lvl="0" marL="0" rtl="0" algn="l">
+              <a:lnSpc>
+                <a:spcPct val="157500"/>
+              </a:lnSpc>
+              <a:spcBef>
+                <a:spcPts val="0"/>
+              </a:spcBef>
+              <a:spcAft>
+                <a:spcPts val="0"/>
+              </a:spcAft>
+              <a:buNone/>
+            </a:pPr>
+            <a:r>
+              <a:rPr lang="en" sz="1000">
+                <a:solidFill>
+                  <a:srgbClr val="CCCCCC"/>
+                </a:solidFill>
+                <a:highlight>
+                  <a:srgbClr val="1F1F1F"/>
+                </a:highlight>
+                <a:latin typeface="Consolas"/>
+                <a:ea typeface="Consolas"/>
+                <a:cs typeface="Consolas"/>
+                <a:sym typeface="Consolas"/>
+              </a:rPr>
+              <a:t>        }</a:t>
+            </a:r>
+            <a:endParaRPr sz="1000">
+              <a:solidFill>
+                <a:srgbClr val="CCCCCC"/>
+              </a:solidFill>
+              <a:highlight>
+                <a:srgbClr val="1F1F1F"/>
+              </a:highlight>
+              <a:latin typeface="Consolas"/>
+              <a:ea typeface="Consolas"/>
+              <a:cs typeface="Consolas"/>
+              <a:sym typeface="Consolas"/>
+            </a:endParaRPr>
+          </a:p>
+          <a:p>
+            <a:pPr indent="0" lvl="0" marL="0" rtl="0" algn="l">
+              <a:lnSpc>
+                <a:spcPct val="157500"/>
+              </a:lnSpc>
+              <a:spcBef>
+                <a:spcPts val="0"/>
+              </a:spcBef>
+              <a:spcAft>
+                <a:spcPts val="0"/>
+              </a:spcAft>
+              <a:buNone/>
+            </a:pPr>
+            <a:r>
+              <a:rPr lang="en" sz="1000">
+                <a:solidFill>
+                  <a:srgbClr val="CCCCCC"/>
+                </a:solidFill>
+                <a:highlight>
+                  <a:srgbClr val="1F1F1F"/>
+                </a:highlight>
+                <a:latin typeface="Consolas"/>
+                <a:ea typeface="Consolas"/>
+                <a:cs typeface="Consolas"/>
+                <a:sym typeface="Consolas"/>
+              </a:rPr>
+              <a:t>    }</a:t>
+            </a:r>
+            <a:endParaRPr sz="1000">
+              <a:solidFill>
+                <a:srgbClr val="CCCCCC"/>
+              </a:solidFill>
+              <a:highlight>
+                <a:srgbClr val="1F1F1F"/>
+              </a:highlight>
+              <a:latin typeface="Consolas"/>
+              <a:ea typeface="Consolas"/>
+              <a:cs typeface="Consolas"/>
+              <a:sym typeface="Consolas"/>
+            </a:endParaRPr>
+          </a:p>
+          <a:p>
+            <a:pPr indent="0" lvl="0" marL="0" rtl="0" algn="l">
+              <a:lnSpc>
+                <a:spcPct val="157500"/>
+              </a:lnSpc>
+              <a:spcBef>
+                <a:spcPts val="0"/>
+              </a:spcBef>
+              <a:spcAft>
+                <a:spcPts val="0"/>
+              </a:spcAft>
+              <a:buNone/>
+            </a:pPr>
+            <a:r>
+              <a:rPr lang="en" sz="1000">
+                <a:solidFill>
+                  <a:srgbClr val="CCCCCC"/>
+                </a:solidFill>
+                <a:highlight>
+                  <a:srgbClr val="1F1F1F"/>
+                </a:highlight>
+                <a:latin typeface="Consolas"/>
+                <a:ea typeface="Consolas"/>
+                <a:cs typeface="Consolas"/>
+                <a:sym typeface="Consolas"/>
+              </a:rPr>
+              <a:t>}</a:t>
+            </a:r>
+            <a:endParaRPr/>
+          </a:p>
+        </p:txBody>
+      </p:sp>
+    </p:spTree>
+  </p:cSld>
+  <p:clrMapOvr>
+    <a:masterClrMapping/>
+  </p:clrMapOvr>
+</p:sld>
+</file>
+
+<file path=ppt/slides/slide41.xml><?xml version="1.0" encoding="utf-8"?>
+<p:sld xmlns:a="http://schemas.openxmlformats.org/drawingml/2006/main" xmlns:r="http://schemas.openxmlformats.org/officeDocument/2006/relationships" xmlns:mc="http://schemas.openxmlformats.org/markup-compatibility/2006" xmlns:mv="urn:schemas-microsoft-com:mac:vml" xmlns:p="http://schemas.openxmlformats.org/presentationml/2006/main" xmlns:c="http://schemas.openxmlformats.org/drawingml/2006/chart" xmlns:dgm="http://schemas.openxmlformats.org/drawingml/2006/diagram" xmlns:o="urn:schemas-microsoft-com:office:office" xmlns:v="urn:schemas-microsoft-com:vml" xmlns:pvml="urn:schemas-microsoft-com:office:powerpoint" xmlns:com="http://schemas.openxmlformats.org/drawingml/2006/compatibility" xmlns:p14="http://schemas.microsoft.com/office/powerpoint/2010/main" xmlns:p15="http://schemas.microsoft.com/office/powerpoint/2012/main" xmlns:ahyp="http://schemas.microsoft.com/office/drawing/2018/hyperlinkcolor">
+  <p:cSld>
+    <p:spTree>
+      <p:nvGrpSpPr>
         <p:cNvPr id="269" name="Shape 269"/>
         <p:cNvGrpSpPr/>
         <p:nvPr/>
@@ -26456,7 +26564,7 @@
 </p:sld>
 </file>
 
-<file path=ppt/slides/slide41.xml><?xml version="1.0" encoding="utf-8"?>
+<file path=ppt/slides/slide42.xml><?xml version="1.0" encoding="utf-8"?>
 <p:sld xmlns:a="http://schemas.openxmlformats.org/drawingml/2006/main" xmlns:p="http://schemas.openxmlformats.org/presentationml/2006/main" xmlns:r="http://schemas.openxmlformats.org/officeDocument/2006/relationships">
   <p:cSld>
     <p:spTree>
@@ -27175,7 +27283,7 @@
 </p:sld>
 </file>
 
-<file path=ppt/slides/slide42.xml><?xml version="1.0" encoding="utf-8"?>
+<file path=ppt/slides/slide43.xml><?xml version="1.0" encoding="utf-8"?>
 <p:sld xmlns:a="http://schemas.openxmlformats.org/drawingml/2006/main" xmlns:p="http://schemas.openxmlformats.org/presentationml/2006/main" xmlns:r="http://schemas.openxmlformats.org/officeDocument/2006/relationships">
   <p:cSld>
     <p:spTree>
@@ -27331,7 +27439,7 @@
 </p:sld>
 </file>
 
-<file path=ppt/slides/slide43.xml><?xml version="1.0" encoding="utf-8"?>
+<file path=ppt/slides/slide44.xml><?xml version="1.0" encoding="utf-8"?>
 <p:sld xmlns:a="http://schemas.openxmlformats.org/drawingml/2006/main" xmlns:p="http://schemas.openxmlformats.org/presentationml/2006/main" xmlns:r="http://schemas.openxmlformats.org/officeDocument/2006/relationships">
   <p:cSld>
     <p:spTree>
@@ -27473,80 +27581,6 @@
           </a:p>
         </p:txBody>
       </p:sp>
-    </p:spTree>
-  </p:cSld>
-  <p:clrMapOvr>
-    <a:masterClrMapping/>
-  </p:clrMapOvr>
-</p:sld>
-</file>
-
-<file path=ppt/slides/slide44.xml><?xml version="1.0" encoding="utf-8"?>
-<p:sld xmlns:a="http://schemas.openxmlformats.org/drawingml/2006/main" xmlns:p="http://schemas.openxmlformats.org/presentationml/2006/main" xmlns:r="http://schemas.openxmlformats.org/officeDocument/2006/relationships">
-  <p:cSld>
-    <p:spTree>
-      <p:nvGrpSpPr>
-        <p:cNvPr id="1" name=""/>
-        <p:cNvGrpSpPr/>
-        <p:nvPr/>
-      </p:nvGrpSpPr>
-      <p:grpSpPr/>
-      <p:sp>
-        <p:nvSpPr>
-          <p:cNvPr id="2" name="Title 1"/>
-          <p:cNvSpPr>
-            <a:spLocks noGrp="1"/>
-          </p:cNvSpPr>
-          <p:nvPr>
-            <p:ph type="title"/>
-          </p:nvPr>
-        </p:nvSpPr>
-        <p:spPr/>
-        <p:txBody>
-          <a:bodyPr/>
-          <a:lstStyle/>
-          <a:p>
-            <a:pPr indent="0" lvl="0" marL="0" rtl="0" algn="l">
-              <a:spcBef>
-                <a:spcPts val="0"/>
-              </a:spcBef>
-              <a:spcAft>
-                <a:spcPts val="0"/>
-              </a:spcAft>
-              <a:buNone/>
-            </a:pPr>
-            <a:r>
-              <a:rPr lang="en"/>
-              <a:t>One Instance, Reached From Anywhere</a:t>
-            </a:r>
-            <a:endParaRPr/>
-          </a:p>
-        </p:txBody>
-      </p:sp>
-      <p:pic>
-        <p:nvPicPr>
-          <p:cNvPr id="3" name="Picture 2" descr="image.png"/>
-          <p:cNvPicPr>
-            <a:picLocks noChangeAspect="1"/>
-          </p:cNvPicPr>
-          <p:nvPr/>
-        </p:nvPicPr>
-        <p:blipFill>
-          <a:blip r:embed="rId2"/>
-          <a:stretch>
-            <a:fillRect/>
-          </a:stretch>
-        </p:blipFill>
-        <p:spPr>
-          <a:xfrm>
-            <a:off x="320039" y="1051560"/>
-            <a:ext cx="8503920" cy="3779520"/>
-          </a:xfrm>
-          <a:prstGeom prst="rect">
-            <a:avLst/>
-          </a:prstGeom>
-        </p:spPr>
-      </p:pic>
     </p:spTree>
   </p:cSld>
   <p:clrMapOvr>

--- a/slides/02 Flappy Bird.pptx
+++ b/slides/02 Flappy Bird.pptx
@@ -3392,7 +3392,7 @@
           <a:lstStyle/>
           <a:p>
             <a:r>
-              <a:t>The Gang of Four’s definition: one instance, and global access to it. The cartoons: everyone reaching for the same object.</a:t>
+              <a:t>The Gang of Four’s definition: one instance, and global access to it.</a:t>
             </a:r>
           </a:p>
         </p:txBody>

--- a/slides/02 Flappy Bird.pptx
+++ b/slides/02 Flappy Bird.pptx
@@ -50,6 +50,8 @@
     <p:sldId id="293" r:id="rId43"/>
     <p:sldId id="294" r:id="rId44"/>
     <p:sldId id="295" r:id="rId54"/>
+    <p:sldId id="306" r:id="rId19"/>
+    <p:sldId id="307" r:id="rId15"/>
     <p:sldId id="298" r:id="rId57"/>
     <p:sldId id="296" r:id="rId55"/>
   </p:sldIdLst>
@@ -843,6 +845,69 @@
 </p:notes>
 </file>
 
+<file path=ppt/notesSlides/notesSlide10.xml><?xml version="1.0" encoding="utf-8"?>
+<p:notes xmlns:a="http://schemas.openxmlformats.org/drawingml/2006/main" xmlns:p="http://schemas.openxmlformats.org/presentationml/2006/main" xmlns:r="http://schemas.openxmlformats.org/officeDocument/2006/relationships">
+  <p:cSld>
+    <p:spTree>
+      <p:nvGrpSpPr>
+        <p:cNvPr id="1" name=""/>
+        <p:cNvGrpSpPr/>
+        <p:nvPr/>
+      </p:nvGrpSpPr>
+      <p:grpSpPr>
+        <a:xfrm>
+          <a:off x="0" y="0"/>
+          <a:ext cx="0" cy="0"/>
+          <a:chOff x="0" y="0"/>
+          <a:chExt cx="0" cy="0"/>
+        </a:xfrm>
+      </p:grpSpPr>
+      <p:sp>
+        <p:nvSpPr>
+          <p:cNvPr id="2" name="Slide Image Placeholder 1"/>
+          <p:cNvSpPr>
+            <a:spLocks noGrp="1"/>
+          </p:cNvSpPr>
+          <p:nvPr>
+            <p:ph type="sldImg" idx="2"/>
+          </p:nvPr>
+        </p:nvSpPr>
+        <p:spPr/>
+      </p:sp>
+      <p:sp>
+        <p:nvSpPr>
+          <p:cNvPr id="3" name="Notes Placeholder 2"/>
+          <p:cNvSpPr>
+            <a:spLocks noGrp="1"/>
+          </p:cNvSpPr>
+          <p:nvPr>
+            <p:ph type="body" idx="1"/>
+          </p:nvPr>
+        </p:nvSpPr>
+        <p:spPr/>
+        <p:txBody>
+          <a:bodyPr/>
+          <a:lstStyle/>
+          <a:p>
+            <a:r>
+              <a:t>Who holds what in the finished Flappy Bird. Game1 hands Update and Draw to the state machine; the play state owns the bird and the pipes.</a:t>
+            </a:r>
+          </a:p>
+          <a:p>
+            <a:r>
+              <a:t>Art and Audio are global, so no arrow leads to them. Ask: is that a strength of the diagram or a hole in it?</a:t>
+            </a:r>
+          </a:p>
+        </p:txBody>
+      </p:sp>
+    </p:spTree>
+  </p:cSld>
+  <p:clrMapOvr>
+    <a:masterClrMapping/>
+  </p:clrMapOvr>
+</p:notes>
+</file>
+
 <file path=ppt/notesSlides/notesSlide11.xml><?xml version="1.0" encoding="utf-8"?>
 <p:notes xmlns:a="http://schemas.openxmlformats.org/drawingml/2006/main" xmlns:r="http://schemas.openxmlformats.org/officeDocument/2006/relationships" xmlns:mc="http://schemas.openxmlformats.org/markup-compatibility/2006" xmlns:mv="urn:schemas-microsoft-com:mac:vml" xmlns:p="http://schemas.openxmlformats.org/presentationml/2006/main" xmlns:c="http://schemas.openxmlformats.org/drawingml/2006/chart" xmlns:dgm="http://schemas.openxmlformats.org/drawingml/2006/diagram" xmlns:o="urn:schemas-microsoft-com:office:office" xmlns:v="urn:schemas-microsoft-com:vml" xmlns:pvml="urn:schemas-microsoft-com:office:powerpoint" xmlns:com="http://schemas.openxmlformats.org/drawingml/2006/compatibility" xmlns:p14="http://schemas.microsoft.com/office/powerpoint/2010/main" xmlns:p15="http://schemas.microsoft.com/office/powerpoint/2012/main" xmlns:ahyp="http://schemas.microsoft.com/office/drawing/2018/hyperlinkcolor" showMasterPhAnim="0" showMasterSp="0">
   <p:cSld>
@@ -4066,6 +4131,64 @@
           <a:p>
             <a:r>
               <a:t>Ask: why set the velocity on a flap, and not add to it? Answer: the flap would be weaker the faster the bird falls.</a:t>
+            </a:r>
+          </a:p>
+        </p:txBody>
+      </p:sp>
+    </p:spTree>
+  </p:cSld>
+  <p:clrMapOvr>
+    <a:masterClrMapping/>
+  </p:clrMapOvr>
+</p:notes>
+</file>
+
+<file path=ppt/notesSlides/notesSlide46.xml><?xml version="1.0" encoding="utf-8"?>
+<p:notes xmlns:a="http://schemas.openxmlformats.org/drawingml/2006/main" xmlns:p="http://schemas.openxmlformats.org/presentationml/2006/main" xmlns:r="http://schemas.openxmlformats.org/officeDocument/2006/relationships">
+  <p:cSld>
+    <p:spTree>
+      <p:nvGrpSpPr>
+        <p:cNvPr id="1" name=""/>
+        <p:cNvGrpSpPr/>
+        <p:nvPr/>
+      </p:nvGrpSpPr>
+      <p:grpSpPr>
+        <a:xfrm>
+          <a:off x="0" y="0"/>
+          <a:ext cx="0" cy="0"/>
+          <a:chOff x="0" y="0"/>
+          <a:chExt cx="0" cy="0"/>
+        </a:xfrm>
+      </p:grpSpPr>
+      <p:sp>
+        <p:nvSpPr>
+          <p:cNvPr id="2" name="Slide Image Placeholder 1"/>
+          <p:cNvSpPr>
+            <a:spLocks noGrp="1"/>
+          </p:cNvSpPr>
+          <p:nvPr>
+            <p:ph type="sldImg" idx="2"/>
+          </p:nvPr>
+        </p:nvSpPr>
+        <p:spPr/>
+      </p:sp>
+      <p:sp>
+        <p:nvSpPr>
+          <p:cNvPr id="3" name="Notes Placeholder 2"/>
+          <p:cNvSpPr>
+            <a:spLocks noGrp="1"/>
+          </p:cNvSpPr>
+          <p:nvPr>
+            <p:ph type="body" idx="1"/>
+          </p:nvPr>
+        </p:nvSpPr>
+        <p:spPr/>
+        <p:txBody>
+          <a:bodyPr/>
+          <a:lstStyle/>
+          <a:p>
+            <a:r>
+              <a:t>The session in one slide. Read each concern aloud and let the class give the answer before pointing at it.</a:t>
             </a:r>
           </a:p>
         </p:txBody>
@@ -27589,6 +27712,1325 @@
 </p:sld>
 </file>
 
+<file path=ppt/slides/slide45.xml><?xml version="1.0" encoding="utf-8"?>
+<p:sld xmlns:a="http://schemas.openxmlformats.org/drawingml/2006/main" xmlns:p="http://schemas.openxmlformats.org/presentationml/2006/main" xmlns:r="http://schemas.openxmlformats.org/officeDocument/2006/relationships">
+  <p:cSld>
+    <p:spTree>
+      <p:nvGrpSpPr>
+        <p:cNvPr id="1" name=""/>
+        <p:cNvGrpSpPr/>
+        <p:nvPr/>
+      </p:nvGrpSpPr>
+      <p:grpSpPr/>
+      <p:sp>
+        <p:nvSpPr>
+          <p:cNvPr id="2" name="Title 1"/>
+          <p:cNvSpPr>
+            <a:spLocks noGrp="1"/>
+          </p:cNvSpPr>
+          <p:nvPr>
+            <p:ph type="title"/>
+          </p:nvPr>
+        </p:nvSpPr>
+        <p:spPr/>
+        <p:txBody>
+          <a:bodyPr/>
+          <a:lstStyle/>
+          <a:p>
+            <a:pPr indent="0" lvl="0" marL="0" rtl="0" algn="l">
+              <a:spcBef>
+                <a:spcPts val="0"/>
+              </a:spcBef>
+              <a:spcAft>
+                <a:spcPts val="0"/>
+              </a:spcAft>
+              <a:buNone/>
+            </a:pPr>
+            <a:r>
+              <a:rPr lang="en"/>
+              <a:t>The Whole Game</a:t>
+            </a:r>
+            <a:endParaRPr/>
+          </a:p>
+        </p:txBody>
+      </p:sp>
+      <p:sp>
+        <p:nvSpPr>
+          <p:cNvPr id="3" name="Text Placeholder 2"/>
+          <p:cNvSpPr>
+            <a:spLocks noGrp="1"/>
+          </p:cNvSpPr>
+          <p:nvPr>
+            <p:ph type="body" idx="1"/>
+          </p:nvPr>
+        </p:nvSpPr>
+        <p:spPr>
+          <a:xfrm>
+            <a:off x="311700" y="885950"/>
+            <a:ext cx="8520600" cy="521208"/>
+          </a:xfrm>
+        </p:spPr>
+        <p:txBody>
+          <a:bodyPr/>
+          <a:lstStyle/>
+          <a:p>
+            <a:pPr indent="-330200" lvl="0" marL="457200" rtl="0" algn="l">
+              <a:spcBef>
+                <a:spcPts val="0"/>
+              </a:spcBef>
+              <a:spcAft>
+                <a:spcPts val="0"/>
+              </a:spcAft>
+              <a:buSzPts val="1600"/>
+              <a:buChar char="●"/>
+            </a:pPr>
+            <a:r>
+              <a:rPr lang="en" b="1"/>
+              <a:t>Flappy12 adds music and sounds. The play state owns the bird and the pipes.</a:t>
+            </a:r>
+            <a:endParaRPr/>
+          </a:p>
+        </p:txBody>
+      </p:sp>
+      <p:sp>
+        <p:nvSpPr>
+          <p:cNvPr id="4" name="Rounded Rectangle 3"/>
+          <p:cNvSpPr/>
+          <p:nvPr/>
+        </p:nvSpPr>
+        <p:spPr>
+          <a:xfrm>
+            <a:off x="3429000" y="1481328"/>
+            <a:ext cx="2286000" cy="566928"/>
+          </a:xfrm>
+          <a:prstGeom prst="roundRect">
+            <a:avLst>
+              <a:gd name="adj" fmla="val 12000"/>
+            </a:avLst>
+          </a:prstGeom>
+          <a:solidFill>
+            <a:srgbClr val="2E3338"/>
+          </a:solidFill>
+          <a:ln w="25400">
+            <a:solidFill>
+              <a:srgbClr val="D45D35"/>
+            </a:solidFill>
+          </a:ln>
+          <a:effectLst/>
+        </p:spPr>
+        <p:style>
+          <a:lnRef idx="1">
+            <a:schemeClr val="accent1"/>
+          </a:lnRef>
+          <a:fillRef idx="3">
+            <a:schemeClr val="accent1"/>
+          </a:fillRef>
+          <a:effectRef idx="2">
+            <a:schemeClr val="accent1"/>
+          </a:effectRef>
+          <a:fontRef idx="minor">
+            <a:schemeClr val="lt1"/>
+          </a:fontRef>
+        </p:style>
+        <p:txBody>
+          <a:bodyPr rtlCol="0" anchor="ctr" wrap="square" lIns="73152" rIns="73152"/>
+          <a:lstStyle/>
+          <a:p>
+            <a:pPr algn="ctr"/>
+            <a:r>
+              <a:rPr sz="1300" b="1">
+                <a:solidFill>
+                  <a:srgbClr val="DEE2E6"/>
+                </a:solidFill>
+              </a:rPr>
+              <a:t>Game1 : Core</a:t>
+            </a:r>
+          </a:p>
+          <a:p>
+            <a:pPr algn="ctr"/>
+            <a:r>
+              <a:rPr sz="1100" b="0">
+                <a:solidFill>
+                  <a:srgbClr val="9AA3AB"/>
+                </a:solidFill>
+              </a:rPr>
+              <a:t>scrolls the background</a:t>
+            </a:r>
+          </a:p>
+        </p:txBody>
+      </p:sp>
+      <p:sp>
+        <p:nvSpPr>
+          <p:cNvPr id="5" name="Rounded Rectangle 4"/>
+          <p:cNvSpPr/>
+          <p:nvPr/>
+        </p:nvSpPr>
+        <p:spPr>
+          <a:xfrm>
+            <a:off x="3429000" y="2246376"/>
+            <a:ext cx="2286000" cy="566928"/>
+          </a:xfrm>
+          <a:prstGeom prst="roundRect">
+            <a:avLst>
+              <a:gd name="adj" fmla="val 12000"/>
+            </a:avLst>
+          </a:prstGeom>
+          <a:solidFill>
+            <a:srgbClr val="2E3338"/>
+          </a:solidFill>
+          <a:ln>
+            <a:noFill/>
+          </a:ln>
+          <a:effectLst/>
+        </p:spPr>
+        <p:style>
+          <a:lnRef idx="1">
+            <a:schemeClr val="accent1"/>
+          </a:lnRef>
+          <a:fillRef idx="3">
+            <a:schemeClr val="accent1"/>
+          </a:fillRef>
+          <a:effectRef idx="2">
+            <a:schemeClr val="accent1"/>
+          </a:effectRef>
+          <a:fontRef idx="minor">
+            <a:schemeClr val="lt1"/>
+          </a:fontRef>
+        </p:style>
+        <p:txBody>
+          <a:bodyPr rtlCol="0" anchor="ctr" wrap="square" lIns="73152" rIns="73152"/>
+          <a:lstStyle/>
+          <a:p>
+            <a:pPr algn="ctr"/>
+            <a:r>
+              <a:rPr sz="1300" b="1">
+                <a:solidFill>
+                  <a:srgbClr val="DEE2E6"/>
+                </a:solidFill>
+              </a:rPr>
+              <a:t>StateMachine</a:t>
+            </a:r>
+          </a:p>
+          <a:p>
+            <a:pPr algn="ctr"/>
+            <a:r>
+              <a:rPr sz="1100" b="0">
+                <a:solidFill>
+                  <a:srgbClr val="9AA3AB"/>
+                </a:solidFill>
+              </a:rPr>
+              <a:t>the current state</a:t>
+            </a:r>
+          </a:p>
+        </p:txBody>
+      </p:sp>
+      <p:sp>
+        <p:nvSpPr>
+          <p:cNvPr id="6" name="Rounded Rectangle 5"/>
+          <p:cNvSpPr/>
+          <p:nvPr/>
+        </p:nvSpPr>
+        <p:spPr>
+          <a:xfrm>
+            <a:off x="374903" y="3011424"/>
+            <a:ext cx="1591056" cy="566928"/>
+          </a:xfrm>
+          <a:prstGeom prst="roundRect">
+            <a:avLst>
+              <a:gd name="adj" fmla="val 12000"/>
+            </a:avLst>
+          </a:prstGeom>
+          <a:solidFill>
+            <a:srgbClr val="2E3338"/>
+          </a:solidFill>
+          <a:ln>
+            <a:noFill/>
+          </a:ln>
+          <a:effectLst/>
+        </p:spPr>
+        <p:style>
+          <a:lnRef idx="1">
+            <a:schemeClr val="accent1"/>
+          </a:lnRef>
+          <a:fillRef idx="3">
+            <a:schemeClr val="accent1"/>
+          </a:fillRef>
+          <a:effectRef idx="2">
+            <a:schemeClr val="accent1"/>
+          </a:effectRef>
+          <a:fontRef idx="minor">
+            <a:schemeClr val="lt1"/>
+          </a:fontRef>
+        </p:style>
+        <p:txBody>
+          <a:bodyPr rtlCol="0" anchor="ctr" wrap="square" lIns="73152" rIns="73152"/>
+          <a:lstStyle/>
+          <a:p>
+            <a:pPr algn="ctr"/>
+            <a:r>
+              <a:rPr sz="1300" b="1">
+                <a:solidFill>
+                  <a:srgbClr val="DEE2E6"/>
+                </a:solidFill>
+              </a:rPr>
+              <a:t>TitleState</a:t>
+            </a:r>
+          </a:p>
+        </p:txBody>
+      </p:sp>
+      <p:cxnSp>
+        <p:nvCxnSpPr>
+          <p:cNvPr id="7" name="Connector 6"/>
+          <p:cNvCxnSpPr/>
+          <p:nvPr/>
+        </p:nvCxnSpPr>
+        <p:spPr>
+          <a:xfrm flipH="1">
+            <a:off x="1170432" y="2831592"/>
+            <a:ext cx="3401568" cy="161544"/>
+          </a:xfrm>
+          <a:prstGeom prst="line">
+            <a:avLst/>
+          </a:prstGeom>
+          <a:ln w="25400">
+            <a:solidFill>
+              <a:srgbClr val="9AA3AB"/>
+            </a:solidFill>
+            <a:tailEnd type="triangle"/>
+          </a:ln>
+        </p:spPr>
+        <p:style>
+          <a:lnRef idx="2">
+            <a:schemeClr val="accent1"/>
+          </a:lnRef>
+          <a:fillRef idx="0">
+            <a:schemeClr val="accent1"/>
+          </a:fillRef>
+          <a:effectRef idx="1">
+            <a:schemeClr val="accent1"/>
+          </a:effectRef>
+          <a:fontRef idx="minor">
+            <a:schemeClr val="tx1"/>
+          </a:fontRef>
+        </p:style>
+      </p:cxnSp>
+      <p:sp>
+        <p:nvSpPr>
+          <p:cNvPr id="8" name="Rounded Rectangle 7"/>
+          <p:cNvSpPr/>
+          <p:nvPr/>
+        </p:nvSpPr>
+        <p:spPr>
+          <a:xfrm>
+            <a:off x="2075688" y="3011424"/>
+            <a:ext cx="1591056" cy="566928"/>
+          </a:xfrm>
+          <a:prstGeom prst="roundRect">
+            <a:avLst>
+              <a:gd name="adj" fmla="val 12000"/>
+            </a:avLst>
+          </a:prstGeom>
+          <a:solidFill>
+            <a:srgbClr val="2E3338"/>
+          </a:solidFill>
+          <a:ln>
+            <a:noFill/>
+          </a:ln>
+          <a:effectLst/>
+        </p:spPr>
+        <p:style>
+          <a:lnRef idx="1">
+            <a:schemeClr val="accent1"/>
+          </a:lnRef>
+          <a:fillRef idx="3">
+            <a:schemeClr val="accent1"/>
+          </a:fillRef>
+          <a:effectRef idx="2">
+            <a:schemeClr val="accent1"/>
+          </a:effectRef>
+          <a:fontRef idx="minor">
+            <a:schemeClr val="lt1"/>
+          </a:fontRef>
+        </p:style>
+        <p:txBody>
+          <a:bodyPr rtlCol="0" anchor="ctr" wrap="square" lIns="73152" rIns="73152"/>
+          <a:lstStyle/>
+          <a:p>
+            <a:pPr algn="ctr"/>
+            <a:r>
+              <a:rPr sz="1300" b="1">
+                <a:solidFill>
+                  <a:srgbClr val="DEE2E6"/>
+                </a:solidFill>
+              </a:rPr>
+              <a:t>CountdownState</a:t>
+            </a:r>
+          </a:p>
+        </p:txBody>
+      </p:sp>
+      <p:cxnSp>
+        <p:nvCxnSpPr>
+          <p:cNvPr id="9" name="Connector 8"/>
+          <p:cNvCxnSpPr/>
+          <p:nvPr/>
+        </p:nvCxnSpPr>
+        <p:spPr>
+          <a:xfrm flipH="1">
+            <a:off x="2871216" y="2831592"/>
+            <a:ext cx="1700784" cy="161544"/>
+          </a:xfrm>
+          <a:prstGeom prst="line">
+            <a:avLst/>
+          </a:prstGeom>
+          <a:ln w="25400">
+            <a:solidFill>
+              <a:srgbClr val="9AA3AB"/>
+            </a:solidFill>
+            <a:tailEnd type="triangle"/>
+          </a:ln>
+        </p:spPr>
+        <p:style>
+          <a:lnRef idx="2">
+            <a:schemeClr val="accent1"/>
+          </a:lnRef>
+          <a:fillRef idx="0">
+            <a:schemeClr val="accent1"/>
+          </a:fillRef>
+          <a:effectRef idx="1">
+            <a:schemeClr val="accent1"/>
+          </a:effectRef>
+          <a:fontRef idx="minor">
+            <a:schemeClr val="tx1"/>
+          </a:fontRef>
+        </p:style>
+      </p:cxnSp>
+      <p:sp>
+        <p:nvSpPr>
+          <p:cNvPr id="10" name="Rounded Rectangle 9"/>
+          <p:cNvSpPr/>
+          <p:nvPr/>
+        </p:nvSpPr>
+        <p:spPr>
+          <a:xfrm>
+            <a:off x="4279392" y="3011424"/>
+            <a:ext cx="2286000" cy="566928"/>
+          </a:xfrm>
+          <a:prstGeom prst="roundRect">
+            <a:avLst>
+              <a:gd name="adj" fmla="val 12000"/>
+            </a:avLst>
+          </a:prstGeom>
+          <a:solidFill>
+            <a:srgbClr val="2E3338"/>
+          </a:solidFill>
+          <a:ln>
+            <a:noFill/>
+          </a:ln>
+          <a:effectLst/>
+        </p:spPr>
+        <p:style>
+          <a:lnRef idx="1">
+            <a:schemeClr val="accent1"/>
+          </a:lnRef>
+          <a:fillRef idx="3">
+            <a:schemeClr val="accent1"/>
+          </a:fillRef>
+          <a:effectRef idx="2">
+            <a:schemeClr val="accent1"/>
+          </a:effectRef>
+          <a:fontRef idx="minor">
+            <a:schemeClr val="lt1"/>
+          </a:fontRef>
+        </p:style>
+        <p:txBody>
+          <a:bodyPr rtlCol="0" anchor="ctr" wrap="square" lIns="73152" rIns="73152"/>
+          <a:lstStyle/>
+          <a:p>
+            <a:pPr algn="ctr"/>
+            <a:r>
+              <a:rPr sz="1300" b="1">
+                <a:solidFill>
+                  <a:srgbClr val="DEE2E6"/>
+                </a:solidFill>
+              </a:rPr>
+              <a:t>PlayState</a:t>
+            </a:r>
+          </a:p>
+        </p:txBody>
+      </p:sp>
+      <p:sp>
+        <p:nvSpPr>
+          <p:cNvPr id="11" name="Rounded Rectangle 10"/>
+          <p:cNvSpPr/>
+          <p:nvPr/>
+        </p:nvSpPr>
+        <p:spPr>
+          <a:xfrm>
+            <a:off x="3776472" y="3776472"/>
+            <a:ext cx="1591056" cy="566928"/>
+          </a:xfrm>
+          <a:prstGeom prst="roundRect">
+            <a:avLst>
+              <a:gd name="adj" fmla="val 12000"/>
+            </a:avLst>
+          </a:prstGeom>
+          <a:solidFill>
+            <a:srgbClr val="2E3338"/>
+          </a:solidFill>
+          <a:ln>
+            <a:noFill/>
+          </a:ln>
+          <a:effectLst/>
+        </p:spPr>
+        <p:style>
+          <a:lnRef idx="1">
+            <a:schemeClr val="accent1"/>
+          </a:lnRef>
+          <a:fillRef idx="3">
+            <a:schemeClr val="accent1"/>
+          </a:fillRef>
+          <a:effectRef idx="2">
+            <a:schemeClr val="accent1"/>
+          </a:effectRef>
+          <a:fontRef idx="minor">
+            <a:schemeClr val="lt1"/>
+          </a:fontRef>
+        </p:style>
+        <p:txBody>
+          <a:bodyPr rtlCol="0" anchor="ctr" wrap="square" lIns="73152" rIns="73152"/>
+          <a:lstStyle/>
+          <a:p>
+            <a:pPr algn="ctr"/>
+            <a:r>
+              <a:rPr sz="1300" b="1">
+                <a:solidFill>
+                  <a:srgbClr val="DEE2E6"/>
+                </a:solidFill>
+              </a:rPr>
+              <a:t>Bird</a:t>
+            </a:r>
+          </a:p>
+        </p:txBody>
+      </p:sp>
+      <p:cxnSp>
+        <p:nvCxnSpPr>
+          <p:cNvPr id="12" name="Connector 11"/>
+          <p:cNvCxnSpPr/>
+          <p:nvPr/>
+        </p:nvCxnSpPr>
+        <p:spPr>
+          <a:xfrm flipH="1">
+            <a:off x="4572000" y="3596640"/>
+            <a:ext cx="850392" cy="161544"/>
+          </a:xfrm>
+          <a:prstGeom prst="line">
+            <a:avLst/>
+          </a:prstGeom>
+          <a:ln w="25400">
+            <a:solidFill>
+              <a:srgbClr val="9AA3AB"/>
+            </a:solidFill>
+            <a:tailEnd type="triangle"/>
+          </a:ln>
+        </p:spPr>
+        <p:style>
+          <a:lnRef idx="2">
+            <a:schemeClr val="accent1"/>
+          </a:lnRef>
+          <a:fillRef idx="0">
+            <a:schemeClr val="accent1"/>
+          </a:fillRef>
+          <a:effectRef idx="1">
+            <a:schemeClr val="accent1"/>
+          </a:effectRef>
+          <a:fontRef idx="minor">
+            <a:schemeClr val="tx1"/>
+          </a:fontRef>
+        </p:style>
+      </p:cxnSp>
+      <p:sp>
+        <p:nvSpPr>
+          <p:cNvPr id="13" name="Rounded Rectangle 12"/>
+          <p:cNvSpPr/>
+          <p:nvPr/>
+        </p:nvSpPr>
+        <p:spPr>
+          <a:xfrm>
+            <a:off x="5477256" y="3776472"/>
+            <a:ext cx="1591056" cy="566928"/>
+          </a:xfrm>
+          <a:prstGeom prst="roundRect">
+            <a:avLst>
+              <a:gd name="adj" fmla="val 12000"/>
+            </a:avLst>
+          </a:prstGeom>
+          <a:solidFill>
+            <a:srgbClr val="2E3338"/>
+          </a:solidFill>
+          <a:ln>
+            <a:noFill/>
+          </a:ln>
+          <a:effectLst/>
+        </p:spPr>
+        <p:style>
+          <a:lnRef idx="1">
+            <a:schemeClr val="accent1"/>
+          </a:lnRef>
+          <a:fillRef idx="3">
+            <a:schemeClr val="accent1"/>
+          </a:fillRef>
+          <a:effectRef idx="2">
+            <a:schemeClr val="accent1"/>
+          </a:effectRef>
+          <a:fontRef idx="minor">
+            <a:schemeClr val="lt1"/>
+          </a:fontRef>
+        </p:style>
+        <p:txBody>
+          <a:bodyPr rtlCol="0" anchor="ctr" wrap="square" lIns="73152" rIns="73152"/>
+          <a:lstStyle/>
+          <a:p>
+            <a:pPr algn="ctr"/>
+            <a:r>
+              <a:rPr sz="1300" b="1">
+                <a:solidFill>
+                  <a:srgbClr val="DEE2E6"/>
+                </a:solidFill>
+              </a:rPr>
+              <a:t>PipePair</a:t>
+            </a:r>
+          </a:p>
+          <a:p>
+            <a:pPr algn="ctr"/>
+            <a:r>
+              <a:rPr sz="1100" b="0">
+                <a:solidFill>
+                  <a:srgbClr val="9AA3AB"/>
+                </a:solidFill>
+              </a:rPr>
+              <a:t>two pipes each</a:t>
+            </a:r>
+          </a:p>
+        </p:txBody>
+      </p:sp>
+      <p:cxnSp>
+        <p:nvCxnSpPr>
+          <p:cNvPr id="14" name="Connector 13"/>
+          <p:cNvCxnSpPr/>
+          <p:nvPr/>
+        </p:nvCxnSpPr>
+        <p:spPr>
+          <a:xfrm>
+            <a:off x="5422392" y="3596640"/>
+            <a:ext cx="850392" cy="161544"/>
+          </a:xfrm>
+          <a:prstGeom prst="line">
+            <a:avLst/>
+          </a:prstGeom>
+          <a:ln w="25400">
+            <a:solidFill>
+              <a:srgbClr val="9AA3AB"/>
+            </a:solidFill>
+            <a:tailEnd type="triangle"/>
+          </a:ln>
+        </p:spPr>
+        <p:style>
+          <a:lnRef idx="2">
+            <a:schemeClr val="accent1"/>
+          </a:lnRef>
+          <a:fillRef idx="0">
+            <a:schemeClr val="accent1"/>
+          </a:fillRef>
+          <a:effectRef idx="1">
+            <a:schemeClr val="accent1"/>
+          </a:effectRef>
+          <a:fontRef idx="minor">
+            <a:schemeClr val="tx1"/>
+          </a:fontRef>
+        </p:style>
+      </p:cxnSp>
+      <p:cxnSp>
+        <p:nvCxnSpPr>
+          <p:cNvPr id="15" name="Connector 14"/>
+          <p:cNvCxnSpPr/>
+          <p:nvPr/>
+        </p:nvCxnSpPr>
+        <p:spPr>
+          <a:xfrm>
+            <a:off x="4572000" y="2831592"/>
+            <a:ext cx="850392" cy="161544"/>
+          </a:xfrm>
+          <a:prstGeom prst="line">
+            <a:avLst/>
+          </a:prstGeom>
+          <a:ln w="25400">
+            <a:solidFill>
+              <a:srgbClr val="9AA3AB"/>
+            </a:solidFill>
+            <a:tailEnd type="triangle"/>
+          </a:ln>
+        </p:spPr>
+        <p:style>
+          <a:lnRef idx="2">
+            <a:schemeClr val="accent1"/>
+          </a:lnRef>
+          <a:fillRef idx="0">
+            <a:schemeClr val="accent1"/>
+          </a:fillRef>
+          <a:effectRef idx="1">
+            <a:schemeClr val="accent1"/>
+          </a:effectRef>
+          <a:fontRef idx="minor">
+            <a:schemeClr val="tx1"/>
+          </a:fontRef>
+        </p:style>
+      </p:cxnSp>
+      <p:sp>
+        <p:nvSpPr>
+          <p:cNvPr id="16" name="Rounded Rectangle 15"/>
+          <p:cNvSpPr/>
+          <p:nvPr/>
+        </p:nvSpPr>
+        <p:spPr>
+          <a:xfrm>
+            <a:off x="7178040" y="3011424"/>
+            <a:ext cx="1591056" cy="566928"/>
+          </a:xfrm>
+          <a:prstGeom prst="roundRect">
+            <a:avLst>
+              <a:gd name="adj" fmla="val 12000"/>
+            </a:avLst>
+          </a:prstGeom>
+          <a:solidFill>
+            <a:srgbClr val="2E3338"/>
+          </a:solidFill>
+          <a:ln>
+            <a:noFill/>
+          </a:ln>
+          <a:effectLst/>
+        </p:spPr>
+        <p:style>
+          <a:lnRef idx="1">
+            <a:schemeClr val="accent1"/>
+          </a:lnRef>
+          <a:fillRef idx="3">
+            <a:schemeClr val="accent1"/>
+          </a:fillRef>
+          <a:effectRef idx="2">
+            <a:schemeClr val="accent1"/>
+          </a:effectRef>
+          <a:fontRef idx="minor">
+            <a:schemeClr val="lt1"/>
+          </a:fontRef>
+        </p:style>
+        <p:txBody>
+          <a:bodyPr rtlCol="0" anchor="ctr" wrap="square" lIns="73152" rIns="73152"/>
+          <a:lstStyle/>
+          <a:p>
+            <a:pPr algn="ctr"/>
+            <a:r>
+              <a:rPr sz="1300" b="1">
+                <a:solidFill>
+                  <a:srgbClr val="DEE2E6"/>
+                </a:solidFill>
+              </a:rPr>
+              <a:t>ScoreState</a:t>
+            </a:r>
+          </a:p>
+        </p:txBody>
+      </p:sp>
+      <p:cxnSp>
+        <p:nvCxnSpPr>
+          <p:cNvPr id="17" name="Connector 16"/>
+          <p:cNvCxnSpPr/>
+          <p:nvPr/>
+        </p:nvCxnSpPr>
+        <p:spPr>
+          <a:xfrm>
+            <a:off x="4572000" y="2831592"/>
+            <a:ext cx="3401568" cy="161544"/>
+          </a:xfrm>
+          <a:prstGeom prst="line">
+            <a:avLst/>
+          </a:prstGeom>
+          <a:ln w="25400">
+            <a:solidFill>
+              <a:srgbClr val="9AA3AB"/>
+            </a:solidFill>
+            <a:tailEnd type="triangle"/>
+          </a:ln>
+        </p:spPr>
+        <p:style>
+          <a:lnRef idx="2">
+            <a:schemeClr val="accent1"/>
+          </a:lnRef>
+          <a:fillRef idx="0">
+            <a:schemeClr val="accent1"/>
+          </a:fillRef>
+          <a:effectRef idx="1">
+            <a:schemeClr val="accent1"/>
+          </a:effectRef>
+          <a:fontRef idx="minor">
+            <a:schemeClr val="tx1"/>
+          </a:fontRef>
+        </p:style>
+      </p:cxnSp>
+      <p:cxnSp>
+        <p:nvCxnSpPr>
+          <p:cNvPr id="18" name="Connector 17"/>
+          <p:cNvCxnSpPr/>
+          <p:nvPr/>
+        </p:nvCxnSpPr>
+        <p:spPr>
+          <a:xfrm>
+            <a:off x="4572000" y="2066544"/>
+            <a:ext cx="0" cy="161544"/>
+          </a:xfrm>
+          <a:prstGeom prst="line">
+            <a:avLst/>
+          </a:prstGeom>
+          <a:ln w="25400">
+            <a:solidFill>
+              <a:srgbClr val="9AA3AB"/>
+            </a:solidFill>
+            <a:tailEnd type="triangle"/>
+          </a:ln>
+        </p:spPr>
+        <p:style>
+          <a:lnRef idx="2">
+            <a:schemeClr val="accent1"/>
+          </a:lnRef>
+          <a:fillRef idx="0">
+            <a:schemeClr val="accent1"/>
+          </a:fillRef>
+          <a:effectRef idx="1">
+            <a:schemeClr val="accent1"/>
+          </a:effectRef>
+          <a:fontRef idx="minor">
+            <a:schemeClr val="tx1"/>
+          </a:fontRef>
+        </p:style>
+      </p:cxnSp>
+      <p:sp>
+        <p:nvSpPr>
+          <p:cNvPr id="19" name="TextBox 18"/>
+          <p:cNvSpPr txBox="1"/>
+          <p:nvPr/>
+        </p:nvSpPr>
+        <p:spPr>
+          <a:xfrm>
+            <a:off x="457200" y="4462272"/>
+            <a:ext cx="8229600" cy="365760"/>
+          </a:xfrm>
+          <a:prstGeom prst="rect">
+            <a:avLst/>
+          </a:prstGeom>
+          <a:noFill/>
+        </p:spPr>
+        <p:txBody>
+          <a:bodyPr wrap="square">
+            <a:spAutoFit/>
+          </a:bodyPr>
+          <a:lstStyle/>
+          <a:p>
+            <a:pPr algn="ctr"/>
+            <a:r>
+              <a:rPr sz="1300" b="0" i="0">
+                <a:solidFill>
+                  <a:srgbClr val="9AA3AB"/>
+                </a:solidFill>
+              </a:rPr>
+              <a:t>Art and Audio are not in the tree. Any class reaches them.</a:t>
+            </a:r>
+          </a:p>
+        </p:txBody>
+      </p:sp>
+    </p:spTree>
+  </p:cSld>
+  <p:clrMapOvr>
+    <a:masterClrMapping/>
+  </p:clrMapOvr>
+</p:sld>
+</file>
+
+<file path=ppt/slides/slide46.xml><?xml version="1.0" encoding="utf-8"?>
+<p:sld xmlns:a="http://schemas.openxmlformats.org/drawingml/2006/main" xmlns:p="http://schemas.openxmlformats.org/presentationml/2006/main" xmlns:r="http://schemas.openxmlformats.org/officeDocument/2006/relationships">
+  <p:cSld>
+    <p:spTree>
+      <p:nvGrpSpPr>
+        <p:cNvPr id="1" name=""/>
+        <p:cNvGrpSpPr/>
+        <p:nvPr/>
+      </p:nvGrpSpPr>
+      <p:grpSpPr/>
+      <p:sp>
+        <p:nvSpPr>
+          <p:cNvPr id="2" name="Title 1"/>
+          <p:cNvSpPr>
+            <a:spLocks noGrp="1"/>
+          </p:cNvSpPr>
+          <p:nvPr>
+            <p:ph type="title"/>
+          </p:nvPr>
+        </p:nvSpPr>
+        <p:spPr/>
+        <p:txBody>
+          <a:bodyPr/>
+          <a:lstStyle/>
+          <a:p>
+            <a:pPr indent="0" lvl="0" marL="0" rtl="0" algn="l">
+              <a:spcBef>
+                <a:spcPts val="0"/>
+              </a:spcBef>
+              <a:spcAft>
+                <a:spcPts val="0"/>
+              </a:spcAft>
+              <a:buNone/>
+            </a:pPr>
+            <a:r>
+              <a:rPr lang="en"/>
+              <a:t>Summary</a:t>
+            </a:r>
+            <a:endParaRPr/>
+          </a:p>
+        </p:txBody>
+      </p:sp>
+      <p:sp>
+        <p:nvSpPr>
+          <p:cNvPr id="3" name="Text Placeholder 2"/>
+          <p:cNvSpPr>
+            <a:spLocks noGrp="1"/>
+          </p:cNvSpPr>
+          <p:nvPr>
+            <p:ph type="body" idx="1"/>
+          </p:nvPr>
+        </p:nvSpPr>
+        <p:spPr>
+          <a:xfrm>
+            <a:off x="311700" y="885950"/>
+            <a:ext cx="8520600" cy="521208"/>
+          </a:xfrm>
+        </p:spPr>
+        <p:txBody>
+          <a:bodyPr/>
+          <a:lstStyle/>
+          <a:p>
+            <a:pPr indent="-330200" lvl="0" marL="457200" rtl="0" algn="l">
+              <a:spcBef>
+                <a:spcPts val="0"/>
+              </a:spcBef>
+              <a:spcAft>
+                <a:spcPts val="0"/>
+              </a:spcAft>
+              <a:buSzPts val="1600"/>
+              <a:buChar char="●"/>
+            </a:pPr>
+            <a:r>
+              <a:rPr lang="en" b="1"/>
+              <a:t>Six concerns, and this session’s answer to each.</a:t>
+            </a:r>
+            <a:endParaRPr/>
+          </a:p>
+        </p:txBody>
+      </p:sp>
+      <p:sp>
+        <p:nvSpPr>
+          <p:cNvPr id="4" name="Rounded Rectangle 3"/>
+          <p:cNvSpPr/>
+          <p:nvPr/>
+        </p:nvSpPr>
+        <p:spPr>
+          <a:xfrm>
+            <a:off x="548640" y="1417320"/>
+            <a:ext cx="2560320" cy="914400"/>
+          </a:xfrm>
+          <a:prstGeom prst="roundRect">
+            <a:avLst>
+              <a:gd name="adj" fmla="val 12000"/>
+            </a:avLst>
+          </a:prstGeom>
+          <a:solidFill>
+            <a:srgbClr val="2E3338"/>
+          </a:solidFill>
+          <a:ln>
+            <a:noFill/>
+          </a:ln>
+          <a:effectLst/>
+        </p:spPr>
+        <p:style>
+          <a:lnRef idx="1">
+            <a:schemeClr val="accent1"/>
+          </a:lnRef>
+          <a:fillRef idx="3">
+            <a:schemeClr val="accent1"/>
+          </a:fillRef>
+          <a:effectRef idx="2">
+            <a:schemeClr val="accent1"/>
+          </a:effectRef>
+          <a:fontRef idx="minor">
+            <a:schemeClr val="lt1"/>
+          </a:fontRef>
+        </p:style>
+        <p:txBody>
+          <a:bodyPr rtlCol="0" anchor="ctr" wrap="square" lIns="73152" rIns="73152"/>
+          <a:lstStyle/>
+          <a:p>
+            <a:pPr algn="ctr"/>
+            <a:r>
+              <a:rPr sz="1500" b="1">
+                <a:solidFill>
+                  <a:srgbClr val="DEE2E6"/>
+                </a:solidFill>
+              </a:rPr>
+              <a:t>How cheap a change is</a:t>
+            </a:r>
+          </a:p>
+          <a:p>
+            <a:pPr algn="ctr"/>
+            <a:r>
+              <a:rPr sz="1300" b="0">
+                <a:solidFill>
+                  <a:srgbClr val="9AA3AB"/>
+                </a:solidFill>
+              </a:rPr>
+              <a:t>Low coupling, high cohesion</a:t>
+            </a:r>
+          </a:p>
+        </p:txBody>
+      </p:sp>
+      <p:sp>
+        <p:nvSpPr>
+          <p:cNvPr id="5" name="Rounded Rectangle 4"/>
+          <p:cNvSpPr/>
+          <p:nvPr/>
+        </p:nvSpPr>
+        <p:spPr>
+          <a:xfrm>
+            <a:off x="3291840" y="1417320"/>
+            <a:ext cx="2560320" cy="914400"/>
+          </a:xfrm>
+          <a:prstGeom prst="roundRect">
+            <a:avLst>
+              <a:gd name="adj" fmla="val 12000"/>
+            </a:avLst>
+          </a:prstGeom>
+          <a:solidFill>
+            <a:srgbClr val="2E3338"/>
+          </a:solidFill>
+          <a:ln>
+            <a:noFill/>
+          </a:ln>
+          <a:effectLst/>
+        </p:spPr>
+        <p:style>
+          <a:lnRef idx="1">
+            <a:schemeClr val="accent1"/>
+          </a:lnRef>
+          <a:fillRef idx="3">
+            <a:schemeClr val="accent1"/>
+          </a:fillRef>
+          <a:effectRef idx="2">
+            <a:schemeClr val="accent1"/>
+          </a:effectRef>
+          <a:fontRef idx="minor">
+            <a:schemeClr val="lt1"/>
+          </a:fontRef>
+        </p:style>
+        <p:txBody>
+          <a:bodyPr rtlCol="0" anchor="ctr" wrap="square" lIns="73152" rIns="73152"/>
+          <a:lstStyle/>
+          <a:p>
+            <a:pPr algn="ctr"/>
+            <a:r>
+              <a:rPr sz="1500" b="1">
+                <a:solidFill>
+                  <a:srgbClr val="DEE2E6"/>
+                </a:solidFill>
+              </a:rPr>
+              <a:t>Code every game needs</a:t>
+            </a:r>
+          </a:p>
+          <a:p>
+            <a:pPr algn="ctr"/>
+            <a:r>
+              <a:rPr sz="1300" b="0">
+                <a:solidFill>
+                  <a:srgbClr val="9AA3AB"/>
+                </a:solidFill>
+              </a:rPr>
+              <a:t>A class library, GARCore</a:t>
+            </a:r>
+          </a:p>
+        </p:txBody>
+      </p:sp>
+      <p:sp>
+        <p:nvSpPr>
+          <p:cNvPr id="6" name="Rounded Rectangle 5"/>
+          <p:cNvSpPr/>
+          <p:nvPr/>
+        </p:nvSpPr>
+        <p:spPr>
+          <a:xfrm>
+            <a:off x="6035040" y="1417320"/>
+            <a:ext cx="2560320" cy="914400"/>
+          </a:xfrm>
+          <a:prstGeom prst="roundRect">
+            <a:avLst>
+              <a:gd name="adj" fmla="val 12000"/>
+            </a:avLst>
+          </a:prstGeom>
+          <a:solidFill>
+            <a:srgbClr val="2E3338"/>
+          </a:solidFill>
+          <a:ln>
+            <a:noFill/>
+          </a:ln>
+          <a:effectLst/>
+        </p:spPr>
+        <p:style>
+          <a:lnRef idx="1">
+            <a:schemeClr val="accent1"/>
+          </a:lnRef>
+          <a:fillRef idx="3">
+            <a:schemeClr val="accent1"/>
+          </a:fillRef>
+          <a:effectRef idx="2">
+            <a:schemeClr val="accent1"/>
+          </a:effectRef>
+          <a:fontRef idx="minor">
+            <a:schemeClr val="lt1"/>
+          </a:fontRef>
+        </p:style>
+        <p:txBody>
+          <a:bodyPr rtlCol="0" anchor="ctr" wrap="square" lIns="73152" rIns="73152"/>
+          <a:lstStyle/>
+          <a:p>
+            <a:pPr algn="ctr"/>
+            <a:r>
+              <a:rPr sz="1500" b="1">
+                <a:solidFill>
+                  <a:srgbClr val="DEE2E6"/>
+                </a:solidFill>
+              </a:rPr>
+              <a:t>Which screen the game is on</a:t>
+            </a:r>
+          </a:p>
+          <a:p>
+            <a:pPr algn="ctr"/>
+            <a:r>
+              <a:rPr sz="1300" b="0">
+                <a:solidFill>
+                  <a:srgbClr val="9AA3AB"/>
+                </a:solidFill>
+              </a:rPr>
+              <a:t>A state machine of IState objects</a:t>
+            </a:r>
+          </a:p>
+        </p:txBody>
+      </p:sp>
+      <p:sp>
+        <p:nvSpPr>
+          <p:cNvPr id="7" name="Rounded Rectangle 6"/>
+          <p:cNvSpPr/>
+          <p:nvPr/>
+        </p:nvSpPr>
+        <p:spPr>
+          <a:xfrm>
+            <a:off x="548640" y="2468880"/>
+            <a:ext cx="2560320" cy="914400"/>
+          </a:xfrm>
+          <a:prstGeom prst="roundRect">
+            <a:avLst>
+              <a:gd name="adj" fmla="val 12000"/>
+            </a:avLst>
+          </a:prstGeom>
+          <a:solidFill>
+            <a:srgbClr val="2E3338"/>
+          </a:solidFill>
+          <a:ln>
+            <a:noFill/>
+          </a:ln>
+          <a:effectLst/>
+        </p:spPr>
+        <p:style>
+          <a:lnRef idx="1">
+            <a:schemeClr val="accent1"/>
+          </a:lnRef>
+          <a:fillRef idx="3">
+            <a:schemeClr val="accent1"/>
+          </a:fillRef>
+          <a:effectRef idx="2">
+            <a:schemeClr val="accent1"/>
+          </a:effectRef>
+          <a:fontRef idx="minor">
+            <a:schemeClr val="lt1"/>
+          </a:fontRef>
+        </p:style>
+        <p:txBody>
+          <a:bodyPr rtlCol="0" anchor="ctr" wrap="square" lIns="73152" rIns="73152"/>
+          <a:lstStyle/>
+          <a:p>
+            <a:pPr algn="ctr"/>
+            <a:r>
+              <a:rPr sz="1500" b="1">
+                <a:solidFill>
+                  <a:srgbClr val="DEE2E6"/>
+                </a:solidFill>
+              </a:rPr>
+              <a:t>Levels nobody drew</a:t>
+            </a:r>
+          </a:p>
+          <a:p>
+            <a:pPr algn="ctr"/>
+            <a:r>
+              <a:rPr sz="1300" b="0">
+                <a:solidFill>
+                  <a:srgbClr val="9AA3AB"/>
+                </a:solidFill>
+              </a:rPr>
+              <a:t>Procedural generation</a:t>
+            </a:r>
+          </a:p>
+        </p:txBody>
+      </p:sp>
+      <p:sp>
+        <p:nvSpPr>
+          <p:cNvPr id="8" name="Rounded Rectangle 7"/>
+          <p:cNvSpPr/>
+          <p:nvPr/>
+        </p:nvSpPr>
+        <p:spPr>
+          <a:xfrm>
+            <a:off x="3291840" y="2468880"/>
+            <a:ext cx="2560320" cy="914400"/>
+          </a:xfrm>
+          <a:prstGeom prst="roundRect">
+            <a:avLst>
+              <a:gd name="adj" fmla="val 12000"/>
+            </a:avLst>
+          </a:prstGeom>
+          <a:solidFill>
+            <a:srgbClr val="2E3338"/>
+          </a:solidFill>
+          <a:ln>
+            <a:noFill/>
+          </a:ln>
+          <a:effectLst/>
+        </p:spPr>
+        <p:style>
+          <a:lnRef idx="1">
+            <a:schemeClr val="accent1"/>
+          </a:lnRef>
+          <a:fillRef idx="3">
+            <a:schemeClr val="accent1"/>
+          </a:fillRef>
+          <a:effectRef idx="2">
+            <a:schemeClr val="accent1"/>
+          </a:effectRef>
+          <a:fontRef idx="minor">
+            <a:schemeClr val="lt1"/>
+          </a:fontRef>
+        </p:style>
+        <p:txBody>
+          <a:bodyPr rtlCol="0" anchor="ctr" wrap="square" lIns="73152" rIns="73152"/>
+          <a:lstStyle/>
+          <a:p>
+            <a:pPr algn="ctr"/>
+            <a:r>
+              <a:rPr sz="1500" b="1">
+                <a:solidFill>
+                  <a:srgbClr val="DEE2E6"/>
+                </a:solidFill>
+              </a:rPr>
+              <a:t>Depth on a flat screen</a:t>
+            </a:r>
+          </a:p>
+          <a:p>
+            <a:pPr algn="ctr"/>
+            <a:r>
+              <a:rPr sz="1300" b="0">
+                <a:solidFill>
+                  <a:srgbClr val="9AA3AB"/>
+                </a:solidFill>
+              </a:rPr>
+              <a:t>Parallax scrolling</a:t>
+            </a:r>
+          </a:p>
+        </p:txBody>
+      </p:sp>
+      <p:sp>
+        <p:nvSpPr>
+          <p:cNvPr id="9" name="Rounded Rectangle 8"/>
+          <p:cNvSpPr/>
+          <p:nvPr/>
+        </p:nvSpPr>
+        <p:spPr>
+          <a:xfrm>
+            <a:off x="6035040" y="2468880"/>
+            <a:ext cx="2560320" cy="914400"/>
+          </a:xfrm>
+          <a:prstGeom prst="roundRect">
+            <a:avLst>
+              <a:gd name="adj" fmla="val 12000"/>
+            </a:avLst>
+          </a:prstGeom>
+          <a:solidFill>
+            <a:srgbClr val="2E3338"/>
+          </a:solidFill>
+          <a:ln>
+            <a:noFill/>
+          </a:ln>
+          <a:effectLst/>
+        </p:spPr>
+        <p:style>
+          <a:lnRef idx="1">
+            <a:schemeClr val="accent1"/>
+          </a:lnRef>
+          <a:fillRef idx="3">
+            <a:schemeClr val="accent1"/>
+          </a:fillRef>
+          <a:effectRef idx="2">
+            <a:schemeClr val="accent1"/>
+          </a:effectRef>
+          <a:fontRef idx="minor">
+            <a:schemeClr val="lt1"/>
+          </a:fontRef>
+        </p:style>
+        <p:txBody>
+          <a:bodyPr rtlCol="0" anchor="ctr" wrap="square" lIns="73152" rIns="73152"/>
+          <a:lstStyle/>
+          <a:p>
+            <a:pPr algn="ctr"/>
+            <a:r>
+              <a:rPr sz="1500" b="1">
+                <a:solidFill>
+                  <a:srgbClr val="DEE2E6"/>
+                </a:solidFill>
+              </a:rPr>
+              <a:t>Reaching the audio from anywhere</a:t>
+            </a:r>
+          </a:p>
+          <a:p>
+            <a:pPr algn="ctr"/>
+            <a:r>
+              <a:rPr sz="1300" b="0">
+                <a:solidFill>
+                  <a:srgbClr val="9AA3AB"/>
+                </a:solidFill>
+              </a:rPr>
+              <a:t>Singleton, and what it costs</a:t>
+            </a:r>
+          </a:p>
+        </p:txBody>
+      </p:sp>
+    </p:spTree>
+  </p:cSld>
+  <p:clrMapOvr>
+    <a:masterClrMapping/>
+  </p:clrMapOvr>
+</p:sld>
+</file>
+
 <file path=ppt/slides/slide5.xml><?xml version="1.0" encoding="utf-8"?>
 <p:sld xmlns:a="http://schemas.openxmlformats.org/drawingml/2006/main" xmlns:r="http://schemas.openxmlformats.org/officeDocument/2006/relationships" xmlns:mc="http://schemas.openxmlformats.org/markup-compatibility/2006" xmlns:mv="urn:schemas-microsoft-com:mac:vml" xmlns:p="http://schemas.openxmlformats.org/presentationml/2006/main" xmlns:c="http://schemas.openxmlformats.org/drawingml/2006/chart" xmlns:dgm="http://schemas.openxmlformats.org/drawingml/2006/diagram" xmlns:o="urn:schemas-microsoft-com:office:office" xmlns:v="urn:schemas-microsoft-com:vml" xmlns:pvml="urn:schemas-microsoft-com:office:powerpoint" xmlns:com="http://schemas.openxmlformats.org/drawingml/2006/compatibility" xmlns:p14="http://schemas.microsoft.com/office/powerpoint/2010/main" xmlns:p15="http://schemas.microsoft.com/office/powerpoint/2012/main" xmlns:ahyp="http://schemas.microsoft.com/office/drawing/2018/hyperlinkcolor">
   <p:cSld>

--- a/slides/02 Flappy Bird.pptx
+++ b/slides/02 Flappy Bird.pptx
@@ -989,7 +989,7 @@
           </a:p>
           <a:p>
             <a:r>
-              <a:t>Before they code, ask: where is the library connected to the game, and which way does the reference point? Answer: the ProjectReference in the game’s .csproj; the game knows the library, never the other way round. So nothing in Core may mention Flappy.</a:t>
+              <a:t>Before they code, ask: where is the library connected to the game, and which way does the reference point? Answer: the ProjectReference in the game’s .csproj; the game knows the library, never the other way round. Nothing in Core may therefore mention Flappy.</a:t>
             </a:r>
           </a:p>
           <a:p>
@@ -27442,312 +27442,6 @@
             </a:pPr>
             <a:r>
               <a:rPr lang="en"/>
-              <a:t>Check Yourself</a:t>
-            </a:r>
-            <a:endParaRPr/>
-          </a:p>
-        </p:txBody>
-      </p:sp>
-      <p:sp>
-        <p:nvSpPr>
-          <p:cNvPr id="3" name="Text Placeholder 2"/>
-          <p:cNvSpPr>
-            <a:spLocks noGrp="1"/>
-          </p:cNvSpPr>
-          <p:nvPr>
-            <p:ph type="body" idx="1"/>
-          </p:nvPr>
-        </p:nvSpPr>
-        <p:spPr>
-          <a:xfrm>
-            <a:off x="311700" y="885950"/>
-            <a:ext cx="8520600" cy="1335024"/>
-          </a:xfrm>
-        </p:spPr>
-        <p:txBody>
-          <a:bodyPr/>
-          <a:lstStyle/>
-          <a:p>
-            <a:pPr indent="-330200" lvl="0" marL="457200" rtl="0" algn="l">
-              <a:spcBef>
-                <a:spcPts val="0"/>
-              </a:spcBef>
-              <a:spcAft>
-                <a:spcPts val="0"/>
-              </a:spcAft>
-              <a:buSzPts val="1600"/>
-              <a:buChar char="●"/>
-            </a:pPr>
-            <a:r>
-              <a:rPr lang="en"/>
-              <a:t>What problem does a state machine solve compared to a string or enum field?</a:t>
-            </a:r>
-            <a:endParaRPr/>
-          </a:p>
-          <a:p>
-            <a:pPr indent="-330200" lvl="0" marL="457200" rtl="0" algn="l">
-              <a:spcBef>
-                <a:spcPts val="0"/>
-              </a:spcBef>
-              <a:spcAft>
-                <a:spcPts val="0"/>
-              </a:spcAft>
-              <a:buSzPts val="1600"/>
-              <a:buChar char="●"/>
-            </a:pPr>
-            <a:r>
-              <a:rPr lang="en"/>
-              <a:t>What happens if you forget to call Exit() when switching state?</a:t>
-            </a:r>
-            <a:endParaRPr/>
-          </a:p>
-          <a:p>
-            <a:pPr indent="-330200" lvl="0" marL="457200" rtl="0" algn="l">
-              <a:spcBef>
-                <a:spcPts val="0"/>
-              </a:spcBef>
-              <a:spcAft>
-                <a:spcPts val="0"/>
-              </a:spcAft>
-              <a:buSzPts val="1600"/>
-              <a:buChar char="●"/>
-            </a:pPr>
-            <a:r>
-              <a:rPr lang="en"/>
-              <a:t>Why is Singleton considered an anti-pattern by many game programmers?</a:t>
-            </a:r>
-            <a:endParaRPr/>
-          </a:p>
-        </p:txBody>
-      </p:sp>
-      <p:sp>
-        <p:nvSpPr>
-          <p:cNvPr id="4" name="TextBox 3"/>
-          <p:cNvSpPr txBox="1"/>
-          <p:nvPr/>
-        </p:nvSpPr>
-        <p:spPr>
-          <a:xfrm>
-            <a:off x="457200" y="2798064"/>
-            <a:ext cx="8229600" cy="457200"/>
-          </a:xfrm>
-          <a:prstGeom prst="rect">
-            <a:avLst/>
-          </a:prstGeom>
-          <a:noFill/>
-        </p:spPr>
-        <p:txBody>
-          <a:bodyPr wrap="square">
-            <a:spAutoFit/>
-          </a:bodyPr>
-          <a:lstStyle/>
-          <a:p>
-            <a:pPr algn="ctr"/>
-            <a:r>
-              <a:rPr sz="1400" b="0" i="0">
-                <a:solidFill>
-                  <a:srgbClr val="9AA3AB"/>
-                </a:solidFill>
-              </a:rPr>
-              <a:t>The answers, and more questions, are on the course site.</a:t>
-            </a:r>
-          </a:p>
-        </p:txBody>
-      </p:sp>
-    </p:spTree>
-  </p:cSld>
-  <p:clrMapOvr>
-    <a:masterClrMapping/>
-  </p:clrMapOvr>
-</p:sld>
-</file>
-
-<file path=ppt/slides/slide44.xml><?xml version="1.0" encoding="utf-8"?>
-<p:sld xmlns:a="http://schemas.openxmlformats.org/drawingml/2006/main" xmlns:p="http://schemas.openxmlformats.org/presentationml/2006/main" xmlns:r="http://schemas.openxmlformats.org/officeDocument/2006/relationships">
-  <p:cSld>
-    <p:spTree>
-      <p:nvGrpSpPr>
-        <p:cNvPr id="1" name=""/>
-        <p:cNvGrpSpPr/>
-        <p:nvPr/>
-      </p:nvGrpSpPr>
-      <p:grpSpPr/>
-      <p:sp>
-        <p:nvSpPr>
-          <p:cNvPr id="57" name="Google Shape;57;p12"/>
-          <p:cNvSpPr txBox="1"/>
-          <p:nvPr>
-            <p:ph type="title"/>
-          </p:nvPr>
-        </p:nvSpPr>
-        <p:spPr>
-          <a:xfrm>
-            <a:off x="311700" y="195615"/>
-            <a:ext cx="8520600" cy="572700"/>
-          </a:xfrm>
-          <a:prstGeom prst="rect">
-            <a:avLst/>
-          </a:prstGeom>
-        </p:spPr>
-        <p:txBody>
-          <a:bodyPr anchorCtr="0" anchor="t" bIns="91425" lIns="91425" spcFirstLastPara="1" rIns="91425" wrap="square" tIns="91425">
-            <a:normAutofit fontScale="90000"/>
-          </a:bodyPr>
-          <a:lstStyle/>
-          <a:p>
-            <a:pPr indent="0" lvl="0" marL="0" rtl="0" algn="l">
-              <a:spcBef>
-                <a:spcPts val="0"/>
-              </a:spcBef>
-              <a:spcAft>
-                <a:spcPts val="0"/>
-              </a:spcAft>
-              <a:buNone/>
-            </a:pPr>
-            <a:r>
-              <a:rPr lang="en"/>
-              <a:t>Apply It to Your Project</a:t>
-            </a:r>
-            <a:endParaRPr/>
-          </a:p>
-        </p:txBody>
-      </p:sp>
-      <p:sp>
-        <p:nvSpPr>
-          <p:cNvPr id="58" name="Google Shape;58;p12"/>
-          <p:cNvSpPr txBox="1"/>
-          <p:nvPr>
-            <p:ph idx="1" type="body"/>
-          </p:nvPr>
-        </p:nvSpPr>
-        <p:spPr>
-          <a:xfrm>
-            <a:off x="311700" y="885950"/>
-            <a:ext cx="8520600" cy="4023300"/>
-          </a:xfrm>
-          <a:prstGeom prst="rect">
-            <a:avLst/>
-          </a:prstGeom>
-        </p:spPr>
-        <p:txBody>
-          <a:bodyPr anchorCtr="0" anchor="t" bIns="91425" lIns="91425" spcFirstLastPara="1" rIns="91425" wrap="square" tIns="91425">
-            <a:normAutofit/>
-          </a:bodyPr>
-          <a:lstStyle/>
-          <a:p>
-            <a:pPr indent="-330200" lvl="0" marL="457200" rtl="0" algn="l">
-              <a:spcBef>
-                <a:spcPts val="0"/>
-              </a:spcBef>
-              <a:spcAft>
-                <a:spcPts val="0"/>
-              </a:spcAft>
-              <a:buSzPts val="1600"/>
-              <a:buChar char="●"/>
-            </a:pPr>
-            <a:r>
-              <a:rPr lang="en"/>
-              <a:t>Which code in your game could another game reuse?</a:t>
-            </a:r>
-            <a:endParaRPr/>
-          </a:p>
-          <a:p>
-            <a:pPr indent="-317500" lvl="1" marL="914400" rtl="0" algn="l">
-              <a:spcBef>
-                <a:spcPts val="0"/>
-              </a:spcBef>
-              <a:spcAft>
-                <a:spcPts val="0"/>
-              </a:spcAft>
-              <a:buSzPts val="1400"/>
-              <a:buChar char="○"/>
-            </a:pPr>
-            <a:r>
-              <a:rPr lang="en"/>
-              <a:t>That belongs in a class library, like GARCore</a:t>
-            </a:r>
-            <a:endParaRPr/>
-          </a:p>
-          <a:p>
-            <a:pPr indent="-330200" lvl="0" marL="457200" rtl="0" algn="l">
-              <a:spcBef>
-                <a:spcPts val="0"/>
-              </a:spcBef>
-              <a:spcAft>
-                <a:spcPts val="0"/>
-              </a:spcAft>
-              <a:buSzPts val="1600"/>
-              <a:buChar char="●"/>
-            </a:pPr>
-            <a:r>
-              <a:rPr lang="en"/>
-              <a:t>Which states does your game have? Draw them as a state diagram</a:t>
-            </a:r>
-            <a:endParaRPr/>
-          </a:p>
-          <a:p>
-            <a:pPr indent="-330200" lvl="0" marL="457200" rtl="0" algn="l">
-              <a:spcBef>
-                <a:spcPts val="0"/>
-              </a:spcBef>
-              <a:spcAft>
-                <a:spcPts val="0"/>
-              </a:spcAft>
-              <a:buSzPts val="1600"/>
-              <a:buChar char="●"/>
-            </a:pPr>
-            <a:r>
-              <a:rPr lang="en"/>
-              <a:t>Is anything in your game global? Does it need to be?</a:t>
-            </a:r>
-            <a:endParaRPr/>
-          </a:p>
-        </p:txBody>
-      </p:sp>
-    </p:spTree>
-  </p:cSld>
-  <p:clrMapOvr>
-    <a:masterClrMapping/>
-  </p:clrMapOvr>
-</p:sld>
-</file>
-
-<file path=ppt/slides/slide45.xml><?xml version="1.0" encoding="utf-8"?>
-<p:sld xmlns:a="http://schemas.openxmlformats.org/drawingml/2006/main" xmlns:p="http://schemas.openxmlformats.org/presentationml/2006/main" xmlns:r="http://schemas.openxmlformats.org/officeDocument/2006/relationships">
-  <p:cSld>
-    <p:spTree>
-      <p:nvGrpSpPr>
-        <p:cNvPr id="1" name=""/>
-        <p:cNvGrpSpPr/>
-        <p:nvPr/>
-      </p:nvGrpSpPr>
-      <p:grpSpPr/>
-      <p:sp>
-        <p:nvSpPr>
-          <p:cNvPr id="2" name="Title 1"/>
-          <p:cNvSpPr>
-            <a:spLocks noGrp="1"/>
-          </p:cNvSpPr>
-          <p:nvPr>
-            <p:ph type="title"/>
-          </p:nvPr>
-        </p:nvSpPr>
-        <p:spPr/>
-        <p:txBody>
-          <a:bodyPr/>
-          <a:lstStyle/>
-          <a:p>
-            <a:pPr indent="0" lvl="0" marL="0" rtl="0" algn="l">
-              <a:spcBef>
-                <a:spcPts val="0"/>
-              </a:spcBef>
-              <a:spcAft>
-                <a:spcPts val="0"/>
-              </a:spcAft>
-              <a:buNone/>
-            </a:pPr>
-            <a:r>
-              <a:rPr lang="en"/>
               <a:t>The Whole Game</a:t>
             </a:r>
             <a:endParaRPr/>
@@ -28553,7 +28247,7 @@
 </p:sld>
 </file>
 
-<file path=ppt/slides/slide46.xml><?xml version="1.0" encoding="utf-8"?>
+<file path=ppt/slides/slide44.xml><?xml version="1.0" encoding="utf-8"?>
 <p:sld xmlns:a="http://schemas.openxmlformats.org/drawingml/2006/main" xmlns:p="http://schemas.openxmlformats.org/presentationml/2006/main" xmlns:r="http://schemas.openxmlformats.org/officeDocument/2006/relationships">
   <p:cSld>
     <p:spTree>
@@ -29020,6 +28714,312 @@
               </a:rPr>
               <a:t>Singleton, and what it costs</a:t>
             </a:r>
+          </a:p>
+        </p:txBody>
+      </p:sp>
+    </p:spTree>
+  </p:cSld>
+  <p:clrMapOvr>
+    <a:masterClrMapping/>
+  </p:clrMapOvr>
+</p:sld>
+</file>
+
+<file path=ppt/slides/slide45.xml><?xml version="1.0" encoding="utf-8"?>
+<p:sld xmlns:a="http://schemas.openxmlformats.org/drawingml/2006/main" xmlns:p="http://schemas.openxmlformats.org/presentationml/2006/main" xmlns:r="http://schemas.openxmlformats.org/officeDocument/2006/relationships">
+  <p:cSld>
+    <p:spTree>
+      <p:nvGrpSpPr>
+        <p:cNvPr id="1" name=""/>
+        <p:cNvGrpSpPr/>
+        <p:nvPr/>
+      </p:nvGrpSpPr>
+      <p:grpSpPr/>
+      <p:sp>
+        <p:nvSpPr>
+          <p:cNvPr id="2" name="Title 1"/>
+          <p:cNvSpPr>
+            <a:spLocks noGrp="1"/>
+          </p:cNvSpPr>
+          <p:nvPr>
+            <p:ph type="title"/>
+          </p:nvPr>
+        </p:nvSpPr>
+        <p:spPr/>
+        <p:txBody>
+          <a:bodyPr/>
+          <a:lstStyle/>
+          <a:p>
+            <a:pPr indent="0" lvl="0" marL="0" rtl="0" algn="l">
+              <a:spcBef>
+                <a:spcPts val="0"/>
+              </a:spcBef>
+              <a:spcAft>
+                <a:spcPts val="0"/>
+              </a:spcAft>
+              <a:buNone/>
+            </a:pPr>
+            <a:r>
+              <a:rPr lang="en"/>
+              <a:t>Check Yourself</a:t>
+            </a:r>
+            <a:endParaRPr/>
+          </a:p>
+        </p:txBody>
+      </p:sp>
+      <p:sp>
+        <p:nvSpPr>
+          <p:cNvPr id="3" name="Text Placeholder 2"/>
+          <p:cNvSpPr>
+            <a:spLocks noGrp="1"/>
+          </p:cNvSpPr>
+          <p:nvPr>
+            <p:ph type="body" idx="1"/>
+          </p:nvPr>
+        </p:nvSpPr>
+        <p:spPr>
+          <a:xfrm>
+            <a:off x="311700" y="885950"/>
+            <a:ext cx="8520600" cy="1335024"/>
+          </a:xfrm>
+        </p:spPr>
+        <p:txBody>
+          <a:bodyPr/>
+          <a:lstStyle/>
+          <a:p>
+            <a:pPr indent="-330200" lvl="0" marL="457200" rtl="0" algn="l">
+              <a:spcBef>
+                <a:spcPts val="0"/>
+              </a:spcBef>
+              <a:spcAft>
+                <a:spcPts val="0"/>
+              </a:spcAft>
+              <a:buSzPts val="1600"/>
+              <a:buChar char="●"/>
+            </a:pPr>
+            <a:r>
+              <a:rPr lang="en"/>
+              <a:t>What problem does a state machine solve compared to a string or enum field?</a:t>
+            </a:r>
+            <a:endParaRPr/>
+          </a:p>
+          <a:p>
+            <a:pPr indent="-330200" lvl="0" marL="457200" rtl="0" algn="l">
+              <a:spcBef>
+                <a:spcPts val="0"/>
+              </a:spcBef>
+              <a:spcAft>
+                <a:spcPts val="0"/>
+              </a:spcAft>
+              <a:buSzPts val="1600"/>
+              <a:buChar char="●"/>
+            </a:pPr>
+            <a:r>
+              <a:rPr lang="en"/>
+              <a:t>What happens if you forget to call Exit() when switching state?</a:t>
+            </a:r>
+            <a:endParaRPr/>
+          </a:p>
+          <a:p>
+            <a:pPr indent="-330200" lvl="0" marL="457200" rtl="0" algn="l">
+              <a:spcBef>
+                <a:spcPts val="0"/>
+              </a:spcBef>
+              <a:spcAft>
+                <a:spcPts val="0"/>
+              </a:spcAft>
+              <a:buSzPts val="1600"/>
+              <a:buChar char="●"/>
+            </a:pPr>
+            <a:r>
+              <a:rPr lang="en"/>
+              <a:t>Why is Singleton considered an anti-pattern by many game programmers?</a:t>
+            </a:r>
+            <a:endParaRPr/>
+          </a:p>
+        </p:txBody>
+      </p:sp>
+      <p:sp>
+        <p:nvSpPr>
+          <p:cNvPr id="4" name="TextBox 3"/>
+          <p:cNvSpPr txBox="1"/>
+          <p:nvPr/>
+        </p:nvSpPr>
+        <p:spPr>
+          <a:xfrm>
+            <a:off x="457200" y="2798064"/>
+            <a:ext cx="8229600" cy="457200"/>
+          </a:xfrm>
+          <a:prstGeom prst="rect">
+            <a:avLst/>
+          </a:prstGeom>
+          <a:noFill/>
+        </p:spPr>
+        <p:txBody>
+          <a:bodyPr wrap="square">
+            <a:spAutoFit/>
+          </a:bodyPr>
+          <a:lstStyle/>
+          <a:p>
+            <a:pPr algn="ctr"/>
+            <a:r>
+              <a:rPr sz="1400" b="0" i="0">
+                <a:solidFill>
+                  <a:srgbClr val="9AA3AB"/>
+                </a:solidFill>
+              </a:rPr>
+              <a:t>The answers, and more questions, are on the course site.</a:t>
+            </a:r>
+          </a:p>
+        </p:txBody>
+      </p:sp>
+    </p:spTree>
+  </p:cSld>
+  <p:clrMapOvr>
+    <a:masterClrMapping/>
+  </p:clrMapOvr>
+</p:sld>
+</file>
+
+<file path=ppt/slides/slide46.xml><?xml version="1.0" encoding="utf-8"?>
+<p:sld xmlns:a="http://schemas.openxmlformats.org/drawingml/2006/main" xmlns:p="http://schemas.openxmlformats.org/presentationml/2006/main" xmlns:r="http://schemas.openxmlformats.org/officeDocument/2006/relationships">
+  <p:cSld>
+    <p:spTree>
+      <p:nvGrpSpPr>
+        <p:cNvPr id="1" name=""/>
+        <p:cNvGrpSpPr/>
+        <p:nvPr/>
+      </p:nvGrpSpPr>
+      <p:grpSpPr/>
+      <p:sp>
+        <p:nvSpPr>
+          <p:cNvPr id="57" name="Google Shape;57;p12"/>
+          <p:cNvSpPr txBox="1"/>
+          <p:nvPr>
+            <p:ph type="title"/>
+          </p:nvPr>
+        </p:nvSpPr>
+        <p:spPr>
+          <a:xfrm>
+            <a:off x="311700" y="195615"/>
+            <a:ext cx="8520600" cy="572700"/>
+          </a:xfrm>
+          <a:prstGeom prst="rect">
+            <a:avLst/>
+          </a:prstGeom>
+        </p:spPr>
+        <p:txBody>
+          <a:bodyPr anchorCtr="0" anchor="t" bIns="91425" lIns="91425" spcFirstLastPara="1" rIns="91425" wrap="square" tIns="91425">
+            <a:normAutofit fontScale="90000"/>
+          </a:bodyPr>
+          <a:lstStyle/>
+          <a:p>
+            <a:pPr indent="0" lvl="0" marL="0" rtl="0" algn="l">
+              <a:spcBef>
+                <a:spcPts val="0"/>
+              </a:spcBef>
+              <a:spcAft>
+                <a:spcPts val="0"/>
+              </a:spcAft>
+              <a:buNone/>
+            </a:pPr>
+            <a:r>
+              <a:rPr lang="en"/>
+              <a:t>Apply It to Your Project</a:t>
+            </a:r>
+            <a:endParaRPr/>
+          </a:p>
+        </p:txBody>
+      </p:sp>
+      <p:sp>
+        <p:nvSpPr>
+          <p:cNvPr id="58" name="Google Shape;58;p12"/>
+          <p:cNvSpPr txBox="1"/>
+          <p:nvPr>
+            <p:ph idx="1" type="body"/>
+          </p:nvPr>
+        </p:nvSpPr>
+        <p:spPr>
+          <a:xfrm>
+            <a:off x="311700" y="885950"/>
+            <a:ext cx="8520600" cy="4023300"/>
+          </a:xfrm>
+          <a:prstGeom prst="rect">
+            <a:avLst/>
+          </a:prstGeom>
+        </p:spPr>
+        <p:txBody>
+          <a:bodyPr anchorCtr="0" anchor="t" bIns="91425" lIns="91425" spcFirstLastPara="1" rIns="91425" wrap="square" tIns="91425">
+            <a:normAutofit/>
+          </a:bodyPr>
+          <a:lstStyle/>
+          <a:p>
+            <a:pPr indent="-330200" lvl="0" marL="457200" rtl="0" algn="l">
+              <a:spcBef>
+                <a:spcPts val="0"/>
+              </a:spcBef>
+              <a:spcAft>
+                <a:spcPts val="0"/>
+              </a:spcAft>
+              <a:buSzPts val="1600"/>
+              <a:buChar char="●"/>
+            </a:pPr>
+            <a:r>
+              <a:rPr lang="en"/>
+              <a:t>Which code in your game could another game reuse?</a:t>
+            </a:r>
+            <a:endParaRPr/>
+          </a:p>
+          <a:p>
+            <a:pPr indent="-317500" lvl="1" marL="914400" rtl="0" algn="l">
+              <a:spcBef>
+                <a:spcPts val="0"/>
+              </a:spcBef>
+              <a:spcAft>
+                <a:spcPts val="0"/>
+              </a:spcAft>
+              <a:buSzPts val="1400"/>
+              <a:buChar char="○"/>
+            </a:pPr>
+            <a:r>
+              <a:rPr lang="en"/>
+              <a:t>That belongs in a class library, like GARCore</a:t>
+            </a:r>
+            <a:endParaRPr/>
+          </a:p>
+          <a:p>
+            <a:pPr indent="-330200" lvl="0" marL="457200" rtl="0" algn="l">
+              <a:spcBef>
+                <a:spcPts val="0"/>
+              </a:spcBef>
+              <a:spcAft>
+                <a:spcPts val="0"/>
+              </a:spcAft>
+              <a:buSzPts val="1600"/>
+              <a:buChar char="●"/>
+            </a:pPr>
+            <a:r>
+              <a:rPr lang="en"/>
+              <a:t>Which states does your game have? Draw them as a state diagram</a:t>
+            </a:r>
+            <a:endParaRPr/>
+          </a:p>
+          <a:p>
+            <a:pPr indent="-330200" lvl="0" marL="457200" rtl="0" algn="l">
+              <a:spcBef>
+                <a:spcPts val="0"/>
+              </a:spcBef>
+              <a:spcAft>
+                <a:spcPts val="0"/>
+              </a:spcAft>
+              <a:buSzPts val="1600"/>
+              <a:buChar char="●"/>
+            </a:pPr>
+            <a:r>
+              <a:rPr lang="en"/>
+              <a:t>Is anything in your game global? Does it need to be?</a:t>
+            </a:r>
+            <a:endParaRPr/>
           </a:p>
         </p:txBody>
       </p:sp>
